--- a/hec-pt/pptx/landscape.pptx
+++ b/hec-pt/pptx/landscape.pptx
@@ -1179,144 +1179,23 @@
       </p:pic>
       <p:sp>
         <p:nvSpPr>
-          <p:cNvPr id="8" name="chip tech"/>
-          <p:cNvSpPr/>
-          <p:nvPr/>
-        </p:nvSpPr>
-        <p:spPr>
-          <a:xfrm>
-            <a:off x="1889026" y="1814314"/>
-            <a:ext cx="1339155" cy="279400"/>
+          <p:cNvPr id="8" name="p1-proj"/>
+          <p:cNvSpPr/>
+          <p:nvPr/>
+        </p:nvSpPr>
+        <p:spPr>
+          <a:xfrm>
+            <a:off x="615950" y="1820664"/>
+            <a:ext cx="10960100" cy="1294011"/>
           </a:xfrm>
           <a:prstGeom prst="roundRect">
             <a:avLst>
-              <a:gd name="adj" fmla="val 50000"/>
+              <a:gd name="adj" fmla="val 10305"/>
             </a:avLst>
           </a:prstGeom>
           <a:solidFill>
-            <a:srgbClr val="EEF4FC"/>
-          </a:solidFill>
-          <a:ln/>
-        </p:spPr>
-      </p:sp>
-      <p:sp>
-        <p:nvSpPr>
-          <p:cNvPr id="9" name="chip people"/>
-          <p:cNvSpPr/>
-          <p:nvPr/>
-        </p:nvSpPr>
-        <p:spPr>
-          <a:xfrm>
-            <a:off x="3317081" y="1814314"/>
-            <a:ext cx="1344414" cy="279400"/>
-          </a:xfrm>
-          <a:prstGeom prst="roundRect">
-            <a:avLst>
-              <a:gd name="adj" fmla="val 50000"/>
-            </a:avLst>
-          </a:prstGeom>
-          <a:solidFill>
-            <a:srgbClr val="E5F6EC"/>
-          </a:solidFill>
-          <a:ln/>
-        </p:spPr>
-      </p:sp>
-      <p:sp>
-        <p:nvSpPr>
-          <p:cNvPr id="10" name="i"/>
-          <p:cNvSpPr/>
-          <p:nvPr/>
-        </p:nvSpPr>
-        <p:spPr>
-          <a:xfrm>
-            <a:off x="3444081" y="1925439"/>
-            <a:ext cx="57150" cy="57150"/>
-          </a:xfrm>
-          <a:prstGeom prst="ellipse">
-            <a:avLst/>
-          </a:prstGeom>
-          <a:solidFill>
-            <a:srgbClr val="00A94F"/>
-          </a:solidFill>
-          <a:ln/>
-        </p:spPr>
-      </p:sp>
-      <p:sp>
-        <p:nvSpPr>
-          <p:cNvPr id="11" name="i"/>
-          <p:cNvSpPr/>
-          <p:nvPr/>
-        </p:nvSpPr>
-        <p:spPr>
-          <a:xfrm>
-            <a:off x="3526631" y="1925439"/>
-            <a:ext cx="57150" cy="57150"/>
-          </a:xfrm>
-          <a:prstGeom prst="ellipse">
-            <a:avLst/>
-          </a:prstGeom>
-          <a:solidFill>
-            <a:srgbClr val="00A94F"/>
-          </a:solidFill>
-          <a:ln/>
-        </p:spPr>
-      </p:sp>
-      <p:sp>
-        <p:nvSpPr>
-          <p:cNvPr id="12" name="i"/>
-          <p:cNvSpPr/>
-          <p:nvPr/>
-        </p:nvSpPr>
-        <p:spPr>
-          <a:xfrm>
-            <a:off x="3609181" y="1925439"/>
-            <a:ext cx="57150" cy="57150"/>
-          </a:xfrm>
-          <a:prstGeom prst="ellipse">
-            <a:avLst/>
-          </a:prstGeom>
-          <a:solidFill>
-            <a:srgbClr val="00A94F"/>
-          </a:solidFill>
-          <a:ln/>
-        </p:spPr>
-      </p:sp>
-      <p:sp>
-        <p:nvSpPr>
-          <p:cNvPr id="13" name="i"/>
-          <p:cNvSpPr/>
-          <p:nvPr/>
-        </p:nvSpPr>
-        <p:spPr>
-          <a:xfrm>
-            <a:off x="3691731" y="1925439"/>
-            <a:ext cx="57150" cy="57150"/>
-          </a:xfrm>
-          <a:prstGeom prst="ellipse">
-            <a:avLst/>
-          </a:prstGeom>
-          <a:solidFill>
-            <a:srgbClr val="00A94F"/>
-          </a:solidFill>
-          <a:ln/>
-        </p:spPr>
-      </p:sp>
-      <p:sp>
-        <p:nvSpPr>
-          <p:cNvPr id="14" name="chip ghost"/>
-          <p:cNvSpPr/>
-          <p:nvPr/>
-        </p:nvSpPr>
-        <p:spPr>
-          <a:xfrm>
-            <a:off x="4756745" y="1820664"/>
-            <a:ext cx="1855490" cy="266700"/>
-          </a:xfrm>
-          <a:prstGeom prst="roundRect">
-            <a:avLst>
-              <a:gd name="adj" fmla="val 50000"/>
-            </a:avLst>
-          </a:prstGeom>
+            <a:srgbClr val="FFFFFF"/>
+          </a:solidFill>
           <a:ln w="12700">
             <a:solidFill>
               <a:srgbClr val="D8E0EB"/>
@@ -1325,9 +1204,153 @@
           </a:ln>
         </p:spPr>
       </p:sp>
+      <p:sp>
+        <p:nvSpPr>
+          <p:cNvPr id="9" name="chip tech"/>
+          <p:cNvSpPr/>
+          <p:nvPr/>
+        </p:nvSpPr>
+        <p:spPr>
+          <a:xfrm>
+            <a:off x="1663898" y="1941314"/>
+            <a:ext cx="1115020" cy="215900"/>
+          </a:xfrm>
+          <a:prstGeom prst="roundRect">
+            <a:avLst>
+              <a:gd name="adj" fmla="val 50000"/>
+            </a:avLst>
+          </a:prstGeom>
+          <a:solidFill>
+            <a:srgbClr val="EEF4FC"/>
+          </a:solidFill>
+          <a:ln/>
+        </p:spPr>
+      </p:sp>
+      <p:sp>
+        <p:nvSpPr>
+          <p:cNvPr id="10" name="chip people"/>
+          <p:cNvSpPr/>
+          <p:nvPr/>
+        </p:nvSpPr>
+        <p:spPr>
+          <a:xfrm>
+            <a:off x="2842419" y="1941314"/>
+            <a:ext cx="1131689" cy="215900"/>
+          </a:xfrm>
+          <a:prstGeom prst="roundRect">
+            <a:avLst>
+              <a:gd name="adj" fmla="val 50000"/>
+            </a:avLst>
+          </a:prstGeom>
+          <a:solidFill>
+            <a:srgbClr val="E5F6EC"/>
+          </a:solidFill>
+          <a:ln/>
+        </p:spPr>
+      </p:sp>
+      <p:sp>
+        <p:nvSpPr>
+          <p:cNvPr id="11" name="i"/>
+          <p:cNvSpPr/>
+          <p:nvPr/>
+        </p:nvSpPr>
+        <p:spPr>
+          <a:xfrm>
+            <a:off x="2931319" y="2023864"/>
+            <a:ext cx="50800" cy="50800"/>
+          </a:xfrm>
+          <a:prstGeom prst="ellipse">
+            <a:avLst/>
+          </a:prstGeom>
+          <a:solidFill>
+            <a:srgbClr val="00A94F"/>
+          </a:solidFill>
+          <a:ln/>
+        </p:spPr>
+      </p:sp>
+      <p:sp>
+        <p:nvSpPr>
+          <p:cNvPr id="12" name="i"/>
+          <p:cNvSpPr/>
+          <p:nvPr/>
+        </p:nvSpPr>
+        <p:spPr>
+          <a:xfrm>
+            <a:off x="3007519" y="2023864"/>
+            <a:ext cx="50800" cy="50800"/>
+          </a:xfrm>
+          <a:prstGeom prst="ellipse">
+            <a:avLst/>
+          </a:prstGeom>
+          <a:solidFill>
+            <a:srgbClr val="00A94F"/>
+          </a:solidFill>
+          <a:ln/>
+        </p:spPr>
+      </p:sp>
+      <p:sp>
+        <p:nvSpPr>
+          <p:cNvPr id="13" name="i"/>
+          <p:cNvSpPr/>
+          <p:nvPr/>
+        </p:nvSpPr>
+        <p:spPr>
+          <a:xfrm>
+            <a:off x="3083719" y="2023864"/>
+            <a:ext cx="50800" cy="50800"/>
+          </a:xfrm>
+          <a:prstGeom prst="ellipse">
+            <a:avLst/>
+          </a:prstGeom>
+          <a:solidFill>
+            <a:srgbClr val="00A94F"/>
+          </a:solidFill>
+          <a:ln/>
+        </p:spPr>
+      </p:sp>
+      <p:sp>
+        <p:nvSpPr>
+          <p:cNvPr id="14" name="i"/>
+          <p:cNvSpPr/>
+          <p:nvPr/>
+        </p:nvSpPr>
+        <p:spPr>
+          <a:xfrm>
+            <a:off x="3159919" y="2023864"/>
+            <a:ext cx="50800" cy="50800"/>
+          </a:xfrm>
+          <a:prstGeom prst="ellipse">
+            <a:avLst/>
+          </a:prstGeom>
+          <a:solidFill>
+            <a:srgbClr val="00A94F"/>
+          </a:solidFill>
+          <a:ln/>
+        </p:spPr>
+      </p:sp>
+      <p:sp>
+        <p:nvSpPr>
+          <p:cNvPr id="15" name="p1-sep"/>
+          <p:cNvSpPr/>
+          <p:nvPr/>
+        </p:nvSpPr>
+        <p:spPr>
+          <a:xfrm>
+            <a:off x="5930900" y="1941314"/>
+            <a:ext cx="12700" cy="1040011"/>
+          </a:xfrm>
+          <a:prstGeom prst="rect">
+            <a:avLst/>
+          </a:prstGeom>
+          <a:solidFill>
+            <a:srgbClr val="D8E0EB"/>
+          </a:solidFill>
+          <a:ln/>
+        </p:spPr>
+      </p:sp>
       <p:pic>
         <p:nvPicPr>
-          <p:cNvPr id="15" name="svg" descr="svg">    </p:cNvPr>
+          <p:cNvPr id="16" name="p1-flow-line" descr="p1-flow-line">    </p:cNvPr>
           <p:cNvPicPr>
             <a:picLocks noChangeAspect="1"/>
           </p:cNvPicPr>
@@ -1341,39 +1364,17 @@
         </p:blipFill>
         <p:spPr>
           <a:xfrm>
-            <a:off x="4896445" y="1898981"/>
-            <a:ext cx="114300" cy="114300"/>
+            <a:off x="6781800" y="2053497"/>
+            <a:ext cx="3810000" cy="135467"/>
           </a:xfrm>
           <a:prstGeom prst="rect">
             <a:avLst/>
           </a:prstGeom>
         </p:spPr>
       </p:pic>
-      <p:sp>
-        <p:nvSpPr>
-          <p:cNvPr id="16" name="p1-panel"/>
-          <p:cNvSpPr/>
-          <p:nvPr/>
-        </p:nvSpPr>
-        <p:spPr>
-          <a:xfrm>
-            <a:off x="609600" y="2271514"/>
-            <a:ext cx="2590800" cy="1663700"/>
-          </a:xfrm>
-          <a:prstGeom prst="roundRect">
-            <a:avLst>
-              <a:gd name="adj" fmla="val 8397"/>
-            </a:avLst>
-          </a:prstGeom>
-          <a:solidFill>
-            <a:srgbClr val="EEF4FC"/>
-          </a:solidFill>
-          <a:ln/>
-        </p:spPr>
-      </p:sp>
       <p:pic>
         <p:nvPicPr>
-          <p:cNvPr id="17" name="svg" descr="svg">    </p:cNvPr>
+          <p:cNvPr id="17" name="ring" descr="ring">    </p:cNvPr>
           <p:cNvPicPr>
             <a:picLocks noChangeAspect="1"/>
           </p:cNvPicPr>
@@ -1387,83 +1388,17 @@
         </p:blipFill>
         <p:spPr>
           <a:xfrm>
-            <a:off x="846667" y="2648281"/>
-            <a:ext cx="2116667" cy="571500"/>
+            <a:off x="6603950" y="1943431"/>
+            <a:ext cx="357717" cy="355600"/>
           </a:xfrm>
           <a:prstGeom prst="rect">
             <a:avLst/>
           </a:prstGeom>
         </p:spPr>
       </p:pic>
-      <p:sp>
-        <p:nvSpPr>
-          <p:cNvPr id="18" name="p1-lbl p1-pill"/>
-          <p:cNvSpPr/>
-          <p:nvPr/>
-        </p:nvSpPr>
-        <p:spPr>
-          <a:xfrm>
-            <a:off x="1004590" y="3373239"/>
-            <a:ext cx="480020" cy="209550"/>
-          </a:xfrm>
-          <a:prstGeom prst="roundRect">
-            <a:avLst>
-              <a:gd name="adj" fmla="val 50000"/>
-            </a:avLst>
-          </a:prstGeom>
-          <a:solidFill>
-            <a:srgbClr val="FFFFFF"/>
-          </a:solidFill>
-          <a:ln/>
-        </p:spPr>
-      </p:sp>
-      <p:sp>
-        <p:nvSpPr>
-          <p:cNvPr id="19" name="p1-lbl p1-pill"/>
-          <p:cNvSpPr/>
-          <p:nvPr/>
-        </p:nvSpPr>
-        <p:spPr>
-          <a:xfrm>
-            <a:off x="2207766" y="3373239"/>
-            <a:ext cx="715268" cy="209550"/>
-          </a:xfrm>
-          <a:prstGeom prst="roundRect">
-            <a:avLst>
-              <a:gd name="adj" fmla="val 50000"/>
-            </a:avLst>
-          </a:prstGeom>
-          <a:solidFill>
-            <a:srgbClr val="FFFFFF"/>
-          </a:solidFill>
-          <a:ln/>
-        </p:spPr>
-      </p:sp>
-      <p:sp>
-        <p:nvSpPr>
-          <p:cNvPr id="20" name="p1-panel"/>
-          <p:cNvSpPr/>
-          <p:nvPr/>
-        </p:nvSpPr>
-        <p:spPr>
-          <a:xfrm>
-            <a:off x="3403600" y="2271514"/>
-            <a:ext cx="2590800" cy="1663700"/>
-          </a:xfrm>
-          <a:prstGeom prst="roundRect">
-            <a:avLst>
-              <a:gd name="adj" fmla="val 8397"/>
-            </a:avLst>
-          </a:prstGeom>
-          <a:solidFill>
-            <a:srgbClr val="EEF4FC"/>
-          </a:solidFill>
-          <a:ln/>
-        </p:spPr>
-      </p:sp>
       <p:pic>
         <p:nvPicPr>
-          <p:cNvPr id="21" name="svg" descr="svg">    </p:cNvPr>
+          <p:cNvPr id="18" name="svg" descr="svg">    </p:cNvPr>
           <p:cNvPicPr>
             <a:picLocks noChangeAspect="1"/>
           </p:cNvPicPr>
@@ -1477,39 +1412,17 @@
         </p:blipFill>
         <p:spPr>
           <a:xfrm>
-            <a:off x="3727450" y="2527631"/>
-            <a:ext cx="1943100" cy="1155700"/>
+            <a:off x="6711900" y="2051381"/>
+            <a:ext cx="141817" cy="139700"/>
           </a:xfrm>
           <a:prstGeom prst="rect">
             <a:avLst/>
           </a:prstGeom>
         </p:spPr>
       </p:pic>
-      <p:sp>
-        <p:nvSpPr>
-          <p:cNvPr id="22" name="p1-panel"/>
-          <p:cNvSpPr/>
-          <p:nvPr/>
-        </p:nvSpPr>
-        <p:spPr>
-          <a:xfrm>
-            <a:off x="6197600" y="2271514"/>
-            <a:ext cx="2590800" cy="1663700"/>
-          </a:xfrm>
-          <a:prstGeom prst="roundRect">
-            <a:avLst>
-              <a:gd name="adj" fmla="val 8397"/>
-            </a:avLst>
-          </a:prstGeom>
-          <a:solidFill>
-            <a:srgbClr val="EEF4FC"/>
-          </a:solidFill>
-          <a:ln/>
-        </p:spPr>
-      </p:sp>
       <p:pic>
         <p:nvPicPr>
-          <p:cNvPr id="23" name="svg" descr="svg">    </p:cNvPr>
+          <p:cNvPr id="19" name="ring" descr="ring">    </p:cNvPr>
           <p:cNvPicPr>
             <a:picLocks noChangeAspect="1"/>
           </p:cNvPicPr>
@@ -1523,8 +1436,8 @@
         </p:blipFill>
         <p:spPr>
           <a:xfrm>
-            <a:off x="6775450" y="2591131"/>
-            <a:ext cx="1435100" cy="1028700"/>
+            <a:off x="8443383" y="1943431"/>
+            <a:ext cx="357717" cy="355600"/>
           </a:xfrm>
           <a:prstGeom prst="rect">
             <a:avLst/>
@@ -1533,7 +1446,7 @@
       </p:pic>
       <p:pic>
         <p:nvPicPr>
-          <p:cNvPr id="24" name="p1-lbl p1-pill people" descr="p1-lbl p1-pill people">    </p:cNvPr>
+          <p:cNvPr id="20" name="svg" descr="svg">    </p:cNvPr>
           <p:cNvPicPr>
             <a:picLocks noChangeAspect="1"/>
           </p:cNvPicPr>
@@ -1547,39 +1460,17 @@
         </p:blipFill>
         <p:spPr>
           <a:xfrm>
-            <a:off x="7082879" y="2998589"/>
-            <a:ext cx="821267" cy="211667"/>
+            <a:off x="8551333" y="2051381"/>
+            <a:ext cx="141817" cy="139700"/>
           </a:xfrm>
           <a:prstGeom prst="rect">
             <a:avLst/>
           </a:prstGeom>
         </p:spPr>
       </p:pic>
-      <p:sp>
-        <p:nvSpPr>
-          <p:cNvPr id="25" name="p1-panel"/>
-          <p:cNvSpPr/>
-          <p:nvPr/>
-        </p:nvSpPr>
-        <p:spPr>
-          <a:xfrm>
-            <a:off x="8991600" y="2271514"/>
-            <a:ext cx="2590800" cy="1663700"/>
-          </a:xfrm>
-          <a:prstGeom prst="roundRect">
-            <a:avLst>
-              <a:gd name="adj" fmla="val 8397"/>
-            </a:avLst>
-          </a:prstGeom>
-          <a:solidFill>
-            <a:srgbClr val="EEF4FC"/>
-          </a:solidFill>
-          <a:ln/>
-        </p:spPr>
-      </p:sp>
       <p:pic>
         <p:nvPicPr>
-          <p:cNvPr id="26" name="svg" descr="svg">    </p:cNvPr>
+          <p:cNvPr id="21" name="ring solid" descr="ring solid">    </p:cNvPr>
           <p:cNvPicPr>
             <a:picLocks noChangeAspect="1"/>
           </p:cNvPicPr>
@@ -1593,8 +1484,8 @@
         </p:blipFill>
         <p:spPr>
           <a:xfrm>
-            <a:off x="9228667" y="2644047"/>
-            <a:ext cx="2214033" cy="922867"/>
+            <a:off x="10413950" y="1943431"/>
+            <a:ext cx="357717" cy="355600"/>
           </a:xfrm>
           <a:prstGeom prst="rect">
             <a:avLst/>
@@ -1603,7 +1494,7 @@
       </p:pic>
       <p:pic>
         <p:nvPicPr>
-          <p:cNvPr id="27" name="svg" descr="svg">    </p:cNvPr>
+          <p:cNvPr id="22" name="svg" descr="svg">    </p:cNvPr>
           <p:cNvPicPr>
             <a:picLocks noChangeAspect="1"/>
           </p:cNvPicPr>
@@ -1617,17 +1508,39 @@
         </p:blipFill>
         <p:spPr>
           <a:xfrm>
-            <a:off x="605367" y="4129947"/>
-            <a:ext cx="10936817" cy="148167"/>
+            <a:off x="10528250" y="2057731"/>
+            <a:ext cx="129117" cy="127000"/>
           </a:xfrm>
           <a:prstGeom prst="rect">
             <a:avLst/>
           </a:prstGeom>
         </p:spPr>
       </p:pic>
+      <p:sp>
+        <p:nvSpPr>
+          <p:cNvPr id="23" name="p1-out"/>
+          <p:cNvSpPr/>
+          <p:nvPr/>
+        </p:nvSpPr>
+        <p:spPr>
+          <a:xfrm>
+            <a:off x="6146800" y="2701925"/>
+            <a:ext cx="4600773" cy="279400"/>
+          </a:xfrm>
+          <a:prstGeom prst="roundRect">
+            <a:avLst>
+              <a:gd name="adj" fmla="val 50000"/>
+            </a:avLst>
+          </a:prstGeom>
+          <a:solidFill>
+            <a:srgbClr val="FFF4DB"/>
+          </a:solidFill>
+          <a:ln/>
+        </p:spPr>
+      </p:sp>
       <p:pic>
         <p:nvPicPr>
-          <p:cNvPr id="28" name="p1-tag" descr="p1-tag">    </p:cNvPr>
+          <p:cNvPr id="24" name="svg" descr="svg">    </p:cNvPr>
           <p:cNvPicPr>
             <a:picLocks noChangeAspect="1"/>
           </p:cNvPicPr>
@@ -1641,17 +1554,39 @@
         </p:blipFill>
         <p:spPr>
           <a:xfrm>
-            <a:off x="825500" y="4096081"/>
-            <a:ext cx="844550" cy="215900"/>
+            <a:off x="6237817" y="2776008"/>
+            <a:ext cx="135467" cy="135467"/>
           </a:xfrm>
           <a:prstGeom prst="rect">
             <a:avLst/>
           </a:prstGeom>
         </p:spPr>
       </p:pic>
+      <p:sp>
+        <p:nvSpPr>
+          <p:cNvPr id="25" name="i"/>
+          <p:cNvSpPr/>
+          <p:nvPr/>
+        </p:nvSpPr>
+        <p:spPr>
+          <a:xfrm>
+            <a:off x="6888262" y="2784475"/>
+            <a:ext cx="12700" cy="114300"/>
+          </a:xfrm>
+          <a:prstGeom prst="rect">
+            <a:avLst/>
+          </a:prstGeom>
+          <a:solidFill>
+            <a:srgbClr val="8A5A00">
+              <a:alpha val="30000"/>
+            </a:srgbClr>
+          </a:solidFill>
+          <a:ln/>
+        </p:spPr>
+      </p:sp>
       <p:pic>
         <p:nvPicPr>
-          <p:cNvPr id="29" name="svg" descr="svg">    </p:cNvPr>
+          <p:cNvPr id="26" name="p1-path-line" descr="p1-path-line">    </p:cNvPr>
           <p:cNvPicPr>
             <a:picLocks noChangeAspect="1"/>
           </p:cNvPicPr>
@@ -1665,8 +1600,8 @@
         </p:blipFill>
         <p:spPr>
           <a:xfrm>
-            <a:off x="899583" y="4151114"/>
-            <a:ext cx="105833" cy="105833"/>
+            <a:off x="605367" y="3078692"/>
+            <a:ext cx="10936817" cy="340783"/>
           </a:xfrm>
           <a:prstGeom prst="rect">
             <a:avLst/>
@@ -1675,29 +1610,109 @@
       </p:pic>
       <p:sp>
         <p:nvSpPr>
-          <p:cNvPr id="30" name="p1-tag end"/>
-          <p:cNvSpPr/>
-          <p:nvPr/>
-        </p:nvSpPr>
-        <p:spPr>
-          <a:xfrm>
-            <a:off x="9207500" y="4093964"/>
-            <a:ext cx="846336" cy="215900"/>
+          <p:cNvPr id="27" name="eyebrow p1-eb"/>
+          <p:cNvSpPr/>
+          <p:nvPr/>
+        </p:nvSpPr>
+        <p:spPr>
+          <a:xfrm>
+            <a:off x="762000" y="3282950"/>
+            <a:ext cx="1168896" cy="120650"/>
+          </a:xfrm>
+          <a:prstGeom prst="rect">
+            <a:avLst/>
+          </a:prstGeom>
+          <a:solidFill>
+            <a:srgbClr val="FFFFFF"/>
+          </a:solidFill>
+          <a:ln/>
+        </p:spPr>
+      </p:sp>
+      <p:sp>
+        <p:nvSpPr>
+          <p:cNvPr id="28" name="eyebrow p1-eb"/>
+          <p:cNvSpPr/>
+          <p:nvPr/>
+        </p:nvSpPr>
+        <p:spPr>
+          <a:xfrm>
+            <a:off x="2540000" y="3282950"/>
+            <a:ext cx="865287" cy="120650"/>
+          </a:xfrm>
+          <a:prstGeom prst="rect">
+            <a:avLst/>
+          </a:prstGeom>
+          <a:solidFill>
+            <a:srgbClr val="FFFFFF"/>
+          </a:solidFill>
+          <a:ln/>
+        </p:spPr>
+      </p:sp>
+      <p:sp>
+        <p:nvSpPr>
+          <p:cNvPr id="29" name="eyebrow p1-eb"/>
+          <p:cNvSpPr/>
+          <p:nvPr/>
+        </p:nvSpPr>
+        <p:spPr>
+          <a:xfrm>
+            <a:off x="4597400" y="3282950"/>
+            <a:ext cx="1201638" cy="120650"/>
+          </a:xfrm>
+          <a:prstGeom prst="rect">
+            <a:avLst/>
+          </a:prstGeom>
+          <a:solidFill>
+            <a:srgbClr val="FFFFFF"/>
+          </a:solidFill>
+          <a:ln/>
+        </p:spPr>
+      </p:sp>
+      <p:sp>
+        <p:nvSpPr>
+          <p:cNvPr id="30" name="eyebrow p1-eb"/>
+          <p:cNvSpPr/>
+          <p:nvPr/>
+        </p:nvSpPr>
+        <p:spPr>
+          <a:xfrm>
+            <a:off x="9829800" y="3282950"/>
+            <a:ext cx="969268" cy="120650"/>
+          </a:xfrm>
+          <a:prstGeom prst="rect">
+            <a:avLst/>
+          </a:prstGeom>
+          <a:solidFill>
+            <a:srgbClr val="FFFFFF"/>
+          </a:solidFill>
+          <a:ln/>
+        </p:spPr>
+      </p:sp>
+      <p:sp>
+        <p:nvSpPr>
+          <p:cNvPr id="31" name="p1-panel"/>
+          <p:cNvSpPr/>
+          <p:nvPr/>
+        </p:nvSpPr>
+        <p:spPr>
+          <a:xfrm>
+            <a:off x="609600" y="3796605"/>
+            <a:ext cx="1625600" cy="1903909"/>
           </a:xfrm>
           <a:prstGeom prst="roundRect">
             <a:avLst>
-              <a:gd name="adj" fmla="val 50000"/>
+              <a:gd name="adj" fmla="val 8594"/>
             </a:avLst>
           </a:prstGeom>
           <a:solidFill>
-            <a:srgbClr val="FFF4DB"/>
+            <a:srgbClr val="EEF4FC"/>
           </a:solidFill>
           <a:ln/>
         </p:spPr>
       </p:sp>
       <p:pic>
         <p:nvPicPr>
-          <p:cNvPr id="31" name="svg" descr="svg">    </p:cNvPr>
+          <p:cNvPr id="32" name="svg" descr="svg">    </p:cNvPr>
           <p:cNvPicPr>
             <a:picLocks noChangeAspect="1"/>
           </p:cNvPicPr>
@@ -1711,17 +1726,61 @@
         </p:blipFill>
         <p:spPr>
           <a:xfrm>
-            <a:off x="9281583" y="4151114"/>
-            <a:ext cx="105833" cy="105833"/>
+            <a:off x="732367" y="4178300"/>
+            <a:ext cx="1380067" cy="533400"/>
           </a:xfrm>
           <a:prstGeom prst="rect">
             <a:avLst/>
           </a:prstGeom>
         </p:spPr>
       </p:pic>
+      <p:sp>
+        <p:nvSpPr>
+          <p:cNvPr id="33" name="p1-lbl p1-pill"/>
+          <p:cNvSpPr/>
+          <p:nvPr/>
+        </p:nvSpPr>
+        <p:spPr>
+          <a:xfrm>
+            <a:off x="771426" y="4778375"/>
+            <a:ext cx="463748" cy="209550"/>
+          </a:xfrm>
+          <a:prstGeom prst="roundRect">
+            <a:avLst>
+              <a:gd name="adj" fmla="val 50000"/>
+            </a:avLst>
+          </a:prstGeom>
+          <a:solidFill>
+            <a:srgbClr val="FFFFFF"/>
+          </a:solidFill>
+          <a:ln/>
+        </p:spPr>
+      </p:sp>
+      <p:sp>
+        <p:nvSpPr>
+          <p:cNvPr id="34" name="p1-lbl p1-pill"/>
+          <p:cNvSpPr/>
+          <p:nvPr/>
+        </p:nvSpPr>
+        <p:spPr>
+          <a:xfrm>
+            <a:off x="1404938" y="4778375"/>
+            <a:ext cx="695325" cy="209550"/>
+          </a:xfrm>
+          <a:prstGeom prst="roundRect">
+            <a:avLst>
+              <a:gd name="adj" fmla="val 50000"/>
+            </a:avLst>
+          </a:prstGeom>
+          <a:solidFill>
+            <a:srgbClr val="FFFFFF"/>
+          </a:solidFill>
+          <a:ln/>
+        </p:spPr>
+      </p:sp>
       <p:pic>
         <p:nvPicPr>
-          <p:cNvPr id="32" name="li" descr="li">    </p:cNvPr>
+          <p:cNvPr id="35" name="svg" descr="svg">    </p:cNvPr>
           <p:cNvPicPr>
             <a:picLocks noChangeAspect="1"/>
           </p:cNvPicPr>
@@ -1735,17 +1794,39 @@
         </p:blipFill>
         <p:spPr>
           <a:xfrm>
-            <a:off x="609600" y="5048184"/>
-            <a:ext cx="38100" cy="38100"/>
+            <a:off x="717550" y="5245894"/>
+            <a:ext cx="114300" cy="114300"/>
           </a:xfrm>
           <a:prstGeom prst="rect">
             <a:avLst/>
           </a:prstGeom>
         </p:spPr>
       </p:pic>
+      <p:sp>
+        <p:nvSpPr>
+          <p:cNvPr id="36" name="p1-panel"/>
+          <p:cNvSpPr/>
+          <p:nvPr/>
+        </p:nvSpPr>
+        <p:spPr>
+          <a:xfrm>
+            <a:off x="2387600" y="3796605"/>
+            <a:ext cx="1905000" cy="1903909"/>
+          </a:xfrm>
+          <a:prstGeom prst="roundRect">
+            <a:avLst>
+              <a:gd name="adj" fmla="val 7338"/>
+            </a:avLst>
+          </a:prstGeom>
+          <a:solidFill>
+            <a:srgbClr val="EEF4FC"/>
+          </a:solidFill>
+          <a:ln/>
+        </p:spPr>
+      </p:sp>
       <p:pic>
         <p:nvPicPr>
-          <p:cNvPr id="33" name="p1-ar" descr="p1-ar">    </p:cNvPr>
+          <p:cNvPr id="37" name="svg" descr="svg">    </p:cNvPr>
           <p:cNvPicPr>
             <a:picLocks noChangeAspect="1"/>
           </p:cNvPicPr>
@@ -1759,17 +1840,110 @@
         </p:blipFill>
         <p:spPr>
           <a:xfrm>
-            <a:off x="1118228" y="5022883"/>
-            <a:ext cx="127000" cy="63500"/>
+            <a:off x="3280833" y="4276493"/>
+            <a:ext cx="908050" cy="668867"/>
           </a:xfrm>
           <a:prstGeom prst="rect">
             <a:avLst/>
           </a:prstGeom>
         </p:spPr>
       </p:pic>
+      <p:sp>
+        <p:nvSpPr>
+          <p:cNvPr id="38" name="p1-lbl p1-pill p1-in"/>
+          <p:cNvSpPr/>
+          <p:nvPr/>
+        </p:nvSpPr>
+        <p:spPr>
+          <a:xfrm>
+            <a:off x="2489200" y="4186535"/>
+            <a:ext cx="787400" cy="209550"/>
+          </a:xfrm>
+          <a:prstGeom prst="roundRect">
+            <a:avLst>
+              <a:gd name="adj" fmla="val 50000"/>
+            </a:avLst>
+          </a:prstGeom>
+          <a:solidFill>
+            <a:srgbClr val="FFFFFF"/>
+          </a:solidFill>
+          <a:ln/>
+        </p:spPr>
+      </p:sp>
+      <p:sp>
+        <p:nvSpPr>
+          <p:cNvPr id="39" name="p1-lbl p1-pill p1-in"/>
+          <p:cNvSpPr/>
+          <p:nvPr/>
+        </p:nvSpPr>
+        <p:spPr>
+          <a:xfrm>
+            <a:off x="2489200" y="4504035"/>
+            <a:ext cx="787400" cy="209550"/>
+          </a:xfrm>
+          <a:prstGeom prst="roundRect">
+            <a:avLst>
+              <a:gd name="adj" fmla="val 50000"/>
+            </a:avLst>
+          </a:prstGeom>
+          <a:solidFill>
+            <a:srgbClr val="FFFFFF"/>
+          </a:solidFill>
+          <a:ln/>
+        </p:spPr>
+      </p:sp>
+      <p:sp>
+        <p:nvSpPr>
+          <p:cNvPr id="40" name="p1-lbl p1-pill p1-in"/>
+          <p:cNvSpPr/>
+          <p:nvPr/>
+        </p:nvSpPr>
+        <p:spPr>
+          <a:xfrm>
+            <a:off x="2489200" y="4821535"/>
+            <a:ext cx="787400" cy="209550"/>
+          </a:xfrm>
+          <a:prstGeom prst="roundRect">
+            <a:avLst>
+              <a:gd name="adj" fmla="val 50000"/>
+            </a:avLst>
+          </a:prstGeom>
+          <a:solidFill>
+            <a:srgbClr val="FFFFFF"/>
+          </a:solidFill>
+          <a:ln/>
+        </p:spPr>
+      </p:sp>
+      <p:sp>
+        <p:nvSpPr>
+          <p:cNvPr id="41" name="p1-agree"/>
+          <p:cNvSpPr/>
+          <p:nvPr/>
+        </p:nvSpPr>
+        <p:spPr>
+          <a:xfrm>
+            <a:off x="2495550" y="5325864"/>
+            <a:ext cx="1689100" cy="266700"/>
+          </a:xfrm>
+          <a:prstGeom prst="roundRect">
+            <a:avLst>
+              <a:gd name="adj" fmla="val 50000"/>
+            </a:avLst>
+          </a:prstGeom>
+          <a:solidFill>
+            <a:srgbClr val="FFFFFF"/>
+          </a:solidFill>
+          <a:ln w="12700">
+            <a:solidFill>
+              <a:srgbClr val="004B8D"/>
+            </a:solidFill>
+            <a:prstDash val="solid"/>
+          </a:ln>
+        </p:spPr>
+      </p:sp>
       <p:pic>
         <p:nvPicPr>
-          <p:cNvPr id="34" name="li" descr="li">    </p:cNvPr>
+          <p:cNvPr id="42" name="svg" descr="svg">    </p:cNvPr>
           <p:cNvPicPr>
             <a:picLocks noChangeAspect="1"/>
           </p:cNvPicPr>
@@ -1783,17 +1957,111 @@
         </p:blipFill>
         <p:spPr>
           <a:xfrm>
-            <a:off x="609600" y="5263389"/>
-            <a:ext cx="38100" cy="38100"/>
+            <a:off x="2996902" y="5404181"/>
+            <a:ext cx="114300" cy="114300"/>
           </a:xfrm>
           <a:prstGeom prst="rect">
             <a:avLst/>
           </a:prstGeom>
         </p:spPr>
       </p:pic>
+      <p:sp>
+        <p:nvSpPr>
+          <p:cNvPr id="43" name="p1-panel p1-team"/>
+          <p:cNvSpPr/>
+          <p:nvPr/>
+        </p:nvSpPr>
+        <p:spPr>
+          <a:xfrm>
+            <a:off x="4445000" y="3796605"/>
+            <a:ext cx="5080000" cy="1903909"/>
+          </a:xfrm>
+          <a:prstGeom prst="roundRect">
+            <a:avLst>
+              <a:gd name="adj" fmla="val 7338"/>
+            </a:avLst>
+          </a:prstGeom>
+          <a:solidFill>
+            <a:srgbClr val="EEF4FC"/>
+          </a:solidFill>
+          <a:ln/>
+        </p:spPr>
+      </p:sp>
+      <p:sp>
+        <p:nvSpPr>
+          <p:cNvPr id="44" name="p1-role me"/>
+          <p:cNvSpPr/>
+          <p:nvPr/>
+        </p:nvSpPr>
+        <p:spPr>
+          <a:xfrm>
+            <a:off x="4552950" y="3891855"/>
+            <a:ext cx="2381250" cy="731242"/>
+          </a:xfrm>
+          <a:prstGeom prst="roundRect">
+            <a:avLst>
+              <a:gd name="adj" fmla="val 13026"/>
+            </a:avLst>
+          </a:prstGeom>
+          <a:solidFill>
+            <a:srgbClr val="FFFFFF"/>
+          </a:solidFill>
+          <a:ln w="12700">
+            <a:solidFill>
+              <a:srgbClr val="004B8D"/>
+            </a:solidFill>
+            <a:prstDash val="solid"/>
+          </a:ln>
+        </p:spPr>
+      </p:sp>
+      <p:sp>
+        <p:nvSpPr>
+          <p:cNvPr id="45" name="p1-av"/>
+          <p:cNvSpPr/>
+          <p:nvPr/>
+        </p:nvSpPr>
+        <p:spPr>
+          <a:xfrm>
+            <a:off x="4664075" y="3990280"/>
+            <a:ext cx="107950" cy="107950"/>
+          </a:xfrm>
+          <a:prstGeom prst="ellipse">
+            <a:avLst/>
+          </a:prstGeom>
+          <a:solidFill>
+            <a:srgbClr val="00A94F"/>
+          </a:solidFill>
+          <a:ln w="31750">
+            <a:solidFill>
+              <a:srgbClr val="E5F6EC"/>
+            </a:solidFill>
+            <a:prstDash val="solid"/>
+          </a:ln>
+        </p:spPr>
+      </p:sp>
+      <p:sp>
+        <p:nvSpPr>
+          <p:cNvPr id="46" name="p1-me"/>
+          <p:cNvSpPr/>
+          <p:nvPr/>
+        </p:nvSpPr>
+        <p:spPr>
+          <a:xfrm>
+            <a:off x="5155208" y="3949005"/>
+            <a:ext cx="190500" cy="190500"/>
+          </a:xfrm>
+          <a:prstGeom prst="ellipse">
+            <a:avLst/>
+          </a:prstGeom>
+          <a:solidFill>
+            <a:srgbClr val="0B2147"/>
+          </a:solidFill>
+          <a:ln/>
+        </p:spPr>
+      </p:sp>
       <p:pic>
         <p:nvPicPr>
-          <p:cNvPr id="35" name="li" descr="li">    </p:cNvPr>
+          <p:cNvPr id="47" name="li" descr="li">    </p:cNvPr>
           <p:cNvPicPr>
             <a:picLocks noChangeAspect="1"/>
           </p:cNvPicPr>
@@ -1807,7 +2075,7 @@
         </p:blipFill>
         <p:spPr>
           <a:xfrm>
-            <a:off x="3403600" y="5048184"/>
+            <a:off x="4654550" y="4253805"/>
             <a:ext cx="38100" cy="38100"/>
           </a:xfrm>
           <a:prstGeom prst="rect">
@@ -1817,7 +2085,7 @@
       </p:pic>
       <p:pic>
         <p:nvPicPr>
-          <p:cNvPr id="36" name="li" descr="li">    </p:cNvPr>
+          <p:cNvPr id="48" name="li" descr="li">    </p:cNvPr>
           <p:cNvPicPr>
             <a:picLocks noChangeAspect="1"/>
           </p:cNvPicPr>
@@ -1831,7 +2099,7 @@
         </p:blipFill>
         <p:spPr>
           <a:xfrm>
-            <a:off x="3403600" y="5263389"/>
+            <a:off x="4654550" y="4451482"/>
             <a:ext cx="38100" cy="38100"/>
           </a:xfrm>
           <a:prstGeom prst="rect">
@@ -1839,9 +2107,83 @@
           </a:prstGeom>
         </p:spPr>
       </p:pic>
+      <p:sp>
+        <p:nvSpPr>
+          <p:cNvPr id="49" name="chip tech p1-tool"/>
+          <p:cNvSpPr/>
+          <p:nvPr/>
+        </p:nvSpPr>
+        <p:spPr>
+          <a:xfrm>
+            <a:off x="4737100" y="4369296"/>
+            <a:ext cx="602655" cy="177800"/>
+          </a:xfrm>
+          <a:prstGeom prst="roundRect">
+            <a:avLst>
+              <a:gd name="adj" fmla="val 50000"/>
+            </a:avLst>
+          </a:prstGeom>
+          <a:solidFill>
+            <a:srgbClr val="EEF4FC"/>
+          </a:solidFill>
+          <a:ln/>
+        </p:spPr>
+      </p:sp>
+      <p:sp>
+        <p:nvSpPr>
+          <p:cNvPr id="50" name="p1-role"/>
+          <p:cNvSpPr/>
+          <p:nvPr/>
+        </p:nvSpPr>
+        <p:spPr>
+          <a:xfrm>
+            <a:off x="7035800" y="3891855"/>
+            <a:ext cx="2381250" cy="731242"/>
+          </a:xfrm>
+          <a:prstGeom prst="roundRect">
+            <a:avLst>
+              <a:gd name="adj" fmla="val 13026"/>
+            </a:avLst>
+          </a:prstGeom>
+          <a:solidFill>
+            <a:srgbClr val="FFFFFF"/>
+          </a:solidFill>
+          <a:ln w="12700">
+            <a:solidFill>
+              <a:srgbClr val="FFFFFF"/>
+            </a:solidFill>
+            <a:prstDash val="solid"/>
+          </a:ln>
+        </p:spPr>
+      </p:sp>
+      <p:sp>
+        <p:nvSpPr>
+          <p:cNvPr id="51" name="p1-av"/>
+          <p:cNvSpPr/>
+          <p:nvPr/>
+        </p:nvSpPr>
+        <p:spPr>
+          <a:xfrm>
+            <a:off x="7146925" y="3982343"/>
+            <a:ext cx="107950" cy="107950"/>
+          </a:xfrm>
+          <a:prstGeom prst="ellipse">
+            <a:avLst/>
+          </a:prstGeom>
+          <a:solidFill>
+            <a:srgbClr val="00A94F"/>
+          </a:solidFill>
+          <a:ln w="31750">
+            <a:solidFill>
+              <a:srgbClr val="E5F6EC"/>
+            </a:solidFill>
+            <a:prstDash val="solid"/>
+          </a:ln>
+        </p:spPr>
+      </p:sp>
       <p:pic>
         <p:nvPicPr>
-          <p:cNvPr id="37" name="p1-ar" descr="p1-ar">    </p:cNvPr>
+          <p:cNvPr id="52" name="li" descr="li">    </p:cNvPr>
           <p:cNvPicPr>
             <a:picLocks noChangeAspect="1"/>
           </p:cNvPicPr>
@@ -1855,8 +2197,8 @@
         </p:blipFill>
         <p:spPr>
           <a:xfrm>
-            <a:off x="4324317" y="5238089"/>
-            <a:ext cx="127000" cy="63500"/>
+            <a:off x="7137400" y="4242164"/>
+            <a:ext cx="38100" cy="38100"/>
           </a:xfrm>
           <a:prstGeom prst="rect">
             <a:avLst/>
@@ -1865,7 +2207,7 @@
       </p:pic>
       <p:pic>
         <p:nvPicPr>
-          <p:cNvPr id="38" name="li" descr="li">    </p:cNvPr>
+          <p:cNvPr id="53" name="li" descr="li">    </p:cNvPr>
           <p:cNvPicPr>
             <a:picLocks noChangeAspect="1"/>
           </p:cNvPicPr>
@@ -1879,7 +2221,7 @@
         </p:blipFill>
         <p:spPr>
           <a:xfrm>
-            <a:off x="6197600" y="5048184"/>
+            <a:off x="7137400" y="4437724"/>
             <a:ext cx="38100" cy="38100"/>
           </a:xfrm>
           <a:prstGeom prst="rect">
@@ -1887,9 +2229,61 @@
           </a:prstGeom>
         </p:spPr>
       </p:pic>
+      <p:sp>
+        <p:nvSpPr>
+          <p:cNvPr id="54" name="p1-role"/>
+          <p:cNvSpPr/>
+          <p:nvPr/>
+        </p:nvSpPr>
+        <p:spPr>
+          <a:xfrm>
+            <a:off x="4552950" y="4889798"/>
+            <a:ext cx="2381250" cy="715466"/>
+          </a:xfrm>
+          <a:prstGeom prst="roundRect">
+            <a:avLst>
+              <a:gd name="adj" fmla="val 13313"/>
+            </a:avLst>
+          </a:prstGeom>
+          <a:solidFill>
+            <a:srgbClr val="FFFFFF"/>
+          </a:solidFill>
+          <a:ln w="12700">
+            <a:solidFill>
+              <a:srgbClr val="FFFFFF"/>
+            </a:solidFill>
+            <a:prstDash val="solid"/>
+          </a:ln>
+        </p:spPr>
+      </p:sp>
+      <p:sp>
+        <p:nvSpPr>
+          <p:cNvPr id="55" name="p1-av"/>
+          <p:cNvSpPr/>
+          <p:nvPr/>
+        </p:nvSpPr>
+        <p:spPr>
+          <a:xfrm>
+            <a:off x="4664075" y="4980285"/>
+            <a:ext cx="107950" cy="107950"/>
+          </a:xfrm>
+          <a:prstGeom prst="ellipse">
+            <a:avLst/>
+          </a:prstGeom>
+          <a:solidFill>
+            <a:srgbClr val="00A94F"/>
+          </a:solidFill>
+          <a:ln w="31750">
+            <a:solidFill>
+              <a:srgbClr val="E5F6EC"/>
+            </a:solidFill>
+            <a:prstDash val="solid"/>
+          </a:ln>
+        </p:spPr>
+      </p:sp>
       <p:pic>
         <p:nvPicPr>
-          <p:cNvPr id="39" name="li" descr="li">    </p:cNvPr>
+          <p:cNvPr id="56" name="li" descr="li">    </p:cNvPr>
           <p:cNvPicPr>
             <a:picLocks noChangeAspect="1"/>
           </p:cNvPicPr>
@@ -1903,7 +2297,7 @@
         </p:blipFill>
         <p:spPr>
           <a:xfrm>
-            <a:off x="6197600" y="5263389"/>
+            <a:off x="4654550" y="5237989"/>
             <a:ext cx="38100" cy="38100"/>
           </a:xfrm>
           <a:prstGeom prst="rect">
@@ -1911,9 +2305,31 @@
           </a:prstGeom>
         </p:spPr>
       </p:pic>
+      <p:sp>
+        <p:nvSpPr>
+          <p:cNvPr id="57" name="chip tech p1-tool"/>
+          <p:cNvSpPr/>
+          <p:nvPr/>
+        </p:nvSpPr>
+        <p:spPr>
+          <a:xfrm>
+            <a:off x="4737100" y="5155803"/>
+            <a:ext cx="400943" cy="177800"/>
+          </a:xfrm>
+          <a:prstGeom prst="roundRect">
+            <a:avLst>
+              <a:gd name="adj" fmla="val 50000"/>
+            </a:avLst>
+          </a:prstGeom>
+          <a:solidFill>
+            <a:srgbClr val="EEF4FC"/>
+          </a:solidFill>
+          <a:ln/>
+        </p:spPr>
+      </p:sp>
       <p:pic>
         <p:nvPicPr>
-          <p:cNvPr id="40" name="li" descr="li">    </p:cNvPr>
+          <p:cNvPr id="58" name="li" descr="li">    </p:cNvPr>
           <p:cNvPicPr>
             <a:picLocks noChangeAspect="1"/>
           </p:cNvPicPr>
@@ -1927,7 +2343,7 @@
         </p:blipFill>
         <p:spPr>
           <a:xfrm>
-            <a:off x="8991600" y="5048184"/>
+            <a:off x="4654550" y="5435666"/>
             <a:ext cx="38100" cy="38100"/>
           </a:xfrm>
           <a:prstGeom prst="rect">
@@ -1935,9 +2351,36 @@
           </a:prstGeom>
         </p:spPr>
       </p:pic>
+      <p:sp>
+        <p:nvSpPr>
+          <p:cNvPr id="59" name="p1-role"/>
+          <p:cNvSpPr/>
+          <p:nvPr/>
+        </p:nvSpPr>
+        <p:spPr>
+          <a:xfrm>
+            <a:off x="7035800" y="4889798"/>
+            <a:ext cx="2381250" cy="715466"/>
+          </a:xfrm>
+          <a:prstGeom prst="roundRect">
+            <a:avLst>
+              <a:gd name="adj" fmla="val 13313"/>
+            </a:avLst>
+          </a:prstGeom>
+          <a:solidFill>
+            <a:srgbClr val="FFFFFF"/>
+          </a:solidFill>
+          <a:ln w="12700">
+            <a:solidFill>
+              <a:srgbClr val="FFFFFF"/>
+            </a:solidFill>
+            <a:prstDash val="solid"/>
+          </a:ln>
+        </p:spPr>
+      </p:sp>
       <p:pic>
         <p:nvPicPr>
-          <p:cNvPr id="41" name="li" descr="li">    </p:cNvPr>
+          <p:cNvPr id="60" name="svg" descr="svg">    </p:cNvPr>
           <p:cNvPicPr>
             <a:picLocks noChangeAspect="1"/>
           </p:cNvPicPr>
@@ -1951,8 +2394,8 @@
         </p:blipFill>
         <p:spPr>
           <a:xfrm>
-            <a:off x="8991600" y="5263389"/>
-            <a:ext cx="38100" cy="38100"/>
+            <a:off x="5689600" y="4629448"/>
+            <a:ext cx="2590800" cy="254000"/>
           </a:xfrm>
           <a:prstGeom prst="rect">
             <a:avLst/>
@@ -1961,21 +2404,230 @@
       </p:pic>
       <p:sp>
         <p:nvSpPr>
-          <p:cNvPr id="42" name="key"/>
-          <p:cNvSpPr/>
-          <p:nvPr/>
-        </p:nvSpPr>
-        <p:spPr>
-          <a:xfrm>
-            <a:off x="609600" y="5662414"/>
-            <a:ext cx="10972800" cy="610791"/>
+          <p:cNvPr id="61" name="chip people p1-share"/>
+          <p:cNvSpPr/>
+          <p:nvPr/>
+        </p:nvSpPr>
+        <p:spPr>
+          <a:xfrm>
+            <a:off x="6027241" y="4648498"/>
+            <a:ext cx="1915517" cy="215900"/>
           </a:xfrm>
           <a:prstGeom prst="roundRect">
             <a:avLst>
-              <a:gd name="adj" fmla="val 22872"/>
+              <a:gd name="adj" fmla="val 50000"/>
             </a:avLst>
           </a:prstGeom>
           <a:solidFill>
+            <a:srgbClr val="E5F6EC"/>
+          </a:solidFill>
+          <a:ln/>
+        </p:spPr>
+      </p:sp>
+      <p:pic>
+        <p:nvPicPr>
+          <p:cNvPr id="62" name="svg" descr="svg">    </p:cNvPr>
+          <p:cNvPicPr>
+            <a:picLocks noChangeAspect="1"/>
+          </p:cNvPicPr>
+          <p:nvPr/>
+        </p:nvPicPr>
+        <p:blipFill>
+          <a:blip r:embed="rId22"/>
+          <a:stretch>
+            <a:fillRect/>
+          </a:stretch>
+        </p:blipFill>
+        <p:spPr>
+          <a:xfrm>
+            <a:off x="6120375" y="4703531"/>
+            <a:ext cx="91017" cy="105833"/>
+          </a:xfrm>
+          <a:prstGeom prst="rect">
+            <a:avLst/>
+          </a:prstGeom>
+        </p:spPr>
+      </p:pic>
+      <p:sp>
+        <p:nvSpPr>
+          <p:cNvPr id="63" name="p1-av"/>
+          <p:cNvSpPr/>
+          <p:nvPr/>
+        </p:nvSpPr>
+        <p:spPr>
+          <a:xfrm>
+            <a:off x="7146925" y="4980285"/>
+            <a:ext cx="107950" cy="107950"/>
+          </a:xfrm>
+          <a:prstGeom prst="ellipse">
+            <a:avLst/>
+          </a:prstGeom>
+          <a:solidFill>
+            <a:srgbClr val="00A94F"/>
+          </a:solidFill>
+          <a:ln w="31750">
+            <a:solidFill>
+              <a:srgbClr val="E5F6EC"/>
+            </a:solidFill>
+            <a:prstDash val="solid"/>
+          </a:ln>
+        </p:spPr>
+      </p:sp>
+      <p:pic>
+        <p:nvPicPr>
+          <p:cNvPr id="64" name="li" descr="li">    </p:cNvPr>
+          <p:cNvPicPr>
+            <a:picLocks noChangeAspect="1"/>
+          </p:cNvPicPr>
+          <p:nvPr/>
+        </p:nvPicPr>
+        <p:blipFill>
+          <a:blip r:embed="rId23"/>
+          <a:stretch>
+            <a:fillRect/>
+          </a:stretch>
+        </p:blipFill>
+        <p:spPr>
+          <a:xfrm>
+            <a:off x="7137400" y="5237989"/>
+            <a:ext cx="38100" cy="38100"/>
+          </a:xfrm>
+          <a:prstGeom prst="rect">
+            <a:avLst/>
+          </a:prstGeom>
+        </p:spPr>
+      </p:pic>
+      <p:pic>
+        <p:nvPicPr>
+          <p:cNvPr id="65" name="li" descr="li">    </p:cNvPr>
+          <p:cNvPicPr>
+            <a:picLocks noChangeAspect="1"/>
+          </p:cNvPicPr>
+          <p:nvPr/>
+        </p:nvPicPr>
+        <p:blipFill>
+          <a:blip r:embed="rId24"/>
+          <a:stretch>
+            <a:fillRect/>
+          </a:stretch>
+        </p:blipFill>
+        <p:spPr>
+          <a:xfrm>
+            <a:off x="7137400" y="5435666"/>
+            <a:ext cx="38100" cy="38100"/>
+          </a:xfrm>
+          <a:prstGeom prst="rect">
+            <a:avLst/>
+          </a:prstGeom>
+        </p:spPr>
+      </p:pic>
+      <p:sp>
+        <p:nvSpPr>
+          <p:cNvPr id="66" name="p1-panel"/>
+          <p:cNvSpPr/>
+          <p:nvPr/>
+        </p:nvSpPr>
+        <p:spPr>
+          <a:xfrm>
+            <a:off x="9677400" y="3796605"/>
+            <a:ext cx="1905000" cy="1903909"/>
+          </a:xfrm>
+          <a:prstGeom prst="roundRect">
+            <a:avLst>
+              <a:gd name="adj" fmla="val 7338"/>
+            </a:avLst>
+          </a:prstGeom>
+          <a:solidFill>
+            <a:srgbClr val="EEF4FC"/>
+          </a:solidFill>
+          <a:ln/>
+        </p:spPr>
+      </p:sp>
+      <p:pic>
+        <p:nvPicPr>
+          <p:cNvPr id="67" name="svg" descr="svg">    </p:cNvPr>
+          <p:cNvPicPr>
+            <a:picLocks noChangeAspect="1"/>
+          </p:cNvPicPr>
+          <p:nvPr/>
+        </p:nvPicPr>
+        <p:blipFill>
+          <a:blip r:embed="rId25"/>
+          <a:stretch>
+            <a:fillRect/>
+          </a:stretch>
+        </p:blipFill>
+        <p:spPr>
+          <a:xfrm>
+            <a:off x="9781117" y="4129617"/>
+            <a:ext cx="1699683" cy="821267"/>
+          </a:xfrm>
+          <a:prstGeom prst="rect">
+            <a:avLst/>
+          </a:prstGeom>
+        </p:spPr>
+      </p:pic>
+      <p:pic>
+        <p:nvPicPr>
+          <p:cNvPr id="68" name="svg" descr="svg">    </p:cNvPr>
+          <p:cNvPicPr>
+            <a:picLocks noChangeAspect="1"/>
+          </p:cNvPicPr>
+          <p:nvPr/>
+        </p:nvPicPr>
+        <p:blipFill>
+          <a:blip r:embed="rId26"/>
+          <a:stretch>
+            <a:fillRect/>
+          </a:stretch>
+        </p:blipFill>
+        <p:spPr>
+          <a:xfrm>
+            <a:off x="9785350" y="5220494"/>
+            <a:ext cx="114300" cy="114300"/>
+          </a:xfrm>
+          <a:prstGeom prst="rect">
+            <a:avLst/>
+          </a:prstGeom>
+        </p:spPr>
+      </p:pic>
+      <p:sp>
+        <p:nvSpPr>
+          <p:cNvPr id="69" name="p1-fd"/>
+          <p:cNvSpPr/>
+          <p:nvPr/>
+        </p:nvSpPr>
+        <p:spPr>
+          <a:xfrm>
+            <a:off x="9804400" y="5466854"/>
+            <a:ext cx="76200" cy="76200"/>
+          </a:xfrm>
+          <a:prstGeom prst="ellipse">
+            <a:avLst/>
+          </a:prstGeom>
+          <a:solidFill>
+            <a:srgbClr val="FDBB30"/>
+          </a:solidFill>
+          <a:ln/>
+        </p:spPr>
+      </p:sp>
+      <p:sp>
+        <p:nvSpPr>
+          <p:cNvPr id="70" name="key"/>
+          <p:cNvSpPr/>
+          <p:nvPr/>
+        </p:nvSpPr>
+        <p:spPr>
+          <a:xfrm>
+            <a:off x="609600" y="5814814"/>
+            <a:ext cx="10972800" cy="534591"/>
+          </a:xfrm>
+          <a:prstGeom prst="roundRect">
+            <a:avLst>
+              <a:gd name="adj" fmla="val 26132"/>
+            </a:avLst>
+          </a:prstGeom>
+          <a:solidFill>
             <a:srgbClr val="0B2147"/>
           </a:solidFill>
           <a:ln/>
@@ -1983,13 +2635,13 @@
       </p:sp>
       <p:sp>
         <p:nvSpPr>
-          <p:cNvPr id="43" name="i"/>
-          <p:cNvSpPr/>
-          <p:nvPr/>
-        </p:nvSpPr>
-        <p:spPr>
-          <a:xfrm>
-            <a:off x="863600" y="5935960"/>
+          <p:cNvPr id="71" name="i"/>
+          <p:cNvSpPr/>
+          <p:nvPr/>
+        </p:nvSpPr>
+        <p:spPr>
+          <a:xfrm>
+            <a:off x="863600" y="6050260"/>
             <a:ext cx="63500" cy="63500"/>
           </a:xfrm>
           <a:prstGeom prst="ellipse">
@@ -2003,13 +2655,13 @@
       </p:sp>
       <p:sp>
         <p:nvSpPr>
-          <p:cNvPr id="44" name="b"/>
-          <p:cNvSpPr/>
-          <p:nvPr/>
-        </p:nvSpPr>
-        <p:spPr>
-          <a:xfrm>
-            <a:off x="927100" y="5961360"/>
+          <p:cNvPr id="72" name="b"/>
+          <p:cNvSpPr/>
+          <p:nvPr/>
+        </p:nvSpPr>
+        <p:spPr>
+          <a:xfrm>
+            <a:off x="927100" y="6075660"/>
             <a:ext cx="88900" cy="12700"/>
           </a:xfrm>
           <a:prstGeom prst="rect">
@@ -2023,13 +2675,13 @@
       </p:sp>
       <p:sp>
         <p:nvSpPr>
-          <p:cNvPr id="45" name="i"/>
-          <p:cNvSpPr/>
-          <p:nvPr/>
-        </p:nvSpPr>
-        <p:spPr>
-          <a:xfrm>
-            <a:off x="1016000" y="5935960"/>
+          <p:cNvPr id="73" name="i"/>
+          <p:cNvSpPr/>
+          <p:nvPr/>
+        </p:nvSpPr>
+        <p:spPr>
+          <a:xfrm>
+            <a:off x="1016000" y="6050260"/>
             <a:ext cx="63500" cy="63500"/>
           </a:xfrm>
           <a:prstGeom prst="ellipse">
@@ -2043,13 +2695,13 @@
       </p:sp>
       <p:sp>
         <p:nvSpPr>
-          <p:cNvPr id="46" name="b"/>
-          <p:cNvSpPr/>
-          <p:nvPr/>
-        </p:nvSpPr>
-        <p:spPr>
-          <a:xfrm>
-            <a:off x="1079500" y="5961360"/>
+          <p:cNvPr id="74" name="b"/>
+          <p:cNvSpPr/>
+          <p:nvPr/>
+        </p:nvSpPr>
+        <p:spPr>
+          <a:xfrm>
+            <a:off x="1079500" y="6075660"/>
             <a:ext cx="88900" cy="12700"/>
           </a:xfrm>
           <a:prstGeom prst="rect">
@@ -2063,13 +2715,13 @@
       </p:sp>
       <p:sp>
         <p:nvSpPr>
-          <p:cNvPr id="47" name="i"/>
-          <p:cNvSpPr/>
-          <p:nvPr/>
-        </p:nvSpPr>
-        <p:spPr>
-          <a:xfrm>
-            <a:off x="1168400" y="5935960"/>
+          <p:cNvPr id="75" name="i"/>
+          <p:cNvSpPr/>
+          <p:nvPr/>
+        </p:nvSpPr>
+        <p:spPr>
+          <a:xfrm>
+            <a:off x="1168400" y="6050260"/>
             <a:ext cx="63500" cy="63500"/>
           </a:xfrm>
           <a:prstGeom prst="ellipse">
@@ -2083,7 +2735,7 @@
       </p:sp>
       <p:sp>
         <p:nvSpPr>
-          <p:cNvPr id="48" name="01"/>
+          <p:cNvPr id="76" name="01"/>
           <p:cNvSpPr txBox="1"/>
           <p:nvPr/>
         </p:nvSpPr>
@@ -2122,7 +2774,7 @@
       </p:sp>
       <p:sp>
         <p:nvSpPr>
-          <p:cNvPr id="49" name="PT 주제 1 · 가장 중요하게 생각하는 가치와 실천 경험"/>
+          <p:cNvPr id="77" name="PT 주제 1 · 가장 중요하게 생각하는 가치와 실천 경험"/>
           <p:cNvSpPr txBox="1"/>
           <p:nvPr/>
         </p:nvSpPr>
@@ -2161,7 +2813,7 @@
       </p:sp>
       <p:sp>
         <p:nvSpPr>
-          <p:cNvPr id="50" name="제가 가장 중요하게 생각하는 가치는"/>
+          <p:cNvPr id="78" name="제가 가장 중요하게 생각하는 가치는"/>
           <p:cNvSpPr txBox="1"/>
           <p:nvPr/>
         </p:nvSpPr>
@@ -2200,7 +2852,7 @@
       </p:sp>
       <p:sp>
         <p:nvSpPr>
-          <p:cNvPr id="51" name="공동의 목표를 공유하며 함께 성과를 만드는 협업입니다"/>
+          <p:cNvPr id="79" name="공동의 목표를 공유하며 함께 성과를 만드는 협업입니다"/>
           <p:cNvSpPr txBox="1"/>
           <p:nvPr/>
         </p:nvSpPr>
@@ -2281,14 +2933,14 @@
       </p:sp>
       <p:sp>
         <p:nvSpPr>
-          <p:cNvPr id="52" name="BACKGROUND"/>
-          <p:cNvSpPr txBox="1"/>
-          <p:nvPr/>
-        </p:nvSpPr>
-        <p:spPr>
-          <a:xfrm>
-            <a:off x="609600" y="1879203"/>
-            <a:ext cx="1194647" cy="146050"/>
+          <p:cNvPr id="80" name="PROJECT"/>
+          <p:cNvSpPr txBox="1"/>
+          <p:nvPr/>
+        </p:nvSpPr>
+        <p:spPr>
+          <a:xfrm>
+            <a:off x="825500" y="1974453"/>
+            <a:ext cx="774898" cy="146050"/>
           </a:xfrm>
           <a:prstGeom prst="rect">
             <a:avLst/>
@@ -2306,13 +2958,13 @@
             <a:r>
               <a:rPr lang="ko-KR" altLang="en-US" sz="950" spc="152" kern="0" dirty="0">
                 <a:solidFill>
-                  <a:srgbClr val="8691A5"/>
+                  <a:srgbClr val="2A78DD"/>
                 </a:solidFill>
                 <a:latin typeface="Paperlogy 7 Bold" pitchFamily="34" charset="0"/>
                 <a:ea typeface="Paperlogy 7 Bold" pitchFamily="34" charset="-127"/>
                 <a:cs typeface="Paperlogy 7 Bold" pitchFamily="34" charset="-120"/>
               </a:rPr>
-              <a:t>BACKGROUND</a:t>
+              <a:t>PROJECT</a:t>
             </a:r>
             <a:endParaRPr lang="en-US" sz="950" dirty="0"/>
           </a:p>
@@ -2320,30 +2972,30 @@
       </p:sp>
       <p:sp>
         <p:nvSpPr>
-          <p:cNvPr id="53" name="학생 BIM 경진대회"/>
-          <p:cNvSpPr txBox="1"/>
-          <p:nvPr/>
-        </p:nvSpPr>
-        <p:spPr>
-          <a:xfrm>
-            <a:off x="2016026" y="1865412"/>
-            <a:ext cx="1150265" cy="165100"/>
-          </a:xfrm>
-          <a:prstGeom prst="rect">
-            <a:avLst/>
-          </a:prstGeom>
-          <a:noFill/>
-          <a:ln/>
-        </p:spPr>
-        <p:txBody>
-          <a:bodyPr wrap="none" lIns="0" tIns="0" rIns="0" bIns="0" rtlCol="0" anchor="ctr"/>
-          <a:lstStyle/>
-          <a:p>
-            <a:pPr algn="l" indent="0" marL="0">
-              <a:buNone/>
-            </a:pPr>
-            <a:r>
-              <a:rPr lang="ko-KR" altLang="en-US" sz="1100" dirty="0">
+          <p:cNvPr id="81" name="학생 BIM 경진대회"/>
+          <p:cNvSpPr txBox="1"/>
+          <p:nvPr/>
+        </p:nvSpPr>
+        <p:spPr>
+          <a:xfrm>
+            <a:off x="1752798" y="1974453"/>
+            <a:ext cx="993454" cy="146050"/>
+          </a:xfrm>
+          <a:prstGeom prst="rect">
+            <a:avLst/>
+          </a:prstGeom>
+          <a:noFill/>
+          <a:ln/>
+        </p:spPr>
+        <p:txBody>
+          <a:bodyPr wrap="none" lIns="0" tIns="0" rIns="0" bIns="0" rtlCol="0" anchor="ctr"/>
+          <a:lstStyle/>
+          <a:p>
+            <a:pPr algn="l" indent="0" marL="0">
+              <a:buNone/>
+            </a:pPr>
+            <a:r>
+              <a:rPr lang="ko-KR" altLang="en-US" sz="950" dirty="0">
                 <a:solidFill>
                   <a:srgbClr val="004B8D"/>
                 </a:solidFill>
@@ -2353,36 +3005,36 @@
               </a:rPr>
               <a:t>학생 BIM 경진대회</a:t>
             </a:r>
-            <a:endParaRPr lang="en-US" sz="1100" dirty="0"/>
-          </a:p>
-        </p:txBody>
-      </p:sp>
-      <p:sp>
-        <p:nvSpPr>
-          <p:cNvPr id="54" name="4인 팀 · 팀장"/>
-          <p:cNvSpPr txBox="1"/>
-          <p:nvPr/>
-        </p:nvSpPr>
-        <p:spPr>
-          <a:xfrm>
-            <a:off x="3812381" y="1865412"/>
-            <a:ext cx="772914" cy="165100"/>
-          </a:xfrm>
-          <a:prstGeom prst="rect">
-            <a:avLst/>
-          </a:prstGeom>
-          <a:noFill/>
-          <a:ln/>
-        </p:spPr>
-        <p:txBody>
-          <a:bodyPr wrap="none" lIns="0" tIns="0" rIns="0" bIns="0" rtlCol="0" anchor="ctr"/>
-          <a:lstStyle/>
-          <a:p>
-            <a:pPr algn="l" indent="0" marL="0">
-              <a:buNone/>
-            </a:pPr>
-            <a:r>
-              <a:rPr lang="ko-KR" altLang="en-US" sz="1100" dirty="0">
+            <a:endParaRPr lang="en-US" sz="950" dirty="0"/>
+          </a:p>
+        </p:txBody>
+      </p:sp>
+      <p:sp>
+        <p:nvSpPr>
+          <p:cNvPr id="82" name="4인 팀 · 팀장"/>
+          <p:cNvSpPr txBox="1"/>
+          <p:nvPr/>
+        </p:nvSpPr>
+        <p:spPr>
+          <a:xfrm>
+            <a:off x="3261519" y="1974453"/>
+            <a:ext cx="674489" cy="146050"/>
+          </a:xfrm>
+          <a:prstGeom prst="rect">
+            <a:avLst/>
+          </a:prstGeom>
+          <a:noFill/>
+          <a:ln/>
+        </p:spPr>
+        <p:txBody>
+          <a:bodyPr wrap="none" lIns="0" tIns="0" rIns="0" bIns="0" rtlCol="0" anchor="ctr"/>
+          <a:lstStyle/>
+          <a:p>
+            <a:pPr algn="l" indent="0" marL="0">
+              <a:buNone/>
+            </a:pPr>
+            <a:r>
+              <a:rPr lang="ko-KR" altLang="en-US" sz="950" dirty="0">
                 <a:solidFill>
                   <a:srgbClr val="0B6B33"/>
                 </a:solidFill>
@@ -2392,83 +3044,356 @@
               </a:rPr>
               <a:t>4인 팀 · 팀장</a:t>
             </a:r>
+            <a:endParaRPr lang="en-US" sz="950" dirty="0"/>
+          </a:p>
+        </p:txBody>
+      </p:sp>
+      <p:sp>
+        <p:nvSpPr>
+          <p:cNvPr id="83" name="‘유닛 모듈러 기반 사용자 맞춤형 리모델링 방법’"/>
+          <p:cNvSpPr txBox="1"/>
+          <p:nvPr/>
+        </p:nvSpPr>
+        <p:spPr>
+          <a:xfrm>
+            <a:off x="825500" y="2227064"/>
+            <a:ext cx="4759448" cy="298450"/>
+          </a:xfrm>
+          <a:prstGeom prst="rect">
+            <a:avLst/>
+          </a:prstGeom>
+          <a:noFill/>
+          <a:ln/>
+        </p:spPr>
+        <p:txBody>
+          <a:bodyPr wrap="none" lIns="0" tIns="0" rIns="0" bIns="0" rtlCol="0" anchor="ctr"/>
+          <a:lstStyle/>
+          <a:p>
+            <a:pPr algn="l" indent="0" marL="0">
+              <a:buNone/>
+            </a:pPr>
+            <a:r>
+              <a:rPr lang="ko-KR" altLang="en-US" sz="2000" spc="-70" kern="0" dirty="0">
+                <a:solidFill>
+                  <a:srgbClr val="0B2147"/>
+                </a:solidFill>
+                <a:latin typeface="Paperlogy 8 ExtraBold" pitchFamily="34" charset="0"/>
+                <a:ea typeface="Paperlogy 8 ExtraBold" pitchFamily="34" charset="-127"/>
+                <a:cs typeface="Paperlogy 8 ExtraBold" pitchFamily="34" charset="-120"/>
+              </a:rPr>
+              <a:t>‘유닛 모듈러 기반 사용자 맞춤형 리모델링 방법’</a:t>
+            </a:r>
+            <a:endParaRPr lang="en-US" sz="2000" dirty="0"/>
+          </a:p>
+        </p:txBody>
+      </p:sp>
+      <p:sp>
+        <p:nvSpPr>
+          <p:cNvPr id="84" name="사용자가 원하는 리모델링 규모에 따라 유닛 모듈러를 배치하고,"/>
+          <p:cNvSpPr txBox="1"/>
+          <p:nvPr/>
+        </p:nvSpPr>
+        <p:spPr>
+          <a:xfrm>
+            <a:off x="825500" y="2589014"/>
+            <a:ext cx="3552706" cy="165100"/>
+          </a:xfrm>
+          <a:prstGeom prst="rect">
+            <a:avLst/>
+          </a:prstGeom>
+          <a:noFill/>
+          <a:ln/>
+        </p:spPr>
+        <p:txBody>
+          <a:bodyPr wrap="none" lIns="0" tIns="0" rIns="0" bIns="0" rtlCol="0" anchor="ctr"/>
+          <a:lstStyle/>
+          <a:p>
+            <a:pPr algn="l" indent="0" marL="0">
+              <a:buNone/>
+            </a:pPr>
+            <a:r>
+              <a:rPr lang="ko-KR" altLang="en-US" sz="1100" spc="-22" kern="0" dirty="0">
+                <a:solidFill>
+                  <a:srgbClr val="4B5568"/>
+                </a:solidFill>
+                <a:latin typeface="Paperlogy 5 Medium" pitchFamily="34" charset="0"/>
+                <a:ea typeface="Paperlogy 5 Medium" pitchFamily="34" charset="-127"/>
+                <a:cs typeface="Paperlogy 5 Medium" pitchFamily="34" charset="-120"/>
+              </a:rPr>
+              <a:t>사용자가 원하는 리모델링 규모에 따라 유닛 모듈러를 배치하고,</a:t>
+            </a:r>
             <a:endParaRPr lang="en-US" sz="1100" dirty="0"/>
           </a:p>
         </p:txBody>
       </p:sp>
       <p:sp>
         <p:nvSpPr>
-          <p:cNvPr id="55" name="마감 3주 전 · 주제 미확정"/>
-          <p:cNvSpPr txBox="1"/>
-          <p:nvPr/>
-        </p:nvSpPr>
-        <p:spPr>
-          <a:xfrm>
-            <a:off x="5080595" y="1865412"/>
-            <a:ext cx="1482187" cy="165100"/>
-          </a:xfrm>
-          <a:prstGeom prst="rect">
-            <a:avLst/>
-          </a:prstGeom>
-          <a:noFill/>
-          <a:ln/>
-        </p:spPr>
-        <p:txBody>
-          <a:bodyPr wrap="none" lIns="0" tIns="0" rIns="0" bIns="0" rtlCol="0" anchor="ctr"/>
-          <a:lstStyle/>
-          <a:p>
-            <a:pPr algn="l" indent="0" marL="0">
-              <a:buNone/>
-            </a:pPr>
-            <a:r>
-              <a:rPr lang="ko-KR" altLang="en-US" sz="1100" dirty="0">
+          <p:cNvPr id="85" name="필요한 모듈 수와 자재 물량을 자동으로 산출하는 BIM 기반 리모델링 방"/>
+          <p:cNvSpPr txBox="1"/>
+          <p:nvPr/>
+        </p:nvSpPr>
+        <p:spPr>
+          <a:xfrm>
+            <a:off x="825500" y="2791520"/>
+            <a:ext cx="4436781" cy="165100"/>
+          </a:xfrm>
+          <a:prstGeom prst="rect">
+            <a:avLst/>
+          </a:prstGeom>
+          <a:noFill/>
+          <a:ln/>
+        </p:spPr>
+        <p:txBody>
+          <a:bodyPr wrap="none" lIns="0" tIns="0" rIns="0" bIns="0" rtlCol="0" anchor="ctr"/>
+          <a:lstStyle/>
+          <a:p>
+            <a:pPr algn="l" indent="0" marL="0">
+              <a:buNone/>
+            </a:pPr>
+            <a:r>
+              <a:rPr lang="ko-KR" altLang="en-US" sz="1100" spc="-22" kern="0" dirty="0">
                 <a:solidFill>
                   <a:srgbClr val="4B5568"/>
+                </a:solidFill>
+                <a:latin typeface="Paperlogy 5 Medium" pitchFamily="34" charset="0"/>
+                <a:ea typeface="Paperlogy 5 Medium" pitchFamily="34" charset="-127"/>
+                <a:cs typeface="Paperlogy 5 Medium" pitchFamily="34" charset="-120"/>
+              </a:rPr>
+              <a:t>필요한 모듈 수와 자재 물량을 자동으로 산출하는 BIM 기반 리모델링 방법 제안</a:t>
+            </a:r>
+            <a:endParaRPr lang="en-US" sz="1100" dirty="0"/>
+          </a:p>
+        </p:txBody>
+      </p:sp>
+      <p:sp>
+        <p:nvSpPr>
+          <p:cNvPr id="86" name="리모델링 규모 입력"/>
+          <p:cNvSpPr txBox="1"/>
+          <p:nvPr/>
+        </p:nvSpPr>
+        <p:spPr>
+          <a:xfrm>
+            <a:off x="6319490" y="2354064"/>
+            <a:ext cx="980097" cy="152400"/>
+          </a:xfrm>
+          <a:prstGeom prst="rect">
+            <a:avLst/>
+          </a:prstGeom>
+          <a:noFill/>
+          <a:ln/>
+        </p:spPr>
+        <p:txBody>
+          <a:bodyPr wrap="none" lIns="0" tIns="0" rIns="0" bIns="0" rtlCol="0" anchor="ctr"/>
+          <a:lstStyle/>
+          <a:p>
+            <a:pPr algn="l" indent="0" marL="0">
+              <a:buNone/>
+            </a:pPr>
+            <a:r>
+              <a:rPr lang="ko-KR" altLang="en-US" sz="1000" spc="-20" kern="0" dirty="0">
+                <a:solidFill>
+                  <a:srgbClr val="1C2536"/>
                 </a:solidFill>
                 <a:latin typeface="Paperlogy 7 Bold" pitchFamily="34" charset="0"/>
                 <a:ea typeface="Paperlogy 7 Bold" pitchFamily="34" charset="-127"/>
                 <a:cs typeface="Paperlogy 7 Bold" pitchFamily="34" charset="-120"/>
               </a:rPr>
-              <a:t>마감 3주 전 · 주제 미확정</a:t>
-            </a:r>
-            <a:endParaRPr lang="en-US" sz="1100" dirty="0"/>
-          </a:p>
-        </p:txBody>
-      </p:sp>
-      <p:sp>
-        <p:nvSpPr>
-          <p:cNvPr id="56" name="참신성"/>
-          <p:cNvSpPr txBox="1"/>
-          <p:nvPr/>
-        </p:nvSpPr>
-        <p:spPr>
-          <a:xfrm>
-            <a:off x="1087140" y="3404989"/>
-            <a:ext cx="365720" cy="146050"/>
-          </a:xfrm>
-          <a:prstGeom prst="rect">
-            <a:avLst/>
-          </a:prstGeom>
-          <a:noFill/>
-          <a:ln/>
-        </p:spPr>
-        <p:txBody>
-          <a:bodyPr wrap="none" lIns="0" tIns="0" rIns="0" bIns="0" rtlCol="0" anchor="ctr"/>
-          <a:lstStyle/>
-          <a:p>
-            <a:pPr algn="l" indent="0" marL="0">
-              <a:buNone/>
-            </a:pPr>
-            <a:r>
-              <a:rPr lang="ko-KR" altLang="en-US" sz="950" spc="-10" kern="0" dirty="0">
-                <a:solidFill>
-                  <a:srgbClr val="4B5568"/>
+              <a:t>리모델링 규모 입력</a:t>
+            </a:r>
+            <a:endParaRPr lang="en-US" sz="1000" dirty="0"/>
+          </a:p>
+        </p:txBody>
+      </p:sp>
+      <p:sp>
+        <p:nvSpPr>
+          <p:cNvPr id="87" name="유닛 모듈러 배치"/>
+          <p:cNvSpPr txBox="1"/>
+          <p:nvPr/>
+        </p:nvSpPr>
+        <p:spPr>
+          <a:xfrm>
+            <a:off x="8215610" y="2354064"/>
+            <a:ext cx="866180" cy="152400"/>
+          </a:xfrm>
+          <a:prstGeom prst="rect">
+            <a:avLst/>
+          </a:prstGeom>
+          <a:noFill/>
+          <a:ln/>
+        </p:spPr>
+        <p:txBody>
+          <a:bodyPr wrap="none" lIns="0" tIns="0" rIns="0" bIns="0" rtlCol="0" anchor="ctr"/>
+          <a:lstStyle/>
+          <a:p>
+            <a:pPr algn="l" indent="0" marL="0">
+              <a:buNone/>
+            </a:pPr>
+            <a:r>
+              <a:rPr lang="ko-KR" altLang="en-US" sz="1000" spc="-20" kern="0" dirty="0">
+                <a:solidFill>
+                  <a:srgbClr val="1C2536"/>
                 </a:solidFill>
                 <a:latin typeface="Paperlogy 7 Bold" pitchFamily="34" charset="0"/>
                 <a:ea typeface="Paperlogy 7 Bold" pitchFamily="34" charset="-127"/>
                 <a:cs typeface="Paperlogy 7 Bold" pitchFamily="34" charset="-120"/>
               </a:rPr>
-              <a:t>참신성</a:t>
+              <a:t>유닛 모듈러 배치</a:t>
+            </a:r>
+            <a:endParaRPr lang="en-US" sz="1000" dirty="0"/>
+          </a:p>
+        </p:txBody>
+      </p:sp>
+      <p:sp>
+        <p:nvSpPr>
+          <p:cNvPr id="88" name="모듈 수 · 자재 물량 자동 산출"/>
+          <p:cNvSpPr txBox="1"/>
+          <p:nvPr/>
+        </p:nvSpPr>
+        <p:spPr>
+          <a:xfrm>
+            <a:off x="9894838" y="2354064"/>
+            <a:ext cx="1477560" cy="152400"/>
+          </a:xfrm>
+          <a:prstGeom prst="rect">
+            <a:avLst/>
+          </a:prstGeom>
+          <a:noFill/>
+          <a:ln/>
+        </p:spPr>
+        <p:txBody>
+          <a:bodyPr wrap="none" lIns="0" tIns="0" rIns="0" bIns="0" rtlCol="0" anchor="ctr"/>
+          <a:lstStyle/>
+          <a:p>
+            <a:pPr algn="l" indent="0" marL="0">
+              <a:buNone/>
+            </a:pPr>
+            <a:r>
+              <a:rPr lang="ko-KR" altLang="en-US" sz="1000" spc="-20" kern="0" dirty="0">
+                <a:solidFill>
+                  <a:srgbClr val="004B8D"/>
+                </a:solidFill>
+                <a:latin typeface="Paperlogy 8 ExtraBold" pitchFamily="34" charset="0"/>
+                <a:ea typeface="Paperlogy 8 ExtraBold" pitchFamily="34" charset="-127"/>
+                <a:cs typeface="Paperlogy 8 ExtraBold" pitchFamily="34" charset="-120"/>
+              </a:rPr>
+              <a:t>모듈 수 · 자재 물량 자동 산출</a:t>
+            </a:r>
+            <a:endParaRPr lang="en-US" sz="1000" dirty="0"/>
+          </a:p>
+        </p:txBody>
+      </p:sp>
+      <p:sp>
+        <p:nvSpPr>
+          <p:cNvPr id="89" name="결과물"/>
+          <p:cNvSpPr txBox="1"/>
+          <p:nvPr/>
+        </p:nvSpPr>
+        <p:spPr>
+          <a:xfrm>
+            <a:off x="6451600" y="2753023"/>
+            <a:ext cx="411262" cy="165100"/>
+          </a:xfrm>
+          <a:prstGeom prst="rect">
+            <a:avLst/>
+          </a:prstGeom>
+          <a:noFill/>
+          <a:ln/>
+        </p:spPr>
+        <p:txBody>
+          <a:bodyPr wrap="none" lIns="0" tIns="0" rIns="0" bIns="0" rtlCol="0" anchor="ctr"/>
+          <a:lstStyle/>
+          <a:p>
+            <a:pPr algn="l" indent="0" marL="0">
+              <a:buNone/>
+            </a:pPr>
+            <a:r>
+              <a:rPr lang="ko-KR" altLang="en-US" sz="1100" spc="-22" kern="0" dirty="0">
+                <a:solidFill>
+                  <a:srgbClr val="8A5A00"/>
+                </a:solidFill>
+                <a:latin typeface="Paperlogy 8 ExtraBold" pitchFamily="34" charset="0"/>
+                <a:ea typeface="Paperlogy 8 ExtraBold" pitchFamily="34" charset="-127"/>
+                <a:cs typeface="Paperlogy 8 ExtraBold" pitchFamily="34" charset="-120"/>
+              </a:rPr>
+              <a:t>결과물</a:t>
+            </a:r>
+            <a:endParaRPr lang="en-US" sz="1100" dirty="0"/>
+          </a:p>
+        </p:txBody>
+      </p:sp>
+      <p:sp>
+        <p:nvSpPr>
+          <p:cNvPr id="90" name="유닛 모듈러 기반 사용자 맞춤형 리모델링 앱 개발 아이디어 시연 영상"/>
+          <p:cNvSpPr txBox="1"/>
+          <p:nvPr/>
+        </p:nvSpPr>
+        <p:spPr>
+          <a:xfrm>
+            <a:off x="6977162" y="2753023"/>
+            <a:ext cx="3862016" cy="165100"/>
+          </a:xfrm>
+          <a:prstGeom prst="rect">
+            <a:avLst/>
+          </a:prstGeom>
+          <a:noFill/>
+          <a:ln/>
+        </p:spPr>
+        <p:txBody>
+          <a:bodyPr wrap="none" lIns="0" tIns="0" rIns="0" bIns="0" rtlCol="0" anchor="ctr"/>
+          <a:lstStyle/>
+          <a:p>
+            <a:pPr algn="l" indent="0" marL="0">
+              <a:buNone/>
+            </a:pPr>
+            <a:r>
+              <a:rPr lang="ko-KR" altLang="en-US" sz="1100" spc="-22" kern="0" dirty="0">
+                <a:solidFill>
+                  <a:srgbClr val="8A5A00"/>
+                </a:solidFill>
+                <a:latin typeface="Paperlogy 6 SemiBold" pitchFamily="34" charset="0"/>
+                <a:ea typeface="Paperlogy 6 SemiBold" pitchFamily="34" charset="-127"/>
+                <a:cs typeface="Paperlogy 6 SemiBold" pitchFamily="34" charset="-120"/>
+              </a:rPr>
+              <a:t>유닛 모듈러 기반 사용자 맞춤형 리모델링 앱 개발 아이디어 시연 영상</a:t>
+            </a:r>
+            <a:endParaRPr lang="en-US" sz="1100" dirty="0"/>
+          </a:p>
+        </p:txBody>
+      </p:sp>
+      <p:sp>
+        <p:nvSpPr>
+          <p:cNvPr id="91" name="01"/>
+          <p:cNvSpPr txBox="1"/>
+          <p:nvPr/>
+        </p:nvSpPr>
+        <p:spPr>
+          <a:xfrm>
+            <a:off x="825500" y="3270250"/>
+            <a:ext cx="221357" cy="146050"/>
+          </a:xfrm>
+          <a:prstGeom prst="rect">
+            <a:avLst/>
+          </a:prstGeom>
+          <a:noFill/>
+          <a:ln/>
+        </p:spPr>
+        <p:txBody>
+          <a:bodyPr wrap="none" lIns="0" tIns="0" rIns="0" bIns="0" rtlCol="0" anchor="ctr"/>
+          <a:lstStyle/>
+          <a:p>
+            <a:pPr algn="l" indent="0" marL="0">
+              <a:buNone/>
+            </a:pPr>
+            <a:r>
+              <a:rPr lang="ko-KR" altLang="en-US" sz="950" spc="38" kern="0" dirty="0">
+                <a:solidFill>
+                  <a:srgbClr val="8691A5"/>
+                </a:solidFill>
+                <a:latin typeface="Paperlogy 8 ExtraBold" pitchFamily="34" charset="0"/>
+                <a:ea typeface="Paperlogy 8 ExtraBold" pitchFamily="34" charset="-127"/>
+                <a:cs typeface="Paperlogy 8 ExtraBold" pitchFamily="34" charset="-120"/>
+              </a:rPr>
+              <a:t>01</a:t>
             </a:r>
             <a:endParaRPr lang="en-US" sz="950" dirty="0"/>
           </a:p>
@@ -2476,38 +3401,38 @@
       </p:sp>
       <p:sp>
         <p:nvSpPr>
-          <p:cNvPr id="57" name="구현 가능성"/>
-          <p:cNvSpPr txBox="1"/>
-          <p:nvPr/>
-        </p:nvSpPr>
-        <p:spPr>
-          <a:xfrm>
-            <a:off x="2290316" y="3404989"/>
-            <a:ext cx="600968" cy="146050"/>
-          </a:xfrm>
-          <a:prstGeom prst="rect">
-            <a:avLst/>
-          </a:prstGeom>
-          <a:noFill/>
-          <a:ln/>
-        </p:spPr>
-        <p:txBody>
-          <a:bodyPr wrap="none" lIns="0" tIns="0" rIns="0" bIns="0" rtlCol="0" anchor="ctr"/>
-          <a:lstStyle/>
-          <a:p>
-            <a:pPr algn="l" indent="0" marL="0">
-              <a:buNone/>
-            </a:pPr>
-            <a:r>
-              <a:rPr lang="ko-KR" altLang="en-US" sz="950" spc="-10" kern="0" dirty="0">
-                <a:solidFill>
-                  <a:srgbClr val="4B5568"/>
+          <p:cNvPr id="92" name="CONFLICT"/>
+          <p:cNvSpPr txBox="1"/>
+          <p:nvPr/>
+        </p:nvSpPr>
+        <p:spPr>
+          <a:xfrm>
+            <a:off x="1059557" y="3270250"/>
+            <a:ext cx="845939" cy="146050"/>
+          </a:xfrm>
+          <a:prstGeom prst="rect">
+            <a:avLst/>
+          </a:prstGeom>
+          <a:noFill/>
+          <a:ln/>
+        </p:spPr>
+        <p:txBody>
+          <a:bodyPr wrap="none" lIns="0" tIns="0" rIns="0" bIns="0" rtlCol="0" anchor="ctr"/>
+          <a:lstStyle/>
+          <a:p>
+            <a:pPr algn="l" indent="0" marL="0">
+              <a:buNone/>
+            </a:pPr>
+            <a:r>
+              <a:rPr lang="ko-KR" altLang="en-US" sz="950" spc="152" kern="0" dirty="0">
+                <a:solidFill>
+                  <a:srgbClr val="2A78DD"/>
                 </a:solidFill>
                 <a:latin typeface="Paperlogy 7 Bold" pitchFamily="34" charset="0"/>
                 <a:ea typeface="Paperlogy 7 Bold" pitchFamily="34" charset="-127"/>
                 <a:cs typeface="Paperlogy 7 Bold" pitchFamily="34" charset="-120"/>
               </a:rPr>
-              <a:t>구현 가능성</a:t>
+              <a:t>CONFLICT</a:t>
             </a:r>
             <a:endParaRPr lang="en-US" sz="950" dirty="0"/>
           </a:p>
@@ -2515,116 +3440,233 @@
       </p:sp>
       <p:sp>
         <p:nvSpPr>
-          <p:cNvPr id="58" name="공통"/>
-          <p:cNvSpPr txBox="1"/>
-          <p:nvPr/>
-        </p:nvSpPr>
-        <p:spPr>
-          <a:xfrm>
-            <a:off x="4563070" y="2950964"/>
-            <a:ext cx="271859" cy="152400"/>
-          </a:xfrm>
-          <a:prstGeom prst="rect">
-            <a:avLst/>
-          </a:prstGeom>
-          <a:noFill/>
-          <a:ln/>
-        </p:spPr>
-        <p:txBody>
-          <a:bodyPr wrap="none" lIns="0" tIns="0" rIns="0" bIns="0" rtlCol="0" anchor="ctr"/>
-          <a:lstStyle/>
-          <a:p>
-            <a:pPr algn="ctr" indent="0" marL="0">
-              <a:buNone/>
-            </a:pPr>
-            <a:r>
-              <a:rPr lang="ko-KR" altLang="en-US" sz="1000" spc="-10" kern="0" dirty="0">
-                <a:solidFill>
-                  <a:srgbClr val="004B8D"/>
+          <p:cNvPr id="93" name="02"/>
+          <p:cNvSpPr txBox="1"/>
+          <p:nvPr/>
+        </p:nvSpPr>
+        <p:spPr>
+          <a:xfrm>
+            <a:off x="2603500" y="3270250"/>
+            <a:ext cx="221357" cy="146050"/>
+          </a:xfrm>
+          <a:prstGeom prst="rect">
+            <a:avLst/>
+          </a:prstGeom>
+          <a:noFill/>
+          <a:ln/>
+        </p:spPr>
+        <p:txBody>
+          <a:bodyPr wrap="none" lIns="0" tIns="0" rIns="0" bIns="0" rtlCol="0" anchor="ctr"/>
+          <a:lstStyle/>
+          <a:p>
+            <a:pPr algn="l" indent="0" marL="0">
+              <a:buNone/>
+            </a:pPr>
+            <a:r>
+              <a:rPr lang="ko-KR" altLang="en-US" sz="950" spc="38" kern="0" dirty="0">
+                <a:solidFill>
+                  <a:srgbClr val="8691A5"/>
+                </a:solidFill>
+                <a:latin typeface="Paperlogy 8 ExtraBold" pitchFamily="34" charset="0"/>
+                <a:ea typeface="Paperlogy 8 ExtraBold" pitchFamily="34" charset="-127"/>
+                <a:cs typeface="Paperlogy 8 ExtraBold" pitchFamily="34" charset="-120"/>
+              </a:rPr>
+              <a:t>02</a:t>
+            </a:r>
+            <a:endParaRPr lang="en-US" sz="950" dirty="0"/>
+          </a:p>
+        </p:txBody>
+      </p:sp>
+      <p:sp>
+        <p:nvSpPr>
+          <p:cNvPr id="94" name="ALIGN"/>
+          <p:cNvSpPr txBox="1"/>
+          <p:nvPr/>
+        </p:nvSpPr>
+        <p:spPr>
+          <a:xfrm>
+            <a:off x="2837557" y="3270250"/>
+            <a:ext cx="542330" cy="146050"/>
+          </a:xfrm>
+          <a:prstGeom prst="rect">
+            <a:avLst/>
+          </a:prstGeom>
+          <a:noFill/>
+          <a:ln/>
+        </p:spPr>
+        <p:txBody>
+          <a:bodyPr wrap="none" lIns="0" tIns="0" rIns="0" bIns="0" rtlCol="0" anchor="ctr"/>
+          <a:lstStyle/>
+          <a:p>
+            <a:pPr algn="l" indent="0" marL="0">
+              <a:buNone/>
+            </a:pPr>
+            <a:r>
+              <a:rPr lang="ko-KR" altLang="en-US" sz="950" spc="152" kern="0" dirty="0">
+                <a:solidFill>
+                  <a:srgbClr val="2A78DD"/>
                 </a:solidFill>
                 <a:latin typeface="Paperlogy 7 Bold" pitchFamily="34" charset="0"/>
                 <a:ea typeface="Paperlogy 7 Bold" pitchFamily="34" charset="-127"/>
                 <a:cs typeface="Paperlogy 7 Bold" pitchFamily="34" charset="-120"/>
               </a:rPr>
-              <a:t>공통</a:t>
-            </a:r>
-            <a:endParaRPr lang="en-US" sz="1000" dirty="0"/>
-          </a:p>
-        </p:txBody>
-      </p:sp>
-      <p:sp>
-        <p:nvSpPr>
-          <p:cNvPr id="59" name="기준"/>
-          <p:cNvSpPr txBox="1"/>
-          <p:nvPr/>
-        </p:nvSpPr>
-        <p:spPr>
-          <a:xfrm>
-            <a:off x="4563070" y="3097014"/>
-            <a:ext cx="271859" cy="152400"/>
-          </a:xfrm>
-          <a:prstGeom prst="rect">
-            <a:avLst/>
-          </a:prstGeom>
-          <a:noFill/>
-          <a:ln/>
-        </p:spPr>
-        <p:txBody>
-          <a:bodyPr wrap="none" lIns="0" tIns="0" rIns="0" bIns="0" rtlCol="0" anchor="ctr"/>
-          <a:lstStyle/>
-          <a:p>
-            <a:pPr algn="ctr" indent="0" marL="0">
-              <a:buNone/>
-            </a:pPr>
-            <a:r>
-              <a:rPr lang="ko-KR" altLang="en-US" sz="1000" spc="-10" kern="0" dirty="0">
-                <a:solidFill>
-                  <a:srgbClr val="004B8D"/>
+              <a:t>ALIGN</a:t>
+            </a:r>
+            <a:endParaRPr lang="en-US" sz="950" dirty="0"/>
+          </a:p>
+        </p:txBody>
+      </p:sp>
+      <p:sp>
+        <p:nvSpPr>
+          <p:cNvPr id="95" name="03"/>
+          <p:cNvSpPr txBox="1"/>
+          <p:nvPr/>
+        </p:nvSpPr>
+        <p:spPr>
+          <a:xfrm>
+            <a:off x="4660900" y="3270250"/>
+            <a:ext cx="221357" cy="146050"/>
+          </a:xfrm>
+          <a:prstGeom prst="rect">
+            <a:avLst/>
+          </a:prstGeom>
+          <a:noFill/>
+          <a:ln/>
+        </p:spPr>
+        <p:txBody>
+          <a:bodyPr wrap="none" lIns="0" tIns="0" rIns="0" bIns="0" rtlCol="0" anchor="ctr"/>
+          <a:lstStyle/>
+          <a:p>
+            <a:pPr algn="l" indent="0" marL="0">
+              <a:buNone/>
+            </a:pPr>
+            <a:r>
+              <a:rPr lang="ko-KR" altLang="en-US" sz="950" spc="38" kern="0" dirty="0">
+                <a:solidFill>
+                  <a:srgbClr val="8691A5"/>
+                </a:solidFill>
+                <a:latin typeface="Paperlogy 8 ExtraBold" pitchFamily="34" charset="0"/>
+                <a:ea typeface="Paperlogy 8 ExtraBold" pitchFamily="34" charset="-127"/>
+                <a:cs typeface="Paperlogy 8 ExtraBold" pitchFamily="34" charset="-120"/>
+              </a:rPr>
+              <a:t>03</a:t>
+            </a:r>
+            <a:endParaRPr lang="en-US" sz="950" dirty="0"/>
+          </a:p>
+        </p:txBody>
+      </p:sp>
+      <p:sp>
+        <p:nvSpPr>
+          <p:cNvPr id="96" name="ONE TEAM"/>
+          <p:cNvSpPr txBox="1"/>
+          <p:nvPr/>
+        </p:nvSpPr>
+        <p:spPr>
+          <a:xfrm>
+            <a:off x="4894957" y="3270250"/>
+            <a:ext cx="878681" cy="146050"/>
+          </a:xfrm>
+          <a:prstGeom prst="rect">
+            <a:avLst/>
+          </a:prstGeom>
+          <a:noFill/>
+          <a:ln/>
+        </p:spPr>
+        <p:txBody>
+          <a:bodyPr wrap="none" lIns="0" tIns="0" rIns="0" bIns="0" rtlCol="0" anchor="ctr"/>
+          <a:lstStyle/>
+          <a:p>
+            <a:pPr algn="l" indent="0" marL="0">
+              <a:buNone/>
+            </a:pPr>
+            <a:r>
+              <a:rPr lang="ko-KR" altLang="en-US" sz="950" spc="152" kern="0" dirty="0">
+                <a:solidFill>
+                  <a:srgbClr val="2A78DD"/>
                 </a:solidFill>
                 <a:latin typeface="Paperlogy 7 Bold" pitchFamily="34" charset="0"/>
                 <a:ea typeface="Paperlogy 7 Bold" pitchFamily="34" charset="-127"/>
                 <a:cs typeface="Paperlogy 7 Bold" pitchFamily="34" charset="-120"/>
               </a:rPr>
-              <a:t>기준</a:t>
-            </a:r>
-            <a:endParaRPr lang="en-US" sz="1000" dirty="0"/>
-          </a:p>
-        </p:txBody>
-      </p:sp>
-      <p:sp>
-        <p:nvSpPr>
-          <p:cNvPr id="60" name="이틀마다 공유"/>
-          <p:cNvSpPr txBox="1"/>
-          <p:nvPr/>
-        </p:nvSpPr>
-        <p:spPr>
-          <a:xfrm>
-            <a:off x="7165429" y="3030339"/>
-            <a:ext cx="705941" cy="146050"/>
-          </a:xfrm>
-          <a:prstGeom prst="rect">
-            <a:avLst/>
-          </a:prstGeom>
-          <a:noFill/>
-          <a:ln/>
-        </p:spPr>
-        <p:txBody>
-          <a:bodyPr wrap="none" lIns="0" tIns="0" rIns="0" bIns="0" rtlCol="0" anchor="ctr"/>
-          <a:lstStyle/>
-          <a:p>
-            <a:pPr algn="l" indent="0" marL="0">
-              <a:buNone/>
-            </a:pPr>
-            <a:r>
-              <a:rPr lang="ko-KR" altLang="en-US" sz="950" spc="-10" kern="0" dirty="0">
-                <a:solidFill>
-                  <a:srgbClr val="0B6B33"/>
+              <a:t>ONE TEAM</a:t>
+            </a:r>
+            <a:endParaRPr lang="en-US" sz="950" dirty="0"/>
+          </a:p>
+        </p:txBody>
+      </p:sp>
+      <p:sp>
+        <p:nvSpPr>
+          <p:cNvPr id="97" name="04"/>
+          <p:cNvSpPr txBox="1"/>
+          <p:nvPr/>
+        </p:nvSpPr>
+        <p:spPr>
+          <a:xfrm>
+            <a:off x="9893300" y="3270250"/>
+            <a:ext cx="221357" cy="146050"/>
+          </a:xfrm>
+          <a:prstGeom prst="rect">
+            <a:avLst/>
+          </a:prstGeom>
+          <a:noFill/>
+          <a:ln/>
+        </p:spPr>
+        <p:txBody>
+          <a:bodyPr wrap="none" lIns="0" tIns="0" rIns="0" bIns="0" rtlCol="0" anchor="ctr"/>
+          <a:lstStyle/>
+          <a:p>
+            <a:pPr algn="l" indent="0" marL="0">
+              <a:buNone/>
+            </a:pPr>
+            <a:r>
+              <a:rPr lang="ko-KR" altLang="en-US" sz="950" spc="38" kern="0" dirty="0">
+                <a:solidFill>
+                  <a:srgbClr val="8691A5"/>
+                </a:solidFill>
+                <a:latin typeface="Paperlogy 8 ExtraBold" pitchFamily="34" charset="0"/>
+                <a:ea typeface="Paperlogy 8 ExtraBold" pitchFamily="34" charset="-127"/>
+                <a:cs typeface="Paperlogy 8 ExtraBold" pitchFamily="34" charset="-120"/>
+              </a:rPr>
+              <a:t>04</a:t>
+            </a:r>
+            <a:endParaRPr lang="en-US" sz="950" dirty="0"/>
+          </a:p>
+        </p:txBody>
+      </p:sp>
+      <p:sp>
+        <p:nvSpPr>
+          <p:cNvPr id="98" name="RESULT"/>
+          <p:cNvSpPr txBox="1"/>
+          <p:nvPr/>
+        </p:nvSpPr>
+        <p:spPr>
+          <a:xfrm>
+            <a:off x="10127357" y="3270250"/>
+            <a:ext cx="646311" cy="146050"/>
+          </a:xfrm>
+          <a:prstGeom prst="rect">
+            <a:avLst/>
+          </a:prstGeom>
+          <a:noFill/>
+          <a:ln/>
+        </p:spPr>
+        <p:txBody>
+          <a:bodyPr wrap="none" lIns="0" tIns="0" rIns="0" bIns="0" rtlCol="0" anchor="ctr"/>
+          <a:lstStyle/>
+          <a:p>
+            <a:pPr algn="l" indent="0" marL="0">
+              <a:buNone/>
+            </a:pPr>
+            <a:r>
+              <a:rPr lang="ko-KR" altLang="en-US" sz="950" spc="152" kern="0" dirty="0">
+                <a:solidFill>
+                  <a:srgbClr val="2A78DD"/>
                 </a:solidFill>
                 <a:latin typeface="Paperlogy 7 Bold" pitchFamily="34" charset="0"/>
                 <a:ea typeface="Paperlogy 7 Bold" pitchFamily="34" charset="-127"/>
                 <a:cs typeface="Paperlogy 7 Bold" pitchFamily="34" charset="-120"/>
               </a:rPr>
-              <a:t>이틀마다 공유</a:t>
+              <a:t>RESULT</a:t>
             </a:r>
             <a:endParaRPr lang="en-US" sz="950" dirty="0"/>
           </a:p>
@@ -2632,14 +3674,248 @@
       </p:sp>
       <p:sp>
         <p:nvSpPr>
-          <p:cNvPr id="61" name="장려상"/>
-          <p:cNvSpPr txBox="1"/>
-          <p:nvPr/>
-        </p:nvSpPr>
-        <p:spPr>
-          <a:xfrm>
-            <a:off x="10803186" y="3016696"/>
-            <a:ext cx="415429" cy="165100"/>
+          <p:cNvPr id="99" name="주제 선정 의견 충돌"/>
+          <p:cNvSpPr txBox="1"/>
+          <p:nvPr/>
+        </p:nvSpPr>
+        <p:spPr>
+          <a:xfrm>
+            <a:off x="609600" y="3508375"/>
+            <a:ext cx="1378698" cy="209550"/>
+          </a:xfrm>
+          <a:prstGeom prst="rect">
+            <a:avLst/>
+          </a:prstGeom>
+          <a:noFill/>
+          <a:ln/>
+        </p:spPr>
+        <p:txBody>
+          <a:bodyPr wrap="none" lIns="0" tIns="0" rIns="0" bIns="0" rtlCol="0" anchor="ctr"/>
+          <a:lstStyle/>
+          <a:p>
+            <a:pPr algn="l" indent="0" marL="0">
+              <a:buNone/>
+            </a:pPr>
+            <a:r>
+              <a:rPr lang="ko-KR" altLang="en-US" sz="1400" spc="-49" kern="0" dirty="0">
+                <a:solidFill>
+                  <a:srgbClr val="0B2147"/>
+                </a:solidFill>
+                <a:latin typeface="Paperlogy 7 Bold" pitchFamily="34" charset="0"/>
+                <a:ea typeface="Paperlogy 7 Bold" pitchFamily="34" charset="-127"/>
+                <a:cs typeface="Paperlogy 7 Bold" pitchFamily="34" charset="-120"/>
+              </a:rPr>
+              <a:t>주제 선정 의견 충돌</a:t>
+            </a:r>
+            <a:endParaRPr lang="en-US" sz="1400" dirty="0"/>
+          </a:p>
+        </p:txBody>
+      </p:sp>
+      <p:sp>
+        <p:nvSpPr>
+          <p:cNvPr id="100" name="참신성"/>
+          <p:cNvSpPr txBox="1"/>
+          <p:nvPr/>
+        </p:nvSpPr>
+        <p:spPr>
+          <a:xfrm>
+            <a:off x="847626" y="4810125"/>
+            <a:ext cx="362148" cy="146050"/>
+          </a:xfrm>
+          <a:prstGeom prst="rect">
+            <a:avLst/>
+          </a:prstGeom>
+          <a:noFill/>
+          <a:ln/>
+        </p:spPr>
+        <p:txBody>
+          <a:bodyPr wrap="none" lIns="0" tIns="0" rIns="0" bIns="0" rtlCol="0" anchor="ctr"/>
+          <a:lstStyle/>
+          <a:p>
+            <a:pPr algn="l" indent="0" marL="0">
+              <a:buNone/>
+            </a:pPr>
+            <a:r>
+              <a:rPr lang="ko-KR" altLang="en-US" sz="950" spc="-19" kern="0" dirty="0">
+                <a:solidFill>
+                  <a:srgbClr val="4B5568"/>
+                </a:solidFill>
+                <a:latin typeface="Paperlogy 7 Bold" pitchFamily="34" charset="0"/>
+                <a:ea typeface="Paperlogy 7 Bold" pitchFamily="34" charset="-127"/>
+                <a:cs typeface="Paperlogy 7 Bold" pitchFamily="34" charset="-120"/>
+              </a:rPr>
+              <a:t>참신성</a:t>
+            </a:r>
+            <a:endParaRPr lang="en-US" sz="950" dirty="0"/>
+          </a:p>
+        </p:txBody>
+      </p:sp>
+      <p:sp>
+        <p:nvSpPr>
+          <p:cNvPr id="101" name="구현 가능성"/>
+          <p:cNvSpPr txBox="1"/>
+          <p:nvPr/>
+        </p:nvSpPr>
+        <p:spPr>
+          <a:xfrm>
+            <a:off x="1481137" y="4810125"/>
+            <a:ext cx="593725" cy="146050"/>
+          </a:xfrm>
+          <a:prstGeom prst="rect">
+            <a:avLst/>
+          </a:prstGeom>
+          <a:noFill/>
+          <a:ln/>
+        </p:spPr>
+        <p:txBody>
+          <a:bodyPr wrap="none" lIns="0" tIns="0" rIns="0" bIns="0" rtlCol="0" anchor="ctr"/>
+          <a:lstStyle/>
+          <a:p>
+            <a:pPr algn="l" indent="0" marL="0">
+              <a:buNone/>
+            </a:pPr>
+            <a:r>
+              <a:rPr lang="ko-KR" altLang="en-US" sz="950" spc="-19" kern="0" dirty="0">
+                <a:solidFill>
+                  <a:srgbClr val="4B5568"/>
+                </a:solidFill>
+                <a:latin typeface="Paperlogy 7 Bold" pitchFamily="34" charset="0"/>
+                <a:ea typeface="Paperlogy 7 Bold" pitchFamily="34" charset="-127"/>
+                <a:cs typeface="Paperlogy 7 Bold" pitchFamily="34" charset="-120"/>
+              </a:rPr>
+              <a:t>구현 가능성</a:t>
+            </a:r>
+            <a:endParaRPr lang="en-US" sz="950" dirty="0"/>
+          </a:p>
+        </p:txBody>
+      </p:sp>
+      <p:sp>
+        <p:nvSpPr>
+          <p:cNvPr id="102" name="마감 3주 전까지"/>
+          <p:cNvSpPr txBox="1"/>
+          <p:nvPr/>
+        </p:nvSpPr>
+        <p:spPr>
+          <a:xfrm>
+            <a:off x="889000" y="5220494"/>
+            <a:ext cx="912471" cy="165100"/>
+          </a:xfrm>
+          <a:prstGeom prst="rect">
+            <a:avLst/>
+          </a:prstGeom>
+          <a:noFill/>
+          <a:ln/>
+        </p:spPr>
+        <p:txBody>
+          <a:bodyPr wrap="none" lIns="0" tIns="0" rIns="0" bIns="0" rtlCol="0" anchor="ctr"/>
+          <a:lstStyle/>
+          <a:p>
+            <a:pPr algn="l" indent="0" marL="0">
+              <a:buNone/>
+            </a:pPr>
+            <a:r>
+              <a:rPr lang="ko-KR" altLang="en-US" sz="1100" spc="-28" kern="0" dirty="0">
+                <a:solidFill>
+                  <a:srgbClr val="1C2536"/>
+                </a:solidFill>
+                <a:latin typeface="Paperlogy 6 SemiBold" pitchFamily="34" charset="0"/>
+                <a:ea typeface="Paperlogy 6 SemiBold" pitchFamily="34" charset="-127"/>
+                <a:cs typeface="Paperlogy 6 SemiBold" pitchFamily="34" charset="-120"/>
+              </a:rPr>
+              <a:t>마감 3주 전까지</a:t>
+            </a:r>
+            <a:endParaRPr lang="en-US" sz="1100" dirty="0"/>
+          </a:p>
+        </p:txBody>
+      </p:sp>
+      <p:sp>
+        <p:nvSpPr>
+          <p:cNvPr id="103" name="주제 미확정"/>
+          <p:cNvSpPr txBox="1"/>
+          <p:nvPr/>
+        </p:nvSpPr>
+        <p:spPr>
+          <a:xfrm>
+            <a:off x="889000" y="5416054"/>
+            <a:ext cx="675283" cy="165100"/>
+          </a:xfrm>
+          <a:prstGeom prst="rect">
+            <a:avLst/>
+          </a:prstGeom>
+          <a:noFill/>
+          <a:ln/>
+        </p:spPr>
+        <p:txBody>
+          <a:bodyPr wrap="none" lIns="0" tIns="0" rIns="0" bIns="0" rtlCol="0" anchor="ctr"/>
+          <a:lstStyle/>
+          <a:p>
+            <a:pPr algn="l" indent="0" marL="0">
+              <a:buNone/>
+            </a:pPr>
+            <a:r>
+              <a:rPr lang="ko-KR" altLang="en-US" sz="1100" spc="-28" kern="0" dirty="0">
+                <a:solidFill>
+                  <a:srgbClr val="1C2536"/>
+                </a:solidFill>
+                <a:latin typeface="Paperlogy 6 SemiBold" pitchFamily="34" charset="0"/>
+                <a:ea typeface="Paperlogy 6 SemiBold" pitchFamily="34" charset="-127"/>
+                <a:cs typeface="Paperlogy 6 SemiBold" pitchFamily="34" charset="-120"/>
+              </a:rPr>
+              <a:t>주제 미확정</a:t>
+            </a:r>
+            <a:endParaRPr lang="en-US" sz="1100" dirty="0"/>
+          </a:p>
+        </p:txBody>
+      </p:sp>
+      <p:sp>
+        <p:nvSpPr>
+          <p:cNvPr id="104" name="의견 조율 · 주제 확정"/>
+          <p:cNvSpPr txBox="1"/>
+          <p:nvPr/>
+        </p:nvSpPr>
+        <p:spPr>
+          <a:xfrm>
+            <a:off x="2387600" y="3508375"/>
+            <a:ext cx="1467674" cy="209550"/>
+          </a:xfrm>
+          <a:prstGeom prst="rect">
+            <a:avLst/>
+          </a:prstGeom>
+          <a:noFill/>
+          <a:ln/>
+        </p:spPr>
+        <p:txBody>
+          <a:bodyPr wrap="none" lIns="0" tIns="0" rIns="0" bIns="0" rtlCol="0" anchor="ctr"/>
+          <a:lstStyle/>
+          <a:p>
+            <a:pPr algn="l" indent="0" marL="0">
+              <a:buNone/>
+            </a:pPr>
+            <a:r>
+              <a:rPr lang="ko-KR" altLang="en-US" sz="1400" spc="-49" kern="0" dirty="0">
+                <a:solidFill>
+                  <a:srgbClr val="0B2147"/>
+                </a:solidFill>
+                <a:latin typeface="Paperlogy 7 Bold" pitchFamily="34" charset="0"/>
+                <a:ea typeface="Paperlogy 7 Bold" pitchFamily="34" charset="-127"/>
+                <a:cs typeface="Paperlogy 7 Bold" pitchFamily="34" charset="-120"/>
+              </a:rPr>
+              <a:t>의견 조율 · 주제 확정</a:t>
+            </a:r>
+            <a:endParaRPr lang="en-US" sz="1400" dirty="0"/>
+          </a:p>
+        </p:txBody>
+      </p:sp>
+      <p:sp>
+        <p:nvSpPr>
+          <p:cNvPr id="105" name="경청"/>
+          <p:cNvSpPr txBox="1"/>
+          <p:nvPr/>
+        </p:nvSpPr>
+        <p:spPr>
+          <a:xfrm>
+            <a:off x="2753717" y="4218285"/>
+            <a:ext cx="258366" cy="146050"/>
           </a:xfrm>
           <a:prstGeom prst="rect">
             <a:avLst/>
@@ -2655,15 +3931,210 @@
               <a:buNone/>
             </a:pPr>
             <a:r>
-              <a:rPr lang="ko-KR" altLang="en-US" sz="1100" spc="-11" kern="0" dirty="0">
-                <a:solidFill>
-                  <a:srgbClr val="0B2147"/>
+              <a:rPr lang="ko-KR" altLang="en-US" sz="950" spc="-19" kern="0" dirty="0">
+                <a:solidFill>
+                  <a:srgbClr val="1C2536"/>
+                </a:solidFill>
+                <a:latin typeface="Paperlogy 7 Bold" pitchFamily="34" charset="0"/>
+                <a:ea typeface="Paperlogy 7 Bold" pitchFamily="34" charset="-127"/>
+                <a:cs typeface="Paperlogy 7 Bold" pitchFamily="34" charset="-120"/>
+              </a:rPr>
+              <a:t>경청</a:t>
+            </a:r>
+            <a:endParaRPr lang="en-US" sz="950" dirty="0"/>
+          </a:p>
+        </p:txBody>
+      </p:sp>
+      <p:sp>
+        <p:nvSpPr>
+          <p:cNvPr id="106" name="수상작 분석"/>
+          <p:cNvSpPr txBox="1"/>
+          <p:nvPr/>
+        </p:nvSpPr>
+        <p:spPr>
+          <a:xfrm>
+            <a:off x="2586038" y="4535785"/>
+            <a:ext cx="593725" cy="146050"/>
+          </a:xfrm>
+          <a:prstGeom prst="rect">
+            <a:avLst/>
+          </a:prstGeom>
+          <a:noFill/>
+          <a:ln/>
+        </p:spPr>
+        <p:txBody>
+          <a:bodyPr wrap="none" lIns="0" tIns="0" rIns="0" bIns="0" rtlCol="0" anchor="ctr"/>
+          <a:lstStyle/>
+          <a:p>
+            <a:pPr algn="ctr" indent="0" marL="0">
+              <a:buNone/>
+            </a:pPr>
+            <a:r>
+              <a:rPr lang="ko-KR" altLang="en-US" sz="950" spc="-19" kern="0" dirty="0">
+                <a:solidFill>
+                  <a:srgbClr val="1C2536"/>
+                </a:solidFill>
+                <a:latin typeface="Paperlogy 7 Bold" pitchFamily="34" charset="0"/>
+                <a:ea typeface="Paperlogy 7 Bold" pitchFamily="34" charset="-127"/>
+                <a:cs typeface="Paperlogy 7 Bold" pitchFamily="34" charset="-120"/>
+              </a:rPr>
+              <a:t>수상작 분석</a:t>
+            </a:r>
+            <a:endParaRPr lang="en-US" sz="950" dirty="0"/>
+          </a:p>
+        </p:txBody>
+      </p:sp>
+      <p:sp>
+        <p:nvSpPr>
+          <p:cNvPr id="107" name="교수님 조언"/>
+          <p:cNvSpPr txBox="1"/>
+          <p:nvPr/>
+        </p:nvSpPr>
+        <p:spPr>
+          <a:xfrm>
+            <a:off x="2586038" y="4853285"/>
+            <a:ext cx="593725" cy="146050"/>
+          </a:xfrm>
+          <a:prstGeom prst="rect">
+            <a:avLst/>
+          </a:prstGeom>
+          <a:noFill/>
+          <a:ln/>
+        </p:spPr>
+        <p:txBody>
+          <a:bodyPr wrap="none" lIns="0" tIns="0" rIns="0" bIns="0" rtlCol="0" anchor="ctr"/>
+          <a:lstStyle/>
+          <a:p>
+            <a:pPr algn="ctr" indent="0" marL="0">
+              <a:buNone/>
+            </a:pPr>
+            <a:r>
+              <a:rPr lang="ko-KR" altLang="en-US" sz="950" spc="-19" kern="0" dirty="0">
+                <a:solidFill>
+                  <a:srgbClr val="1C2536"/>
+                </a:solidFill>
+                <a:latin typeface="Paperlogy 7 Bold" pitchFamily="34" charset="0"/>
+                <a:ea typeface="Paperlogy 7 Bold" pitchFamily="34" charset="-127"/>
+                <a:cs typeface="Paperlogy 7 Bold" pitchFamily="34" charset="-120"/>
+              </a:rPr>
+              <a:t>교수님 조언</a:t>
+            </a:r>
+            <a:endParaRPr lang="en-US" sz="950" dirty="0"/>
+          </a:p>
+        </p:txBody>
+      </p:sp>
+      <p:sp>
+        <p:nvSpPr>
+          <p:cNvPr id="108" name="판단"/>
+          <p:cNvSpPr txBox="1"/>
+          <p:nvPr/>
+        </p:nvSpPr>
+        <p:spPr>
+          <a:xfrm>
+            <a:off x="3719810" y="4456410"/>
+            <a:ext cx="269280" cy="152400"/>
+          </a:xfrm>
+          <a:prstGeom prst="rect">
+            <a:avLst/>
+          </a:prstGeom>
+          <a:noFill/>
+          <a:ln/>
+        </p:spPr>
+        <p:txBody>
+          <a:bodyPr wrap="none" lIns="0" tIns="0" rIns="0" bIns="0" rtlCol="0" anchor="ctr"/>
+          <a:lstStyle/>
+          <a:p>
+            <a:pPr algn="ctr" indent="0" marL="0">
+              <a:buNone/>
+            </a:pPr>
+            <a:r>
+              <a:rPr lang="ko-KR" altLang="en-US" sz="1000" spc="-20" kern="0" dirty="0">
+                <a:solidFill>
+                  <a:srgbClr val="004B8D"/>
                 </a:solidFill>
                 <a:latin typeface="Paperlogy 8 ExtraBold" pitchFamily="34" charset="0"/>
                 <a:ea typeface="Paperlogy 8 ExtraBold" pitchFamily="34" charset="-127"/>
                 <a:cs typeface="Paperlogy 8 ExtraBold" pitchFamily="34" charset="-120"/>
               </a:rPr>
-              <a:t>장려상</a:t>
+              <a:t>판단</a:t>
+            </a:r>
+            <a:endParaRPr lang="en-US" sz="1000" dirty="0"/>
+          </a:p>
+        </p:txBody>
+      </p:sp>
+      <p:sp>
+        <p:nvSpPr>
+          <p:cNvPr id="109" name="기준"/>
+          <p:cNvSpPr txBox="1"/>
+          <p:nvPr/>
+        </p:nvSpPr>
+        <p:spPr>
+          <a:xfrm>
+            <a:off x="3719810" y="4602460"/>
+            <a:ext cx="269280" cy="152400"/>
+          </a:xfrm>
+          <a:prstGeom prst="rect">
+            <a:avLst/>
+          </a:prstGeom>
+          <a:noFill/>
+          <a:ln/>
+        </p:spPr>
+        <p:txBody>
+          <a:bodyPr wrap="none" lIns="0" tIns="0" rIns="0" bIns="0" rtlCol="0" anchor="ctr"/>
+          <a:lstStyle/>
+          <a:p>
+            <a:pPr algn="ctr" indent="0" marL="0">
+              <a:buNone/>
+            </a:pPr>
+            <a:r>
+              <a:rPr lang="ko-KR" altLang="en-US" sz="1000" spc="-20" kern="0" dirty="0">
+                <a:solidFill>
+                  <a:srgbClr val="004B8D"/>
+                </a:solidFill>
+                <a:latin typeface="Paperlogy 8 ExtraBold" pitchFamily="34" charset="0"/>
+                <a:ea typeface="Paperlogy 8 ExtraBold" pitchFamily="34" charset="-127"/>
+                <a:cs typeface="Paperlogy 8 ExtraBold" pitchFamily="34" charset="-120"/>
+              </a:rPr>
+              <a:t>기준</a:t>
+            </a:r>
+            <a:endParaRPr lang="en-US" sz="1000" dirty="0"/>
+          </a:p>
+        </p:txBody>
+      </p:sp>
+      <p:sp>
+        <p:nvSpPr>
+          <p:cNvPr id="110" name="주제 합의"/>
+          <p:cNvSpPr txBox="1"/>
+          <p:nvPr/>
+        </p:nvSpPr>
+        <p:spPr>
+          <a:xfrm>
+            <a:off x="3181052" y="5370612"/>
+            <a:ext cx="559395" cy="165100"/>
+          </a:xfrm>
+          <a:prstGeom prst="rect">
+            <a:avLst/>
+          </a:prstGeom>
+          <a:noFill/>
+          <a:ln/>
+        </p:spPr>
+        <p:txBody>
+          <a:bodyPr wrap="none" lIns="0" tIns="0" rIns="0" bIns="0" rtlCol="0" anchor="ctr"/>
+          <a:lstStyle/>
+          <a:p>
+            <a:pPr algn="l" indent="0" marL="0">
+              <a:buNone/>
+            </a:pPr>
+            <a:r>
+              <a:rPr lang="ko-KR" altLang="en-US" sz="1100" spc="-22" kern="0" dirty="0">
+                <a:solidFill>
+                  <a:srgbClr val="004B8D"/>
+                </a:solidFill>
+                <a:latin typeface="Paperlogy 8 ExtraBold" pitchFamily="34" charset="0"/>
+                <a:ea typeface="Paperlogy 8 ExtraBold" pitchFamily="34" charset="-127"/>
+                <a:cs typeface="Paperlogy 8 ExtraBold" pitchFamily="34" charset="-120"/>
+              </a:rPr>
+              <a:t>주제 합의</a:t>
             </a:r>
             <a:endParaRPr lang="en-US" sz="1100" dirty="0"/>
           </a:p>
@@ -2671,77 +4142,116 @@
       </p:sp>
       <p:sp>
         <p:nvSpPr>
-          <p:cNvPr id="62" name="마감 3주 전"/>
-          <p:cNvSpPr txBox="1"/>
-          <p:nvPr/>
-        </p:nvSpPr>
-        <p:spPr>
-          <a:xfrm>
-            <a:off x="1054100" y="4131766"/>
-            <a:ext cx="579636" cy="139700"/>
-          </a:xfrm>
-          <a:prstGeom prst="rect">
-            <a:avLst/>
-          </a:prstGeom>
-          <a:noFill/>
-          <a:ln/>
-        </p:spPr>
-        <p:txBody>
-          <a:bodyPr wrap="none" lIns="0" tIns="0" rIns="0" bIns="0" rtlCol="0" anchor="ctr"/>
-          <a:lstStyle/>
-          <a:p>
-            <a:pPr algn="l" indent="0" marL="0">
-              <a:buNone/>
-            </a:pPr>
-            <a:r>
-              <a:rPr lang="ko-KR" altLang="en-US" sz="900" dirty="0">
-                <a:solidFill>
-                  <a:srgbClr val="4B5568"/>
+          <p:cNvPr id="111" name="강점 기반 역할 분담 · 지속적인 공유"/>
+          <p:cNvSpPr txBox="1"/>
+          <p:nvPr/>
+        </p:nvSpPr>
+        <p:spPr>
+          <a:xfrm>
+            <a:off x="4445000" y="3508375"/>
+            <a:ext cx="2492994" cy="209550"/>
+          </a:xfrm>
+          <a:prstGeom prst="rect">
+            <a:avLst/>
+          </a:prstGeom>
+          <a:noFill/>
+          <a:ln/>
+        </p:spPr>
+        <p:txBody>
+          <a:bodyPr wrap="none" lIns="0" tIns="0" rIns="0" bIns="0" rtlCol="0" anchor="ctr"/>
+          <a:lstStyle/>
+          <a:p>
+            <a:pPr algn="l" indent="0" marL="0">
+              <a:buNone/>
+            </a:pPr>
+            <a:r>
+              <a:rPr lang="ko-KR" altLang="en-US" sz="1400" spc="-49" kern="0" dirty="0">
+                <a:solidFill>
+                  <a:srgbClr val="0B2147"/>
                 </a:solidFill>
                 <a:latin typeface="Paperlogy 7 Bold" pitchFamily="34" charset="0"/>
                 <a:ea typeface="Paperlogy 7 Bold" pitchFamily="34" charset="-127"/>
                 <a:cs typeface="Paperlogy 7 Bold" pitchFamily="34" charset="-120"/>
               </a:rPr>
-              <a:t>마감 3주 전</a:t>
-            </a:r>
-            <a:endParaRPr lang="en-US" sz="900" dirty="0"/>
-          </a:p>
-        </p:txBody>
-      </p:sp>
-      <p:sp>
-        <p:nvSpPr>
-          <p:cNvPr id="63" name="3주 내 완수"/>
-          <p:cNvSpPr txBox="1"/>
-          <p:nvPr/>
-        </p:nvSpPr>
-        <p:spPr>
-          <a:xfrm>
-            <a:off x="9436100" y="4131766"/>
-            <a:ext cx="579636" cy="139700"/>
-          </a:xfrm>
-          <a:prstGeom prst="rect">
-            <a:avLst/>
-          </a:prstGeom>
-          <a:noFill/>
-          <a:ln/>
-        </p:spPr>
-        <p:txBody>
-          <a:bodyPr wrap="none" lIns="0" tIns="0" rIns="0" bIns="0" rtlCol="0" anchor="ctr"/>
-          <a:lstStyle/>
-          <a:p>
-            <a:pPr algn="l" indent="0" marL="0">
-              <a:buNone/>
-            </a:pPr>
-            <a:r>
-              <a:rPr lang="ko-KR" altLang="en-US" sz="900" dirty="0">
-                <a:solidFill>
-                  <a:srgbClr val="8A5A00"/>
+              <a:t>강점 기반 역할 분담 · 지속적인 공유</a:t>
+            </a:r>
+            <a:endParaRPr lang="en-US" sz="1400" dirty="0"/>
+          </a:p>
+        </p:txBody>
+      </p:sp>
+      <p:sp>
+        <p:nvSpPr>
+          <p:cNvPr id="112" name="팀장"/>
+          <p:cNvSpPr txBox="1"/>
+          <p:nvPr/>
+        </p:nvSpPr>
+        <p:spPr>
+          <a:xfrm>
+            <a:off x="4851400" y="3956943"/>
+            <a:ext cx="291108" cy="165100"/>
+          </a:xfrm>
+          <a:prstGeom prst="rect">
+            <a:avLst/>
+          </a:prstGeom>
+          <a:noFill/>
+          <a:ln/>
+        </p:spPr>
+        <p:txBody>
+          <a:bodyPr wrap="none" lIns="0" tIns="0" rIns="0" bIns="0" rtlCol="0" anchor="ctr"/>
+          <a:lstStyle/>
+          <a:p>
+            <a:pPr algn="l" indent="0" marL="0">
+              <a:buNone/>
+            </a:pPr>
+            <a:r>
+              <a:rPr lang="ko-KR" altLang="en-US" sz="1100" spc="-22" kern="0" dirty="0">
+                <a:solidFill>
+                  <a:srgbClr val="0B2147"/>
+                </a:solidFill>
+                <a:latin typeface="Paperlogy 8 ExtraBold" pitchFamily="34" charset="0"/>
+                <a:ea typeface="Paperlogy 8 ExtraBold" pitchFamily="34" charset="-127"/>
+                <a:cs typeface="Paperlogy 8 ExtraBold" pitchFamily="34" charset="-120"/>
+              </a:rPr>
+              <a:t>팀장</a:t>
+            </a:r>
+            <a:endParaRPr lang="en-US" sz="1100" dirty="0"/>
+          </a:p>
+        </p:txBody>
+      </p:sp>
+      <p:sp>
+        <p:nvSpPr>
+          <p:cNvPr id="113" name="나"/>
+          <p:cNvSpPr txBox="1"/>
+          <p:nvPr/>
+        </p:nvSpPr>
+        <p:spPr>
+          <a:xfrm>
+            <a:off x="5201543" y="3974405"/>
+            <a:ext cx="148630" cy="139700"/>
+          </a:xfrm>
+          <a:prstGeom prst="rect">
+            <a:avLst/>
+          </a:prstGeom>
+          <a:noFill/>
+          <a:ln/>
+        </p:spPr>
+        <p:txBody>
+          <a:bodyPr wrap="none" lIns="0" tIns="0" rIns="0" bIns="0" rtlCol="0" anchor="ctr"/>
+          <a:lstStyle/>
+          <a:p>
+            <a:pPr algn="l" indent="0" marL="0">
+              <a:buNone/>
+            </a:pPr>
+            <a:r>
+              <a:rPr lang="ko-KR" altLang="en-US" sz="900" spc="-22" kern="0" dirty="0">
+                <a:solidFill>
+                  <a:srgbClr val="FFFFFF"/>
                 </a:solidFill>
                 <a:latin typeface="Paperlogy 7 Bold" pitchFamily="34" charset="0"/>
                 <a:ea typeface="Paperlogy 7 Bold" pitchFamily="34" charset="-127"/>
                 <a:cs typeface="Paperlogy 7 Bold" pitchFamily="34" charset="-120"/>
               </a:rPr>
-              <a:t>3주 내 완수</a:t>
+              <a:t>나</a:t>
             </a:r>
             <a:endParaRPr lang="en-US" sz="900" dirty="0"/>
           </a:p>
@@ -2749,147 +4259,381 @@
       </p:sp>
       <p:sp>
         <p:nvSpPr>
-          <p:cNvPr id="64" name="01"/>
-          <p:cNvSpPr txBox="1"/>
-          <p:nvPr/>
-        </p:nvSpPr>
-        <p:spPr>
-          <a:xfrm>
-            <a:off x="609600" y="4455914"/>
-            <a:ext cx="221357" cy="146050"/>
-          </a:xfrm>
-          <a:prstGeom prst="rect">
-            <a:avLst/>
-          </a:prstGeom>
-          <a:noFill/>
-          <a:ln/>
-        </p:spPr>
-        <p:txBody>
-          <a:bodyPr wrap="none" lIns="0" tIns="0" rIns="0" bIns="0" rtlCol="0" anchor="ctr"/>
-          <a:lstStyle/>
-          <a:p>
-            <a:pPr algn="l" indent="0" marL="0">
-              <a:buNone/>
-            </a:pPr>
-            <a:r>
-              <a:rPr lang="ko-KR" altLang="en-US" sz="950" spc="38" kern="0" dirty="0">
-                <a:solidFill>
-                  <a:srgbClr val="8691A5"/>
+          <p:cNvPr id="114" name="프로젝트 총괄"/>
+          <p:cNvSpPr txBox="1"/>
+          <p:nvPr/>
+        </p:nvSpPr>
+        <p:spPr>
+          <a:xfrm>
+            <a:off x="4737100" y="4177605"/>
+            <a:ext cx="794742" cy="165100"/>
+          </a:xfrm>
+          <a:prstGeom prst="rect">
+            <a:avLst/>
+          </a:prstGeom>
+          <a:noFill/>
+          <a:ln/>
+        </p:spPr>
+        <p:txBody>
+          <a:bodyPr wrap="none" lIns="0" tIns="0" rIns="0" bIns="0" rtlCol="0" anchor="ctr"/>
+          <a:lstStyle/>
+          <a:p>
+            <a:pPr algn="l" indent="0" marL="0">
+              <a:buNone/>
+            </a:pPr>
+            <a:r>
+              <a:rPr lang="ko-KR" altLang="en-US" sz="1100" spc="-28" kern="0" dirty="0">
+                <a:solidFill>
+                  <a:srgbClr val="4B5568"/>
+                </a:solidFill>
+                <a:latin typeface="Paperlogy 5 Medium" pitchFamily="34" charset="0"/>
+                <a:ea typeface="Paperlogy 5 Medium" pitchFamily="34" charset="-127"/>
+                <a:cs typeface="Paperlogy 5 Medium" pitchFamily="34" charset="-120"/>
+              </a:rPr>
+              <a:t>프로젝트 총괄</a:t>
+            </a:r>
+            <a:endParaRPr lang="en-US" sz="1100" dirty="0"/>
+          </a:p>
+        </p:txBody>
+      </p:sp>
+      <p:sp>
+        <p:nvSpPr>
+          <p:cNvPr id="115" name="Dynamo"/>
+          <p:cNvSpPr txBox="1"/>
+          <p:nvPr/>
+        </p:nvSpPr>
+        <p:spPr>
+          <a:xfrm>
+            <a:off x="4794250" y="4384576"/>
+            <a:ext cx="539155" cy="139700"/>
+          </a:xfrm>
+          <a:prstGeom prst="rect">
+            <a:avLst/>
+          </a:prstGeom>
+          <a:noFill/>
+          <a:ln/>
+        </p:spPr>
+        <p:txBody>
+          <a:bodyPr wrap="none" lIns="0" tIns="0" rIns="0" bIns="0" rtlCol="0" anchor="ctr"/>
+          <a:lstStyle/>
+          <a:p>
+            <a:pPr algn="l" indent="0" marL="0">
+              <a:buNone/>
+            </a:pPr>
+            <a:r>
+              <a:rPr lang="ko-KR" altLang="en-US" sz="900" spc="-28" kern="0" dirty="0">
+                <a:solidFill>
+                  <a:srgbClr val="004B8D"/>
+                </a:solidFill>
+                <a:latin typeface="Paperlogy 7 Bold" pitchFamily="34" charset="0"/>
+                <a:ea typeface="Paperlogy 7 Bold" pitchFamily="34" charset="-127"/>
+                <a:cs typeface="Paperlogy 7 Bold" pitchFamily="34" charset="-120"/>
+              </a:rPr>
+              <a:t>Dynamo</a:t>
+            </a:r>
+            <a:endParaRPr lang="en-US" sz="900" dirty="0"/>
+          </a:p>
+        </p:txBody>
+      </p:sp>
+      <p:sp>
+        <p:nvSpPr>
+          <p:cNvPr id="116" name="기반 자동화 알고리즘 개발"/>
+          <p:cNvSpPr txBox="1"/>
+          <p:nvPr/>
+        </p:nvSpPr>
+        <p:spPr>
+          <a:xfrm>
+            <a:off x="5390555" y="4373166"/>
+            <a:ext cx="1479348" cy="165100"/>
+          </a:xfrm>
+          <a:prstGeom prst="rect">
+            <a:avLst/>
+          </a:prstGeom>
+          <a:noFill/>
+          <a:ln/>
+        </p:spPr>
+        <p:txBody>
+          <a:bodyPr wrap="none" lIns="0" tIns="0" rIns="0" bIns="0" rtlCol="0" anchor="ctr"/>
+          <a:lstStyle/>
+          <a:p>
+            <a:pPr algn="l" indent="0" marL="0">
+              <a:buNone/>
+            </a:pPr>
+            <a:r>
+              <a:rPr lang="ko-KR" altLang="en-US" sz="1100" spc="-28" kern="0" dirty="0">
+                <a:solidFill>
+                  <a:srgbClr val="4B5568"/>
+                </a:solidFill>
+                <a:latin typeface="Paperlogy 5 Medium" pitchFamily="34" charset="0"/>
+                <a:ea typeface="Paperlogy 5 Medium" pitchFamily="34" charset="-127"/>
+                <a:cs typeface="Paperlogy 5 Medium" pitchFamily="34" charset="-120"/>
+              </a:rPr>
+              <a:t>기반 자동화 알고리즘 개발</a:t>
+            </a:r>
+            <a:endParaRPr lang="en-US" sz="1100" dirty="0"/>
+          </a:p>
+        </p:txBody>
+      </p:sp>
+      <p:sp>
+        <p:nvSpPr>
+          <p:cNvPr id="117" name="팀원 A"/>
+          <p:cNvSpPr txBox="1"/>
+          <p:nvPr/>
+        </p:nvSpPr>
+        <p:spPr>
+          <a:xfrm>
+            <a:off x="7334250" y="3949005"/>
+            <a:ext cx="424656" cy="165100"/>
+          </a:xfrm>
+          <a:prstGeom prst="rect">
+            <a:avLst/>
+          </a:prstGeom>
+          <a:noFill/>
+          <a:ln/>
+        </p:spPr>
+        <p:txBody>
+          <a:bodyPr wrap="none" lIns="0" tIns="0" rIns="0" bIns="0" rtlCol="0" anchor="ctr"/>
+          <a:lstStyle/>
+          <a:p>
+            <a:pPr algn="l" indent="0" marL="0">
+              <a:buNone/>
+            </a:pPr>
+            <a:r>
+              <a:rPr lang="ko-KR" altLang="en-US" sz="1100" spc="-22" kern="0" dirty="0">
+                <a:solidFill>
+                  <a:srgbClr val="0B2147"/>
                 </a:solidFill>
                 <a:latin typeface="Paperlogy 8 ExtraBold" pitchFamily="34" charset="0"/>
                 <a:ea typeface="Paperlogy 8 ExtraBold" pitchFamily="34" charset="-127"/>
                 <a:cs typeface="Paperlogy 8 ExtraBold" pitchFamily="34" charset="-120"/>
               </a:rPr>
-              <a:t>01</a:t>
-            </a:r>
-            <a:endParaRPr lang="en-US" sz="950" dirty="0"/>
-          </a:p>
-        </p:txBody>
-      </p:sp>
-      <p:sp>
-        <p:nvSpPr>
-          <p:cNvPr id="65" name="CONFLICT"/>
-          <p:cNvSpPr txBox="1"/>
-          <p:nvPr/>
-        </p:nvSpPr>
-        <p:spPr>
-          <a:xfrm>
-            <a:off x="843657" y="4455914"/>
-            <a:ext cx="845939" cy="146050"/>
-          </a:xfrm>
-          <a:prstGeom prst="rect">
-            <a:avLst/>
-          </a:prstGeom>
-          <a:noFill/>
-          <a:ln/>
-        </p:spPr>
-        <p:txBody>
-          <a:bodyPr wrap="none" lIns="0" tIns="0" rIns="0" bIns="0" rtlCol="0" anchor="ctr"/>
-          <a:lstStyle/>
-          <a:p>
-            <a:pPr algn="l" indent="0" marL="0">
-              <a:buNone/>
-            </a:pPr>
-            <a:r>
-              <a:rPr lang="ko-KR" altLang="en-US" sz="950" spc="152" kern="0" dirty="0">
-                <a:solidFill>
-                  <a:srgbClr val="2A78DD"/>
+              <a:t>팀원 A</a:t>
+            </a:r>
+            <a:endParaRPr lang="en-US" sz="1100" dirty="0"/>
+          </a:p>
+        </p:txBody>
+      </p:sp>
+      <p:sp>
+        <p:nvSpPr>
+          <p:cNvPr id="118" name="유닛 모듈러 설계"/>
+          <p:cNvSpPr txBox="1"/>
+          <p:nvPr/>
+        </p:nvSpPr>
+        <p:spPr>
+          <a:xfrm>
+            <a:off x="7219950" y="4161730"/>
+            <a:ext cx="944023" cy="165100"/>
+          </a:xfrm>
+          <a:prstGeom prst="rect">
+            <a:avLst/>
+          </a:prstGeom>
+          <a:noFill/>
+          <a:ln/>
+        </p:spPr>
+        <p:txBody>
+          <a:bodyPr wrap="none" lIns="0" tIns="0" rIns="0" bIns="0" rtlCol="0" anchor="ctr"/>
+          <a:lstStyle/>
+          <a:p>
+            <a:pPr algn="l" indent="0" marL="0">
+              <a:buNone/>
+            </a:pPr>
+            <a:r>
+              <a:rPr lang="ko-KR" altLang="en-US" sz="1100" spc="-28" kern="0" dirty="0">
+                <a:solidFill>
+                  <a:srgbClr val="4B5568"/>
+                </a:solidFill>
+                <a:latin typeface="Paperlogy 5 Medium" pitchFamily="34" charset="0"/>
+                <a:ea typeface="Paperlogy 5 Medium" pitchFamily="34" charset="-127"/>
+                <a:cs typeface="Paperlogy 5 Medium" pitchFamily="34" charset="-120"/>
+              </a:rPr>
+              <a:t>유닛 모듈러 설계</a:t>
+            </a:r>
+            <a:endParaRPr lang="en-US" sz="1100" dirty="0"/>
+          </a:p>
+        </p:txBody>
+      </p:sp>
+      <p:sp>
+        <p:nvSpPr>
+          <p:cNvPr id="119" name="배치계획"/>
+          <p:cNvSpPr txBox="1"/>
+          <p:nvPr/>
+        </p:nvSpPr>
+        <p:spPr>
+          <a:xfrm>
+            <a:off x="7219950" y="4357291"/>
+            <a:ext cx="528638" cy="165100"/>
+          </a:xfrm>
+          <a:prstGeom prst="rect">
+            <a:avLst/>
+          </a:prstGeom>
+          <a:noFill/>
+          <a:ln/>
+        </p:spPr>
+        <p:txBody>
+          <a:bodyPr wrap="none" lIns="0" tIns="0" rIns="0" bIns="0" rtlCol="0" anchor="ctr"/>
+          <a:lstStyle/>
+          <a:p>
+            <a:pPr algn="l" indent="0" marL="0">
+              <a:buNone/>
+            </a:pPr>
+            <a:r>
+              <a:rPr lang="ko-KR" altLang="en-US" sz="1100" spc="-28" kern="0" dirty="0">
+                <a:solidFill>
+                  <a:srgbClr val="4B5568"/>
+                </a:solidFill>
+                <a:latin typeface="Paperlogy 5 Medium" pitchFamily="34" charset="0"/>
+                <a:ea typeface="Paperlogy 5 Medium" pitchFamily="34" charset="-127"/>
+                <a:cs typeface="Paperlogy 5 Medium" pitchFamily="34" charset="-120"/>
+              </a:rPr>
+              <a:t>배치계획</a:t>
+            </a:r>
+            <a:endParaRPr lang="en-US" sz="1100" dirty="0"/>
+          </a:p>
+        </p:txBody>
+      </p:sp>
+      <p:sp>
+        <p:nvSpPr>
+          <p:cNvPr id="120" name="이틀마다 진행상황 공유 · 피드백"/>
+          <p:cNvSpPr txBox="1"/>
+          <p:nvPr/>
+        </p:nvSpPr>
+        <p:spPr>
+          <a:xfrm>
+            <a:off x="6281241" y="4677073"/>
+            <a:ext cx="1653512" cy="152400"/>
+          </a:xfrm>
+          <a:prstGeom prst="rect">
+            <a:avLst/>
+          </a:prstGeom>
+          <a:noFill/>
+          <a:ln/>
+        </p:spPr>
+        <p:txBody>
+          <a:bodyPr wrap="none" lIns="0" tIns="0" rIns="0" bIns="0" rtlCol="0" anchor="ctr"/>
+          <a:lstStyle/>
+          <a:p>
+            <a:pPr algn="l" indent="0" marL="0">
+              <a:buNone/>
+            </a:pPr>
+            <a:r>
+              <a:rPr lang="ko-KR" altLang="en-US" sz="1000" spc="-20" kern="0" dirty="0">
+                <a:solidFill>
+                  <a:srgbClr val="0B6B33"/>
                 </a:solidFill>
                 <a:latin typeface="Paperlogy 7 Bold" pitchFamily="34" charset="0"/>
                 <a:ea typeface="Paperlogy 7 Bold" pitchFamily="34" charset="-127"/>
                 <a:cs typeface="Paperlogy 7 Bold" pitchFamily="34" charset="-120"/>
               </a:rPr>
-              <a:t>CONFLICT</a:t>
-            </a:r>
-            <a:endParaRPr lang="en-US" sz="950" dirty="0"/>
-          </a:p>
-        </p:txBody>
-      </p:sp>
-      <p:sp>
-        <p:nvSpPr>
-          <p:cNvPr id="66" name="서로 다른 의견"/>
-          <p:cNvSpPr txBox="1"/>
-          <p:nvPr/>
-        </p:nvSpPr>
-        <p:spPr>
-          <a:xfrm>
-            <a:off x="609600" y="4662587"/>
-            <a:ext cx="1032893" cy="209550"/>
-          </a:xfrm>
-          <a:prstGeom prst="rect">
-            <a:avLst/>
-          </a:prstGeom>
-          <a:noFill/>
-          <a:ln/>
-        </p:spPr>
-        <p:txBody>
-          <a:bodyPr wrap="none" lIns="0" tIns="0" rIns="0" bIns="0" rtlCol="0" anchor="ctr"/>
-          <a:lstStyle/>
-          <a:p>
-            <a:pPr algn="l" indent="0" marL="0">
-              <a:buNone/>
-            </a:pPr>
-            <a:r>
-              <a:rPr lang="ko-KR" altLang="en-US" sz="1400" spc="-42" kern="0" dirty="0">
+              <a:t>이틀마다 진행상황 공유 · 피드백</a:t>
+            </a:r>
+            <a:endParaRPr lang="en-US" sz="1000" dirty="0"/>
+          </a:p>
+        </p:txBody>
+      </p:sp>
+      <p:sp>
+        <p:nvSpPr>
+          <p:cNvPr id="121" name="팀원 B"/>
+          <p:cNvSpPr txBox="1"/>
+          <p:nvPr/>
+        </p:nvSpPr>
+        <p:spPr>
+          <a:xfrm>
+            <a:off x="4851400" y="4946948"/>
+            <a:ext cx="424458" cy="165100"/>
+          </a:xfrm>
+          <a:prstGeom prst="rect">
+            <a:avLst/>
+          </a:prstGeom>
+          <a:noFill/>
+          <a:ln/>
+        </p:spPr>
+        <p:txBody>
+          <a:bodyPr wrap="none" lIns="0" tIns="0" rIns="0" bIns="0" rtlCol="0" anchor="ctr"/>
+          <a:lstStyle/>
+          <a:p>
+            <a:pPr algn="l" indent="0" marL="0">
+              <a:buNone/>
+            </a:pPr>
+            <a:r>
+              <a:rPr lang="ko-KR" altLang="en-US" sz="1100" spc="-22" kern="0" dirty="0">
                 <a:solidFill>
                   <a:srgbClr val="0B2147"/>
+                </a:solidFill>
+                <a:latin typeface="Paperlogy 8 ExtraBold" pitchFamily="34" charset="0"/>
+                <a:ea typeface="Paperlogy 8 ExtraBold" pitchFamily="34" charset="-127"/>
+                <a:cs typeface="Paperlogy 8 ExtraBold" pitchFamily="34" charset="-120"/>
+              </a:rPr>
+              <a:t>팀원 B</a:t>
+            </a:r>
+            <a:endParaRPr lang="en-US" sz="1100" dirty="0"/>
+          </a:p>
+        </p:txBody>
+      </p:sp>
+      <p:sp>
+        <p:nvSpPr>
+          <p:cNvPr id="122" name="Revit"/>
+          <p:cNvSpPr txBox="1"/>
+          <p:nvPr/>
+        </p:nvSpPr>
+        <p:spPr>
+          <a:xfrm>
+            <a:off x="4794250" y="5171083"/>
+            <a:ext cx="337443" cy="139700"/>
+          </a:xfrm>
+          <a:prstGeom prst="rect">
+            <a:avLst/>
+          </a:prstGeom>
+          <a:noFill/>
+          <a:ln/>
+        </p:spPr>
+        <p:txBody>
+          <a:bodyPr wrap="none" lIns="0" tIns="0" rIns="0" bIns="0" rtlCol="0" anchor="ctr"/>
+          <a:lstStyle/>
+          <a:p>
+            <a:pPr algn="l" indent="0" marL="0">
+              <a:buNone/>
+            </a:pPr>
+            <a:r>
+              <a:rPr lang="ko-KR" altLang="en-US" sz="900" spc="-28" kern="0" dirty="0">
+                <a:solidFill>
+                  <a:srgbClr val="004B8D"/>
                 </a:solidFill>
                 <a:latin typeface="Paperlogy 7 Bold" pitchFamily="34" charset="0"/>
                 <a:ea typeface="Paperlogy 7 Bold" pitchFamily="34" charset="-127"/>
                 <a:cs typeface="Paperlogy 7 Bold" pitchFamily="34" charset="-120"/>
               </a:rPr>
-              <a:t>서로 다른 의견</a:t>
-            </a:r>
-            <a:endParaRPr lang="en-US" sz="1400" dirty="0"/>
-          </a:p>
-        </p:txBody>
-      </p:sp>
-      <p:sp>
-        <p:nvSpPr>
-          <p:cNvPr id="67" name="참신성"/>
-          <p:cNvSpPr txBox="1"/>
-          <p:nvPr/>
-        </p:nvSpPr>
-        <p:spPr>
-          <a:xfrm>
-            <a:off x="711200" y="4963517"/>
-            <a:ext cx="411262" cy="165100"/>
-          </a:xfrm>
-          <a:prstGeom prst="rect">
-            <a:avLst/>
-          </a:prstGeom>
-          <a:noFill/>
-          <a:ln/>
-        </p:spPr>
-        <p:txBody>
-          <a:bodyPr wrap="none" lIns="0" tIns="0" rIns="0" bIns="0" rtlCol="0" anchor="ctr"/>
-          <a:lstStyle/>
-          <a:p>
-            <a:pPr algn="l" indent="0" marL="0">
-              <a:buNone/>
-            </a:pPr>
-            <a:r>
-              <a:rPr lang="ko-KR" altLang="en-US" sz="1100" spc="-22" kern="0" dirty="0">
+              <a:t>Revit</a:t>
+            </a:r>
+            <a:endParaRPr lang="en-US" sz="900" dirty="0"/>
+          </a:p>
+        </p:txBody>
+      </p:sp>
+      <p:sp>
+        <p:nvSpPr>
+          <p:cNvPr id="123" name="기반 BIM 모델링"/>
+          <p:cNvSpPr txBox="1"/>
+          <p:nvPr/>
+        </p:nvSpPr>
+        <p:spPr>
+          <a:xfrm>
+            <a:off x="5188843" y="5159673"/>
+            <a:ext cx="979045" cy="165100"/>
+          </a:xfrm>
+          <a:prstGeom prst="rect">
+            <a:avLst/>
+          </a:prstGeom>
+          <a:noFill/>
+          <a:ln/>
+        </p:spPr>
+        <p:txBody>
+          <a:bodyPr wrap="none" lIns="0" tIns="0" rIns="0" bIns="0" rtlCol="0" anchor="ctr"/>
+          <a:lstStyle/>
+          <a:p>
+            <a:pPr algn="l" indent="0" marL="0">
+              <a:buNone/>
+            </a:pPr>
+            <a:r>
+              <a:rPr lang="ko-KR" altLang="en-US" sz="1100" spc="-28" kern="0" dirty="0">
                 <a:solidFill>
                   <a:srgbClr val="4B5568"/>
                 </a:solidFill>
@@ -2897,7 +4641,7 @@
                 <a:ea typeface="Paperlogy 5 Medium" pitchFamily="34" charset="-127"/>
                 <a:cs typeface="Paperlogy 5 Medium" pitchFamily="34" charset="-120"/>
               </a:rPr>
-              <a:t>참신성</a:t>
+              <a:t>기반 BIM 모델링</a:t>
             </a:r>
             <a:endParaRPr lang="en-US" sz="1100" dirty="0"/>
           </a:p>
@@ -2905,30 +4649,30 @@
       </p:sp>
       <p:sp>
         <p:nvSpPr>
-          <p:cNvPr id="68" name="구현 가능성"/>
-          <p:cNvSpPr txBox="1"/>
-          <p:nvPr/>
-        </p:nvSpPr>
-        <p:spPr>
-          <a:xfrm>
-            <a:off x="1287562" y="4963517"/>
-            <a:ext cx="679450" cy="165100"/>
-          </a:xfrm>
-          <a:prstGeom prst="rect">
-            <a:avLst/>
-          </a:prstGeom>
-          <a:noFill/>
-          <a:ln/>
-        </p:spPr>
-        <p:txBody>
-          <a:bodyPr wrap="none" lIns="0" tIns="0" rIns="0" bIns="0" rtlCol="0" anchor="ctr"/>
-          <a:lstStyle/>
-          <a:p>
-            <a:pPr algn="l" indent="0" marL="0">
-              <a:buNone/>
-            </a:pPr>
-            <a:r>
-              <a:rPr lang="ko-KR" altLang="en-US" sz="1100" spc="-22" kern="0" dirty="0">
+          <p:cNvPr id="124" name="데이터 구축"/>
+          <p:cNvSpPr txBox="1"/>
+          <p:nvPr/>
+        </p:nvSpPr>
+        <p:spPr>
+          <a:xfrm>
+            <a:off x="4737100" y="5355233"/>
+            <a:ext cx="675283" cy="165100"/>
+          </a:xfrm>
+          <a:prstGeom prst="rect">
+            <a:avLst/>
+          </a:prstGeom>
+          <a:noFill/>
+          <a:ln/>
+        </p:spPr>
+        <p:txBody>
+          <a:bodyPr wrap="none" lIns="0" tIns="0" rIns="0" bIns="0" rtlCol="0" anchor="ctr"/>
+          <a:lstStyle/>
+          <a:p>
+            <a:pPr algn="l" indent="0" marL="0">
+              <a:buNone/>
+            </a:pPr>
+            <a:r>
+              <a:rPr lang="ko-KR" altLang="en-US" sz="1100" spc="-28" kern="0" dirty="0">
                 <a:solidFill>
                   <a:srgbClr val="4B5568"/>
                 </a:solidFill>
@@ -2936,7 +4680,7 @@
                 <a:ea typeface="Paperlogy 5 Medium" pitchFamily="34" charset="-127"/>
                 <a:cs typeface="Paperlogy 5 Medium" pitchFamily="34" charset="-120"/>
               </a:rPr>
-              <a:t>구현 가능성</a:t>
+              <a:t>데이터 구축</a:t>
             </a:r>
             <a:endParaRPr lang="en-US" sz="1100" dirty="0"/>
           </a:p>
@@ -2944,14 +4688,14 @@
       </p:sp>
       <p:sp>
         <p:nvSpPr>
-          <p:cNvPr id="69" name="마감 3주 전까지 주제 미확정"/>
-          <p:cNvSpPr txBox="1"/>
-          <p:nvPr/>
-        </p:nvSpPr>
-        <p:spPr>
-          <a:xfrm>
-            <a:off x="711200" y="5178723"/>
-            <a:ext cx="1615124" cy="165100"/>
+          <p:cNvPr id="125" name="팀원 C"/>
+          <p:cNvSpPr txBox="1"/>
+          <p:nvPr/>
+        </p:nvSpPr>
+        <p:spPr>
+          <a:xfrm>
+            <a:off x="7334250" y="4946948"/>
+            <a:ext cx="419695" cy="165100"/>
           </a:xfrm>
           <a:prstGeom prst="rect">
             <a:avLst/>
@@ -2968,6 +4712,45 @@
             </a:pPr>
             <a:r>
               <a:rPr lang="ko-KR" altLang="en-US" sz="1100" spc="-22" kern="0" dirty="0">
+                <a:solidFill>
+                  <a:srgbClr val="0B2147"/>
+                </a:solidFill>
+                <a:latin typeface="Paperlogy 8 ExtraBold" pitchFamily="34" charset="0"/>
+                <a:ea typeface="Paperlogy 8 ExtraBold" pitchFamily="34" charset="-127"/>
+                <a:cs typeface="Paperlogy 8 ExtraBold" pitchFamily="34" charset="-120"/>
+              </a:rPr>
+              <a:t>팀원 C</a:t>
+            </a:r>
+            <a:endParaRPr lang="en-US" sz="1100" dirty="0"/>
+          </a:p>
+        </p:txBody>
+      </p:sp>
+      <p:sp>
+        <p:nvSpPr>
+          <p:cNvPr id="126" name="리모델링 적용 시나리오 구성"/>
+          <p:cNvSpPr txBox="1"/>
+          <p:nvPr/>
+        </p:nvSpPr>
+        <p:spPr>
+          <a:xfrm>
+            <a:off x="7219950" y="5159673"/>
+            <a:ext cx="1605975" cy="165100"/>
+          </a:xfrm>
+          <a:prstGeom prst="rect">
+            <a:avLst/>
+          </a:prstGeom>
+          <a:noFill/>
+          <a:ln/>
+        </p:spPr>
+        <p:txBody>
+          <a:bodyPr wrap="none" lIns="0" tIns="0" rIns="0" bIns="0" rtlCol="0" anchor="ctr"/>
+          <a:lstStyle/>
+          <a:p>
+            <a:pPr algn="l" indent="0" marL="0">
+              <a:buNone/>
+            </a:pPr>
+            <a:r>
+              <a:rPr lang="ko-KR" altLang="en-US" sz="1100" spc="-28" kern="0" dirty="0">
                 <a:solidFill>
                   <a:srgbClr val="4B5568"/>
                 </a:solidFill>
@@ -2975,7 +4758,7 @@
                 <a:ea typeface="Paperlogy 5 Medium" pitchFamily="34" charset="-127"/>
                 <a:cs typeface="Paperlogy 5 Medium" pitchFamily="34" charset="-120"/>
               </a:rPr>
-              <a:t>마감 3주 전까지 주제 미확정</a:t>
+              <a:t>리모델링 적용 시나리오 구성</a:t>
             </a:r>
             <a:endParaRPr lang="en-US" sz="1100" dirty="0"/>
           </a:p>
@@ -2983,53 +4766,209 @@
       </p:sp>
       <p:sp>
         <p:nvSpPr>
-          <p:cNvPr id="70" name="02"/>
-          <p:cNvSpPr txBox="1"/>
-          <p:nvPr/>
-        </p:nvSpPr>
-        <p:spPr>
-          <a:xfrm>
-            <a:off x="3403600" y="4455914"/>
-            <a:ext cx="221357" cy="146050"/>
-          </a:xfrm>
-          <a:prstGeom prst="rect">
-            <a:avLst/>
-          </a:prstGeom>
-          <a:noFill/>
-          <a:ln/>
-        </p:spPr>
-        <p:txBody>
-          <a:bodyPr wrap="none" lIns="0" tIns="0" rIns="0" bIns="0" rtlCol="0" anchor="ctr"/>
-          <a:lstStyle/>
-          <a:p>
-            <a:pPr algn="l" indent="0" marL="0">
-              <a:buNone/>
-            </a:pPr>
-            <a:r>
-              <a:rPr lang="ko-KR" altLang="en-US" sz="950" spc="38" kern="0" dirty="0">
-                <a:solidFill>
-                  <a:srgbClr val="8691A5"/>
+          <p:cNvPr id="127" name="시연 영상 제작"/>
+          <p:cNvSpPr txBox="1"/>
+          <p:nvPr/>
+        </p:nvSpPr>
+        <p:spPr>
+          <a:xfrm>
+            <a:off x="7219950" y="5355233"/>
+            <a:ext cx="822027" cy="165100"/>
+          </a:xfrm>
+          <a:prstGeom prst="rect">
+            <a:avLst/>
+          </a:prstGeom>
+          <a:noFill/>
+          <a:ln/>
+        </p:spPr>
+        <p:txBody>
+          <a:bodyPr wrap="none" lIns="0" tIns="0" rIns="0" bIns="0" rtlCol="0" anchor="ctr"/>
+          <a:lstStyle/>
+          <a:p>
+            <a:pPr algn="l" indent="0" marL="0">
+              <a:buNone/>
+            </a:pPr>
+            <a:r>
+              <a:rPr lang="ko-KR" altLang="en-US" sz="1100" spc="-28" kern="0" dirty="0">
+                <a:solidFill>
+                  <a:srgbClr val="4B5568"/>
+                </a:solidFill>
+                <a:latin typeface="Paperlogy 5 Medium" pitchFamily="34" charset="0"/>
+                <a:ea typeface="Paperlogy 5 Medium" pitchFamily="34" charset="-127"/>
+                <a:cs typeface="Paperlogy 5 Medium" pitchFamily="34" charset="-120"/>
+              </a:rPr>
+              <a:t>시연 영상 제작</a:t>
+            </a:r>
+            <a:endParaRPr lang="en-US" sz="1100" dirty="0"/>
+          </a:p>
+        </p:txBody>
+      </p:sp>
+      <p:sp>
+        <p:nvSpPr>
+          <p:cNvPr id="128" name="프로젝트 완성 · 장려상 수상"/>
+          <p:cNvSpPr txBox="1"/>
+          <p:nvPr/>
+        </p:nvSpPr>
+        <p:spPr>
+          <a:xfrm>
+            <a:off x="9677400" y="3508375"/>
+            <a:ext cx="1945469" cy="209550"/>
+          </a:xfrm>
+          <a:prstGeom prst="rect">
+            <a:avLst/>
+          </a:prstGeom>
+          <a:noFill/>
+          <a:ln/>
+        </p:spPr>
+        <p:txBody>
+          <a:bodyPr wrap="none" lIns="0" tIns="0" rIns="0" bIns="0" rtlCol="0" anchor="ctr"/>
+          <a:lstStyle/>
+          <a:p>
+            <a:pPr algn="l" indent="0" marL="0">
+              <a:buNone/>
+            </a:pPr>
+            <a:r>
+              <a:rPr lang="ko-KR" altLang="en-US" sz="1400" spc="-49" kern="0" dirty="0">
+                <a:solidFill>
+                  <a:srgbClr val="0B2147"/>
+                </a:solidFill>
+                <a:latin typeface="Paperlogy 7 Bold" pitchFamily="34" charset="0"/>
+                <a:ea typeface="Paperlogy 7 Bold" pitchFamily="34" charset="-127"/>
+                <a:cs typeface="Paperlogy 7 Bold" pitchFamily="34" charset="-120"/>
+              </a:rPr>
+              <a:t>프로젝트 완성 · 장려상 수상</a:t>
+            </a:r>
+            <a:endParaRPr lang="en-US" sz="1400" dirty="0"/>
+          </a:p>
+        </p:txBody>
+      </p:sp>
+      <p:sp>
+        <p:nvSpPr>
+          <p:cNvPr id="129" name="장려상"/>
+          <p:cNvSpPr txBox="1"/>
+          <p:nvPr/>
+        </p:nvSpPr>
+        <p:spPr>
+          <a:xfrm>
+            <a:off x="10944969" y="4457700"/>
+            <a:ext cx="411262" cy="165100"/>
+          </a:xfrm>
+          <a:prstGeom prst="rect">
+            <a:avLst/>
+          </a:prstGeom>
+          <a:noFill/>
+          <a:ln/>
+        </p:spPr>
+        <p:txBody>
+          <a:bodyPr wrap="none" lIns="0" tIns="0" rIns="0" bIns="0" rtlCol="0" anchor="ctr"/>
+          <a:lstStyle/>
+          <a:p>
+            <a:pPr algn="l" indent="0" marL="0">
+              <a:buNone/>
+            </a:pPr>
+            <a:r>
+              <a:rPr lang="ko-KR" altLang="en-US" sz="1100" spc="-22" kern="0" dirty="0">
+                <a:solidFill>
+                  <a:srgbClr val="0B2147"/>
                 </a:solidFill>
                 <a:latin typeface="Paperlogy 8 ExtraBold" pitchFamily="34" charset="0"/>
                 <a:ea typeface="Paperlogy 8 ExtraBold" pitchFamily="34" charset="-127"/>
                 <a:cs typeface="Paperlogy 8 ExtraBold" pitchFamily="34" charset="-120"/>
               </a:rPr>
-              <a:t>02</a:t>
-            </a:r>
-            <a:endParaRPr lang="en-US" sz="950" dirty="0"/>
-          </a:p>
-        </p:txBody>
-      </p:sp>
-      <p:sp>
-        <p:nvSpPr>
-          <p:cNvPr id="71" name="ALIGN"/>
-          <p:cNvSpPr txBox="1"/>
-          <p:nvPr/>
-        </p:nvSpPr>
-        <p:spPr>
-          <a:xfrm>
-            <a:off x="3637657" y="4455914"/>
-            <a:ext cx="542330" cy="146050"/>
+              <a:t>장려상</a:t>
+            </a:r>
+            <a:endParaRPr lang="en-US" sz="1100" dirty="0"/>
+          </a:p>
+        </p:txBody>
+      </p:sp>
+      <p:sp>
+        <p:nvSpPr>
+          <p:cNvPr id="130" name="남은 3주 내 시연 영상 완성"/>
+          <p:cNvSpPr txBox="1"/>
+          <p:nvPr/>
+        </p:nvSpPr>
+        <p:spPr>
+          <a:xfrm>
+            <a:off x="9956800" y="5195094"/>
+            <a:ext cx="1505535" cy="165100"/>
+          </a:xfrm>
+          <a:prstGeom prst="rect">
+            <a:avLst/>
+          </a:prstGeom>
+          <a:noFill/>
+          <a:ln/>
+        </p:spPr>
+        <p:txBody>
+          <a:bodyPr wrap="none" lIns="0" tIns="0" rIns="0" bIns="0" rtlCol="0" anchor="ctr"/>
+          <a:lstStyle/>
+          <a:p>
+            <a:pPr algn="l" indent="0" marL="0">
+              <a:buNone/>
+            </a:pPr>
+            <a:r>
+              <a:rPr lang="ko-KR" altLang="en-US" sz="1100" spc="-28" kern="0" dirty="0">
+                <a:solidFill>
+                  <a:srgbClr val="1C2536"/>
+                </a:solidFill>
+                <a:latin typeface="Paperlogy 6 SemiBold" pitchFamily="34" charset="0"/>
+                <a:ea typeface="Paperlogy 6 SemiBold" pitchFamily="34" charset="-127"/>
+                <a:cs typeface="Paperlogy 6 SemiBold" pitchFamily="34" charset="-120"/>
+              </a:rPr>
+              <a:t>남은 3주 내 시연 영상 완성</a:t>
+            </a:r>
+            <a:endParaRPr lang="en-US" sz="1100" dirty="0"/>
+          </a:p>
+        </p:txBody>
+      </p:sp>
+      <p:sp>
+        <p:nvSpPr>
+          <p:cNvPr id="131" name="학생 BIM 경진대회 장려상"/>
+          <p:cNvSpPr txBox="1"/>
+          <p:nvPr/>
+        </p:nvSpPr>
+        <p:spPr>
+          <a:xfrm>
+            <a:off x="9956800" y="5416054"/>
+            <a:ext cx="1516158" cy="165100"/>
+          </a:xfrm>
+          <a:prstGeom prst="rect">
+            <a:avLst/>
+          </a:prstGeom>
+          <a:noFill/>
+          <a:ln/>
+        </p:spPr>
+        <p:txBody>
+          <a:bodyPr wrap="none" lIns="0" tIns="0" rIns="0" bIns="0" rtlCol="0" anchor="ctr"/>
+          <a:lstStyle/>
+          <a:p>
+            <a:pPr algn="l" indent="0" marL="0">
+              <a:buNone/>
+            </a:pPr>
+            <a:r>
+              <a:rPr lang="ko-KR" altLang="en-US" sz="1100" spc="-28" kern="0" dirty="0">
+                <a:solidFill>
+                  <a:srgbClr val="1C2536"/>
+                </a:solidFill>
+                <a:latin typeface="Paperlogy 6 SemiBold" pitchFamily="34" charset="0"/>
+                <a:ea typeface="Paperlogy 6 SemiBold" pitchFamily="34" charset="-127"/>
+                <a:cs typeface="Paperlogy 6 SemiBold" pitchFamily="34" charset="-120"/>
+              </a:rPr>
+              <a:t>학생 BIM 경진대회 장려상</a:t>
+            </a:r>
+            <a:endParaRPr lang="en-US" sz="1100" dirty="0"/>
+          </a:p>
+        </p:txBody>
+      </p:sp>
+      <p:sp>
+        <p:nvSpPr>
+          <p:cNvPr id="132" name="KEY MESSAGE"/>
+          <p:cNvSpPr txBox="1"/>
+          <p:nvPr/>
+        </p:nvSpPr>
+        <p:spPr>
+          <a:xfrm>
+            <a:off x="1308100" y="6007298"/>
+            <a:ext cx="1171825" cy="146050"/>
           </a:xfrm>
           <a:prstGeom prst="rect">
             <a:avLst/>
@@ -3047,13 +4986,13 @@
             <a:r>
               <a:rPr lang="ko-KR" altLang="en-US" sz="950" spc="152" kern="0" dirty="0">
                 <a:solidFill>
-                  <a:srgbClr val="2A78DD"/>
+                  <a:srgbClr val="8FD3F5"/>
                 </a:solidFill>
                 <a:latin typeface="Paperlogy 7 Bold" pitchFamily="34" charset="0"/>
                 <a:ea typeface="Paperlogy 7 Bold" pitchFamily="34" charset="-127"/>
                 <a:cs typeface="Paperlogy 7 Bold" pitchFamily="34" charset="-120"/>
               </a:rPr>
-              <a:t>ALIGN</a:t>
+              <a:t>KEY MESSAGE</a:t>
             </a:r>
             <a:endParaRPr lang="en-US" sz="950" dirty="0"/>
           </a:p>
@@ -3061,689 +5000,104 @@
       </p:sp>
       <p:sp>
         <p:nvSpPr>
-          <p:cNvPr id="72" name="의견 조율 · 공통 기준 마련"/>
-          <p:cNvSpPr txBox="1"/>
-          <p:nvPr/>
-        </p:nvSpPr>
-        <p:spPr>
-          <a:xfrm>
-            <a:off x="3403600" y="4662587"/>
-            <a:ext cx="1836091" cy="209550"/>
-          </a:xfrm>
-          <a:prstGeom prst="rect">
-            <a:avLst/>
-          </a:prstGeom>
-          <a:noFill/>
-          <a:ln/>
-        </p:spPr>
-        <p:txBody>
-          <a:bodyPr wrap="none" lIns="0" tIns="0" rIns="0" bIns="0" rtlCol="0" anchor="ctr"/>
-          <a:lstStyle/>
-          <a:p>
-            <a:pPr algn="l" indent="0" marL="0">
-              <a:buNone/>
-            </a:pPr>
-            <a:r>
-              <a:rPr lang="ko-KR" altLang="en-US" sz="1400" spc="-42" kern="0" dirty="0">
-                <a:solidFill>
-                  <a:srgbClr val="0B2147"/>
+          <p:cNvPr id="133" name="서로 다른 사람을 하나의 공동 목표로 연결합니다"/>
+          <p:cNvSpPr txBox="1"/>
+          <p:nvPr/>
+        </p:nvSpPr>
+        <p:spPr>
+          <a:xfrm>
+            <a:off x="2591395" y="5954514"/>
+            <a:ext cx="4151660" cy="254000"/>
+          </a:xfrm>
+          <a:prstGeom prst="rect">
+            <a:avLst/>
+          </a:prstGeom>
+          <a:noFill/>
+          <a:ln/>
+        </p:spPr>
+        <p:txBody>
+          <a:bodyPr wrap="none" lIns="0" tIns="0" rIns="0" bIns="0" rtlCol="0" anchor="ctr"/>
+          <a:lstStyle/>
+          <a:p>
+            <a:pPr algn="l" indent="0" marL="0">
+              <a:buNone/>
+            </a:pPr>
+            <a:r>
+              <a:rPr lang="ko-KR" altLang="en-US" sz="1700" spc="-51" kern="0" dirty="0">
+                <a:solidFill>
+                  <a:srgbClr val="FFFFFF"/>
                 </a:solidFill>
                 <a:latin typeface="Paperlogy 7 Bold" pitchFamily="34" charset="0"/>
                 <a:ea typeface="Paperlogy 7 Bold" pitchFamily="34" charset="-127"/>
                 <a:cs typeface="Paperlogy 7 Bold" pitchFamily="34" charset="-120"/>
               </a:rPr>
-              <a:t>의견 조율 · 공통 기준 마련</a:t>
-            </a:r>
-            <a:endParaRPr lang="en-US" sz="1400" dirty="0"/>
-          </a:p>
-        </p:txBody>
-      </p:sp>
-      <p:sp>
-        <p:nvSpPr>
-          <p:cNvPr id="73" name="경청 · 수상작 분석 · 교수님 조언"/>
-          <p:cNvSpPr txBox="1"/>
-          <p:nvPr/>
-        </p:nvSpPr>
-        <p:spPr>
-          <a:xfrm>
-            <a:off x="3505200" y="4963517"/>
-            <a:ext cx="1787606" cy="165100"/>
-          </a:xfrm>
-          <a:prstGeom prst="rect">
-            <a:avLst/>
-          </a:prstGeom>
-          <a:noFill/>
-          <a:ln/>
-        </p:spPr>
-        <p:txBody>
-          <a:bodyPr wrap="none" lIns="0" tIns="0" rIns="0" bIns="0" rtlCol="0" anchor="ctr"/>
-          <a:lstStyle/>
-          <a:p>
-            <a:pPr algn="l" indent="0" marL="0">
-              <a:buNone/>
-            </a:pPr>
-            <a:r>
-              <a:rPr lang="ko-KR" altLang="en-US" sz="1100" spc="-22" kern="0" dirty="0">
-                <a:solidFill>
-                  <a:srgbClr val="4B5568"/>
+              <a:t>서로 다른 사람을 </a:t>
+            </a:r>
+            <a:pPr algn="l" indent="0" marL="0">
+              <a:buNone/>
+            </a:pPr>
+            <a:r>
+              <a:rPr lang="ko-KR" altLang="en-US" sz="1700" spc="-51" kern="0" dirty="0">
+                <a:solidFill>
+                  <a:srgbClr val="FDBB30"/>
+                </a:solidFill>
+                <a:latin typeface="Paperlogy 7 Bold" pitchFamily="34" charset="0"/>
+                <a:ea typeface="Paperlogy 7 Bold" pitchFamily="34" charset="-127"/>
+                <a:cs typeface="Paperlogy 7 Bold" pitchFamily="34" charset="-120"/>
+              </a:rPr>
+              <a:t>하나의 공동 목표</a:t>
+            </a:r>
+            <a:pPr algn="l" indent="0" marL="0">
+              <a:buNone/>
+            </a:pPr>
+            <a:r>
+              <a:rPr lang="ko-KR" altLang="en-US" sz="1700" spc="-51" kern="0" dirty="0">
+                <a:solidFill>
+                  <a:srgbClr val="FFFFFF"/>
+                </a:solidFill>
+                <a:latin typeface="Paperlogy 7 Bold" pitchFamily="34" charset="0"/>
+                <a:ea typeface="Paperlogy 7 Bold" pitchFamily="34" charset="-127"/>
+                <a:cs typeface="Paperlogy 7 Bold" pitchFamily="34" charset="-120"/>
+              </a:rPr>
+              <a:t>로 연결합니다</a:t>
+            </a:r>
+            <a:endParaRPr lang="en-US" sz="1700" dirty="0"/>
+          </a:p>
+        </p:txBody>
+      </p:sp>
+      <p:sp>
+        <p:nvSpPr>
+          <p:cNvPr id="134" name="2026년 하반기 신입사원 공개채용"/>
+          <p:cNvSpPr txBox="1"/>
+          <p:nvPr/>
+        </p:nvSpPr>
+        <p:spPr>
+          <a:xfrm>
+            <a:off x="609600" y="6425605"/>
+            <a:ext cx="1659507" cy="139700"/>
+          </a:xfrm>
+          <a:prstGeom prst="rect">
+            <a:avLst/>
+          </a:prstGeom>
+          <a:noFill/>
+          <a:ln/>
+        </p:spPr>
+        <p:txBody>
+          <a:bodyPr wrap="none" lIns="0" tIns="0" rIns="0" bIns="0" rtlCol="0" anchor="ctr"/>
+          <a:lstStyle/>
+          <a:p>
+            <a:pPr algn="l" indent="0" marL="0">
+              <a:buNone/>
+            </a:pPr>
+            <a:r>
+              <a:rPr lang="ko-KR" altLang="en-US" sz="900" spc="-9" kern="0" dirty="0">
+                <a:solidFill>
+                  <a:srgbClr val="8691A5"/>
                 </a:solidFill>
                 <a:latin typeface="Paperlogy 5 Medium" pitchFamily="34" charset="0"/>
                 <a:ea typeface="Paperlogy 5 Medium" pitchFamily="34" charset="-127"/>
                 <a:cs typeface="Paperlogy 5 Medium" pitchFamily="34" charset="-120"/>
               </a:rPr>
-              <a:t>경청 · 수상작 분석 · 교수님 조언</a:t>
-            </a:r>
-            <a:endParaRPr lang="en-US" sz="1100" dirty="0"/>
-          </a:p>
-        </p:txBody>
-      </p:sp>
-      <p:sp>
-        <p:nvSpPr>
-          <p:cNvPr id="74" name="판단 기준 마련"/>
-          <p:cNvSpPr txBox="1"/>
-          <p:nvPr/>
-        </p:nvSpPr>
-        <p:spPr>
-          <a:xfrm>
-            <a:off x="3505200" y="5178723"/>
-            <a:ext cx="827584" cy="165100"/>
-          </a:xfrm>
-          <a:prstGeom prst="rect">
-            <a:avLst/>
-          </a:prstGeom>
-          <a:noFill/>
-          <a:ln/>
-        </p:spPr>
-        <p:txBody>
-          <a:bodyPr wrap="none" lIns="0" tIns="0" rIns="0" bIns="0" rtlCol="0" anchor="ctr"/>
-          <a:lstStyle/>
-          <a:p>
-            <a:pPr algn="l" indent="0" marL="0">
-              <a:buNone/>
-            </a:pPr>
-            <a:r>
-              <a:rPr lang="ko-KR" altLang="en-US" sz="1100" spc="-22" kern="0" dirty="0">
-                <a:solidFill>
-                  <a:srgbClr val="4B5568"/>
-                </a:solidFill>
-                <a:latin typeface="Paperlogy 5 Medium" pitchFamily="34" charset="0"/>
-                <a:ea typeface="Paperlogy 5 Medium" pitchFamily="34" charset="-127"/>
-                <a:cs typeface="Paperlogy 5 Medium" pitchFamily="34" charset="-120"/>
-              </a:rPr>
-              <a:t>판단 기준 마련</a:t>
-            </a:r>
-            <a:endParaRPr lang="en-US" sz="1100" dirty="0"/>
-          </a:p>
-        </p:txBody>
-      </p:sp>
-      <p:sp>
-        <p:nvSpPr>
-          <p:cNvPr id="75" name="방향 합의"/>
-          <p:cNvSpPr txBox="1"/>
-          <p:nvPr/>
-        </p:nvSpPr>
-        <p:spPr>
-          <a:xfrm>
-            <a:off x="4497884" y="5178723"/>
-            <a:ext cx="559395" cy="165100"/>
-          </a:xfrm>
-          <a:prstGeom prst="rect">
-            <a:avLst/>
-          </a:prstGeom>
-          <a:noFill/>
-          <a:ln/>
-        </p:spPr>
-        <p:txBody>
-          <a:bodyPr wrap="none" lIns="0" tIns="0" rIns="0" bIns="0" rtlCol="0" anchor="ctr"/>
-          <a:lstStyle/>
-          <a:p>
-            <a:pPr algn="l" indent="0" marL="0">
-              <a:buNone/>
-            </a:pPr>
-            <a:r>
-              <a:rPr lang="ko-KR" altLang="en-US" sz="1100" spc="-22" kern="0" dirty="0">
-                <a:solidFill>
-                  <a:srgbClr val="4B5568"/>
-                </a:solidFill>
-                <a:latin typeface="Paperlogy 5 Medium" pitchFamily="34" charset="0"/>
-                <a:ea typeface="Paperlogy 5 Medium" pitchFamily="34" charset="-127"/>
-                <a:cs typeface="Paperlogy 5 Medium" pitchFamily="34" charset="-120"/>
-              </a:rPr>
-              <a:t>방향 합의</a:t>
-            </a:r>
-            <a:endParaRPr lang="en-US" sz="1100" dirty="0"/>
-          </a:p>
-        </p:txBody>
-      </p:sp>
-      <p:sp>
-        <p:nvSpPr>
-          <p:cNvPr id="76" name="03"/>
-          <p:cNvSpPr txBox="1"/>
-          <p:nvPr/>
-        </p:nvSpPr>
-        <p:spPr>
-          <a:xfrm>
-            <a:off x="6197600" y="4455914"/>
-            <a:ext cx="221357" cy="146050"/>
-          </a:xfrm>
-          <a:prstGeom prst="rect">
-            <a:avLst/>
-          </a:prstGeom>
-          <a:noFill/>
-          <a:ln/>
-        </p:spPr>
-        <p:txBody>
-          <a:bodyPr wrap="none" lIns="0" tIns="0" rIns="0" bIns="0" rtlCol="0" anchor="ctr"/>
-          <a:lstStyle/>
-          <a:p>
-            <a:pPr algn="l" indent="0" marL="0">
-              <a:buNone/>
-            </a:pPr>
-            <a:r>
-              <a:rPr lang="ko-KR" altLang="en-US" sz="950" spc="38" kern="0" dirty="0">
-                <a:solidFill>
-                  <a:srgbClr val="8691A5"/>
-                </a:solidFill>
-                <a:latin typeface="Paperlogy 8 ExtraBold" pitchFamily="34" charset="0"/>
-                <a:ea typeface="Paperlogy 8 ExtraBold" pitchFamily="34" charset="-127"/>
-                <a:cs typeface="Paperlogy 8 ExtraBold" pitchFamily="34" charset="-120"/>
-              </a:rPr>
-              <a:t>03</a:t>
-            </a:r>
-            <a:endParaRPr lang="en-US" sz="950" dirty="0"/>
-          </a:p>
-        </p:txBody>
-      </p:sp>
-      <p:sp>
-        <p:nvSpPr>
-          <p:cNvPr id="77" name="ONE TEAM"/>
-          <p:cNvSpPr txBox="1"/>
-          <p:nvPr/>
-        </p:nvSpPr>
-        <p:spPr>
-          <a:xfrm>
-            <a:off x="6431657" y="4455914"/>
-            <a:ext cx="878681" cy="146050"/>
-          </a:xfrm>
-          <a:prstGeom prst="rect">
-            <a:avLst/>
-          </a:prstGeom>
-          <a:noFill/>
-          <a:ln/>
-        </p:spPr>
-        <p:txBody>
-          <a:bodyPr wrap="none" lIns="0" tIns="0" rIns="0" bIns="0" rtlCol="0" anchor="ctr"/>
-          <a:lstStyle/>
-          <a:p>
-            <a:pPr algn="l" indent="0" marL="0">
-              <a:buNone/>
-            </a:pPr>
-            <a:r>
-              <a:rPr lang="ko-KR" altLang="en-US" sz="950" spc="152" kern="0" dirty="0">
-                <a:solidFill>
-                  <a:srgbClr val="2A78DD"/>
-                </a:solidFill>
-                <a:latin typeface="Paperlogy 7 Bold" pitchFamily="34" charset="0"/>
-                <a:ea typeface="Paperlogy 7 Bold" pitchFamily="34" charset="-127"/>
-                <a:cs typeface="Paperlogy 7 Bold" pitchFamily="34" charset="-120"/>
-              </a:rPr>
-              <a:t>ONE TEAM</a:t>
-            </a:r>
-            <a:endParaRPr lang="en-US" sz="950" dirty="0"/>
-          </a:p>
-        </p:txBody>
-      </p:sp>
-      <p:sp>
-        <p:nvSpPr>
-          <p:cNvPr id="78" name="역할 분담 · 지속적인 공유"/>
-          <p:cNvSpPr txBox="1"/>
-          <p:nvPr/>
-        </p:nvSpPr>
-        <p:spPr>
-          <a:xfrm>
-            <a:off x="6197600" y="4662587"/>
-            <a:ext cx="1800332" cy="209550"/>
-          </a:xfrm>
-          <a:prstGeom prst="rect">
-            <a:avLst/>
-          </a:prstGeom>
-          <a:noFill/>
-          <a:ln/>
-        </p:spPr>
-        <p:txBody>
-          <a:bodyPr wrap="none" lIns="0" tIns="0" rIns="0" bIns="0" rtlCol="0" anchor="ctr"/>
-          <a:lstStyle/>
-          <a:p>
-            <a:pPr algn="l" indent="0" marL="0">
-              <a:buNone/>
-            </a:pPr>
-            <a:r>
-              <a:rPr lang="ko-KR" altLang="en-US" sz="1400" spc="-42" kern="0" dirty="0">
-                <a:solidFill>
-                  <a:srgbClr val="0B2147"/>
-                </a:solidFill>
-                <a:latin typeface="Paperlogy 7 Bold" pitchFamily="34" charset="0"/>
-                <a:ea typeface="Paperlogy 7 Bold" pitchFamily="34" charset="-127"/>
-                <a:cs typeface="Paperlogy 7 Bold" pitchFamily="34" charset="-120"/>
-              </a:rPr>
-              <a:t>역할 분담 · 지속적인 공유</a:t>
-            </a:r>
-            <a:endParaRPr lang="en-US" sz="1400" dirty="0"/>
-          </a:p>
-        </p:txBody>
-      </p:sp>
-      <p:sp>
-        <p:nvSpPr>
-          <p:cNvPr id="79" name="강점 기반 역할 분담"/>
-          <p:cNvSpPr txBox="1"/>
-          <p:nvPr/>
-        </p:nvSpPr>
-        <p:spPr>
-          <a:xfrm>
-            <a:off x="6299200" y="4963517"/>
-            <a:ext cx="1107670" cy="165100"/>
-          </a:xfrm>
-          <a:prstGeom prst="rect">
-            <a:avLst/>
-          </a:prstGeom>
-          <a:noFill/>
-          <a:ln/>
-        </p:spPr>
-        <p:txBody>
-          <a:bodyPr wrap="none" lIns="0" tIns="0" rIns="0" bIns="0" rtlCol="0" anchor="ctr"/>
-          <a:lstStyle/>
-          <a:p>
-            <a:pPr algn="l" indent="0" marL="0">
-              <a:buNone/>
-            </a:pPr>
-            <a:r>
-              <a:rPr lang="ko-KR" altLang="en-US" sz="1100" spc="-22" kern="0" dirty="0">
-                <a:solidFill>
-                  <a:srgbClr val="4B5568"/>
-                </a:solidFill>
-                <a:latin typeface="Paperlogy 5 Medium" pitchFamily="34" charset="0"/>
-                <a:ea typeface="Paperlogy 5 Medium" pitchFamily="34" charset="-127"/>
-                <a:cs typeface="Paperlogy 5 Medium" pitchFamily="34" charset="-120"/>
-              </a:rPr>
-              <a:t>강점 기반 역할 분담</a:t>
-            </a:r>
-            <a:endParaRPr lang="en-US" sz="1100" dirty="0"/>
-          </a:p>
-        </p:txBody>
-      </p:sp>
-      <p:sp>
-        <p:nvSpPr>
-          <p:cNvPr id="80" name="이틀마다 진행상황 공유 · 피드백"/>
-          <p:cNvSpPr txBox="1"/>
-          <p:nvPr/>
-        </p:nvSpPr>
-        <p:spPr>
-          <a:xfrm>
-            <a:off x="6299200" y="5178723"/>
-            <a:ext cx="1814846" cy="165100"/>
-          </a:xfrm>
-          <a:prstGeom prst="rect">
-            <a:avLst/>
-          </a:prstGeom>
-          <a:noFill/>
-          <a:ln/>
-        </p:spPr>
-        <p:txBody>
-          <a:bodyPr wrap="none" lIns="0" tIns="0" rIns="0" bIns="0" rtlCol="0" anchor="ctr"/>
-          <a:lstStyle/>
-          <a:p>
-            <a:pPr algn="l" indent="0" marL="0">
-              <a:buNone/>
-            </a:pPr>
-            <a:r>
-              <a:rPr lang="ko-KR" altLang="en-US" sz="1100" spc="-22" kern="0" dirty="0">
-                <a:solidFill>
-                  <a:srgbClr val="4B5568"/>
-                </a:solidFill>
-                <a:latin typeface="Paperlogy 5 Medium" pitchFamily="34" charset="0"/>
-                <a:ea typeface="Paperlogy 5 Medium" pitchFamily="34" charset="-127"/>
-                <a:cs typeface="Paperlogy 5 Medium" pitchFamily="34" charset="-120"/>
-              </a:rPr>
-              <a:t>이틀마다 진행상황 공유 · 피드백</a:t>
-            </a:r>
-            <a:endParaRPr lang="en-US" sz="1100" dirty="0"/>
-          </a:p>
-        </p:txBody>
-      </p:sp>
-      <p:sp>
-        <p:nvSpPr>
-          <p:cNvPr id="81" name="04"/>
-          <p:cNvSpPr txBox="1"/>
-          <p:nvPr/>
-        </p:nvSpPr>
-        <p:spPr>
-          <a:xfrm>
-            <a:off x="8991600" y="4455914"/>
-            <a:ext cx="221357" cy="146050"/>
-          </a:xfrm>
-          <a:prstGeom prst="rect">
-            <a:avLst/>
-          </a:prstGeom>
-          <a:noFill/>
-          <a:ln/>
-        </p:spPr>
-        <p:txBody>
-          <a:bodyPr wrap="none" lIns="0" tIns="0" rIns="0" bIns="0" rtlCol="0" anchor="ctr"/>
-          <a:lstStyle/>
-          <a:p>
-            <a:pPr algn="l" indent="0" marL="0">
-              <a:buNone/>
-            </a:pPr>
-            <a:r>
-              <a:rPr lang="ko-KR" altLang="en-US" sz="950" spc="38" kern="0" dirty="0">
-                <a:solidFill>
-                  <a:srgbClr val="8691A5"/>
-                </a:solidFill>
-                <a:latin typeface="Paperlogy 8 ExtraBold" pitchFamily="34" charset="0"/>
-                <a:ea typeface="Paperlogy 8 ExtraBold" pitchFamily="34" charset="-127"/>
-                <a:cs typeface="Paperlogy 8 ExtraBold" pitchFamily="34" charset="-120"/>
-              </a:rPr>
-              <a:t>04</a:t>
-            </a:r>
-            <a:endParaRPr lang="en-US" sz="950" dirty="0"/>
-          </a:p>
-        </p:txBody>
-      </p:sp>
-      <p:sp>
-        <p:nvSpPr>
-          <p:cNvPr id="82" name="RESULT"/>
-          <p:cNvSpPr txBox="1"/>
-          <p:nvPr/>
-        </p:nvSpPr>
-        <p:spPr>
-          <a:xfrm>
-            <a:off x="9225657" y="4455914"/>
-            <a:ext cx="646311" cy="146050"/>
-          </a:xfrm>
-          <a:prstGeom prst="rect">
-            <a:avLst/>
-          </a:prstGeom>
-          <a:noFill/>
-          <a:ln/>
-        </p:spPr>
-        <p:txBody>
-          <a:bodyPr wrap="none" lIns="0" tIns="0" rIns="0" bIns="0" rtlCol="0" anchor="ctr"/>
-          <a:lstStyle/>
-          <a:p>
-            <a:pPr algn="l" indent="0" marL="0">
-              <a:buNone/>
-            </a:pPr>
-            <a:r>
-              <a:rPr lang="ko-KR" altLang="en-US" sz="950" spc="152" kern="0" dirty="0">
-                <a:solidFill>
-                  <a:srgbClr val="2A78DD"/>
-                </a:solidFill>
-                <a:latin typeface="Paperlogy 7 Bold" pitchFamily="34" charset="0"/>
-                <a:ea typeface="Paperlogy 7 Bold" pitchFamily="34" charset="-127"/>
-                <a:cs typeface="Paperlogy 7 Bold" pitchFamily="34" charset="-120"/>
-              </a:rPr>
-              <a:t>RESULT</a:t>
-            </a:r>
-            <a:endParaRPr lang="en-US" sz="950" dirty="0"/>
-          </a:p>
-        </p:txBody>
-      </p:sp>
-      <p:sp>
-        <p:nvSpPr>
-          <p:cNvPr id="83" name="프로젝트 완성 · 장려상 수상"/>
-          <p:cNvSpPr txBox="1"/>
-          <p:nvPr/>
-        </p:nvSpPr>
-        <p:spPr>
-          <a:xfrm>
-            <a:off x="8991600" y="4662587"/>
-            <a:ext cx="1960509" cy="209550"/>
-          </a:xfrm>
-          <a:prstGeom prst="rect">
-            <a:avLst/>
-          </a:prstGeom>
-          <a:noFill/>
-          <a:ln/>
-        </p:spPr>
-        <p:txBody>
-          <a:bodyPr wrap="none" lIns="0" tIns="0" rIns="0" bIns="0" rtlCol="0" anchor="ctr"/>
-          <a:lstStyle/>
-          <a:p>
-            <a:pPr algn="l" indent="0" marL="0">
-              <a:buNone/>
-            </a:pPr>
-            <a:r>
-              <a:rPr lang="ko-KR" altLang="en-US" sz="1400" spc="-42" kern="0" dirty="0">
-                <a:solidFill>
-                  <a:srgbClr val="0B2147"/>
-                </a:solidFill>
-                <a:latin typeface="Paperlogy 7 Bold" pitchFamily="34" charset="0"/>
-                <a:ea typeface="Paperlogy 7 Bold" pitchFamily="34" charset="-127"/>
-                <a:cs typeface="Paperlogy 7 Bold" pitchFamily="34" charset="-120"/>
-              </a:rPr>
-              <a:t>프로젝트 완성 · 장려상 수상</a:t>
-            </a:r>
-            <a:endParaRPr lang="en-US" sz="1400" dirty="0"/>
-          </a:p>
-        </p:txBody>
-      </p:sp>
-      <p:sp>
-        <p:nvSpPr>
-          <p:cNvPr id="84" name="남은 3주 내 프로젝트 완수"/>
-          <p:cNvSpPr txBox="1"/>
-          <p:nvPr/>
-        </p:nvSpPr>
-        <p:spPr>
-          <a:xfrm>
-            <a:off x="9093200" y="4963517"/>
-            <a:ext cx="1487761" cy="165100"/>
-          </a:xfrm>
-          <a:prstGeom prst="rect">
-            <a:avLst/>
-          </a:prstGeom>
-          <a:noFill/>
-          <a:ln/>
-        </p:spPr>
-        <p:txBody>
-          <a:bodyPr wrap="none" lIns="0" tIns="0" rIns="0" bIns="0" rtlCol="0" anchor="ctr"/>
-          <a:lstStyle/>
-          <a:p>
-            <a:pPr algn="l" indent="0" marL="0">
-              <a:buNone/>
-            </a:pPr>
-            <a:r>
-              <a:rPr lang="ko-KR" altLang="en-US" sz="1100" spc="-22" kern="0" dirty="0">
-                <a:solidFill>
-                  <a:srgbClr val="4B5568"/>
-                </a:solidFill>
-                <a:latin typeface="Paperlogy 5 Medium" pitchFamily="34" charset="0"/>
-                <a:ea typeface="Paperlogy 5 Medium" pitchFamily="34" charset="-127"/>
-                <a:cs typeface="Paperlogy 5 Medium" pitchFamily="34" charset="-120"/>
-              </a:rPr>
-              <a:t>남은 3주 내 프로젝트 완수</a:t>
-            </a:r>
-            <a:endParaRPr lang="en-US" sz="1100" dirty="0"/>
-          </a:p>
-        </p:txBody>
-      </p:sp>
-      <p:sp>
-        <p:nvSpPr>
-          <p:cNvPr id="85" name="학생 BIM 경진대회 장려상"/>
-          <p:cNvSpPr txBox="1"/>
-          <p:nvPr/>
-        </p:nvSpPr>
-        <p:spPr>
-          <a:xfrm>
-            <a:off x="9093200" y="5178723"/>
-            <a:ext cx="1525413" cy="165100"/>
-          </a:xfrm>
-          <a:prstGeom prst="rect">
-            <a:avLst/>
-          </a:prstGeom>
-          <a:noFill/>
-          <a:ln/>
-        </p:spPr>
-        <p:txBody>
-          <a:bodyPr wrap="none" lIns="0" tIns="0" rIns="0" bIns="0" rtlCol="0" anchor="ctr"/>
-          <a:lstStyle/>
-          <a:p>
-            <a:pPr algn="l" indent="0" marL="0">
-              <a:buNone/>
-            </a:pPr>
-            <a:r>
-              <a:rPr lang="ko-KR" altLang="en-US" sz="1100" spc="-22" kern="0" dirty="0">
-                <a:solidFill>
-                  <a:srgbClr val="4B5568"/>
-                </a:solidFill>
-                <a:latin typeface="Paperlogy 5 Medium" pitchFamily="34" charset="0"/>
-                <a:ea typeface="Paperlogy 5 Medium" pitchFamily="34" charset="-127"/>
-                <a:cs typeface="Paperlogy 5 Medium" pitchFamily="34" charset="-120"/>
-              </a:rPr>
-              <a:t>학생 BIM 경진대회 장려상</a:t>
-            </a:r>
-            <a:endParaRPr lang="en-US" sz="1100" dirty="0"/>
-          </a:p>
-        </p:txBody>
-      </p:sp>
-      <p:sp>
-        <p:nvSpPr>
-          <p:cNvPr id="86" name="KEY MESSAGE"/>
-          <p:cNvSpPr txBox="1"/>
-          <p:nvPr/>
-        </p:nvSpPr>
-        <p:spPr>
-          <a:xfrm>
-            <a:off x="1308100" y="5892998"/>
-            <a:ext cx="1171825" cy="146050"/>
-          </a:xfrm>
-          <a:prstGeom prst="rect">
-            <a:avLst/>
-          </a:prstGeom>
-          <a:noFill/>
-          <a:ln/>
-        </p:spPr>
-        <p:txBody>
-          <a:bodyPr wrap="none" lIns="0" tIns="0" rIns="0" bIns="0" rtlCol="0" anchor="ctr"/>
-          <a:lstStyle/>
-          <a:p>
-            <a:pPr algn="l" indent="0" marL="0">
-              <a:buNone/>
-            </a:pPr>
-            <a:r>
-              <a:rPr lang="ko-KR" altLang="en-US" sz="950" spc="152" kern="0" dirty="0">
-                <a:solidFill>
-                  <a:srgbClr val="8FD3F5"/>
-                </a:solidFill>
-                <a:latin typeface="Paperlogy 7 Bold" pitchFamily="34" charset="0"/>
-                <a:ea typeface="Paperlogy 7 Bold" pitchFamily="34" charset="-127"/>
-                <a:cs typeface="Paperlogy 7 Bold" pitchFamily="34" charset="-120"/>
-              </a:rPr>
-              <a:t>KEY MESSAGE</a:t>
-            </a:r>
-            <a:endParaRPr lang="en-US" sz="950" dirty="0"/>
-          </a:p>
-        </p:txBody>
-      </p:sp>
-      <p:sp>
-        <p:nvSpPr>
-          <p:cNvPr id="87" name="서로 다른 사람을 하나의 공동 목표로 연결합니다"/>
-          <p:cNvSpPr txBox="1"/>
-          <p:nvPr/>
-        </p:nvSpPr>
-        <p:spPr>
-          <a:xfrm>
-            <a:off x="2591395" y="5840214"/>
-            <a:ext cx="4151660" cy="254000"/>
-          </a:xfrm>
-          <a:prstGeom prst="rect">
-            <a:avLst/>
-          </a:prstGeom>
-          <a:noFill/>
-          <a:ln/>
-        </p:spPr>
-        <p:txBody>
-          <a:bodyPr wrap="none" lIns="0" tIns="0" rIns="0" bIns="0" rtlCol="0" anchor="ctr"/>
-          <a:lstStyle/>
-          <a:p>
-            <a:pPr algn="l" indent="0" marL="0">
-              <a:buNone/>
-            </a:pPr>
-            <a:r>
-              <a:rPr lang="ko-KR" altLang="en-US" sz="1700" spc="-51" kern="0" dirty="0">
-                <a:solidFill>
-                  <a:srgbClr val="FFFFFF"/>
-                </a:solidFill>
-                <a:latin typeface="Paperlogy 7 Bold" pitchFamily="34" charset="0"/>
-                <a:ea typeface="Paperlogy 7 Bold" pitchFamily="34" charset="-127"/>
-                <a:cs typeface="Paperlogy 7 Bold" pitchFamily="34" charset="-120"/>
-              </a:rPr>
-              <a:t>서로 다른 사람을 </a:t>
-            </a:r>
-            <a:pPr algn="l" indent="0" marL="0">
-              <a:buNone/>
-            </a:pPr>
-            <a:r>
-              <a:rPr lang="ko-KR" altLang="en-US" sz="1700" spc="-51" kern="0" dirty="0">
-                <a:solidFill>
-                  <a:srgbClr val="FDBB30"/>
-                </a:solidFill>
-                <a:latin typeface="Paperlogy 7 Bold" pitchFamily="34" charset="0"/>
-                <a:ea typeface="Paperlogy 7 Bold" pitchFamily="34" charset="-127"/>
-                <a:cs typeface="Paperlogy 7 Bold" pitchFamily="34" charset="-120"/>
-              </a:rPr>
-              <a:t>하나의 공동 목표</a:t>
-            </a:r>
-            <a:pPr algn="l" indent="0" marL="0">
-              <a:buNone/>
-            </a:pPr>
-            <a:r>
-              <a:rPr lang="ko-KR" altLang="en-US" sz="1700" spc="-51" kern="0" dirty="0">
-                <a:solidFill>
-                  <a:srgbClr val="FFFFFF"/>
-                </a:solidFill>
-                <a:latin typeface="Paperlogy 7 Bold" pitchFamily="34" charset="0"/>
-                <a:ea typeface="Paperlogy 7 Bold" pitchFamily="34" charset="-127"/>
-                <a:cs typeface="Paperlogy 7 Bold" pitchFamily="34" charset="-120"/>
-              </a:rPr>
-              <a:t>로 연결합니다</a:t>
-            </a:r>
-            <a:endParaRPr lang="en-US" sz="1700" dirty="0"/>
-          </a:p>
-        </p:txBody>
-      </p:sp>
-      <p:sp>
-        <p:nvSpPr>
-          <p:cNvPr id="88" name="2026년 하반기 신입사원 공개채용"/>
-          <p:cNvSpPr txBox="1"/>
-          <p:nvPr/>
-        </p:nvSpPr>
-        <p:spPr>
-          <a:xfrm>
-            <a:off x="609600" y="6425605"/>
-            <a:ext cx="1659507" cy="139700"/>
-          </a:xfrm>
-          <a:prstGeom prst="rect">
-            <a:avLst/>
-          </a:prstGeom>
-          <a:noFill/>
-          <a:ln/>
-        </p:spPr>
-        <p:txBody>
-          <a:bodyPr wrap="none" lIns="0" tIns="0" rIns="0" bIns="0" rtlCol="0" anchor="ctr"/>
-          <a:lstStyle/>
-          <a:p>
-            <a:pPr algn="l" indent="0" marL="0">
-              <a:buNone/>
-            </a:pPr>
-            <a:r>
-              <a:rPr lang="ko-KR" altLang="en-US" sz="900" spc="-9" kern="0" dirty="0">
-                <a:solidFill>
-                  <a:srgbClr val="8691A5"/>
-                </a:solidFill>
-                <a:latin typeface="Paperlogy 5 Medium" pitchFamily="34" charset="0"/>
-                <a:ea typeface="Paperlogy 5 Medium" pitchFamily="34" charset="-127"/>
-                <a:cs typeface="Paperlogy 5 Medium" pitchFamily="34" charset="-120"/>
-              </a:rPr>
               <a:t>2026년 하반기 신입사원 공개채용</a:t>
             </a:r>
             <a:endParaRPr lang="en-US" sz="900" dirty="0"/>
@@ -3752,7 +5106,7 @@
       </p:sp>
       <p:sp>
         <p:nvSpPr>
-          <p:cNvPr id="89" name="01 / 03"/>
+          <p:cNvPr id="135" name="01 / 03"/>
           <p:cNvSpPr txBox="1"/>
           <p:nvPr/>
         </p:nvSpPr>

--- a/hec-pt/pptx/landscape.pptx
+++ b/hec-pt/pptx/landscape.pptx
@@ -1186,11 +1186,11 @@
         <p:spPr>
           <a:xfrm>
             <a:off x="615950" y="1820664"/>
-            <a:ext cx="10960100" cy="1294011"/>
+            <a:ext cx="10960100" cy="1727200"/>
           </a:xfrm>
           <a:prstGeom prst="roundRect">
             <a:avLst>
-              <a:gd name="adj" fmla="val 10305"/>
+              <a:gd name="adj" fmla="val 7721"/>
             </a:avLst>
           </a:prstGeom>
           <a:solidFill>
@@ -1212,7 +1212,7 @@
         </p:nvSpPr>
         <p:spPr>
           <a:xfrm>
-            <a:off x="1663898" y="1941314"/>
+            <a:off x="1663898" y="2126159"/>
             <a:ext cx="1115020" cy="215900"/>
           </a:xfrm>
           <a:prstGeom prst="roundRect">
@@ -1234,7 +1234,7 @@
         </p:nvSpPr>
         <p:spPr>
           <a:xfrm>
-            <a:off x="2842419" y="1941314"/>
+            <a:off x="2842419" y="2126159"/>
             <a:ext cx="1131689" cy="215900"/>
           </a:xfrm>
           <a:prstGeom prst="roundRect">
@@ -1256,7 +1256,7 @@
         </p:nvSpPr>
         <p:spPr>
           <a:xfrm>
-            <a:off x="2931319" y="2023864"/>
+            <a:off x="2931319" y="2208709"/>
             <a:ext cx="50800" cy="50800"/>
           </a:xfrm>
           <a:prstGeom prst="ellipse">
@@ -1276,7 +1276,7 @@
         </p:nvSpPr>
         <p:spPr>
           <a:xfrm>
-            <a:off x="3007519" y="2023864"/>
+            <a:off x="3007519" y="2208709"/>
             <a:ext cx="50800" cy="50800"/>
           </a:xfrm>
           <a:prstGeom prst="ellipse">
@@ -1296,7 +1296,7 @@
         </p:nvSpPr>
         <p:spPr>
           <a:xfrm>
-            <a:off x="3083719" y="2023864"/>
+            <a:off x="3083719" y="2208709"/>
             <a:ext cx="50800" cy="50800"/>
           </a:xfrm>
           <a:prstGeom prst="ellipse">
@@ -1316,7 +1316,7 @@
         </p:nvSpPr>
         <p:spPr>
           <a:xfrm>
-            <a:off x="3159919" y="2023864"/>
+            <a:off x="3159919" y="2208709"/>
             <a:ext cx="50800" cy="50800"/>
           </a:xfrm>
           <a:prstGeom prst="ellipse">
@@ -1336,8 +1336,8 @@
         </p:nvSpPr>
         <p:spPr>
           <a:xfrm>
-            <a:off x="5930900" y="1941314"/>
-            <a:ext cx="12700" cy="1040011"/>
+            <a:off x="6083300" y="1890514"/>
+            <a:ext cx="12700" cy="1587500"/>
           </a:xfrm>
           <a:prstGeom prst="rect">
             <a:avLst/>
@@ -1350,7 +1350,7 @@
       </p:sp>
       <p:pic>
         <p:nvPicPr>
-          <p:cNvPr id="16" name="p1-flow-line" descr="p1-flow-line">    </p:cNvPr>
+          <p:cNvPr id="16" name="p1-hero-art" descr="p1-hero-art">    </p:cNvPr>
           <p:cNvPicPr>
             <a:picLocks noChangeAspect="1"/>
           </p:cNvPicPr>
@@ -1364,17 +1364,39 @@
         </p:blipFill>
         <p:spPr>
           <a:xfrm>
-            <a:off x="6781800" y="2053497"/>
-            <a:ext cx="3810000" cy="135467"/>
+            <a:off x="8498417" y="1918031"/>
+            <a:ext cx="2480733" cy="1282700"/>
           </a:xfrm>
           <a:prstGeom prst="rect">
             <a:avLst/>
           </a:prstGeom>
         </p:spPr>
       </p:pic>
+      <p:sp>
+        <p:nvSpPr>
+          <p:cNvPr id="17" name="p1-video"/>
+          <p:cNvSpPr/>
+          <p:nvPr/>
+        </p:nvSpPr>
+        <p:spPr>
+          <a:xfrm>
+            <a:off x="6273800" y="1890514"/>
+            <a:ext cx="2146300" cy="1206500"/>
+          </a:xfrm>
+          <a:prstGeom prst="roundRect">
+            <a:avLst>
+              <a:gd name="adj" fmla="val 8421"/>
+            </a:avLst>
+          </a:prstGeom>
+          <a:solidFill>
+            <a:srgbClr val="0B2147"/>
+          </a:solidFill>
+          <a:ln/>
+        </p:spPr>
+      </p:sp>
       <p:pic>
         <p:nvPicPr>
-          <p:cNvPr id="17" name="ring" descr="ring">    </p:cNvPr>
+          <p:cNvPr id="18" name="svg" descr="svg">    </p:cNvPr>
           <p:cNvPicPr>
             <a:picLocks noChangeAspect="1"/>
           </p:cNvPicPr>
@@ -1388,8 +1410,8 @@
         </p:blipFill>
         <p:spPr>
           <a:xfrm>
-            <a:off x="6603950" y="1943431"/>
-            <a:ext cx="357717" cy="355600"/>
+            <a:off x="6493933" y="2000581"/>
+            <a:ext cx="1712383" cy="626533"/>
           </a:xfrm>
           <a:prstGeom prst="rect">
             <a:avLst/>
@@ -1398,7 +1420,7 @@
       </p:pic>
       <p:pic>
         <p:nvPicPr>
-          <p:cNvPr id="18" name="svg" descr="svg">    </p:cNvPr>
+          <p:cNvPr id="19" name="p1-path-line" descr="p1-path-line">    </p:cNvPr>
           <p:cNvPicPr>
             <a:picLocks noChangeAspect="1"/>
           </p:cNvPicPr>
@@ -1412,17 +1434,119 @@
         </p:blipFill>
         <p:spPr>
           <a:xfrm>
-            <a:off x="6711900" y="2051381"/>
-            <a:ext cx="141817" cy="139700"/>
+            <a:off x="605367" y="3511881"/>
+            <a:ext cx="10936817" cy="289983"/>
           </a:xfrm>
           <a:prstGeom prst="rect">
             <a:avLst/>
           </a:prstGeom>
         </p:spPr>
       </p:pic>
+      <p:sp>
+        <p:nvSpPr>
+          <p:cNvPr id="20" name="eyebrow p1-eb"/>
+          <p:cNvSpPr/>
+          <p:nvPr/>
+        </p:nvSpPr>
+        <p:spPr>
+          <a:xfrm>
+            <a:off x="762000" y="3665339"/>
+            <a:ext cx="1168896" cy="120650"/>
+          </a:xfrm>
+          <a:prstGeom prst="rect">
+            <a:avLst/>
+          </a:prstGeom>
+          <a:solidFill>
+            <a:srgbClr val="FFFFFF"/>
+          </a:solidFill>
+          <a:ln/>
+        </p:spPr>
+      </p:sp>
+      <p:sp>
+        <p:nvSpPr>
+          <p:cNvPr id="21" name="eyebrow p1-eb"/>
+          <p:cNvSpPr/>
+          <p:nvPr/>
+        </p:nvSpPr>
+        <p:spPr>
+          <a:xfrm>
+            <a:off x="2667000" y="3665339"/>
+            <a:ext cx="865287" cy="120650"/>
+          </a:xfrm>
+          <a:prstGeom prst="rect">
+            <a:avLst/>
+          </a:prstGeom>
+          <a:solidFill>
+            <a:srgbClr val="FFFFFF"/>
+          </a:solidFill>
+          <a:ln/>
+        </p:spPr>
+      </p:sp>
+      <p:sp>
+        <p:nvSpPr>
+          <p:cNvPr id="22" name="eyebrow p1-eb"/>
+          <p:cNvSpPr/>
+          <p:nvPr/>
+        </p:nvSpPr>
+        <p:spPr>
+          <a:xfrm>
+            <a:off x="4826000" y="3665339"/>
+            <a:ext cx="1201638" cy="120650"/>
+          </a:xfrm>
+          <a:prstGeom prst="rect">
+            <a:avLst/>
+          </a:prstGeom>
+          <a:solidFill>
+            <a:srgbClr val="FFFFFF"/>
+          </a:solidFill>
+          <a:ln/>
+        </p:spPr>
+      </p:sp>
+      <p:sp>
+        <p:nvSpPr>
+          <p:cNvPr id="23" name="eyebrow p1-eb"/>
+          <p:cNvSpPr/>
+          <p:nvPr/>
+        </p:nvSpPr>
+        <p:spPr>
+          <a:xfrm>
+            <a:off x="10464800" y="3665339"/>
+            <a:ext cx="969268" cy="120650"/>
+          </a:xfrm>
+          <a:prstGeom prst="rect">
+            <a:avLst/>
+          </a:prstGeom>
+          <a:solidFill>
+            <a:srgbClr val="FFFFFF"/>
+          </a:solidFill>
+          <a:ln/>
+        </p:spPr>
+      </p:sp>
+      <p:sp>
+        <p:nvSpPr>
+          <p:cNvPr id="24" name="p1-panel"/>
+          <p:cNvSpPr/>
+          <p:nvPr/>
+        </p:nvSpPr>
+        <p:spPr>
+          <a:xfrm>
+            <a:off x="609600" y="4115495"/>
+            <a:ext cx="1752600" cy="1712020"/>
+          </a:xfrm>
+          <a:prstGeom prst="roundRect">
+            <a:avLst>
+              <a:gd name="adj" fmla="val 8160"/>
+            </a:avLst>
+          </a:prstGeom>
+          <a:solidFill>
+            <a:srgbClr val="EEF4FC"/>
+          </a:solidFill>
+          <a:ln/>
+        </p:spPr>
+      </p:sp>
       <p:pic>
         <p:nvPicPr>
-          <p:cNvPr id="19" name="ring" descr="ring">    </p:cNvPr>
+          <p:cNvPr id="25" name="svg" descr="svg">    </p:cNvPr>
           <p:cNvPicPr>
             <a:picLocks noChangeAspect="1"/>
           </p:cNvPicPr>
@@ -1436,17 +1560,61 @@
         </p:blipFill>
         <p:spPr>
           <a:xfrm>
-            <a:off x="8443383" y="1943431"/>
-            <a:ext cx="357717" cy="355600"/>
+            <a:off x="795867" y="4401245"/>
+            <a:ext cx="1380067" cy="533400"/>
           </a:xfrm>
           <a:prstGeom prst="rect">
             <a:avLst/>
           </a:prstGeom>
         </p:spPr>
       </p:pic>
+      <p:sp>
+        <p:nvSpPr>
+          <p:cNvPr id="26" name="p1-lbl p1-pill"/>
+          <p:cNvSpPr/>
+          <p:nvPr/>
+        </p:nvSpPr>
+        <p:spPr>
+          <a:xfrm>
+            <a:off x="834926" y="5001320"/>
+            <a:ext cx="463748" cy="209550"/>
+          </a:xfrm>
+          <a:prstGeom prst="roundRect">
+            <a:avLst>
+              <a:gd name="adj" fmla="val 50000"/>
+            </a:avLst>
+          </a:prstGeom>
+          <a:solidFill>
+            <a:srgbClr val="FFFFFF"/>
+          </a:solidFill>
+          <a:ln/>
+        </p:spPr>
+      </p:sp>
+      <p:sp>
+        <p:nvSpPr>
+          <p:cNvPr id="27" name="p1-lbl p1-pill"/>
+          <p:cNvSpPr/>
+          <p:nvPr/>
+        </p:nvSpPr>
+        <p:spPr>
+          <a:xfrm>
+            <a:off x="1468438" y="5001320"/>
+            <a:ext cx="695325" cy="209550"/>
+          </a:xfrm>
+          <a:prstGeom prst="roundRect">
+            <a:avLst>
+              <a:gd name="adj" fmla="val 50000"/>
+            </a:avLst>
+          </a:prstGeom>
+          <a:solidFill>
+            <a:srgbClr val="FFFFFF"/>
+          </a:solidFill>
+          <a:ln/>
+        </p:spPr>
+      </p:sp>
       <p:pic>
         <p:nvPicPr>
-          <p:cNvPr id="20" name="svg" descr="svg">    </p:cNvPr>
+          <p:cNvPr id="28" name="svg" descr="svg">    </p:cNvPr>
           <p:cNvPicPr>
             <a:picLocks noChangeAspect="1"/>
           </p:cNvPicPr>
@@ -1460,17 +1628,39 @@
         </p:blipFill>
         <p:spPr>
           <a:xfrm>
-            <a:off x="8551333" y="2051381"/>
-            <a:ext cx="141817" cy="139700"/>
+            <a:off x="717550" y="5385594"/>
+            <a:ext cx="114300" cy="114300"/>
           </a:xfrm>
           <a:prstGeom prst="rect">
             <a:avLst/>
           </a:prstGeom>
         </p:spPr>
       </p:pic>
+      <p:sp>
+        <p:nvSpPr>
+          <p:cNvPr id="29" name="p1-panel"/>
+          <p:cNvSpPr/>
+          <p:nvPr/>
+        </p:nvSpPr>
+        <p:spPr>
+          <a:xfrm>
+            <a:off x="2514600" y="4115495"/>
+            <a:ext cx="2006600" cy="1712020"/>
+          </a:xfrm>
+          <a:prstGeom prst="roundRect">
+            <a:avLst>
+              <a:gd name="adj" fmla="val 8160"/>
+            </a:avLst>
+          </a:prstGeom>
+          <a:solidFill>
+            <a:srgbClr val="EEF4FC"/>
+          </a:solidFill>
+          <a:ln/>
+        </p:spPr>
+      </p:sp>
       <p:pic>
         <p:nvPicPr>
-          <p:cNvPr id="21" name="ring solid" descr="ring solid">    </p:cNvPr>
+          <p:cNvPr id="30" name="svg" descr="svg">    </p:cNvPr>
           <p:cNvPicPr>
             <a:picLocks noChangeAspect="1"/>
           </p:cNvPicPr>
@@ -1484,17 +1674,110 @@
         </p:blipFill>
         <p:spPr>
           <a:xfrm>
-            <a:off x="10413950" y="1943431"/>
-            <a:ext cx="357717" cy="355600"/>
+            <a:off x="3458633" y="4497321"/>
+            <a:ext cx="908050" cy="668867"/>
           </a:xfrm>
           <a:prstGeom prst="rect">
             <a:avLst/>
           </a:prstGeom>
         </p:spPr>
       </p:pic>
+      <p:sp>
+        <p:nvSpPr>
+          <p:cNvPr id="31" name="p1-lbl p1-pill p1-in"/>
+          <p:cNvSpPr/>
+          <p:nvPr/>
+        </p:nvSpPr>
+        <p:spPr>
+          <a:xfrm>
+            <a:off x="2667000" y="4409480"/>
+            <a:ext cx="787400" cy="209550"/>
+          </a:xfrm>
+          <a:prstGeom prst="roundRect">
+            <a:avLst>
+              <a:gd name="adj" fmla="val 50000"/>
+            </a:avLst>
+          </a:prstGeom>
+          <a:solidFill>
+            <a:srgbClr val="FFFFFF"/>
+          </a:solidFill>
+          <a:ln/>
+        </p:spPr>
+      </p:sp>
+      <p:sp>
+        <p:nvSpPr>
+          <p:cNvPr id="32" name="p1-lbl p1-pill p1-in"/>
+          <p:cNvSpPr/>
+          <p:nvPr/>
+        </p:nvSpPr>
+        <p:spPr>
+          <a:xfrm>
+            <a:off x="2667000" y="4726980"/>
+            <a:ext cx="787400" cy="209550"/>
+          </a:xfrm>
+          <a:prstGeom prst="roundRect">
+            <a:avLst>
+              <a:gd name="adj" fmla="val 50000"/>
+            </a:avLst>
+          </a:prstGeom>
+          <a:solidFill>
+            <a:srgbClr val="FFFFFF"/>
+          </a:solidFill>
+          <a:ln/>
+        </p:spPr>
+      </p:sp>
+      <p:sp>
+        <p:nvSpPr>
+          <p:cNvPr id="33" name="p1-lbl p1-pill p1-in"/>
+          <p:cNvSpPr/>
+          <p:nvPr/>
+        </p:nvSpPr>
+        <p:spPr>
+          <a:xfrm>
+            <a:off x="2667000" y="5044480"/>
+            <a:ext cx="787400" cy="209550"/>
+          </a:xfrm>
+          <a:prstGeom prst="roundRect">
+            <a:avLst>
+              <a:gd name="adj" fmla="val 50000"/>
+            </a:avLst>
+          </a:prstGeom>
+          <a:solidFill>
+            <a:srgbClr val="FFFFFF"/>
+          </a:solidFill>
+          <a:ln/>
+        </p:spPr>
+      </p:sp>
+      <p:sp>
+        <p:nvSpPr>
+          <p:cNvPr id="34" name="p1-agree"/>
+          <p:cNvSpPr/>
+          <p:nvPr/>
+        </p:nvSpPr>
+        <p:spPr>
+          <a:xfrm>
+            <a:off x="2622550" y="5465564"/>
+            <a:ext cx="1790700" cy="266700"/>
+          </a:xfrm>
+          <a:prstGeom prst="roundRect">
+            <a:avLst>
+              <a:gd name="adj" fmla="val 50000"/>
+            </a:avLst>
+          </a:prstGeom>
+          <a:solidFill>
+            <a:srgbClr val="FFFFFF"/>
+          </a:solidFill>
+          <a:ln w="12700">
+            <a:solidFill>
+              <a:srgbClr val="004B8D"/>
+            </a:solidFill>
+            <a:prstDash val="solid"/>
+          </a:ln>
+        </p:spPr>
+      </p:sp>
       <p:pic>
         <p:nvPicPr>
-          <p:cNvPr id="22" name="svg" descr="svg">    </p:cNvPr>
+          <p:cNvPr id="35" name="svg" descr="svg">    </p:cNvPr>
           <p:cNvPicPr>
             <a:picLocks noChangeAspect="1"/>
           </p:cNvPicPr>
@@ -1508,8 +1791,8 @@
         </p:blipFill>
         <p:spPr>
           <a:xfrm>
-            <a:off x="10528250" y="2057731"/>
-            <a:ext cx="129117" cy="127000"/>
+            <a:off x="3174702" y="5543881"/>
+            <a:ext cx="114300" cy="114300"/>
           </a:xfrm>
           <a:prstGeom prst="rect">
             <a:avLst/>
@@ -1518,29 +1801,101 @@
       </p:pic>
       <p:sp>
         <p:nvSpPr>
-          <p:cNvPr id="23" name="p1-out"/>
-          <p:cNvSpPr/>
-          <p:nvPr/>
-        </p:nvSpPr>
-        <p:spPr>
-          <a:xfrm>
-            <a:off x="6146800" y="2701925"/>
-            <a:ext cx="4600773" cy="279400"/>
+          <p:cNvPr id="36" name="p1-panel p1-team"/>
+          <p:cNvSpPr/>
+          <p:nvPr/>
+        </p:nvSpPr>
+        <p:spPr>
+          <a:xfrm>
+            <a:off x="4673600" y="4115495"/>
+            <a:ext cx="5486400" cy="1712020"/>
           </a:xfrm>
           <a:prstGeom prst="roundRect">
             <a:avLst>
-              <a:gd name="adj" fmla="val 50000"/>
+              <a:gd name="adj" fmla="val 8160"/>
             </a:avLst>
           </a:prstGeom>
           <a:solidFill>
-            <a:srgbClr val="FFF4DB"/>
+            <a:srgbClr val="EEF4FC"/>
+          </a:solidFill>
+          <a:ln/>
+        </p:spPr>
+      </p:sp>
+      <p:sp>
+        <p:nvSpPr>
+          <p:cNvPr id="37" name="p1-role me"/>
+          <p:cNvSpPr/>
+          <p:nvPr/>
+        </p:nvSpPr>
+        <p:spPr>
+          <a:xfrm>
+            <a:off x="4781550" y="4175522"/>
+            <a:ext cx="2584450" cy="695920"/>
+          </a:xfrm>
+          <a:prstGeom prst="roundRect">
+            <a:avLst>
+              <a:gd name="adj" fmla="val 13687"/>
+            </a:avLst>
+          </a:prstGeom>
+          <a:solidFill>
+            <a:srgbClr val="FFFFFF"/>
+          </a:solidFill>
+          <a:ln w="12700">
+            <a:solidFill>
+              <a:srgbClr val="004B8D"/>
+            </a:solidFill>
+            <a:prstDash val="solid"/>
+          </a:ln>
+        </p:spPr>
+      </p:sp>
+      <p:sp>
+        <p:nvSpPr>
+          <p:cNvPr id="38" name="p1-av"/>
+          <p:cNvSpPr/>
+          <p:nvPr/>
+        </p:nvSpPr>
+        <p:spPr>
+          <a:xfrm>
+            <a:off x="4892675" y="4261247"/>
+            <a:ext cx="107950" cy="107950"/>
+          </a:xfrm>
+          <a:prstGeom prst="ellipse">
+            <a:avLst/>
+          </a:prstGeom>
+          <a:solidFill>
+            <a:srgbClr val="00A94F"/>
+          </a:solidFill>
+          <a:ln w="31750">
+            <a:solidFill>
+              <a:srgbClr val="E5F6EC"/>
+            </a:solidFill>
+            <a:prstDash val="solid"/>
+          </a:ln>
+        </p:spPr>
+      </p:sp>
+      <p:sp>
+        <p:nvSpPr>
+          <p:cNvPr id="39" name="p1-me"/>
+          <p:cNvSpPr/>
+          <p:nvPr/>
+        </p:nvSpPr>
+        <p:spPr>
+          <a:xfrm>
+            <a:off x="5383808" y="4219972"/>
+            <a:ext cx="190500" cy="190500"/>
+          </a:xfrm>
+          <a:prstGeom prst="ellipse">
+            <a:avLst/>
+          </a:prstGeom>
+          <a:solidFill>
+            <a:srgbClr val="0B2147"/>
           </a:solidFill>
           <a:ln/>
         </p:spPr>
       </p:sp>
       <p:pic>
         <p:nvPicPr>
-          <p:cNvPr id="24" name="svg" descr="svg">    </p:cNvPr>
+          <p:cNvPr id="40" name="li" descr="li">    </p:cNvPr>
           <p:cNvPicPr>
             <a:picLocks noChangeAspect="1"/>
           </p:cNvPicPr>
@@ -1554,39 +1909,17 @@
         </p:blipFill>
         <p:spPr>
           <a:xfrm>
-            <a:off x="6237817" y="2776008"/>
-            <a:ext cx="135467" cy="135467"/>
+            <a:off x="4883150" y="4526889"/>
+            <a:ext cx="38100" cy="38100"/>
           </a:xfrm>
           <a:prstGeom prst="rect">
             <a:avLst/>
           </a:prstGeom>
         </p:spPr>
       </p:pic>
-      <p:sp>
-        <p:nvSpPr>
-          <p:cNvPr id="25" name="i"/>
-          <p:cNvSpPr/>
-          <p:nvPr/>
-        </p:nvSpPr>
-        <p:spPr>
-          <a:xfrm>
-            <a:off x="6888262" y="2784475"/>
-            <a:ext cx="12700" cy="114300"/>
-          </a:xfrm>
-          <a:prstGeom prst="rect">
-            <a:avLst/>
-          </a:prstGeom>
-          <a:solidFill>
-            <a:srgbClr val="8A5A00">
-              <a:alpha val="30000"/>
-            </a:srgbClr>
-          </a:solidFill>
-          <a:ln/>
-        </p:spPr>
-      </p:sp>
       <p:pic>
         <p:nvPicPr>
-          <p:cNvPr id="26" name="p1-path-line" descr="p1-path-line">    </p:cNvPr>
+          <p:cNvPr id="41" name="li" descr="li">    </p:cNvPr>
           <p:cNvPicPr>
             <a:picLocks noChangeAspect="1"/>
           </p:cNvPicPr>
@@ -1600,8 +1933,8 @@
         </p:blipFill>
         <p:spPr>
           <a:xfrm>
-            <a:off x="605367" y="3078692"/>
-            <a:ext cx="10936817" cy="340783"/>
+            <a:off x="4883150" y="4724565"/>
+            <a:ext cx="38100" cy="38100"/>
           </a:xfrm>
           <a:prstGeom prst="rect">
             <a:avLst/>
@@ -1610,109 +1943,81 @@
       </p:pic>
       <p:sp>
         <p:nvSpPr>
-          <p:cNvPr id="27" name="eyebrow p1-eb"/>
-          <p:cNvSpPr/>
-          <p:nvPr/>
-        </p:nvSpPr>
-        <p:spPr>
-          <a:xfrm>
-            <a:off x="762000" y="3282950"/>
-            <a:ext cx="1168896" cy="120650"/>
-          </a:xfrm>
-          <a:prstGeom prst="rect">
-            <a:avLst/>
-          </a:prstGeom>
-          <a:solidFill>
-            <a:srgbClr val="FFFFFF"/>
-          </a:solidFill>
-          <a:ln/>
-        </p:spPr>
-      </p:sp>
-      <p:sp>
-        <p:nvSpPr>
-          <p:cNvPr id="28" name="eyebrow p1-eb"/>
-          <p:cNvSpPr/>
-          <p:nvPr/>
-        </p:nvSpPr>
-        <p:spPr>
-          <a:xfrm>
-            <a:off x="2540000" y="3282950"/>
-            <a:ext cx="865287" cy="120650"/>
-          </a:xfrm>
-          <a:prstGeom prst="rect">
-            <a:avLst/>
-          </a:prstGeom>
-          <a:solidFill>
-            <a:srgbClr val="FFFFFF"/>
-          </a:solidFill>
-          <a:ln/>
-        </p:spPr>
-      </p:sp>
-      <p:sp>
-        <p:nvSpPr>
-          <p:cNvPr id="29" name="eyebrow p1-eb"/>
-          <p:cNvSpPr/>
-          <p:nvPr/>
-        </p:nvSpPr>
-        <p:spPr>
-          <a:xfrm>
-            <a:off x="4597400" y="3282950"/>
-            <a:ext cx="1201638" cy="120650"/>
-          </a:xfrm>
-          <a:prstGeom prst="rect">
-            <a:avLst/>
-          </a:prstGeom>
-          <a:solidFill>
-            <a:srgbClr val="FFFFFF"/>
-          </a:solidFill>
-          <a:ln/>
-        </p:spPr>
-      </p:sp>
-      <p:sp>
-        <p:nvSpPr>
-          <p:cNvPr id="30" name="eyebrow p1-eb"/>
-          <p:cNvSpPr/>
-          <p:nvPr/>
-        </p:nvSpPr>
-        <p:spPr>
-          <a:xfrm>
-            <a:off x="9829800" y="3282950"/>
-            <a:ext cx="969268" cy="120650"/>
-          </a:xfrm>
-          <a:prstGeom prst="rect">
-            <a:avLst/>
-          </a:prstGeom>
-          <a:solidFill>
-            <a:srgbClr val="FFFFFF"/>
-          </a:solidFill>
-          <a:ln/>
-        </p:spPr>
-      </p:sp>
-      <p:sp>
-        <p:nvSpPr>
-          <p:cNvPr id="31" name="p1-panel"/>
-          <p:cNvSpPr/>
-          <p:nvPr/>
-        </p:nvSpPr>
-        <p:spPr>
-          <a:xfrm>
-            <a:off x="609600" y="3796605"/>
-            <a:ext cx="1625600" cy="1903909"/>
+          <p:cNvPr id="42" name="chip tech p1-tool"/>
+          <p:cNvSpPr/>
+          <p:nvPr/>
+        </p:nvSpPr>
+        <p:spPr>
+          <a:xfrm>
+            <a:off x="4965700" y="4640263"/>
+            <a:ext cx="602655" cy="177800"/>
           </a:xfrm>
           <a:prstGeom prst="roundRect">
             <a:avLst>
-              <a:gd name="adj" fmla="val 8594"/>
+              <a:gd name="adj" fmla="val 50000"/>
             </a:avLst>
           </a:prstGeom>
           <a:solidFill>
             <a:srgbClr val="EEF4FC"/>
           </a:solidFill>
           <a:ln/>
+        </p:spPr>
+      </p:sp>
+      <p:sp>
+        <p:nvSpPr>
+          <p:cNvPr id="43" name="p1-role"/>
+          <p:cNvSpPr/>
+          <p:nvPr/>
+        </p:nvSpPr>
+        <p:spPr>
+          <a:xfrm>
+            <a:off x="7467600" y="4175522"/>
+            <a:ext cx="2584450" cy="695920"/>
+          </a:xfrm>
+          <a:prstGeom prst="roundRect">
+            <a:avLst>
+              <a:gd name="adj" fmla="val 13687"/>
+            </a:avLst>
+          </a:prstGeom>
+          <a:solidFill>
+            <a:srgbClr val="FFFFFF"/>
+          </a:solidFill>
+          <a:ln w="12700">
+            <a:solidFill>
+              <a:srgbClr val="FFFFFF"/>
+            </a:solidFill>
+            <a:prstDash val="solid"/>
+          </a:ln>
+        </p:spPr>
+      </p:sp>
+      <p:sp>
+        <p:nvSpPr>
+          <p:cNvPr id="44" name="p1-av"/>
+          <p:cNvSpPr/>
+          <p:nvPr/>
+        </p:nvSpPr>
+        <p:spPr>
+          <a:xfrm>
+            <a:off x="7578725" y="4253309"/>
+            <a:ext cx="107950" cy="107950"/>
+          </a:xfrm>
+          <a:prstGeom prst="ellipse">
+            <a:avLst/>
+          </a:prstGeom>
+          <a:solidFill>
+            <a:srgbClr val="00A94F"/>
+          </a:solidFill>
+          <a:ln w="31750">
+            <a:solidFill>
+              <a:srgbClr val="E5F6EC"/>
+            </a:solidFill>
+            <a:prstDash val="solid"/>
+          </a:ln>
         </p:spPr>
       </p:sp>
       <p:pic>
         <p:nvPicPr>
-          <p:cNvPr id="32" name="svg" descr="svg">    </p:cNvPr>
+          <p:cNvPr id="45" name="li" descr="li">    </p:cNvPr>
           <p:cNvPicPr>
             <a:picLocks noChangeAspect="1"/>
           </p:cNvPicPr>
@@ -1726,61 +2031,17 @@
         </p:blipFill>
         <p:spPr>
           <a:xfrm>
-            <a:off x="732367" y="4178300"/>
-            <a:ext cx="1380067" cy="533400"/>
+            <a:off x="7569200" y="4515247"/>
+            <a:ext cx="38100" cy="38100"/>
           </a:xfrm>
           <a:prstGeom prst="rect">
             <a:avLst/>
           </a:prstGeom>
         </p:spPr>
       </p:pic>
-      <p:sp>
-        <p:nvSpPr>
-          <p:cNvPr id="33" name="p1-lbl p1-pill"/>
-          <p:cNvSpPr/>
-          <p:nvPr/>
-        </p:nvSpPr>
-        <p:spPr>
-          <a:xfrm>
-            <a:off x="771426" y="4778375"/>
-            <a:ext cx="463748" cy="209550"/>
-          </a:xfrm>
-          <a:prstGeom prst="roundRect">
-            <a:avLst>
-              <a:gd name="adj" fmla="val 50000"/>
-            </a:avLst>
-          </a:prstGeom>
-          <a:solidFill>
-            <a:srgbClr val="FFFFFF"/>
-          </a:solidFill>
-          <a:ln/>
-        </p:spPr>
-      </p:sp>
-      <p:sp>
-        <p:nvSpPr>
-          <p:cNvPr id="34" name="p1-lbl p1-pill"/>
-          <p:cNvSpPr/>
-          <p:nvPr/>
-        </p:nvSpPr>
-        <p:spPr>
-          <a:xfrm>
-            <a:off x="1404938" y="4778375"/>
-            <a:ext cx="695325" cy="209550"/>
-          </a:xfrm>
-          <a:prstGeom prst="roundRect">
-            <a:avLst>
-              <a:gd name="adj" fmla="val 50000"/>
-            </a:avLst>
-          </a:prstGeom>
-          <a:solidFill>
-            <a:srgbClr val="FFFFFF"/>
-          </a:solidFill>
-          <a:ln/>
-        </p:spPr>
-      </p:sp>
       <p:pic>
         <p:nvPicPr>
-          <p:cNvPr id="35" name="svg" descr="svg">    </p:cNvPr>
+          <p:cNvPr id="46" name="li" descr="li">    </p:cNvPr>
           <p:cNvPicPr>
             <a:picLocks noChangeAspect="1"/>
           </p:cNvPicPr>
@@ -1794,39 +2055,17 @@
         </p:blipFill>
         <p:spPr>
           <a:xfrm>
-            <a:off x="717550" y="5245894"/>
-            <a:ext cx="114300" cy="114300"/>
+            <a:off x="7569200" y="4704457"/>
+            <a:ext cx="38100" cy="38100"/>
           </a:xfrm>
           <a:prstGeom prst="rect">
             <a:avLst/>
           </a:prstGeom>
         </p:spPr>
       </p:pic>
-      <p:sp>
-        <p:nvSpPr>
-          <p:cNvPr id="36" name="p1-panel"/>
-          <p:cNvSpPr/>
-          <p:nvPr/>
-        </p:nvSpPr>
-        <p:spPr>
-          <a:xfrm>
-            <a:off x="2387600" y="3796605"/>
-            <a:ext cx="1905000" cy="1903909"/>
-          </a:xfrm>
-          <a:prstGeom prst="roundRect">
-            <a:avLst>
-              <a:gd name="adj" fmla="val 7338"/>
-            </a:avLst>
-          </a:prstGeom>
-          <a:solidFill>
-            <a:srgbClr val="EEF4FC"/>
-          </a:solidFill>
-          <a:ln/>
-        </p:spPr>
-      </p:sp>
       <p:pic>
         <p:nvPicPr>
-          <p:cNvPr id="37" name="svg" descr="svg">    </p:cNvPr>
+          <p:cNvPr id="47" name="svg" descr="svg">    </p:cNvPr>
           <p:cNvPicPr>
             <a:picLocks noChangeAspect="1"/>
           </p:cNvPicPr>
@@ -1840,8 +2079,8 @@
         </p:blipFill>
         <p:spPr>
           <a:xfrm>
-            <a:off x="3280833" y="4276493"/>
-            <a:ext cx="908050" cy="668867"/>
+            <a:off x="6019800" y="4877792"/>
+            <a:ext cx="2794000" cy="203200"/>
           </a:xfrm>
           <a:prstGeom prst="rect">
             <a:avLst/>
@@ -1850,14 +2089,14 @@
       </p:pic>
       <p:sp>
         <p:nvSpPr>
-          <p:cNvPr id="38" name="p1-lbl p1-pill p1-in"/>
-          <p:cNvSpPr/>
-          <p:nvPr/>
-        </p:nvSpPr>
-        <p:spPr>
-          <a:xfrm>
-            <a:off x="2489200" y="4186535"/>
-            <a:ext cx="787400" cy="209550"/>
+          <p:cNvPr id="48" name="chip people p1-share"/>
+          <p:cNvSpPr/>
+          <p:nvPr/>
+        </p:nvSpPr>
+        <p:spPr>
+          <a:xfrm>
+            <a:off x="6459041" y="4877792"/>
+            <a:ext cx="1915517" cy="203200"/>
           </a:xfrm>
           <a:prstGeom prst="roundRect">
             <a:avLst>
@@ -1865,85 +2104,14 @@
             </a:avLst>
           </a:prstGeom>
           <a:solidFill>
-            <a:srgbClr val="FFFFFF"/>
-          </a:solidFill>
-          <a:ln/>
-        </p:spPr>
-      </p:sp>
-      <p:sp>
-        <p:nvSpPr>
-          <p:cNvPr id="39" name="p1-lbl p1-pill p1-in"/>
-          <p:cNvSpPr/>
-          <p:nvPr/>
-        </p:nvSpPr>
-        <p:spPr>
-          <a:xfrm>
-            <a:off x="2489200" y="4504035"/>
-            <a:ext cx="787400" cy="209550"/>
-          </a:xfrm>
-          <a:prstGeom prst="roundRect">
-            <a:avLst>
-              <a:gd name="adj" fmla="val 50000"/>
-            </a:avLst>
-          </a:prstGeom>
-          <a:solidFill>
-            <a:srgbClr val="FFFFFF"/>
-          </a:solidFill>
-          <a:ln/>
-        </p:spPr>
-      </p:sp>
-      <p:sp>
-        <p:nvSpPr>
-          <p:cNvPr id="40" name="p1-lbl p1-pill p1-in"/>
-          <p:cNvSpPr/>
-          <p:nvPr/>
-        </p:nvSpPr>
-        <p:spPr>
-          <a:xfrm>
-            <a:off x="2489200" y="4821535"/>
-            <a:ext cx="787400" cy="209550"/>
-          </a:xfrm>
-          <a:prstGeom prst="roundRect">
-            <a:avLst>
-              <a:gd name="adj" fmla="val 50000"/>
-            </a:avLst>
-          </a:prstGeom>
-          <a:solidFill>
-            <a:srgbClr val="FFFFFF"/>
-          </a:solidFill>
-          <a:ln/>
-        </p:spPr>
-      </p:sp>
-      <p:sp>
-        <p:nvSpPr>
-          <p:cNvPr id="41" name="p1-agree"/>
-          <p:cNvSpPr/>
-          <p:nvPr/>
-        </p:nvSpPr>
-        <p:spPr>
-          <a:xfrm>
-            <a:off x="2495550" y="5325864"/>
-            <a:ext cx="1689100" cy="266700"/>
-          </a:xfrm>
-          <a:prstGeom prst="roundRect">
-            <a:avLst>
-              <a:gd name="adj" fmla="val 50000"/>
-            </a:avLst>
-          </a:prstGeom>
-          <a:solidFill>
-            <a:srgbClr val="FFFFFF"/>
-          </a:solidFill>
-          <a:ln w="12700">
-            <a:solidFill>
-              <a:srgbClr val="004B8D"/>
-            </a:solidFill>
-            <a:prstDash val="solid"/>
-          </a:ln>
+            <a:srgbClr val="E5F6EC"/>
+          </a:solidFill>
+          <a:ln/>
         </p:spPr>
       </p:sp>
       <p:pic>
         <p:nvPicPr>
-          <p:cNvPr id="42" name="svg" descr="svg">    </p:cNvPr>
+          <p:cNvPr id="49" name="svg" descr="svg">    </p:cNvPr>
           <p:cNvPicPr>
             <a:picLocks noChangeAspect="1"/>
           </p:cNvPicPr>
@@ -1957,8 +2125,8 @@
         </p:blipFill>
         <p:spPr>
           <a:xfrm>
-            <a:off x="2996902" y="5404181"/>
-            <a:ext cx="114300" cy="114300"/>
+            <a:off x="6552175" y="4926476"/>
+            <a:ext cx="91017" cy="105833"/>
           </a:xfrm>
           <a:prstGeom prst="rect">
             <a:avLst/>
@@ -1967,40 +2135,18 @@
       </p:pic>
       <p:sp>
         <p:nvSpPr>
-          <p:cNvPr id="43" name="p1-panel p1-team"/>
-          <p:cNvSpPr/>
-          <p:nvPr/>
-        </p:nvSpPr>
-        <p:spPr>
-          <a:xfrm>
-            <a:off x="4445000" y="3796605"/>
-            <a:ext cx="5080000" cy="1903909"/>
+          <p:cNvPr id="50" name="p1-role"/>
+          <p:cNvSpPr/>
+          <p:nvPr/>
+        </p:nvSpPr>
+        <p:spPr>
+          <a:xfrm>
+            <a:off x="4781550" y="5087342"/>
+            <a:ext cx="2584450" cy="680045"/>
           </a:xfrm>
           <a:prstGeom prst="roundRect">
             <a:avLst>
-              <a:gd name="adj" fmla="val 7338"/>
-            </a:avLst>
-          </a:prstGeom>
-          <a:solidFill>
-            <a:srgbClr val="EEF4FC"/>
-          </a:solidFill>
-          <a:ln/>
-        </p:spPr>
-      </p:sp>
-      <p:sp>
-        <p:nvSpPr>
-          <p:cNvPr id="44" name="p1-role me"/>
-          <p:cNvSpPr/>
-          <p:nvPr/>
-        </p:nvSpPr>
-        <p:spPr>
-          <a:xfrm>
-            <a:off x="4552950" y="3891855"/>
-            <a:ext cx="2381250" cy="731242"/>
-          </a:xfrm>
-          <a:prstGeom prst="roundRect">
-            <a:avLst>
-              <a:gd name="adj" fmla="val 13026"/>
+              <a:gd name="adj" fmla="val 14006"/>
             </a:avLst>
           </a:prstGeom>
           <a:solidFill>
@@ -2008,7 +2154,7 @@
           </a:solidFill>
           <a:ln w="12700">
             <a:solidFill>
-              <a:srgbClr val="004B8D"/>
+              <a:srgbClr val="FFFFFF"/>
             </a:solidFill>
             <a:prstDash val="solid"/>
           </a:ln>
@@ -2016,13 +2162,13 @@
       </p:sp>
       <p:sp>
         <p:nvSpPr>
-          <p:cNvPr id="45" name="p1-av"/>
-          <p:cNvSpPr/>
-          <p:nvPr/>
-        </p:nvSpPr>
-        <p:spPr>
-          <a:xfrm>
-            <a:off x="4664075" y="3990280"/>
+          <p:cNvPr id="51" name="p1-av"/>
+          <p:cNvSpPr/>
+          <p:nvPr/>
+        </p:nvSpPr>
+        <p:spPr>
+          <a:xfrm>
+            <a:off x="4892675" y="5165130"/>
             <a:ext cx="107950" cy="107950"/>
           </a:xfrm>
           <a:prstGeom prst="ellipse">
@@ -2039,29 +2185,9 @@
           </a:ln>
         </p:spPr>
       </p:sp>
-      <p:sp>
-        <p:nvSpPr>
-          <p:cNvPr id="46" name="p1-me"/>
-          <p:cNvSpPr/>
-          <p:nvPr/>
-        </p:nvSpPr>
-        <p:spPr>
-          <a:xfrm>
-            <a:off x="5155208" y="3949005"/>
-            <a:ext cx="190500" cy="190500"/>
-          </a:xfrm>
-          <a:prstGeom prst="ellipse">
-            <a:avLst/>
-          </a:prstGeom>
-          <a:solidFill>
-            <a:srgbClr val="0B2147"/>
-          </a:solidFill>
-          <a:ln/>
-        </p:spPr>
-      </p:sp>
       <p:pic>
         <p:nvPicPr>
-          <p:cNvPr id="47" name="li" descr="li">    </p:cNvPr>
+          <p:cNvPr id="52" name="li" descr="li">    </p:cNvPr>
           <p:cNvPicPr>
             <a:picLocks noChangeAspect="1"/>
           </p:cNvPicPr>
@@ -2075,7 +2201,7 @@
         </p:blipFill>
         <p:spPr>
           <a:xfrm>
-            <a:off x="4654550" y="4253805"/>
+            <a:off x="4883150" y="5422834"/>
             <a:ext cx="38100" cy="38100"/>
           </a:xfrm>
           <a:prstGeom prst="rect">
@@ -2083,9 +2209,31 @@
           </a:prstGeom>
         </p:spPr>
       </p:pic>
+      <p:sp>
+        <p:nvSpPr>
+          <p:cNvPr id="53" name="chip tech p1-tool"/>
+          <p:cNvSpPr/>
+          <p:nvPr/>
+        </p:nvSpPr>
+        <p:spPr>
+          <a:xfrm>
+            <a:off x="4965700" y="5340648"/>
+            <a:ext cx="400943" cy="177800"/>
+          </a:xfrm>
+          <a:prstGeom prst="roundRect">
+            <a:avLst>
+              <a:gd name="adj" fmla="val 50000"/>
+            </a:avLst>
+          </a:prstGeom>
+          <a:solidFill>
+            <a:srgbClr val="EEF4FC"/>
+          </a:solidFill>
+          <a:ln/>
+        </p:spPr>
+      </p:sp>
       <p:pic>
         <p:nvPicPr>
-          <p:cNvPr id="48" name="li" descr="li">    </p:cNvPr>
+          <p:cNvPr id="54" name="li" descr="li">    </p:cNvPr>
           <p:cNvPicPr>
             <a:picLocks noChangeAspect="1"/>
           </p:cNvPicPr>
@@ -2099,7 +2247,7 @@
         </p:blipFill>
         <p:spPr>
           <a:xfrm>
-            <a:off x="4654550" y="4451482"/>
+            <a:off x="4883150" y="5620511"/>
             <a:ext cx="38100" cy="38100"/>
           </a:xfrm>
           <a:prstGeom prst="rect">
@@ -2109,40 +2257,18 @@
       </p:pic>
       <p:sp>
         <p:nvSpPr>
-          <p:cNvPr id="49" name="chip tech p1-tool"/>
-          <p:cNvSpPr/>
-          <p:nvPr/>
-        </p:nvSpPr>
-        <p:spPr>
-          <a:xfrm>
-            <a:off x="4737100" y="4369296"/>
-            <a:ext cx="602655" cy="177800"/>
+          <p:cNvPr id="55" name="p1-role"/>
+          <p:cNvSpPr/>
+          <p:nvPr/>
+        </p:nvSpPr>
+        <p:spPr>
+          <a:xfrm>
+            <a:off x="7467600" y="5087342"/>
+            <a:ext cx="2584450" cy="680045"/>
           </a:xfrm>
           <a:prstGeom prst="roundRect">
             <a:avLst>
-              <a:gd name="adj" fmla="val 50000"/>
-            </a:avLst>
-          </a:prstGeom>
-          <a:solidFill>
-            <a:srgbClr val="EEF4FC"/>
-          </a:solidFill>
-          <a:ln/>
-        </p:spPr>
-      </p:sp>
-      <p:sp>
-        <p:nvSpPr>
-          <p:cNvPr id="50" name="p1-role"/>
-          <p:cNvSpPr/>
-          <p:nvPr/>
-        </p:nvSpPr>
-        <p:spPr>
-          <a:xfrm>
-            <a:off x="7035800" y="3891855"/>
-            <a:ext cx="2381250" cy="731242"/>
-          </a:xfrm>
-          <a:prstGeom prst="roundRect">
-            <a:avLst>
-              <a:gd name="adj" fmla="val 13026"/>
+              <a:gd name="adj" fmla="val 14006"/>
             </a:avLst>
           </a:prstGeom>
           <a:solidFill>
@@ -2158,13 +2284,13 @@
       </p:sp>
       <p:sp>
         <p:nvSpPr>
-          <p:cNvPr id="51" name="p1-av"/>
-          <p:cNvSpPr/>
-          <p:nvPr/>
-        </p:nvSpPr>
-        <p:spPr>
-          <a:xfrm>
-            <a:off x="7146925" y="3982343"/>
+          <p:cNvPr id="56" name="p1-av"/>
+          <p:cNvSpPr/>
+          <p:nvPr/>
+        </p:nvSpPr>
+        <p:spPr>
+          <a:xfrm>
+            <a:off x="7578725" y="5165130"/>
             <a:ext cx="107950" cy="107950"/>
           </a:xfrm>
           <a:prstGeom prst="ellipse">
@@ -2183,7 +2309,7 @@
       </p:sp>
       <p:pic>
         <p:nvPicPr>
-          <p:cNvPr id="52" name="li" descr="li">    </p:cNvPr>
+          <p:cNvPr id="57" name="li" descr="li">    </p:cNvPr>
           <p:cNvPicPr>
             <a:picLocks noChangeAspect="1"/>
           </p:cNvPicPr>
@@ -2197,7 +2323,7 @@
         </p:blipFill>
         <p:spPr>
           <a:xfrm>
-            <a:off x="7137400" y="4242164"/>
+            <a:off x="7569200" y="5422834"/>
             <a:ext cx="38100" cy="38100"/>
           </a:xfrm>
           <a:prstGeom prst="rect">
@@ -2207,7 +2333,7 @@
       </p:pic>
       <p:pic>
         <p:nvPicPr>
-          <p:cNvPr id="53" name="li" descr="li">    </p:cNvPr>
+          <p:cNvPr id="58" name="li" descr="li">    </p:cNvPr>
           <p:cNvPicPr>
             <a:picLocks noChangeAspect="1"/>
           </p:cNvPicPr>
@@ -2221,7 +2347,7 @@
         </p:blipFill>
         <p:spPr>
           <a:xfrm>
-            <a:off x="7137400" y="4437724"/>
+            <a:off x="7569200" y="5620511"/>
             <a:ext cx="38100" cy="38100"/>
           </a:xfrm>
           <a:prstGeom prst="rect">
@@ -2231,59 +2357,29 @@
       </p:pic>
       <p:sp>
         <p:nvSpPr>
-          <p:cNvPr id="54" name="p1-role"/>
-          <p:cNvSpPr/>
-          <p:nvPr/>
-        </p:nvSpPr>
-        <p:spPr>
-          <a:xfrm>
-            <a:off x="4552950" y="4889798"/>
-            <a:ext cx="2381250" cy="715466"/>
+          <p:cNvPr id="59" name="p1-panel"/>
+          <p:cNvSpPr/>
+          <p:nvPr/>
+        </p:nvSpPr>
+        <p:spPr>
+          <a:xfrm>
+            <a:off x="10312400" y="4115495"/>
+            <a:ext cx="1270000" cy="1712020"/>
           </a:xfrm>
           <a:prstGeom prst="roundRect">
             <a:avLst>
-              <a:gd name="adj" fmla="val 13313"/>
+              <a:gd name="adj" fmla="val 11000"/>
             </a:avLst>
           </a:prstGeom>
           <a:solidFill>
-            <a:srgbClr val="FFFFFF"/>
-          </a:solidFill>
-          <a:ln w="12700">
-            <a:solidFill>
-              <a:srgbClr val="FFFFFF"/>
-            </a:solidFill>
-            <a:prstDash val="solid"/>
-          </a:ln>
-        </p:spPr>
-      </p:sp>
-      <p:sp>
-        <p:nvSpPr>
-          <p:cNvPr id="55" name="p1-av"/>
-          <p:cNvSpPr/>
-          <p:nvPr/>
-        </p:nvSpPr>
-        <p:spPr>
-          <a:xfrm>
-            <a:off x="4664075" y="4980285"/>
-            <a:ext cx="107950" cy="107950"/>
-          </a:xfrm>
-          <a:prstGeom prst="ellipse">
-            <a:avLst/>
-          </a:prstGeom>
-          <a:solidFill>
-            <a:srgbClr val="00A94F"/>
-          </a:solidFill>
-          <a:ln w="31750">
-            <a:solidFill>
-              <a:srgbClr val="E5F6EC"/>
-            </a:solidFill>
-            <a:prstDash val="solid"/>
-          </a:ln>
+            <a:srgbClr val="EEF4FC"/>
+          </a:solidFill>
+          <a:ln/>
         </p:spPr>
       </p:sp>
       <p:pic>
         <p:nvPicPr>
-          <p:cNvPr id="56" name="li" descr="li">    </p:cNvPr>
+          <p:cNvPr id="60" name="svg" descr="svg">    </p:cNvPr>
           <p:cNvPicPr>
             <a:picLocks noChangeAspect="1"/>
           </p:cNvPicPr>
@@ -2297,39 +2393,17 @@
         </p:blipFill>
         <p:spPr>
           <a:xfrm>
-            <a:off x="4654550" y="5237989"/>
-            <a:ext cx="38100" cy="38100"/>
+            <a:off x="10416117" y="4454161"/>
+            <a:ext cx="1064683" cy="643467"/>
           </a:xfrm>
           <a:prstGeom prst="rect">
             <a:avLst/>
           </a:prstGeom>
         </p:spPr>
       </p:pic>
-      <p:sp>
-        <p:nvSpPr>
-          <p:cNvPr id="57" name="chip tech p1-tool"/>
-          <p:cNvSpPr/>
-          <p:nvPr/>
-        </p:nvSpPr>
-        <p:spPr>
-          <a:xfrm>
-            <a:off x="4737100" y="5155803"/>
-            <a:ext cx="400943" cy="177800"/>
-          </a:xfrm>
-          <a:prstGeom prst="roundRect">
-            <a:avLst>
-              <a:gd name="adj" fmla="val 50000"/>
-            </a:avLst>
-          </a:prstGeom>
-          <a:solidFill>
-            <a:srgbClr val="EEF4FC"/>
-          </a:solidFill>
-          <a:ln/>
-        </p:spPr>
-      </p:sp>
       <p:pic>
         <p:nvPicPr>
-          <p:cNvPr id="58" name="li" descr="li">    </p:cNvPr>
+          <p:cNvPr id="61" name="svg" descr="svg">    </p:cNvPr>
           <p:cNvPicPr>
             <a:picLocks noChangeAspect="1"/>
           </p:cNvPicPr>
@@ -2343,8 +2417,8 @@
         </p:blipFill>
         <p:spPr>
           <a:xfrm>
-            <a:off x="4654550" y="5435666"/>
-            <a:ext cx="38100" cy="38100"/>
+            <a:off x="10420350" y="5385594"/>
+            <a:ext cx="114300" cy="114300"/>
           </a:xfrm>
           <a:prstGeom prst="rect">
             <a:avLst/>
@@ -2353,111 +2427,36 @@
       </p:pic>
       <p:sp>
         <p:nvSpPr>
-          <p:cNvPr id="59" name="p1-role"/>
-          <p:cNvSpPr/>
-          <p:nvPr/>
-        </p:nvSpPr>
-        <p:spPr>
-          <a:xfrm>
-            <a:off x="7035800" y="4889798"/>
-            <a:ext cx="2381250" cy="715466"/>
+          <p:cNvPr id="62" name="key"/>
+          <p:cNvSpPr/>
+          <p:nvPr/>
+        </p:nvSpPr>
+        <p:spPr>
+          <a:xfrm>
+            <a:off x="609600" y="5916414"/>
+            <a:ext cx="10972800" cy="432991"/>
           </a:xfrm>
           <a:prstGeom prst="roundRect">
             <a:avLst>
-              <a:gd name="adj" fmla="val 13313"/>
+              <a:gd name="adj" fmla="val 32264"/>
             </a:avLst>
           </a:prstGeom>
           <a:solidFill>
-            <a:srgbClr val="FFFFFF"/>
-          </a:solidFill>
-          <a:ln w="12700">
-            <a:solidFill>
-              <a:srgbClr val="FFFFFF"/>
-            </a:solidFill>
-            <a:prstDash val="solid"/>
-          </a:ln>
-        </p:spPr>
-      </p:sp>
-      <p:pic>
-        <p:nvPicPr>
-          <p:cNvPr id="60" name="svg" descr="svg">    </p:cNvPr>
-          <p:cNvPicPr>
-            <a:picLocks noChangeAspect="1"/>
-          </p:cNvPicPr>
-          <p:nvPr/>
-        </p:nvPicPr>
-        <p:blipFill>
-          <a:blip r:embed="rId21"/>
-          <a:stretch>
-            <a:fillRect/>
-          </a:stretch>
-        </p:blipFill>
-        <p:spPr>
-          <a:xfrm>
-            <a:off x="5689600" y="4629448"/>
-            <a:ext cx="2590800" cy="254000"/>
-          </a:xfrm>
-          <a:prstGeom prst="rect">
-            <a:avLst/>
-          </a:prstGeom>
-        </p:spPr>
-      </p:pic>
-      <p:sp>
-        <p:nvSpPr>
-          <p:cNvPr id="61" name="chip people p1-share"/>
-          <p:cNvSpPr/>
-          <p:nvPr/>
-        </p:nvSpPr>
-        <p:spPr>
-          <a:xfrm>
-            <a:off x="6027241" y="4648498"/>
-            <a:ext cx="1915517" cy="215900"/>
-          </a:xfrm>
-          <a:prstGeom prst="roundRect">
-            <a:avLst>
-              <a:gd name="adj" fmla="val 50000"/>
-            </a:avLst>
-          </a:prstGeom>
-          <a:solidFill>
-            <a:srgbClr val="E5F6EC"/>
-          </a:solidFill>
-          <a:ln/>
-        </p:spPr>
-      </p:sp>
-      <p:pic>
-        <p:nvPicPr>
-          <p:cNvPr id="62" name="svg" descr="svg">    </p:cNvPr>
-          <p:cNvPicPr>
-            <a:picLocks noChangeAspect="1"/>
-          </p:cNvPicPr>
-          <p:nvPr/>
-        </p:nvPicPr>
-        <p:blipFill>
-          <a:blip r:embed="rId22"/>
-          <a:stretch>
-            <a:fillRect/>
-          </a:stretch>
-        </p:blipFill>
-        <p:spPr>
-          <a:xfrm>
-            <a:off x="6120375" y="4703531"/>
-            <a:ext cx="91017" cy="105833"/>
-          </a:xfrm>
-          <a:prstGeom prst="rect">
-            <a:avLst/>
-          </a:prstGeom>
-        </p:spPr>
-      </p:pic>
-      <p:sp>
-        <p:nvSpPr>
-          <p:cNvPr id="63" name="p1-av"/>
-          <p:cNvSpPr/>
-          <p:nvPr/>
-        </p:nvSpPr>
-        <p:spPr>
-          <a:xfrm>
-            <a:off x="7146925" y="4980285"/>
-            <a:ext cx="107950" cy="107950"/>
+            <a:srgbClr val="0B2147"/>
+          </a:solidFill>
+          <a:ln/>
+        </p:spPr>
+      </p:sp>
+      <p:sp>
+        <p:nvSpPr>
+          <p:cNvPr id="63" name="i"/>
+          <p:cNvSpPr/>
+          <p:nvPr/>
+        </p:nvSpPr>
+        <p:spPr>
+          <a:xfrm>
+            <a:off x="863600" y="6101060"/>
+            <a:ext cx="63500" cy="63500"/>
           </a:xfrm>
           <a:prstGeom prst="ellipse">
             <a:avLst/>
@@ -2465,147 +2464,84 @@
           <a:solidFill>
             <a:srgbClr val="00A94F"/>
           </a:solidFill>
-          <a:ln w="31750">
-            <a:solidFill>
-              <a:srgbClr val="E5F6EC"/>
-            </a:solidFill>
-            <a:prstDash val="solid"/>
-          </a:ln>
-        </p:spPr>
-      </p:sp>
-      <p:pic>
-        <p:nvPicPr>
-          <p:cNvPr id="64" name="li" descr="li">    </p:cNvPr>
-          <p:cNvPicPr>
-            <a:picLocks noChangeAspect="1"/>
-          </p:cNvPicPr>
-          <p:nvPr/>
-        </p:nvPicPr>
-        <p:blipFill>
-          <a:blip r:embed="rId23"/>
-          <a:stretch>
-            <a:fillRect/>
-          </a:stretch>
-        </p:blipFill>
-        <p:spPr>
-          <a:xfrm>
-            <a:off x="7137400" y="5237989"/>
-            <a:ext cx="38100" cy="38100"/>
-          </a:xfrm>
-          <a:prstGeom prst="rect">
-            <a:avLst/>
-          </a:prstGeom>
-        </p:spPr>
-      </p:pic>
-      <p:pic>
-        <p:nvPicPr>
-          <p:cNvPr id="65" name="li" descr="li">    </p:cNvPr>
-          <p:cNvPicPr>
-            <a:picLocks noChangeAspect="1"/>
-          </p:cNvPicPr>
-          <p:nvPr/>
-        </p:nvPicPr>
-        <p:blipFill>
-          <a:blip r:embed="rId24"/>
-          <a:stretch>
-            <a:fillRect/>
-          </a:stretch>
-        </p:blipFill>
-        <p:spPr>
-          <a:xfrm>
-            <a:off x="7137400" y="5435666"/>
-            <a:ext cx="38100" cy="38100"/>
-          </a:xfrm>
-          <a:prstGeom prst="rect">
-            <a:avLst/>
-          </a:prstGeom>
-        </p:spPr>
-      </p:pic>
-      <p:sp>
-        <p:nvSpPr>
-          <p:cNvPr id="66" name="p1-panel"/>
-          <p:cNvSpPr/>
-          <p:nvPr/>
-        </p:nvSpPr>
-        <p:spPr>
-          <a:xfrm>
-            <a:off x="9677400" y="3796605"/>
-            <a:ext cx="1905000" cy="1903909"/>
-          </a:xfrm>
-          <a:prstGeom prst="roundRect">
-            <a:avLst>
-              <a:gd name="adj" fmla="val 7338"/>
-            </a:avLst>
-          </a:prstGeom>
-          <a:solidFill>
-            <a:srgbClr val="EEF4FC"/>
-          </a:solidFill>
-          <a:ln/>
-        </p:spPr>
-      </p:sp>
-      <p:pic>
-        <p:nvPicPr>
-          <p:cNvPr id="67" name="svg" descr="svg">    </p:cNvPr>
-          <p:cNvPicPr>
-            <a:picLocks noChangeAspect="1"/>
-          </p:cNvPicPr>
-          <p:nvPr/>
-        </p:nvPicPr>
-        <p:blipFill>
-          <a:blip r:embed="rId25"/>
-          <a:stretch>
-            <a:fillRect/>
-          </a:stretch>
-        </p:blipFill>
-        <p:spPr>
-          <a:xfrm>
-            <a:off x="9781117" y="4129617"/>
-            <a:ext cx="1699683" cy="821267"/>
-          </a:xfrm>
-          <a:prstGeom prst="rect">
-            <a:avLst/>
-          </a:prstGeom>
-        </p:spPr>
-      </p:pic>
-      <p:pic>
-        <p:nvPicPr>
-          <p:cNvPr id="68" name="svg" descr="svg">    </p:cNvPr>
-          <p:cNvPicPr>
-            <a:picLocks noChangeAspect="1"/>
-          </p:cNvPicPr>
-          <p:nvPr/>
-        </p:nvPicPr>
-        <p:blipFill>
-          <a:blip r:embed="rId26"/>
-          <a:stretch>
-            <a:fillRect/>
-          </a:stretch>
-        </p:blipFill>
-        <p:spPr>
-          <a:xfrm>
-            <a:off x="9785350" y="5220494"/>
-            <a:ext cx="114300" cy="114300"/>
-          </a:xfrm>
-          <a:prstGeom prst="rect">
-            <a:avLst/>
-          </a:prstGeom>
-        </p:spPr>
-      </p:pic>
-      <p:sp>
-        <p:nvSpPr>
-          <p:cNvPr id="69" name="p1-fd"/>
-          <p:cNvSpPr/>
-          <p:nvPr/>
-        </p:nvSpPr>
-        <p:spPr>
-          <a:xfrm>
-            <a:off x="9804400" y="5466854"/>
-            <a:ext cx="76200" cy="76200"/>
+          <a:ln/>
+        </p:spPr>
+      </p:sp>
+      <p:sp>
+        <p:nvSpPr>
+          <p:cNvPr id="64" name="b"/>
+          <p:cNvSpPr/>
+          <p:nvPr/>
+        </p:nvSpPr>
+        <p:spPr>
+          <a:xfrm>
+            <a:off x="927100" y="6126460"/>
+            <a:ext cx="88900" cy="12700"/>
+          </a:xfrm>
+          <a:prstGeom prst="rect">
+            <a:avLst/>
+          </a:prstGeom>
+          <a:solidFill>
+            <a:srgbClr val="C3CEDD"/>
+          </a:solidFill>
+          <a:ln/>
+        </p:spPr>
+      </p:sp>
+      <p:sp>
+        <p:nvSpPr>
+          <p:cNvPr id="65" name="i"/>
+          <p:cNvSpPr/>
+          <p:nvPr/>
+        </p:nvSpPr>
+        <p:spPr>
+          <a:xfrm>
+            <a:off x="1016000" y="6101060"/>
+            <a:ext cx="63500" cy="63500"/>
           </a:xfrm>
           <a:prstGeom prst="ellipse">
             <a:avLst/>
           </a:prstGeom>
           <a:solidFill>
+            <a:srgbClr val="004B8D"/>
+          </a:solidFill>
+          <a:ln/>
+        </p:spPr>
+      </p:sp>
+      <p:sp>
+        <p:nvSpPr>
+          <p:cNvPr id="66" name="b"/>
+          <p:cNvSpPr/>
+          <p:nvPr/>
+        </p:nvSpPr>
+        <p:spPr>
+          <a:xfrm>
+            <a:off x="1079500" y="6126460"/>
+            <a:ext cx="88900" cy="12700"/>
+          </a:xfrm>
+          <a:prstGeom prst="rect">
+            <a:avLst/>
+          </a:prstGeom>
+          <a:solidFill>
+            <a:srgbClr val="C3CEDD"/>
+          </a:solidFill>
+          <a:ln/>
+        </p:spPr>
+      </p:sp>
+      <p:sp>
+        <p:nvSpPr>
+          <p:cNvPr id="67" name="i"/>
+          <p:cNvSpPr/>
+          <p:nvPr/>
+        </p:nvSpPr>
+        <p:spPr>
+          <a:xfrm>
+            <a:off x="1168400" y="6101060"/>
+            <a:ext cx="63500" cy="63500"/>
+          </a:xfrm>
+          <a:prstGeom prst="ellipse">
+            <a:avLst/>
+          </a:prstGeom>
+          <a:solidFill>
             <a:srgbClr val="FDBB30"/>
           </a:solidFill>
           <a:ln/>
@@ -2613,129 +2549,7 @@
       </p:sp>
       <p:sp>
         <p:nvSpPr>
-          <p:cNvPr id="70" name="key"/>
-          <p:cNvSpPr/>
-          <p:nvPr/>
-        </p:nvSpPr>
-        <p:spPr>
-          <a:xfrm>
-            <a:off x="609600" y="5814814"/>
-            <a:ext cx="10972800" cy="534591"/>
-          </a:xfrm>
-          <a:prstGeom prst="roundRect">
-            <a:avLst>
-              <a:gd name="adj" fmla="val 26132"/>
-            </a:avLst>
-          </a:prstGeom>
-          <a:solidFill>
-            <a:srgbClr val="0B2147"/>
-          </a:solidFill>
-          <a:ln/>
-        </p:spPr>
-      </p:sp>
-      <p:sp>
-        <p:nvSpPr>
-          <p:cNvPr id="71" name="i"/>
-          <p:cNvSpPr/>
-          <p:nvPr/>
-        </p:nvSpPr>
-        <p:spPr>
-          <a:xfrm>
-            <a:off x="863600" y="6050260"/>
-            <a:ext cx="63500" cy="63500"/>
-          </a:xfrm>
-          <a:prstGeom prst="ellipse">
-            <a:avLst/>
-          </a:prstGeom>
-          <a:solidFill>
-            <a:srgbClr val="00A94F"/>
-          </a:solidFill>
-          <a:ln/>
-        </p:spPr>
-      </p:sp>
-      <p:sp>
-        <p:nvSpPr>
-          <p:cNvPr id="72" name="b"/>
-          <p:cNvSpPr/>
-          <p:nvPr/>
-        </p:nvSpPr>
-        <p:spPr>
-          <a:xfrm>
-            <a:off x="927100" y="6075660"/>
-            <a:ext cx="88900" cy="12700"/>
-          </a:xfrm>
-          <a:prstGeom prst="rect">
-            <a:avLst/>
-          </a:prstGeom>
-          <a:solidFill>
-            <a:srgbClr val="C3CEDD"/>
-          </a:solidFill>
-          <a:ln/>
-        </p:spPr>
-      </p:sp>
-      <p:sp>
-        <p:nvSpPr>
-          <p:cNvPr id="73" name="i"/>
-          <p:cNvSpPr/>
-          <p:nvPr/>
-        </p:nvSpPr>
-        <p:spPr>
-          <a:xfrm>
-            <a:off x="1016000" y="6050260"/>
-            <a:ext cx="63500" cy="63500"/>
-          </a:xfrm>
-          <a:prstGeom prst="ellipse">
-            <a:avLst/>
-          </a:prstGeom>
-          <a:solidFill>
-            <a:srgbClr val="004B8D"/>
-          </a:solidFill>
-          <a:ln/>
-        </p:spPr>
-      </p:sp>
-      <p:sp>
-        <p:nvSpPr>
-          <p:cNvPr id="74" name="b"/>
-          <p:cNvSpPr/>
-          <p:nvPr/>
-        </p:nvSpPr>
-        <p:spPr>
-          <a:xfrm>
-            <a:off x="1079500" y="6075660"/>
-            <a:ext cx="88900" cy="12700"/>
-          </a:xfrm>
-          <a:prstGeom prst="rect">
-            <a:avLst/>
-          </a:prstGeom>
-          <a:solidFill>
-            <a:srgbClr val="C3CEDD"/>
-          </a:solidFill>
-          <a:ln/>
-        </p:spPr>
-      </p:sp>
-      <p:sp>
-        <p:nvSpPr>
-          <p:cNvPr id="75" name="i"/>
-          <p:cNvSpPr/>
-          <p:nvPr/>
-        </p:nvSpPr>
-        <p:spPr>
-          <a:xfrm>
-            <a:off x="1168400" y="6050260"/>
-            <a:ext cx="63500" cy="63500"/>
-          </a:xfrm>
-          <a:prstGeom prst="ellipse">
-            <a:avLst/>
-          </a:prstGeom>
-          <a:solidFill>
-            <a:srgbClr val="FDBB30"/>
-          </a:solidFill>
-          <a:ln/>
-        </p:spPr>
-      </p:sp>
-      <p:sp>
-        <p:nvSpPr>
-          <p:cNvPr id="76" name="01"/>
+          <p:cNvPr id="68" name="01"/>
           <p:cNvSpPr txBox="1"/>
           <p:nvPr/>
         </p:nvSpPr>
@@ -2774,7 +2588,7 @@
       </p:sp>
       <p:sp>
         <p:nvSpPr>
-          <p:cNvPr id="77" name="PT 주제 1 · 가장 중요하게 생각하는 가치와 실천 경험"/>
+          <p:cNvPr id="69" name="PT 주제 1 · 가장 중요하게 생각하는 가치와 실천 경험"/>
           <p:cNvSpPr txBox="1"/>
           <p:nvPr/>
         </p:nvSpPr>
@@ -2813,7 +2627,7 @@
       </p:sp>
       <p:sp>
         <p:nvSpPr>
-          <p:cNvPr id="78" name="제가 가장 중요하게 생각하는 가치는"/>
+          <p:cNvPr id="70" name="제가 가장 중요하게 생각하는 가치는"/>
           <p:cNvSpPr txBox="1"/>
           <p:nvPr/>
         </p:nvSpPr>
@@ -2852,7 +2666,7 @@
       </p:sp>
       <p:sp>
         <p:nvSpPr>
-          <p:cNvPr id="79" name="공동의 목표를 공유하며 함께 성과를 만드는 협업입니다"/>
+          <p:cNvPr id="71" name="공동의 목표를 공유하며 함께 성과를 만드는 협업입니다"/>
           <p:cNvSpPr txBox="1"/>
           <p:nvPr/>
         </p:nvSpPr>
@@ -2933,13 +2747,13 @@
       </p:sp>
       <p:sp>
         <p:nvSpPr>
-          <p:cNvPr id="80" name="PROJECT"/>
-          <p:cNvSpPr txBox="1"/>
-          <p:nvPr/>
-        </p:nvSpPr>
-        <p:spPr>
-          <a:xfrm>
-            <a:off x="825500" y="1974453"/>
+          <p:cNvPr id="72" name="PROJECT"/>
+          <p:cNvSpPr txBox="1"/>
+          <p:nvPr/>
+        </p:nvSpPr>
+        <p:spPr>
+          <a:xfrm>
+            <a:off x="825500" y="2159298"/>
             <a:ext cx="774898" cy="146050"/>
           </a:xfrm>
           <a:prstGeom prst="rect">
@@ -2972,13 +2786,13 @@
       </p:sp>
       <p:sp>
         <p:nvSpPr>
-          <p:cNvPr id="81" name="학생 BIM 경진대회"/>
-          <p:cNvSpPr txBox="1"/>
-          <p:nvPr/>
-        </p:nvSpPr>
-        <p:spPr>
-          <a:xfrm>
-            <a:off x="1752798" y="1974453"/>
+          <p:cNvPr id="73" name="학생 BIM 경진대회"/>
+          <p:cNvSpPr txBox="1"/>
+          <p:nvPr/>
+        </p:nvSpPr>
+        <p:spPr>
+          <a:xfrm>
+            <a:off x="1752798" y="2159298"/>
             <a:ext cx="993454" cy="146050"/>
           </a:xfrm>
           <a:prstGeom prst="rect">
@@ -3011,13 +2825,13 @@
       </p:sp>
       <p:sp>
         <p:nvSpPr>
-          <p:cNvPr id="82" name="4인 팀 · 팀장"/>
-          <p:cNvSpPr txBox="1"/>
-          <p:nvPr/>
-        </p:nvSpPr>
-        <p:spPr>
-          <a:xfrm>
-            <a:off x="3261519" y="1974453"/>
+          <p:cNvPr id="74" name="4인 팀 · 팀장"/>
+          <p:cNvSpPr txBox="1"/>
+          <p:nvPr/>
+        </p:nvSpPr>
+        <p:spPr>
+          <a:xfrm>
+            <a:off x="3261519" y="2159298"/>
             <a:ext cx="674489" cy="146050"/>
           </a:xfrm>
           <a:prstGeom prst="rect">
@@ -3050,13 +2864,13 @@
       </p:sp>
       <p:sp>
         <p:nvSpPr>
-          <p:cNvPr id="83" name="‘유닛 모듈러 기반 사용자 맞춤형 리모델링 방법’"/>
-          <p:cNvSpPr txBox="1"/>
-          <p:nvPr/>
-        </p:nvSpPr>
-        <p:spPr>
-          <a:xfrm>
-            <a:off x="825500" y="2227064"/>
+          <p:cNvPr id="75" name="‘유닛 모듈러 기반 사용자 맞춤형 리모델링 방법’"/>
+          <p:cNvSpPr txBox="1"/>
+          <p:nvPr/>
+        </p:nvSpPr>
+        <p:spPr>
+          <a:xfrm>
+            <a:off x="825500" y="2462709"/>
             <a:ext cx="4759448" cy="298450"/>
           </a:xfrm>
           <a:prstGeom prst="rect">
@@ -3089,13 +2903,13 @@
       </p:sp>
       <p:sp>
         <p:nvSpPr>
-          <p:cNvPr id="84" name="사용자가 원하는 리모델링 규모에 따라 유닛 모듈러를 배치하고,"/>
-          <p:cNvSpPr txBox="1"/>
-          <p:nvPr/>
-        </p:nvSpPr>
-        <p:spPr>
-          <a:xfrm>
-            <a:off x="825500" y="2589014"/>
+          <p:cNvPr id="76" name="사용자가 원하는 리모델링 규모에 따라 유닛 모듈러를 배치하고,"/>
+          <p:cNvSpPr txBox="1"/>
+          <p:nvPr/>
+        </p:nvSpPr>
+        <p:spPr>
+          <a:xfrm>
+            <a:off x="825500" y="2850059"/>
             <a:ext cx="3552706" cy="165100"/>
           </a:xfrm>
           <a:prstGeom prst="rect">
@@ -3128,13 +2942,13 @@
       </p:sp>
       <p:sp>
         <p:nvSpPr>
-          <p:cNvPr id="85" name="필요한 모듈 수와 자재 물량을 자동으로 산출하는 BIM 기반 리모델링 방"/>
-          <p:cNvSpPr txBox="1"/>
-          <p:nvPr/>
-        </p:nvSpPr>
-        <p:spPr>
-          <a:xfrm>
-            <a:off x="825500" y="2791520"/>
+          <p:cNvPr id="77" name="필요한 모듈 수와 자재 물량을 자동으로 산출하는 BIM 기반 리모델링 방"/>
+          <p:cNvSpPr txBox="1"/>
+          <p:nvPr/>
+        </p:nvSpPr>
+        <p:spPr>
+          <a:xfrm>
+            <a:off x="825500" y="3052564"/>
             <a:ext cx="4436781" cy="165100"/>
           </a:xfrm>
           <a:prstGeom prst="rect">
@@ -3167,92 +2981,326 @@
       </p:sp>
       <p:sp>
         <p:nvSpPr>
-          <p:cNvPr id="86" name="리모델링 규모 입력"/>
-          <p:cNvSpPr txBox="1"/>
-          <p:nvPr/>
-        </p:nvSpPr>
-        <p:spPr>
-          <a:xfrm>
-            <a:off x="6319490" y="2354064"/>
-            <a:ext cx="980097" cy="152400"/>
-          </a:xfrm>
-          <a:prstGeom prst="rect">
-            <a:avLst/>
-          </a:prstGeom>
-          <a:noFill/>
-          <a:ln/>
-        </p:spPr>
-        <p:txBody>
-          <a:bodyPr wrap="none" lIns="0" tIns="0" rIns="0" bIns="0" rtlCol="0" anchor="ctr"/>
-          <a:lstStyle/>
-          <a:p>
-            <a:pPr algn="l" indent="0" marL="0">
-              <a:buNone/>
-            </a:pPr>
-            <a:r>
-              <a:rPr lang="ko-KR" altLang="en-US" sz="1000" spc="-20" kern="0" dirty="0">
-                <a:solidFill>
-                  <a:srgbClr val="1C2536"/>
+          <p:cNvPr id="78" name="장려상"/>
+          <p:cNvSpPr txBox="1"/>
+          <p:nvPr/>
+        </p:nvSpPr>
+        <p:spPr>
+          <a:xfrm>
+            <a:off x="10058350" y="2449314"/>
+            <a:ext cx="698599" cy="298450"/>
+          </a:xfrm>
+          <a:prstGeom prst="rect">
+            <a:avLst/>
+          </a:prstGeom>
+          <a:noFill/>
+          <a:ln/>
+        </p:spPr>
+        <p:txBody>
+          <a:bodyPr wrap="none" lIns="0" tIns="0" rIns="0" bIns="0" rtlCol="0" anchor="ctr"/>
+          <a:lstStyle/>
+          <a:p>
+            <a:pPr algn="l" indent="0" marL="0">
+              <a:buNone/>
+            </a:pPr>
+            <a:r>
+              <a:rPr lang="ko-KR" altLang="en-US" sz="2000" spc="-60" kern="0" dirty="0">
+                <a:solidFill>
+                  <a:srgbClr val="0B2147"/>
+                </a:solidFill>
+                <a:latin typeface="Paperlogy 9 Black" pitchFamily="34" charset="0"/>
+                <a:ea typeface="Paperlogy 9 Black" pitchFamily="34" charset="-127"/>
+                <a:cs typeface="Paperlogy 9 Black" pitchFamily="34" charset="-120"/>
+              </a:rPr>
+              <a:t>장려상</a:t>
+            </a:r>
+            <a:endParaRPr lang="en-US" sz="2000" dirty="0"/>
+          </a:p>
+        </p:txBody>
+      </p:sp>
+      <p:sp>
+        <p:nvSpPr>
+          <p:cNvPr id="79" name="리모델링"/>
+          <p:cNvSpPr txBox="1"/>
+          <p:nvPr/>
+        </p:nvSpPr>
+        <p:spPr>
+          <a:xfrm>
+            <a:off x="6426398" y="2639814"/>
+            <a:ext cx="444004" cy="139700"/>
+          </a:xfrm>
+          <a:prstGeom prst="rect">
+            <a:avLst/>
+          </a:prstGeom>
+          <a:noFill/>
+          <a:ln/>
+        </p:spPr>
+        <p:txBody>
+          <a:bodyPr wrap="none" lIns="0" tIns="0" rIns="0" bIns="0" rtlCol="0" anchor="ctr"/>
+          <a:lstStyle/>
+          <a:p>
+            <a:pPr algn="ctr" indent="0" marL="0">
+              <a:buNone/>
+            </a:pPr>
+            <a:r>
+              <a:rPr lang="ko-KR" altLang="en-US" sz="900" spc="-18" kern="0" dirty="0">
+                <a:solidFill>
+                  <a:srgbClr val="FFFFFF"/>
                 </a:solidFill>
                 <a:latin typeface="Paperlogy 7 Bold" pitchFamily="34" charset="0"/>
                 <a:ea typeface="Paperlogy 7 Bold" pitchFamily="34" charset="-127"/>
                 <a:cs typeface="Paperlogy 7 Bold" pitchFamily="34" charset="-120"/>
               </a:rPr>
-              <a:t>리모델링 규모 입력</a:t>
-            </a:r>
-            <a:endParaRPr lang="en-US" sz="1000" dirty="0"/>
-          </a:p>
-        </p:txBody>
-      </p:sp>
-      <p:sp>
-        <p:nvSpPr>
-          <p:cNvPr id="87" name="유닛 모듈러 배치"/>
-          <p:cNvSpPr txBox="1"/>
-          <p:nvPr/>
-        </p:nvSpPr>
-        <p:spPr>
-          <a:xfrm>
-            <a:off x="8215610" y="2354064"/>
-            <a:ext cx="866180" cy="152400"/>
-          </a:xfrm>
-          <a:prstGeom prst="rect">
-            <a:avLst/>
-          </a:prstGeom>
-          <a:noFill/>
-          <a:ln/>
-        </p:spPr>
-        <p:txBody>
-          <a:bodyPr wrap="none" lIns="0" tIns="0" rIns="0" bIns="0" rtlCol="0" anchor="ctr"/>
-          <a:lstStyle/>
-          <a:p>
-            <a:pPr algn="l" indent="0" marL="0">
-              <a:buNone/>
-            </a:pPr>
-            <a:r>
-              <a:rPr lang="ko-KR" altLang="en-US" sz="1000" spc="-20" kern="0" dirty="0">
-                <a:solidFill>
-                  <a:srgbClr val="1C2536"/>
+              <a:t>리모델링</a:t>
+            </a:r>
+            <a:endParaRPr lang="en-US" sz="900" dirty="0"/>
+          </a:p>
+        </p:txBody>
+      </p:sp>
+      <p:sp>
+        <p:nvSpPr>
+          <p:cNvPr id="80" name="규모 입력"/>
+          <p:cNvSpPr txBox="1"/>
+          <p:nvPr/>
+        </p:nvSpPr>
+        <p:spPr>
+          <a:xfrm>
+            <a:off x="6414988" y="2771180"/>
+            <a:ext cx="466923" cy="139700"/>
+          </a:xfrm>
+          <a:prstGeom prst="rect">
+            <a:avLst/>
+          </a:prstGeom>
+          <a:noFill/>
+          <a:ln/>
+        </p:spPr>
+        <p:txBody>
+          <a:bodyPr wrap="none" lIns="0" tIns="0" rIns="0" bIns="0" rtlCol="0" anchor="ctr"/>
+          <a:lstStyle/>
+          <a:p>
+            <a:pPr algn="ctr" indent="0" marL="0">
+              <a:buNone/>
+            </a:pPr>
+            <a:r>
+              <a:rPr lang="ko-KR" altLang="en-US" sz="900" spc="-18" kern="0" dirty="0">
+                <a:solidFill>
+                  <a:srgbClr val="FFFFFF"/>
                 </a:solidFill>
                 <a:latin typeface="Paperlogy 7 Bold" pitchFamily="34" charset="0"/>
                 <a:ea typeface="Paperlogy 7 Bold" pitchFamily="34" charset="-127"/>
                 <a:cs typeface="Paperlogy 7 Bold" pitchFamily="34" charset="-120"/>
               </a:rPr>
-              <a:t>유닛 모듈러 배치</a:t>
-            </a:r>
-            <a:endParaRPr lang="en-US" sz="1000" dirty="0"/>
-          </a:p>
-        </p:txBody>
-      </p:sp>
-      <p:sp>
-        <p:nvSpPr>
-          <p:cNvPr id="88" name="모듈 수 · 자재 물량 자동 산출"/>
-          <p:cNvSpPr txBox="1"/>
-          <p:nvPr/>
-        </p:nvSpPr>
-        <p:spPr>
-          <a:xfrm>
-            <a:off x="9894838" y="2354064"/>
-            <a:ext cx="1477560" cy="152400"/>
+              <a:t>규모 입력</a:t>
+            </a:r>
+            <a:endParaRPr lang="en-US" sz="900" dirty="0"/>
+          </a:p>
+        </p:txBody>
+      </p:sp>
+      <p:sp>
+        <p:nvSpPr>
+          <p:cNvPr id="81" name="유닛 모듈러"/>
+          <p:cNvSpPr txBox="1"/>
+          <p:nvPr/>
+        </p:nvSpPr>
+        <p:spPr>
+          <a:xfrm>
+            <a:off x="7064375" y="2639814"/>
+            <a:ext cx="565150" cy="139700"/>
+          </a:xfrm>
+          <a:prstGeom prst="rect">
+            <a:avLst/>
+          </a:prstGeom>
+          <a:noFill/>
+          <a:ln/>
+        </p:spPr>
+        <p:txBody>
+          <a:bodyPr wrap="none" lIns="0" tIns="0" rIns="0" bIns="0" rtlCol="0" anchor="ctr"/>
+          <a:lstStyle/>
+          <a:p>
+            <a:pPr algn="ctr" indent="0" marL="0">
+              <a:buNone/>
+            </a:pPr>
+            <a:r>
+              <a:rPr lang="ko-KR" altLang="en-US" sz="900" spc="-18" kern="0" dirty="0">
+                <a:solidFill>
+                  <a:srgbClr val="FFFFFF"/>
+                </a:solidFill>
+                <a:latin typeface="Paperlogy 7 Bold" pitchFamily="34" charset="0"/>
+                <a:ea typeface="Paperlogy 7 Bold" pitchFamily="34" charset="-127"/>
+                <a:cs typeface="Paperlogy 7 Bold" pitchFamily="34" charset="-120"/>
+              </a:rPr>
+              <a:t>유닛 모듈러</a:t>
+            </a:r>
+            <a:endParaRPr lang="en-US" sz="900" dirty="0"/>
+          </a:p>
+        </p:txBody>
+      </p:sp>
+      <p:sp>
+        <p:nvSpPr>
+          <p:cNvPr id="82" name="배치"/>
+          <p:cNvSpPr txBox="1"/>
+          <p:nvPr/>
+        </p:nvSpPr>
+        <p:spPr>
+          <a:xfrm>
+            <a:off x="7223224" y="2771180"/>
+            <a:ext cx="247452" cy="139700"/>
+          </a:xfrm>
+          <a:prstGeom prst="rect">
+            <a:avLst/>
+          </a:prstGeom>
+          <a:noFill/>
+          <a:ln/>
+        </p:spPr>
+        <p:txBody>
+          <a:bodyPr wrap="none" lIns="0" tIns="0" rIns="0" bIns="0" rtlCol="0" anchor="ctr"/>
+          <a:lstStyle/>
+          <a:p>
+            <a:pPr algn="ctr" indent="0" marL="0">
+              <a:buNone/>
+            </a:pPr>
+            <a:r>
+              <a:rPr lang="ko-KR" altLang="en-US" sz="900" spc="-18" kern="0" dirty="0">
+                <a:solidFill>
+                  <a:srgbClr val="FFFFFF"/>
+                </a:solidFill>
+                <a:latin typeface="Paperlogy 7 Bold" pitchFamily="34" charset="0"/>
+                <a:ea typeface="Paperlogy 7 Bold" pitchFamily="34" charset="-127"/>
+                <a:cs typeface="Paperlogy 7 Bold" pitchFamily="34" charset="-120"/>
+              </a:rPr>
+              <a:t>배치</a:t>
+            </a:r>
+            <a:endParaRPr lang="en-US" sz="900" dirty="0"/>
+          </a:p>
+        </p:txBody>
+      </p:sp>
+      <p:sp>
+        <p:nvSpPr>
+          <p:cNvPr id="83" name="모듈 수 ·"/>
+          <p:cNvSpPr txBox="1"/>
+          <p:nvPr/>
+        </p:nvSpPr>
+        <p:spPr>
+          <a:xfrm>
+            <a:off x="7826077" y="2639814"/>
+            <a:ext cx="426045" cy="139700"/>
+          </a:xfrm>
+          <a:prstGeom prst="rect">
+            <a:avLst/>
+          </a:prstGeom>
+          <a:noFill/>
+          <a:ln/>
+        </p:spPr>
+        <p:txBody>
+          <a:bodyPr wrap="none" lIns="0" tIns="0" rIns="0" bIns="0" rtlCol="0" anchor="ctr"/>
+          <a:lstStyle/>
+          <a:p>
+            <a:pPr algn="ctr" indent="0" marL="0">
+              <a:buNone/>
+            </a:pPr>
+            <a:r>
+              <a:rPr lang="ko-KR" altLang="en-US" sz="900" spc="-18" kern="0" dirty="0">
+                <a:solidFill>
+                  <a:srgbClr val="45B9EC"/>
+                </a:solidFill>
+                <a:latin typeface="Paperlogy 7 Bold" pitchFamily="34" charset="0"/>
+                <a:ea typeface="Paperlogy 7 Bold" pitchFamily="34" charset="-127"/>
+                <a:cs typeface="Paperlogy 7 Bold" pitchFamily="34" charset="-120"/>
+              </a:rPr>
+              <a:t>모듈 수 ·</a:t>
+            </a:r>
+            <a:endParaRPr lang="en-US" sz="900" dirty="0"/>
+          </a:p>
+        </p:txBody>
+      </p:sp>
+      <p:sp>
+        <p:nvSpPr>
+          <p:cNvPr id="84" name="자재 물량"/>
+          <p:cNvSpPr txBox="1"/>
+          <p:nvPr/>
+        </p:nvSpPr>
+        <p:spPr>
+          <a:xfrm>
+            <a:off x="7805638" y="2771180"/>
+            <a:ext cx="466923" cy="139700"/>
+          </a:xfrm>
+          <a:prstGeom prst="rect">
+            <a:avLst/>
+          </a:prstGeom>
+          <a:noFill/>
+          <a:ln/>
+        </p:spPr>
+        <p:txBody>
+          <a:bodyPr wrap="none" lIns="0" tIns="0" rIns="0" bIns="0" rtlCol="0" anchor="ctr"/>
+          <a:lstStyle/>
+          <a:p>
+            <a:pPr algn="ctr" indent="0" marL="0">
+              <a:buNone/>
+            </a:pPr>
+            <a:r>
+              <a:rPr lang="ko-KR" altLang="en-US" sz="900" spc="-18" kern="0" dirty="0">
+                <a:solidFill>
+                  <a:srgbClr val="45B9EC"/>
+                </a:solidFill>
+                <a:latin typeface="Paperlogy 7 Bold" pitchFamily="34" charset="0"/>
+                <a:ea typeface="Paperlogy 7 Bold" pitchFamily="34" charset="-127"/>
+                <a:cs typeface="Paperlogy 7 Bold" pitchFamily="34" charset="-120"/>
+              </a:rPr>
+              <a:t>자재 물량</a:t>
+            </a:r>
+            <a:endParaRPr lang="en-US" sz="900" dirty="0"/>
+          </a:p>
+        </p:txBody>
+      </p:sp>
+      <p:sp>
+        <p:nvSpPr>
+          <p:cNvPr id="85" name="자동 산출"/>
+          <p:cNvSpPr txBox="1"/>
+          <p:nvPr/>
+        </p:nvSpPr>
+        <p:spPr>
+          <a:xfrm>
+            <a:off x="7805638" y="2902545"/>
+            <a:ext cx="466923" cy="139700"/>
+          </a:xfrm>
+          <a:prstGeom prst="rect">
+            <a:avLst/>
+          </a:prstGeom>
+          <a:noFill/>
+          <a:ln/>
+        </p:spPr>
+        <p:txBody>
+          <a:bodyPr wrap="none" lIns="0" tIns="0" rIns="0" bIns="0" rtlCol="0" anchor="ctr"/>
+          <a:lstStyle/>
+          <a:p>
+            <a:pPr algn="ctr" indent="0" marL="0">
+              <a:buNone/>
+            </a:pPr>
+            <a:r>
+              <a:rPr lang="ko-KR" altLang="en-US" sz="900" spc="-18" kern="0" dirty="0">
+                <a:solidFill>
+                  <a:srgbClr val="45B9EC"/>
+                </a:solidFill>
+                <a:latin typeface="Paperlogy 7 Bold" pitchFamily="34" charset="0"/>
+                <a:ea typeface="Paperlogy 7 Bold" pitchFamily="34" charset="-127"/>
+                <a:cs typeface="Paperlogy 7 Bold" pitchFamily="34" charset="-120"/>
+              </a:rPr>
+              <a:t>자동 산출</a:t>
+            </a:r>
+            <a:endParaRPr lang="en-US" sz="900" dirty="0"/>
+          </a:p>
+        </p:txBody>
+      </p:sp>
+      <p:sp>
+        <p:nvSpPr>
+          <p:cNvPr id="86" name="결과물 · 유닛 모듈러 기반 사용자 맞춤형"/>
+          <p:cNvSpPr txBox="1"/>
+          <p:nvPr/>
+        </p:nvSpPr>
+        <p:spPr>
+          <a:xfrm>
+            <a:off x="6273800" y="3154164"/>
+            <a:ext cx="2052955" cy="152400"/>
           </a:xfrm>
           <a:prstGeom prst="rect">
             <a:avLst/>
@@ -3276,7 +3324,21 @@
                 <a:ea typeface="Paperlogy 8 ExtraBold" pitchFamily="34" charset="-127"/>
                 <a:cs typeface="Paperlogy 8 ExtraBold" pitchFamily="34" charset="-120"/>
               </a:rPr>
-              <a:t>모듈 수 · 자재 물량 자동 산출</a:t>
+              <a:t>결과물</a:t>
+            </a:r>
+            <a:pPr algn="l" indent="0" marL="0">
+              <a:buNone/>
+            </a:pPr>
+            <a:r>
+              <a:rPr lang="ko-KR" altLang="en-US" sz="1000" spc="-20" kern="0" dirty="0">
+                <a:solidFill>
+                  <a:srgbClr val="4B5568"/>
+                </a:solidFill>
+                <a:latin typeface="Paperlogy 6 SemiBold" pitchFamily="34" charset="0"/>
+                <a:ea typeface="Paperlogy 6 SemiBold" pitchFamily="34" charset="-127"/>
+                <a:cs typeface="Paperlogy 6 SemiBold" pitchFamily="34" charset="-120"/>
+              </a:rPr>
+              <a:t> · 유닛 모듈러 기반 사용자 맞춤형</a:t>
             </a:r>
             <a:endParaRPr lang="en-US" sz="1000" dirty="0"/>
           </a:p>
@@ -3284,77 +3346,545 @@
       </p:sp>
       <p:sp>
         <p:nvSpPr>
-          <p:cNvPr id="89" name="결과물"/>
-          <p:cNvSpPr txBox="1"/>
-          <p:nvPr/>
-        </p:nvSpPr>
-        <p:spPr>
-          <a:xfrm>
-            <a:off x="6451600" y="2753023"/>
-            <a:ext cx="411262" cy="165100"/>
-          </a:xfrm>
-          <a:prstGeom prst="rect">
-            <a:avLst/>
-          </a:prstGeom>
-          <a:noFill/>
-          <a:ln/>
-        </p:spPr>
-        <p:txBody>
-          <a:bodyPr wrap="none" lIns="0" tIns="0" rIns="0" bIns="0" rtlCol="0" anchor="ctr"/>
-          <a:lstStyle/>
-          <a:p>
-            <a:pPr algn="l" indent="0" marL="0">
-              <a:buNone/>
-            </a:pPr>
-            <a:r>
-              <a:rPr lang="ko-KR" altLang="en-US" sz="1100" spc="-22" kern="0" dirty="0">
-                <a:solidFill>
-                  <a:srgbClr val="8A5A00"/>
+          <p:cNvPr id="87" name="리모델링 앱 개발 아이디어 시연 영상"/>
+          <p:cNvSpPr txBox="1"/>
+          <p:nvPr/>
+        </p:nvSpPr>
+        <p:spPr>
+          <a:xfrm>
+            <a:off x="6273800" y="3319264"/>
+            <a:ext cx="1871323" cy="152400"/>
+          </a:xfrm>
+          <a:prstGeom prst="rect">
+            <a:avLst/>
+          </a:prstGeom>
+          <a:noFill/>
+          <a:ln/>
+        </p:spPr>
+        <p:txBody>
+          <a:bodyPr wrap="none" lIns="0" tIns="0" rIns="0" bIns="0" rtlCol="0" anchor="ctr"/>
+          <a:lstStyle/>
+          <a:p>
+            <a:pPr algn="l" indent="0" marL="0">
+              <a:buNone/>
+            </a:pPr>
+            <a:r>
+              <a:rPr lang="ko-KR" altLang="en-US" sz="1000" spc="-20" kern="0" dirty="0">
+                <a:solidFill>
+                  <a:srgbClr val="4B5568"/>
+                </a:solidFill>
+                <a:latin typeface="Paperlogy 6 SemiBold" pitchFamily="34" charset="0"/>
+                <a:ea typeface="Paperlogy 6 SemiBold" pitchFamily="34" charset="-127"/>
+                <a:cs typeface="Paperlogy 6 SemiBold" pitchFamily="34" charset="-120"/>
+              </a:rPr>
+              <a:t>리모델링 앱 개발 아이디어 시연 영상</a:t>
+            </a:r>
+            <a:endParaRPr lang="en-US" sz="1000" dirty="0"/>
+          </a:p>
+        </p:txBody>
+      </p:sp>
+      <p:sp>
+        <p:nvSpPr>
+          <p:cNvPr id="88" name="학생 BIM 경진대회"/>
+          <p:cNvSpPr txBox="1"/>
+          <p:nvPr/>
+        </p:nvSpPr>
+        <p:spPr>
+          <a:xfrm>
+            <a:off x="9902924" y="3319264"/>
+            <a:ext cx="1016171" cy="152400"/>
+          </a:xfrm>
+          <a:prstGeom prst="rect">
+            <a:avLst/>
+          </a:prstGeom>
+          <a:noFill/>
+          <a:ln/>
+        </p:spPr>
+        <p:txBody>
+          <a:bodyPr wrap="none" lIns="0" tIns="0" rIns="0" bIns="0" rtlCol="0" anchor="ctr"/>
+          <a:lstStyle/>
+          <a:p>
+            <a:pPr algn="l" indent="0" marL="0">
+              <a:buNone/>
+            </a:pPr>
+            <a:r>
+              <a:rPr lang="ko-KR" altLang="en-US" sz="1000" spc="-20" kern="0" dirty="0">
+                <a:solidFill>
+                  <a:srgbClr val="0B2147"/>
+                </a:solidFill>
+                <a:latin typeface="Paperlogy 7 Bold" pitchFamily="34" charset="0"/>
+                <a:ea typeface="Paperlogy 7 Bold" pitchFamily="34" charset="-127"/>
+                <a:cs typeface="Paperlogy 7 Bold" pitchFamily="34" charset="-120"/>
+              </a:rPr>
+              <a:t>학생 BIM 경진대회</a:t>
+            </a:r>
+            <a:endParaRPr lang="en-US" sz="1000" dirty="0"/>
+          </a:p>
+        </p:txBody>
+      </p:sp>
+      <p:sp>
+        <p:nvSpPr>
+          <p:cNvPr id="89" name="01"/>
+          <p:cNvSpPr txBox="1"/>
+          <p:nvPr/>
+        </p:nvSpPr>
+        <p:spPr>
+          <a:xfrm>
+            <a:off x="825500" y="3652639"/>
+            <a:ext cx="221357" cy="146050"/>
+          </a:xfrm>
+          <a:prstGeom prst="rect">
+            <a:avLst/>
+          </a:prstGeom>
+          <a:noFill/>
+          <a:ln/>
+        </p:spPr>
+        <p:txBody>
+          <a:bodyPr wrap="none" lIns="0" tIns="0" rIns="0" bIns="0" rtlCol="0" anchor="ctr"/>
+          <a:lstStyle/>
+          <a:p>
+            <a:pPr algn="l" indent="0" marL="0">
+              <a:buNone/>
+            </a:pPr>
+            <a:r>
+              <a:rPr lang="ko-KR" altLang="en-US" sz="950" spc="38" kern="0" dirty="0">
+                <a:solidFill>
+                  <a:srgbClr val="8691A5"/>
                 </a:solidFill>
                 <a:latin typeface="Paperlogy 8 ExtraBold" pitchFamily="34" charset="0"/>
                 <a:ea typeface="Paperlogy 8 ExtraBold" pitchFamily="34" charset="-127"/>
                 <a:cs typeface="Paperlogy 8 ExtraBold" pitchFamily="34" charset="-120"/>
               </a:rPr>
-              <a:t>결과물</a:t>
-            </a:r>
-            <a:endParaRPr lang="en-US" sz="1100" dirty="0"/>
-          </a:p>
-        </p:txBody>
-      </p:sp>
-      <p:sp>
-        <p:nvSpPr>
-          <p:cNvPr id="90" name="유닛 모듈러 기반 사용자 맞춤형 리모델링 앱 개발 아이디어 시연 영상"/>
-          <p:cNvSpPr txBox="1"/>
-          <p:nvPr/>
-        </p:nvSpPr>
-        <p:spPr>
-          <a:xfrm>
-            <a:off x="6977162" y="2753023"/>
-            <a:ext cx="3862016" cy="165100"/>
-          </a:xfrm>
-          <a:prstGeom prst="rect">
-            <a:avLst/>
-          </a:prstGeom>
-          <a:noFill/>
-          <a:ln/>
-        </p:spPr>
-        <p:txBody>
-          <a:bodyPr wrap="none" lIns="0" tIns="0" rIns="0" bIns="0" rtlCol="0" anchor="ctr"/>
-          <a:lstStyle/>
-          <a:p>
-            <a:pPr algn="l" indent="0" marL="0">
-              <a:buNone/>
-            </a:pPr>
-            <a:r>
-              <a:rPr lang="ko-KR" altLang="en-US" sz="1100" spc="-22" kern="0" dirty="0">
-                <a:solidFill>
-                  <a:srgbClr val="8A5A00"/>
+              <a:t>01</a:t>
+            </a:r>
+            <a:endParaRPr lang="en-US" sz="950" dirty="0"/>
+          </a:p>
+        </p:txBody>
+      </p:sp>
+      <p:sp>
+        <p:nvSpPr>
+          <p:cNvPr id="90" name="CONFLICT"/>
+          <p:cNvSpPr txBox="1"/>
+          <p:nvPr/>
+        </p:nvSpPr>
+        <p:spPr>
+          <a:xfrm>
+            <a:off x="1059557" y="3652639"/>
+            <a:ext cx="845939" cy="146050"/>
+          </a:xfrm>
+          <a:prstGeom prst="rect">
+            <a:avLst/>
+          </a:prstGeom>
+          <a:noFill/>
+          <a:ln/>
+        </p:spPr>
+        <p:txBody>
+          <a:bodyPr wrap="none" lIns="0" tIns="0" rIns="0" bIns="0" rtlCol="0" anchor="ctr"/>
+          <a:lstStyle/>
+          <a:p>
+            <a:pPr algn="l" indent="0" marL="0">
+              <a:buNone/>
+            </a:pPr>
+            <a:r>
+              <a:rPr lang="ko-KR" altLang="en-US" sz="950" spc="152" kern="0" dirty="0">
+                <a:solidFill>
+                  <a:srgbClr val="2A78DD"/>
+                </a:solidFill>
+                <a:latin typeface="Paperlogy 7 Bold" pitchFamily="34" charset="0"/>
+                <a:ea typeface="Paperlogy 7 Bold" pitchFamily="34" charset="-127"/>
+                <a:cs typeface="Paperlogy 7 Bold" pitchFamily="34" charset="-120"/>
+              </a:rPr>
+              <a:t>CONFLICT</a:t>
+            </a:r>
+            <a:endParaRPr lang="en-US" sz="950" dirty="0"/>
+          </a:p>
+        </p:txBody>
+      </p:sp>
+      <p:sp>
+        <p:nvSpPr>
+          <p:cNvPr id="91" name="02"/>
+          <p:cNvSpPr txBox="1"/>
+          <p:nvPr/>
+        </p:nvSpPr>
+        <p:spPr>
+          <a:xfrm>
+            <a:off x="2730500" y="3652639"/>
+            <a:ext cx="221357" cy="146050"/>
+          </a:xfrm>
+          <a:prstGeom prst="rect">
+            <a:avLst/>
+          </a:prstGeom>
+          <a:noFill/>
+          <a:ln/>
+        </p:spPr>
+        <p:txBody>
+          <a:bodyPr wrap="none" lIns="0" tIns="0" rIns="0" bIns="0" rtlCol="0" anchor="ctr"/>
+          <a:lstStyle/>
+          <a:p>
+            <a:pPr algn="l" indent="0" marL="0">
+              <a:buNone/>
+            </a:pPr>
+            <a:r>
+              <a:rPr lang="ko-KR" altLang="en-US" sz="950" spc="38" kern="0" dirty="0">
+                <a:solidFill>
+                  <a:srgbClr val="8691A5"/>
+                </a:solidFill>
+                <a:latin typeface="Paperlogy 8 ExtraBold" pitchFamily="34" charset="0"/>
+                <a:ea typeface="Paperlogy 8 ExtraBold" pitchFamily="34" charset="-127"/>
+                <a:cs typeface="Paperlogy 8 ExtraBold" pitchFamily="34" charset="-120"/>
+              </a:rPr>
+              <a:t>02</a:t>
+            </a:r>
+            <a:endParaRPr lang="en-US" sz="950" dirty="0"/>
+          </a:p>
+        </p:txBody>
+      </p:sp>
+      <p:sp>
+        <p:nvSpPr>
+          <p:cNvPr id="92" name="ALIGN"/>
+          <p:cNvSpPr txBox="1"/>
+          <p:nvPr/>
+        </p:nvSpPr>
+        <p:spPr>
+          <a:xfrm>
+            <a:off x="2964557" y="3652639"/>
+            <a:ext cx="542330" cy="146050"/>
+          </a:xfrm>
+          <a:prstGeom prst="rect">
+            <a:avLst/>
+          </a:prstGeom>
+          <a:noFill/>
+          <a:ln/>
+        </p:spPr>
+        <p:txBody>
+          <a:bodyPr wrap="none" lIns="0" tIns="0" rIns="0" bIns="0" rtlCol="0" anchor="ctr"/>
+          <a:lstStyle/>
+          <a:p>
+            <a:pPr algn="l" indent="0" marL="0">
+              <a:buNone/>
+            </a:pPr>
+            <a:r>
+              <a:rPr lang="ko-KR" altLang="en-US" sz="950" spc="152" kern="0" dirty="0">
+                <a:solidFill>
+                  <a:srgbClr val="2A78DD"/>
+                </a:solidFill>
+                <a:latin typeface="Paperlogy 7 Bold" pitchFamily="34" charset="0"/>
+                <a:ea typeface="Paperlogy 7 Bold" pitchFamily="34" charset="-127"/>
+                <a:cs typeface="Paperlogy 7 Bold" pitchFamily="34" charset="-120"/>
+              </a:rPr>
+              <a:t>ALIGN</a:t>
+            </a:r>
+            <a:endParaRPr lang="en-US" sz="950" dirty="0"/>
+          </a:p>
+        </p:txBody>
+      </p:sp>
+      <p:sp>
+        <p:nvSpPr>
+          <p:cNvPr id="93" name="03"/>
+          <p:cNvSpPr txBox="1"/>
+          <p:nvPr/>
+        </p:nvSpPr>
+        <p:spPr>
+          <a:xfrm>
+            <a:off x="4889500" y="3652639"/>
+            <a:ext cx="221357" cy="146050"/>
+          </a:xfrm>
+          <a:prstGeom prst="rect">
+            <a:avLst/>
+          </a:prstGeom>
+          <a:noFill/>
+          <a:ln/>
+        </p:spPr>
+        <p:txBody>
+          <a:bodyPr wrap="none" lIns="0" tIns="0" rIns="0" bIns="0" rtlCol="0" anchor="ctr"/>
+          <a:lstStyle/>
+          <a:p>
+            <a:pPr algn="l" indent="0" marL="0">
+              <a:buNone/>
+            </a:pPr>
+            <a:r>
+              <a:rPr lang="ko-KR" altLang="en-US" sz="950" spc="38" kern="0" dirty="0">
+                <a:solidFill>
+                  <a:srgbClr val="8691A5"/>
+                </a:solidFill>
+                <a:latin typeface="Paperlogy 8 ExtraBold" pitchFamily="34" charset="0"/>
+                <a:ea typeface="Paperlogy 8 ExtraBold" pitchFamily="34" charset="-127"/>
+                <a:cs typeface="Paperlogy 8 ExtraBold" pitchFamily="34" charset="-120"/>
+              </a:rPr>
+              <a:t>03</a:t>
+            </a:r>
+            <a:endParaRPr lang="en-US" sz="950" dirty="0"/>
+          </a:p>
+        </p:txBody>
+      </p:sp>
+      <p:sp>
+        <p:nvSpPr>
+          <p:cNvPr id="94" name="ONE TEAM"/>
+          <p:cNvSpPr txBox="1"/>
+          <p:nvPr/>
+        </p:nvSpPr>
+        <p:spPr>
+          <a:xfrm>
+            <a:off x="5123557" y="3652639"/>
+            <a:ext cx="878681" cy="146050"/>
+          </a:xfrm>
+          <a:prstGeom prst="rect">
+            <a:avLst/>
+          </a:prstGeom>
+          <a:noFill/>
+          <a:ln/>
+        </p:spPr>
+        <p:txBody>
+          <a:bodyPr wrap="none" lIns="0" tIns="0" rIns="0" bIns="0" rtlCol="0" anchor="ctr"/>
+          <a:lstStyle/>
+          <a:p>
+            <a:pPr algn="l" indent="0" marL="0">
+              <a:buNone/>
+            </a:pPr>
+            <a:r>
+              <a:rPr lang="ko-KR" altLang="en-US" sz="950" spc="152" kern="0" dirty="0">
+                <a:solidFill>
+                  <a:srgbClr val="2A78DD"/>
+                </a:solidFill>
+                <a:latin typeface="Paperlogy 7 Bold" pitchFamily="34" charset="0"/>
+                <a:ea typeface="Paperlogy 7 Bold" pitchFamily="34" charset="-127"/>
+                <a:cs typeface="Paperlogy 7 Bold" pitchFamily="34" charset="-120"/>
+              </a:rPr>
+              <a:t>ONE TEAM</a:t>
+            </a:r>
+            <a:endParaRPr lang="en-US" sz="950" dirty="0"/>
+          </a:p>
+        </p:txBody>
+      </p:sp>
+      <p:sp>
+        <p:nvSpPr>
+          <p:cNvPr id="95" name="04"/>
+          <p:cNvSpPr txBox="1"/>
+          <p:nvPr/>
+        </p:nvSpPr>
+        <p:spPr>
+          <a:xfrm>
+            <a:off x="10528300" y="3652639"/>
+            <a:ext cx="221357" cy="146050"/>
+          </a:xfrm>
+          <a:prstGeom prst="rect">
+            <a:avLst/>
+          </a:prstGeom>
+          <a:noFill/>
+          <a:ln/>
+        </p:spPr>
+        <p:txBody>
+          <a:bodyPr wrap="none" lIns="0" tIns="0" rIns="0" bIns="0" rtlCol="0" anchor="ctr"/>
+          <a:lstStyle/>
+          <a:p>
+            <a:pPr algn="l" indent="0" marL="0">
+              <a:buNone/>
+            </a:pPr>
+            <a:r>
+              <a:rPr lang="ko-KR" altLang="en-US" sz="950" spc="38" kern="0" dirty="0">
+                <a:solidFill>
+                  <a:srgbClr val="8691A5"/>
+                </a:solidFill>
+                <a:latin typeface="Paperlogy 8 ExtraBold" pitchFamily="34" charset="0"/>
+                <a:ea typeface="Paperlogy 8 ExtraBold" pitchFamily="34" charset="-127"/>
+                <a:cs typeface="Paperlogy 8 ExtraBold" pitchFamily="34" charset="-120"/>
+              </a:rPr>
+              <a:t>04</a:t>
+            </a:r>
+            <a:endParaRPr lang="en-US" sz="950" dirty="0"/>
+          </a:p>
+        </p:txBody>
+      </p:sp>
+      <p:sp>
+        <p:nvSpPr>
+          <p:cNvPr id="96" name="RESULT"/>
+          <p:cNvSpPr txBox="1"/>
+          <p:nvPr/>
+        </p:nvSpPr>
+        <p:spPr>
+          <a:xfrm>
+            <a:off x="10762357" y="3652639"/>
+            <a:ext cx="646311" cy="146050"/>
+          </a:xfrm>
+          <a:prstGeom prst="rect">
+            <a:avLst/>
+          </a:prstGeom>
+          <a:noFill/>
+          <a:ln/>
+        </p:spPr>
+        <p:txBody>
+          <a:bodyPr wrap="none" lIns="0" tIns="0" rIns="0" bIns="0" rtlCol="0" anchor="ctr"/>
+          <a:lstStyle/>
+          <a:p>
+            <a:pPr algn="l" indent="0" marL="0">
+              <a:buNone/>
+            </a:pPr>
+            <a:r>
+              <a:rPr lang="ko-KR" altLang="en-US" sz="950" spc="152" kern="0" dirty="0">
+                <a:solidFill>
+                  <a:srgbClr val="2A78DD"/>
+                </a:solidFill>
+                <a:latin typeface="Paperlogy 7 Bold" pitchFamily="34" charset="0"/>
+                <a:ea typeface="Paperlogy 7 Bold" pitchFamily="34" charset="-127"/>
+                <a:cs typeface="Paperlogy 7 Bold" pitchFamily="34" charset="-120"/>
+              </a:rPr>
+              <a:t>RESULT</a:t>
+            </a:r>
+            <a:endParaRPr lang="en-US" sz="950" dirty="0"/>
+          </a:p>
+        </p:txBody>
+      </p:sp>
+      <p:sp>
+        <p:nvSpPr>
+          <p:cNvPr id="97" name="주제 선정 의견 충돌"/>
+          <p:cNvSpPr txBox="1"/>
+          <p:nvPr/>
+        </p:nvSpPr>
+        <p:spPr>
+          <a:xfrm>
+            <a:off x="609600" y="3852664"/>
+            <a:ext cx="1378698" cy="209550"/>
+          </a:xfrm>
+          <a:prstGeom prst="rect">
+            <a:avLst/>
+          </a:prstGeom>
+          <a:noFill/>
+          <a:ln/>
+        </p:spPr>
+        <p:txBody>
+          <a:bodyPr wrap="none" lIns="0" tIns="0" rIns="0" bIns="0" rtlCol="0" anchor="ctr"/>
+          <a:lstStyle/>
+          <a:p>
+            <a:pPr algn="l" indent="0" marL="0">
+              <a:buNone/>
+            </a:pPr>
+            <a:r>
+              <a:rPr lang="ko-KR" altLang="en-US" sz="1400" spc="-49" kern="0" dirty="0">
+                <a:solidFill>
+                  <a:srgbClr val="0B2147"/>
+                </a:solidFill>
+                <a:latin typeface="Paperlogy 7 Bold" pitchFamily="34" charset="0"/>
+                <a:ea typeface="Paperlogy 7 Bold" pitchFamily="34" charset="-127"/>
+                <a:cs typeface="Paperlogy 7 Bold" pitchFamily="34" charset="-120"/>
+              </a:rPr>
+              <a:t>주제 선정 의견 충돌</a:t>
+            </a:r>
+            <a:endParaRPr lang="en-US" sz="1400" dirty="0"/>
+          </a:p>
+        </p:txBody>
+      </p:sp>
+      <p:sp>
+        <p:nvSpPr>
+          <p:cNvPr id="98" name="참신성"/>
+          <p:cNvSpPr txBox="1"/>
+          <p:nvPr/>
+        </p:nvSpPr>
+        <p:spPr>
+          <a:xfrm>
+            <a:off x="911126" y="5033070"/>
+            <a:ext cx="362148" cy="146050"/>
+          </a:xfrm>
+          <a:prstGeom prst="rect">
+            <a:avLst/>
+          </a:prstGeom>
+          <a:noFill/>
+          <a:ln/>
+        </p:spPr>
+        <p:txBody>
+          <a:bodyPr wrap="none" lIns="0" tIns="0" rIns="0" bIns="0" rtlCol="0" anchor="ctr"/>
+          <a:lstStyle/>
+          <a:p>
+            <a:pPr algn="l" indent="0" marL="0">
+              <a:buNone/>
+            </a:pPr>
+            <a:r>
+              <a:rPr lang="ko-KR" altLang="en-US" sz="950" spc="-19" kern="0" dirty="0">
+                <a:solidFill>
+                  <a:srgbClr val="4B5568"/>
+                </a:solidFill>
+                <a:latin typeface="Paperlogy 7 Bold" pitchFamily="34" charset="0"/>
+                <a:ea typeface="Paperlogy 7 Bold" pitchFamily="34" charset="-127"/>
+                <a:cs typeface="Paperlogy 7 Bold" pitchFamily="34" charset="-120"/>
+              </a:rPr>
+              <a:t>참신성</a:t>
+            </a:r>
+            <a:endParaRPr lang="en-US" sz="950" dirty="0"/>
+          </a:p>
+        </p:txBody>
+      </p:sp>
+      <p:sp>
+        <p:nvSpPr>
+          <p:cNvPr id="99" name="구현 가능성"/>
+          <p:cNvSpPr txBox="1"/>
+          <p:nvPr/>
+        </p:nvSpPr>
+        <p:spPr>
+          <a:xfrm>
+            <a:off x="1544637" y="5033070"/>
+            <a:ext cx="593725" cy="146050"/>
+          </a:xfrm>
+          <a:prstGeom prst="rect">
+            <a:avLst/>
+          </a:prstGeom>
+          <a:noFill/>
+          <a:ln/>
+        </p:spPr>
+        <p:txBody>
+          <a:bodyPr wrap="none" lIns="0" tIns="0" rIns="0" bIns="0" rtlCol="0" anchor="ctr"/>
+          <a:lstStyle/>
+          <a:p>
+            <a:pPr algn="l" indent="0" marL="0">
+              <a:buNone/>
+            </a:pPr>
+            <a:r>
+              <a:rPr lang="ko-KR" altLang="en-US" sz="950" spc="-19" kern="0" dirty="0">
+                <a:solidFill>
+                  <a:srgbClr val="4B5568"/>
+                </a:solidFill>
+                <a:latin typeface="Paperlogy 7 Bold" pitchFamily="34" charset="0"/>
+                <a:ea typeface="Paperlogy 7 Bold" pitchFamily="34" charset="-127"/>
+                <a:cs typeface="Paperlogy 7 Bold" pitchFamily="34" charset="-120"/>
+              </a:rPr>
+              <a:t>구현 가능성</a:t>
+            </a:r>
+            <a:endParaRPr lang="en-US" sz="950" dirty="0"/>
+          </a:p>
+        </p:txBody>
+      </p:sp>
+      <p:sp>
+        <p:nvSpPr>
+          <p:cNvPr id="100" name="마감 3주 전까지"/>
+          <p:cNvSpPr txBox="1"/>
+          <p:nvPr/>
+        </p:nvSpPr>
+        <p:spPr>
+          <a:xfrm>
+            <a:off x="889000" y="5360194"/>
+            <a:ext cx="912471" cy="165100"/>
+          </a:xfrm>
+          <a:prstGeom prst="rect">
+            <a:avLst/>
+          </a:prstGeom>
+          <a:noFill/>
+          <a:ln/>
+        </p:spPr>
+        <p:txBody>
+          <a:bodyPr wrap="none" lIns="0" tIns="0" rIns="0" bIns="0" rtlCol="0" anchor="ctr"/>
+          <a:lstStyle/>
+          <a:p>
+            <a:pPr algn="l" indent="0" marL="0">
+              <a:buNone/>
+            </a:pPr>
+            <a:r>
+              <a:rPr lang="ko-KR" altLang="en-US" sz="1100" spc="-28" kern="0" dirty="0">
+                <a:solidFill>
+                  <a:srgbClr val="1C2536"/>
                 </a:solidFill>
                 <a:latin typeface="Paperlogy 6 SemiBold" pitchFamily="34" charset="0"/>
                 <a:ea typeface="Paperlogy 6 SemiBold" pitchFamily="34" charset="-127"/>
                 <a:cs typeface="Paperlogy 6 SemiBold" pitchFamily="34" charset="-120"/>
               </a:rPr>
-              <a:t>유닛 모듈러 기반 사용자 맞춤형 리모델링 앱 개발 아이디어 시연 영상</a:t>
+              <a:t>마감 3주 전까지</a:t>
             </a:r>
             <a:endParaRPr lang="en-US" sz="1100" dirty="0"/>
           </a:p>
@@ -3362,326 +3892,989 @@
       </p:sp>
       <p:sp>
         <p:nvSpPr>
-          <p:cNvPr id="91" name="01"/>
-          <p:cNvSpPr txBox="1"/>
-          <p:nvPr/>
-        </p:nvSpPr>
-        <p:spPr>
-          <a:xfrm>
-            <a:off x="825500" y="3270250"/>
-            <a:ext cx="221357" cy="146050"/>
-          </a:xfrm>
-          <a:prstGeom prst="rect">
-            <a:avLst/>
-          </a:prstGeom>
-          <a:noFill/>
-          <a:ln/>
-        </p:spPr>
-        <p:txBody>
-          <a:bodyPr wrap="none" lIns="0" tIns="0" rIns="0" bIns="0" rtlCol="0" anchor="ctr"/>
-          <a:lstStyle/>
-          <a:p>
-            <a:pPr algn="l" indent="0" marL="0">
-              <a:buNone/>
-            </a:pPr>
-            <a:r>
-              <a:rPr lang="ko-KR" altLang="en-US" sz="950" spc="38" kern="0" dirty="0">
-                <a:solidFill>
-                  <a:srgbClr val="8691A5"/>
+          <p:cNvPr id="101" name="주제 미확정"/>
+          <p:cNvSpPr txBox="1"/>
+          <p:nvPr/>
+        </p:nvSpPr>
+        <p:spPr>
+          <a:xfrm>
+            <a:off x="889000" y="5555754"/>
+            <a:ext cx="675283" cy="165100"/>
+          </a:xfrm>
+          <a:prstGeom prst="rect">
+            <a:avLst/>
+          </a:prstGeom>
+          <a:noFill/>
+          <a:ln/>
+        </p:spPr>
+        <p:txBody>
+          <a:bodyPr wrap="none" lIns="0" tIns="0" rIns="0" bIns="0" rtlCol="0" anchor="ctr"/>
+          <a:lstStyle/>
+          <a:p>
+            <a:pPr algn="l" indent="0" marL="0">
+              <a:buNone/>
+            </a:pPr>
+            <a:r>
+              <a:rPr lang="ko-KR" altLang="en-US" sz="1100" spc="-28" kern="0" dirty="0">
+                <a:solidFill>
+                  <a:srgbClr val="1C2536"/>
+                </a:solidFill>
+                <a:latin typeface="Paperlogy 6 SemiBold" pitchFamily="34" charset="0"/>
+                <a:ea typeface="Paperlogy 6 SemiBold" pitchFamily="34" charset="-127"/>
+                <a:cs typeface="Paperlogy 6 SemiBold" pitchFamily="34" charset="-120"/>
+              </a:rPr>
+              <a:t>주제 미확정</a:t>
+            </a:r>
+            <a:endParaRPr lang="en-US" sz="1100" dirty="0"/>
+          </a:p>
+        </p:txBody>
+      </p:sp>
+      <p:sp>
+        <p:nvSpPr>
+          <p:cNvPr id="102" name="의견 조율 · 주제 확정"/>
+          <p:cNvSpPr txBox="1"/>
+          <p:nvPr/>
+        </p:nvSpPr>
+        <p:spPr>
+          <a:xfrm>
+            <a:off x="2514600" y="3852664"/>
+            <a:ext cx="1467674" cy="209550"/>
+          </a:xfrm>
+          <a:prstGeom prst="rect">
+            <a:avLst/>
+          </a:prstGeom>
+          <a:noFill/>
+          <a:ln/>
+        </p:spPr>
+        <p:txBody>
+          <a:bodyPr wrap="none" lIns="0" tIns="0" rIns="0" bIns="0" rtlCol="0" anchor="ctr"/>
+          <a:lstStyle/>
+          <a:p>
+            <a:pPr algn="l" indent="0" marL="0">
+              <a:buNone/>
+            </a:pPr>
+            <a:r>
+              <a:rPr lang="ko-KR" altLang="en-US" sz="1400" spc="-49" kern="0" dirty="0">
+                <a:solidFill>
+                  <a:srgbClr val="0B2147"/>
+                </a:solidFill>
+                <a:latin typeface="Paperlogy 7 Bold" pitchFamily="34" charset="0"/>
+                <a:ea typeface="Paperlogy 7 Bold" pitchFamily="34" charset="-127"/>
+                <a:cs typeface="Paperlogy 7 Bold" pitchFamily="34" charset="-120"/>
+              </a:rPr>
+              <a:t>의견 조율 · 주제 확정</a:t>
+            </a:r>
+            <a:endParaRPr lang="en-US" sz="1400" dirty="0"/>
+          </a:p>
+        </p:txBody>
+      </p:sp>
+      <p:sp>
+        <p:nvSpPr>
+          <p:cNvPr id="103" name="경청"/>
+          <p:cNvSpPr txBox="1"/>
+          <p:nvPr/>
+        </p:nvSpPr>
+        <p:spPr>
+          <a:xfrm>
+            <a:off x="2931517" y="4441230"/>
+            <a:ext cx="258366" cy="146050"/>
+          </a:xfrm>
+          <a:prstGeom prst="rect">
+            <a:avLst/>
+          </a:prstGeom>
+          <a:noFill/>
+          <a:ln/>
+        </p:spPr>
+        <p:txBody>
+          <a:bodyPr wrap="none" lIns="0" tIns="0" rIns="0" bIns="0" rtlCol="0" anchor="ctr"/>
+          <a:lstStyle/>
+          <a:p>
+            <a:pPr algn="ctr" indent="0" marL="0">
+              <a:buNone/>
+            </a:pPr>
+            <a:r>
+              <a:rPr lang="ko-KR" altLang="en-US" sz="950" spc="-19" kern="0" dirty="0">
+                <a:solidFill>
+                  <a:srgbClr val="1C2536"/>
+                </a:solidFill>
+                <a:latin typeface="Paperlogy 7 Bold" pitchFamily="34" charset="0"/>
+                <a:ea typeface="Paperlogy 7 Bold" pitchFamily="34" charset="-127"/>
+                <a:cs typeface="Paperlogy 7 Bold" pitchFamily="34" charset="-120"/>
+              </a:rPr>
+              <a:t>경청</a:t>
+            </a:r>
+            <a:endParaRPr lang="en-US" sz="950" dirty="0"/>
+          </a:p>
+        </p:txBody>
+      </p:sp>
+      <p:sp>
+        <p:nvSpPr>
+          <p:cNvPr id="104" name="수상작 분석"/>
+          <p:cNvSpPr txBox="1"/>
+          <p:nvPr/>
+        </p:nvSpPr>
+        <p:spPr>
+          <a:xfrm>
+            <a:off x="2763838" y="4758730"/>
+            <a:ext cx="593725" cy="146050"/>
+          </a:xfrm>
+          <a:prstGeom prst="rect">
+            <a:avLst/>
+          </a:prstGeom>
+          <a:noFill/>
+          <a:ln/>
+        </p:spPr>
+        <p:txBody>
+          <a:bodyPr wrap="none" lIns="0" tIns="0" rIns="0" bIns="0" rtlCol="0" anchor="ctr"/>
+          <a:lstStyle/>
+          <a:p>
+            <a:pPr algn="ctr" indent="0" marL="0">
+              <a:buNone/>
+            </a:pPr>
+            <a:r>
+              <a:rPr lang="ko-KR" altLang="en-US" sz="950" spc="-19" kern="0" dirty="0">
+                <a:solidFill>
+                  <a:srgbClr val="1C2536"/>
+                </a:solidFill>
+                <a:latin typeface="Paperlogy 7 Bold" pitchFamily="34" charset="0"/>
+                <a:ea typeface="Paperlogy 7 Bold" pitchFamily="34" charset="-127"/>
+                <a:cs typeface="Paperlogy 7 Bold" pitchFamily="34" charset="-120"/>
+              </a:rPr>
+              <a:t>수상작 분석</a:t>
+            </a:r>
+            <a:endParaRPr lang="en-US" sz="950" dirty="0"/>
+          </a:p>
+        </p:txBody>
+      </p:sp>
+      <p:sp>
+        <p:nvSpPr>
+          <p:cNvPr id="105" name="교수님 조언"/>
+          <p:cNvSpPr txBox="1"/>
+          <p:nvPr/>
+        </p:nvSpPr>
+        <p:spPr>
+          <a:xfrm>
+            <a:off x="2763838" y="5076230"/>
+            <a:ext cx="593725" cy="146050"/>
+          </a:xfrm>
+          <a:prstGeom prst="rect">
+            <a:avLst/>
+          </a:prstGeom>
+          <a:noFill/>
+          <a:ln/>
+        </p:spPr>
+        <p:txBody>
+          <a:bodyPr wrap="none" lIns="0" tIns="0" rIns="0" bIns="0" rtlCol="0" anchor="ctr"/>
+          <a:lstStyle/>
+          <a:p>
+            <a:pPr algn="ctr" indent="0" marL="0">
+              <a:buNone/>
+            </a:pPr>
+            <a:r>
+              <a:rPr lang="ko-KR" altLang="en-US" sz="950" spc="-19" kern="0" dirty="0">
+                <a:solidFill>
+                  <a:srgbClr val="1C2536"/>
+                </a:solidFill>
+                <a:latin typeface="Paperlogy 7 Bold" pitchFamily="34" charset="0"/>
+                <a:ea typeface="Paperlogy 7 Bold" pitchFamily="34" charset="-127"/>
+                <a:cs typeface="Paperlogy 7 Bold" pitchFamily="34" charset="-120"/>
+              </a:rPr>
+              <a:t>교수님 조언</a:t>
+            </a:r>
+            <a:endParaRPr lang="en-US" sz="950" dirty="0"/>
+          </a:p>
+        </p:txBody>
+      </p:sp>
+      <p:sp>
+        <p:nvSpPr>
+          <p:cNvPr id="106" name="판단"/>
+          <p:cNvSpPr txBox="1"/>
+          <p:nvPr/>
+        </p:nvSpPr>
+        <p:spPr>
+          <a:xfrm>
+            <a:off x="3897610" y="4679355"/>
+            <a:ext cx="269280" cy="152400"/>
+          </a:xfrm>
+          <a:prstGeom prst="rect">
+            <a:avLst/>
+          </a:prstGeom>
+          <a:noFill/>
+          <a:ln/>
+        </p:spPr>
+        <p:txBody>
+          <a:bodyPr wrap="none" lIns="0" tIns="0" rIns="0" bIns="0" rtlCol="0" anchor="ctr"/>
+          <a:lstStyle/>
+          <a:p>
+            <a:pPr algn="ctr" indent="0" marL="0">
+              <a:buNone/>
+            </a:pPr>
+            <a:r>
+              <a:rPr lang="ko-KR" altLang="en-US" sz="1000" spc="-20" kern="0" dirty="0">
+                <a:solidFill>
+                  <a:srgbClr val="004B8D"/>
                 </a:solidFill>
                 <a:latin typeface="Paperlogy 8 ExtraBold" pitchFamily="34" charset="0"/>
                 <a:ea typeface="Paperlogy 8 ExtraBold" pitchFamily="34" charset="-127"/>
                 <a:cs typeface="Paperlogy 8 ExtraBold" pitchFamily="34" charset="-120"/>
               </a:rPr>
-              <a:t>01</a:t>
-            </a:r>
-            <a:endParaRPr lang="en-US" sz="950" dirty="0"/>
-          </a:p>
-        </p:txBody>
-      </p:sp>
-      <p:sp>
-        <p:nvSpPr>
-          <p:cNvPr id="92" name="CONFLICT"/>
-          <p:cNvSpPr txBox="1"/>
-          <p:nvPr/>
-        </p:nvSpPr>
-        <p:spPr>
-          <a:xfrm>
-            <a:off x="1059557" y="3270250"/>
-            <a:ext cx="845939" cy="146050"/>
-          </a:xfrm>
-          <a:prstGeom prst="rect">
-            <a:avLst/>
-          </a:prstGeom>
-          <a:noFill/>
-          <a:ln/>
-        </p:spPr>
-        <p:txBody>
-          <a:bodyPr wrap="none" lIns="0" tIns="0" rIns="0" bIns="0" rtlCol="0" anchor="ctr"/>
-          <a:lstStyle/>
-          <a:p>
-            <a:pPr algn="l" indent="0" marL="0">
-              <a:buNone/>
-            </a:pPr>
-            <a:r>
-              <a:rPr lang="ko-KR" altLang="en-US" sz="950" spc="152" kern="0" dirty="0">
-                <a:solidFill>
-                  <a:srgbClr val="2A78DD"/>
+              <a:t>판단</a:t>
+            </a:r>
+            <a:endParaRPr lang="en-US" sz="1000" dirty="0"/>
+          </a:p>
+        </p:txBody>
+      </p:sp>
+      <p:sp>
+        <p:nvSpPr>
+          <p:cNvPr id="107" name="기준"/>
+          <p:cNvSpPr txBox="1"/>
+          <p:nvPr/>
+        </p:nvSpPr>
+        <p:spPr>
+          <a:xfrm>
+            <a:off x="3897610" y="4825405"/>
+            <a:ext cx="269280" cy="152400"/>
+          </a:xfrm>
+          <a:prstGeom prst="rect">
+            <a:avLst/>
+          </a:prstGeom>
+          <a:noFill/>
+          <a:ln/>
+        </p:spPr>
+        <p:txBody>
+          <a:bodyPr wrap="none" lIns="0" tIns="0" rIns="0" bIns="0" rtlCol="0" anchor="ctr"/>
+          <a:lstStyle/>
+          <a:p>
+            <a:pPr algn="ctr" indent="0" marL="0">
+              <a:buNone/>
+            </a:pPr>
+            <a:r>
+              <a:rPr lang="ko-KR" altLang="en-US" sz="1000" spc="-20" kern="0" dirty="0">
+                <a:solidFill>
+                  <a:srgbClr val="004B8D"/>
+                </a:solidFill>
+                <a:latin typeface="Paperlogy 8 ExtraBold" pitchFamily="34" charset="0"/>
+                <a:ea typeface="Paperlogy 8 ExtraBold" pitchFamily="34" charset="-127"/>
+                <a:cs typeface="Paperlogy 8 ExtraBold" pitchFamily="34" charset="-120"/>
+              </a:rPr>
+              <a:t>기준</a:t>
+            </a:r>
+            <a:endParaRPr lang="en-US" sz="1000" dirty="0"/>
+          </a:p>
+        </p:txBody>
+      </p:sp>
+      <p:sp>
+        <p:nvSpPr>
+          <p:cNvPr id="108" name="주제 합의"/>
+          <p:cNvSpPr txBox="1"/>
+          <p:nvPr/>
+        </p:nvSpPr>
+        <p:spPr>
+          <a:xfrm>
+            <a:off x="3358852" y="5510312"/>
+            <a:ext cx="559395" cy="165100"/>
+          </a:xfrm>
+          <a:prstGeom prst="rect">
+            <a:avLst/>
+          </a:prstGeom>
+          <a:noFill/>
+          <a:ln/>
+        </p:spPr>
+        <p:txBody>
+          <a:bodyPr wrap="none" lIns="0" tIns="0" rIns="0" bIns="0" rtlCol="0" anchor="ctr"/>
+          <a:lstStyle/>
+          <a:p>
+            <a:pPr algn="l" indent="0" marL="0">
+              <a:buNone/>
+            </a:pPr>
+            <a:r>
+              <a:rPr lang="ko-KR" altLang="en-US" sz="1100" spc="-22" kern="0" dirty="0">
+                <a:solidFill>
+                  <a:srgbClr val="004B8D"/>
+                </a:solidFill>
+                <a:latin typeface="Paperlogy 8 ExtraBold" pitchFamily="34" charset="0"/>
+                <a:ea typeface="Paperlogy 8 ExtraBold" pitchFamily="34" charset="-127"/>
+                <a:cs typeface="Paperlogy 8 ExtraBold" pitchFamily="34" charset="-120"/>
+              </a:rPr>
+              <a:t>주제 합의</a:t>
+            </a:r>
+            <a:endParaRPr lang="en-US" sz="1100" dirty="0"/>
+          </a:p>
+        </p:txBody>
+      </p:sp>
+      <p:sp>
+        <p:nvSpPr>
+          <p:cNvPr id="109" name="강점 기반 역할 분담 · 지속적인 공유"/>
+          <p:cNvSpPr txBox="1"/>
+          <p:nvPr/>
+        </p:nvSpPr>
+        <p:spPr>
+          <a:xfrm>
+            <a:off x="4673600" y="3852664"/>
+            <a:ext cx="2492994" cy="209550"/>
+          </a:xfrm>
+          <a:prstGeom prst="rect">
+            <a:avLst/>
+          </a:prstGeom>
+          <a:noFill/>
+          <a:ln/>
+        </p:spPr>
+        <p:txBody>
+          <a:bodyPr wrap="none" lIns="0" tIns="0" rIns="0" bIns="0" rtlCol="0" anchor="ctr"/>
+          <a:lstStyle/>
+          <a:p>
+            <a:pPr algn="l" indent="0" marL="0">
+              <a:buNone/>
+            </a:pPr>
+            <a:r>
+              <a:rPr lang="ko-KR" altLang="en-US" sz="1400" spc="-49" kern="0" dirty="0">
+                <a:solidFill>
+                  <a:srgbClr val="0B2147"/>
                 </a:solidFill>
                 <a:latin typeface="Paperlogy 7 Bold" pitchFamily="34" charset="0"/>
                 <a:ea typeface="Paperlogy 7 Bold" pitchFamily="34" charset="-127"/>
                 <a:cs typeface="Paperlogy 7 Bold" pitchFamily="34" charset="-120"/>
               </a:rPr>
-              <a:t>CONFLICT</a:t>
-            </a:r>
-            <a:endParaRPr lang="en-US" sz="950" dirty="0"/>
-          </a:p>
-        </p:txBody>
-      </p:sp>
-      <p:sp>
-        <p:nvSpPr>
-          <p:cNvPr id="93" name="02"/>
-          <p:cNvSpPr txBox="1"/>
-          <p:nvPr/>
-        </p:nvSpPr>
-        <p:spPr>
-          <a:xfrm>
-            <a:off x="2603500" y="3270250"/>
-            <a:ext cx="221357" cy="146050"/>
-          </a:xfrm>
-          <a:prstGeom prst="rect">
-            <a:avLst/>
-          </a:prstGeom>
-          <a:noFill/>
-          <a:ln/>
-        </p:spPr>
-        <p:txBody>
-          <a:bodyPr wrap="none" lIns="0" tIns="0" rIns="0" bIns="0" rtlCol="0" anchor="ctr"/>
-          <a:lstStyle/>
-          <a:p>
-            <a:pPr algn="l" indent="0" marL="0">
-              <a:buNone/>
-            </a:pPr>
-            <a:r>
-              <a:rPr lang="ko-KR" altLang="en-US" sz="950" spc="38" kern="0" dirty="0">
-                <a:solidFill>
-                  <a:srgbClr val="8691A5"/>
+              <a:t>강점 기반 역할 분담 · 지속적인 공유</a:t>
+            </a:r>
+            <a:endParaRPr lang="en-US" sz="1400" dirty="0"/>
+          </a:p>
+        </p:txBody>
+      </p:sp>
+      <p:sp>
+        <p:nvSpPr>
+          <p:cNvPr id="110" name="팀장"/>
+          <p:cNvSpPr txBox="1"/>
+          <p:nvPr/>
+        </p:nvSpPr>
+        <p:spPr>
+          <a:xfrm>
+            <a:off x="5080000" y="4227909"/>
+            <a:ext cx="291108" cy="165100"/>
+          </a:xfrm>
+          <a:prstGeom prst="rect">
+            <a:avLst/>
+          </a:prstGeom>
+          <a:noFill/>
+          <a:ln/>
+        </p:spPr>
+        <p:txBody>
+          <a:bodyPr wrap="none" lIns="0" tIns="0" rIns="0" bIns="0" rtlCol="0" anchor="ctr"/>
+          <a:lstStyle/>
+          <a:p>
+            <a:pPr algn="l" indent="0" marL="0">
+              <a:buNone/>
+            </a:pPr>
+            <a:r>
+              <a:rPr lang="ko-KR" altLang="en-US" sz="1100" spc="-22" kern="0" dirty="0">
+                <a:solidFill>
+                  <a:srgbClr val="0B2147"/>
                 </a:solidFill>
                 <a:latin typeface="Paperlogy 8 ExtraBold" pitchFamily="34" charset="0"/>
                 <a:ea typeface="Paperlogy 8 ExtraBold" pitchFamily="34" charset="-127"/>
                 <a:cs typeface="Paperlogy 8 ExtraBold" pitchFamily="34" charset="-120"/>
               </a:rPr>
-              <a:t>02</a:t>
-            </a:r>
-            <a:endParaRPr lang="en-US" sz="950" dirty="0"/>
-          </a:p>
-        </p:txBody>
-      </p:sp>
-      <p:sp>
-        <p:nvSpPr>
-          <p:cNvPr id="94" name="ALIGN"/>
-          <p:cNvSpPr txBox="1"/>
-          <p:nvPr/>
-        </p:nvSpPr>
-        <p:spPr>
-          <a:xfrm>
-            <a:off x="2837557" y="3270250"/>
-            <a:ext cx="542330" cy="146050"/>
-          </a:xfrm>
-          <a:prstGeom prst="rect">
-            <a:avLst/>
-          </a:prstGeom>
-          <a:noFill/>
-          <a:ln/>
-        </p:spPr>
-        <p:txBody>
-          <a:bodyPr wrap="none" lIns="0" tIns="0" rIns="0" bIns="0" rtlCol="0" anchor="ctr"/>
-          <a:lstStyle/>
-          <a:p>
-            <a:pPr algn="l" indent="0" marL="0">
-              <a:buNone/>
-            </a:pPr>
-            <a:r>
-              <a:rPr lang="ko-KR" altLang="en-US" sz="950" spc="152" kern="0" dirty="0">
-                <a:solidFill>
-                  <a:srgbClr val="2A78DD"/>
+              <a:t>팀장</a:t>
+            </a:r>
+            <a:endParaRPr lang="en-US" sz="1100" dirty="0"/>
+          </a:p>
+        </p:txBody>
+      </p:sp>
+      <p:sp>
+        <p:nvSpPr>
+          <p:cNvPr id="111" name="나"/>
+          <p:cNvSpPr txBox="1"/>
+          <p:nvPr/>
+        </p:nvSpPr>
+        <p:spPr>
+          <a:xfrm>
+            <a:off x="5430143" y="4245372"/>
+            <a:ext cx="148630" cy="139700"/>
+          </a:xfrm>
+          <a:prstGeom prst="rect">
+            <a:avLst/>
+          </a:prstGeom>
+          <a:noFill/>
+          <a:ln/>
+        </p:spPr>
+        <p:txBody>
+          <a:bodyPr wrap="none" lIns="0" tIns="0" rIns="0" bIns="0" rtlCol="0" anchor="ctr"/>
+          <a:lstStyle/>
+          <a:p>
+            <a:pPr algn="l" indent="0" marL="0">
+              <a:buNone/>
+            </a:pPr>
+            <a:r>
+              <a:rPr lang="ko-KR" altLang="en-US" sz="900" spc="-22" kern="0" dirty="0">
+                <a:solidFill>
+                  <a:srgbClr val="FFFFFF"/>
                 </a:solidFill>
                 <a:latin typeface="Paperlogy 7 Bold" pitchFamily="34" charset="0"/>
                 <a:ea typeface="Paperlogy 7 Bold" pitchFamily="34" charset="-127"/>
                 <a:cs typeface="Paperlogy 7 Bold" pitchFamily="34" charset="-120"/>
               </a:rPr>
-              <a:t>ALIGN</a:t>
-            </a:r>
-            <a:endParaRPr lang="en-US" sz="950" dirty="0"/>
-          </a:p>
-        </p:txBody>
-      </p:sp>
-      <p:sp>
-        <p:nvSpPr>
-          <p:cNvPr id="95" name="03"/>
-          <p:cNvSpPr txBox="1"/>
-          <p:nvPr/>
-        </p:nvSpPr>
-        <p:spPr>
-          <a:xfrm>
-            <a:off x="4660900" y="3270250"/>
-            <a:ext cx="221357" cy="146050"/>
-          </a:xfrm>
-          <a:prstGeom prst="rect">
-            <a:avLst/>
-          </a:prstGeom>
-          <a:noFill/>
-          <a:ln/>
-        </p:spPr>
-        <p:txBody>
-          <a:bodyPr wrap="none" lIns="0" tIns="0" rIns="0" bIns="0" rtlCol="0" anchor="ctr"/>
-          <a:lstStyle/>
-          <a:p>
-            <a:pPr algn="l" indent="0" marL="0">
-              <a:buNone/>
-            </a:pPr>
-            <a:r>
-              <a:rPr lang="ko-KR" altLang="en-US" sz="950" spc="38" kern="0" dirty="0">
-                <a:solidFill>
-                  <a:srgbClr val="8691A5"/>
+              <a:t>나</a:t>
+            </a:r>
+            <a:endParaRPr lang="en-US" sz="900" dirty="0"/>
+          </a:p>
+        </p:txBody>
+      </p:sp>
+      <p:sp>
+        <p:nvSpPr>
+          <p:cNvPr id="112" name="프로젝트 총괄"/>
+          <p:cNvSpPr txBox="1"/>
+          <p:nvPr/>
+        </p:nvSpPr>
+        <p:spPr>
+          <a:xfrm>
+            <a:off x="4965700" y="4448572"/>
+            <a:ext cx="794742" cy="165100"/>
+          </a:xfrm>
+          <a:prstGeom prst="rect">
+            <a:avLst/>
+          </a:prstGeom>
+          <a:noFill/>
+          <a:ln/>
+        </p:spPr>
+        <p:txBody>
+          <a:bodyPr wrap="none" lIns="0" tIns="0" rIns="0" bIns="0" rtlCol="0" anchor="ctr"/>
+          <a:lstStyle/>
+          <a:p>
+            <a:pPr algn="l" indent="0" marL="0">
+              <a:buNone/>
+            </a:pPr>
+            <a:r>
+              <a:rPr lang="ko-KR" altLang="en-US" sz="1100" spc="-28" kern="0" dirty="0">
+                <a:solidFill>
+                  <a:srgbClr val="4B5568"/>
+                </a:solidFill>
+                <a:latin typeface="Paperlogy 5 Medium" pitchFamily="34" charset="0"/>
+                <a:ea typeface="Paperlogy 5 Medium" pitchFamily="34" charset="-127"/>
+                <a:cs typeface="Paperlogy 5 Medium" pitchFamily="34" charset="-120"/>
+              </a:rPr>
+              <a:t>프로젝트 총괄</a:t>
+            </a:r>
+            <a:endParaRPr lang="en-US" sz="1100" dirty="0"/>
+          </a:p>
+        </p:txBody>
+      </p:sp>
+      <p:sp>
+        <p:nvSpPr>
+          <p:cNvPr id="113" name="Dynamo"/>
+          <p:cNvSpPr txBox="1"/>
+          <p:nvPr/>
+        </p:nvSpPr>
+        <p:spPr>
+          <a:xfrm>
+            <a:off x="5022850" y="4655542"/>
+            <a:ext cx="539155" cy="139700"/>
+          </a:xfrm>
+          <a:prstGeom prst="rect">
+            <a:avLst/>
+          </a:prstGeom>
+          <a:noFill/>
+          <a:ln/>
+        </p:spPr>
+        <p:txBody>
+          <a:bodyPr wrap="none" lIns="0" tIns="0" rIns="0" bIns="0" rtlCol="0" anchor="ctr"/>
+          <a:lstStyle/>
+          <a:p>
+            <a:pPr algn="l" indent="0" marL="0">
+              <a:buNone/>
+            </a:pPr>
+            <a:r>
+              <a:rPr lang="ko-KR" altLang="en-US" sz="900" spc="-28" kern="0" dirty="0">
+                <a:solidFill>
+                  <a:srgbClr val="004B8D"/>
+                </a:solidFill>
+                <a:latin typeface="Paperlogy 7 Bold" pitchFamily="34" charset="0"/>
+                <a:ea typeface="Paperlogy 7 Bold" pitchFamily="34" charset="-127"/>
+                <a:cs typeface="Paperlogy 7 Bold" pitchFamily="34" charset="-120"/>
+              </a:rPr>
+              <a:t>Dynamo</a:t>
+            </a:r>
+            <a:endParaRPr lang="en-US" sz="900" dirty="0"/>
+          </a:p>
+        </p:txBody>
+      </p:sp>
+      <p:sp>
+        <p:nvSpPr>
+          <p:cNvPr id="114" name="기반 자동화 알고리즘 개발"/>
+          <p:cNvSpPr txBox="1"/>
+          <p:nvPr/>
+        </p:nvSpPr>
+        <p:spPr>
+          <a:xfrm>
+            <a:off x="5619155" y="4644132"/>
+            <a:ext cx="1479348" cy="165100"/>
+          </a:xfrm>
+          <a:prstGeom prst="rect">
+            <a:avLst/>
+          </a:prstGeom>
+          <a:noFill/>
+          <a:ln/>
+        </p:spPr>
+        <p:txBody>
+          <a:bodyPr wrap="none" lIns="0" tIns="0" rIns="0" bIns="0" rtlCol="0" anchor="ctr"/>
+          <a:lstStyle/>
+          <a:p>
+            <a:pPr algn="l" indent="0" marL="0">
+              <a:buNone/>
+            </a:pPr>
+            <a:r>
+              <a:rPr lang="ko-KR" altLang="en-US" sz="1100" spc="-28" kern="0" dirty="0">
+                <a:solidFill>
+                  <a:srgbClr val="4B5568"/>
+                </a:solidFill>
+                <a:latin typeface="Paperlogy 5 Medium" pitchFamily="34" charset="0"/>
+                <a:ea typeface="Paperlogy 5 Medium" pitchFamily="34" charset="-127"/>
+                <a:cs typeface="Paperlogy 5 Medium" pitchFamily="34" charset="-120"/>
+              </a:rPr>
+              <a:t>기반 자동화 알고리즘 개발</a:t>
+            </a:r>
+            <a:endParaRPr lang="en-US" sz="1100" dirty="0"/>
+          </a:p>
+        </p:txBody>
+      </p:sp>
+      <p:sp>
+        <p:nvSpPr>
+          <p:cNvPr id="115" name="팀원 A"/>
+          <p:cNvSpPr txBox="1"/>
+          <p:nvPr/>
+        </p:nvSpPr>
+        <p:spPr>
+          <a:xfrm>
+            <a:off x="7766050" y="4219972"/>
+            <a:ext cx="424656" cy="165100"/>
+          </a:xfrm>
+          <a:prstGeom prst="rect">
+            <a:avLst/>
+          </a:prstGeom>
+          <a:noFill/>
+          <a:ln/>
+        </p:spPr>
+        <p:txBody>
+          <a:bodyPr wrap="none" lIns="0" tIns="0" rIns="0" bIns="0" rtlCol="0" anchor="ctr"/>
+          <a:lstStyle/>
+          <a:p>
+            <a:pPr algn="l" indent="0" marL="0">
+              <a:buNone/>
+            </a:pPr>
+            <a:r>
+              <a:rPr lang="ko-KR" altLang="en-US" sz="1100" spc="-22" kern="0" dirty="0">
+                <a:solidFill>
+                  <a:srgbClr val="0B2147"/>
                 </a:solidFill>
                 <a:latin typeface="Paperlogy 8 ExtraBold" pitchFamily="34" charset="0"/>
                 <a:ea typeface="Paperlogy 8 ExtraBold" pitchFamily="34" charset="-127"/>
                 <a:cs typeface="Paperlogy 8 ExtraBold" pitchFamily="34" charset="-120"/>
               </a:rPr>
-              <a:t>03</a:t>
-            </a:r>
-            <a:endParaRPr lang="en-US" sz="950" dirty="0"/>
-          </a:p>
-        </p:txBody>
-      </p:sp>
-      <p:sp>
-        <p:nvSpPr>
-          <p:cNvPr id="96" name="ONE TEAM"/>
-          <p:cNvSpPr txBox="1"/>
-          <p:nvPr/>
-        </p:nvSpPr>
-        <p:spPr>
-          <a:xfrm>
-            <a:off x="4894957" y="3270250"/>
-            <a:ext cx="878681" cy="146050"/>
-          </a:xfrm>
-          <a:prstGeom prst="rect">
-            <a:avLst/>
-          </a:prstGeom>
-          <a:noFill/>
-          <a:ln/>
-        </p:spPr>
-        <p:txBody>
-          <a:bodyPr wrap="none" lIns="0" tIns="0" rIns="0" bIns="0" rtlCol="0" anchor="ctr"/>
-          <a:lstStyle/>
-          <a:p>
-            <a:pPr algn="l" indent="0" marL="0">
-              <a:buNone/>
-            </a:pPr>
-            <a:r>
-              <a:rPr lang="ko-KR" altLang="en-US" sz="950" spc="152" kern="0" dirty="0">
-                <a:solidFill>
-                  <a:srgbClr val="2A78DD"/>
+              <a:t>팀원 A</a:t>
+            </a:r>
+            <a:endParaRPr lang="en-US" sz="1100" dirty="0"/>
+          </a:p>
+        </p:txBody>
+      </p:sp>
+      <p:sp>
+        <p:nvSpPr>
+          <p:cNvPr id="116" name="유닛 모듈러 설계"/>
+          <p:cNvSpPr txBox="1"/>
+          <p:nvPr/>
+        </p:nvSpPr>
+        <p:spPr>
+          <a:xfrm>
+            <a:off x="7651750" y="4432697"/>
+            <a:ext cx="944023" cy="165100"/>
+          </a:xfrm>
+          <a:prstGeom prst="rect">
+            <a:avLst/>
+          </a:prstGeom>
+          <a:noFill/>
+          <a:ln/>
+        </p:spPr>
+        <p:txBody>
+          <a:bodyPr wrap="none" lIns="0" tIns="0" rIns="0" bIns="0" rtlCol="0" anchor="ctr"/>
+          <a:lstStyle/>
+          <a:p>
+            <a:pPr algn="l" indent="0" marL="0">
+              <a:buNone/>
+            </a:pPr>
+            <a:r>
+              <a:rPr lang="ko-KR" altLang="en-US" sz="1100" spc="-28" kern="0" dirty="0">
+                <a:solidFill>
+                  <a:srgbClr val="4B5568"/>
+                </a:solidFill>
+                <a:latin typeface="Paperlogy 5 Medium" pitchFamily="34" charset="0"/>
+                <a:ea typeface="Paperlogy 5 Medium" pitchFamily="34" charset="-127"/>
+                <a:cs typeface="Paperlogy 5 Medium" pitchFamily="34" charset="-120"/>
+              </a:rPr>
+              <a:t>유닛 모듈러 설계</a:t>
+            </a:r>
+            <a:endParaRPr lang="en-US" sz="1100" dirty="0"/>
+          </a:p>
+        </p:txBody>
+      </p:sp>
+      <p:sp>
+        <p:nvSpPr>
+          <p:cNvPr id="117" name="배치계획"/>
+          <p:cNvSpPr txBox="1"/>
+          <p:nvPr/>
+        </p:nvSpPr>
+        <p:spPr>
+          <a:xfrm>
+            <a:off x="7651750" y="4628257"/>
+            <a:ext cx="528638" cy="165100"/>
+          </a:xfrm>
+          <a:prstGeom prst="rect">
+            <a:avLst/>
+          </a:prstGeom>
+          <a:noFill/>
+          <a:ln/>
+        </p:spPr>
+        <p:txBody>
+          <a:bodyPr wrap="none" lIns="0" tIns="0" rIns="0" bIns="0" rtlCol="0" anchor="ctr"/>
+          <a:lstStyle/>
+          <a:p>
+            <a:pPr algn="l" indent="0" marL="0">
+              <a:buNone/>
+            </a:pPr>
+            <a:r>
+              <a:rPr lang="ko-KR" altLang="en-US" sz="1100" spc="-28" kern="0" dirty="0">
+                <a:solidFill>
+                  <a:srgbClr val="4B5568"/>
+                </a:solidFill>
+                <a:latin typeface="Paperlogy 5 Medium" pitchFamily="34" charset="0"/>
+                <a:ea typeface="Paperlogy 5 Medium" pitchFamily="34" charset="-127"/>
+                <a:cs typeface="Paperlogy 5 Medium" pitchFamily="34" charset="-120"/>
+              </a:rPr>
+              <a:t>배치계획</a:t>
+            </a:r>
+            <a:endParaRPr lang="en-US" sz="1100" dirty="0"/>
+          </a:p>
+        </p:txBody>
+      </p:sp>
+      <p:sp>
+        <p:nvSpPr>
+          <p:cNvPr id="118" name="이틀마다 진행상황 공유 · 피드백"/>
+          <p:cNvSpPr txBox="1"/>
+          <p:nvPr/>
+        </p:nvSpPr>
+        <p:spPr>
+          <a:xfrm>
+            <a:off x="6713041" y="4900017"/>
+            <a:ext cx="1653512" cy="152400"/>
+          </a:xfrm>
+          <a:prstGeom prst="rect">
+            <a:avLst/>
+          </a:prstGeom>
+          <a:noFill/>
+          <a:ln/>
+        </p:spPr>
+        <p:txBody>
+          <a:bodyPr wrap="none" lIns="0" tIns="0" rIns="0" bIns="0" rtlCol="0" anchor="ctr"/>
+          <a:lstStyle/>
+          <a:p>
+            <a:pPr algn="l" indent="0" marL="0">
+              <a:buNone/>
+            </a:pPr>
+            <a:r>
+              <a:rPr lang="ko-KR" altLang="en-US" sz="1000" spc="-20" kern="0" dirty="0">
+                <a:solidFill>
+                  <a:srgbClr val="0B6B33"/>
                 </a:solidFill>
                 <a:latin typeface="Paperlogy 7 Bold" pitchFamily="34" charset="0"/>
                 <a:ea typeface="Paperlogy 7 Bold" pitchFamily="34" charset="-127"/>
                 <a:cs typeface="Paperlogy 7 Bold" pitchFamily="34" charset="-120"/>
               </a:rPr>
-              <a:t>ONE TEAM</a:t>
-            </a:r>
-            <a:endParaRPr lang="en-US" sz="950" dirty="0"/>
-          </a:p>
-        </p:txBody>
-      </p:sp>
-      <p:sp>
-        <p:nvSpPr>
-          <p:cNvPr id="97" name="04"/>
-          <p:cNvSpPr txBox="1"/>
-          <p:nvPr/>
-        </p:nvSpPr>
-        <p:spPr>
-          <a:xfrm>
-            <a:off x="9893300" y="3270250"/>
-            <a:ext cx="221357" cy="146050"/>
-          </a:xfrm>
-          <a:prstGeom prst="rect">
-            <a:avLst/>
-          </a:prstGeom>
-          <a:noFill/>
-          <a:ln/>
-        </p:spPr>
-        <p:txBody>
-          <a:bodyPr wrap="none" lIns="0" tIns="0" rIns="0" bIns="0" rtlCol="0" anchor="ctr"/>
-          <a:lstStyle/>
-          <a:p>
-            <a:pPr algn="l" indent="0" marL="0">
-              <a:buNone/>
-            </a:pPr>
-            <a:r>
-              <a:rPr lang="ko-KR" altLang="en-US" sz="950" spc="38" kern="0" dirty="0">
-                <a:solidFill>
-                  <a:srgbClr val="8691A5"/>
+              <a:t>이틀마다 진행상황 공유 · 피드백</a:t>
+            </a:r>
+            <a:endParaRPr lang="en-US" sz="1000" dirty="0"/>
+          </a:p>
+        </p:txBody>
+      </p:sp>
+      <p:sp>
+        <p:nvSpPr>
+          <p:cNvPr id="119" name="팀원 B"/>
+          <p:cNvSpPr txBox="1"/>
+          <p:nvPr/>
+        </p:nvSpPr>
+        <p:spPr>
+          <a:xfrm>
+            <a:off x="5080000" y="5131792"/>
+            <a:ext cx="424458" cy="165100"/>
+          </a:xfrm>
+          <a:prstGeom prst="rect">
+            <a:avLst/>
+          </a:prstGeom>
+          <a:noFill/>
+          <a:ln/>
+        </p:spPr>
+        <p:txBody>
+          <a:bodyPr wrap="none" lIns="0" tIns="0" rIns="0" bIns="0" rtlCol="0" anchor="ctr"/>
+          <a:lstStyle/>
+          <a:p>
+            <a:pPr algn="l" indent="0" marL="0">
+              <a:buNone/>
+            </a:pPr>
+            <a:r>
+              <a:rPr lang="ko-KR" altLang="en-US" sz="1100" spc="-22" kern="0" dirty="0">
+                <a:solidFill>
+                  <a:srgbClr val="0B2147"/>
                 </a:solidFill>
                 <a:latin typeface="Paperlogy 8 ExtraBold" pitchFamily="34" charset="0"/>
                 <a:ea typeface="Paperlogy 8 ExtraBold" pitchFamily="34" charset="-127"/>
                 <a:cs typeface="Paperlogy 8 ExtraBold" pitchFamily="34" charset="-120"/>
               </a:rPr>
-              <a:t>04</a:t>
-            </a:r>
-            <a:endParaRPr lang="en-US" sz="950" dirty="0"/>
-          </a:p>
-        </p:txBody>
-      </p:sp>
-      <p:sp>
-        <p:nvSpPr>
-          <p:cNvPr id="98" name="RESULT"/>
-          <p:cNvSpPr txBox="1"/>
-          <p:nvPr/>
-        </p:nvSpPr>
-        <p:spPr>
-          <a:xfrm>
-            <a:off x="10127357" y="3270250"/>
-            <a:ext cx="646311" cy="146050"/>
-          </a:xfrm>
-          <a:prstGeom prst="rect">
-            <a:avLst/>
-          </a:prstGeom>
-          <a:noFill/>
-          <a:ln/>
-        </p:spPr>
-        <p:txBody>
-          <a:bodyPr wrap="none" lIns="0" tIns="0" rIns="0" bIns="0" rtlCol="0" anchor="ctr"/>
-          <a:lstStyle/>
-          <a:p>
-            <a:pPr algn="l" indent="0" marL="0">
-              <a:buNone/>
-            </a:pPr>
-            <a:r>
-              <a:rPr lang="ko-KR" altLang="en-US" sz="950" spc="152" kern="0" dirty="0">
-                <a:solidFill>
-                  <a:srgbClr val="2A78DD"/>
+              <a:t>팀원 B</a:t>
+            </a:r>
+            <a:endParaRPr lang="en-US" sz="1100" dirty="0"/>
+          </a:p>
+        </p:txBody>
+      </p:sp>
+      <p:sp>
+        <p:nvSpPr>
+          <p:cNvPr id="120" name="Revit"/>
+          <p:cNvSpPr txBox="1"/>
+          <p:nvPr/>
+        </p:nvSpPr>
+        <p:spPr>
+          <a:xfrm>
+            <a:off x="5022850" y="5355927"/>
+            <a:ext cx="337443" cy="139700"/>
+          </a:xfrm>
+          <a:prstGeom prst="rect">
+            <a:avLst/>
+          </a:prstGeom>
+          <a:noFill/>
+          <a:ln/>
+        </p:spPr>
+        <p:txBody>
+          <a:bodyPr wrap="none" lIns="0" tIns="0" rIns="0" bIns="0" rtlCol="0" anchor="ctr"/>
+          <a:lstStyle/>
+          <a:p>
+            <a:pPr algn="l" indent="0" marL="0">
+              <a:buNone/>
+            </a:pPr>
+            <a:r>
+              <a:rPr lang="ko-KR" altLang="en-US" sz="900" spc="-28" kern="0" dirty="0">
+                <a:solidFill>
+                  <a:srgbClr val="004B8D"/>
                 </a:solidFill>
                 <a:latin typeface="Paperlogy 7 Bold" pitchFamily="34" charset="0"/>
                 <a:ea typeface="Paperlogy 7 Bold" pitchFamily="34" charset="-127"/>
                 <a:cs typeface="Paperlogy 7 Bold" pitchFamily="34" charset="-120"/>
               </a:rPr>
-              <a:t>RESULT</a:t>
-            </a:r>
-            <a:endParaRPr lang="en-US" sz="950" dirty="0"/>
-          </a:p>
-        </p:txBody>
-      </p:sp>
-      <p:sp>
-        <p:nvSpPr>
-          <p:cNvPr id="99" name="주제 선정 의견 충돌"/>
-          <p:cNvSpPr txBox="1"/>
-          <p:nvPr/>
-        </p:nvSpPr>
-        <p:spPr>
-          <a:xfrm>
-            <a:off x="609600" y="3508375"/>
-            <a:ext cx="1378698" cy="209550"/>
+              <a:t>Revit</a:t>
+            </a:r>
+            <a:endParaRPr lang="en-US" sz="900" dirty="0"/>
+          </a:p>
+        </p:txBody>
+      </p:sp>
+      <p:sp>
+        <p:nvSpPr>
+          <p:cNvPr id="121" name="기반 BIM 모델링"/>
+          <p:cNvSpPr txBox="1"/>
+          <p:nvPr/>
+        </p:nvSpPr>
+        <p:spPr>
+          <a:xfrm>
+            <a:off x="5417443" y="5344517"/>
+            <a:ext cx="979045" cy="165100"/>
+          </a:xfrm>
+          <a:prstGeom prst="rect">
+            <a:avLst/>
+          </a:prstGeom>
+          <a:noFill/>
+          <a:ln/>
+        </p:spPr>
+        <p:txBody>
+          <a:bodyPr wrap="none" lIns="0" tIns="0" rIns="0" bIns="0" rtlCol="0" anchor="ctr"/>
+          <a:lstStyle/>
+          <a:p>
+            <a:pPr algn="l" indent="0" marL="0">
+              <a:buNone/>
+            </a:pPr>
+            <a:r>
+              <a:rPr lang="ko-KR" altLang="en-US" sz="1100" spc="-28" kern="0" dirty="0">
+                <a:solidFill>
+                  <a:srgbClr val="4B5568"/>
+                </a:solidFill>
+                <a:latin typeface="Paperlogy 5 Medium" pitchFamily="34" charset="0"/>
+                <a:ea typeface="Paperlogy 5 Medium" pitchFamily="34" charset="-127"/>
+                <a:cs typeface="Paperlogy 5 Medium" pitchFamily="34" charset="-120"/>
+              </a:rPr>
+              <a:t>기반 BIM 모델링</a:t>
+            </a:r>
+            <a:endParaRPr lang="en-US" sz="1100" dirty="0"/>
+          </a:p>
+        </p:txBody>
+      </p:sp>
+      <p:sp>
+        <p:nvSpPr>
+          <p:cNvPr id="122" name="데이터 구축"/>
+          <p:cNvSpPr txBox="1"/>
+          <p:nvPr/>
+        </p:nvSpPr>
+        <p:spPr>
+          <a:xfrm>
+            <a:off x="4965700" y="5540077"/>
+            <a:ext cx="675283" cy="165100"/>
+          </a:xfrm>
+          <a:prstGeom prst="rect">
+            <a:avLst/>
+          </a:prstGeom>
+          <a:noFill/>
+          <a:ln/>
+        </p:spPr>
+        <p:txBody>
+          <a:bodyPr wrap="none" lIns="0" tIns="0" rIns="0" bIns="0" rtlCol="0" anchor="ctr"/>
+          <a:lstStyle/>
+          <a:p>
+            <a:pPr algn="l" indent="0" marL="0">
+              <a:buNone/>
+            </a:pPr>
+            <a:r>
+              <a:rPr lang="ko-KR" altLang="en-US" sz="1100" spc="-28" kern="0" dirty="0">
+                <a:solidFill>
+                  <a:srgbClr val="4B5568"/>
+                </a:solidFill>
+                <a:latin typeface="Paperlogy 5 Medium" pitchFamily="34" charset="0"/>
+                <a:ea typeface="Paperlogy 5 Medium" pitchFamily="34" charset="-127"/>
+                <a:cs typeface="Paperlogy 5 Medium" pitchFamily="34" charset="-120"/>
+              </a:rPr>
+              <a:t>데이터 구축</a:t>
+            </a:r>
+            <a:endParaRPr lang="en-US" sz="1100" dirty="0"/>
+          </a:p>
+        </p:txBody>
+      </p:sp>
+      <p:sp>
+        <p:nvSpPr>
+          <p:cNvPr id="123" name="팀원 C"/>
+          <p:cNvSpPr txBox="1"/>
+          <p:nvPr/>
+        </p:nvSpPr>
+        <p:spPr>
+          <a:xfrm>
+            <a:off x="7766050" y="5131792"/>
+            <a:ext cx="419695" cy="165100"/>
+          </a:xfrm>
+          <a:prstGeom prst="rect">
+            <a:avLst/>
+          </a:prstGeom>
+          <a:noFill/>
+          <a:ln/>
+        </p:spPr>
+        <p:txBody>
+          <a:bodyPr wrap="none" lIns="0" tIns="0" rIns="0" bIns="0" rtlCol="0" anchor="ctr"/>
+          <a:lstStyle/>
+          <a:p>
+            <a:pPr algn="l" indent="0" marL="0">
+              <a:buNone/>
+            </a:pPr>
+            <a:r>
+              <a:rPr lang="ko-KR" altLang="en-US" sz="1100" spc="-22" kern="0" dirty="0">
+                <a:solidFill>
+                  <a:srgbClr val="0B2147"/>
+                </a:solidFill>
+                <a:latin typeface="Paperlogy 8 ExtraBold" pitchFamily="34" charset="0"/>
+                <a:ea typeface="Paperlogy 8 ExtraBold" pitchFamily="34" charset="-127"/>
+                <a:cs typeface="Paperlogy 8 ExtraBold" pitchFamily="34" charset="-120"/>
+              </a:rPr>
+              <a:t>팀원 C</a:t>
+            </a:r>
+            <a:endParaRPr lang="en-US" sz="1100" dirty="0"/>
+          </a:p>
+        </p:txBody>
+      </p:sp>
+      <p:sp>
+        <p:nvSpPr>
+          <p:cNvPr id="124" name="리모델링 적용 시나리오 구성"/>
+          <p:cNvSpPr txBox="1"/>
+          <p:nvPr/>
+        </p:nvSpPr>
+        <p:spPr>
+          <a:xfrm>
+            <a:off x="7651750" y="5344517"/>
+            <a:ext cx="1605975" cy="165100"/>
+          </a:xfrm>
+          <a:prstGeom prst="rect">
+            <a:avLst/>
+          </a:prstGeom>
+          <a:noFill/>
+          <a:ln/>
+        </p:spPr>
+        <p:txBody>
+          <a:bodyPr wrap="none" lIns="0" tIns="0" rIns="0" bIns="0" rtlCol="0" anchor="ctr"/>
+          <a:lstStyle/>
+          <a:p>
+            <a:pPr algn="l" indent="0" marL="0">
+              <a:buNone/>
+            </a:pPr>
+            <a:r>
+              <a:rPr lang="ko-KR" altLang="en-US" sz="1100" spc="-28" kern="0" dirty="0">
+                <a:solidFill>
+                  <a:srgbClr val="4B5568"/>
+                </a:solidFill>
+                <a:latin typeface="Paperlogy 5 Medium" pitchFamily="34" charset="0"/>
+                <a:ea typeface="Paperlogy 5 Medium" pitchFamily="34" charset="-127"/>
+                <a:cs typeface="Paperlogy 5 Medium" pitchFamily="34" charset="-120"/>
+              </a:rPr>
+              <a:t>리모델링 적용 시나리오 구성</a:t>
+            </a:r>
+            <a:endParaRPr lang="en-US" sz="1100" dirty="0"/>
+          </a:p>
+        </p:txBody>
+      </p:sp>
+      <p:sp>
+        <p:nvSpPr>
+          <p:cNvPr id="125" name="시연 영상 제작"/>
+          <p:cNvSpPr txBox="1"/>
+          <p:nvPr/>
+        </p:nvSpPr>
+        <p:spPr>
+          <a:xfrm>
+            <a:off x="7651750" y="5540077"/>
+            <a:ext cx="822027" cy="165100"/>
+          </a:xfrm>
+          <a:prstGeom prst="rect">
+            <a:avLst/>
+          </a:prstGeom>
+          <a:noFill/>
+          <a:ln/>
+        </p:spPr>
+        <p:txBody>
+          <a:bodyPr wrap="none" lIns="0" tIns="0" rIns="0" bIns="0" rtlCol="0" anchor="ctr"/>
+          <a:lstStyle/>
+          <a:p>
+            <a:pPr algn="l" indent="0" marL="0">
+              <a:buNone/>
+            </a:pPr>
+            <a:r>
+              <a:rPr lang="ko-KR" altLang="en-US" sz="1100" spc="-28" kern="0" dirty="0">
+                <a:solidFill>
+                  <a:srgbClr val="4B5568"/>
+                </a:solidFill>
+                <a:latin typeface="Paperlogy 5 Medium" pitchFamily="34" charset="0"/>
+                <a:ea typeface="Paperlogy 5 Medium" pitchFamily="34" charset="-127"/>
+                <a:cs typeface="Paperlogy 5 Medium" pitchFamily="34" charset="-120"/>
+              </a:rPr>
+              <a:t>시연 영상 제작</a:t>
+            </a:r>
+            <a:endParaRPr lang="en-US" sz="1100" dirty="0"/>
+          </a:p>
+        </p:txBody>
+      </p:sp>
+      <p:sp>
+        <p:nvSpPr>
+          <p:cNvPr id="126" name="프로젝트 완성"/>
+          <p:cNvSpPr txBox="1"/>
+          <p:nvPr/>
+        </p:nvSpPr>
+        <p:spPr>
+          <a:xfrm>
+            <a:off x="10312400" y="3852664"/>
+            <a:ext cx="990404" cy="209550"/>
           </a:xfrm>
           <a:prstGeom prst="rect">
             <a:avLst/>
@@ -3705,7 +4898,7 @@
                 <a:ea typeface="Paperlogy 7 Bold" pitchFamily="34" charset="-127"/>
                 <a:cs typeface="Paperlogy 7 Bold" pitchFamily="34" charset="-120"/>
               </a:rPr>
-              <a:t>주제 선정 의견 충돌</a:t>
+              <a:t>프로젝트 완성</a:t>
             </a:r>
             <a:endParaRPr lang="en-US" sz="1400" dirty="0"/>
           </a:p>
@@ -3713,38 +4906,116 @@
       </p:sp>
       <p:sp>
         <p:nvSpPr>
-          <p:cNvPr id="100" name="참신성"/>
-          <p:cNvSpPr txBox="1"/>
-          <p:nvPr/>
-        </p:nvSpPr>
-        <p:spPr>
-          <a:xfrm>
-            <a:off x="847626" y="4810125"/>
-            <a:ext cx="362148" cy="146050"/>
-          </a:xfrm>
-          <a:prstGeom prst="rect">
-            <a:avLst/>
-          </a:prstGeom>
-          <a:noFill/>
-          <a:ln/>
-        </p:spPr>
-        <p:txBody>
-          <a:bodyPr wrap="none" lIns="0" tIns="0" rIns="0" bIns="0" rtlCol="0" anchor="ctr"/>
-          <a:lstStyle/>
-          <a:p>
-            <a:pPr algn="l" indent="0" marL="0">
-              <a:buNone/>
-            </a:pPr>
-            <a:r>
-              <a:rPr lang="ko-KR" altLang="en-US" sz="950" spc="-19" kern="0" dirty="0">
-                <a:solidFill>
-                  <a:srgbClr val="4B5568"/>
+          <p:cNvPr id="127" name="남은 3주 내"/>
+          <p:cNvSpPr txBox="1"/>
+          <p:nvPr/>
+        </p:nvSpPr>
+        <p:spPr>
+          <a:xfrm>
+            <a:off x="10591800" y="5360194"/>
+            <a:ext cx="672703" cy="165100"/>
+          </a:xfrm>
+          <a:prstGeom prst="rect">
+            <a:avLst/>
+          </a:prstGeom>
+          <a:noFill/>
+          <a:ln/>
+        </p:spPr>
+        <p:txBody>
+          <a:bodyPr wrap="none" lIns="0" tIns="0" rIns="0" bIns="0" rtlCol="0" anchor="ctr"/>
+          <a:lstStyle/>
+          <a:p>
+            <a:pPr algn="l" indent="0" marL="0">
+              <a:buNone/>
+            </a:pPr>
+            <a:r>
+              <a:rPr lang="ko-KR" altLang="en-US" sz="1100" spc="-28" kern="0" dirty="0">
+                <a:solidFill>
+                  <a:srgbClr val="1C2536"/>
+                </a:solidFill>
+                <a:latin typeface="Paperlogy 6 SemiBold" pitchFamily="34" charset="0"/>
+                <a:ea typeface="Paperlogy 6 SemiBold" pitchFamily="34" charset="-127"/>
+                <a:cs typeface="Paperlogy 6 SemiBold" pitchFamily="34" charset="-120"/>
+              </a:rPr>
+              <a:t>남은 3주 내</a:t>
+            </a:r>
+            <a:endParaRPr lang="en-US" sz="1100" dirty="0"/>
+          </a:p>
+        </p:txBody>
+      </p:sp>
+      <p:sp>
+        <p:nvSpPr>
+          <p:cNvPr id="128" name="시연 영상 완성"/>
+          <p:cNvSpPr txBox="1"/>
+          <p:nvPr/>
+        </p:nvSpPr>
+        <p:spPr>
+          <a:xfrm>
+            <a:off x="10591800" y="5555754"/>
+            <a:ext cx="822027" cy="165100"/>
+          </a:xfrm>
+          <a:prstGeom prst="rect">
+            <a:avLst/>
+          </a:prstGeom>
+          <a:noFill/>
+          <a:ln/>
+        </p:spPr>
+        <p:txBody>
+          <a:bodyPr wrap="none" lIns="0" tIns="0" rIns="0" bIns="0" rtlCol="0" anchor="ctr"/>
+          <a:lstStyle/>
+          <a:p>
+            <a:pPr algn="l" indent="0" marL="0">
+              <a:buNone/>
+            </a:pPr>
+            <a:r>
+              <a:rPr lang="ko-KR" altLang="en-US" sz="1100" spc="-28" kern="0" dirty="0">
+                <a:solidFill>
+                  <a:srgbClr val="1C2536"/>
+                </a:solidFill>
+                <a:latin typeface="Paperlogy 6 SemiBold" pitchFamily="34" charset="0"/>
+                <a:ea typeface="Paperlogy 6 SemiBold" pitchFamily="34" charset="-127"/>
+                <a:cs typeface="Paperlogy 6 SemiBold" pitchFamily="34" charset="-120"/>
+              </a:rPr>
+              <a:t>시연 영상 완성</a:t>
+            </a:r>
+            <a:endParaRPr lang="en-US" sz="1100" dirty="0"/>
+          </a:p>
+        </p:txBody>
+      </p:sp>
+      <p:sp>
+        <p:nvSpPr>
+          <p:cNvPr id="129" name="KEY MESSAGE"/>
+          <p:cNvSpPr txBox="1"/>
+          <p:nvPr/>
+        </p:nvSpPr>
+        <p:spPr>
+          <a:xfrm>
+            <a:off x="1308100" y="6058098"/>
+            <a:ext cx="1171825" cy="146050"/>
+          </a:xfrm>
+          <a:prstGeom prst="rect">
+            <a:avLst/>
+          </a:prstGeom>
+          <a:noFill/>
+          <a:ln/>
+        </p:spPr>
+        <p:txBody>
+          <a:bodyPr wrap="none" lIns="0" tIns="0" rIns="0" bIns="0" rtlCol="0" anchor="ctr"/>
+          <a:lstStyle/>
+          <a:p>
+            <a:pPr algn="l" indent="0" marL="0">
+              <a:buNone/>
+            </a:pPr>
+            <a:r>
+              <a:rPr lang="ko-KR" altLang="en-US" sz="950" spc="152" kern="0" dirty="0">
+                <a:solidFill>
+                  <a:srgbClr val="8FD3F5"/>
                 </a:solidFill>
                 <a:latin typeface="Paperlogy 7 Bold" pitchFamily="34" charset="0"/>
                 <a:ea typeface="Paperlogy 7 Bold" pitchFamily="34" charset="-127"/>
                 <a:cs typeface="Paperlogy 7 Bold" pitchFamily="34" charset="-120"/>
               </a:rPr>
-              <a:t>참신성</a:t>
+              <a:t>KEY MESSAGE</a:t>
             </a:r>
             <a:endParaRPr lang="en-US" sz="950" dirty="0"/>
           </a:p>
@@ -3752,584 +5023,105 @@
       </p:sp>
       <p:sp>
         <p:nvSpPr>
-          <p:cNvPr id="101" name="구현 가능성"/>
-          <p:cNvSpPr txBox="1"/>
-          <p:nvPr/>
-        </p:nvSpPr>
-        <p:spPr>
-          <a:xfrm>
-            <a:off x="1481137" y="4810125"/>
-            <a:ext cx="593725" cy="146050"/>
-          </a:xfrm>
-          <a:prstGeom prst="rect">
-            <a:avLst/>
-          </a:prstGeom>
-          <a:noFill/>
-          <a:ln/>
-        </p:spPr>
-        <p:txBody>
-          <a:bodyPr wrap="none" lIns="0" tIns="0" rIns="0" bIns="0" rtlCol="0" anchor="ctr"/>
-          <a:lstStyle/>
-          <a:p>
-            <a:pPr algn="l" indent="0" marL="0">
-              <a:buNone/>
-            </a:pPr>
-            <a:r>
-              <a:rPr lang="ko-KR" altLang="en-US" sz="950" spc="-19" kern="0" dirty="0">
-                <a:solidFill>
-                  <a:srgbClr val="4B5568"/>
+          <p:cNvPr id="130" name="서로 다른 사람을 하나의 공동 목표로 연결합니다"/>
+          <p:cNvSpPr txBox="1"/>
+          <p:nvPr/>
+        </p:nvSpPr>
+        <p:spPr>
+          <a:xfrm>
+            <a:off x="2591395" y="6005314"/>
+            <a:ext cx="4151660" cy="254000"/>
+          </a:xfrm>
+          <a:prstGeom prst="rect">
+            <a:avLst/>
+          </a:prstGeom>
+          <a:noFill/>
+          <a:ln/>
+        </p:spPr>
+        <p:txBody>
+          <a:bodyPr wrap="none" lIns="0" tIns="0" rIns="0" bIns="0" rtlCol="0" anchor="ctr"/>
+          <a:lstStyle/>
+          <a:p>
+            <a:pPr algn="l" indent="0" marL="0">
+              <a:buNone/>
+            </a:pPr>
+            <a:r>
+              <a:rPr lang="ko-KR" altLang="en-US" sz="1700" spc="-51" kern="0" dirty="0">
+                <a:solidFill>
+                  <a:srgbClr val="FFFFFF"/>
                 </a:solidFill>
                 <a:latin typeface="Paperlogy 7 Bold" pitchFamily="34" charset="0"/>
                 <a:ea typeface="Paperlogy 7 Bold" pitchFamily="34" charset="-127"/>
                 <a:cs typeface="Paperlogy 7 Bold" pitchFamily="34" charset="-120"/>
               </a:rPr>
-              <a:t>구현 가능성</a:t>
-            </a:r>
-            <a:endParaRPr lang="en-US" sz="950" dirty="0"/>
-          </a:p>
-        </p:txBody>
-      </p:sp>
-      <p:sp>
-        <p:nvSpPr>
-          <p:cNvPr id="102" name="마감 3주 전까지"/>
-          <p:cNvSpPr txBox="1"/>
-          <p:nvPr/>
-        </p:nvSpPr>
-        <p:spPr>
-          <a:xfrm>
-            <a:off x="889000" y="5220494"/>
-            <a:ext cx="912471" cy="165100"/>
-          </a:xfrm>
-          <a:prstGeom prst="rect">
-            <a:avLst/>
-          </a:prstGeom>
-          <a:noFill/>
-          <a:ln/>
-        </p:spPr>
-        <p:txBody>
-          <a:bodyPr wrap="none" lIns="0" tIns="0" rIns="0" bIns="0" rtlCol="0" anchor="ctr"/>
-          <a:lstStyle/>
-          <a:p>
-            <a:pPr algn="l" indent="0" marL="0">
-              <a:buNone/>
-            </a:pPr>
-            <a:r>
-              <a:rPr lang="ko-KR" altLang="en-US" sz="1100" spc="-28" kern="0" dirty="0">
-                <a:solidFill>
-                  <a:srgbClr val="1C2536"/>
-                </a:solidFill>
-                <a:latin typeface="Paperlogy 6 SemiBold" pitchFamily="34" charset="0"/>
-                <a:ea typeface="Paperlogy 6 SemiBold" pitchFamily="34" charset="-127"/>
-                <a:cs typeface="Paperlogy 6 SemiBold" pitchFamily="34" charset="-120"/>
-              </a:rPr>
-              <a:t>마감 3주 전까지</a:t>
-            </a:r>
-            <a:endParaRPr lang="en-US" sz="1100" dirty="0"/>
-          </a:p>
-        </p:txBody>
-      </p:sp>
-      <p:sp>
-        <p:nvSpPr>
-          <p:cNvPr id="103" name="주제 미확정"/>
-          <p:cNvSpPr txBox="1"/>
-          <p:nvPr/>
-        </p:nvSpPr>
-        <p:spPr>
-          <a:xfrm>
-            <a:off x="889000" y="5416054"/>
-            <a:ext cx="675283" cy="165100"/>
-          </a:xfrm>
-          <a:prstGeom prst="rect">
-            <a:avLst/>
-          </a:prstGeom>
-          <a:noFill/>
-          <a:ln/>
-        </p:spPr>
-        <p:txBody>
-          <a:bodyPr wrap="none" lIns="0" tIns="0" rIns="0" bIns="0" rtlCol="0" anchor="ctr"/>
-          <a:lstStyle/>
-          <a:p>
-            <a:pPr algn="l" indent="0" marL="0">
-              <a:buNone/>
-            </a:pPr>
-            <a:r>
-              <a:rPr lang="ko-KR" altLang="en-US" sz="1100" spc="-28" kern="0" dirty="0">
-                <a:solidFill>
-                  <a:srgbClr val="1C2536"/>
-                </a:solidFill>
-                <a:latin typeface="Paperlogy 6 SemiBold" pitchFamily="34" charset="0"/>
-                <a:ea typeface="Paperlogy 6 SemiBold" pitchFamily="34" charset="-127"/>
-                <a:cs typeface="Paperlogy 6 SemiBold" pitchFamily="34" charset="-120"/>
-              </a:rPr>
-              <a:t>주제 미확정</a:t>
-            </a:r>
-            <a:endParaRPr lang="en-US" sz="1100" dirty="0"/>
-          </a:p>
-        </p:txBody>
-      </p:sp>
-      <p:sp>
-        <p:nvSpPr>
-          <p:cNvPr id="104" name="의견 조율 · 주제 확정"/>
-          <p:cNvSpPr txBox="1"/>
-          <p:nvPr/>
-        </p:nvSpPr>
-        <p:spPr>
-          <a:xfrm>
-            <a:off x="2387600" y="3508375"/>
-            <a:ext cx="1467674" cy="209550"/>
-          </a:xfrm>
-          <a:prstGeom prst="rect">
-            <a:avLst/>
-          </a:prstGeom>
-          <a:noFill/>
-          <a:ln/>
-        </p:spPr>
-        <p:txBody>
-          <a:bodyPr wrap="none" lIns="0" tIns="0" rIns="0" bIns="0" rtlCol="0" anchor="ctr"/>
-          <a:lstStyle/>
-          <a:p>
-            <a:pPr algn="l" indent="0" marL="0">
-              <a:buNone/>
-            </a:pPr>
-            <a:r>
-              <a:rPr lang="ko-KR" altLang="en-US" sz="1400" spc="-49" kern="0" dirty="0">
-                <a:solidFill>
-                  <a:srgbClr val="0B2147"/>
+              <a:t>서로 다른 사람을 </a:t>
+            </a:r>
+            <a:pPr algn="l" indent="0" marL="0">
+              <a:buNone/>
+            </a:pPr>
+            <a:r>
+              <a:rPr lang="ko-KR" altLang="en-US" sz="1700" spc="-51" kern="0" dirty="0">
+                <a:solidFill>
+                  <a:srgbClr val="FDBB30"/>
                 </a:solidFill>
                 <a:latin typeface="Paperlogy 7 Bold" pitchFamily="34" charset="0"/>
                 <a:ea typeface="Paperlogy 7 Bold" pitchFamily="34" charset="-127"/>
                 <a:cs typeface="Paperlogy 7 Bold" pitchFamily="34" charset="-120"/>
               </a:rPr>
-              <a:t>의견 조율 · 주제 확정</a:t>
-            </a:r>
-            <a:endParaRPr lang="en-US" sz="1400" dirty="0"/>
-          </a:p>
-        </p:txBody>
-      </p:sp>
-      <p:sp>
-        <p:nvSpPr>
-          <p:cNvPr id="105" name="경청"/>
-          <p:cNvSpPr txBox="1"/>
-          <p:nvPr/>
-        </p:nvSpPr>
-        <p:spPr>
-          <a:xfrm>
-            <a:off x="2753717" y="4218285"/>
-            <a:ext cx="258366" cy="146050"/>
-          </a:xfrm>
-          <a:prstGeom prst="rect">
-            <a:avLst/>
-          </a:prstGeom>
-          <a:noFill/>
-          <a:ln/>
-        </p:spPr>
-        <p:txBody>
-          <a:bodyPr wrap="none" lIns="0" tIns="0" rIns="0" bIns="0" rtlCol="0" anchor="ctr"/>
-          <a:lstStyle/>
-          <a:p>
-            <a:pPr algn="ctr" indent="0" marL="0">
-              <a:buNone/>
-            </a:pPr>
-            <a:r>
-              <a:rPr lang="ko-KR" altLang="en-US" sz="950" spc="-19" kern="0" dirty="0">
-                <a:solidFill>
-                  <a:srgbClr val="1C2536"/>
+              <a:t>하나의 공동 목표</a:t>
+            </a:r>
+            <a:pPr algn="l" indent="0" marL="0">
+              <a:buNone/>
+            </a:pPr>
+            <a:r>
+              <a:rPr lang="ko-KR" altLang="en-US" sz="1700" spc="-51" kern="0" dirty="0">
+                <a:solidFill>
+                  <a:srgbClr val="FFFFFF"/>
                 </a:solidFill>
                 <a:latin typeface="Paperlogy 7 Bold" pitchFamily="34" charset="0"/>
                 <a:ea typeface="Paperlogy 7 Bold" pitchFamily="34" charset="-127"/>
                 <a:cs typeface="Paperlogy 7 Bold" pitchFamily="34" charset="-120"/>
               </a:rPr>
-              <a:t>경청</a:t>
-            </a:r>
-            <a:endParaRPr lang="en-US" sz="950" dirty="0"/>
-          </a:p>
-        </p:txBody>
-      </p:sp>
-      <p:sp>
-        <p:nvSpPr>
-          <p:cNvPr id="106" name="수상작 분석"/>
-          <p:cNvSpPr txBox="1"/>
-          <p:nvPr/>
-        </p:nvSpPr>
-        <p:spPr>
-          <a:xfrm>
-            <a:off x="2586038" y="4535785"/>
-            <a:ext cx="593725" cy="146050"/>
-          </a:xfrm>
-          <a:prstGeom prst="rect">
-            <a:avLst/>
-          </a:prstGeom>
-          <a:noFill/>
-          <a:ln/>
-        </p:spPr>
-        <p:txBody>
-          <a:bodyPr wrap="none" lIns="0" tIns="0" rIns="0" bIns="0" rtlCol="0" anchor="ctr"/>
-          <a:lstStyle/>
-          <a:p>
-            <a:pPr algn="ctr" indent="0" marL="0">
-              <a:buNone/>
-            </a:pPr>
-            <a:r>
-              <a:rPr lang="ko-KR" altLang="en-US" sz="950" spc="-19" kern="0" dirty="0">
-                <a:solidFill>
-                  <a:srgbClr val="1C2536"/>
-                </a:solidFill>
-                <a:latin typeface="Paperlogy 7 Bold" pitchFamily="34" charset="0"/>
-                <a:ea typeface="Paperlogy 7 Bold" pitchFamily="34" charset="-127"/>
-                <a:cs typeface="Paperlogy 7 Bold" pitchFamily="34" charset="-120"/>
-              </a:rPr>
-              <a:t>수상작 분석</a:t>
-            </a:r>
-            <a:endParaRPr lang="en-US" sz="950" dirty="0"/>
-          </a:p>
-        </p:txBody>
-      </p:sp>
-      <p:sp>
-        <p:nvSpPr>
-          <p:cNvPr id="107" name="교수님 조언"/>
-          <p:cNvSpPr txBox="1"/>
-          <p:nvPr/>
-        </p:nvSpPr>
-        <p:spPr>
-          <a:xfrm>
-            <a:off x="2586038" y="4853285"/>
-            <a:ext cx="593725" cy="146050"/>
-          </a:xfrm>
-          <a:prstGeom prst="rect">
-            <a:avLst/>
-          </a:prstGeom>
-          <a:noFill/>
-          <a:ln/>
-        </p:spPr>
-        <p:txBody>
-          <a:bodyPr wrap="none" lIns="0" tIns="0" rIns="0" bIns="0" rtlCol="0" anchor="ctr"/>
-          <a:lstStyle/>
-          <a:p>
-            <a:pPr algn="ctr" indent="0" marL="0">
-              <a:buNone/>
-            </a:pPr>
-            <a:r>
-              <a:rPr lang="ko-KR" altLang="en-US" sz="950" spc="-19" kern="0" dirty="0">
-                <a:solidFill>
-                  <a:srgbClr val="1C2536"/>
-                </a:solidFill>
-                <a:latin typeface="Paperlogy 7 Bold" pitchFamily="34" charset="0"/>
-                <a:ea typeface="Paperlogy 7 Bold" pitchFamily="34" charset="-127"/>
-                <a:cs typeface="Paperlogy 7 Bold" pitchFamily="34" charset="-120"/>
-              </a:rPr>
-              <a:t>교수님 조언</a:t>
-            </a:r>
-            <a:endParaRPr lang="en-US" sz="950" dirty="0"/>
-          </a:p>
-        </p:txBody>
-      </p:sp>
-      <p:sp>
-        <p:nvSpPr>
-          <p:cNvPr id="108" name="판단"/>
-          <p:cNvSpPr txBox="1"/>
-          <p:nvPr/>
-        </p:nvSpPr>
-        <p:spPr>
-          <a:xfrm>
-            <a:off x="3719810" y="4456410"/>
-            <a:ext cx="269280" cy="152400"/>
-          </a:xfrm>
-          <a:prstGeom prst="rect">
-            <a:avLst/>
-          </a:prstGeom>
-          <a:noFill/>
-          <a:ln/>
-        </p:spPr>
-        <p:txBody>
-          <a:bodyPr wrap="none" lIns="0" tIns="0" rIns="0" bIns="0" rtlCol="0" anchor="ctr"/>
-          <a:lstStyle/>
-          <a:p>
-            <a:pPr algn="ctr" indent="0" marL="0">
-              <a:buNone/>
-            </a:pPr>
-            <a:r>
-              <a:rPr lang="ko-KR" altLang="en-US" sz="1000" spc="-20" kern="0" dirty="0">
-                <a:solidFill>
-                  <a:srgbClr val="004B8D"/>
-                </a:solidFill>
-                <a:latin typeface="Paperlogy 8 ExtraBold" pitchFamily="34" charset="0"/>
-                <a:ea typeface="Paperlogy 8 ExtraBold" pitchFamily="34" charset="-127"/>
-                <a:cs typeface="Paperlogy 8 ExtraBold" pitchFamily="34" charset="-120"/>
-              </a:rPr>
-              <a:t>판단</a:t>
-            </a:r>
-            <a:endParaRPr lang="en-US" sz="1000" dirty="0"/>
-          </a:p>
-        </p:txBody>
-      </p:sp>
-      <p:sp>
-        <p:nvSpPr>
-          <p:cNvPr id="109" name="기준"/>
-          <p:cNvSpPr txBox="1"/>
-          <p:nvPr/>
-        </p:nvSpPr>
-        <p:spPr>
-          <a:xfrm>
-            <a:off x="3719810" y="4602460"/>
-            <a:ext cx="269280" cy="152400"/>
-          </a:xfrm>
-          <a:prstGeom prst="rect">
-            <a:avLst/>
-          </a:prstGeom>
-          <a:noFill/>
-          <a:ln/>
-        </p:spPr>
-        <p:txBody>
-          <a:bodyPr wrap="none" lIns="0" tIns="0" rIns="0" bIns="0" rtlCol="0" anchor="ctr"/>
-          <a:lstStyle/>
-          <a:p>
-            <a:pPr algn="ctr" indent="0" marL="0">
-              <a:buNone/>
-            </a:pPr>
-            <a:r>
-              <a:rPr lang="ko-KR" altLang="en-US" sz="1000" spc="-20" kern="0" dirty="0">
-                <a:solidFill>
-                  <a:srgbClr val="004B8D"/>
-                </a:solidFill>
-                <a:latin typeface="Paperlogy 8 ExtraBold" pitchFamily="34" charset="0"/>
-                <a:ea typeface="Paperlogy 8 ExtraBold" pitchFamily="34" charset="-127"/>
-                <a:cs typeface="Paperlogy 8 ExtraBold" pitchFamily="34" charset="-120"/>
-              </a:rPr>
-              <a:t>기준</a:t>
-            </a:r>
-            <a:endParaRPr lang="en-US" sz="1000" dirty="0"/>
-          </a:p>
-        </p:txBody>
-      </p:sp>
-      <p:sp>
-        <p:nvSpPr>
-          <p:cNvPr id="110" name="주제 합의"/>
-          <p:cNvSpPr txBox="1"/>
-          <p:nvPr/>
-        </p:nvSpPr>
-        <p:spPr>
-          <a:xfrm>
-            <a:off x="3181052" y="5370612"/>
-            <a:ext cx="559395" cy="165100"/>
-          </a:xfrm>
-          <a:prstGeom prst="rect">
-            <a:avLst/>
-          </a:prstGeom>
-          <a:noFill/>
-          <a:ln/>
-        </p:spPr>
-        <p:txBody>
-          <a:bodyPr wrap="none" lIns="0" tIns="0" rIns="0" bIns="0" rtlCol="0" anchor="ctr"/>
-          <a:lstStyle/>
-          <a:p>
-            <a:pPr algn="l" indent="0" marL="0">
-              <a:buNone/>
-            </a:pPr>
-            <a:r>
-              <a:rPr lang="ko-KR" altLang="en-US" sz="1100" spc="-22" kern="0" dirty="0">
-                <a:solidFill>
-                  <a:srgbClr val="004B8D"/>
-                </a:solidFill>
-                <a:latin typeface="Paperlogy 8 ExtraBold" pitchFamily="34" charset="0"/>
-                <a:ea typeface="Paperlogy 8 ExtraBold" pitchFamily="34" charset="-127"/>
-                <a:cs typeface="Paperlogy 8 ExtraBold" pitchFamily="34" charset="-120"/>
-              </a:rPr>
-              <a:t>주제 합의</a:t>
-            </a:r>
-            <a:endParaRPr lang="en-US" sz="1100" dirty="0"/>
-          </a:p>
-        </p:txBody>
-      </p:sp>
-      <p:sp>
-        <p:nvSpPr>
-          <p:cNvPr id="111" name="강점 기반 역할 분담 · 지속적인 공유"/>
-          <p:cNvSpPr txBox="1"/>
-          <p:nvPr/>
-        </p:nvSpPr>
-        <p:spPr>
-          <a:xfrm>
-            <a:off x="4445000" y="3508375"/>
-            <a:ext cx="2492994" cy="209550"/>
-          </a:xfrm>
-          <a:prstGeom prst="rect">
-            <a:avLst/>
-          </a:prstGeom>
-          <a:noFill/>
-          <a:ln/>
-        </p:spPr>
-        <p:txBody>
-          <a:bodyPr wrap="none" lIns="0" tIns="0" rIns="0" bIns="0" rtlCol="0" anchor="ctr"/>
-          <a:lstStyle/>
-          <a:p>
-            <a:pPr algn="l" indent="0" marL="0">
-              <a:buNone/>
-            </a:pPr>
-            <a:r>
-              <a:rPr lang="ko-KR" altLang="en-US" sz="1400" spc="-49" kern="0" dirty="0">
-                <a:solidFill>
-                  <a:srgbClr val="0B2147"/>
-                </a:solidFill>
-                <a:latin typeface="Paperlogy 7 Bold" pitchFamily="34" charset="0"/>
-                <a:ea typeface="Paperlogy 7 Bold" pitchFamily="34" charset="-127"/>
-                <a:cs typeface="Paperlogy 7 Bold" pitchFamily="34" charset="-120"/>
-              </a:rPr>
-              <a:t>강점 기반 역할 분담 · 지속적인 공유</a:t>
-            </a:r>
-            <a:endParaRPr lang="en-US" sz="1400" dirty="0"/>
-          </a:p>
-        </p:txBody>
-      </p:sp>
-      <p:sp>
-        <p:nvSpPr>
-          <p:cNvPr id="112" name="팀장"/>
-          <p:cNvSpPr txBox="1"/>
-          <p:nvPr/>
-        </p:nvSpPr>
-        <p:spPr>
-          <a:xfrm>
-            <a:off x="4851400" y="3956943"/>
-            <a:ext cx="291108" cy="165100"/>
-          </a:xfrm>
-          <a:prstGeom prst="rect">
-            <a:avLst/>
-          </a:prstGeom>
-          <a:noFill/>
-          <a:ln/>
-        </p:spPr>
-        <p:txBody>
-          <a:bodyPr wrap="none" lIns="0" tIns="0" rIns="0" bIns="0" rtlCol="0" anchor="ctr"/>
-          <a:lstStyle/>
-          <a:p>
-            <a:pPr algn="l" indent="0" marL="0">
-              <a:buNone/>
-            </a:pPr>
-            <a:r>
-              <a:rPr lang="ko-KR" altLang="en-US" sz="1100" spc="-22" kern="0" dirty="0">
-                <a:solidFill>
-                  <a:srgbClr val="0B2147"/>
-                </a:solidFill>
-                <a:latin typeface="Paperlogy 8 ExtraBold" pitchFamily="34" charset="0"/>
-                <a:ea typeface="Paperlogy 8 ExtraBold" pitchFamily="34" charset="-127"/>
-                <a:cs typeface="Paperlogy 8 ExtraBold" pitchFamily="34" charset="-120"/>
-              </a:rPr>
-              <a:t>팀장</a:t>
-            </a:r>
-            <a:endParaRPr lang="en-US" sz="1100" dirty="0"/>
-          </a:p>
-        </p:txBody>
-      </p:sp>
-      <p:sp>
-        <p:nvSpPr>
-          <p:cNvPr id="113" name="나"/>
-          <p:cNvSpPr txBox="1"/>
-          <p:nvPr/>
-        </p:nvSpPr>
-        <p:spPr>
-          <a:xfrm>
-            <a:off x="5201543" y="3974405"/>
-            <a:ext cx="148630" cy="139700"/>
-          </a:xfrm>
-          <a:prstGeom prst="rect">
-            <a:avLst/>
-          </a:prstGeom>
-          <a:noFill/>
-          <a:ln/>
-        </p:spPr>
-        <p:txBody>
-          <a:bodyPr wrap="none" lIns="0" tIns="0" rIns="0" bIns="0" rtlCol="0" anchor="ctr"/>
-          <a:lstStyle/>
-          <a:p>
-            <a:pPr algn="l" indent="0" marL="0">
-              <a:buNone/>
-            </a:pPr>
-            <a:r>
-              <a:rPr lang="ko-KR" altLang="en-US" sz="900" spc="-22" kern="0" dirty="0">
-                <a:solidFill>
-                  <a:srgbClr val="FFFFFF"/>
-                </a:solidFill>
-                <a:latin typeface="Paperlogy 7 Bold" pitchFamily="34" charset="0"/>
-                <a:ea typeface="Paperlogy 7 Bold" pitchFamily="34" charset="-127"/>
-                <a:cs typeface="Paperlogy 7 Bold" pitchFamily="34" charset="-120"/>
-              </a:rPr>
-              <a:t>나</a:t>
-            </a:r>
-            <a:endParaRPr lang="en-US" sz="900" dirty="0"/>
-          </a:p>
-        </p:txBody>
-      </p:sp>
-      <p:sp>
-        <p:nvSpPr>
-          <p:cNvPr id="114" name="프로젝트 총괄"/>
-          <p:cNvSpPr txBox="1"/>
-          <p:nvPr/>
-        </p:nvSpPr>
-        <p:spPr>
-          <a:xfrm>
-            <a:off x="4737100" y="4177605"/>
-            <a:ext cx="794742" cy="165100"/>
-          </a:xfrm>
-          <a:prstGeom prst="rect">
-            <a:avLst/>
-          </a:prstGeom>
-          <a:noFill/>
-          <a:ln/>
-        </p:spPr>
-        <p:txBody>
-          <a:bodyPr wrap="none" lIns="0" tIns="0" rIns="0" bIns="0" rtlCol="0" anchor="ctr"/>
-          <a:lstStyle/>
-          <a:p>
-            <a:pPr algn="l" indent="0" marL="0">
-              <a:buNone/>
-            </a:pPr>
-            <a:r>
-              <a:rPr lang="ko-KR" altLang="en-US" sz="1100" spc="-28" kern="0" dirty="0">
-                <a:solidFill>
-                  <a:srgbClr val="4B5568"/>
+              <a:t>로 연결합니다</a:t>
+            </a:r>
+            <a:endParaRPr lang="en-US" sz="1700" dirty="0"/>
+          </a:p>
+        </p:txBody>
+      </p:sp>
+      <p:sp>
+        <p:nvSpPr>
+          <p:cNvPr id="131" name="2026년 하반기 신입사원 공개채용"/>
+          <p:cNvSpPr txBox="1"/>
+          <p:nvPr/>
+        </p:nvSpPr>
+        <p:spPr>
+          <a:xfrm>
+            <a:off x="609600" y="6425605"/>
+            <a:ext cx="1659507" cy="139700"/>
+          </a:xfrm>
+          <a:prstGeom prst="rect">
+            <a:avLst/>
+          </a:prstGeom>
+          <a:noFill/>
+          <a:ln/>
+        </p:spPr>
+        <p:txBody>
+          <a:bodyPr wrap="none" lIns="0" tIns="0" rIns="0" bIns="0" rtlCol="0" anchor="ctr"/>
+          <a:lstStyle/>
+          <a:p>
+            <a:pPr algn="l" indent="0" marL="0">
+              <a:buNone/>
+            </a:pPr>
+            <a:r>
+              <a:rPr lang="ko-KR" altLang="en-US" sz="900" spc="-9" kern="0" dirty="0">
+                <a:solidFill>
+                  <a:srgbClr val="8691A5"/>
                 </a:solidFill>
                 <a:latin typeface="Paperlogy 5 Medium" pitchFamily="34" charset="0"/>
                 <a:ea typeface="Paperlogy 5 Medium" pitchFamily="34" charset="-127"/>
                 <a:cs typeface="Paperlogy 5 Medium" pitchFamily="34" charset="-120"/>
               </a:rPr>
-              <a:t>프로젝트 총괄</a:t>
-            </a:r>
-            <a:endParaRPr lang="en-US" sz="1100" dirty="0"/>
-          </a:p>
-        </p:txBody>
-      </p:sp>
-      <p:sp>
-        <p:nvSpPr>
-          <p:cNvPr id="115" name="Dynamo"/>
-          <p:cNvSpPr txBox="1"/>
-          <p:nvPr/>
-        </p:nvSpPr>
-        <p:spPr>
-          <a:xfrm>
-            <a:off x="4794250" y="4384576"/>
-            <a:ext cx="539155" cy="139700"/>
-          </a:xfrm>
-          <a:prstGeom prst="rect">
-            <a:avLst/>
-          </a:prstGeom>
-          <a:noFill/>
-          <a:ln/>
-        </p:spPr>
-        <p:txBody>
-          <a:bodyPr wrap="none" lIns="0" tIns="0" rIns="0" bIns="0" rtlCol="0" anchor="ctr"/>
-          <a:lstStyle/>
-          <a:p>
-            <a:pPr algn="l" indent="0" marL="0">
-              <a:buNone/>
-            </a:pPr>
-            <a:r>
-              <a:rPr lang="ko-KR" altLang="en-US" sz="900" spc="-28" kern="0" dirty="0">
-                <a:solidFill>
-                  <a:srgbClr val="004B8D"/>
-                </a:solidFill>
-                <a:latin typeface="Paperlogy 7 Bold" pitchFamily="34" charset="0"/>
-                <a:ea typeface="Paperlogy 7 Bold" pitchFamily="34" charset="-127"/>
-                <a:cs typeface="Paperlogy 7 Bold" pitchFamily="34" charset="-120"/>
-              </a:rPr>
-              <a:t>Dynamo</a:t>
+              <a:t>2026년 하반기 신입사원 공개채용</a:t>
             </a:r>
             <a:endParaRPr lang="en-US" sz="900" dirty="0"/>
           </a:p>
@@ -4337,776 +5129,7 @@
       </p:sp>
       <p:sp>
         <p:nvSpPr>
-          <p:cNvPr id="116" name="기반 자동화 알고리즘 개발"/>
-          <p:cNvSpPr txBox="1"/>
-          <p:nvPr/>
-        </p:nvSpPr>
-        <p:spPr>
-          <a:xfrm>
-            <a:off x="5390555" y="4373166"/>
-            <a:ext cx="1479348" cy="165100"/>
-          </a:xfrm>
-          <a:prstGeom prst="rect">
-            <a:avLst/>
-          </a:prstGeom>
-          <a:noFill/>
-          <a:ln/>
-        </p:spPr>
-        <p:txBody>
-          <a:bodyPr wrap="none" lIns="0" tIns="0" rIns="0" bIns="0" rtlCol="0" anchor="ctr"/>
-          <a:lstStyle/>
-          <a:p>
-            <a:pPr algn="l" indent="0" marL="0">
-              <a:buNone/>
-            </a:pPr>
-            <a:r>
-              <a:rPr lang="ko-KR" altLang="en-US" sz="1100" spc="-28" kern="0" dirty="0">
-                <a:solidFill>
-                  <a:srgbClr val="4B5568"/>
-                </a:solidFill>
-                <a:latin typeface="Paperlogy 5 Medium" pitchFamily="34" charset="0"/>
-                <a:ea typeface="Paperlogy 5 Medium" pitchFamily="34" charset="-127"/>
-                <a:cs typeface="Paperlogy 5 Medium" pitchFamily="34" charset="-120"/>
-              </a:rPr>
-              <a:t>기반 자동화 알고리즘 개발</a:t>
-            </a:r>
-            <a:endParaRPr lang="en-US" sz="1100" dirty="0"/>
-          </a:p>
-        </p:txBody>
-      </p:sp>
-      <p:sp>
-        <p:nvSpPr>
-          <p:cNvPr id="117" name="팀원 A"/>
-          <p:cNvSpPr txBox="1"/>
-          <p:nvPr/>
-        </p:nvSpPr>
-        <p:spPr>
-          <a:xfrm>
-            <a:off x="7334250" y="3949005"/>
-            <a:ext cx="424656" cy="165100"/>
-          </a:xfrm>
-          <a:prstGeom prst="rect">
-            <a:avLst/>
-          </a:prstGeom>
-          <a:noFill/>
-          <a:ln/>
-        </p:spPr>
-        <p:txBody>
-          <a:bodyPr wrap="none" lIns="0" tIns="0" rIns="0" bIns="0" rtlCol="0" anchor="ctr"/>
-          <a:lstStyle/>
-          <a:p>
-            <a:pPr algn="l" indent="0" marL="0">
-              <a:buNone/>
-            </a:pPr>
-            <a:r>
-              <a:rPr lang="ko-KR" altLang="en-US" sz="1100" spc="-22" kern="0" dirty="0">
-                <a:solidFill>
-                  <a:srgbClr val="0B2147"/>
-                </a:solidFill>
-                <a:latin typeface="Paperlogy 8 ExtraBold" pitchFamily="34" charset="0"/>
-                <a:ea typeface="Paperlogy 8 ExtraBold" pitchFamily="34" charset="-127"/>
-                <a:cs typeface="Paperlogy 8 ExtraBold" pitchFamily="34" charset="-120"/>
-              </a:rPr>
-              <a:t>팀원 A</a:t>
-            </a:r>
-            <a:endParaRPr lang="en-US" sz="1100" dirty="0"/>
-          </a:p>
-        </p:txBody>
-      </p:sp>
-      <p:sp>
-        <p:nvSpPr>
-          <p:cNvPr id="118" name="유닛 모듈러 설계"/>
-          <p:cNvSpPr txBox="1"/>
-          <p:nvPr/>
-        </p:nvSpPr>
-        <p:spPr>
-          <a:xfrm>
-            <a:off x="7219950" y="4161730"/>
-            <a:ext cx="944023" cy="165100"/>
-          </a:xfrm>
-          <a:prstGeom prst="rect">
-            <a:avLst/>
-          </a:prstGeom>
-          <a:noFill/>
-          <a:ln/>
-        </p:spPr>
-        <p:txBody>
-          <a:bodyPr wrap="none" lIns="0" tIns="0" rIns="0" bIns="0" rtlCol="0" anchor="ctr"/>
-          <a:lstStyle/>
-          <a:p>
-            <a:pPr algn="l" indent="0" marL="0">
-              <a:buNone/>
-            </a:pPr>
-            <a:r>
-              <a:rPr lang="ko-KR" altLang="en-US" sz="1100" spc="-28" kern="0" dirty="0">
-                <a:solidFill>
-                  <a:srgbClr val="4B5568"/>
-                </a:solidFill>
-                <a:latin typeface="Paperlogy 5 Medium" pitchFamily="34" charset="0"/>
-                <a:ea typeface="Paperlogy 5 Medium" pitchFamily="34" charset="-127"/>
-                <a:cs typeface="Paperlogy 5 Medium" pitchFamily="34" charset="-120"/>
-              </a:rPr>
-              <a:t>유닛 모듈러 설계</a:t>
-            </a:r>
-            <a:endParaRPr lang="en-US" sz="1100" dirty="0"/>
-          </a:p>
-        </p:txBody>
-      </p:sp>
-      <p:sp>
-        <p:nvSpPr>
-          <p:cNvPr id="119" name="배치계획"/>
-          <p:cNvSpPr txBox="1"/>
-          <p:nvPr/>
-        </p:nvSpPr>
-        <p:spPr>
-          <a:xfrm>
-            <a:off x="7219950" y="4357291"/>
-            <a:ext cx="528638" cy="165100"/>
-          </a:xfrm>
-          <a:prstGeom prst="rect">
-            <a:avLst/>
-          </a:prstGeom>
-          <a:noFill/>
-          <a:ln/>
-        </p:spPr>
-        <p:txBody>
-          <a:bodyPr wrap="none" lIns="0" tIns="0" rIns="0" bIns="0" rtlCol="0" anchor="ctr"/>
-          <a:lstStyle/>
-          <a:p>
-            <a:pPr algn="l" indent="0" marL="0">
-              <a:buNone/>
-            </a:pPr>
-            <a:r>
-              <a:rPr lang="ko-KR" altLang="en-US" sz="1100" spc="-28" kern="0" dirty="0">
-                <a:solidFill>
-                  <a:srgbClr val="4B5568"/>
-                </a:solidFill>
-                <a:latin typeface="Paperlogy 5 Medium" pitchFamily="34" charset="0"/>
-                <a:ea typeface="Paperlogy 5 Medium" pitchFamily="34" charset="-127"/>
-                <a:cs typeface="Paperlogy 5 Medium" pitchFamily="34" charset="-120"/>
-              </a:rPr>
-              <a:t>배치계획</a:t>
-            </a:r>
-            <a:endParaRPr lang="en-US" sz="1100" dirty="0"/>
-          </a:p>
-        </p:txBody>
-      </p:sp>
-      <p:sp>
-        <p:nvSpPr>
-          <p:cNvPr id="120" name="이틀마다 진행상황 공유 · 피드백"/>
-          <p:cNvSpPr txBox="1"/>
-          <p:nvPr/>
-        </p:nvSpPr>
-        <p:spPr>
-          <a:xfrm>
-            <a:off x="6281241" y="4677073"/>
-            <a:ext cx="1653512" cy="152400"/>
-          </a:xfrm>
-          <a:prstGeom prst="rect">
-            <a:avLst/>
-          </a:prstGeom>
-          <a:noFill/>
-          <a:ln/>
-        </p:spPr>
-        <p:txBody>
-          <a:bodyPr wrap="none" lIns="0" tIns="0" rIns="0" bIns="0" rtlCol="0" anchor="ctr"/>
-          <a:lstStyle/>
-          <a:p>
-            <a:pPr algn="l" indent="0" marL="0">
-              <a:buNone/>
-            </a:pPr>
-            <a:r>
-              <a:rPr lang="ko-KR" altLang="en-US" sz="1000" spc="-20" kern="0" dirty="0">
-                <a:solidFill>
-                  <a:srgbClr val="0B6B33"/>
-                </a:solidFill>
-                <a:latin typeface="Paperlogy 7 Bold" pitchFamily="34" charset="0"/>
-                <a:ea typeface="Paperlogy 7 Bold" pitchFamily="34" charset="-127"/>
-                <a:cs typeface="Paperlogy 7 Bold" pitchFamily="34" charset="-120"/>
-              </a:rPr>
-              <a:t>이틀마다 진행상황 공유 · 피드백</a:t>
-            </a:r>
-            <a:endParaRPr lang="en-US" sz="1000" dirty="0"/>
-          </a:p>
-        </p:txBody>
-      </p:sp>
-      <p:sp>
-        <p:nvSpPr>
-          <p:cNvPr id="121" name="팀원 B"/>
-          <p:cNvSpPr txBox="1"/>
-          <p:nvPr/>
-        </p:nvSpPr>
-        <p:spPr>
-          <a:xfrm>
-            <a:off x="4851400" y="4946948"/>
-            <a:ext cx="424458" cy="165100"/>
-          </a:xfrm>
-          <a:prstGeom prst="rect">
-            <a:avLst/>
-          </a:prstGeom>
-          <a:noFill/>
-          <a:ln/>
-        </p:spPr>
-        <p:txBody>
-          <a:bodyPr wrap="none" lIns="0" tIns="0" rIns="0" bIns="0" rtlCol="0" anchor="ctr"/>
-          <a:lstStyle/>
-          <a:p>
-            <a:pPr algn="l" indent="0" marL="0">
-              <a:buNone/>
-            </a:pPr>
-            <a:r>
-              <a:rPr lang="ko-KR" altLang="en-US" sz="1100" spc="-22" kern="0" dirty="0">
-                <a:solidFill>
-                  <a:srgbClr val="0B2147"/>
-                </a:solidFill>
-                <a:latin typeface="Paperlogy 8 ExtraBold" pitchFamily="34" charset="0"/>
-                <a:ea typeface="Paperlogy 8 ExtraBold" pitchFamily="34" charset="-127"/>
-                <a:cs typeface="Paperlogy 8 ExtraBold" pitchFamily="34" charset="-120"/>
-              </a:rPr>
-              <a:t>팀원 B</a:t>
-            </a:r>
-            <a:endParaRPr lang="en-US" sz="1100" dirty="0"/>
-          </a:p>
-        </p:txBody>
-      </p:sp>
-      <p:sp>
-        <p:nvSpPr>
-          <p:cNvPr id="122" name="Revit"/>
-          <p:cNvSpPr txBox="1"/>
-          <p:nvPr/>
-        </p:nvSpPr>
-        <p:spPr>
-          <a:xfrm>
-            <a:off x="4794250" y="5171083"/>
-            <a:ext cx="337443" cy="139700"/>
-          </a:xfrm>
-          <a:prstGeom prst="rect">
-            <a:avLst/>
-          </a:prstGeom>
-          <a:noFill/>
-          <a:ln/>
-        </p:spPr>
-        <p:txBody>
-          <a:bodyPr wrap="none" lIns="0" tIns="0" rIns="0" bIns="0" rtlCol="0" anchor="ctr"/>
-          <a:lstStyle/>
-          <a:p>
-            <a:pPr algn="l" indent="0" marL="0">
-              <a:buNone/>
-            </a:pPr>
-            <a:r>
-              <a:rPr lang="ko-KR" altLang="en-US" sz="900" spc="-28" kern="0" dirty="0">
-                <a:solidFill>
-                  <a:srgbClr val="004B8D"/>
-                </a:solidFill>
-                <a:latin typeface="Paperlogy 7 Bold" pitchFamily="34" charset="0"/>
-                <a:ea typeface="Paperlogy 7 Bold" pitchFamily="34" charset="-127"/>
-                <a:cs typeface="Paperlogy 7 Bold" pitchFamily="34" charset="-120"/>
-              </a:rPr>
-              <a:t>Revit</a:t>
-            </a:r>
-            <a:endParaRPr lang="en-US" sz="900" dirty="0"/>
-          </a:p>
-        </p:txBody>
-      </p:sp>
-      <p:sp>
-        <p:nvSpPr>
-          <p:cNvPr id="123" name="기반 BIM 모델링"/>
-          <p:cNvSpPr txBox="1"/>
-          <p:nvPr/>
-        </p:nvSpPr>
-        <p:spPr>
-          <a:xfrm>
-            <a:off x="5188843" y="5159673"/>
-            <a:ext cx="979045" cy="165100"/>
-          </a:xfrm>
-          <a:prstGeom prst="rect">
-            <a:avLst/>
-          </a:prstGeom>
-          <a:noFill/>
-          <a:ln/>
-        </p:spPr>
-        <p:txBody>
-          <a:bodyPr wrap="none" lIns="0" tIns="0" rIns="0" bIns="0" rtlCol="0" anchor="ctr"/>
-          <a:lstStyle/>
-          <a:p>
-            <a:pPr algn="l" indent="0" marL="0">
-              <a:buNone/>
-            </a:pPr>
-            <a:r>
-              <a:rPr lang="ko-KR" altLang="en-US" sz="1100" spc="-28" kern="0" dirty="0">
-                <a:solidFill>
-                  <a:srgbClr val="4B5568"/>
-                </a:solidFill>
-                <a:latin typeface="Paperlogy 5 Medium" pitchFamily="34" charset="0"/>
-                <a:ea typeface="Paperlogy 5 Medium" pitchFamily="34" charset="-127"/>
-                <a:cs typeface="Paperlogy 5 Medium" pitchFamily="34" charset="-120"/>
-              </a:rPr>
-              <a:t>기반 BIM 모델링</a:t>
-            </a:r>
-            <a:endParaRPr lang="en-US" sz="1100" dirty="0"/>
-          </a:p>
-        </p:txBody>
-      </p:sp>
-      <p:sp>
-        <p:nvSpPr>
-          <p:cNvPr id="124" name="데이터 구축"/>
-          <p:cNvSpPr txBox="1"/>
-          <p:nvPr/>
-        </p:nvSpPr>
-        <p:spPr>
-          <a:xfrm>
-            <a:off x="4737100" y="5355233"/>
-            <a:ext cx="675283" cy="165100"/>
-          </a:xfrm>
-          <a:prstGeom prst="rect">
-            <a:avLst/>
-          </a:prstGeom>
-          <a:noFill/>
-          <a:ln/>
-        </p:spPr>
-        <p:txBody>
-          <a:bodyPr wrap="none" lIns="0" tIns="0" rIns="0" bIns="0" rtlCol="0" anchor="ctr"/>
-          <a:lstStyle/>
-          <a:p>
-            <a:pPr algn="l" indent="0" marL="0">
-              <a:buNone/>
-            </a:pPr>
-            <a:r>
-              <a:rPr lang="ko-KR" altLang="en-US" sz="1100" spc="-28" kern="0" dirty="0">
-                <a:solidFill>
-                  <a:srgbClr val="4B5568"/>
-                </a:solidFill>
-                <a:latin typeface="Paperlogy 5 Medium" pitchFamily="34" charset="0"/>
-                <a:ea typeface="Paperlogy 5 Medium" pitchFamily="34" charset="-127"/>
-                <a:cs typeface="Paperlogy 5 Medium" pitchFamily="34" charset="-120"/>
-              </a:rPr>
-              <a:t>데이터 구축</a:t>
-            </a:r>
-            <a:endParaRPr lang="en-US" sz="1100" dirty="0"/>
-          </a:p>
-        </p:txBody>
-      </p:sp>
-      <p:sp>
-        <p:nvSpPr>
-          <p:cNvPr id="125" name="팀원 C"/>
-          <p:cNvSpPr txBox="1"/>
-          <p:nvPr/>
-        </p:nvSpPr>
-        <p:spPr>
-          <a:xfrm>
-            <a:off x="7334250" y="4946948"/>
-            <a:ext cx="419695" cy="165100"/>
-          </a:xfrm>
-          <a:prstGeom prst="rect">
-            <a:avLst/>
-          </a:prstGeom>
-          <a:noFill/>
-          <a:ln/>
-        </p:spPr>
-        <p:txBody>
-          <a:bodyPr wrap="none" lIns="0" tIns="0" rIns="0" bIns="0" rtlCol="0" anchor="ctr"/>
-          <a:lstStyle/>
-          <a:p>
-            <a:pPr algn="l" indent="0" marL="0">
-              <a:buNone/>
-            </a:pPr>
-            <a:r>
-              <a:rPr lang="ko-KR" altLang="en-US" sz="1100" spc="-22" kern="0" dirty="0">
-                <a:solidFill>
-                  <a:srgbClr val="0B2147"/>
-                </a:solidFill>
-                <a:latin typeface="Paperlogy 8 ExtraBold" pitchFamily="34" charset="0"/>
-                <a:ea typeface="Paperlogy 8 ExtraBold" pitchFamily="34" charset="-127"/>
-                <a:cs typeface="Paperlogy 8 ExtraBold" pitchFamily="34" charset="-120"/>
-              </a:rPr>
-              <a:t>팀원 C</a:t>
-            </a:r>
-            <a:endParaRPr lang="en-US" sz="1100" dirty="0"/>
-          </a:p>
-        </p:txBody>
-      </p:sp>
-      <p:sp>
-        <p:nvSpPr>
-          <p:cNvPr id="126" name="리모델링 적용 시나리오 구성"/>
-          <p:cNvSpPr txBox="1"/>
-          <p:nvPr/>
-        </p:nvSpPr>
-        <p:spPr>
-          <a:xfrm>
-            <a:off x="7219950" y="5159673"/>
-            <a:ext cx="1605975" cy="165100"/>
-          </a:xfrm>
-          <a:prstGeom prst="rect">
-            <a:avLst/>
-          </a:prstGeom>
-          <a:noFill/>
-          <a:ln/>
-        </p:spPr>
-        <p:txBody>
-          <a:bodyPr wrap="none" lIns="0" tIns="0" rIns="0" bIns="0" rtlCol="0" anchor="ctr"/>
-          <a:lstStyle/>
-          <a:p>
-            <a:pPr algn="l" indent="0" marL="0">
-              <a:buNone/>
-            </a:pPr>
-            <a:r>
-              <a:rPr lang="ko-KR" altLang="en-US" sz="1100" spc="-28" kern="0" dirty="0">
-                <a:solidFill>
-                  <a:srgbClr val="4B5568"/>
-                </a:solidFill>
-                <a:latin typeface="Paperlogy 5 Medium" pitchFamily="34" charset="0"/>
-                <a:ea typeface="Paperlogy 5 Medium" pitchFamily="34" charset="-127"/>
-                <a:cs typeface="Paperlogy 5 Medium" pitchFamily="34" charset="-120"/>
-              </a:rPr>
-              <a:t>리모델링 적용 시나리오 구성</a:t>
-            </a:r>
-            <a:endParaRPr lang="en-US" sz="1100" dirty="0"/>
-          </a:p>
-        </p:txBody>
-      </p:sp>
-      <p:sp>
-        <p:nvSpPr>
-          <p:cNvPr id="127" name="시연 영상 제작"/>
-          <p:cNvSpPr txBox="1"/>
-          <p:nvPr/>
-        </p:nvSpPr>
-        <p:spPr>
-          <a:xfrm>
-            <a:off x="7219950" y="5355233"/>
-            <a:ext cx="822027" cy="165100"/>
-          </a:xfrm>
-          <a:prstGeom prst="rect">
-            <a:avLst/>
-          </a:prstGeom>
-          <a:noFill/>
-          <a:ln/>
-        </p:spPr>
-        <p:txBody>
-          <a:bodyPr wrap="none" lIns="0" tIns="0" rIns="0" bIns="0" rtlCol="0" anchor="ctr"/>
-          <a:lstStyle/>
-          <a:p>
-            <a:pPr algn="l" indent="0" marL="0">
-              <a:buNone/>
-            </a:pPr>
-            <a:r>
-              <a:rPr lang="ko-KR" altLang="en-US" sz="1100" spc="-28" kern="0" dirty="0">
-                <a:solidFill>
-                  <a:srgbClr val="4B5568"/>
-                </a:solidFill>
-                <a:latin typeface="Paperlogy 5 Medium" pitchFamily="34" charset="0"/>
-                <a:ea typeface="Paperlogy 5 Medium" pitchFamily="34" charset="-127"/>
-                <a:cs typeface="Paperlogy 5 Medium" pitchFamily="34" charset="-120"/>
-              </a:rPr>
-              <a:t>시연 영상 제작</a:t>
-            </a:r>
-            <a:endParaRPr lang="en-US" sz="1100" dirty="0"/>
-          </a:p>
-        </p:txBody>
-      </p:sp>
-      <p:sp>
-        <p:nvSpPr>
-          <p:cNvPr id="128" name="프로젝트 완성 · 장려상 수상"/>
-          <p:cNvSpPr txBox="1"/>
-          <p:nvPr/>
-        </p:nvSpPr>
-        <p:spPr>
-          <a:xfrm>
-            <a:off x="9677400" y="3508375"/>
-            <a:ext cx="1945469" cy="209550"/>
-          </a:xfrm>
-          <a:prstGeom prst="rect">
-            <a:avLst/>
-          </a:prstGeom>
-          <a:noFill/>
-          <a:ln/>
-        </p:spPr>
-        <p:txBody>
-          <a:bodyPr wrap="none" lIns="0" tIns="0" rIns="0" bIns="0" rtlCol="0" anchor="ctr"/>
-          <a:lstStyle/>
-          <a:p>
-            <a:pPr algn="l" indent="0" marL="0">
-              <a:buNone/>
-            </a:pPr>
-            <a:r>
-              <a:rPr lang="ko-KR" altLang="en-US" sz="1400" spc="-49" kern="0" dirty="0">
-                <a:solidFill>
-                  <a:srgbClr val="0B2147"/>
-                </a:solidFill>
-                <a:latin typeface="Paperlogy 7 Bold" pitchFamily="34" charset="0"/>
-                <a:ea typeface="Paperlogy 7 Bold" pitchFamily="34" charset="-127"/>
-                <a:cs typeface="Paperlogy 7 Bold" pitchFamily="34" charset="-120"/>
-              </a:rPr>
-              <a:t>프로젝트 완성 · 장려상 수상</a:t>
-            </a:r>
-            <a:endParaRPr lang="en-US" sz="1400" dirty="0"/>
-          </a:p>
-        </p:txBody>
-      </p:sp>
-      <p:sp>
-        <p:nvSpPr>
-          <p:cNvPr id="129" name="장려상"/>
-          <p:cNvSpPr txBox="1"/>
-          <p:nvPr/>
-        </p:nvSpPr>
-        <p:spPr>
-          <a:xfrm>
-            <a:off x="10944969" y="4457700"/>
-            <a:ext cx="411262" cy="165100"/>
-          </a:xfrm>
-          <a:prstGeom prst="rect">
-            <a:avLst/>
-          </a:prstGeom>
-          <a:noFill/>
-          <a:ln/>
-        </p:spPr>
-        <p:txBody>
-          <a:bodyPr wrap="none" lIns="0" tIns="0" rIns="0" bIns="0" rtlCol="0" anchor="ctr"/>
-          <a:lstStyle/>
-          <a:p>
-            <a:pPr algn="l" indent="0" marL="0">
-              <a:buNone/>
-            </a:pPr>
-            <a:r>
-              <a:rPr lang="ko-KR" altLang="en-US" sz="1100" spc="-22" kern="0" dirty="0">
-                <a:solidFill>
-                  <a:srgbClr val="0B2147"/>
-                </a:solidFill>
-                <a:latin typeface="Paperlogy 8 ExtraBold" pitchFamily="34" charset="0"/>
-                <a:ea typeface="Paperlogy 8 ExtraBold" pitchFamily="34" charset="-127"/>
-                <a:cs typeface="Paperlogy 8 ExtraBold" pitchFamily="34" charset="-120"/>
-              </a:rPr>
-              <a:t>장려상</a:t>
-            </a:r>
-            <a:endParaRPr lang="en-US" sz="1100" dirty="0"/>
-          </a:p>
-        </p:txBody>
-      </p:sp>
-      <p:sp>
-        <p:nvSpPr>
-          <p:cNvPr id="130" name="남은 3주 내 시연 영상 완성"/>
-          <p:cNvSpPr txBox="1"/>
-          <p:nvPr/>
-        </p:nvSpPr>
-        <p:spPr>
-          <a:xfrm>
-            <a:off x="9956800" y="5195094"/>
-            <a:ext cx="1505535" cy="165100"/>
-          </a:xfrm>
-          <a:prstGeom prst="rect">
-            <a:avLst/>
-          </a:prstGeom>
-          <a:noFill/>
-          <a:ln/>
-        </p:spPr>
-        <p:txBody>
-          <a:bodyPr wrap="none" lIns="0" tIns="0" rIns="0" bIns="0" rtlCol="0" anchor="ctr"/>
-          <a:lstStyle/>
-          <a:p>
-            <a:pPr algn="l" indent="0" marL="0">
-              <a:buNone/>
-            </a:pPr>
-            <a:r>
-              <a:rPr lang="ko-KR" altLang="en-US" sz="1100" spc="-28" kern="0" dirty="0">
-                <a:solidFill>
-                  <a:srgbClr val="1C2536"/>
-                </a:solidFill>
-                <a:latin typeface="Paperlogy 6 SemiBold" pitchFamily="34" charset="0"/>
-                <a:ea typeface="Paperlogy 6 SemiBold" pitchFamily="34" charset="-127"/>
-                <a:cs typeface="Paperlogy 6 SemiBold" pitchFamily="34" charset="-120"/>
-              </a:rPr>
-              <a:t>남은 3주 내 시연 영상 완성</a:t>
-            </a:r>
-            <a:endParaRPr lang="en-US" sz="1100" dirty="0"/>
-          </a:p>
-        </p:txBody>
-      </p:sp>
-      <p:sp>
-        <p:nvSpPr>
-          <p:cNvPr id="131" name="학생 BIM 경진대회 장려상"/>
-          <p:cNvSpPr txBox="1"/>
-          <p:nvPr/>
-        </p:nvSpPr>
-        <p:spPr>
-          <a:xfrm>
-            <a:off x="9956800" y="5416054"/>
-            <a:ext cx="1516158" cy="165100"/>
-          </a:xfrm>
-          <a:prstGeom prst="rect">
-            <a:avLst/>
-          </a:prstGeom>
-          <a:noFill/>
-          <a:ln/>
-        </p:spPr>
-        <p:txBody>
-          <a:bodyPr wrap="none" lIns="0" tIns="0" rIns="0" bIns="0" rtlCol="0" anchor="ctr"/>
-          <a:lstStyle/>
-          <a:p>
-            <a:pPr algn="l" indent="0" marL="0">
-              <a:buNone/>
-            </a:pPr>
-            <a:r>
-              <a:rPr lang="ko-KR" altLang="en-US" sz="1100" spc="-28" kern="0" dirty="0">
-                <a:solidFill>
-                  <a:srgbClr val="1C2536"/>
-                </a:solidFill>
-                <a:latin typeface="Paperlogy 6 SemiBold" pitchFamily="34" charset="0"/>
-                <a:ea typeface="Paperlogy 6 SemiBold" pitchFamily="34" charset="-127"/>
-                <a:cs typeface="Paperlogy 6 SemiBold" pitchFamily="34" charset="-120"/>
-              </a:rPr>
-              <a:t>학생 BIM 경진대회 장려상</a:t>
-            </a:r>
-            <a:endParaRPr lang="en-US" sz="1100" dirty="0"/>
-          </a:p>
-        </p:txBody>
-      </p:sp>
-      <p:sp>
-        <p:nvSpPr>
-          <p:cNvPr id="132" name="KEY MESSAGE"/>
-          <p:cNvSpPr txBox="1"/>
-          <p:nvPr/>
-        </p:nvSpPr>
-        <p:spPr>
-          <a:xfrm>
-            <a:off x="1308100" y="6007298"/>
-            <a:ext cx="1171825" cy="146050"/>
-          </a:xfrm>
-          <a:prstGeom prst="rect">
-            <a:avLst/>
-          </a:prstGeom>
-          <a:noFill/>
-          <a:ln/>
-        </p:spPr>
-        <p:txBody>
-          <a:bodyPr wrap="none" lIns="0" tIns="0" rIns="0" bIns="0" rtlCol="0" anchor="ctr"/>
-          <a:lstStyle/>
-          <a:p>
-            <a:pPr algn="l" indent="0" marL="0">
-              <a:buNone/>
-            </a:pPr>
-            <a:r>
-              <a:rPr lang="ko-KR" altLang="en-US" sz="950" spc="152" kern="0" dirty="0">
-                <a:solidFill>
-                  <a:srgbClr val="8FD3F5"/>
-                </a:solidFill>
-                <a:latin typeface="Paperlogy 7 Bold" pitchFamily="34" charset="0"/>
-                <a:ea typeface="Paperlogy 7 Bold" pitchFamily="34" charset="-127"/>
-                <a:cs typeface="Paperlogy 7 Bold" pitchFamily="34" charset="-120"/>
-              </a:rPr>
-              <a:t>KEY MESSAGE</a:t>
-            </a:r>
-            <a:endParaRPr lang="en-US" sz="950" dirty="0"/>
-          </a:p>
-        </p:txBody>
-      </p:sp>
-      <p:sp>
-        <p:nvSpPr>
-          <p:cNvPr id="133" name="서로 다른 사람을 하나의 공동 목표로 연결합니다"/>
-          <p:cNvSpPr txBox="1"/>
-          <p:nvPr/>
-        </p:nvSpPr>
-        <p:spPr>
-          <a:xfrm>
-            <a:off x="2591395" y="5954514"/>
-            <a:ext cx="4151660" cy="254000"/>
-          </a:xfrm>
-          <a:prstGeom prst="rect">
-            <a:avLst/>
-          </a:prstGeom>
-          <a:noFill/>
-          <a:ln/>
-        </p:spPr>
-        <p:txBody>
-          <a:bodyPr wrap="none" lIns="0" tIns="0" rIns="0" bIns="0" rtlCol="0" anchor="ctr"/>
-          <a:lstStyle/>
-          <a:p>
-            <a:pPr algn="l" indent="0" marL="0">
-              <a:buNone/>
-            </a:pPr>
-            <a:r>
-              <a:rPr lang="ko-KR" altLang="en-US" sz="1700" spc="-51" kern="0" dirty="0">
-                <a:solidFill>
-                  <a:srgbClr val="FFFFFF"/>
-                </a:solidFill>
-                <a:latin typeface="Paperlogy 7 Bold" pitchFamily="34" charset="0"/>
-                <a:ea typeface="Paperlogy 7 Bold" pitchFamily="34" charset="-127"/>
-                <a:cs typeface="Paperlogy 7 Bold" pitchFamily="34" charset="-120"/>
-              </a:rPr>
-              <a:t>서로 다른 사람을 </a:t>
-            </a:r>
-            <a:pPr algn="l" indent="0" marL="0">
-              <a:buNone/>
-            </a:pPr>
-            <a:r>
-              <a:rPr lang="ko-KR" altLang="en-US" sz="1700" spc="-51" kern="0" dirty="0">
-                <a:solidFill>
-                  <a:srgbClr val="FDBB30"/>
-                </a:solidFill>
-                <a:latin typeface="Paperlogy 7 Bold" pitchFamily="34" charset="0"/>
-                <a:ea typeface="Paperlogy 7 Bold" pitchFamily="34" charset="-127"/>
-                <a:cs typeface="Paperlogy 7 Bold" pitchFamily="34" charset="-120"/>
-              </a:rPr>
-              <a:t>하나의 공동 목표</a:t>
-            </a:r>
-            <a:pPr algn="l" indent="0" marL="0">
-              <a:buNone/>
-            </a:pPr>
-            <a:r>
-              <a:rPr lang="ko-KR" altLang="en-US" sz="1700" spc="-51" kern="0" dirty="0">
-                <a:solidFill>
-                  <a:srgbClr val="FFFFFF"/>
-                </a:solidFill>
-                <a:latin typeface="Paperlogy 7 Bold" pitchFamily="34" charset="0"/>
-                <a:ea typeface="Paperlogy 7 Bold" pitchFamily="34" charset="-127"/>
-                <a:cs typeface="Paperlogy 7 Bold" pitchFamily="34" charset="-120"/>
-              </a:rPr>
-              <a:t>로 연결합니다</a:t>
-            </a:r>
-            <a:endParaRPr lang="en-US" sz="1700" dirty="0"/>
-          </a:p>
-        </p:txBody>
-      </p:sp>
-      <p:sp>
-        <p:nvSpPr>
-          <p:cNvPr id="134" name="2026년 하반기 신입사원 공개채용"/>
-          <p:cNvSpPr txBox="1"/>
-          <p:nvPr/>
-        </p:nvSpPr>
-        <p:spPr>
-          <a:xfrm>
-            <a:off x="609600" y="6425605"/>
-            <a:ext cx="1659507" cy="139700"/>
-          </a:xfrm>
-          <a:prstGeom prst="rect">
-            <a:avLst/>
-          </a:prstGeom>
-          <a:noFill/>
-          <a:ln/>
-        </p:spPr>
-        <p:txBody>
-          <a:bodyPr wrap="none" lIns="0" tIns="0" rIns="0" bIns="0" rtlCol="0" anchor="ctr"/>
-          <a:lstStyle/>
-          <a:p>
-            <a:pPr algn="l" indent="0" marL="0">
-              <a:buNone/>
-            </a:pPr>
-            <a:r>
-              <a:rPr lang="ko-KR" altLang="en-US" sz="900" spc="-9" kern="0" dirty="0">
-                <a:solidFill>
-                  <a:srgbClr val="8691A5"/>
-                </a:solidFill>
-                <a:latin typeface="Paperlogy 5 Medium" pitchFamily="34" charset="0"/>
-                <a:ea typeface="Paperlogy 5 Medium" pitchFamily="34" charset="-127"/>
-                <a:cs typeface="Paperlogy 5 Medium" pitchFamily="34" charset="-120"/>
-              </a:rPr>
-              <a:t>2026년 하반기 신입사원 공개채용</a:t>
-            </a:r>
-            <a:endParaRPr lang="en-US" sz="900" dirty="0"/>
-          </a:p>
-        </p:txBody>
-      </p:sp>
-      <p:sp>
-        <p:nvSpPr>
-          <p:cNvPr id="135" name="01 / 03"/>
+          <p:cNvPr id="132" name="01 / 03"/>
           <p:cNvSpPr txBox="1"/>
           <p:nvPr/>
         </p:nvSpPr>

--- a/hec-pt/pptx/landscape.pptx
+++ b/hec-pt/pptx/landscape.pptx
@@ -1177,180 +1177,9 @@
           </a:prstGeom>
         </p:spPr>
       </p:pic>
-      <p:sp>
-        <p:nvSpPr>
-          <p:cNvPr id="8" name="p1-proj"/>
-          <p:cNvSpPr/>
-          <p:nvPr/>
-        </p:nvSpPr>
-        <p:spPr>
-          <a:xfrm>
-            <a:off x="615950" y="1820664"/>
-            <a:ext cx="10960100" cy="1727200"/>
-          </a:xfrm>
-          <a:prstGeom prst="roundRect">
-            <a:avLst>
-              <a:gd name="adj" fmla="val 7721"/>
-            </a:avLst>
-          </a:prstGeom>
-          <a:solidFill>
-            <a:srgbClr val="FFFFFF"/>
-          </a:solidFill>
-          <a:ln w="12700">
-            <a:solidFill>
-              <a:srgbClr val="D8E0EB"/>
-            </a:solidFill>
-            <a:prstDash val="solid"/>
-          </a:ln>
-        </p:spPr>
-      </p:sp>
-      <p:sp>
-        <p:nvSpPr>
-          <p:cNvPr id="9" name="chip tech"/>
-          <p:cNvSpPr/>
-          <p:nvPr/>
-        </p:nvSpPr>
-        <p:spPr>
-          <a:xfrm>
-            <a:off x="1663898" y="2126159"/>
-            <a:ext cx="1115020" cy="215900"/>
-          </a:xfrm>
-          <a:prstGeom prst="roundRect">
-            <a:avLst>
-              <a:gd name="adj" fmla="val 50000"/>
-            </a:avLst>
-          </a:prstGeom>
-          <a:solidFill>
-            <a:srgbClr val="EEF4FC"/>
-          </a:solidFill>
-          <a:ln/>
-        </p:spPr>
-      </p:sp>
-      <p:sp>
-        <p:nvSpPr>
-          <p:cNvPr id="10" name="chip people"/>
-          <p:cNvSpPr/>
-          <p:nvPr/>
-        </p:nvSpPr>
-        <p:spPr>
-          <a:xfrm>
-            <a:off x="2842419" y="2126159"/>
-            <a:ext cx="1131689" cy="215900"/>
-          </a:xfrm>
-          <a:prstGeom prst="roundRect">
-            <a:avLst>
-              <a:gd name="adj" fmla="val 50000"/>
-            </a:avLst>
-          </a:prstGeom>
-          <a:solidFill>
-            <a:srgbClr val="E5F6EC"/>
-          </a:solidFill>
-          <a:ln/>
-        </p:spPr>
-      </p:sp>
-      <p:sp>
-        <p:nvSpPr>
-          <p:cNvPr id="11" name="i"/>
-          <p:cNvSpPr/>
-          <p:nvPr/>
-        </p:nvSpPr>
-        <p:spPr>
-          <a:xfrm>
-            <a:off x="2931319" y="2208709"/>
-            <a:ext cx="50800" cy="50800"/>
-          </a:xfrm>
-          <a:prstGeom prst="ellipse">
-            <a:avLst/>
-          </a:prstGeom>
-          <a:solidFill>
-            <a:srgbClr val="00A94F"/>
-          </a:solidFill>
-          <a:ln/>
-        </p:spPr>
-      </p:sp>
-      <p:sp>
-        <p:nvSpPr>
-          <p:cNvPr id="12" name="i"/>
-          <p:cNvSpPr/>
-          <p:nvPr/>
-        </p:nvSpPr>
-        <p:spPr>
-          <a:xfrm>
-            <a:off x="3007519" y="2208709"/>
-            <a:ext cx="50800" cy="50800"/>
-          </a:xfrm>
-          <a:prstGeom prst="ellipse">
-            <a:avLst/>
-          </a:prstGeom>
-          <a:solidFill>
-            <a:srgbClr val="00A94F"/>
-          </a:solidFill>
-          <a:ln/>
-        </p:spPr>
-      </p:sp>
-      <p:sp>
-        <p:nvSpPr>
-          <p:cNvPr id="13" name="i"/>
-          <p:cNvSpPr/>
-          <p:nvPr/>
-        </p:nvSpPr>
-        <p:spPr>
-          <a:xfrm>
-            <a:off x="3083719" y="2208709"/>
-            <a:ext cx="50800" cy="50800"/>
-          </a:xfrm>
-          <a:prstGeom prst="ellipse">
-            <a:avLst/>
-          </a:prstGeom>
-          <a:solidFill>
-            <a:srgbClr val="00A94F"/>
-          </a:solidFill>
-          <a:ln/>
-        </p:spPr>
-      </p:sp>
-      <p:sp>
-        <p:nvSpPr>
-          <p:cNvPr id="14" name="i"/>
-          <p:cNvSpPr/>
-          <p:nvPr/>
-        </p:nvSpPr>
-        <p:spPr>
-          <a:xfrm>
-            <a:off x="3159919" y="2208709"/>
-            <a:ext cx="50800" cy="50800"/>
-          </a:xfrm>
-          <a:prstGeom prst="ellipse">
-            <a:avLst/>
-          </a:prstGeom>
-          <a:solidFill>
-            <a:srgbClr val="00A94F"/>
-          </a:solidFill>
-          <a:ln/>
-        </p:spPr>
-      </p:sp>
-      <p:sp>
-        <p:nvSpPr>
-          <p:cNvPr id="15" name="p1-sep"/>
-          <p:cNvSpPr/>
-          <p:nvPr/>
-        </p:nvSpPr>
-        <p:spPr>
-          <a:xfrm>
-            <a:off x="6083300" y="1890514"/>
-            <a:ext cx="12700" cy="1587500"/>
-          </a:xfrm>
-          <a:prstGeom prst="rect">
-            <a:avLst/>
-          </a:prstGeom>
-          <a:solidFill>
-            <a:srgbClr val="D8E0EB"/>
-          </a:solidFill>
-          <a:ln/>
-        </p:spPr>
-      </p:sp>
       <p:pic>
         <p:nvPicPr>
-          <p:cNvPr id="16" name="p1-hero-art" descr="p1-hero-art">    </p:cNvPr>
+          <p:cNvPr id="8" name="svg" descr="svg">    </p:cNvPr>
           <p:cNvPicPr>
             <a:picLocks noChangeAspect="1"/>
           </p:cNvPicPr>
@@ -1364,8 +1193,8 @@
         </p:blipFill>
         <p:spPr>
           <a:xfrm>
-            <a:off x="8498417" y="1918031"/>
-            <a:ext cx="2480733" cy="1282700"/>
+            <a:off x="605367" y="2136047"/>
+            <a:ext cx="10936817" cy="148167"/>
           </a:xfrm>
           <a:prstGeom prst="rect">
             <a:avLst/>
@@ -1374,29 +1203,89 @@
       </p:pic>
       <p:sp>
         <p:nvSpPr>
-          <p:cNvPr id="17" name="p1-video"/>
-          <p:cNvSpPr/>
-          <p:nvPr/>
-        </p:nvSpPr>
-        <p:spPr>
-          <a:xfrm>
-            <a:off x="6273800" y="1890514"/>
-            <a:ext cx="2146300" cy="1206500"/>
+          <p:cNvPr id="9" name="p1-h"/>
+          <p:cNvSpPr/>
+          <p:nvPr/>
+        </p:nvSpPr>
+        <p:spPr>
+          <a:xfrm>
+            <a:off x="762000" y="2086124"/>
+            <a:ext cx="2466479" cy="243780"/>
+          </a:xfrm>
+          <a:prstGeom prst="rect">
+            <a:avLst/>
+          </a:prstGeom>
+          <a:solidFill>
+            <a:srgbClr val="FFFFFF"/>
+          </a:solidFill>
+          <a:ln/>
+        </p:spPr>
+      </p:sp>
+      <p:sp>
+        <p:nvSpPr>
+          <p:cNvPr id="10" name="p1-h"/>
+          <p:cNvSpPr/>
+          <p:nvPr/>
+        </p:nvSpPr>
+        <p:spPr>
+          <a:xfrm>
+            <a:off x="4406900" y="2086124"/>
+            <a:ext cx="2466479" cy="243780"/>
+          </a:xfrm>
+          <a:prstGeom prst="rect">
+            <a:avLst/>
+          </a:prstGeom>
+          <a:solidFill>
+            <a:srgbClr val="FFFFFF"/>
+          </a:solidFill>
+          <a:ln/>
+        </p:spPr>
+      </p:sp>
+      <p:sp>
+        <p:nvSpPr>
+          <p:cNvPr id="11" name="p1-h"/>
+          <p:cNvSpPr/>
+          <p:nvPr/>
+        </p:nvSpPr>
+        <p:spPr>
+          <a:xfrm>
+            <a:off x="8813800" y="2086124"/>
+            <a:ext cx="2130723" cy="243780"/>
+          </a:xfrm>
+          <a:prstGeom prst="rect">
+            <a:avLst/>
+          </a:prstGeom>
+          <a:solidFill>
+            <a:srgbClr val="FFFFFF"/>
+          </a:solidFill>
+          <a:ln/>
+        </p:spPr>
+      </p:sp>
+      <p:sp>
+        <p:nvSpPr>
+          <p:cNvPr id="12" name="p1-blk p1-b1"/>
+          <p:cNvSpPr/>
+          <p:nvPr/>
+        </p:nvSpPr>
+        <p:spPr>
+          <a:xfrm>
+            <a:off x="609600" y="2436614"/>
+            <a:ext cx="3429000" cy="3263900"/>
           </a:xfrm>
           <a:prstGeom prst="roundRect">
             <a:avLst>
-              <a:gd name="adj" fmla="val 8421"/>
+              <a:gd name="adj" fmla="val 4280"/>
             </a:avLst>
           </a:prstGeom>
           <a:solidFill>
-            <a:srgbClr val="0B2147"/>
+            <a:srgbClr val="EEF4FC"/>
           </a:solidFill>
           <a:ln/>
         </p:spPr>
       </p:sp>
       <p:pic>
         <p:nvPicPr>
-          <p:cNvPr id="18" name="svg" descr="svg">    </p:cNvPr>
+          <p:cNvPr id="13" name="svg" descr="svg">    </p:cNvPr>
           <p:cNvPicPr>
             <a:picLocks noChangeAspect="1"/>
           </p:cNvPicPr>
@@ -1410,17 +1299,98 @@
         </p:blipFill>
         <p:spPr>
           <a:xfrm>
-            <a:off x="6493933" y="2000581"/>
-            <a:ext cx="1712383" cy="626533"/>
+            <a:off x="897467" y="2906514"/>
+            <a:ext cx="2853267" cy="965200"/>
           </a:xfrm>
           <a:prstGeom prst="rect">
             <a:avLst/>
           </a:prstGeom>
         </p:spPr>
       </p:pic>
+      <p:sp>
+        <p:nvSpPr>
+          <p:cNvPr id="14" name="p1-at p1-op"/>
+          <p:cNvSpPr/>
+          <p:nvPr/>
+        </p:nvSpPr>
+        <p:spPr>
+          <a:xfrm>
+            <a:off x="901948" y="2798564"/>
+            <a:ext cx="710704" cy="317500"/>
+          </a:xfrm>
+          <a:prstGeom prst="roundRect">
+            <a:avLst>
+              <a:gd name="adj" fmla="val 50000"/>
+            </a:avLst>
+          </a:prstGeom>
+          <a:solidFill>
+            <a:srgbClr val="FFFFFF"/>
+          </a:solidFill>
+          <a:ln w="12700">
+            <a:solidFill>
+              <a:srgbClr val="C3CEDD"/>
+            </a:solidFill>
+            <a:prstDash val="solid"/>
+          </a:ln>
+        </p:spPr>
+      </p:sp>
+      <p:sp>
+        <p:nvSpPr>
+          <p:cNvPr id="15" name="p1-at p1-op"/>
+          <p:cNvSpPr/>
+          <p:nvPr/>
+        </p:nvSpPr>
+        <p:spPr>
+          <a:xfrm>
+            <a:off x="2889250" y="2798564"/>
+            <a:ext cx="1003300" cy="317500"/>
+          </a:xfrm>
+          <a:prstGeom prst="roundRect">
+            <a:avLst>
+              <a:gd name="adj" fmla="val 50000"/>
+            </a:avLst>
+          </a:prstGeom>
+          <a:solidFill>
+            <a:srgbClr val="FFFFFF"/>
+          </a:solidFill>
+          <a:ln w="12700">
+            <a:solidFill>
+              <a:srgbClr val="C3CEDD"/>
+            </a:solidFill>
+            <a:prstDash val="solid"/>
+          </a:ln>
+        </p:spPr>
+      </p:sp>
+      <p:sp>
+        <p:nvSpPr>
+          <p:cNvPr id="16" name="p1-at p1-crit"/>
+          <p:cNvSpPr/>
+          <p:nvPr/>
+        </p:nvSpPr>
+        <p:spPr>
+          <a:xfrm>
+            <a:off x="1741636" y="3865364"/>
+            <a:ext cx="1164927" cy="304800"/>
+          </a:xfrm>
+          <a:prstGeom prst="roundRect">
+            <a:avLst>
+              <a:gd name="adj" fmla="val 50000"/>
+            </a:avLst>
+          </a:prstGeom>
+          <a:solidFill>
+            <a:srgbClr val="FFFFFF"/>
+          </a:solidFill>
+          <a:ln w="12700">
+            <a:solidFill>
+              <a:srgbClr val="004B8D"/>
+            </a:solidFill>
+            <a:prstDash val="solid"/>
+          </a:ln>
+        </p:spPr>
+      </p:sp>
       <p:pic>
         <p:nvPicPr>
-          <p:cNvPr id="19" name="p1-path-line" descr="p1-path-line">    </p:cNvPr>
+          <p:cNvPr id="17" name="p1-down" descr="p1-down">    </p:cNvPr>
           <p:cNvPicPr>
             <a:picLocks noChangeAspect="1"/>
           </p:cNvPicPr>
@@ -1434,8 +1404,8 @@
         </p:blipFill>
         <p:spPr>
           <a:xfrm>
-            <a:off x="605367" y="3511881"/>
-            <a:ext cx="10936817" cy="289983"/>
+            <a:off x="2260600" y="4183922"/>
+            <a:ext cx="127000" cy="190500"/>
           </a:xfrm>
           <a:prstGeom prst="rect">
             <a:avLst/>
@@ -1444,109 +1414,93 @@
       </p:pic>
       <p:sp>
         <p:nvSpPr>
-          <p:cNvPr id="20" name="eyebrow p1-eb"/>
-          <p:cNvSpPr/>
-          <p:nvPr/>
-        </p:nvSpPr>
-        <p:spPr>
-          <a:xfrm>
-            <a:off x="762000" y="3665339"/>
-            <a:ext cx="1168896" cy="120650"/>
-          </a:xfrm>
-          <a:prstGeom prst="rect">
-            <a:avLst/>
-          </a:prstGeom>
-          <a:solidFill>
-            <a:srgbClr val="FFFFFF"/>
-          </a:solidFill>
-          <a:ln/>
-        </p:spPr>
-      </p:sp>
-      <p:sp>
-        <p:nvSpPr>
-          <p:cNvPr id="21" name="eyebrow p1-eb"/>
-          <p:cNvSpPr/>
-          <p:nvPr/>
-        </p:nvSpPr>
-        <p:spPr>
-          <a:xfrm>
-            <a:off x="2667000" y="3665339"/>
-            <a:ext cx="865287" cy="120650"/>
-          </a:xfrm>
-          <a:prstGeom prst="rect">
-            <a:avLst/>
-          </a:prstGeom>
-          <a:solidFill>
-            <a:srgbClr val="FFFFFF"/>
-          </a:solidFill>
-          <a:ln/>
-        </p:spPr>
-      </p:sp>
-      <p:sp>
-        <p:nvSpPr>
-          <p:cNvPr id="22" name="eyebrow p1-eb"/>
-          <p:cNvSpPr/>
-          <p:nvPr/>
-        </p:nvSpPr>
-        <p:spPr>
-          <a:xfrm>
-            <a:off x="4826000" y="3665339"/>
-            <a:ext cx="1201638" cy="120650"/>
-          </a:xfrm>
-          <a:prstGeom prst="rect">
-            <a:avLst/>
-          </a:prstGeom>
-          <a:solidFill>
-            <a:srgbClr val="FFFFFF"/>
-          </a:solidFill>
-          <a:ln/>
-        </p:spPr>
-      </p:sp>
-      <p:sp>
-        <p:nvSpPr>
-          <p:cNvPr id="23" name="eyebrow p1-eb"/>
-          <p:cNvSpPr/>
-          <p:nvPr/>
-        </p:nvSpPr>
-        <p:spPr>
-          <a:xfrm>
-            <a:off x="10464800" y="3665339"/>
-            <a:ext cx="969268" cy="120650"/>
-          </a:xfrm>
-          <a:prstGeom prst="rect">
-            <a:avLst/>
-          </a:prstGeom>
-          <a:solidFill>
-            <a:srgbClr val="FFFFFF"/>
-          </a:solidFill>
-          <a:ln/>
-        </p:spPr>
-      </p:sp>
-      <p:sp>
-        <p:nvSpPr>
-          <p:cNvPr id="24" name="p1-panel"/>
-          <p:cNvSpPr/>
-          <p:nvPr/>
-        </p:nvSpPr>
-        <p:spPr>
-          <a:xfrm>
-            <a:off x="609600" y="4115495"/>
-            <a:ext cx="1752600" cy="1712020"/>
+          <p:cNvPr id="18" name="p1-topic"/>
+          <p:cNvSpPr/>
+          <p:nvPr/>
+        </p:nvSpPr>
+        <p:spPr>
+          <a:xfrm>
+            <a:off x="762000" y="4386064"/>
+            <a:ext cx="3124200" cy="1174750"/>
           </a:xfrm>
           <a:prstGeom prst="roundRect">
             <a:avLst>
-              <a:gd name="adj" fmla="val 8160"/>
+              <a:gd name="adj" fmla="val 9730"/>
             </a:avLst>
           </a:prstGeom>
           <a:solidFill>
+            <a:srgbClr val="0B2147"/>
+          </a:solidFill>
+          <a:ln/>
+        </p:spPr>
+      </p:sp>
+      <p:sp>
+        <p:nvSpPr>
+          <p:cNvPr id="19" name="p1-blk p1-b2"/>
+          <p:cNvSpPr/>
+          <p:nvPr/>
+        </p:nvSpPr>
+        <p:spPr>
+          <a:xfrm>
+            <a:off x="4254500" y="2436614"/>
+            <a:ext cx="4191000" cy="3263900"/>
+          </a:xfrm>
+          <a:prstGeom prst="roundRect">
+            <a:avLst>
+              <a:gd name="adj" fmla="val 4280"/>
+            </a:avLst>
+          </a:prstGeom>
+          <a:solidFill>
             <a:srgbClr val="EEF4FC"/>
+          </a:solidFill>
+          <a:ln/>
+        </p:spPr>
+      </p:sp>
+      <p:sp>
+        <p:nvSpPr>
+          <p:cNvPr id="20" name="p1-lead"/>
+          <p:cNvSpPr/>
+          <p:nvPr/>
+        </p:nvSpPr>
+        <p:spPr>
+          <a:xfrm>
+            <a:off x="5061148" y="2576314"/>
+            <a:ext cx="2577604" cy="863402"/>
+          </a:xfrm>
+          <a:prstGeom prst="roundRect">
+            <a:avLst>
+              <a:gd name="adj" fmla="val 13238"/>
+            </a:avLst>
+          </a:prstGeom>
+          <a:solidFill>
+            <a:srgbClr val="0B2147"/>
+          </a:solidFill>
+          <a:ln/>
+        </p:spPr>
+      </p:sp>
+      <p:sp>
+        <p:nvSpPr>
+          <p:cNvPr id="21" name="p1-av"/>
+          <p:cNvSpPr/>
+          <p:nvPr/>
+        </p:nvSpPr>
+        <p:spPr>
+          <a:xfrm>
+            <a:off x="6022578" y="2745184"/>
+            <a:ext cx="88900" cy="88900"/>
+          </a:xfrm>
+          <a:prstGeom prst="ellipse">
+            <a:avLst/>
+          </a:prstGeom>
+          <a:solidFill>
+            <a:srgbClr val="00A94F"/>
           </a:solidFill>
           <a:ln/>
         </p:spPr>
       </p:sp>
       <p:pic>
         <p:nvPicPr>
-          <p:cNvPr id="25" name="svg" descr="svg">    </p:cNvPr>
+          <p:cNvPr id="22" name="p1-tree" descr="p1-tree">    </p:cNvPr>
           <p:cNvPicPr>
             <a:picLocks noChangeAspect="1"/>
           </p:cNvPicPr>
@@ -1560,8 +1514,8 @@
         </p:blipFill>
         <p:spPr>
           <a:xfrm>
-            <a:off x="795867" y="4401245"/>
-            <a:ext cx="1380067" cy="533400"/>
+            <a:off x="4997450" y="3431249"/>
+            <a:ext cx="2705100" cy="541867"/>
           </a:xfrm>
           <a:prstGeom prst="rect">
             <a:avLst/>
@@ -1570,51 +1524,148 @@
       </p:pic>
       <p:sp>
         <p:nvSpPr>
-          <p:cNvPr id="26" name="p1-lbl p1-pill"/>
-          <p:cNvSpPr/>
-          <p:nvPr/>
-        </p:nvSpPr>
-        <p:spPr>
-          <a:xfrm>
-            <a:off x="834926" y="5001320"/>
-            <a:ext cx="463748" cy="209550"/>
+          <p:cNvPr id="23" name="p1-mem"/>
+          <p:cNvSpPr/>
+          <p:nvPr/>
+        </p:nvSpPr>
+        <p:spPr>
+          <a:xfrm>
+            <a:off x="4387850" y="3966766"/>
+            <a:ext cx="1240334" cy="1030982"/>
           </a:xfrm>
           <a:prstGeom prst="roundRect">
             <a:avLst>
-              <a:gd name="adj" fmla="val 50000"/>
+              <a:gd name="adj" fmla="val 10471"/>
             </a:avLst>
           </a:prstGeom>
           <a:solidFill>
             <a:srgbClr val="FFFFFF"/>
           </a:solidFill>
-          <a:ln/>
-        </p:spPr>
-      </p:sp>
-      <p:sp>
-        <p:nvSpPr>
-          <p:cNvPr id="27" name="p1-lbl p1-pill"/>
-          <p:cNvSpPr/>
-          <p:nvPr/>
-        </p:nvSpPr>
-        <p:spPr>
-          <a:xfrm>
-            <a:off x="1468438" y="5001320"/>
-            <a:ext cx="695325" cy="209550"/>
+          <a:ln w="12700">
+            <a:solidFill>
+              <a:srgbClr val="D8E0EB"/>
+            </a:solidFill>
+            <a:prstDash val="solid"/>
+          </a:ln>
+        </p:spPr>
+      </p:sp>
+      <p:sp>
+        <p:nvSpPr>
+          <p:cNvPr id="24" name="p1-av"/>
+          <p:cNvSpPr/>
+          <p:nvPr/>
+        </p:nvSpPr>
+        <p:spPr>
+          <a:xfrm>
+            <a:off x="4727873" y="4116586"/>
+            <a:ext cx="88900" cy="88900"/>
+          </a:xfrm>
+          <a:prstGeom prst="ellipse">
+            <a:avLst/>
+          </a:prstGeom>
+          <a:solidFill>
+            <a:srgbClr val="00A94F"/>
+          </a:solidFill>
+          <a:ln/>
+        </p:spPr>
+      </p:sp>
+      <p:sp>
+        <p:nvSpPr>
+          <p:cNvPr id="25" name="p1-mem"/>
+          <p:cNvSpPr/>
+          <p:nvPr/>
+        </p:nvSpPr>
+        <p:spPr>
+          <a:xfrm>
+            <a:off x="5729784" y="3966766"/>
+            <a:ext cx="1240334" cy="1030982"/>
           </a:xfrm>
           <a:prstGeom prst="roundRect">
             <a:avLst>
-              <a:gd name="adj" fmla="val 50000"/>
+              <a:gd name="adj" fmla="val 10471"/>
             </a:avLst>
           </a:prstGeom>
           <a:solidFill>
             <a:srgbClr val="FFFFFF"/>
+          </a:solidFill>
+          <a:ln w="12700">
+            <a:solidFill>
+              <a:srgbClr val="D8E0EB"/>
+            </a:solidFill>
+            <a:prstDash val="solid"/>
+          </a:ln>
+        </p:spPr>
+      </p:sp>
+      <p:sp>
+        <p:nvSpPr>
+          <p:cNvPr id="26" name="p1-av"/>
+          <p:cNvSpPr/>
+          <p:nvPr/>
+        </p:nvSpPr>
+        <p:spPr>
+          <a:xfrm>
+            <a:off x="6069905" y="4116586"/>
+            <a:ext cx="88900" cy="88900"/>
+          </a:xfrm>
+          <a:prstGeom prst="ellipse">
+            <a:avLst/>
+          </a:prstGeom>
+          <a:solidFill>
+            <a:srgbClr val="00A94F"/>
+          </a:solidFill>
+          <a:ln/>
+        </p:spPr>
+      </p:sp>
+      <p:sp>
+        <p:nvSpPr>
+          <p:cNvPr id="27" name="p1-mem"/>
+          <p:cNvSpPr/>
+          <p:nvPr/>
+        </p:nvSpPr>
+        <p:spPr>
+          <a:xfrm>
+            <a:off x="7071717" y="3966766"/>
+            <a:ext cx="1240334" cy="1030982"/>
+          </a:xfrm>
+          <a:prstGeom prst="roundRect">
+            <a:avLst>
+              <a:gd name="adj" fmla="val 10471"/>
+            </a:avLst>
+          </a:prstGeom>
+          <a:solidFill>
+            <a:srgbClr val="FFFFFF"/>
+          </a:solidFill>
+          <a:ln w="12700">
+            <a:solidFill>
+              <a:srgbClr val="D8E0EB"/>
+            </a:solidFill>
+            <a:prstDash val="solid"/>
+          </a:ln>
+        </p:spPr>
+      </p:sp>
+      <p:sp>
+        <p:nvSpPr>
+          <p:cNvPr id="28" name="p1-av"/>
+          <p:cNvSpPr/>
+          <p:nvPr/>
+        </p:nvSpPr>
+        <p:spPr>
+          <a:xfrm>
+            <a:off x="7414419" y="4116586"/>
+            <a:ext cx="88900" cy="88900"/>
+          </a:xfrm>
+          <a:prstGeom prst="ellipse">
+            <a:avLst/>
+          </a:prstGeom>
+          <a:solidFill>
+            <a:srgbClr val="00A94F"/>
           </a:solidFill>
           <a:ln/>
         </p:spPr>
       </p:sp>
       <p:pic>
         <p:nvPicPr>
-          <p:cNvPr id="28" name="svg" descr="svg">    </p:cNvPr>
+          <p:cNvPr id="29" name="svg" descr="svg">    </p:cNvPr>
           <p:cNvPicPr>
             <a:picLocks noChangeAspect="1"/>
           </p:cNvPicPr>
@@ -1628,8 +1679,8 @@
         </p:blipFill>
         <p:spPr>
           <a:xfrm>
-            <a:off x="717550" y="5385594"/>
-            <a:ext cx="114300" cy="114300"/>
+            <a:off x="4997450" y="5004098"/>
+            <a:ext cx="2705100" cy="226483"/>
           </a:xfrm>
           <a:prstGeom prst="rect">
             <a:avLst/>
@@ -1638,29 +1689,29 @@
       </p:pic>
       <p:sp>
         <p:nvSpPr>
-          <p:cNvPr id="29" name="p1-panel"/>
-          <p:cNvSpPr/>
-          <p:nvPr/>
-        </p:nvSpPr>
-        <p:spPr>
-          <a:xfrm>
-            <a:off x="2514600" y="4115495"/>
-            <a:ext cx="2006600" cy="1712020"/>
+          <p:cNvPr id="30" name="p1-share"/>
+          <p:cNvSpPr/>
+          <p:nvPr/>
+        </p:nvSpPr>
+        <p:spPr>
+          <a:xfrm>
+            <a:off x="4381500" y="5230614"/>
+            <a:ext cx="3937000" cy="330200"/>
           </a:xfrm>
           <a:prstGeom prst="roundRect">
             <a:avLst>
-              <a:gd name="adj" fmla="val 8160"/>
+              <a:gd name="adj" fmla="val 50000"/>
             </a:avLst>
           </a:prstGeom>
           <a:solidFill>
-            <a:srgbClr val="EEF4FC"/>
+            <a:srgbClr val="E5F6EC"/>
           </a:solidFill>
           <a:ln/>
         </p:spPr>
       </p:sp>
       <p:pic>
         <p:nvPicPr>
-          <p:cNvPr id="30" name="svg" descr="svg">    </p:cNvPr>
+          <p:cNvPr id="31" name="svg" descr="svg">    </p:cNvPr>
           <p:cNvPicPr>
             <a:picLocks noChangeAspect="1"/>
           </p:cNvPicPr>
@@ -1674,8 +1725,8 @@
         </p:blipFill>
         <p:spPr>
           <a:xfrm>
-            <a:off x="3458633" y="4497321"/>
-            <a:ext cx="908050" cy="668867"/>
+            <a:off x="5325170" y="5330097"/>
+            <a:ext cx="118533" cy="135467"/>
           </a:xfrm>
           <a:prstGeom prst="rect">
             <a:avLst/>
@@ -1684,100 +1735,29 @@
       </p:pic>
       <p:sp>
         <p:nvSpPr>
-          <p:cNvPr id="31" name="p1-lbl p1-pill p1-in"/>
-          <p:cNvSpPr/>
-          <p:nvPr/>
-        </p:nvSpPr>
-        <p:spPr>
-          <a:xfrm>
-            <a:off x="2667000" y="4409480"/>
-            <a:ext cx="787400" cy="209550"/>
+          <p:cNvPr id="32" name="p1-blk p1-b3"/>
+          <p:cNvSpPr/>
+          <p:nvPr/>
+        </p:nvSpPr>
+        <p:spPr>
+          <a:xfrm>
+            <a:off x="8661400" y="2436614"/>
+            <a:ext cx="2921000" cy="3263900"/>
           </a:xfrm>
           <a:prstGeom prst="roundRect">
             <a:avLst>
-              <a:gd name="adj" fmla="val 50000"/>
+              <a:gd name="adj" fmla="val 4783"/>
             </a:avLst>
           </a:prstGeom>
           <a:solidFill>
-            <a:srgbClr val="FFFFFF"/>
-          </a:solidFill>
-          <a:ln/>
-        </p:spPr>
-      </p:sp>
-      <p:sp>
-        <p:nvSpPr>
-          <p:cNvPr id="32" name="p1-lbl p1-pill p1-in"/>
-          <p:cNvSpPr/>
-          <p:nvPr/>
-        </p:nvSpPr>
-        <p:spPr>
-          <a:xfrm>
-            <a:off x="2667000" y="4726980"/>
-            <a:ext cx="787400" cy="209550"/>
-          </a:xfrm>
-          <a:prstGeom prst="roundRect">
-            <a:avLst>
-              <a:gd name="adj" fmla="val 50000"/>
-            </a:avLst>
-          </a:prstGeom>
-          <a:solidFill>
-            <a:srgbClr val="FFFFFF"/>
-          </a:solidFill>
-          <a:ln/>
-        </p:spPr>
-      </p:sp>
-      <p:sp>
-        <p:nvSpPr>
-          <p:cNvPr id="33" name="p1-lbl p1-pill p1-in"/>
-          <p:cNvSpPr/>
-          <p:nvPr/>
-        </p:nvSpPr>
-        <p:spPr>
-          <a:xfrm>
-            <a:off x="2667000" y="5044480"/>
-            <a:ext cx="787400" cy="209550"/>
-          </a:xfrm>
-          <a:prstGeom prst="roundRect">
-            <a:avLst>
-              <a:gd name="adj" fmla="val 50000"/>
-            </a:avLst>
-          </a:prstGeom>
-          <a:solidFill>
-            <a:srgbClr val="FFFFFF"/>
-          </a:solidFill>
-          <a:ln/>
-        </p:spPr>
-      </p:sp>
-      <p:sp>
-        <p:nvSpPr>
-          <p:cNvPr id="34" name="p1-agree"/>
-          <p:cNvSpPr/>
-          <p:nvPr/>
-        </p:nvSpPr>
-        <p:spPr>
-          <a:xfrm>
-            <a:off x="2622550" y="5465564"/>
-            <a:ext cx="1790700" cy="266700"/>
-          </a:xfrm>
-          <a:prstGeom prst="roundRect">
-            <a:avLst>
-              <a:gd name="adj" fmla="val 50000"/>
-            </a:avLst>
-          </a:prstGeom>
-          <a:solidFill>
-            <a:srgbClr val="FFFFFF"/>
-          </a:solidFill>
-          <a:ln w="12700">
-            <a:solidFill>
-              <a:srgbClr val="004B8D"/>
-            </a:solidFill>
-            <a:prstDash val="solid"/>
-          </a:ln>
+            <a:srgbClr val="EEF4FC"/>
+          </a:solidFill>
+          <a:ln/>
         </p:spPr>
       </p:sp>
       <p:pic>
         <p:nvPicPr>
-          <p:cNvPr id="35" name="svg" descr="svg">    </p:cNvPr>
+          <p:cNvPr id="33" name="svg" descr="svg">    </p:cNvPr>
           <p:cNvPicPr>
             <a:picLocks noChangeAspect="1"/>
           </p:cNvPicPr>
@@ -1791,8 +1771,8 @@
         </p:blipFill>
         <p:spPr>
           <a:xfrm>
-            <a:off x="3174702" y="5543881"/>
-            <a:ext cx="114300" cy="114300"/>
+            <a:off x="9359900" y="2591131"/>
+            <a:ext cx="1524000" cy="2717800"/>
           </a:xfrm>
           <a:prstGeom prst="rect">
             <a:avLst/>
@@ -1801,63 +1781,36 @@
       </p:pic>
       <p:sp>
         <p:nvSpPr>
-          <p:cNvPr id="36" name="p1-panel p1-team"/>
-          <p:cNvSpPr/>
-          <p:nvPr/>
-        </p:nvSpPr>
-        <p:spPr>
-          <a:xfrm>
-            <a:off x="4673600" y="4115495"/>
-            <a:ext cx="5486400" cy="1712020"/>
+          <p:cNvPr id="34" name="key"/>
+          <p:cNvSpPr/>
+          <p:nvPr/>
+        </p:nvSpPr>
+        <p:spPr>
+          <a:xfrm>
+            <a:off x="609600" y="5814814"/>
+            <a:ext cx="10972800" cy="534591"/>
           </a:xfrm>
           <a:prstGeom prst="roundRect">
             <a:avLst>
-              <a:gd name="adj" fmla="val 8160"/>
+              <a:gd name="adj" fmla="val 26132"/>
             </a:avLst>
           </a:prstGeom>
           <a:solidFill>
-            <a:srgbClr val="EEF4FC"/>
-          </a:solidFill>
-          <a:ln/>
-        </p:spPr>
-      </p:sp>
-      <p:sp>
-        <p:nvSpPr>
-          <p:cNvPr id="37" name="p1-role me"/>
-          <p:cNvSpPr/>
-          <p:nvPr/>
-        </p:nvSpPr>
-        <p:spPr>
-          <a:xfrm>
-            <a:off x="4781550" y="4175522"/>
-            <a:ext cx="2584450" cy="695920"/>
-          </a:xfrm>
-          <a:prstGeom prst="roundRect">
-            <a:avLst>
-              <a:gd name="adj" fmla="val 13687"/>
-            </a:avLst>
-          </a:prstGeom>
-          <a:solidFill>
-            <a:srgbClr val="FFFFFF"/>
-          </a:solidFill>
-          <a:ln w="12700">
-            <a:solidFill>
-              <a:srgbClr val="004B8D"/>
-            </a:solidFill>
-            <a:prstDash val="solid"/>
-          </a:ln>
-        </p:spPr>
-      </p:sp>
-      <p:sp>
-        <p:nvSpPr>
-          <p:cNvPr id="38" name="p1-av"/>
-          <p:cNvSpPr/>
-          <p:nvPr/>
-        </p:nvSpPr>
-        <p:spPr>
-          <a:xfrm>
-            <a:off x="4892675" y="4261247"/>
-            <a:ext cx="107950" cy="107950"/>
+            <a:srgbClr val="0B2147"/>
+          </a:solidFill>
+          <a:ln/>
+        </p:spPr>
+      </p:sp>
+      <p:sp>
+        <p:nvSpPr>
+          <p:cNvPr id="35" name="i"/>
+          <p:cNvSpPr/>
+          <p:nvPr/>
+        </p:nvSpPr>
+        <p:spPr>
+          <a:xfrm>
+            <a:off x="863600" y="6050260"/>
+            <a:ext cx="63500" cy="63500"/>
           </a:xfrm>
           <a:prstGeom prst="ellipse">
             <a:avLst/>
@@ -1865,683 +1818,84 @@
           <a:solidFill>
             <a:srgbClr val="00A94F"/>
           </a:solidFill>
-          <a:ln w="31750">
-            <a:solidFill>
-              <a:srgbClr val="E5F6EC"/>
-            </a:solidFill>
-            <a:prstDash val="solid"/>
-          </a:ln>
-        </p:spPr>
-      </p:sp>
-      <p:sp>
-        <p:nvSpPr>
-          <p:cNvPr id="39" name="p1-me"/>
-          <p:cNvSpPr/>
-          <p:nvPr/>
-        </p:nvSpPr>
-        <p:spPr>
-          <a:xfrm>
-            <a:off x="5383808" y="4219972"/>
-            <a:ext cx="190500" cy="190500"/>
+          <a:ln/>
+        </p:spPr>
+      </p:sp>
+      <p:sp>
+        <p:nvSpPr>
+          <p:cNvPr id="36" name="b"/>
+          <p:cNvSpPr/>
+          <p:nvPr/>
+        </p:nvSpPr>
+        <p:spPr>
+          <a:xfrm>
+            <a:off x="927100" y="6075660"/>
+            <a:ext cx="88900" cy="12700"/>
+          </a:xfrm>
+          <a:prstGeom prst="rect">
+            <a:avLst/>
+          </a:prstGeom>
+          <a:solidFill>
+            <a:srgbClr val="C3CEDD"/>
+          </a:solidFill>
+          <a:ln/>
+        </p:spPr>
+      </p:sp>
+      <p:sp>
+        <p:nvSpPr>
+          <p:cNvPr id="37" name="i"/>
+          <p:cNvSpPr/>
+          <p:nvPr/>
+        </p:nvSpPr>
+        <p:spPr>
+          <a:xfrm>
+            <a:off x="1016000" y="6050260"/>
+            <a:ext cx="63500" cy="63500"/>
           </a:xfrm>
           <a:prstGeom prst="ellipse">
             <a:avLst/>
           </a:prstGeom>
           <a:solidFill>
-            <a:srgbClr val="0B2147"/>
-          </a:solidFill>
-          <a:ln/>
-        </p:spPr>
-      </p:sp>
-      <p:pic>
-        <p:nvPicPr>
-          <p:cNvPr id="40" name="li" descr="li">    </p:cNvPr>
-          <p:cNvPicPr>
-            <a:picLocks noChangeAspect="1"/>
-          </p:cNvPicPr>
-          <p:nvPr/>
-        </p:nvPicPr>
-        <p:blipFill>
-          <a:blip r:embed="rId9"/>
-          <a:stretch>
-            <a:fillRect/>
-          </a:stretch>
-        </p:blipFill>
-        <p:spPr>
-          <a:xfrm>
-            <a:off x="4883150" y="4526889"/>
-            <a:ext cx="38100" cy="38100"/>
-          </a:xfrm>
-          <a:prstGeom prst="rect">
-            <a:avLst/>
-          </a:prstGeom>
-        </p:spPr>
-      </p:pic>
-      <p:pic>
-        <p:nvPicPr>
-          <p:cNvPr id="41" name="li" descr="li">    </p:cNvPr>
-          <p:cNvPicPr>
-            <a:picLocks noChangeAspect="1"/>
-          </p:cNvPicPr>
-          <p:nvPr/>
-        </p:nvPicPr>
-        <p:blipFill>
-          <a:blip r:embed="rId10"/>
-          <a:stretch>
-            <a:fillRect/>
-          </a:stretch>
-        </p:blipFill>
-        <p:spPr>
-          <a:xfrm>
-            <a:off x="4883150" y="4724565"/>
-            <a:ext cx="38100" cy="38100"/>
-          </a:xfrm>
-          <a:prstGeom prst="rect">
-            <a:avLst/>
-          </a:prstGeom>
-        </p:spPr>
-      </p:pic>
-      <p:sp>
-        <p:nvSpPr>
-          <p:cNvPr id="42" name="chip tech p1-tool"/>
-          <p:cNvSpPr/>
-          <p:nvPr/>
-        </p:nvSpPr>
-        <p:spPr>
-          <a:xfrm>
-            <a:off x="4965700" y="4640263"/>
-            <a:ext cx="602655" cy="177800"/>
-          </a:xfrm>
-          <a:prstGeom prst="roundRect">
-            <a:avLst>
-              <a:gd name="adj" fmla="val 50000"/>
-            </a:avLst>
-          </a:prstGeom>
-          <a:solidFill>
-            <a:srgbClr val="EEF4FC"/>
-          </a:solidFill>
-          <a:ln/>
-        </p:spPr>
-      </p:sp>
-      <p:sp>
-        <p:nvSpPr>
-          <p:cNvPr id="43" name="p1-role"/>
-          <p:cNvSpPr/>
-          <p:nvPr/>
-        </p:nvSpPr>
-        <p:spPr>
-          <a:xfrm>
-            <a:off x="7467600" y="4175522"/>
-            <a:ext cx="2584450" cy="695920"/>
-          </a:xfrm>
-          <a:prstGeom prst="roundRect">
-            <a:avLst>
-              <a:gd name="adj" fmla="val 13687"/>
-            </a:avLst>
-          </a:prstGeom>
-          <a:solidFill>
-            <a:srgbClr val="FFFFFF"/>
-          </a:solidFill>
-          <a:ln w="12700">
-            <a:solidFill>
-              <a:srgbClr val="FFFFFF"/>
-            </a:solidFill>
-            <a:prstDash val="solid"/>
-          </a:ln>
-        </p:spPr>
-      </p:sp>
-      <p:sp>
-        <p:nvSpPr>
-          <p:cNvPr id="44" name="p1-av"/>
-          <p:cNvSpPr/>
-          <p:nvPr/>
-        </p:nvSpPr>
-        <p:spPr>
-          <a:xfrm>
-            <a:off x="7578725" y="4253309"/>
-            <a:ext cx="107950" cy="107950"/>
+            <a:srgbClr val="004B8D"/>
+          </a:solidFill>
+          <a:ln/>
+        </p:spPr>
+      </p:sp>
+      <p:sp>
+        <p:nvSpPr>
+          <p:cNvPr id="38" name="b"/>
+          <p:cNvSpPr/>
+          <p:nvPr/>
+        </p:nvSpPr>
+        <p:spPr>
+          <a:xfrm>
+            <a:off x="1079500" y="6075660"/>
+            <a:ext cx="88900" cy="12700"/>
+          </a:xfrm>
+          <a:prstGeom prst="rect">
+            <a:avLst/>
+          </a:prstGeom>
+          <a:solidFill>
+            <a:srgbClr val="C3CEDD"/>
+          </a:solidFill>
+          <a:ln/>
+        </p:spPr>
+      </p:sp>
+      <p:sp>
+        <p:nvSpPr>
+          <p:cNvPr id="39" name="i"/>
+          <p:cNvSpPr/>
+          <p:nvPr/>
+        </p:nvSpPr>
+        <p:spPr>
+          <a:xfrm>
+            <a:off x="1168400" y="6050260"/>
+            <a:ext cx="63500" cy="63500"/>
           </a:xfrm>
           <a:prstGeom prst="ellipse">
             <a:avLst/>
           </a:prstGeom>
           <a:solidFill>
-            <a:srgbClr val="00A94F"/>
-          </a:solidFill>
-          <a:ln w="31750">
-            <a:solidFill>
-              <a:srgbClr val="E5F6EC"/>
-            </a:solidFill>
-            <a:prstDash val="solid"/>
-          </a:ln>
-        </p:spPr>
-      </p:sp>
-      <p:pic>
-        <p:nvPicPr>
-          <p:cNvPr id="45" name="li" descr="li">    </p:cNvPr>
-          <p:cNvPicPr>
-            <a:picLocks noChangeAspect="1"/>
-          </p:cNvPicPr>
-          <p:nvPr/>
-        </p:nvPicPr>
-        <p:blipFill>
-          <a:blip r:embed="rId11"/>
-          <a:stretch>
-            <a:fillRect/>
-          </a:stretch>
-        </p:blipFill>
-        <p:spPr>
-          <a:xfrm>
-            <a:off x="7569200" y="4515247"/>
-            <a:ext cx="38100" cy="38100"/>
-          </a:xfrm>
-          <a:prstGeom prst="rect">
-            <a:avLst/>
-          </a:prstGeom>
-        </p:spPr>
-      </p:pic>
-      <p:pic>
-        <p:nvPicPr>
-          <p:cNvPr id="46" name="li" descr="li">    </p:cNvPr>
-          <p:cNvPicPr>
-            <a:picLocks noChangeAspect="1"/>
-          </p:cNvPicPr>
-          <p:nvPr/>
-        </p:nvPicPr>
-        <p:blipFill>
-          <a:blip r:embed="rId12"/>
-          <a:stretch>
-            <a:fillRect/>
-          </a:stretch>
-        </p:blipFill>
-        <p:spPr>
-          <a:xfrm>
-            <a:off x="7569200" y="4704457"/>
-            <a:ext cx="38100" cy="38100"/>
-          </a:xfrm>
-          <a:prstGeom prst="rect">
-            <a:avLst/>
-          </a:prstGeom>
-        </p:spPr>
-      </p:pic>
-      <p:pic>
-        <p:nvPicPr>
-          <p:cNvPr id="47" name="svg" descr="svg">    </p:cNvPr>
-          <p:cNvPicPr>
-            <a:picLocks noChangeAspect="1"/>
-          </p:cNvPicPr>
-          <p:nvPr/>
-        </p:nvPicPr>
-        <p:blipFill>
-          <a:blip r:embed="rId13"/>
-          <a:stretch>
-            <a:fillRect/>
-          </a:stretch>
-        </p:blipFill>
-        <p:spPr>
-          <a:xfrm>
-            <a:off x="6019800" y="4877792"/>
-            <a:ext cx="2794000" cy="203200"/>
-          </a:xfrm>
-          <a:prstGeom prst="rect">
-            <a:avLst/>
-          </a:prstGeom>
-        </p:spPr>
-      </p:pic>
-      <p:sp>
-        <p:nvSpPr>
-          <p:cNvPr id="48" name="chip people p1-share"/>
-          <p:cNvSpPr/>
-          <p:nvPr/>
-        </p:nvSpPr>
-        <p:spPr>
-          <a:xfrm>
-            <a:off x="6459041" y="4877792"/>
-            <a:ext cx="1915517" cy="203200"/>
-          </a:xfrm>
-          <a:prstGeom prst="roundRect">
-            <a:avLst>
-              <a:gd name="adj" fmla="val 50000"/>
-            </a:avLst>
-          </a:prstGeom>
-          <a:solidFill>
-            <a:srgbClr val="E5F6EC"/>
-          </a:solidFill>
-          <a:ln/>
-        </p:spPr>
-      </p:sp>
-      <p:pic>
-        <p:nvPicPr>
-          <p:cNvPr id="49" name="svg" descr="svg">    </p:cNvPr>
-          <p:cNvPicPr>
-            <a:picLocks noChangeAspect="1"/>
-          </p:cNvPicPr>
-          <p:nvPr/>
-        </p:nvPicPr>
-        <p:blipFill>
-          <a:blip r:embed="rId14"/>
-          <a:stretch>
-            <a:fillRect/>
-          </a:stretch>
-        </p:blipFill>
-        <p:spPr>
-          <a:xfrm>
-            <a:off x="6552175" y="4926476"/>
-            <a:ext cx="91017" cy="105833"/>
-          </a:xfrm>
-          <a:prstGeom prst="rect">
-            <a:avLst/>
-          </a:prstGeom>
-        </p:spPr>
-      </p:pic>
-      <p:sp>
-        <p:nvSpPr>
-          <p:cNvPr id="50" name="p1-role"/>
-          <p:cNvSpPr/>
-          <p:nvPr/>
-        </p:nvSpPr>
-        <p:spPr>
-          <a:xfrm>
-            <a:off x="4781550" y="5087342"/>
-            <a:ext cx="2584450" cy="680045"/>
-          </a:xfrm>
-          <a:prstGeom prst="roundRect">
-            <a:avLst>
-              <a:gd name="adj" fmla="val 14006"/>
-            </a:avLst>
-          </a:prstGeom>
-          <a:solidFill>
-            <a:srgbClr val="FFFFFF"/>
-          </a:solidFill>
-          <a:ln w="12700">
-            <a:solidFill>
-              <a:srgbClr val="FFFFFF"/>
-            </a:solidFill>
-            <a:prstDash val="solid"/>
-          </a:ln>
-        </p:spPr>
-      </p:sp>
-      <p:sp>
-        <p:nvSpPr>
-          <p:cNvPr id="51" name="p1-av"/>
-          <p:cNvSpPr/>
-          <p:nvPr/>
-        </p:nvSpPr>
-        <p:spPr>
-          <a:xfrm>
-            <a:off x="4892675" y="5165130"/>
-            <a:ext cx="107950" cy="107950"/>
-          </a:xfrm>
-          <a:prstGeom prst="ellipse">
-            <a:avLst/>
-          </a:prstGeom>
-          <a:solidFill>
-            <a:srgbClr val="00A94F"/>
-          </a:solidFill>
-          <a:ln w="31750">
-            <a:solidFill>
-              <a:srgbClr val="E5F6EC"/>
-            </a:solidFill>
-            <a:prstDash val="solid"/>
-          </a:ln>
-        </p:spPr>
-      </p:sp>
-      <p:pic>
-        <p:nvPicPr>
-          <p:cNvPr id="52" name="li" descr="li">    </p:cNvPr>
-          <p:cNvPicPr>
-            <a:picLocks noChangeAspect="1"/>
-          </p:cNvPicPr>
-          <p:nvPr/>
-        </p:nvPicPr>
-        <p:blipFill>
-          <a:blip r:embed="rId15"/>
-          <a:stretch>
-            <a:fillRect/>
-          </a:stretch>
-        </p:blipFill>
-        <p:spPr>
-          <a:xfrm>
-            <a:off x="4883150" y="5422834"/>
-            <a:ext cx="38100" cy="38100"/>
-          </a:xfrm>
-          <a:prstGeom prst="rect">
-            <a:avLst/>
-          </a:prstGeom>
-        </p:spPr>
-      </p:pic>
-      <p:sp>
-        <p:nvSpPr>
-          <p:cNvPr id="53" name="chip tech p1-tool"/>
-          <p:cNvSpPr/>
-          <p:nvPr/>
-        </p:nvSpPr>
-        <p:spPr>
-          <a:xfrm>
-            <a:off x="4965700" y="5340648"/>
-            <a:ext cx="400943" cy="177800"/>
-          </a:xfrm>
-          <a:prstGeom prst="roundRect">
-            <a:avLst>
-              <a:gd name="adj" fmla="val 50000"/>
-            </a:avLst>
-          </a:prstGeom>
-          <a:solidFill>
-            <a:srgbClr val="EEF4FC"/>
-          </a:solidFill>
-          <a:ln/>
-        </p:spPr>
-      </p:sp>
-      <p:pic>
-        <p:nvPicPr>
-          <p:cNvPr id="54" name="li" descr="li">    </p:cNvPr>
-          <p:cNvPicPr>
-            <a:picLocks noChangeAspect="1"/>
-          </p:cNvPicPr>
-          <p:nvPr/>
-        </p:nvPicPr>
-        <p:blipFill>
-          <a:blip r:embed="rId16"/>
-          <a:stretch>
-            <a:fillRect/>
-          </a:stretch>
-        </p:blipFill>
-        <p:spPr>
-          <a:xfrm>
-            <a:off x="4883150" y="5620511"/>
-            <a:ext cx="38100" cy="38100"/>
-          </a:xfrm>
-          <a:prstGeom prst="rect">
-            <a:avLst/>
-          </a:prstGeom>
-        </p:spPr>
-      </p:pic>
-      <p:sp>
-        <p:nvSpPr>
-          <p:cNvPr id="55" name="p1-role"/>
-          <p:cNvSpPr/>
-          <p:nvPr/>
-        </p:nvSpPr>
-        <p:spPr>
-          <a:xfrm>
-            <a:off x="7467600" y="5087342"/>
-            <a:ext cx="2584450" cy="680045"/>
-          </a:xfrm>
-          <a:prstGeom prst="roundRect">
-            <a:avLst>
-              <a:gd name="adj" fmla="val 14006"/>
-            </a:avLst>
-          </a:prstGeom>
-          <a:solidFill>
-            <a:srgbClr val="FFFFFF"/>
-          </a:solidFill>
-          <a:ln w="12700">
-            <a:solidFill>
-              <a:srgbClr val="FFFFFF"/>
-            </a:solidFill>
-            <a:prstDash val="solid"/>
-          </a:ln>
-        </p:spPr>
-      </p:sp>
-      <p:sp>
-        <p:nvSpPr>
-          <p:cNvPr id="56" name="p1-av"/>
-          <p:cNvSpPr/>
-          <p:nvPr/>
-        </p:nvSpPr>
-        <p:spPr>
-          <a:xfrm>
-            <a:off x="7578725" y="5165130"/>
-            <a:ext cx="107950" cy="107950"/>
-          </a:xfrm>
-          <a:prstGeom prst="ellipse">
-            <a:avLst/>
-          </a:prstGeom>
-          <a:solidFill>
-            <a:srgbClr val="00A94F"/>
-          </a:solidFill>
-          <a:ln w="31750">
-            <a:solidFill>
-              <a:srgbClr val="E5F6EC"/>
-            </a:solidFill>
-            <a:prstDash val="solid"/>
-          </a:ln>
-        </p:spPr>
-      </p:sp>
-      <p:pic>
-        <p:nvPicPr>
-          <p:cNvPr id="57" name="li" descr="li">    </p:cNvPr>
-          <p:cNvPicPr>
-            <a:picLocks noChangeAspect="1"/>
-          </p:cNvPicPr>
-          <p:nvPr/>
-        </p:nvPicPr>
-        <p:blipFill>
-          <a:blip r:embed="rId17"/>
-          <a:stretch>
-            <a:fillRect/>
-          </a:stretch>
-        </p:blipFill>
-        <p:spPr>
-          <a:xfrm>
-            <a:off x="7569200" y="5422834"/>
-            <a:ext cx="38100" cy="38100"/>
-          </a:xfrm>
-          <a:prstGeom prst="rect">
-            <a:avLst/>
-          </a:prstGeom>
-        </p:spPr>
-      </p:pic>
-      <p:pic>
-        <p:nvPicPr>
-          <p:cNvPr id="58" name="li" descr="li">    </p:cNvPr>
-          <p:cNvPicPr>
-            <a:picLocks noChangeAspect="1"/>
-          </p:cNvPicPr>
-          <p:nvPr/>
-        </p:nvPicPr>
-        <p:blipFill>
-          <a:blip r:embed="rId18"/>
-          <a:stretch>
-            <a:fillRect/>
-          </a:stretch>
-        </p:blipFill>
-        <p:spPr>
-          <a:xfrm>
-            <a:off x="7569200" y="5620511"/>
-            <a:ext cx="38100" cy="38100"/>
-          </a:xfrm>
-          <a:prstGeom prst="rect">
-            <a:avLst/>
-          </a:prstGeom>
-        </p:spPr>
-      </p:pic>
-      <p:sp>
-        <p:nvSpPr>
-          <p:cNvPr id="59" name="p1-panel"/>
-          <p:cNvSpPr/>
-          <p:nvPr/>
-        </p:nvSpPr>
-        <p:spPr>
-          <a:xfrm>
-            <a:off x="10312400" y="4115495"/>
-            <a:ext cx="1270000" cy="1712020"/>
-          </a:xfrm>
-          <a:prstGeom prst="roundRect">
-            <a:avLst>
-              <a:gd name="adj" fmla="val 11000"/>
-            </a:avLst>
-          </a:prstGeom>
-          <a:solidFill>
-            <a:srgbClr val="EEF4FC"/>
-          </a:solidFill>
-          <a:ln/>
-        </p:spPr>
-      </p:sp>
-      <p:pic>
-        <p:nvPicPr>
-          <p:cNvPr id="60" name="svg" descr="svg">    </p:cNvPr>
-          <p:cNvPicPr>
-            <a:picLocks noChangeAspect="1"/>
-          </p:cNvPicPr>
-          <p:nvPr/>
-        </p:nvPicPr>
-        <p:blipFill>
-          <a:blip r:embed="rId19"/>
-          <a:stretch>
-            <a:fillRect/>
-          </a:stretch>
-        </p:blipFill>
-        <p:spPr>
-          <a:xfrm>
-            <a:off x="10416117" y="4454161"/>
-            <a:ext cx="1064683" cy="643467"/>
-          </a:xfrm>
-          <a:prstGeom prst="rect">
-            <a:avLst/>
-          </a:prstGeom>
-        </p:spPr>
-      </p:pic>
-      <p:pic>
-        <p:nvPicPr>
-          <p:cNvPr id="61" name="svg" descr="svg">    </p:cNvPr>
-          <p:cNvPicPr>
-            <a:picLocks noChangeAspect="1"/>
-          </p:cNvPicPr>
-          <p:nvPr/>
-        </p:nvPicPr>
-        <p:blipFill>
-          <a:blip r:embed="rId20"/>
-          <a:stretch>
-            <a:fillRect/>
-          </a:stretch>
-        </p:blipFill>
-        <p:spPr>
-          <a:xfrm>
-            <a:off x="10420350" y="5385594"/>
-            <a:ext cx="114300" cy="114300"/>
-          </a:xfrm>
-          <a:prstGeom prst="rect">
-            <a:avLst/>
-          </a:prstGeom>
-        </p:spPr>
-      </p:pic>
-      <p:sp>
-        <p:nvSpPr>
-          <p:cNvPr id="62" name="key"/>
-          <p:cNvSpPr/>
-          <p:nvPr/>
-        </p:nvSpPr>
-        <p:spPr>
-          <a:xfrm>
-            <a:off x="609600" y="5916414"/>
-            <a:ext cx="10972800" cy="432991"/>
-          </a:xfrm>
-          <a:prstGeom prst="roundRect">
-            <a:avLst>
-              <a:gd name="adj" fmla="val 32264"/>
-            </a:avLst>
-          </a:prstGeom>
-          <a:solidFill>
-            <a:srgbClr val="0B2147"/>
-          </a:solidFill>
-          <a:ln/>
-        </p:spPr>
-      </p:sp>
-      <p:sp>
-        <p:nvSpPr>
-          <p:cNvPr id="63" name="i"/>
-          <p:cNvSpPr/>
-          <p:nvPr/>
-        </p:nvSpPr>
-        <p:spPr>
-          <a:xfrm>
-            <a:off x="863600" y="6101060"/>
-            <a:ext cx="63500" cy="63500"/>
-          </a:xfrm>
-          <a:prstGeom prst="ellipse">
-            <a:avLst/>
-          </a:prstGeom>
-          <a:solidFill>
-            <a:srgbClr val="00A94F"/>
-          </a:solidFill>
-          <a:ln/>
-        </p:spPr>
-      </p:sp>
-      <p:sp>
-        <p:nvSpPr>
-          <p:cNvPr id="64" name="b"/>
-          <p:cNvSpPr/>
-          <p:nvPr/>
-        </p:nvSpPr>
-        <p:spPr>
-          <a:xfrm>
-            <a:off x="927100" y="6126460"/>
-            <a:ext cx="88900" cy="12700"/>
-          </a:xfrm>
-          <a:prstGeom prst="rect">
-            <a:avLst/>
-          </a:prstGeom>
-          <a:solidFill>
-            <a:srgbClr val="C3CEDD"/>
-          </a:solidFill>
-          <a:ln/>
-        </p:spPr>
-      </p:sp>
-      <p:sp>
-        <p:nvSpPr>
-          <p:cNvPr id="65" name="i"/>
-          <p:cNvSpPr/>
-          <p:nvPr/>
-        </p:nvSpPr>
-        <p:spPr>
-          <a:xfrm>
-            <a:off x="1016000" y="6101060"/>
-            <a:ext cx="63500" cy="63500"/>
-          </a:xfrm>
-          <a:prstGeom prst="ellipse">
-            <a:avLst/>
-          </a:prstGeom>
-          <a:solidFill>
-            <a:srgbClr val="004B8D"/>
-          </a:solidFill>
-          <a:ln/>
-        </p:spPr>
-      </p:sp>
-      <p:sp>
-        <p:nvSpPr>
-          <p:cNvPr id="66" name="b"/>
-          <p:cNvSpPr/>
-          <p:nvPr/>
-        </p:nvSpPr>
-        <p:spPr>
-          <a:xfrm>
-            <a:off x="1079500" y="6126460"/>
-            <a:ext cx="88900" cy="12700"/>
-          </a:xfrm>
-          <a:prstGeom prst="rect">
-            <a:avLst/>
-          </a:prstGeom>
-          <a:solidFill>
-            <a:srgbClr val="C3CEDD"/>
-          </a:solidFill>
-          <a:ln/>
-        </p:spPr>
-      </p:sp>
-      <p:sp>
-        <p:nvSpPr>
-          <p:cNvPr id="67" name="i"/>
-          <p:cNvSpPr/>
-          <p:nvPr/>
-        </p:nvSpPr>
-        <p:spPr>
-          <a:xfrm>
-            <a:off x="1168400" y="6101060"/>
-            <a:ext cx="63500" cy="63500"/>
-          </a:xfrm>
-          <a:prstGeom prst="ellipse">
-            <a:avLst/>
-          </a:prstGeom>
-          <a:solidFill>
             <a:srgbClr val="FDBB30"/>
           </a:solidFill>
           <a:ln/>
@@ -2549,7 +1903,7 @@
       </p:sp>
       <p:sp>
         <p:nvSpPr>
-          <p:cNvPr id="68" name="01"/>
+          <p:cNvPr id="40" name="01"/>
           <p:cNvSpPr txBox="1"/>
           <p:nvPr/>
         </p:nvSpPr>
@@ -2588,7 +1942,7 @@
       </p:sp>
       <p:sp>
         <p:nvSpPr>
-          <p:cNvPr id="69" name="PT 주제 1 · 가장 중요하게 생각하는 가치와 실천 경험"/>
+          <p:cNvPr id="41" name="PT 주제 1 · 가장 중요하게 생각하는 가치와 실천 경험"/>
           <p:cNvSpPr txBox="1"/>
           <p:nvPr/>
         </p:nvSpPr>
@@ -2627,7 +1981,7 @@
       </p:sp>
       <p:sp>
         <p:nvSpPr>
-          <p:cNvPr id="70" name="제가 가장 중요하게 생각하는 가치는"/>
+          <p:cNvPr id="42" name="제가 가장 중요하게 생각하는 가치는"/>
           <p:cNvSpPr txBox="1"/>
           <p:nvPr/>
         </p:nvSpPr>
@@ -2666,7 +2020,7 @@
       </p:sp>
       <p:sp>
         <p:nvSpPr>
-          <p:cNvPr id="71" name="공동의 목표를 공유하며 함께 성과를 만드는 협업입니다"/>
+          <p:cNvPr id="43" name="공동의 목표를 공유하며 함께 성과를 만드는 협업입니다"/>
           <p:cNvSpPr txBox="1"/>
           <p:nvPr/>
         </p:nvSpPr>
@@ -2747,116 +2101,1378 @@
       </p:sp>
       <p:sp>
         <p:nvSpPr>
-          <p:cNvPr id="72" name="PROJECT"/>
-          <p:cNvSpPr txBox="1"/>
-          <p:nvPr/>
-        </p:nvSpPr>
-        <p:spPr>
-          <a:xfrm>
-            <a:off x="825500" y="2159298"/>
-            <a:ext cx="774898" cy="146050"/>
-          </a:xfrm>
-          <a:prstGeom prst="rect">
-            <a:avLst/>
-          </a:prstGeom>
-          <a:noFill/>
-          <a:ln/>
-        </p:spPr>
-        <p:txBody>
-          <a:bodyPr wrap="none" lIns="0" tIns="0" rIns="0" bIns="0" rtlCol="0" anchor="ctr"/>
-          <a:lstStyle/>
-          <a:p>
-            <a:pPr algn="l" indent="0" marL="0">
-              <a:buNone/>
-            </a:pPr>
-            <a:r>
-              <a:rPr lang="ko-KR" altLang="en-US" sz="950" spc="152" kern="0" dirty="0">
+          <p:cNvPr id="44" name="학생 BIM 경진대회 · 4인 팀 팀장"/>
+          <p:cNvSpPr txBox="1"/>
+          <p:nvPr/>
+        </p:nvSpPr>
+        <p:spPr>
+          <a:xfrm>
+            <a:off x="609600" y="1820664"/>
+            <a:ext cx="1739227" cy="152400"/>
+          </a:xfrm>
+          <a:prstGeom prst="rect">
+            <a:avLst/>
+          </a:prstGeom>
+          <a:noFill/>
+          <a:ln/>
+        </p:spPr>
+        <p:txBody>
+          <a:bodyPr wrap="none" lIns="0" tIns="0" rIns="0" bIns="0" rtlCol="0" anchor="ctr"/>
+          <a:lstStyle/>
+          <a:p>
+            <a:pPr algn="l" indent="0" marL="0">
+              <a:buNone/>
+            </a:pPr>
+            <a:r>
+              <a:rPr lang="ko-KR" altLang="en-US" sz="1000" spc="-10" kern="0" dirty="0">
+                <a:solidFill>
+                  <a:srgbClr val="4B5568"/>
+                </a:solidFill>
+                <a:latin typeface="Paperlogy 6 SemiBold" pitchFamily="34" charset="0"/>
+                <a:ea typeface="Paperlogy 6 SemiBold" pitchFamily="34" charset="-127"/>
+                <a:cs typeface="Paperlogy 6 SemiBold" pitchFamily="34" charset="-120"/>
+              </a:rPr>
+              <a:t>학생 BIM 경진대회 · 4인 팀 팀장</a:t>
+            </a:r>
+            <a:endParaRPr lang="en-US" sz="1000" dirty="0"/>
+          </a:p>
+        </p:txBody>
+      </p:sp>
+      <p:sp>
+        <p:nvSpPr>
+          <p:cNvPr id="45" name="01"/>
+          <p:cNvSpPr txBox="1"/>
+          <p:nvPr/>
+        </p:nvSpPr>
+        <p:spPr>
+          <a:xfrm>
+            <a:off x="825500" y="2136924"/>
+            <a:ext cx="260152" cy="177800"/>
+          </a:xfrm>
+          <a:prstGeom prst="rect">
+            <a:avLst/>
+          </a:prstGeom>
+          <a:noFill/>
+          <a:ln/>
+        </p:spPr>
+        <p:txBody>
+          <a:bodyPr wrap="none" lIns="0" tIns="0" rIns="0" bIns="0" rtlCol="0" anchor="ctr"/>
+          <a:lstStyle/>
+          <a:p>
+            <a:pPr algn="l" indent="0" marL="0">
+              <a:buNone/>
+            </a:pPr>
+            <a:r>
+              <a:rPr lang="ko-KR" altLang="en-US" sz="1200" spc="24" kern="0" dirty="0">
                 <a:solidFill>
                   <a:srgbClr val="2A78DD"/>
+                </a:solidFill>
+                <a:latin typeface="Paperlogy 8 ExtraBold" pitchFamily="34" charset="0"/>
+                <a:ea typeface="Paperlogy 8 ExtraBold" pitchFamily="34" charset="-127"/>
+                <a:cs typeface="Paperlogy 8 ExtraBold" pitchFamily="34" charset="-120"/>
+              </a:rPr>
+              <a:t>01</a:t>
+            </a:r>
+            <a:endParaRPr lang="en-US" sz="1200" dirty="0"/>
+          </a:p>
+        </p:txBody>
+      </p:sp>
+      <p:sp>
+        <p:nvSpPr>
+          <p:cNvPr id="46" name="의견을 모아 주제를 정하다"/>
+          <p:cNvSpPr txBox="1"/>
+          <p:nvPr/>
+        </p:nvSpPr>
+        <p:spPr>
+          <a:xfrm>
+            <a:off x="1111052" y="2086124"/>
+            <a:ext cx="2136777" cy="234950"/>
+          </a:xfrm>
+          <a:prstGeom prst="rect">
+            <a:avLst/>
+          </a:prstGeom>
+          <a:noFill/>
+          <a:ln/>
+        </p:spPr>
+        <p:txBody>
+          <a:bodyPr wrap="none" lIns="0" tIns="0" rIns="0" bIns="0" rtlCol="0" anchor="ctr"/>
+          <a:lstStyle/>
+          <a:p>
+            <a:pPr algn="l" indent="0" marL="0">
+              <a:buNone/>
+            </a:pPr>
+            <a:r>
+              <a:rPr lang="ko-KR" altLang="en-US" sz="1600" spc="-48" kern="0" dirty="0">
+                <a:solidFill>
+                  <a:srgbClr val="0B2147"/>
+                </a:solidFill>
+                <a:latin typeface="Paperlogy 8 ExtraBold" pitchFamily="34" charset="0"/>
+                <a:ea typeface="Paperlogy 8 ExtraBold" pitchFamily="34" charset="-127"/>
+                <a:cs typeface="Paperlogy 8 ExtraBold" pitchFamily="34" charset="-120"/>
+              </a:rPr>
+              <a:t>의견을 모아 주제를 정하다</a:t>
+            </a:r>
+            <a:endParaRPr lang="en-US" sz="1600" dirty="0"/>
+          </a:p>
+        </p:txBody>
+      </p:sp>
+      <p:sp>
+        <p:nvSpPr>
+          <p:cNvPr id="47" name="02"/>
+          <p:cNvSpPr txBox="1"/>
+          <p:nvPr/>
+        </p:nvSpPr>
+        <p:spPr>
+          <a:xfrm>
+            <a:off x="4470400" y="2136924"/>
+            <a:ext cx="260152" cy="177800"/>
+          </a:xfrm>
+          <a:prstGeom prst="rect">
+            <a:avLst/>
+          </a:prstGeom>
+          <a:noFill/>
+          <a:ln/>
+        </p:spPr>
+        <p:txBody>
+          <a:bodyPr wrap="none" lIns="0" tIns="0" rIns="0" bIns="0" rtlCol="0" anchor="ctr"/>
+          <a:lstStyle/>
+          <a:p>
+            <a:pPr algn="l" indent="0" marL="0">
+              <a:buNone/>
+            </a:pPr>
+            <a:r>
+              <a:rPr lang="ko-KR" altLang="en-US" sz="1200" spc="24" kern="0" dirty="0">
+                <a:solidFill>
+                  <a:srgbClr val="2A78DD"/>
+                </a:solidFill>
+                <a:latin typeface="Paperlogy 8 ExtraBold" pitchFamily="34" charset="0"/>
+                <a:ea typeface="Paperlogy 8 ExtraBold" pitchFamily="34" charset="-127"/>
+                <a:cs typeface="Paperlogy 8 ExtraBold" pitchFamily="34" charset="-120"/>
+              </a:rPr>
+              <a:t>02</a:t>
+            </a:r>
+            <a:endParaRPr lang="en-US" sz="1200" dirty="0"/>
+          </a:p>
+        </p:txBody>
+      </p:sp>
+      <p:sp>
+        <p:nvSpPr>
+          <p:cNvPr id="48" name="강점에 맞게 역할을 나누다"/>
+          <p:cNvSpPr txBox="1"/>
+          <p:nvPr/>
+        </p:nvSpPr>
+        <p:spPr>
+          <a:xfrm>
+            <a:off x="4755952" y="2086124"/>
+            <a:ext cx="2136777" cy="234950"/>
+          </a:xfrm>
+          <a:prstGeom prst="rect">
+            <a:avLst/>
+          </a:prstGeom>
+          <a:noFill/>
+          <a:ln/>
+        </p:spPr>
+        <p:txBody>
+          <a:bodyPr wrap="none" lIns="0" tIns="0" rIns="0" bIns="0" rtlCol="0" anchor="ctr"/>
+          <a:lstStyle/>
+          <a:p>
+            <a:pPr algn="l" indent="0" marL="0">
+              <a:buNone/>
+            </a:pPr>
+            <a:r>
+              <a:rPr lang="ko-KR" altLang="en-US" sz="1600" spc="-48" kern="0" dirty="0">
+                <a:solidFill>
+                  <a:srgbClr val="0B2147"/>
+                </a:solidFill>
+                <a:latin typeface="Paperlogy 8 ExtraBold" pitchFamily="34" charset="0"/>
+                <a:ea typeface="Paperlogy 8 ExtraBold" pitchFamily="34" charset="-127"/>
+                <a:cs typeface="Paperlogy 8 ExtraBold" pitchFamily="34" charset="-120"/>
+              </a:rPr>
+              <a:t>강점에 맞게 역할을 나누다</a:t>
+            </a:r>
+            <a:endParaRPr lang="en-US" sz="1600" dirty="0"/>
+          </a:p>
+        </p:txBody>
+      </p:sp>
+      <p:sp>
+        <p:nvSpPr>
+          <p:cNvPr id="49" name="03"/>
+          <p:cNvSpPr txBox="1"/>
+          <p:nvPr/>
+        </p:nvSpPr>
+        <p:spPr>
+          <a:xfrm>
+            <a:off x="8877300" y="2136924"/>
+            <a:ext cx="260152" cy="177800"/>
+          </a:xfrm>
+          <a:prstGeom prst="rect">
+            <a:avLst/>
+          </a:prstGeom>
+          <a:noFill/>
+          <a:ln/>
+        </p:spPr>
+        <p:txBody>
+          <a:bodyPr wrap="none" lIns="0" tIns="0" rIns="0" bIns="0" rtlCol="0" anchor="ctr"/>
+          <a:lstStyle/>
+          <a:p>
+            <a:pPr algn="l" indent="0" marL="0">
+              <a:buNone/>
+            </a:pPr>
+            <a:r>
+              <a:rPr lang="ko-KR" altLang="en-US" sz="1200" spc="24" kern="0" dirty="0">
+                <a:solidFill>
+                  <a:srgbClr val="2A78DD"/>
+                </a:solidFill>
+                <a:latin typeface="Paperlogy 8 ExtraBold" pitchFamily="34" charset="0"/>
+                <a:ea typeface="Paperlogy 8 ExtraBold" pitchFamily="34" charset="-127"/>
+                <a:cs typeface="Paperlogy 8 ExtraBold" pitchFamily="34" charset="-120"/>
+              </a:rPr>
+              <a:t>03</a:t>
+            </a:r>
+            <a:endParaRPr lang="en-US" sz="1200" dirty="0"/>
+          </a:p>
+        </p:txBody>
+      </p:sp>
+      <p:sp>
+        <p:nvSpPr>
+          <p:cNvPr id="50" name="3주 만에 완성, 장려상"/>
+          <p:cNvSpPr txBox="1"/>
+          <p:nvPr/>
+        </p:nvSpPr>
+        <p:spPr>
+          <a:xfrm>
+            <a:off x="9162852" y="2086124"/>
+            <a:ext cx="1780875" cy="234950"/>
+          </a:xfrm>
+          <a:prstGeom prst="rect">
+            <a:avLst/>
+          </a:prstGeom>
+          <a:noFill/>
+          <a:ln/>
+        </p:spPr>
+        <p:txBody>
+          <a:bodyPr wrap="none" lIns="0" tIns="0" rIns="0" bIns="0" rtlCol="0" anchor="ctr"/>
+          <a:lstStyle/>
+          <a:p>
+            <a:pPr algn="l" indent="0" marL="0">
+              <a:buNone/>
+            </a:pPr>
+            <a:r>
+              <a:rPr lang="ko-KR" altLang="en-US" sz="1600" spc="-48" kern="0" dirty="0">
+                <a:solidFill>
+                  <a:srgbClr val="0B2147"/>
+                </a:solidFill>
+                <a:latin typeface="Paperlogy 8 ExtraBold" pitchFamily="34" charset="0"/>
+                <a:ea typeface="Paperlogy 8 ExtraBold" pitchFamily="34" charset="-127"/>
+                <a:cs typeface="Paperlogy 8 ExtraBold" pitchFamily="34" charset="-120"/>
+              </a:rPr>
+              <a:t>3주 만에 완성, 장려상</a:t>
+            </a:r>
+            <a:endParaRPr lang="en-US" sz="1600" dirty="0"/>
+          </a:p>
+        </p:txBody>
+      </p:sp>
+      <p:sp>
+        <p:nvSpPr>
+          <p:cNvPr id="51" name="마감 3주 전까지 주제 미확정"/>
+          <p:cNvSpPr txBox="1"/>
+          <p:nvPr/>
+        </p:nvSpPr>
+        <p:spPr>
+          <a:xfrm>
+            <a:off x="1631504" y="2582664"/>
+            <a:ext cx="1468305" cy="152400"/>
+          </a:xfrm>
+          <a:prstGeom prst="rect">
+            <a:avLst/>
+          </a:prstGeom>
+          <a:noFill/>
+          <a:ln/>
+        </p:spPr>
+        <p:txBody>
+          <a:bodyPr wrap="none" lIns="0" tIns="0" rIns="0" bIns="0" rtlCol="0" anchor="ctr"/>
+          <a:lstStyle/>
+          <a:p>
+            <a:pPr algn="l" indent="0" marL="0">
+              <a:buNone/>
+            </a:pPr>
+            <a:r>
+              <a:rPr lang="ko-KR" altLang="en-US" sz="1000" spc="-20" kern="0" dirty="0">
+                <a:solidFill>
+                  <a:srgbClr val="8691A5"/>
+                </a:solidFill>
+                <a:latin typeface="Paperlogy 6 SemiBold" pitchFamily="34" charset="0"/>
+                <a:ea typeface="Paperlogy 6 SemiBold" pitchFamily="34" charset="-127"/>
+                <a:cs typeface="Paperlogy 6 SemiBold" pitchFamily="34" charset="-120"/>
+              </a:rPr>
+              <a:t>마감 3주 전까지 주제 미확정</a:t>
+            </a:r>
+            <a:endParaRPr lang="en-US" sz="1000" dirty="0"/>
+          </a:p>
+        </p:txBody>
+      </p:sp>
+      <p:sp>
+        <p:nvSpPr>
+          <p:cNvPr id="52" name="참신성"/>
+          <p:cNvSpPr txBox="1"/>
+          <p:nvPr/>
+        </p:nvSpPr>
+        <p:spPr>
+          <a:xfrm>
+            <a:off x="1060698" y="2865834"/>
+            <a:ext cx="444004" cy="177800"/>
+          </a:xfrm>
+          <a:prstGeom prst="rect">
+            <a:avLst/>
+          </a:prstGeom>
+          <a:noFill/>
+          <a:ln/>
+        </p:spPr>
+        <p:txBody>
+          <a:bodyPr wrap="none" lIns="0" tIns="0" rIns="0" bIns="0" rtlCol="0" anchor="ctr"/>
+          <a:lstStyle/>
+          <a:p>
+            <a:pPr algn="l" indent="0" marL="0">
+              <a:buNone/>
+            </a:pPr>
+            <a:r>
+              <a:rPr lang="ko-KR" altLang="en-US" sz="1200" spc="-24" kern="0" dirty="0">
+                <a:solidFill>
+                  <a:srgbClr val="1C2536"/>
                 </a:solidFill>
                 <a:latin typeface="Paperlogy 7 Bold" pitchFamily="34" charset="0"/>
                 <a:ea typeface="Paperlogy 7 Bold" pitchFamily="34" charset="-127"/>
                 <a:cs typeface="Paperlogy 7 Bold" pitchFamily="34" charset="-120"/>
               </a:rPr>
-              <a:t>PROJECT</a:t>
-            </a:r>
-            <a:endParaRPr lang="en-US" sz="950" dirty="0"/>
-          </a:p>
-        </p:txBody>
-      </p:sp>
-      <p:sp>
-        <p:nvSpPr>
-          <p:cNvPr id="73" name="학생 BIM 경진대회"/>
-          <p:cNvSpPr txBox="1"/>
-          <p:nvPr/>
-        </p:nvSpPr>
-        <p:spPr>
-          <a:xfrm>
-            <a:off x="1752798" y="2159298"/>
-            <a:ext cx="993454" cy="146050"/>
-          </a:xfrm>
-          <a:prstGeom prst="rect">
-            <a:avLst/>
-          </a:prstGeom>
-          <a:noFill/>
-          <a:ln/>
-        </p:spPr>
-        <p:txBody>
-          <a:bodyPr wrap="none" lIns="0" tIns="0" rIns="0" bIns="0" rtlCol="0" anchor="ctr"/>
-          <a:lstStyle/>
-          <a:p>
-            <a:pPr algn="l" indent="0" marL="0">
-              <a:buNone/>
-            </a:pPr>
-            <a:r>
-              <a:rPr lang="ko-KR" altLang="en-US" sz="950" dirty="0">
-                <a:solidFill>
-                  <a:srgbClr val="004B8D"/>
+              <a:t>참신성</a:t>
+            </a:r>
+            <a:endParaRPr lang="en-US" sz="1200" dirty="0"/>
+          </a:p>
+        </p:txBody>
+      </p:sp>
+      <p:sp>
+        <p:nvSpPr>
+          <p:cNvPr id="53" name="구현 가능성"/>
+          <p:cNvSpPr txBox="1"/>
+          <p:nvPr/>
+        </p:nvSpPr>
+        <p:spPr>
+          <a:xfrm>
+            <a:off x="3048000" y="2865834"/>
+            <a:ext cx="736600" cy="177800"/>
+          </a:xfrm>
+          <a:prstGeom prst="rect">
+            <a:avLst/>
+          </a:prstGeom>
+          <a:noFill/>
+          <a:ln/>
+        </p:spPr>
+        <p:txBody>
+          <a:bodyPr wrap="none" lIns="0" tIns="0" rIns="0" bIns="0" rtlCol="0" anchor="ctr"/>
+          <a:lstStyle/>
+          <a:p>
+            <a:pPr algn="l" indent="0" marL="0">
+              <a:buNone/>
+            </a:pPr>
+            <a:r>
+              <a:rPr lang="ko-KR" altLang="en-US" sz="1200" spc="-24" kern="0" dirty="0">
+                <a:solidFill>
+                  <a:srgbClr val="1C2536"/>
                 </a:solidFill>
                 <a:latin typeface="Paperlogy 7 Bold" pitchFamily="34" charset="0"/>
                 <a:ea typeface="Paperlogy 7 Bold" pitchFamily="34" charset="-127"/>
                 <a:cs typeface="Paperlogy 7 Bold" pitchFamily="34" charset="-120"/>
               </a:rPr>
-              <a:t>학생 BIM 경진대회</a:t>
-            </a:r>
-            <a:endParaRPr lang="en-US" sz="950" dirty="0"/>
-          </a:p>
-        </p:txBody>
-      </p:sp>
-      <p:sp>
-        <p:nvSpPr>
-          <p:cNvPr id="74" name="4인 팀 · 팀장"/>
-          <p:cNvSpPr txBox="1"/>
-          <p:nvPr/>
-        </p:nvSpPr>
-        <p:spPr>
-          <a:xfrm>
-            <a:off x="3261519" y="2159298"/>
-            <a:ext cx="674489" cy="146050"/>
-          </a:xfrm>
-          <a:prstGeom prst="rect">
-            <a:avLst/>
-          </a:prstGeom>
-          <a:noFill/>
-          <a:ln/>
-        </p:spPr>
-        <p:txBody>
-          <a:bodyPr wrap="none" lIns="0" tIns="0" rIns="0" bIns="0" rtlCol="0" anchor="ctr"/>
-          <a:lstStyle/>
-          <a:p>
-            <a:pPr algn="l" indent="0" marL="0">
-              <a:buNone/>
-            </a:pPr>
-            <a:r>
-              <a:rPr lang="ko-KR" altLang="en-US" sz="950" dirty="0">
-                <a:solidFill>
-                  <a:srgbClr val="0B6B33"/>
+              <a:t>구현 가능성</a:t>
+            </a:r>
+            <a:endParaRPr lang="en-US" sz="1200" dirty="0"/>
+          </a:p>
+        </p:txBody>
+      </p:sp>
+      <p:sp>
+        <p:nvSpPr>
+          <p:cNvPr id="54" name="경청 · 수상작 분석 · 교수님 조언"/>
+          <p:cNvSpPr txBox="1"/>
+          <p:nvPr/>
+        </p:nvSpPr>
+        <p:spPr>
+          <a:xfrm>
+            <a:off x="1402209" y="3293864"/>
+            <a:ext cx="1954409" cy="177800"/>
+          </a:xfrm>
+          <a:prstGeom prst="rect">
+            <a:avLst/>
+          </a:prstGeom>
+          <a:noFill/>
+          <a:ln/>
+        </p:spPr>
+        <p:txBody>
+          <a:bodyPr wrap="none" lIns="0" tIns="0" rIns="0" bIns="0" rtlCol="0" anchor="ctr"/>
+          <a:lstStyle/>
+          <a:p>
+            <a:pPr algn="l" indent="0" marL="0">
+              <a:buNone/>
+            </a:pPr>
+            <a:r>
+              <a:rPr lang="ko-KR" altLang="en-US" sz="1200" spc="-24" kern="0" dirty="0">
+                <a:solidFill>
+                  <a:srgbClr val="1C2536"/>
+                </a:solidFill>
+                <a:latin typeface="Paperlogy 6 SemiBold" pitchFamily="34" charset="0"/>
+                <a:ea typeface="Paperlogy 6 SemiBold" pitchFamily="34" charset="-127"/>
+                <a:cs typeface="Paperlogy 6 SemiBold" pitchFamily="34" charset="-120"/>
+              </a:rPr>
+              <a:t>경청 · 수상작 분석 · 교수님 조언</a:t>
+            </a:r>
+            <a:endParaRPr lang="en-US" sz="1200" dirty="0"/>
+          </a:p>
+        </p:txBody>
+      </p:sp>
+      <p:sp>
+        <p:nvSpPr>
+          <p:cNvPr id="55" name="판단 기준 마련"/>
+          <p:cNvSpPr txBox="1"/>
+          <p:nvPr/>
+        </p:nvSpPr>
+        <p:spPr>
+          <a:xfrm>
+            <a:off x="1900386" y="3926284"/>
+            <a:ext cx="898273" cy="177800"/>
+          </a:xfrm>
+          <a:prstGeom prst="rect">
+            <a:avLst/>
+          </a:prstGeom>
+          <a:noFill/>
+          <a:ln/>
+        </p:spPr>
+        <p:txBody>
+          <a:bodyPr wrap="none" lIns="0" tIns="0" rIns="0" bIns="0" rtlCol="0" anchor="ctr"/>
+          <a:lstStyle/>
+          <a:p>
+            <a:pPr algn="l" indent="0" marL="0">
+              <a:buNone/>
+            </a:pPr>
+            <a:r>
+              <a:rPr lang="ko-KR" altLang="en-US" sz="1200" spc="-24" kern="0" dirty="0">
+                <a:solidFill>
+                  <a:srgbClr val="004B8D"/>
+                </a:solidFill>
+                <a:latin typeface="Paperlogy 8 ExtraBold" pitchFamily="34" charset="0"/>
+                <a:ea typeface="Paperlogy 8 ExtraBold" pitchFamily="34" charset="-127"/>
+                <a:cs typeface="Paperlogy 8 ExtraBold" pitchFamily="34" charset="-120"/>
+              </a:rPr>
+              <a:t>판단 기준 마련</a:t>
+            </a:r>
+            <a:endParaRPr lang="en-US" sz="1200" dirty="0"/>
+          </a:p>
+        </p:txBody>
+      </p:sp>
+      <p:sp>
+        <p:nvSpPr>
+          <p:cNvPr id="56" name="‘유닛 모듈러 기반 사용자 맞춤형"/>
+          <p:cNvSpPr txBox="1"/>
+          <p:nvPr/>
+        </p:nvSpPr>
+        <p:spPr>
+          <a:xfrm>
+            <a:off x="914400" y="4506714"/>
+            <a:ext cx="2741936" cy="254000"/>
+          </a:xfrm>
+          <a:prstGeom prst="rect">
+            <a:avLst/>
+          </a:prstGeom>
+          <a:noFill/>
+          <a:ln/>
+        </p:spPr>
+        <p:txBody>
+          <a:bodyPr wrap="none" lIns="0" tIns="0" rIns="0" bIns="0" rtlCol="0" anchor="ctr"/>
+          <a:lstStyle/>
+          <a:p>
+            <a:pPr algn="l" indent="0" marL="0">
+              <a:buNone/>
+            </a:pPr>
+            <a:r>
+              <a:rPr lang="ko-KR" altLang="en-US" sz="1700" spc="-59" kern="0" dirty="0">
+                <a:solidFill>
+                  <a:srgbClr val="FFFFFF"/>
+                </a:solidFill>
+                <a:latin typeface="Paperlogy 8 ExtraBold" pitchFamily="34" charset="0"/>
+                <a:ea typeface="Paperlogy 8 ExtraBold" pitchFamily="34" charset="-127"/>
+                <a:cs typeface="Paperlogy 8 ExtraBold" pitchFamily="34" charset="-120"/>
+              </a:rPr>
+              <a:t>‘유닛 모듈러 기반 사용자 맞춤형</a:t>
+            </a:r>
+            <a:endParaRPr lang="en-US" sz="1700" dirty="0"/>
+          </a:p>
+        </p:txBody>
+      </p:sp>
+      <p:sp>
+        <p:nvSpPr>
+          <p:cNvPr id="57" name="리모델링 방법’ 선정"/>
+          <p:cNvSpPr txBox="1"/>
+          <p:nvPr/>
+        </p:nvSpPr>
+        <p:spPr>
+          <a:xfrm>
+            <a:off x="914400" y="4776589"/>
+            <a:ext cx="1690428" cy="254000"/>
+          </a:xfrm>
+          <a:prstGeom prst="rect">
+            <a:avLst/>
+          </a:prstGeom>
+          <a:noFill/>
+          <a:ln/>
+        </p:spPr>
+        <p:txBody>
+          <a:bodyPr wrap="none" lIns="0" tIns="0" rIns="0" bIns="0" rtlCol="0" anchor="ctr"/>
+          <a:lstStyle/>
+          <a:p>
+            <a:pPr algn="l" indent="0" marL="0">
+              <a:buNone/>
+            </a:pPr>
+            <a:r>
+              <a:rPr lang="ko-KR" altLang="en-US" sz="1700" spc="-59" kern="0" dirty="0">
+                <a:solidFill>
+                  <a:srgbClr val="FFFFFF"/>
+                </a:solidFill>
+                <a:latin typeface="Paperlogy 8 ExtraBold" pitchFamily="34" charset="0"/>
+                <a:ea typeface="Paperlogy 8 ExtraBold" pitchFamily="34" charset="-127"/>
+                <a:cs typeface="Paperlogy 8 ExtraBold" pitchFamily="34" charset="-120"/>
+              </a:rPr>
+              <a:t>리모델링 방법’ </a:t>
+            </a:r>
+            <a:pPr algn="l" indent="0" marL="0">
+              <a:buNone/>
+            </a:pPr>
+            <a:r>
+              <a:rPr lang="ko-KR" altLang="en-US" sz="1700" spc="-59" kern="0" dirty="0">
+                <a:solidFill>
+                  <a:srgbClr val="45B9EC"/>
+                </a:solidFill>
+                <a:latin typeface="Paperlogy 8 ExtraBold" pitchFamily="34" charset="0"/>
+                <a:ea typeface="Paperlogy 8 ExtraBold" pitchFamily="34" charset="-127"/>
+                <a:cs typeface="Paperlogy 8 ExtraBold" pitchFamily="34" charset="-120"/>
+              </a:rPr>
+              <a:t>선정</a:t>
+            </a:r>
+            <a:endParaRPr lang="en-US" sz="1700" dirty="0"/>
+          </a:p>
+        </p:txBody>
+      </p:sp>
+      <p:sp>
+        <p:nvSpPr>
+          <p:cNvPr id="58" name="리모델링 규모에 따라 유닛 모듈러를 배치하고,"/>
+          <p:cNvSpPr txBox="1"/>
+          <p:nvPr/>
+        </p:nvSpPr>
+        <p:spPr>
+          <a:xfrm>
+            <a:off x="914400" y="5103614"/>
+            <a:ext cx="2365526" cy="152400"/>
+          </a:xfrm>
+          <a:prstGeom prst="rect">
+            <a:avLst/>
+          </a:prstGeom>
+          <a:noFill/>
+          <a:ln/>
+        </p:spPr>
+        <p:txBody>
+          <a:bodyPr wrap="none" lIns="0" tIns="0" rIns="0" bIns="0" rtlCol="0" anchor="ctr"/>
+          <a:lstStyle/>
+          <a:p>
+            <a:pPr algn="l" indent="0" marL="0">
+              <a:buNone/>
+            </a:pPr>
+            <a:r>
+              <a:rPr lang="ko-KR" altLang="en-US" sz="1000" spc="-20" kern="0" dirty="0">
+                <a:solidFill>
+                  <a:srgbClr val="C9CED7"/>
+                </a:solidFill>
+                <a:latin typeface="Paperlogy 5 Medium" pitchFamily="34" charset="0"/>
+                <a:ea typeface="Paperlogy 5 Medium" pitchFamily="34" charset="-127"/>
+                <a:cs typeface="Paperlogy 5 Medium" pitchFamily="34" charset="-120"/>
+              </a:rPr>
+              <a:t>리모델링 규모에 따라 유닛 모듈러를 배치하고,</a:t>
+            </a:r>
+            <a:endParaRPr lang="en-US" sz="1000" dirty="0"/>
+          </a:p>
+        </p:txBody>
+      </p:sp>
+      <p:sp>
+        <p:nvSpPr>
+          <p:cNvPr id="59" name="모듈 수 · 자재 물량을 자동 산출"/>
+          <p:cNvSpPr txBox="1"/>
+          <p:nvPr/>
+        </p:nvSpPr>
+        <p:spPr>
+          <a:xfrm>
+            <a:off x="914400" y="5281414"/>
+            <a:ext cx="1587990" cy="152400"/>
+          </a:xfrm>
+          <a:prstGeom prst="rect">
+            <a:avLst/>
+          </a:prstGeom>
+          <a:noFill/>
+          <a:ln/>
+        </p:spPr>
+        <p:txBody>
+          <a:bodyPr wrap="none" lIns="0" tIns="0" rIns="0" bIns="0" rtlCol="0" anchor="ctr"/>
+          <a:lstStyle/>
+          <a:p>
+            <a:pPr algn="l" indent="0" marL="0">
+              <a:buNone/>
+            </a:pPr>
+            <a:r>
+              <a:rPr lang="ko-KR" altLang="en-US" sz="1000" spc="-20" kern="0" dirty="0">
+                <a:solidFill>
+                  <a:srgbClr val="C9CED7"/>
+                </a:solidFill>
+                <a:latin typeface="Paperlogy 5 Medium" pitchFamily="34" charset="0"/>
+                <a:ea typeface="Paperlogy 5 Medium" pitchFamily="34" charset="-127"/>
+                <a:cs typeface="Paperlogy 5 Medium" pitchFamily="34" charset="-120"/>
+              </a:rPr>
+              <a:t>모듈 수 · 자재 물량을 자동 산출</a:t>
+            </a:r>
+            <a:endParaRPr lang="en-US" sz="1000" dirty="0"/>
+          </a:p>
+        </p:txBody>
+      </p:sp>
+      <p:sp>
+        <p:nvSpPr>
+          <p:cNvPr id="60" name="팀장 · 나"/>
+          <p:cNvSpPr txBox="1"/>
+          <p:nvPr/>
+        </p:nvSpPr>
+        <p:spPr>
+          <a:xfrm>
+            <a:off x="6149578" y="2696964"/>
+            <a:ext cx="553045" cy="177800"/>
+          </a:xfrm>
+          <a:prstGeom prst="rect">
+            <a:avLst/>
+          </a:prstGeom>
+          <a:noFill/>
+          <a:ln/>
+        </p:spPr>
+        <p:txBody>
+          <a:bodyPr wrap="none" lIns="0" tIns="0" rIns="0" bIns="0" rtlCol="0" anchor="ctr"/>
+          <a:lstStyle/>
+          <a:p>
+            <a:pPr algn="ctr" indent="0" marL="0">
+              <a:buNone/>
+            </a:pPr>
+            <a:r>
+              <a:rPr lang="ko-KR" altLang="en-US" sz="1200" spc="-24" kern="0" dirty="0">
+                <a:solidFill>
+                  <a:srgbClr val="FFFFFF"/>
+                </a:solidFill>
+                <a:latin typeface="Paperlogy 8 ExtraBold" pitchFamily="34" charset="0"/>
+                <a:ea typeface="Paperlogy 8 ExtraBold" pitchFamily="34" charset="-127"/>
+                <a:cs typeface="Paperlogy 8 ExtraBold" pitchFamily="34" charset="-120"/>
+              </a:rPr>
+              <a:t>팀장 · 나</a:t>
+            </a:r>
+            <a:endParaRPr lang="en-US" sz="1200" dirty="0"/>
+          </a:p>
+        </p:txBody>
+      </p:sp>
+      <p:sp>
+        <p:nvSpPr>
+          <p:cNvPr id="61" name="프로젝트 총괄 ·"/>
+          <p:cNvSpPr txBox="1"/>
+          <p:nvPr/>
+        </p:nvSpPr>
+        <p:spPr>
+          <a:xfrm>
+            <a:off x="5882198" y="2926755"/>
+            <a:ext cx="935504" cy="177800"/>
+          </a:xfrm>
+          <a:prstGeom prst="rect">
+            <a:avLst/>
+          </a:prstGeom>
+          <a:noFill/>
+          <a:ln/>
+        </p:spPr>
+        <p:txBody>
+          <a:bodyPr wrap="none" lIns="0" tIns="0" rIns="0" bIns="0" rtlCol="0" anchor="ctr"/>
+          <a:lstStyle/>
+          <a:p>
+            <a:pPr algn="ctr" indent="0" marL="0">
+              <a:buNone/>
+            </a:pPr>
+            <a:r>
+              <a:rPr lang="ko-KR" altLang="en-US" sz="1200" spc="-30" kern="0" dirty="0">
+                <a:solidFill>
+                  <a:srgbClr val="DADEE3"/>
+                </a:solidFill>
+                <a:latin typeface="Paperlogy 5 Medium" pitchFamily="34" charset="0"/>
+                <a:ea typeface="Paperlogy 5 Medium" pitchFamily="34" charset="-127"/>
+                <a:cs typeface="Paperlogy 5 Medium" pitchFamily="34" charset="-120"/>
+              </a:rPr>
+              <a:t>프로젝트 총괄 ·</a:t>
+            </a:r>
+            <a:endParaRPr lang="en-US" sz="1200" dirty="0"/>
+          </a:p>
+        </p:txBody>
+      </p:sp>
+      <p:sp>
+        <p:nvSpPr>
+          <p:cNvPr id="62" name="Dynamo 기반 자동화 알고리즘 개발"/>
+          <p:cNvSpPr txBox="1"/>
+          <p:nvPr/>
+        </p:nvSpPr>
+        <p:spPr>
+          <a:xfrm>
+            <a:off x="5185750" y="3132435"/>
+            <a:ext cx="2328400" cy="177800"/>
+          </a:xfrm>
+          <a:prstGeom prst="rect">
+            <a:avLst/>
+          </a:prstGeom>
+          <a:noFill/>
+          <a:ln/>
+        </p:spPr>
+        <p:txBody>
+          <a:bodyPr wrap="none" lIns="0" tIns="0" rIns="0" bIns="0" rtlCol="0" anchor="ctr"/>
+          <a:lstStyle/>
+          <a:p>
+            <a:pPr algn="ctr" indent="0" marL="0">
+              <a:buNone/>
+            </a:pPr>
+            <a:r>
+              <a:rPr lang="ko-KR" altLang="en-US" sz="1200" spc="-30" kern="0" dirty="0">
+                <a:solidFill>
+                  <a:srgbClr val="DADEE3"/>
+                </a:solidFill>
+                <a:latin typeface="Paperlogy 5 Medium" pitchFamily="34" charset="0"/>
+                <a:ea typeface="Paperlogy 5 Medium" pitchFamily="34" charset="-127"/>
+                <a:cs typeface="Paperlogy 5 Medium" pitchFamily="34" charset="-120"/>
+              </a:rPr>
+              <a:t>Dynamo 기반 자동화 알고리즘 개발</a:t>
+            </a:r>
+            <a:endParaRPr lang="en-US" sz="1200" dirty="0"/>
+          </a:p>
+        </p:txBody>
+      </p:sp>
+      <p:sp>
+        <p:nvSpPr>
+          <p:cNvPr id="63" name="팀원 A"/>
+          <p:cNvSpPr txBox="1"/>
+          <p:nvPr/>
+        </p:nvSpPr>
+        <p:spPr>
+          <a:xfrm>
+            <a:off x="4854873" y="4068366"/>
+            <a:ext cx="458589" cy="177800"/>
+          </a:xfrm>
+          <a:prstGeom prst="rect">
+            <a:avLst/>
+          </a:prstGeom>
+          <a:noFill/>
+          <a:ln/>
+        </p:spPr>
+        <p:txBody>
+          <a:bodyPr wrap="none" lIns="0" tIns="0" rIns="0" bIns="0" rtlCol="0" anchor="ctr"/>
+          <a:lstStyle/>
+          <a:p>
+            <a:pPr algn="ctr" indent="0" marL="0">
+              <a:buNone/>
+            </a:pPr>
+            <a:r>
+              <a:rPr lang="ko-KR" altLang="en-US" sz="1200" spc="-24" kern="0" dirty="0">
+                <a:solidFill>
+                  <a:srgbClr val="0B2147"/>
+                </a:solidFill>
+                <a:latin typeface="Paperlogy 8 ExtraBold" pitchFamily="34" charset="0"/>
+                <a:ea typeface="Paperlogy 8 ExtraBold" pitchFamily="34" charset="-127"/>
+                <a:cs typeface="Paperlogy 8 ExtraBold" pitchFamily="34" charset="-120"/>
+              </a:rPr>
+              <a:t>팀원 A</a:t>
+            </a:r>
+            <a:endParaRPr lang="en-US" sz="1200" dirty="0"/>
+          </a:p>
+        </p:txBody>
+      </p:sp>
+      <p:sp>
+        <p:nvSpPr>
+          <p:cNvPr id="64" name="유닛 모듈러 설계 ·"/>
+          <p:cNvSpPr txBox="1"/>
+          <p:nvPr/>
+        </p:nvSpPr>
+        <p:spPr>
+          <a:xfrm>
+            <a:off x="4455394" y="4298156"/>
+            <a:ext cx="1105146" cy="177800"/>
+          </a:xfrm>
+          <a:prstGeom prst="rect">
+            <a:avLst/>
+          </a:prstGeom>
+          <a:noFill/>
+          <a:ln/>
+        </p:spPr>
+        <p:txBody>
+          <a:bodyPr wrap="none" lIns="0" tIns="0" rIns="0" bIns="0" rtlCol="0" anchor="ctr"/>
+          <a:lstStyle/>
+          <a:p>
+            <a:pPr algn="ctr" indent="0" marL="0">
+              <a:buNone/>
+            </a:pPr>
+            <a:r>
+              <a:rPr lang="ko-KR" altLang="en-US" sz="1200" spc="-30" kern="0" dirty="0">
+                <a:solidFill>
+                  <a:srgbClr val="4B5568"/>
+                </a:solidFill>
+                <a:latin typeface="Paperlogy 5 Medium" pitchFamily="34" charset="0"/>
+                <a:ea typeface="Paperlogy 5 Medium" pitchFamily="34" charset="-127"/>
+                <a:cs typeface="Paperlogy 5 Medium" pitchFamily="34" charset="-120"/>
+              </a:rPr>
+              <a:t>유닛 모듈러 설계 ·</a:t>
+            </a:r>
+            <a:endParaRPr lang="en-US" sz="1200" dirty="0"/>
+          </a:p>
+        </p:txBody>
+      </p:sp>
+      <p:sp>
+        <p:nvSpPr>
+          <p:cNvPr id="65" name="배치계획"/>
+          <p:cNvSpPr txBox="1"/>
+          <p:nvPr/>
+        </p:nvSpPr>
+        <p:spPr>
+          <a:xfrm>
+            <a:off x="4721920" y="4503837"/>
+            <a:ext cx="572095" cy="177800"/>
+          </a:xfrm>
+          <a:prstGeom prst="rect">
+            <a:avLst/>
+          </a:prstGeom>
+          <a:noFill/>
+          <a:ln/>
+        </p:spPr>
+        <p:txBody>
+          <a:bodyPr wrap="none" lIns="0" tIns="0" rIns="0" bIns="0" rtlCol="0" anchor="ctr"/>
+          <a:lstStyle/>
+          <a:p>
+            <a:pPr algn="ctr" indent="0" marL="0">
+              <a:buNone/>
+            </a:pPr>
+            <a:r>
+              <a:rPr lang="ko-KR" altLang="en-US" sz="1200" spc="-30" kern="0" dirty="0">
+                <a:solidFill>
+                  <a:srgbClr val="4B5568"/>
+                </a:solidFill>
+                <a:latin typeface="Paperlogy 5 Medium" pitchFamily="34" charset="0"/>
+                <a:ea typeface="Paperlogy 5 Medium" pitchFamily="34" charset="-127"/>
+                <a:cs typeface="Paperlogy 5 Medium" pitchFamily="34" charset="-120"/>
+              </a:rPr>
+              <a:t>배치계획</a:t>
+            </a:r>
+            <a:endParaRPr lang="en-US" sz="1200" dirty="0"/>
+          </a:p>
+        </p:txBody>
+      </p:sp>
+      <p:sp>
+        <p:nvSpPr>
+          <p:cNvPr id="66" name="팀원 B"/>
+          <p:cNvSpPr txBox="1"/>
+          <p:nvPr/>
+        </p:nvSpPr>
+        <p:spPr>
+          <a:xfrm>
+            <a:off x="6196905" y="4068366"/>
+            <a:ext cx="458391" cy="177800"/>
+          </a:xfrm>
+          <a:prstGeom prst="rect">
+            <a:avLst/>
+          </a:prstGeom>
+          <a:noFill/>
+          <a:ln/>
+        </p:spPr>
+        <p:txBody>
+          <a:bodyPr wrap="none" lIns="0" tIns="0" rIns="0" bIns="0" rtlCol="0" anchor="ctr"/>
+          <a:lstStyle/>
+          <a:p>
+            <a:pPr algn="ctr" indent="0" marL="0">
+              <a:buNone/>
+            </a:pPr>
+            <a:r>
+              <a:rPr lang="ko-KR" altLang="en-US" sz="1200" spc="-24" kern="0" dirty="0">
+                <a:solidFill>
+                  <a:srgbClr val="0B2147"/>
+                </a:solidFill>
+                <a:latin typeface="Paperlogy 8 ExtraBold" pitchFamily="34" charset="0"/>
+                <a:ea typeface="Paperlogy 8 ExtraBold" pitchFamily="34" charset="-127"/>
+                <a:cs typeface="Paperlogy 8 ExtraBold" pitchFamily="34" charset="-120"/>
+              </a:rPr>
+              <a:t>팀원 B</a:t>
+            </a:r>
+            <a:endParaRPr lang="en-US" sz="1200" dirty="0"/>
+          </a:p>
+        </p:txBody>
+      </p:sp>
+      <p:sp>
+        <p:nvSpPr>
+          <p:cNvPr id="67" name="Revit 기반"/>
+          <p:cNvSpPr txBox="1"/>
+          <p:nvPr/>
+        </p:nvSpPr>
+        <p:spPr>
+          <a:xfrm>
+            <a:off x="5992912" y="4298156"/>
+            <a:ext cx="713978" cy="177800"/>
+          </a:xfrm>
+          <a:prstGeom prst="rect">
+            <a:avLst/>
+          </a:prstGeom>
+          <a:noFill/>
+          <a:ln/>
+        </p:spPr>
+        <p:txBody>
+          <a:bodyPr wrap="none" lIns="0" tIns="0" rIns="0" bIns="0" rtlCol="0" anchor="ctr"/>
+          <a:lstStyle/>
+          <a:p>
+            <a:pPr algn="ctr" indent="0" marL="0">
+              <a:buNone/>
+            </a:pPr>
+            <a:r>
+              <a:rPr lang="ko-KR" altLang="en-US" sz="1200" spc="-30" kern="0" dirty="0">
+                <a:solidFill>
+                  <a:srgbClr val="4B5568"/>
+                </a:solidFill>
+                <a:latin typeface="Paperlogy 5 Medium" pitchFamily="34" charset="0"/>
+                <a:ea typeface="Paperlogy 5 Medium" pitchFamily="34" charset="-127"/>
+                <a:cs typeface="Paperlogy 5 Medium" pitchFamily="34" charset="-120"/>
+              </a:rPr>
+              <a:t>Revit 기반</a:t>
+            </a:r>
+            <a:endParaRPr lang="en-US" sz="1200" dirty="0"/>
+          </a:p>
+        </p:txBody>
+      </p:sp>
+      <p:sp>
+        <p:nvSpPr>
+          <p:cNvPr id="68" name="BIM 모델링 ·"/>
+          <p:cNvSpPr txBox="1"/>
+          <p:nvPr/>
+        </p:nvSpPr>
+        <p:spPr>
+          <a:xfrm>
+            <a:off x="5930404" y="4503837"/>
+            <a:ext cx="838994" cy="177800"/>
+          </a:xfrm>
+          <a:prstGeom prst="rect">
+            <a:avLst/>
+          </a:prstGeom>
+          <a:noFill/>
+          <a:ln/>
+        </p:spPr>
+        <p:txBody>
+          <a:bodyPr wrap="none" lIns="0" tIns="0" rIns="0" bIns="0" rtlCol="0" anchor="ctr"/>
+          <a:lstStyle/>
+          <a:p>
+            <a:pPr algn="ctr" indent="0" marL="0">
+              <a:buNone/>
+            </a:pPr>
+            <a:r>
+              <a:rPr lang="ko-KR" altLang="en-US" sz="1200" spc="-30" kern="0" dirty="0">
+                <a:solidFill>
+                  <a:srgbClr val="4B5568"/>
+                </a:solidFill>
+                <a:latin typeface="Paperlogy 5 Medium" pitchFamily="34" charset="0"/>
+                <a:ea typeface="Paperlogy 5 Medium" pitchFamily="34" charset="-127"/>
+                <a:cs typeface="Paperlogy 5 Medium" pitchFamily="34" charset="-120"/>
+              </a:rPr>
+              <a:t>BIM 모델링 ·</a:t>
+            </a:r>
+            <a:endParaRPr lang="en-US" sz="1200" dirty="0"/>
+          </a:p>
+        </p:txBody>
+      </p:sp>
+      <p:sp>
+        <p:nvSpPr>
+          <p:cNvPr id="69" name="데이터 구축"/>
+          <p:cNvSpPr txBox="1"/>
+          <p:nvPr/>
+        </p:nvSpPr>
+        <p:spPr>
+          <a:xfrm>
+            <a:off x="5983883" y="4709517"/>
+            <a:ext cx="732036" cy="177800"/>
+          </a:xfrm>
+          <a:prstGeom prst="rect">
+            <a:avLst/>
+          </a:prstGeom>
+          <a:noFill/>
+          <a:ln/>
+        </p:spPr>
+        <p:txBody>
+          <a:bodyPr wrap="none" lIns="0" tIns="0" rIns="0" bIns="0" rtlCol="0" anchor="ctr"/>
+          <a:lstStyle/>
+          <a:p>
+            <a:pPr algn="ctr" indent="0" marL="0">
+              <a:buNone/>
+            </a:pPr>
+            <a:r>
+              <a:rPr lang="ko-KR" altLang="en-US" sz="1200" spc="-30" kern="0" dirty="0">
+                <a:solidFill>
+                  <a:srgbClr val="4B5568"/>
+                </a:solidFill>
+                <a:latin typeface="Paperlogy 5 Medium" pitchFamily="34" charset="0"/>
+                <a:ea typeface="Paperlogy 5 Medium" pitchFamily="34" charset="-127"/>
+                <a:cs typeface="Paperlogy 5 Medium" pitchFamily="34" charset="-120"/>
+              </a:rPr>
+              <a:t>데이터 구축</a:t>
+            </a:r>
+            <a:endParaRPr lang="en-US" sz="1200" dirty="0"/>
+          </a:p>
+        </p:txBody>
+      </p:sp>
+      <p:sp>
+        <p:nvSpPr>
+          <p:cNvPr id="70" name="팀원 C"/>
+          <p:cNvSpPr txBox="1"/>
+          <p:nvPr/>
+        </p:nvSpPr>
+        <p:spPr>
+          <a:xfrm>
+            <a:off x="7541419" y="4068366"/>
+            <a:ext cx="453231" cy="177800"/>
+          </a:xfrm>
+          <a:prstGeom prst="rect">
+            <a:avLst/>
+          </a:prstGeom>
+          <a:noFill/>
+          <a:ln/>
+        </p:spPr>
+        <p:txBody>
+          <a:bodyPr wrap="none" lIns="0" tIns="0" rIns="0" bIns="0" rtlCol="0" anchor="ctr"/>
+          <a:lstStyle/>
+          <a:p>
+            <a:pPr algn="ctr" indent="0" marL="0">
+              <a:buNone/>
+            </a:pPr>
+            <a:r>
+              <a:rPr lang="ko-KR" altLang="en-US" sz="1200" spc="-24" kern="0" dirty="0">
+                <a:solidFill>
+                  <a:srgbClr val="0B2147"/>
+                </a:solidFill>
+                <a:latin typeface="Paperlogy 8 ExtraBold" pitchFamily="34" charset="0"/>
+                <a:ea typeface="Paperlogy 8 ExtraBold" pitchFamily="34" charset="-127"/>
+                <a:cs typeface="Paperlogy 8 ExtraBold" pitchFamily="34" charset="-120"/>
+              </a:rPr>
+              <a:t>팀원 C</a:t>
+            </a:r>
+            <a:endParaRPr lang="en-US" sz="1200" dirty="0"/>
+          </a:p>
+        </p:txBody>
+      </p:sp>
+      <p:sp>
+        <p:nvSpPr>
+          <p:cNvPr id="71" name="리모델링 적용"/>
+          <p:cNvSpPr txBox="1"/>
+          <p:nvPr/>
+        </p:nvSpPr>
+        <p:spPr>
+          <a:xfrm>
+            <a:off x="7260630" y="4298156"/>
+            <a:ext cx="862409" cy="177800"/>
+          </a:xfrm>
+          <a:prstGeom prst="rect">
+            <a:avLst/>
+          </a:prstGeom>
+          <a:noFill/>
+          <a:ln/>
+        </p:spPr>
+        <p:txBody>
+          <a:bodyPr wrap="none" lIns="0" tIns="0" rIns="0" bIns="0" rtlCol="0" anchor="ctr"/>
+          <a:lstStyle/>
+          <a:p>
+            <a:pPr algn="ctr" indent="0" marL="0">
+              <a:buNone/>
+            </a:pPr>
+            <a:r>
+              <a:rPr lang="ko-KR" altLang="en-US" sz="1200" spc="-30" kern="0" dirty="0">
+                <a:solidFill>
+                  <a:srgbClr val="4B5568"/>
+                </a:solidFill>
+                <a:latin typeface="Paperlogy 5 Medium" pitchFamily="34" charset="0"/>
+                <a:ea typeface="Paperlogy 5 Medium" pitchFamily="34" charset="-127"/>
+                <a:cs typeface="Paperlogy 5 Medium" pitchFamily="34" charset="-120"/>
+              </a:rPr>
+              <a:t>리모델링 적용</a:t>
+            </a:r>
+            <a:endParaRPr lang="en-US" sz="1200" dirty="0"/>
+          </a:p>
+        </p:txBody>
+      </p:sp>
+      <p:sp>
+        <p:nvSpPr>
+          <p:cNvPr id="72" name="시나리오 구성 ·"/>
+          <p:cNvSpPr txBox="1"/>
+          <p:nvPr/>
+        </p:nvSpPr>
+        <p:spPr>
+          <a:xfrm>
+            <a:off x="7224132" y="4503837"/>
+            <a:ext cx="935504" cy="177800"/>
+          </a:xfrm>
+          <a:prstGeom prst="rect">
+            <a:avLst/>
+          </a:prstGeom>
+          <a:noFill/>
+          <a:ln/>
+        </p:spPr>
+        <p:txBody>
+          <a:bodyPr wrap="none" lIns="0" tIns="0" rIns="0" bIns="0" rtlCol="0" anchor="ctr"/>
+          <a:lstStyle/>
+          <a:p>
+            <a:pPr algn="ctr" indent="0" marL="0">
+              <a:buNone/>
+            </a:pPr>
+            <a:r>
+              <a:rPr lang="ko-KR" altLang="en-US" sz="1200" spc="-30" kern="0" dirty="0">
+                <a:solidFill>
+                  <a:srgbClr val="4B5568"/>
+                </a:solidFill>
+                <a:latin typeface="Paperlogy 5 Medium" pitchFamily="34" charset="0"/>
+                <a:ea typeface="Paperlogy 5 Medium" pitchFamily="34" charset="-127"/>
+                <a:cs typeface="Paperlogy 5 Medium" pitchFamily="34" charset="-120"/>
+              </a:rPr>
+              <a:t>시나리오 구성 ·</a:t>
+            </a:r>
+            <a:endParaRPr lang="en-US" sz="1200" dirty="0"/>
+          </a:p>
+        </p:txBody>
+      </p:sp>
+      <p:sp>
+        <p:nvSpPr>
+          <p:cNvPr id="73" name="시연 영상 제작"/>
+          <p:cNvSpPr txBox="1"/>
+          <p:nvPr/>
+        </p:nvSpPr>
+        <p:spPr>
+          <a:xfrm>
+            <a:off x="7245846" y="4709517"/>
+            <a:ext cx="892076" cy="177800"/>
+          </a:xfrm>
+          <a:prstGeom prst="rect">
+            <a:avLst/>
+          </a:prstGeom>
+          <a:noFill/>
+          <a:ln/>
+        </p:spPr>
+        <p:txBody>
+          <a:bodyPr wrap="none" lIns="0" tIns="0" rIns="0" bIns="0" rtlCol="0" anchor="ctr"/>
+          <a:lstStyle/>
+          <a:p>
+            <a:pPr algn="ctr" indent="0" marL="0">
+              <a:buNone/>
+            </a:pPr>
+            <a:r>
+              <a:rPr lang="ko-KR" altLang="en-US" sz="1200" spc="-30" kern="0" dirty="0">
+                <a:solidFill>
+                  <a:srgbClr val="4B5568"/>
+                </a:solidFill>
+                <a:latin typeface="Paperlogy 5 Medium" pitchFamily="34" charset="0"/>
+                <a:ea typeface="Paperlogy 5 Medium" pitchFamily="34" charset="-127"/>
+                <a:cs typeface="Paperlogy 5 Medium" pitchFamily="34" charset="-120"/>
+              </a:rPr>
+              <a:t>시연 영상 제작</a:t>
+            </a:r>
+            <a:endParaRPr lang="en-US" sz="1200" dirty="0"/>
+          </a:p>
+        </p:txBody>
+      </p:sp>
+      <p:sp>
+        <p:nvSpPr>
+          <p:cNvPr id="74" name="이틀마다 진행상황 공유 · 피드백"/>
+          <p:cNvSpPr txBox="1"/>
+          <p:nvPr/>
+        </p:nvSpPr>
+        <p:spPr>
+          <a:xfrm>
+            <a:off x="5528370" y="5304234"/>
+            <a:ext cx="1984173" cy="177800"/>
+          </a:xfrm>
+          <a:prstGeom prst="rect">
+            <a:avLst/>
+          </a:prstGeom>
+          <a:noFill/>
+          <a:ln/>
+        </p:spPr>
+        <p:txBody>
+          <a:bodyPr wrap="none" lIns="0" tIns="0" rIns="0" bIns="0" rtlCol="0" anchor="ctr"/>
+          <a:lstStyle/>
+          <a:p>
+            <a:pPr algn="l" indent="0" marL="0">
+              <a:buNone/>
+            </a:pPr>
+            <a:r>
+              <a:rPr lang="ko-KR" altLang="en-US" sz="1200" spc="-24" kern="0" dirty="0">
+                <a:solidFill>
+                  <a:srgbClr val="0B2147"/>
                 </a:solidFill>
                 <a:latin typeface="Paperlogy 7 Bold" pitchFamily="34" charset="0"/>
                 <a:ea typeface="Paperlogy 7 Bold" pitchFamily="34" charset="-127"/>
                 <a:cs typeface="Paperlogy 7 Bold" pitchFamily="34" charset="-120"/>
               </a:rPr>
-              <a:t>4인 팀 · 팀장</a:t>
+              <a:t>이틀마다 진행상황 공유 · 피드백</a:t>
+            </a:r>
+            <a:endParaRPr lang="en-US" sz="1200" dirty="0"/>
+          </a:p>
+        </p:txBody>
+      </p:sp>
+      <p:sp>
+        <p:nvSpPr>
+          <p:cNvPr id="75" name="리모델링 앱 개발 아이디어 시연 영상"/>
+          <p:cNvSpPr txBox="1"/>
+          <p:nvPr/>
+        </p:nvSpPr>
+        <p:spPr>
+          <a:xfrm>
+            <a:off x="9239200" y="3497064"/>
+            <a:ext cx="1871323" cy="152400"/>
+          </a:xfrm>
+          <a:prstGeom prst="rect">
+            <a:avLst/>
+          </a:prstGeom>
+          <a:noFill/>
+          <a:ln/>
+        </p:spPr>
+        <p:txBody>
+          <a:bodyPr wrap="none" lIns="0" tIns="0" rIns="0" bIns="0" rtlCol="0" anchor="ctr"/>
+          <a:lstStyle/>
+          <a:p>
+            <a:pPr algn="l" indent="0" marL="0">
+              <a:buNone/>
+            </a:pPr>
+            <a:r>
+              <a:rPr lang="ko-KR" altLang="en-US" sz="1000" spc="-20" kern="0" dirty="0">
+                <a:solidFill>
+                  <a:srgbClr val="4B5568"/>
+                </a:solidFill>
+                <a:latin typeface="Paperlogy 6 SemiBold" pitchFamily="34" charset="0"/>
+                <a:ea typeface="Paperlogy 6 SemiBold" pitchFamily="34" charset="-127"/>
+                <a:cs typeface="Paperlogy 6 SemiBold" pitchFamily="34" charset="-120"/>
+              </a:rPr>
+              <a:t>리모델링 앱 개발 아이디어 시연 영상</a:t>
+            </a:r>
+            <a:endParaRPr lang="en-US" sz="1000" dirty="0"/>
+          </a:p>
+        </p:txBody>
+      </p:sp>
+      <p:sp>
+        <p:nvSpPr>
+          <p:cNvPr id="76" name="장려상"/>
+          <p:cNvSpPr txBox="1"/>
+          <p:nvPr/>
+        </p:nvSpPr>
+        <p:spPr>
+          <a:xfrm>
+            <a:off x="9749433" y="4500364"/>
+            <a:ext cx="795734" cy="342900"/>
+          </a:xfrm>
+          <a:prstGeom prst="rect">
+            <a:avLst/>
+          </a:prstGeom>
+          <a:noFill/>
+          <a:ln/>
+        </p:spPr>
+        <p:txBody>
+          <a:bodyPr wrap="none" lIns="0" tIns="0" rIns="0" bIns="0" rtlCol="0" anchor="ctr"/>
+          <a:lstStyle/>
+          <a:p>
+            <a:pPr algn="l" indent="0" marL="0">
+              <a:buNone/>
+            </a:pPr>
+            <a:r>
+              <a:rPr lang="ko-KR" altLang="en-US" sz="2300" spc="-69" kern="0" dirty="0">
+                <a:solidFill>
+                  <a:srgbClr val="0B2147"/>
+                </a:solidFill>
+                <a:latin typeface="Paperlogy 9 Black" pitchFamily="34" charset="0"/>
+                <a:ea typeface="Paperlogy 9 Black" pitchFamily="34" charset="-127"/>
+                <a:cs typeface="Paperlogy 9 Black" pitchFamily="34" charset="-120"/>
+              </a:rPr>
+              <a:t>장려상</a:t>
+            </a:r>
+            <a:endParaRPr lang="en-US" sz="2300" dirty="0"/>
+          </a:p>
+        </p:txBody>
+      </p:sp>
+      <p:sp>
+        <p:nvSpPr>
+          <p:cNvPr id="77" name="학생 BIM 경진대회 장려상 · 남은 3주 내 완성"/>
+          <p:cNvSpPr txBox="1"/>
+          <p:nvPr/>
+        </p:nvSpPr>
+        <p:spPr>
+          <a:xfrm>
+            <a:off x="9014619" y="5376664"/>
+            <a:ext cx="2347436" cy="152400"/>
+          </a:xfrm>
+          <a:prstGeom prst="rect">
+            <a:avLst/>
+          </a:prstGeom>
+          <a:noFill/>
+          <a:ln/>
+        </p:spPr>
+        <p:txBody>
+          <a:bodyPr wrap="none" lIns="0" tIns="0" rIns="0" bIns="0" rtlCol="0" anchor="ctr"/>
+          <a:lstStyle/>
+          <a:p>
+            <a:pPr algn="l" indent="0" marL="0">
+              <a:buNone/>
+            </a:pPr>
+            <a:r>
+              <a:rPr lang="ko-KR" altLang="en-US" sz="1000" spc="-20" kern="0" dirty="0">
+                <a:solidFill>
+                  <a:srgbClr val="0B2147"/>
+                </a:solidFill>
+                <a:latin typeface="Paperlogy 7 Bold" pitchFamily="34" charset="0"/>
+                <a:ea typeface="Paperlogy 7 Bold" pitchFamily="34" charset="-127"/>
+                <a:cs typeface="Paperlogy 7 Bold" pitchFamily="34" charset="-120"/>
+              </a:rPr>
+              <a:t>학생 BIM 경진대회 장려상 · 남은 3주 내 완성</a:t>
+            </a:r>
+            <a:endParaRPr lang="en-US" sz="1000" dirty="0"/>
+          </a:p>
+        </p:txBody>
+      </p:sp>
+      <p:sp>
+        <p:nvSpPr>
+          <p:cNvPr id="78" name="KEY MESSAGE"/>
+          <p:cNvSpPr txBox="1"/>
+          <p:nvPr/>
+        </p:nvSpPr>
+        <p:spPr>
+          <a:xfrm>
+            <a:off x="1308100" y="6007298"/>
+            <a:ext cx="1171825" cy="146050"/>
+          </a:xfrm>
+          <a:prstGeom prst="rect">
+            <a:avLst/>
+          </a:prstGeom>
+          <a:noFill/>
+          <a:ln/>
+        </p:spPr>
+        <p:txBody>
+          <a:bodyPr wrap="none" lIns="0" tIns="0" rIns="0" bIns="0" rtlCol="0" anchor="ctr"/>
+          <a:lstStyle/>
+          <a:p>
+            <a:pPr algn="l" indent="0" marL="0">
+              <a:buNone/>
+            </a:pPr>
+            <a:r>
+              <a:rPr lang="ko-KR" altLang="en-US" sz="950" spc="152" kern="0" dirty="0">
+                <a:solidFill>
+                  <a:srgbClr val="8FD3F5"/>
+                </a:solidFill>
+                <a:latin typeface="Paperlogy 7 Bold" pitchFamily="34" charset="0"/>
+                <a:ea typeface="Paperlogy 7 Bold" pitchFamily="34" charset="-127"/>
+                <a:cs typeface="Paperlogy 7 Bold" pitchFamily="34" charset="-120"/>
+              </a:rPr>
+              <a:t>KEY MESSAGE</a:t>
             </a:r>
             <a:endParaRPr lang="en-US" sz="950" dirty="0"/>
           </a:p>
@@ -2864,194 +3480,105 @@
       </p:sp>
       <p:sp>
         <p:nvSpPr>
-          <p:cNvPr id="75" name="‘유닛 모듈러 기반 사용자 맞춤형 리모델링 방법’"/>
-          <p:cNvSpPr txBox="1"/>
-          <p:nvPr/>
-        </p:nvSpPr>
-        <p:spPr>
-          <a:xfrm>
-            <a:off x="825500" y="2462709"/>
-            <a:ext cx="4759448" cy="298450"/>
-          </a:xfrm>
-          <a:prstGeom prst="rect">
-            <a:avLst/>
-          </a:prstGeom>
-          <a:noFill/>
-          <a:ln/>
-        </p:spPr>
-        <p:txBody>
-          <a:bodyPr wrap="none" lIns="0" tIns="0" rIns="0" bIns="0" rtlCol="0" anchor="ctr"/>
-          <a:lstStyle/>
-          <a:p>
-            <a:pPr algn="l" indent="0" marL="0">
-              <a:buNone/>
-            </a:pPr>
-            <a:r>
-              <a:rPr lang="ko-KR" altLang="en-US" sz="2000" spc="-70" kern="0" dirty="0">
-                <a:solidFill>
-                  <a:srgbClr val="0B2147"/>
-                </a:solidFill>
-                <a:latin typeface="Paperlogy 8 ExtraBold" pitchFamily="34" charset="0"/>
-                <a:ea typeface="Paperlogy 8 ExtraBold" pitchFamily="34" charset="-127"/>
-                <a:cs typeface="Paperlogy 8 ExtraBold" pitchFamily="34" charset="-120"/>
-              </a:rPr>
-              <a:t>‘유닛 모듈러 기반 사용자 맞춤형 리모델링 방법’</a:t>
-            </a:r>
-            <a:endParaRPr lang="en-US" sz="2000" dirty="0"/>
-          </a:p>
-        </p:txBody>
-      </p:sp>
-      <p:sp>
-        <p:nvSpPr>
-          <p:cNvPr id="76" name="사용자가 원하는 리모델링 규모에 따라 유닛 모듈러를 배치하고,"/>
-          <p:cNvSpPr txBox="1"/>
-          <p:nvPr/>
-        </p:nvSpPr>
-        <p:spPr>
-          <a:xfrm>
-            <a:off x="825500" y="2850059"/>
-            <a:ext cx="3552706" cy="165100"/>
-          </a:xfrm>
-          <a:prstGeom prst="rect">
-            <a:avLst/>
-          </a:prstGeom>
-          <a:noFill/>
-          <a:ln/>
-        </p:spPr>
-        <p:txBody>
-          <a:bodyPr wrap="none" lIns="0" tIns="0" rIns="0" bIns="0" rtlCol="0" anchor="ctr"/>
-          <a:lstStyle/>
-          <a:p>
-            <a:pPr algn="l" indent="0" marL="0">
-              <a:buNone/>
-            </a:pPr>
-            <a:r>
-              <a:rPr lang="ko-KR" altLang="en-US" sz="1100" spc="-22" kern="0" dirty="0">
-                <a:solidFill>
-                  <a:srgbClr val="4B5568"/>
+          <p:cNvPr id="79" name="서로 다른 사람을 하나의 공동 목표로 연결합니다"/>
+          <p:cNvSpPr txBox="1"/>
+          <p:nvPr/>
+        </p:nvSpPr>
+        <p:spPr>
+          <a:xfrm>
+            <a:off x="2591395" y="5954514"/>
+            <a:ext cx="4151660" cy="254000"/>
+          </a:xfrm>
+          <a:prstGeom prst="rect">
+            <a:avLst/>
+          </a:prstGeom>
+          <a:noFill/>
+          <a:ln/>
+        </p:spPr>
+        <p:txBody>
+          <a:bodyPr wrap="none" lIns="0" tIns="0" rIns="0" bIns="0" rtlCol="0" anchor="ctr"/>
+          <a:lstStyle/>
+          <a:p>
+            <a:pPr algn="l" indent="0" marL="0">
+              <a:buNone/>
+            </a:pPr>
+            <a:r>
+              <a:rPr lang="ko-KR" altLang="en-US" sz="1700" spc="-51" kern="0" dirty="0">
+                <a:solidFill>
+                  <a:srgbClr val="FFFFFF"/>
+                </a:solidFill>
+                <a:latin typeface="Paperlogy 7 Bold" pitchFamily="34" charset="0"/>
+                <a:ea typeface="Paperlogy 7 Bold" pitchFamily="34" charset="-127"/>
+                <a:cs typeface="Paperlogy 7 Bold" pitchFamily="34" charset="-120"/>
+              </a:rPr>
+              <a:t>서로 다른 사람을 </a:t>
+            </a:r>
+            <a:pPr algn="l" indent="0" marL="0">
+              <a:buNone/>
+            </a:pPr>
+            <a:r>
+              <a:rPr lang="ko-KR" altLang="en-US" sz="1700" spc="-51" kern="0" dirty="0">
+                <a:solidFill>
+                  <a:srgbClr val="FDBB30"/>
+                </a:solidFill>
+                <a:latin typeface="Paperlogy 7 Bold" pitchFamily="34" charset="0"/>
+                <a:ea typeface="Paperlogy 7 Bold" pitchFamily="34" charset="-127"/>
+                <a:cs typeface="Paperlogy 7 Bold" pitchFamily="34" charset="-120"/>
+              </a:rPr>
+              <a:t>하나의 공동 목표</a:t>
+            </a:r>
+            <a:pPr algn="l" indent="0" marL="0">
+              <a:buNone/>
+            </a:pPr>
+            <a:r>
+              <a:rPr lang="ko-KR" altLang="en-US" sz="1700" spc="-51" kern="0" dirty="0">
+                <a:solidFill>
+                  <a:srgbClr val="FFFFFF"/>
+                </a:solidFill>
+                <a:latin typeface="Paperlogy 7 Bold" pitchFamily="34" charset="0"/>
+                <a:ea typeface="Paperlogy 7 Bold" pitchFamily="34" charset="-127"/>
+                <a:cs typeface="Paperlogy 7 Bold" pitchFamily="34" charset="-120"/>
+              </a:rPr>
+              <a:t>로 연결합니다</a:t>
+            </a:r>
+            <a:endParaRPr lang="en-US" sz="1700" dirty="0"/>
+          </a:p>
+        </p:txBody>
+      </p:sp>
+      <p:sp>
+        <p:nvSpPr>
+          <p:cNvPr id="80" name="2026년 하반기 신입사원 공개채용"/>
+          <p:cNvSpPr txBox="1"/>
+          <p:nvPr/>
+        </p:nvSpPr>
+        <p:spPr>
+          <a:xfrm>
+            <a:off x="609600" y="6425605"/>
+            <a:ext cx="1659507" cy="139700"/>
+          </a:xfrm>
+          <a:prstGeom prst="rect">
+            <a:avLst/>
+          </a:prstGeom>
+          <a:noFill/>
+          <a:ln/>
+        </p:spPr>
+        <p:txBody>
+          <a:bodyPr wrap="none" lIns="0" tIns="0" rIns="0" bIns="0" rtlCol="0" anchor="ctr"/>
+          <a:lstStyle/>
+          <a:p>
+            <a:pPr algn="l" indent="0" marL="0">
+              <a:buNone/>
+            </a:pPr>
+            <a:r>
+              <a:rPr lang="ko-KR" altLang="en-US" sz="900" spc="-9" kern="0" dirty="0">
+                <a:solidFill>
+                  <a:srgbClr val="8691A5"/>
                 </a:solidFill>
                 <a:latin typeface="Paperlogy 5 Medium" pitchFamily="34" charset="0"/>
                 <a:ea typeface="Paperlogy 5 Medium" pitchFamily="34" charset="-127"/>
                 <a:cs typeface="Paperlogy 5 Medium" pitchFamily="34" charset="-120"/>
               </a:rPr>
-              <a:t>사용자가 원하는 리모델링 규모에 따라 유닛 모듈러를 배치하고,</a:t>
-            </a:r>
-            <a:endParaRPr lang="en-US" sz="1100" dirty="0"/>
-          </a:p>
-        </p:txBody>
-      </p:sp>
-      <p:sp>
-        <p:nvSpPr>
-          <p:cNvPr id="77" name="필요한 모듈 수와 자재 물량을 자동으로 산출하는 BIM 기반 리모델링 방"/>
-          <p:cNvSpPr txBox="1"/>
-          <p:nvPr/>
-        </p:nvSpPr>
-        <p:spPr>
-          <a:xfrm>
-            <a:off x="825500" y="3052564"/>
-            <a:ext cx="4436781" cy="165100"/>
-          </a:xfrm>
-          <a:prstGeom prst="rect">
-            <a:avLst/>
-          </a:prstGeom>
-          <a:noFill/>
-          <a:ln/>
-        </p:spPr>
-        <p:txBody>
-          <a:bodyPr wrap="none" lIns="0" tIns="0" rIns="0" bIns="0" rtlCol="0" anchor="ctr"/>
-          <a:lstStyle/>
-          <a:p>
-            <a:pPr algn="l" indent="0" marL="0">
-              <a:buNone/>
-            </a:pPr>
-            <a:r>
-              <a:rPr lang="ko-KR" altLang="en-US" sz="1100" spc="-22" kern="0" dirty="0">
-                <a:solidFill>
-                  <a:srgbClr val="4B5568"/>
-                </a:solidFill>
-                <a:latin typeface="Paperlogy 5 Medium" pitchFamily="34" charset="0"/>
-                <a:ea typeface="Paperlogy 5 Medium" pitchFamily="34" charset="-127"/>
-                <a:cs typeface="Paperlogy 5 Medium" pitchFamily="34" charset="-120"/>
-              </a:rPr>
-              <a:t>필요한 모듈 수와 자재 물량을 자동으로 산출하는 BIM 기반 리모델링 방법 제안</a:t>
-            </a:r>
-            <a:endParaRPr lang="en-US" sz="1100" dirty="0"/>
-          </a:p>
-        </p:txBody>
-      </p:sp>
-      <p:sp>
-        <p:nvSpPr>
-          <p:cNvPr id="78" name="장려상"/>
-          <p:cNvSpPr txBox="1"/>
-          <p:nvPr/>
-        </p:nvSpPr>
-        <p:spPr>
-          <a:xfrm>
-            <a:off x="10058350" y="2449314"/>
-            <a:ext cx="698599" cy="298450"/>
-          </a:xfrm>
-          <a:prstGeom prst="rect">
-            <a:avLst/>
-          </a:prstGeom>
-          <a:noFill/>
-          <a:ln/>
-        </p:spPr>
-        <p:txBody>
-          <a:bodyPr wrap="none" lIns="0" tIns="0" rIns="0" bIns="0" rtlCol="0" anchor="ctr"/>
-          <a:lstStyle/>
-          <a:p>
-            <a:pPr algn="l" indent="0" marL="0">
-              <a:buNone/>
-            </a:pPr>
-            <a:r>
-              <a:rPr lang="ko-KR" altLang="en-US" sz="2000" spc="-60" kern="0" dirty="0">
-                <a:solidFill>
-                  <a:srgbClr val="0B2147"/>
-                </a:solidFill>
-                <a:latin typeface="Paperlogy 9 Black" pitchFamily="34" charset="0"/>
-                <a:ea typeface="Paperlogy 9 Black" pitchFamily="34" charset="-127"/>
-                <a:cs typeface="Paperlogy 9 Black" pitchFamily="34" charset="-120"/>
-              </a:rPr>
-              <a:t>장려상</a:t>
-            </a:r>
-            <a:endParaRPr lang="en-US" sz="2000" dirty="0"/>
-          </a:p>
-        </p:txBody>
-      </p:sp>
-      <p:sp>
-        <p:nvSpPr>
-          <p:cNvPr id="79" name="리모델링"/>
-          <p:cNvSpPr txBox="1"/>
-          <p:nvPr/>
-        </p:nvSpPr>
-        <p:spPr>
-          <a:xfrm>
-            <a:off x="6426398" y="2639814"/>
-            <a:ext cx="444004" cy="139700"/>
-          </a:xfrm>
-          <a:prstGeom prst="rect">
-            <a:avLst/>
-          </a:prstGeom>
-          <a:noFill/>
-          <a:ln/>
-        </p:spPr>
-        <p:txBody>
-          <a:bodyPr wrap="none" lIns="0" tIns="0" rIns="0" bIns="0" rtlCol="0" anchor="ctr"/>
-          <a:lstStyle/>
-          <a:p>
-            <a:pPr algn="ctr" indent="0" marL="0">
-              <a:buNone/>
-            </a:pPr>
-            <a:r>
-              <a:rPr lang="ko-KR" altLang="en-US" sz="900" spc="-18" kern="0" dirty="0">
-                <a:solidFill>
-                  <a:srgbClr val="FFFFFF"/>
-                </a:solidFill>
-                <a:latin typeface="Paperlogy 7 Bold" pitchFamily="34" charset="0"/>
-                <a:ea typeface="Paperlogy 7 Bold" pitchFamily="34" charset="-127"/>
-                <a:cs typeface="Paperlogy 7 Bold" pitchFamily="34" charset="-120"/>
-              </a:rPr>
-              <a:t>리모델링</a:t>
+              <a:t>2026년 하반기 신입사원 공개채용</a:t>
             </a:r>
             <a:endParaRPr lang="en-US" sz="900" dirty="0"/>
           </a:p>
@@ -3059,2077 +3586,7 @@
       </p:sp>
       <p:sp>
         <p:nvSpPr>
-          <p:cNvPr id="80" name="규모 입력"/>
-          <p:cNvSpPr txBox="1"/>
-          <p:nvPr/>
-        </p:nvSpPr>
-        <p:spPr>
-          <a:xfrm>
-            <a:off x="6414988" y="2771180"/>
-            <a:ext cx="466923" cy="139700"/>
-          </a:xfrm>
-          <a:prstGeom prst="rect">
-            <a:avLst/>
-          </a:prstGeom>
-          <a:noFill/>
-          <a:ln/>
-        </p:spPr>
-        <p:txBody>
-          <a:bodyPr wrap="none" lIns="0" tIns="0" rIns="0" bIns="0" rtlCol="0" anchor="ctr"/>
-          <a:lstStyle/>
-          <a:p>
-            <a:pPr algn="ctr" indent="0" marL="0">
-              <a:buNone/>
-            </a:pPr>
-            <a:r>
-              <a:rPr lang="ko-KR" altLang="en-US" sz="900" spc="-18" kern="0" dirty="0">
-                <a:solidFill>
-                  <a:srgbClr val="FFFFFF"/>
-                </a:solidFill>
-                <a:latin typeface="Paperlogy 7 Bold" pitchFamily="34" charset="0"/>
-                <a:ea typeface="Paperlogy 7 Bold" pitchFamily="34" charset="-127"/>
-                <a:cs typeface="Paperlogy 7 Bold" pitchFamily="34" charset="-120"/>
-              </a:rPr>
-              <a:t>규모 입력</a:t>
-            </a:r>
-            <a:endParaRPr lang="en-US" sz="900" dirty="0"/>
-          </a:p>
-        </p:txBody>
-      </p:sp>
-      <p:sp>
-        <p:nvSpPr>
-          <p:cNvPr id="81" name="유닛 모듈러"/>
-          <p:cNvSpPr txBox="1"/>
-          <p:nvPr/>
-        </p:nvSpPr>
-        <p:spPr>
-          <a:xfrm>
-            <a:off x="7064375" y="2639814"/>
-            <a:ext cx="565150" cy="139700"/>
-          </a:xfrm>
-          <a:prstGeom prst="rect">
-            <a:avLst/>
-          </a:prstGeom>
-          <a:noFill/>
-          <a:ln/>
-        </p:spPr>
-        <p:txBody>
-          <a:bodyPr wrap="none" lIns="0" tIns="0" rIns="0" bIns="0" rtlCol="0" anchor="ctr"/>
-          <a:lstStyle/>
-          <a:p>
-            <a:pPr algn="ctr" indent="0" marL="0">
-              <a:buNone/>
-            </a:pPr>
-            <a:r>
-              <a:rPr lang="ko-KR" altLang="en-US" sz="900" spc="-18" kern="0" dirty="0">
-                <a:solidFill>
-                  <a:srgbClr val="FFFFFF"/>
-                </a:solidFill>
-                <a:latin typeface="Paperlogy 7 Bold" pitchFamily="34" charset="0"/>
-                <a:ea typeface="Paperlogy 7 Bold" pitchFamily="34" charset="-127"/>
-                <a:cs typeface="Paperlogy 7 Bold" pitchFamily="34" charset="-120"/>
-              </a:rPr>
-              <a:t>유닛 모듈러</a:t>
-            </a:r>
-            <a:endParaRPr lang="en-US" sz="900" dirty="0"/>
-          </a:p>
-        </p:txBody>
-      </p:sp>
-      <p:sp>
-        <p:nvSpPr>
-          <p:cNvPr id="82" name="배치"/>
-          <p:cNvSpPr txBox="1"/>
-          <p:nvPr/>
-        </p:nvSpPr>
-        <p:spPr>
-          <a:xfrm>
-            <a:off x="7223224" y="2771180"/>
-            <a:ext cx="247452" cy="139700"/>
-          </a:xfrm>
-          <a:prstGeom prst="rect">
-            <a:avLst/>
-          </a:prstGeom>
-          <a:noFill/>
-          <a:ln/>
-        </p:spPr>
-        <p:txBody>
-          <a:bodyPr wrap="none" lIns="0" tIns="0" rIns="0" bIns="0" rtlCol="0" anchor="ctr"/>
-          <a:lstStyle/>
-          <a:p>
-            <a:pPr algn="ctr" indent="0" marL="0">
-              <a:buNone/>
-            </a:pPr>
-            <a:r>
-              <a:rPr lang="ko-KR" altLang="en-US" sz="900" spc="-18" kern="0" dirty="0">
-                <a:solidFill>
-                  <a:srgbClr val="FFFFFF"/>
-                </a:solidFill>
-                <a:latin typeface="Paperlogy 7 Bold" pitchFamily="34" charset="0"/>
-                <a:ea typeface="Paperlogy 7 Bold" pitchFamily="34" charset="-127"/>
-                <a:cs typeface="Paperlogy 7 Bold" pitchFamily="34" charset="-120"/>
-              </a:rPr>
-              <a:t>배치</a:t>
-            </a:r>
-            <a:endParaRPr lang="en-US" sz="900" dirty="0"/>
-          </a:p>
-        </p:txBody>
-      </p:sp>
-      <p:sp>
-        <p:nvSpPr>
-          <p:cNvPr id="83" name="모듈 수 ·"/>
-          <p:cNvSpPr txBox="1"/>
-          <p:nvPr/>
-        </p:nvSpPr>
-        <p:spPr>
-          <a:xfrm>
-            <a:off x="7826077" y="2639814"/>
-            <a:ext cx="426045" cy="139700"/>
-          </a:xfrm>
-          <a:prstGeom prst="rect">
-            <a:avLst/>
-          </a:prstGeom>
-          <a:noFill/>
-          <a:ln/>
-        </p:spPr>
-        <p:txBody>
-          <a:bodyPr wrap="none" lIns="0" tIns="0" rIns="0" bIns="0" rtlCol="0" anchor="ctr"/>
-          <a:lstStyle/>
-          <a:p>
-            <a:pPr algn="ctr" indent="0" marL="0">
-              <a:buNone/>
-            </a:pPr>
-            <a:r>
-              <a:rPr lang="ko-KR" altLang="en-US" sz="900" spc="-18" kern="0" dirty="0">
-                <a:solidFill>
-                  <a:srgbClr val="45B9EC"/>
-                </a:solidFill>
-                <a:latin typeface="Paperlogy 7 Bold" pitchFamily="34" charset="0"/>
-                <a:ea typeface="Paperlogy 7 Bold" pitchFamily="34" charset="-127"/>
-                <a:cs typeface="Paperlogy 7 Bold" pitchFamily="34" charset="-120"/>
-              </a:rPr>
-              <a:t>모듈 수 ·</a:t>
-            </a:r>
-            <a:endParaRPr lang="en-US" sz="900" dirty="0"/>
-          </a:p>
-        </p:txBody>
-      </p:sp>
-      <p:sp>
-        <p:nvSpPr>
-          <p:cNvPr id="84" name="자재 물량"/>
-          <p:cNvSpPr txBox="1"/>
-          <p:nvPr/>
-        </p:nvSpPr>
-        <p:spPr>
-          <a:xfrm>
-            <a:off x="7805638" y="2771180"/>
-            <a:ext cx="466923" cy="139700"/>
-          </a:xfrm>
-          <a:prstGeom prst="rect">
-            <a:avLst/>
-          </a:prstGeom>
-          <a:noFill/>
-          <a:ln/>
-        </p:spPr>
-        <p:txBody>
-          <a:bodyPr wrap="none" lIns="0" tIns="0" rIns="0" bIns="0" rtlCol="0" anchor="ctr"/>
-          <a:lstStyle/>
-          <a:p>
-            <a:pPr algn="ctr" indent="0" marL="0">
-              <a:buNone/>
-            </a:pPr>
-            <a:r>
-              <a:rPr lang="ko-KR" altLang="en-US" sz="900" spc="-18" kern="0" dirty="0">
-                <a:solidFill>
-                  <a:srgbClr val="45B9EC"/>
-                </a:solidFill>
-                <a:latin typeface="Paperlogy 7 Bold" pitchFamily="34" charset="0"/>
-                <a:ea typeface="Paperlogy 7 Bold" pitchFamily="34" charset="-127"/>
-                <a:cs typeface="Paperlogy 7 Bold" pitchFamily="34" charset="-120"/>
-              </a:rPr>
-              <a:t>자재 물량</a:t>
-            </a:r>
-            <a:endParaRPr lang="en-US" sz="900" dirty="0"/>
-          </a:p>
-        </p:txBody>
-      </p:sp>
-      <p:sp>
-        <p:nvSpPr>
-          <p:cNvPr id="85" name="자동 산출"/>
-          <p:cNvSpPr txBox="1"/>
-          <p:nvPr/>
-        </p:nvSpPr>
-        <p:spPr>
-          <a:xfrm>
-            <a:off x="7805638" y="2902545"/>
-            <a:ext cx="466923" cy="139700"/>
-          </a:xfrm>
-          <a:prstGeom prst="rect">
-            <a:avLst/>
-          </a:prstGeom>
-          <a:noFill/>
-          <a:ln/>
-        </p:spPr>
-        <p:txBody>
-          <a:bodyPr wrap="none" lIns="0" tIns="0" rIns="0" bIns="0" rtlCol="0" anchor="ctr"/>
-          <a:lstStyle/>
-          <a:p>
-            <a:pPr algn="ctr" indent="0" marL="0">
-              <a:buNone/>
-            </a:pPr>
-            <a:r>
-              <a:rPr lang="ko-KR" altLang="en-US" sz="900" spc="-18" kern="0" dirty="0">
-                <a:solidFill>
-                  <a:srgbClr val="45B9EC"/>
-                </a:solidFill>
-                <a:latin typeface="Paperlogy 7 Bold" pitchFamily="34" charset="0"/>
-                <a:ea typeface="Paperlogy 7 Bold" pitchFamily="34" charset="-127"/>
-                <a:cs typeface="Paperlogy 7 Bold" pitchFamily="34" charset="-120"/>
-              </a:rPr>
-              <a:t>자동 산출</a:t>
-            </a:r>
-            <a:endParaRPr lang="en-US" sz="900" dirty="0"/>
-          </a:p>
-        </p:txBody>
-      </p:sp>
-      <p:sp>
-        <p:nvSpPr>
-          <p:cNvPr id="86" name="결과물 · 유닛 모듈러 기반 사용자 맞춤형"/>
-          <p:cNvSpPr txBox="1"/>
-          <p:nvPr/>
-        </p:nvSpPr>
-        <p:spPr>
-          <a:xfrm>
-            <a:off x="6273800" y="3154164"/>
-            <a:ext cx="2052955" cy="152400"/>
-          </a:xfrm>
-          <a:prstGeom prst="rect">
-            <a:avLst/>
-          </a:prstGeom>
-          <a:noFill/>
-          <a:ln/>
-        </p:spPr>
-        <p:txBody>
-          <a:bodyPr wrap="none" lIns="0" tIns="0" rIns="0" bIns="0" rtlCol="0" anchor="ctr"/>
-          <a:lstStyle/>
-          <a:p>
-            <a:pPr algn="l" indent="0" marL="0">
-              <a:buNone/>
-            </a:pPr>
-            <a:r>
-              <a:rPr lang="ko-KR" altLang="en-US" sz="1000" spc="-20" kern="0" dirty="0">
-                <a:solidFill>
-                  <a:srgbClr val="004B8D"/>
-                </a:solidFill>
-                <a:latin typeface="Paperlogy 8 ExtraBold" pitchFamily="34" charset="0"/>
-                <a:ea typeface="Paperlogy 8 ExtraBold" pitchFamily="34" charset="-127"/>
-                <a:cs typeface="Paperlogy 8 ExtraBold" pitchFamily="34" charset="-120"/>
-              </a:rPr>
-              <a:t>결과물</a:t>
-            </a:r>
-            <a:pPr algn="l" indent="0" marL="0">
-              <a:buNone/>
-            </a:pPr>
-            <a:r>
-              <a:rPr lang="ko-KR" altLang="en-US" sz="1000" spc="-20" kern="0" dirty="0">
-                <a:solidFill>
-                  <a:srgbClr val="4B5568"/>
-                </a:solidFill>
-                <a:latin typeface="Paperlogy 6 SemiBold" pitchFamily="34" charset="0"/>
-                <a:ea typeface="Paperlogy 6 SemiBold" pitchFamily="34" charset="-127"/>
-                <a:cs typeface="Paperlogy 6 SemiBold" pitchFamily="34" charset="-120"/>
-              </a:rPr>
-              <a:t> · 유닛 모듈러 기반 사용자 맞춤형</a:t>
-            </a:r>
-            <a:endParaRPr lang="en-US" sz="1000" dirty="0"/>
-          </a:p>
-        </p:txBody>
-      </p:sp>
-      <p:sp>
-        <p:nvSpPr>
-          <p:cNvPr id="87" name="리모델링 앱 개발 아이디어 시연 영상"/>
-          <p:cNvSpPr txBox="1"/>
-          <p:nvPr/>
-        </p:nvSpPr>
-        <p:spPr>
-          <a:xfrm>
-            <a:off x="6273800" y="3319264"/>
-            <a:ext cx="1871323" cy="152400"/>
-          </a:xfrm>
-          <a:prstGeom prst="rect">
-            <a:avLst/>
-          </a:prstGeom>
-          <a:noFill/>
-          <a:ln/>
-        </p:spPr>
-        <p:txBody>
-          <a:bodyPr wrap="none" lIns="0" tIns="0" rIns="0" bIns="0" rtlCol="0" anchor="ctr"/>
-          <a:lstStyle/>
-          <a:p>
-            <a:pPr algn="l" indent="0" marL="0">
-              <a:buNone/>
-            </a:pPr>
-            <a:r>
-              <a:rPr lang="ko-KR" altLang="en-US" sz="1000" spc="-20" kern="0" dirty="0">
-                <a:solidFill>
-                  <a:srgbClr val="4B5568"/>
-                </a:solidFill>
-                <a:latin typeface="Paperlogy 6 SemiBold" pitchFamily="34" charset="0"/>
-                <a:ea typeface="Paperlogy 6 SemiBold" pitchFamily="34" charset="-127"/>
-                <a:cs typeface="Paperlogy 6 SemiBold" pitchFamily="34" charset="-120"/>
-              </a:rPr>
-              <a:t>리모델링 앱 개발 아이디어 시연 영상</a:t>
-            </a:r>
-            <a:endParaRPr lang="en-US" sz="1000" dirty="0"/>
-          </a:p>
-        </p:txBody>
-      </p:sp>
-      <p:sp>
-        <p:nvSpPr>
-          <p:cNvPr id="88" name="학생 BIM 경진대회"/>
-          <p:cNvSpPr txBox="1"/>
-          <p:nvPr/>
-        </p:nvSpPr>
-        <p:spPr>
-          <a:xfrm>
-            <a:off x="9902924" y="3319264"/>
-            <a:ext cx="1016171" cy="152400"/>
-          </a:xfrm>
-          <a:prstGeom prst="rect">
-            <a:avLst/>
-          </a:prstGeom>
-          <a:noFill/>
-          <a:ln/>
-        </p:spPr>
-        <p:txBody>
-          <a:bodyPr wrap="none" lIns="0" tIns="0" rIns="0" bIns="0" rtlCol="0" anchor="ctr"/>
-          <a:lstStyle/>
-          <a:p>
-            <a:pPr algn="l" indent="0" marL="0">
-              <a:buNone/>
-            </a:pPr>
-            <a:r>
-              <a:rPr lang="ko-KR" altLang="en-US" sz="1000" spc="-20" kern="0" dirty="0">
-                <a:solidFill>
-                  <a:srgbClr val="0B2147"/>
-                </a:solidFill>
-                <a:latin typeface="Paperlogy 7 Bold" pitchFamily="34" charset="0"/>
-                <a:ea typeface="Paperlogy 7 Bold" pitchFamily="34" charset="-127"/>
-                <a:cs typeface="Paperlogy 7 Bold" pitchFamily="34" charset="-120"/>
-              </a:rPr>
-              <a:t>학생 BIM 경진대회</a:t>
-            </a:r>
-            <a:endParaRPr lang="en-US" sz="1000" dirty="0"/>
-          </a:p>
-        </p:txBody>
-      </p:sp>
-      <p:sp>
-        <p:nvSpPr>
-          <p:cNvPr id="89" name="01"/>
-          <p:cNvSpPr txBox="1"/>
-          <p:nvPr/>
-        </p:nvSpPr>
-        <p:spPr>
-          <a:xfrm>
-            <a:off x="825500" y="3652639"/>
-            <a:ext cx="221357" cy="146050"/>
-          </a:xfrm>
-          <a:prstGeom prst="rect">
-            <a:avLst/>
-          </a:prstGeom>
-          <a:noFill/>
-          <a:ln/>
-        </p:spPr>
-        <p:txBody>
-          <a:bodyPr wrap="none" lIns="0" tIns="0" rIns="0" bIns="0" rtlCol="0" anchor="ctr"/>
-          <a:lstStyle/>
-          <a:p>
-            <a:pPr algn="l" indent="0" marL="0">
-              <a:buNone/>
-            </a:pPr>
-            <a:r>
-              <a:rPr lang="ko-KR" altLang="en-US" sz="950" spc="38" kern="0" dirty="0">
-                <a:solidFill>
-                  <a:srgbClr val="8691A5"/>
-                </a:solidFill>
-                <a:latin typeface="Paperlogy 8 ExtraBold" pitchFamily="34" charset="0"/>
-                <a:ea typeface="Paperlogy 8 ExtraBold" pitchFamily="34" charset="-127"/>
-                <a:cs typeface="Paperlogy 8 ExtraBold" pitchFamily="34" charset="-120"/>
-              </a:rPr>
-              <a:t>01</a:t>
-            </a:r>
-            <a:endParaRPr lang="en-US" sz="950" dirty="0"/>
-          </a:p>
-        </p:txBody>
-      </p:sp>
-      <p:sp>
-        <p:nvSpPr>
-          <p:cNvPr id="90" name="CONFLICT"/>
-          <p:cNvSpPr txBox="1"/>
-          <p:nvPr/>
-        </p:nvSpPr>
-        <p:spPr>
-          <a:xfrm>
-            <a:off x="1059557" y="3652639"/>
-            <a:ext cx="845939" cy="146050"/>
-          </a:xfrm>
-          <a:prstGeom prst="rect">
-            <a:avLst/>
-          </a:prstGeom>
-          <a:noFill/>
-          <a:ln/>
-        </p:spPr>
-        <p:txBody>
-          <a:bodyPr wrap="none" lIns="0" tIns="0" rIns="0" bIns="0" rtlCol="0" anchor="ctr"/>
-          <a:lstStyle/>
-          <a:p>
-            <a:pPr algn="l" indent="0" marL="0">
-              <a:buNone/>
-            </a:pPr>
-            <a:r>
-              <a:rPr lang="ko-KR" altLang="en-US" sz="950" spc="152" kern="0" dirty="0">
-                <a:solidFill>
-                  <a:srgbClr val="2A78DD"/>
-                </a:solidFill>
-                <a:latin typeface="Paperlogy 7 Bold" pitchFamily="34" charset="0"/>
-                <a:ea typeface="Paperlogy 7 Bold" pitchFamily="34" charset="-127"/>
-                <a:cs typeface="Paperlogy 7 Bold" pitchFamily="34" charset="-120"/>
-              </a:rPr>
-              <a:t>CONFLICT</a:t>
-            </a:r>
-            <a:endParaRPr lang="en-US" sz="950" dirty="0"/>
-          </a:p>
-        </p:txBody>
-      </p:sp>
-      <p:sp>
-        <p:nvSpPr>
-          <p:cNvPr id="91" name="02"/>
-          <p:cNvSpPr txBox="1"/>
-          <p:nvPr/>
-        </p:nvSpPr>
-        <p:spPr>
-          <a:xfrm>
-            <a:off x="2730500" y="3652639"/>
-            <a:ext cx="221357" cy="146050"/>
-          </a:xfrm>
-          <a:prstGeom prst="rect">
-            <a:avLst/>
-          </a:prstGeom>
-          <a:noFill/>
-          <a:ln/>
-        </p:spPr>
-        <p:txBody>
-          <a:bodyPr wrap="none" lIns="0" tIns="0" rIns="0" bIns="0" rtlCol="0" anchor="ctr"/>
-          <a:lstStyle/>
-          <a:p>
-            <a:pPr algn="l" indent="0" marL="0">
-              <a:buNone/>
-            </a:pPr>
-            <a:r>
-              <a:rPr lang="ko-KR" altLang="en-US" sz="950" spc="38" kern="0" dirty="0">
-                <a:solidFill>
-                  <a:srgbClr val="8691A5"/>
-                </a:solidFill>
-                <a:latin typeface="Paperlogy 8 ExtraBold" pitchFamily="34" charset="0"/>
-                <a:ea typeface="Paperlogy 8 ExtraBold" pitchFamily="34" charset="-127"/>
-                <a:cs typeface="Paperlogy 8 ExtraBold" pitchFamily="34" charset="-120"/>
-              </a:rPr>
-              <a:t>02</a:t>
-            </a:r>
-            <a:endParaRPr lang="en-US" sz="950" dirty="0"/>
-          </a:p>
-        </p:txBody>
-      </p:sp>
-      <p:sp>
-        <p:nvSpPr>
-          <p:cNvPr id="92" name="ALIGN"/>
-          <p:cNvSpPr txBox="1"/>
-          <p:nvPr/>
-        </p:nvSpPr>
-        <p:spPr>
-          <a:xfrm>
-            <a:off x="2964557" y="3652639"/>
-            <a:ext cx="542330" cy="146050"/>
-          </a:xfrm>
-          <a:prstGeom prst="rect">
-            <a:avLst/>
-          </a:prstGeom>
-          <a:noFill/>
-          <a:ln/>
-        </p:spPr>
-        <p:txBody>
-          <a:bodyPr wrap="none" lIns="0" tIns="0" rIns="0" bIns="0" rtlCol="0" anchor="ctr"/>
-          <a:lstStyle/>
-          <a:p>
-            <a:pPr algn="l" indent="0" marL="0">
-              <a:buNone/>
-            </a:pPr>
-            <a:r>
-              <a:rPr lang="ko-KR" altLang="en-US" sz="950" spc="152" kern="0" dirty="0">
-                <a:solidFill>
-                  <a:srgbClr val="2A78DD"/>
-                </a:solidFill>
-                <a:latin typeface="Paperlogy 7 Bold" pitchFamily="34" charset="0"/>
-                <a:ea typeface="Paperlogy 7 Bold" pitchFamily="34" charset="-127"/>
-                <a:cs typeface="Paperlogy 7 Bold" pitchFamily="34" charset="-120"/>
-              </a:rPr>
-              <a:t>ALIGN</a:t>
-            </a:r>
-            <a:endParaRPr lang="en-US" sz="950" dirty="0"/>
-          </a:p>
-        </p:txBody>
-      </p:sp>
-      <p:sp>
-        <p:nvSpPr>
-          <p:cNvPr id="93" name="03"/>
-          <p:cNvSpPr txBox="1"/>
-          <p:nvPr/>
-        </p:nvSpPr>
-        <p:spPr>
-          <a:xfrm>
-            <a:off x="4889500" y="3652639"/>
-            <a:ext cx="221357" cy="146050"/>
-          </a:xfrm>
-          <a:prstGeom prst="rect">
-            <a:avLst/>
-          </a:prstGeom>
-          <a:noFill/>
-          <a:ln/>
-        </p:spPr>
-        <p:txBody>
-          <a:bodyPr wrap="none" lIns="0" tIns="0" rIns="0" bIns="0" rtlCol="0" anchor="ctr"/>
-          <a:lstStyle/>
-          <a:p>
-            <a:pPr algn="l" indent="0" marL="0">
-              <a:buNone/>
-            </a:pPr>
-            <a:r>
-              <a:rPr lang="ko-KR" altLang="en-US" sz="950" spc="38" kern="0" dirty="0">
-                <a:solidFill>
-                  <a:srgbClr val="8691A5"/>
-                </a:solidFill>
-                <a:latin typeface="Paperlogy 8 ExtraBold" pitchFamily="34" charset="0"/>
-                <a:ea typeface="Paperlogy 8 ExtraBold" pitchFamily="34" charset="-127"/>
-                <a:cs typeface="Paperlogy 8 ExtraBold" pitchFamily="34" charset="-120"/>
-              </a:rPr>
-              <a:t>03</a:t>
-            </a:r>
-            <a:endParaRPr lang="en-US" sz="950" dirty="0"/>
-          </a:p>
-        </p:txBody>
-      </p:sp>
-      <p:sp>
-        <p:nvSpPr>
-          <p:cNvPr id="94" name="ONE TEAM"/>
-          <p:cNvSpPr txBox="1"/>
-          <p:nvPr/>
-        </p:nvSpPr>
-        <p:spPr>
-          <a:xfrm>
-            <a:off x="5123557" y="3652639"/>
-            <a:ext cx="878681" cy="146050"/>
-          </a:xfrm>
-          <a:prstGeom prst="rect">
-            <a:avLst/>
-          </a:prstGeom>
-          <a:noFill/>
-          <a:ln/>
-        </p:spPr>
-        <p:txBody>
-          <a:bodyPr wrap="none" lIns="0" tIns="0" rIns="0" bIns="0" rtlCol="0" anchor="ctr"/>
-          <a:lstStyle/>
-          <a:p>
-            <a:pPr algn="l" indent="0" marL="0">
-              <a:buNone/>
-            </a:pPr>
-            <a:r>
-              <a:rPr lang="ko-KR" altLang="en-US" sz="950" spc="152" kern="0" dirty="0">
-                <a:solidFill>
-                  <a:srgbClr val="2A78DD"/>
-                </a:solidFill>
-                <a:latin typeface="Paperlogy 7 Bold" pitchFamily="34" charset="0"/>
-                <a:ea typeface="Paperlogy 7 Bold" pitchFamily="34" charset="-127"/>
-                <a:cs typeface="Paperlogy 7 Bold" pitchFamily="34" charset="-120"/>
-              </a:rPr>
-              <a:t>ONE TEAM</a:t>
-            </a:r>
-            <a:endParaRPr lang="en-US" sz="950" dirty="0"/>
-          </a:p>
-        </p:txBody>
-      </p:sp>
-      <p:sp>
-        <p:nvSpPr>
-          <p:cNvPr id="95" name="04"/>
-          <p:cNvSpPr txBox="1"/>
-          <p:nvPr/>
-        </p:nvSpPr>
-        <p:spPr>
-          <a:xfrm>
-            <a:off x="10528300" y="3652639"/>
-            <a:ext cx="221357" cy="146050"/>
-          </a:xfrm>
-          <a:prstGeom prst="rect">
-            <a:avLst/>
-          </a:prstGeom>
-          <a:noFill/>
-          <a:ln/>
-        </p:spPr>
-        <p:txBody>
-          <a:bodyPr wrap="none" lIns="0" tIns="0" rIns="0" bIns="0" rtlCol="0" anchor="ctr"/>
-          <a:lstStyle/>
-          <a:p>
-            <a:pPr algn="l" indent="0" marL="0">
-              <a:buNone/>
-            </a:pPr>
-            <a:r>
-              <a:rPr lang="ko-KR" altLang="en-US" sz="950" spc="38" kern="0" dirty="0">
-                <a:solidFill>
-                  <a:srgbClr val="8691A5"/>
-                </a:solidFill>
-                <a:latin typeface="Paperlogy 8 ExtraBold" pitchFamily="34" charset="0"/>
-                <a:ea typeface="Paperlogy 8 ExtraBold" pitchFamily="34" charset="-127"/>
-                <a:cs typeface="Paperlogy 8 ExtraBold" pitchFamily="34" charset="-120"/>
-              </a:rPr>
-              <a:t>04</a:t>
-            </a:r>
-            <a:endParaRPr lang="en-US" sz="950" dirty="0"/>
-          </a:p>
-        </p:txBody>
-      </p:sp>
-      <p:sp>
-        <p:nvSpPr>
-          <p:cNvPr id="96" name="RESULT"/>
-          <p:cNvSpPr txBox="1"/>
-          <p:nvPr/>
-        </p:nvSpPr>
-        <p:spPr>
-          <a:xfrm>
-            <a:off x="10762357" y="3652639"/>
-            <a:ext cx="646311" cy="146050"/>
-          </a:xfrm>
-          <a:prstGeom prst="rect">
-            <a:avLst/>
-          </a:prstGeom>
-          <a:noFill/>
-          <a:ln/>
-        </p:spPr>
-        <p:txBody>
-          <a:bodyPr wrap="none" lIns="0" tIns="0" rIns="0" bIns="0" rtlCol="0" anchor="ctr"/>
-          <a:lstStyle/>
-          <a:p>
-            <a:pPr algn="l" indent="0" marL="0">
-              <a:buNone/>
-            </a:pPr>
-            <a:r>
-              <a:rPr lang="ko-KR" altLang="en-US" sz="950" spc="152" kern="0" dirty="0">
-                <a:solidFill>
-                  <a:srgbClr val="2A78DD"/>
-                </a:solidFill>
-                <a:latin typeface="Paperlogy 7 Bold" pitchFamily="34" charset="0"/>
-                <a:ea typeface="Paperlogy 7 Bold" pitchFamily="34" charset="-127"/>
-                <a:cs typeface="Paperlogy 7 Bold" pitchFamily="34" charset="-120"/>
-              </a:rPr>
-              <a:t>RESULT</a:t>
-            </a:r>
-            <a:endParaRPr lang="en-US" sz="950" dirty="0"/>
-          </a:p>
-        </p:txBody>
-      </p:sp>
-      <p:sp>
-        <p:nvSpPr>
-          <p:cNvPr id="97" name="주제 선정 의견 충돌"/>
-          <p:cNvSpPr txBox="1"/>
-          <p:nvPr/>
-        </p:nvSpPr>
-        <p:spPr>
-          <a:xfrm>
-            <a:off x="609600" y="3852664"/>
-            <a:ext cx="1378698" cy="209550"/>
-          </a:xfrm>
-          <a:prstGeom prst="rect">
-            <a:avLst/>
-          </a:prstGeom>
-          <a:noFill/>
-          <a:ln/>
-        </p:spPr>
-        <p:txBody>
-          <a:bodyPr wrap="none" lIns="0" tIns="0" rIns="0" bIns="0" rtlCol="0" anchor="ctr"/>
-          <a:lstStyle/>
-          <a:p>
-            <a:pPr algn="l" indent="0" marL="0">
-              <a:buNone/>
-            </a:pPr>
-            <a:r>
-              <a:rPr lang="ko-KR" altLang="en-US" sz="1400" spc="-49" kern="0" dirty="0">
-                <a:solidFill>
-                  <a:srgbClr val="0B2147"/>
-                </a:solidFill>
-                <a:latin typeface="Paperlogy 7 Bold" pitchFamily="34" charset="0"/>
-                <a:ea typeface="Paperlogy 7 Bold" pitchFamily="34" charset="-127"/>
-                <a:cs typeface="Paperlogy 7 Bold" pitchFamily="34" charset="-120"/>
-              </a:rPr>
-              <a:t>주제 선정 의견 충돌</a:t>
-            </a:r>
-            <a:endParaRPr lang="en-US" sz="1400" dirty="0"/>
-          </a:p>
-        </p:txBody>
-      </p:sp>
-      <p:sp>
-        <p:nvSpPr>
-          <p:cNvPr id="98" name="참신성"/>
-          <p:cNvSpPr txBox="1"/>
-          <p:nvPr/>
-        </p:nvSpPr>
-        <p:spPr>
-          <a:xfrm>
-            <a:off x="911126" y="5033070"/>
-            <a:ext cx="362148" cy="146050"/>
-          </a:xfrm>
-          <a:prstGeom prst="rect">
-            <a:avLst/>
-          </a:prstGeom>
-          <a:noFill/>
-          <a:ln/>
-        </p:spPr>
-        <p:txBody>
-          <a:bodyPr wrap="none" lIns="0" tIns="0" rIns="0" bIns="0" rtlCol="0" anchor="ctr"/>
-          <a:lstStyle/>
-          <a:p>
-            <a:pPr algn="l" indent="0" marL="0">
-              <a:buNone/>
-            </a:pPr>
-            <a:r>
-              <a:rPr lang="ko-KR" altLang="en-US" sz="950" spc="-19" kern="0" dirty="0">
-                <a:solidFill>
-                  <a:srgbClr val="4B5568"/>
-                </a:solidFill>
-                <a:latin typeface="Paperlogy 7 Bold" pitchFamily="34" charset="0"/>
-                <a:ea typeface="Paperlogy 7 Bold" pitchFamily="34" charset="-127"/>
-                <a:cs typeface="Paperlogy 7 Bold" pitchFamily="34" charset="-120"/>
-              </a:rPr>
-              <a:t>참신성</a:t>
-            </a:r>
-            <a:endParaRPr lang="en-US" sz="950" dirty="0"/>
-          </a:p>
-        </p:txBody>
-      </p:sp>
-      <p:sp>
-        <p:nvSpPr>
-          <p:cNvPr id="99" name="구현 가능성"/>
-          <p:cNvSpPr txBox="1"/>
-          <p:nvPr/>
-        </p:nvSpPr>
-        <p:spPr>
-          <a:xfrm>
-            <a:off x="1544637" y="5033070"/>
-            <a:ext cx="593725" cy="146050"/>
-          </a:xfrm>
-          <a:prstGeom prst="rect">
-            <a:avLst/>
-          </a:prstGeom>
-          <a:noFill/>
-          <a:ln/>
-        </p:spPr>
-        <p:txBody>
-          <a:bodyPr wrap="none" lIns="0" tIns="0" rIns="0" bIns="0" rtlCol="0" anchor="ctr"/>
-          <a:lstStyle/>
-          <a:p>
-            <a:pPr algn="l" indent="0" marL="0">
-              <a:buNone/>
-            </a:pPr>
-            <a:r>
-              <a:rPr lang="ko-KR" altLang="en-US" sz="950" spc="-19" kern="0" dirty="0">
-                <a:solidFill>
-                  <a:srgbClr val="4B5568"/>
-                </a:solidFill>
-                <a:latin typeface="Paperlogy 7 Bold" pitchFamily="34" charset="0"/>
-                <a:ea typeface="Paperlogy 7 Bold" pitchFamily="34" charset="-127"/>
-                <a:cs typeface="Paperlogy 7 Bold" pitchFamily="34" charset="-120"/>
-              </a:rPr>
-              <a:t>구현 가능성</a:t>
-            </a:r>
-            <a:endParaRPr lang="en-US" sz="950" dirty="0"/>
-          </a:p>
-        </p:txBody>
-      </p:sp>
-      <p:sp>
-        <p:nvSpPr>
-          <p:cNvPr id="100" name="마감 3주 전까지"/>
-          <p:cNvSpPr txBox="1"/>
-          <p:nvPr/>
-        </p:nvSpPr>
-        <p:spPr>
-          <a:xfrm>
-            <a:off x="889000" y="5360194"/>
-            <a:ext cx="912471" cy="165100"/>
-          </a:xfrm>
-          <a:prstGeom prst="rect">
-            <a:avLst/>
-          </a:prstGeom>
-          <a:noFill/>
-          <a:ln/>
-        </p:spPr>
-        <p:txBody>
-          <a:bodyPr wrap="none" lIns="0" tIns="0" rIns="0" bIns="0" rtlCol="0" anchor="ctr"/>
-          <a:lstStyle/>
-          <a:p>
-            <a:pPr algn="l" indent="0" marL="0">
-              <a:buNone/>
-            </a:pPr>
-            <a:r>
-              <a:rPr lang="ko-KR" altLang="en-US" sz="1100" spc="-28" kern="0" dirty="0">
-                <a:solidFill>
-                  <a:srgbClr val="1C2536"/>
-                </a:solidFill>
-                <a:latin typeface="Paperlogy 6 SemiBold" pitchFamily="34" charset="0"/>
-                <a:ea typeface="Paperlogy 6 SemiBold" pitchFamily="34" charset="-127"/>
-                <a:cs typeface="Paperlogy 6 SemiBold" pitchFamily="34" charset="-120"/>
-              </a:rPr>
-              <a:t>마감 3주 전까지</a:t>
-            </a:r>
-            <a:endParaRPr lang="en-US" sz="1100" dirty="0"/>
-          </a:p>
-        </p:txBody>
-      </p:sp>
-      <p:sp>
-        <p:nvSpPr>
-          <p:cNvPr id="101" name="주제 미확정"/>
-          <p:cNvSpPr txBox="1"/>
-          <p:nvPr/>
-        </p:nvSpPr>
-        <p:spPr>
-          <a:xfrm>
-            <a:off x="889000" y="5555754"/>
-            <a:ext cx="675283" cy="165100"/>
-          </a:xfrm>
-          <a:prstGeom prst="rect">
-            <a:avLst/>
-          </a:prstGeom>
-          <a:noFill/>
-          <a:ln/>
-        </p:spPr>
-        <p:txBody>
-          <a:bodyPr wrap="none" lIns="0" tIns="0" rIns="0" bIns="0" rtlCol="0" anchor="ctr"/>
-          <a:lstStyle/>
-          <a:p>
-            <a:pPr algn="l" indent="0" marL="0">
-              <a:buNone/>
-            </a:pPr>
-            <a:r>
-              <a:rPr lang="ko-KR" altLang="en-US" sz="1100" spc="-28" kern="0" dirty="0">
-                <a:solidFill>
-                  <a:srgbClr val="1C2536"/>
-                </a:solidFill>
-                <a:latin typeface="Paperlogy 6 SemiBold" pitchFamily="34" charset="0"/>
-                <a:ea typeface="Paperlogy 6 SemiBold" pitchFamily="34" charset="-127"/>
-                <a:cs typeface="Paperlogy 6 SemiBold" pitchFamily="34" charset="-120"/>
-              </a:rPr>
-              <a:t>주제 미확정</a:t>
-            </a:r>
-            <a:endParaRPr lang="en-US" sz="1100" dirty="0"/>
-          </a:p>
-        </p:txBody>
-      </p:sp>
-      <p:sp>
-        <p:nvSpPr>
-          <p:cNvPr id="102" name="의견 조율 · 주제 확정"/>
-          <p:cNvSpPr txBox="1"/>
-          <p:nvPr/>
-        </p:nvSpPr>
-        <p:spPr>
-          <a:xfrm>
-            <a:off x="2514600" y="3852664"/>
-            <a:ext cx="1467674" cy="209550"/>
-          </a:xfrm>
-          <a:prstGeom prst="rect">
-            <a:avLst/>
-          </a:prstGeom>
-          <a:noFill/>
-          <a:ln/>
-        </p:spPr>
-        <p:txBody>
-          <a:bodyPr wrap="none" lIns="0" tIns="0" rIns="0" bIns="0" rtlCol="0" anchor="ctr"/>
-          <a:lstStyle/>
-          <a:p>
-            <a:pPr algn="l" indent="0" marL="0">
-              <a:buNone/>
-            </a:pPr>
-            <a:r>
-              <a:rPr lang="ko-KR" altLang="en-US" sz="1400" spc="-49" kern="0" dirty="0">
-                <a:solidFill>
-                  <a:srgbClr val="0B2147"/>
-                </a:solidFill>
-                <a:latin typeface="Paperlogy 7 Bold" pitchFamily="34" charset="0"/>
-                <a:ea typeface="Paperlogy 7 Bold" pitchFamily="34" charset="-127"/>
-                <a:cs typeface="Paperlogy 7 Bold" pitchFamily="34" charset="-120"/>
-              </a:rPr>
-              <a:t>의견 조율 · 주제 확정</a:t>
-            </a:r>
-            <a:endParaRPr lang="en-US" sz="1400" dirty="0"/>
-          </a:p>
-        </p:txBody>
-      </p:sp>
-      <p:sp>
-        <p:nvSpPr>
-          <p:cNvPr id="103" name="경청"/>
-          <p:cNvSpPr txBox="1"/>
-          <p:nvPr/>
-        </p:nvSpPr>
-        <p:spPr>
-          <a:xfrm>
-            <a:off x="2931517" y="4441230"/>
-            <a:ext cx="258366" cy="146050"/>
-          </a:xfrm>
-          <a:prstGeom prst="rect">
-            <a:avLst/>
-          </a:prstGeom>
-          <a:noFill/>
-          <a:ln/>
-        </p:spPr>
-        <p:txBody>
-          <a:bodyPr wrap="none" lIns="0" tIns="0" rIns="0" bIns="0" rtlCol="0" anchor="ctr"/>
-          <a:lstStyle/>
-          <a:p>
-            <a:pPr algn="ctr" indent="0" marL="0">
-              <a:buNone/>
-            </a:pPr>
-            <a:r>
-              <a:rPr lang="ko-KR" altLang="en-US" sz="950" spc="-19" kern="0" dirty="0">
-                <a:solidFill>
-                  <a:srgbClr val="1C2536"/>
-                </a:solidFill>
-                <a:latin typeface="Paperlogy 7 Bold" pitchFamily="34" charset="0"/>
-                <a:ea typeface="Paperlogy 7 Bold" pitchFamily="34" charset="-127"/>
-                <a:cs typeface="Paperlogy 7 Bold" pitchFamily="34" charset="-120"/>
-              </a:rPr>
-              <a:t>경청</a:t>
-            </a:r>
-            <a:endParaRPr lang="en-US" sz="950" dirty="0"/>
-          </a:p>
-        </p:txBody>
-      </p:sp>
-      <p:sp>
-        <p:nvSpPr>
-          <p:cNvPr id="104" name="수상작 분석"/>
-          <p:cNvSpPr txBox="1"/>
-          <p:nvPr/>
-        </p:nvSpPr>
-        <p:spPr>
-          <a:xfrm>
-            <a:off x="2763838" y="4758730"/>
-            <a:ext cx="593725" cy="146050"/>
-          </a:xfrm>
-          <a:prstGeom prst="rect">
-            <a:avLst/>
-          </a:prstGeom>
-          <a:noFill/>
-          <a:ln/>
-        </p:spPr>
-        <p:txBody>
-          <a:bodyPr wrap="none" lIns="0" tIns="0" rIns="0" bIns="0" rtlCol="0" anchor="ctr"/>
-          <a:lstStyle/>
-          <a:p>
-            <a:pPr algn="ctr" indent="0" marL="0">
-              <a:buNone/>
-            </a:pPr>
-            <a:r>
-              <a:rPr lang="ko-KR" altLang="en-US" sz="950" spc="-19" kern="0" dirty="0">
-                <a:solidFill>
-                  <a:srgbClr val="1C2536"/>
-                </a:solidFill>
-                <a:latin typeface="Paperlogy 7 Bold" pitchFamily="34" charset="0"/>
-                <a:ea typeface="Paperlogy 7 Bold" pitchFamily="34" charset="-127"/>
-                <a:cs typeface="Paperlogy 7 Bold" pitchFamily="34" charset="-120"/>
-              </a:rPr>
-              <a:t>수상작 분석</a:t>
-            </a:r>
-            <a:endParaRPr lang="en-US" sz="950" dirty="0"/>
-          </a:p>
-        </p:txBody>
-      </p:sp>
-      <p:sp>
-        <p:nvSpPr>
-          <p:cNvPr id="105" name="교수님 조언"/>
-          <p:cNvSpPr txBox="1"/>
-          <p:nvPr/>
-        </p:nvSpPr>
-        <p:spPr>
-          <a:xfrm>
-            <a:off x="2763838" y="5076230"/>
-            <a:ext cx="593725" cy="146050"/>
-          </a:xfrm>
-          <a:prstGeom prst="rect">
-            <a:avLst/>
-          </a:prstGeom>
-          <a:noFill/>
-          <a:ln/>
-        </p:spPr>
-        <p:txBody>
-          <a:bodyPr wrap="none" lIns="0" tIns="0" rIns="0" bIns="0" rtlCol="0" anchor="ctr"/>
-          <a:lstStyle/>
-          <a:p>
-            <a:pPr algn="ctr" indent="0" marL="0">
-              <a:buNone/>
-            </a:pPr>
-            <a:r>
-              <a:rPr lang="ko-KR" altLang="en-US" sz="950" spc="-19" kern="0" dirty="0">
-                <a:solidFill>
-                  <a:srgbClr val="1C2536"/>
-                </a:solidFill>
-                <a:latin typeface="Paperlogy 7 Bold" pitchFamily="34" charset="0"/>
-                <a:ea typeface="Paperlogy 7 Bold" pitchFamily="34" charset="-127"/>
-                <a:cs typeface="Paperlogy 7 Bold" pitchFamily="34" charset="-120"/>
-              </a:rPr>
-              <a:t>교수님 조언</a:t>
-            </a:r>
-            <a:endParaRPr lang="en-US" sz="950" dirty="0"/>
-          </a:p>
-        </p:txBody>
-      </p:sp>
-      <p:sp>
-        <p:nvSpPr>
-          <p:cNvPr id="106" name="판단"/>
-          <p:cNvSpPr txBox="1"/>
-          <p:nvPr/>
-        </p:nvSpPr>
-        <p:spPr>
-          <a:xfrm>
-            <a:off x="3897610" y="4679355"/>
-            <a:ext cx="269280" cy="152400"/>
-          </a:xfrm>
-          <a:prstGeom prst="rect">
-            <a:avLst/>
-          </a:prstGeom>
-          <a:noFill/>
-          <a:ln/>
-        </p:spPr>
-        <p:txBody>
-          <a:bodyPr wrap="none" lIns="0" tIns="0" rIns="0" bIns="0" rtlCol="0" anchor="ctr"/>
-          <a:lstStyle/>
-          <a:p>
-            <a:pPr algn="ctr" indent="0" marL="0">
-              <a:buNone/>
-            </a:pPr>
-            <a:r>
-              <a:rPr lang="ko-KR" altLang="en-US" sz="1000" spc="-20" kern="0" dirty="0">
-                <a:solidFill>
-                  <a:srgbClr val="004B8D"/>
-                </a:solidFill>
-                <a:latin typeface="Paperlogy 8 ExtraBold" pitchFamily="34" charset="0"/>
-                <a:ea typeface="Paperlogy 8 ExtraBold" pitchFamily="34" charset="-127"/>
-                <a:cs typeface="Paperlogy 8 ExtraBold" pitchFamily="34" charset="-120"/>
-              </a:rPr>
-              <a:t>판단</a:t>
-            </a:r>
-            <a:endParaRPr lang="en-US" sz="1000" dirty="0"/>
-          </a:p>
-        </p:txBody>
-      </p:sp>
-      <p:sp>
-        <p:nvSpPr>
-          <p:cNvPr id="107" name="기준"/>
-          <p:cNvSpPr txBox="1"/>
-          <p:nvPr/>
-        </p:nvSpPr>
-        <p:spPr>
-          <a:xfrm>
-            <a:off x="3897610" y="4825405"/>
-            <a:ext cx="269280" cy="152400"/>
-          </a:xfrm>
-          <a:prstGeom prst="rect">
-            <a:avLst/>
-          </a:prstGeom>
-          <a:noFill/>
-          <a:ln/>
-        </p:spPr>
-        <p:txBody>
-          <a:bodyPr wrap="none" lIns="0" tIns="0" rIns="0" bIns="0" rtlCol="0" anchor="ctr"/>
-          <a:lstStyle/>
-          <a:p>
-            <a:pPr algn="ctr" indent="0" marL="0">
-              <a:buNone/>
-            </a:pPr>
-            <a:r>
-              <a:rPr lang="ko-KR" altLang="en-US" sz="1000" spc="-20" kern="0" dirty="0">
-                <a:solidFill>
-                  <a:srgbClr val="004B8D"/>
-                </a:solidFill>
-                <a:latin typeface="Paperlogy 8 ExtraBold" pitchFamily="34" charset="0"/>
-                <a:ea typeface="Paperlogy 8 ExtraBold" pitchFamily="34" charset="-127"/>
-                <a:cs typeface="Paperlogy 8 ExtraBold" pitchFamily="34" charset="-120"/>
-              </a:rPr>
-              <a:t>기준</a:t>
-            </a:r>
-            <a:endParaRPr lang="en-US" sz="1000" dirty="0"/>
-          </a:p>
-        </p:txBody>
-      </p:sp>
-      <p:sp>
-        <p:nvSpPr>
-          <p:cNvPr id="108" name="주제 합의"/>
-          <p:cNvSpPr txBox="1"/>
-          <p:nvPr/>
-        </p:nvSpPr>
-        <p:spPr>
-          <a:xfrm>
-            <a:off x="3358852" y="5510312"/>
-            <a:ext cx="559395" cy="165100"/>
-          </a:xfrm>
-          <a:prstGeom prst="rect">
-            <a:avLst/>
-          </a:prstGeom>
-          <a:noFill/>
-          <a:ln/>
-        </p:spPr>
-        <p:txBody>
-          <a:bodyPr wrap="none" lIns="0" tIns="0" rIns="0" bIns="0" rtlCol="0" anchor="ctr"/>
-          <a:lstStyle/>
-          <a:p>
-            <a:pPr algn="l" indent="0" marL="0">
-              <a:buNone/>
-            </a:pPr>
-            <a:r>
-              <a:rPr lang="ko-KR" altLang="en-US" sz="1100" spc="-22" kern="0" dirty="0">
-                <a:solidFill>
-                  <a:srgbClr val="004B8D"/>
-                </a:solidFill>
-                <a:latin typeface="Paperlogy 8 ExtraBold" pitchFamily="34" charset="0"/>
-                <a:ea typeface="Paperlogy 8 ExtraBold" pitchFamily="34" charset="-127"/>
-                <a:cs typeface="Paperlogy 8 ExtraBold" pitchFamily="34" charset="-120"/>
-              </a:rPr>
-              <a:t>주제 합의</a:t>
-            </a:r>
-            <a:endParaRPr lang="en-US" sz="1100" dirty="0"/>
-          </a:p>
-        </p:txBody>
-      </p:sp>
-      <p:sp>
-        <p:nvSpPr>
-          <p:cNvPr id="109" name="강점 기반 역할 분담 · 지속적인 공유"/>
-          <p:cNvSpPr txBox="1"/>
-          <p:nvPr/>
-        </p:nvSpPr>
-        <p:spPr>
-          <a:xfrm>
-            <a:off x="4673600" y="3852664"/>
-            <a:ext cx="2492994" cy="209550"/>
-          </a:xfrm>
-          <a:prstGeom prst="rect">
-            <a:avLst/>
-          </a:prstGeom>
-          <a:noFill/>
-          <a:ln/>
-        </p:spPr>
-        <p:txBody>
-          <a:bodyPr wrap="none" lIns="0" tIns="0" rIns="0" bIns="0" rtlCol="0" anchor="ctr"/>
-          <a:lstStyle/>
-          <a:p>
-            <a:pPr algn="l" indent="0" marL="0">
-              <a:buNone/>
-            </a:pPr>
-            <a:r>
-              <a:rPr lang="ko-KR" altLang="en-US" sz="1400" spc="-49" kern="0" dirty="0">
-                <a:solidFill>
-                  <a:srgbClr val="0B2147"/>
-                </a:solidFill>
-                <a:latin typeface="Paperlogy 7 Bold" pitchFamily="34" charset="0"/>
-                <a:ea typeface="Paperlogy 7 Bold" pitchFamily="34" charset="-127"/>
-                <a:cs typeface="Paperlogy 7 Bold" pitchFamily="34" charset="-120"/>
-              </a:rPr>
-              <a:t>강점 기반 역할 분담 · 지속적인 공유</a:t>
-            </a:r>
-            <a:endParaRPr lang="en-US" sz="1400" dirty="0"/>
-          </a:p>
-        </p:txBody>
-      </p:sp>
-      <p:sp>
-        <p:nvSpPr>
-          <p:cNvPr id="110" name="팀장"/>
-          <p:cNvSpPr txBox="1"/>
-          <p:nvPr/>
-        </p:nvSpPr>
-        <p:spPr>
-          <a:xfrm>
-            <a:off x="5080000" y="4227909"/>
-            <a:ext cx="291108" cy="165100"/>
-          </a:xfrm>
-          <a:prstGeom prst="rect">
-            <a:avLst/>
-          </a:prstGeom>
-          <a:noFill/>
-          <a:ln/>
-        </p:spPr>
-        <p:txBody>
-          <a:bodyPr wrap="none" lIns="0" tIns="0" rIns="0" bIns="0" rtlCol="0" anchor="ctr"/>
-          <a:lstStyle/>
-          <a:p>
-            <a:pPr algn="l" indent="0" marL="0">
-              <a:buNone/>
-            </a:pPr>
-            <a:r>
-              <a:rPr lang="ko-KR" altLang="en-US" sz="1100" spc="-22" kern="0" dirty="0">
-                <a:solidFill>
-                  <a:srgbClr val="0B2147"/>
-                </a:solidFill>
-                <a:latin typeface="Paperlogy 8 ExtraBold" pitchFamily="34" charset="0"/>
-                <a:ea typeface="Paperlogy 8 ExtraBold" pitchFamily="34" charset="-127"/>
-                <a:cs typeface="Paperlogy 8 ExtraBold" pitchFamily="34" charset="-120"/>
-              </a:rPr>
-              <a:t>팀장</a:t>
-            </a:r>
-            <a:endParaRPr lang="en-US" sz="1100" dirty="0"/>
-          </a:p>
-        </p:txBody>
-      </p:sp>
-      <p:sp>
-        <p:nvSpPr>
-          <p:cNvPr id="111" name="나"/>
-          <p:cNvSpPr txBox="1"/>
-          <p:nvPr/>
-        </p:nvSpPr>
-        <p:spPr>
-          <a:xfrm>
-            <a:off x="5430143" y="4245372"/>
-            <a:ext cx="148630" cy="139700"/>
-          </a:xfrm>
-          <a:prstGeom prst="rect">
-            <a:avLst/>
-          </a:prstGeom>
-          <a:noFill/>
-          <a:ln/>
-        </p:spPr>
-        <p:txBody>
-          <a:bodyPr wrap="none" lIns="0" tIns="0" rIns="0" bIns="0" rtlCol="0" anchor="ctr"/>
-          <a:lstStyle/>
-          <a:p>
-            <a:pPr algn="l" indent="0" marL="0">
-              <a:buNone/>
-            </a:pPr>
-            <a:r>
-              <a:rPr lang="ko-KR" altLang="en-US" sz="900" spc="-22" kern="0" dirty="0">
-                <a:solidFill>
-                  <a:srgbClr val="FFFFFF"/>
-                </a:solidFill>
-                <a:latin typeface="Paperlogy 7 Bold" pitchFamily="34" charset="0"/>
-                <a:ea typeface="Paperlogy 7 Bold" pitchFamily="34" charset="-127"/>
-                <a:cs typeface="Paperlogy 7 Bold" pitchFamily="34" charset="-120"/>
-              </a:rPr>
-              <a:t>나</a:t>
-            </a:r>
-            <a:endParaRPr lang="en-US" sz="900" dirty="0"/>
-          </a:p>
-        </p:txBody>
-      </p:sp>
-      <p:sp>
-        <p:nvSpPr>
-          <p:cNvPr id="112" name="프로젝트 총괄"/>
-          <p:cNvSpPr txBox="1"/>
-          <p:nvPr/>
-        </p:nvSpPr>
-        <p:spPr>
-          <a:xfrm>
-            <a:off x="4965700" y="4448572"/>
-            <a:ext cx="794742" cy="165100"/>
-          </a:xfrm>
-          <a:prstGeom prst="rect">
-            <a:avLst/>
-          </a:prstGeom>
-          <a:noFill/>
-          <a:ln/>
-        </p:spPr>
-        <p:txBody>
-          <a:bodyPr wrap="none" lIns="0" tIns="0" rIns="0" bIns="0" rtlCol="0" anchor="ctr"/>
-          <a:lstStyle/>
-          <a:p>
-            <a:pPr algn="l" indent="0" marL="0">
-              <a:buNone/>
-            </a:pPr>
-            <a:r>
-              <a:rPr lang="ko-KR" altLang="en-US" sz="1100" spc="-28" kern="0" dirty="0">
-                <a:solidFill>
-                  <a:srgbClr val="4B5568"/>
-                </a:solidFill>
-                <a:latin typeface="Paperlogy 5 Medium" pitchFamily="34" charset="0"/>
-                <a:ea typeface="Paperlogy 5 Medium" pitchFamily="34" charset="-127"/>
-                <a:cs typeface="Paperlogy 5 Medium" pitchFamily="34" charset="-120"/>
-              </a:rPr>
-              <a:t>프로젝트 총괄</a:t>
-            </a:r>
-            <a:endParaRPr lang="en-US" sz="1100" dirty="0"/>
-          </a:p>
-        </p:txBody>
-      </p:sp>
-      <p:sp>
-        <p:nvSpPr>
-          <p:cNvPr id="113" name="Dynamo"/>
-          <p:cNvSpPr txBox="1"/>
-          <p:nvPr/>
-        </p:nvSpPr>
-        <p:spPr>
-          <a:xfrm>
-            <a:off x="5022850" y="4655542"/>
-            <a:ext cx="539155" cy="139700"/>
-          </a:xfrm>
-          <a:prstGeom prst="rect">
-            <a:avLst/>
-          </a:prstGeom>
-          <a:noFill/>
-          <a:ln/>
-        </p:spPr>
-        <p:txBody>
-          <a:bodyPr wrap="none" lIns="0" tIns="0" rIns="0" bIns="0" rtlCol="0" anchor="ctr"/>
-          <a:lstStyle/>
-          <a:p>
-            <a:pPr algn="l" indent="0" marL="0">
-              <a:buNone/>
-            </a:pPr>
-            <a:r>
-              <a:rPr lang="ko-KR" altLang="en-US" sz="900" spc="-28" kern="0" dirty="0">
-                <a:solidFill>
-                  <a:srgbClr val="004B8D"/>
-                </a:solidFill>
-                <a:latin typeface="Paperlogy 7 Bold" pitchFamily="34" charset="0"/>
-                <a:ea typeface="Paperlogy 7 Bold" pitchFamily="34" charset="-127"/>
-                <a:cs typeface="Paperlogy 7 Bold" pitchFamily="34" charset="-120"/>
-              </a:rPr>
-              <a:t>Dynamo</a:t>
-            </a:r>
-            <a:endParaRPr lang="en-US" sz="900" dirty="0"/>
-          </a:p>
-        </p:txBody>
-      </p:sp>
-      <p:sp>
-        <p:nvSpPr>
-          <p:cNvPr id="114" name="기반 자동화 알고리즘 개발"/>
-          <p:cNvSpPr txBox="1"/>
-          <p:nvPr/>
-        </p:nvSpPr>
-        <p:spPr>
-          <a:xfrm>
-            <a:off x="5619155" y="4644132"/>
-            <a:ext cx="1479348" cy="165100"/>
-          </a:xfrm>
-          <a:prstGeom prst="rect">
-            <a:avLst/>
-          </a:prstGeom>
-          <a:noFill/>
-          <a:ln/>
-        </p:spPr>
-        <p:txBody>
-          <a:bodyPr wrap="none" lIns="0" tIns="0" rIns="0" bIns="0" rtlCol="0" anchor="ctr"/>
-          <a:lstStyle/>
-          <a:p>
-            <a:pPr algn="l" indent="0" marL="0">
-              <a:buNone/>
-            </a:pPr>
-            <a:r>
-              <a:rPr lang="ko-KR" altLang="en-US" sz="1100" spc="-28" kern="0" dirty="0">
-                <a:solidFill>
-                  <a:srgbClr val="4B5568"/>
-                </a:solidFill>
-                <a:latin typeface="Paperlogy 5 Medium" pitchFamily="34" charset="0"/>
-                <a:ea typeface="Paperlogy 5 Medium" pitchFamily="34" charset="-127"/>
-                <a:cs typeface="Paperlogy 5 Medium" pitchFamily="34" charset="-120"/>
-              </a:rPr>
-              <a:t>기반 자동화 알고리즘 개발</a:t>
-            </a:r>
-            <a:endParaRPr lang="en-US" sz="1100" dirty="0"/>
-          </a:p>
-        </p:txBody>
-      </p:sp>
-      <p:sp>
-        <p:nvSpPr>
-          <p:cNvPr id="115" name="팀원 A"/>
-          <p:cNvSpPr txBox="1"/>
-          <p:nvPr/>
-        </p:nvSpPr>
-        <p:spPr>
-          <a:xfrm>
-            <a:off x="7766050" y="4219972"/>
-            <a:ext cx="424656" cy="165100"/>
-          </a:xfrm>
-          <a:prstGeom prst="rect">
-            <a:avLst/>
-          </a:prstGeom>
-          <a:noFill/>
-          <a:ln/>
-        </p:spPr>
-        <p:txBody>
-          <a:bodyPr wrap="none" lIns="0" tIns="0" rIns="0" bIns="0" rtlCol="0" anchor="ctr"/>
-          <a:lstStyle/>
-          <a:p>
-            <a:pPr algn="l" indent="0" marL="0">
-              <a:buNone/>
-            </a:pPr>
-            <a:r>
-              <a:rPr lang="ko-KR" altLang="en-US" sz="1100" spc="-22" kern="0" dirty="0">
-                <a:solidFill>
-                  <a:srgbClr val="0B2147"/>
-                </a:solidFill>
-                <a:latin typeface="Paperlogy 8 ExtraBold" pitchFamily="34" charset="0"/>
-                <a:ea typeface="Paperlogy 8 ExtraBold" pitchFamily="34" charset="-127"/>
-                <a:cs typeface="Paperlogy 8 ExtraBold" pitchFamily="34" charset="-120"/>
-              </a:rPr>
-              <a:t>팀원 A</a:t>
-            </a:r>
-            <a:endParaRPr lang="en-US" sz="1100" dirty="0"/>
-          </a:p>
-        </p:txBody>
-      </p:sp>
-      <p:sp>
-        <p:nvSpPr>
-          <p:cNvPr id="116" name="유닛 모듈러 설계"/>
-          <p:cNvSpPr txBox="1"/>
-          <p:nvPr/>
-        </p:nvSpPr>
-        <p:spPr>
-          <a:xfrm>
-            <a:off x="7651750" y="4432697"/>
-            <a:ext cx="944023" cy="165100"/>
-          </a:xfrm>
-          <a:prstGeom prst="rect">
-            <a:avLst/>
-          </a:prstGeom>
-          <a:noFill/>
-          <a:ln/>
-        </p:spPr>
-        <p:txBody>
-          <a:bodyPr wrap="none" lIns="0" tIns="0" rIns="0" bIns="0" rtlCol="0" anchor="ctr"/>
-          <a:lstStyle/>
-          <a:p>
-            <a:pPr algn="l" indent="0" marL="0">
-              <a:buNone/>
-            </a:pPr>
-            <a:r>
-              <a:rPr lang="ko-KR" altLang="en-US" sz="1100" spc="-28" kern="0" dirty="0">
-                <a:solidFill>
-                  <a:srgbClr val="4B5568"/>
-                </a:solidFill>
-                <a:latin typeface="Paperlogy 5 Medium" pitchFamily="34" charset="0"/>
-                <a:ea typeface="Paperlogy 5 Medium" pitchFamily="34" charset="-127"/>
-                <a:cs typeface="Paperlogy 5 Medium" pitchFamily="34" charset="-120"/>
-              </a:rPr>
-              <a:t>유닛 모듈러 설계</a:t>
-            </a:r>
-            <a:endParaRPr lang="en-US" sz="1100" dirty="0"/>
-          </a:p>
-        </p:txBody>
-      </p:sp>
-      <p:sp>
-        <p:nvSpPr>
-          <p:cNvPr id="117" name="배치계획"/>
-          <p:cNvSpPr txBox="1"/>
-          <p:nvPr/>
-        </p:nvSpPr>
-        <p:spPr>
-          <a:xfrm>
-            <a:off x="7651750" y="4628257"/>
-            <a:ext cx="528638" cy="165100"/>
-          </a:xfrm>
-          <a:prstGeom prst="rect">
-            <a:avLst/>
-          </a:prstGeom>
-          <a:noFill/>
-          <a:ln/>
-        </p:spPr>
-        <p:txBody>
-          <a:bodyPr wrap="none" lIns="0" tIns="0" rIns="0" bIns="0" rtlCol="0" anchor="ctr"/>
-          <a:lstStyle/>
-          <a:p>
-            <a:pPr algn="l" indent="0" marL="0">
-              <a:buNone/>
-            </a:pPr>
-            <a:r>
-              <a:rPr lang="ko-KR" altLang="en-US" sz="1100" spc="-28" kern="0" dirty="0">
-                <a:solidFill>
-                  <a:srgbClr val="4B5568"/>
-                </a:solidFill>
-                <a:latin typeface="Paperlogy 5 Medium" pitchFamily="34" charset="0"/>
-                <a:ea typeface="Paperlogy 5 Medium" pitchFamily="34" charset="-127"/>
-                <a:cs typeface="Paperlogy 5 Medium" pitchFamily="34" charset="-120"/>
-              </a:rPr>
-              <a:t>배치계획</a:t>
-            </a:r>
-            <a:endParaRPr lang="en-US" sz="1100" dirty="0"/>
-          </a:p>
-        </p:txBody>
-      </p:sp>
-      <p:sp>
-        <p:nvSpPr>
-          <p:cNvPr id="118" name="이틀마다 진행상황 공유 · 피드백"/>
-          <p:cNvSpPr txBox="1"/>
-          <p:nvPr/>
-        </p:nvSpPr>
-        <p:spPr>
-          <a:xfrm>
-            <a:off x="6713041" y="4900017"/>
-            <a:ext cx="1653512" cy="152400"/>
-          </a:xfrm>
-          <a:prstGeom prst="rect">
-            <a:avLst/>
-          </a:prstGeom>
-          <a:noFill/>
-          <a:ln/>
-        </p:spPr>
-        <p:txBody>
-          <a:bodyPr wrap="none" lIns="0" tIns="0" rIns="0" bIns="0" rtlCol="0" anchor="ctr"/>
-          <a:lstStyle/>
-          <a:p>
-            <a:pPr algn="l" indent="0" marL="0">
-              <a:buNone/>
-            </a:pPr>
-            <a:r>
-              <a:rPr lang="ko-KR" altLang="en-US" sz="1000" spc="-20" kern="0" dirty="0">
-                <a:solidFill>
-                  <a:srgbClr val="0B6B33"/>
-                </a:solidFill>
-                <a:latin typeface="Paperlogy 7 Bold" pitchFamily="34" charset="0"/>
-                <a:ea typeface="Paperlogy 7 Bold" pitchFamily="34" charset="-127"/>
-                <a:cs typeface="Paperlogy 7 Bold" pitchFamily="34" charset="-120"/>
-              </a:rPr>
-              <a:t>이틀마다 진행상황 공유 · 피드백</a:t>
-            </a:r>
-            <a:endParaRPr lang="en-US" sz="1000" dirty="0"/>
-          </a:p>
-        </p:txBody>
-      </p:sp>
-      <p:sp>
-        <p:nvSpPr>
-          <p:cNvPr id="119" name="팀원 B"/>
-          <p:cNvSpPr txBox="1"/>
-          <p:nvPr/>
-        </p:nvSpPr>
-        <p:spPr>
-          <a:xfrm>
-            <a:off x="5080000" y="5131792"/>
-            <a:ext cx="424458" cy="165100"/>
-          </a:xfrm>
-          <a:prstGeom prst="rect">
-            <a:avLst/>
-          </a:prstGeom>
-          <a:noFill/>
-          <a:ln/>
-        </p:spPr>
-        <p:txBody>
-          <a:bodyPr wrap="none" lIns="0" tIns="0" rIns="0" bIns="0" rtlCol="0" anchor="ctr"/>
-          <a:lstStyle/>
-          <a:p>
-            <a:pPr algn="l" indent="0" marL="0">
-              <a:buNone/>
-            </a:pPr>
-            <a:r>
-              <a:rPr lang="ko-KR" altLang="en-US" sz="1100" spc="-22" kern="0" dirty="0">
-                <a:solidFill>
-                  <a:srgbClr val="0B2147"/>
-                </a:solidFill>
-                <a:latin typeface="Paperlogy 8 ExtraBold" pitchFamily="34" charset="0"/>
-                <a:ea typeface="Paperlogy 8 ExtraBold" pitchFamily="34" charset="-127"/>
-                <a:cs typeface="Paperlogy 8 ExtraBold" pitchFamily="34" charset="-120"/>
-              </a:rPr>
-              <a:t>팀원 B</a:t>
-            </a:r>
-            <a:endParaRPr lang="en-US" sz="1100" dirty="0"/>
-          </a:p>
-        </p:txBody>
-      </p:sp>
-      <p:sp>
-        <p:nvSpPr>
-          <p:cNvPr id="120" name="Revit"/>
-          <p:cNvSpPr txBox="1"/>
-          <p:nvPr/>
-        </p:nvSpPr>
-        <p:spPr>
-          <a:xfrm>
-            <a:off x="5022850" y="5355927"/>
-            <a:ext cx="337443" cy="139700"/>
-          </a:xfrm>
-          <a:prstGeom prst="rect">
-            <a:avLst/>
-          </a:prstGeom>
-          <a:noFill/>
-          <a:ln/>
-        </p:spPr>
-        <p:txBody>
-          <a:bodyPr wrap="none" lIns="0" tIns="0" rIns="0" bIns="0" rtlCol="0" anchor="ctr"/>
-          <a:lstStyle/>
-          <a:p>
-            <a:pPr algn="l" indent="0" marL="0">
-              <a:buNone/>
-            </a:pPr>
-            <a:r>
-              <a:rPr lang="ko-KR" altLang="en-US" sz="900" spc="-28" kern="0" dirty="0">
-                <a:solidFill>
-                  <a:srgbClr val="004B8D"/>
-                </a:solidFill>
-                <a:latin typeface="Paperlogy 7 Bold" pitchFamily="34" charset="0"/>
-                <a:ea typeface="Paperlogy 7 Bold" pitchFamily="34" charset="-127"/>
-                <a:cs typeface="Paperlogy 7 Bold" pitchFamily="34" charset="-120"/>
-              </a:rPr>
-              <a:t>Revit</a:t>
-            </a:r>
-            <a:endParaRPr lang="en-US" sz="900" dirty="0"/>
-          </a:p>
-        </p:txBody>
-      </p:sp>
-      <p:sp>
-        <p:nvSpPr>
-          <p:cNvPr id="121" name="기반 BIM 모델링"/>
-          <p:cNvSpPr txBox="1"/>
-          <p:nvPr/>
-        </p:nvSpPr>
-        <p:spPr>
-          <a:xfrm>
-            <a:off x="5417443" y="5344517"/>
-            <a:ext cx="979045" cy="165100"/>
-          </a:xfrm>
-          <a:prstGeom prst="rect">
-            <a:avLst/>
-          </a:prstGeom>
-          <a:noFill/>
-          <a:ln/>
-        </p:spPr>
-        <p:txBody>
-          <a:bodyPr wrap="none" lIns="0" tIns="0" rIns="0" bIns="0" rtlCol="0" anchor="ctr"/>
-          <a:lstStyle/>
-          <a:p>
-            <a:pPr algn="l" indent="0" marL="0">
-              <a:buNone/>
-            </a:pPr>
-            <a:r>
-              <a:rPr lang="ko-KR" altLang="en-US" sz="1100" spc="-28" kern="0" dirty="0">
-                <a:solidFill>
-                  <a:srgbClr val="4B5568"/>
-                </a:solidFill>
-                <a:latin typeface="Paperlogy 5 Medium" pitchFamily="34" charset="0"/>
-                <a:ea typeface="Paperlogy 5 Medium" pitchFamily="34" charset="-127"/>
-                <a:cs typeface="Paperlogy 5 Medium" pitchFamily="34" charset="-120"/>
-              </a:rPr>
-              <a:t>기반 BIM 모델링</a:t>
-            </a:r>
-            <a:endParaRPr lang="en-US" sz="1100" dirty="0"/>
-          </a:p>
-        </p:txBody>
-      </p:sp>
-      <p:sp>
-        <p:nvSpPr>
-          <p:cNvPr id="122" name="데이터 구축"/>
-          <p:cNvSpPr txBox="1"/>
-          <p:nvPr/>
-        </p:nvSpPr>
-        <p:spPr>
-          <a:xfrm>
-            <a:off x="4965700" y="5540077"/>
-            <a:ext cx="675283" cy="165100"/>
-          </a:xfrm>
-          <a:prstGeom prst="rect">
-            <a:avLst/>
-          </a:prstGeom>
-          <a:noFill/>
-          <a:ln/>
-        </p:spPr>
-        <p:txBody>
-          <a:bodyPr wrap="none" lIns="0" tIns="0" rIns="0" bIns="0" rtlCol="0" anchor="ctr"/>
-          <a:lstStyle/>
-          <a:p>
-            <a:pPr algn="l" indent="0" marL="0">
-              <a:buNone/>
-            </a:pPr>
-            <a:r>
-              <a:rPr lang="ko-KR" altLang="en-US" sz="1100" spc="-28" kern="0" dirty="0">
-                <a:solidFill>
-                  <a:srgbClr val="4B5568"/>
-                </a:solidFill>
-                <a:latin typeface="Paperlogy 5 Medium" pitchFamily="34" charset="0"/>
-                <a:ea typeface="Paperlogy 5 Medium" pitchFamily="34" charset="-127"/>
-                <a:cs typeface="Paperlogy 5 Medium" pitchFamily="34" charset="-120"/>
-              </a:rPr>
-              <a:t>데이터 구축</a:t>
-            </a:r>
-            <a:endParaRPr lang="en-US" sz="1100" dirty="0"/>
-          </a:p>
-        </p:txBody>
-      </p:sp>
-      <p:sp>
-        <p:nvSpPr>
-          <p:cNvPr id="123" name="팀원 C"/>
-          <p:cNvSpPr txBox="1"/>
-          <p:nvPr/>
-        </p:nvSpPr>
-        <p:spPr>
-          <a:xfrm>
-            <a:off x="7766050" y="5131792"/>
-            <a:ext cx="419695" cy="165100"/>
-          </a:xfrm>
-          <a:prstGeom prst="rect">
-            <a:avLst/>
-          </a:prstGeom>
-          <a:noFill/>
-          <a:ln/>
-        </p:spPr>
-        <p:txBody>
-          <a:bodyPr wrap="none" lIns="0" tIns="0" rIns="0" bIns="0" rtlCol="0" anchor="ctr"/>
-          <a:lstStyle/>
-          <a:p>
-            <a:pPr algn="l" indent="0" marL="0">
-              <a:buNone/>
-            </a:pPr>
-            <a:r>
-              <a:rPr lang="ko-KR" altLang="en-US" sz="1100" spc="-22" kern="0" dirty="0">
-                <a:solidFill>
-                  <a:srgbClr val="0B2147"/>
-                </a:solidFill>
-                <a:latin typeface="Paperlogy 8 ExtraBold" pitchFamily="34" charset="0"/>
-                <a:ea typeface="Paperlogy 8 ExtraBold" pitchFamily="34" charset="-127"/>
-                <a:cs typeface="Paperlogy 8 ExtraBold" pitchFamily="34" charset="-120"/>
-              </a:rPr>
-              <a:t>팀원 C</a:t>
-            </a:r>
-            <a:endParaRPr lang="en-US" sz="1100" dirty="0"/>
-          </a:p>
-        </p:txBody>
-      </p:sp>
-      <p:sp>
-        <p:nvSpPr>
-          <p:cNvPr id="124" name="리모델링 적용 시나리오 구성"/>
-          <p:cNvSpPr txBox="1"/>
-          <p:nvPr/>
-        </p:nvSpPr>
-        <p:spPr>
-          <a:xfrm>
-            <a:off x="7651750" y="5344517"/>
-            <a:ext cx="1605975" cy="165100"/>
-          </a:xfrm>
-          <a:prstGeom prst="rect">
-            <a:avLst/>
-          </a:prstGeom>
-          <a:noFill/>
-          <a:ln/>
-        </p:spPr>
-        <p:txBody>
-          <a:bodyPr wrap="none" lIns="0" tIns="0" rIns="0" bIns="0" rtlCol="0" anchor="ctr"/>
-          <a:lstStyle/>
-          <a:p>
-            <a:pPr algn="l" indent="0" marL="0">
-              <a:buNone/>
-            </a:pPr>
-            <a:r>
-              <a:rPr lang="ko-KR" altLang="en-US" sz="1100" spc="-28" kern="0" dirty="0">
-                <a:solidFill>
-                  <a:srgbClr val="4B5568"/>
-                </a:solidFill>
-                <a:latin typeface="Paperlogy 5 Medium" pitchFamily="34" charset="0"/>
-                <a:ea typeface="Paperlogy 5 Medium" pitchFamily="34" charset="-127"/>
-                <a:cs typeface="Paperlogy 5 Medium" pitchFamily="34" charset="-120"/>
-              </a:rPr>
-              <a:t>리모델링 적용 시나리오 구성</a:t>
-            </a:r>
-            <a:endParaRPr lang="en-US" sz="1100" dirty="0"/>
-          </a:p>
-        </p:txBody>
-      </p:sp>
-      <p:sp>
-        <p:nvSpPr>
-          <p:cNvPr id="125" name="시연 영상 제작"/>
-          <p:cNvSpPr txBox="1"/>
-          <p:nvPr/>
-        </p:nvSpPr>
-        <p:spPr>
-          <a:xfrm>
-            <a:off x="7651750" y="5540077"/>
-            <a:ext cx="822027" cy="165100"/>
-          </a:xfrm>
-          <a:prstGeom prst="rect">
-            <a:avLst/>
-          </a:prstGeom>
-          <a:noFill/>
-          <a:ln/>
-        </p:spPr>
-        <p:txBody>
-          <a:bodyPr wrap="none" lIns="0" tIns="0" rIns="0" bIns="0" rtlCol="0" anchor="ctr"/>
-          <a:lstStyle/>
-          <a:p>
-            <a:pPr algn="l" indent="0" marL="0">
-              <a:buNone/>
-            </a:pPr>
-            <a:r>
-              <a:rPr lang="ko-KR" altLang="en-US" sz="1100" spc="-28" kern="0" dirty="0">
-                <a:solidFill>
-                  <a:srgbClr val="4B5568"/>
-                </a:solidFill>
-                <a:latin typeface="Paperlogy 5 Medium" pitchFamily="34" charset="0"/>
-                <a:ea typeface="Paperlogy 5 Medium" pitchFamily="34" charset="-127"/>
-                <a:cs typeface="Paperlogy 5 Medium" pitchFamily="34" charset="-120"/>
-              </a:rPr>
-              <a:t>시연 영상 제작</a:t>
-            </a:r>
-            <a:endParaRPr lang="en-US" sz="1100" dirty="0"/>
-          </a:p>
-        </p:txBody>
-      </p:sp>
-      <p:sp>
-        <p:nvSpPr>
-          <p:cNvPr id="126" name="프로젝트 완성"/>
-          <p:cNvSpPr txBox="1"/>
-          <p:nvPr/>
-        </p:nvSpPr>
-        <p:spPr>
-          <a:xfrm>
-            <a:off x="10312400" y="3852664"/>
-            <a:ext cx="990404" cy="209550"/>
-          </a:xfrm>
-          <a:prstGeom prst="rect">
-            <a:avLst/>
-          </a:prstGeom>
-          <a:noFill/>
-          <a:ln/>
-        </p:spPr>
-        <p:txBody>
-          <a:bodyPr wrap="none" lIns="0" tIns="0" rIns="0" bIns="0" rtlCol="0" anchor="ctr"/>
-          <a:lstStyle/>
-          <a:p>
-            <a:pPr algn="l" indent="0" marL="0">
-              <a:buNone/>
-            </a:pPr>
-            <a:r>
-              <a:rPr lang="ko-KR" altLang="en-US" sz="1400" spc="-49" kern="0" dirty="0">
-                <a:solidFill>
-                  <a:srgbClr val="0B2147"/>
-                </a:solidFill>
-                <a:latin typeface="Paperlogy 7 Bold" pitchFamily="34" charset="0"/>
-                <a:ea typeface="Paperlogy 7 Bold" pitchFamily="34" charset="-127"/>
-                <a:cs typeface="Paperlogy 7 Bold" pitchFamily="34" charset="-120"/>
-              </a:rPr>
-              <a:t>프로젝트 완성</a:t>
-            </a:r>
-            <a:endParaRPr lang="en-US" sz="1400" dirty="0"/>
-          </a:p>
-        </p:txBody>
-      </p:sp>
-      <p:sp>
-        <p:nvSpPr>
-          <p:cNvPr id="127" name="남은 3주 내"/>
-          <p:cNvSpPr txBox="1"/>
-          <p:nvPr/>
-        </p:nvSpPr>
-        <p:spPr>
-          <a:xfrm>
-            <a:off x="10591800" y="5360194"/>
-            <a:ext cx="672703" cy="165100"/>
-          </a:xfrm>
-          <a:prstGeom prst="rect">
-            <a:avLst/>
-          </a:prstGeom>
-          <a:noFill/>
-          <a:ln/>
-        </p:spPr>
-        <p:txBody>
-          <a:bodyPr wrap="none" lIns="0" tIns="0" rIns="0" bIns="0" rtlCol="0" anchor="ctr"/>
-          <a:lstStyle/>
-          <a:p>
-            <a:pPr algn="l" indent="0" marL="0">
-              <a:buNone/>
-            </a:pPr>
-            <a:r>
-              <a:rPr lang="ko-KR" altLang="en-US" sz="1100" spc="-28" kern="0" dirty="0">
-                <a:solidFill>
-                  <a:srgbClr val="1C2536"/>
-                </a:solidFill>
-                <a:latin typeface="Paperlogy 6 SemiBold" pitchFamily="34" charset="0"/>
-                <a:ea typeface="Paperlogy 6 SemiBold" pitchFamily="34" charset="-127"/>
-                <a:cs typeface="Paperlogy 6 SemiBold" pitchFamily="34" charset="-120"/>
-              </a:rPr>
-              <a:t>남은 3주 내</a:t>
-            </a:r>
-            <a:endParaRPr lang="en-US" sz="1100" dirty="0"/>
-          </a:p>
-        </p:txBody>
-      </p:sp>
-      <p:sp>
-        <p:nvSpPr>
-          <p:cNvPr id="128" name="시연 영상 완성"/>
-          <p:cNvSpPr txBox="1"/>
-          <p:nvPr/>
-        </p:nvSpPr>
-        <p:spPr>
-          <a:xfrm>
-            <a:off x="10591800" y="5555754"/>
-            <a:ext cx="822027" cy="165100"/>
-          </a:xfrm>
-          <a:prstGeom prst="rect">
-            <a:avLst/>
-          </a:prstGeom>
-          <a:noFill/>
-          <a:ln/>
-        </p:spPr>
-        <p:txBody>
-          <a:bodyPr wrap="none" lIns="0" tIns="0" rIns="0" bIns="0" rtlCol="0" anchor="ctr"/>
-          <a:lstStyle/>
-          <a:p>
-            <a:pPr algn="l" indent="0" marL="0">
-              <a:buNone/>
-            </a:pPr>
-            <a:r>
-              <a:rPr lang="ko-KR" altLang="en-US" sz="1100" spc="-28" kern="0" dirty="0">
-                <a:solidFill>
-                  <a:srgbClr val="1C2536"/>
-                </a:solidFill>
-                <a:latin typeface="Paperlogy 6 SemiBold" pitchFamily="34" charset="0"/>
-                <a:ea typeface="Paperlogy 6 SemiBold" pitchFamily="34" charset="-127"/>
-                <a:cs typeface="Paperlogy 6 SemiBold" pitchFamily="34" charset="-120"/>
-              </a:rPr>
-              <a:t>시연 영상 완성</a:t>
-            </a:r>
-            <a:endParaRPr lang="en-US" sz="1100" dirty="0"/>
-          </a:p>
-        </p:txBody>
-      </p:sp>
-      <p:sp>
-        <p:nvSpPr>
-          <p:cNvPr id="129" name="KEY MESSAGE"/>
-          <p:cNvSpPr txBox="1"/>
-          <p:nvPr/>
-        </p:nvSpPr>
-        <p:spPr>
-          <a:xfrm>
-            <a:off x="1308100" y="6058098"/>
-            <a:ext cx="1171825" cy="146050"/>
-          </a:xfrm>
-          <a:prstGeom prst="rect">
-            <a:avLst/>
-          </a:prstGeom>
-          <a:noFill/>
-          <a:ln/>
-        </p:spPr>
-        <p:txBody>
-          <a:bodyPr wrap="none" lIns="0" tIns="0" rIns="0" bIns="0" rtlCol="0" anchor="ctr"/>
-          <a:lstStyle/>
-          <a:p>
-            <a:pPr algn="l" indent="0" marL="0">
-              <a:buNone/>
-            </a:pPr>
-            <a:r>
-              <a:rPr lang="ko-KR" altLang="en-US" sz="950" spc="152" kern="0" dirty="0">
-                <a:solidFill>
-                  <a:srgbClr val="8FD3F5"/>
-                </a:solidFill>
-                <a:latin typeface="Paperlogy 7 Bold" pitchFamily="34" charset="0"/>
-                <a:ea typeface="Paperlogy 7 Bold" pitchFamily="34" charset="-127"/>
-                <a:cs typeface="Paperlogy 7 Bold" pitchFamily="34" charset="-120"/>
-              </a:rPr>
-              <a:t>KEY MESSAGE</a:t>
-            </a:r>
-            <a:endParaRPr lang="en-US" sz="950" dirty="0"/>
-          </a:p>
-        </p:txBody>
-      </p:sp>
-      <p:sp>
-        <p:nvSpPr>
-          <p:cNvPr id="130" name="서로 다른 사람을 하나의 공동 목표로 연결합니다"/>
-          <p:cNvSpPr txBox="1"/>
-          <p:nvPr/>
-        </p:nvSpPr>
-        <p:spPr>
-          <a:xfrm>
-            <a:off x="2591395" y="6005314"/>
-            <a:ext cx="4151660" cy="254000"/>
-          </a:xfrm>
-          <a:prstGeom prst="rect">
-            <a:avLst/>
-          </a:prstGeom>
-          <a:noFill/>
-          <a:ln/>
-        </p:spPr>
-        <p:txBody>
-          <a:bodyPr wrap="none" lIns="0" tIns="0" rIns="0" bIns="0" rtlCol="0" anchor="ctr"/>
-          <a:lstStyle/>
-          <a:p>
-            <a:pPr algn="l" indent="0" marL="0">
-              <a:buNone/>
-            </a:pPr>
-            <a:r>
-              <a:rPr lang="ko-KR" altLang="en-US" sz="1700" spc="-51" kern="0" dirty="0">
-                <a:solidFill>
-                  <a:srgbClr val="FFFFFF"/>
-                </a:solidFill>
-                <a:latin typeface="Paperlogy 7 Bold" pitchFamily="34" charset="0"/>
-                <a:ea typeface="Paperlogy 7 Bold" pitchFamily="34" charset="-127"/>
-                <a:cs typeface="Paperlogy 7 Bold" pitchFamily="34" charset="-120"/>
-              </a:rPr>
-              <a:t>서로 다른 사람을 </a:t>
-            </a:r>
-            <a:pPr algn="l" indent="0" marL="0">
-              <a:buNone/>
-            </a:pPr>
-            <a:r>
-              <a:rPr lang="ko-KR" altLang="en-US" sz="1700" spc="-51" kern="0" dirty="0">
-                <a:solidFill>
-                  <a:srgbClr val="FDBB30"/>
-                </a:solidFill>
-                <a:latin typeface="Paperlogy 7 Bold" pitchFamily="34" charset="0"/>
-                <a:ea typeface="Paperlogy 7 Bold" pitchFamily="34" charset="-127"/>
-                <a:cs typeface="Paperlogy 7 Bold" pitchFamily="34" charset="-120"/>
-              </a:rPr>
-              <a:t>하나의 공동 목표</a:t>
-            </a:r>
-            <a:pPr algn="l" indent="0" marL="0">
-              <a:buNone/>
-            </a:pPr>
-            <a:r>
-              <a:rPr lang="ko-KR" altLang="en-US" sz="1700" spc="-51" kern="0" dirty="0">
-                <a:solidFill>
-                  <a:srgbClr val="FFFFFF"/>
-                </a:solidFill>
-                <a:latin typeface="Paperlogy 7 Bold" pitchFamily="34" charset="0"/>
-                <a:ea typeface="Paperlogy 7 Bold" pitchFamily="34" charset="-127"/>
-                <a:cs typeface="Paperlogy 7 Bold" pitchFamily="34" charset="-120"/>
-              </a:rPr>
-              <a:t>로 연결합니다</a:t>
-            </a:r>
-            <a:endParaRPr lang="en-US" sz="1700" dirty="0"/>
-          </a:p>
-        </p:txBody>
-      </p:sp>
-      <p:sp>
-        <p:nvSpPr>
-          <p:cNvPr id="131" name="2026년 하반기 신입사원 공개채용"/>
-          <p:cNvSpPr txBox="1"/>
-          <p:nvPr/>
-        </p:nvSpPr>
-        <p:spPr>
-          <a:xfrm>
-            <a:off x="609600" y="6425605"/>
-            <a:ext cx="1659507" cy="139700"/>
-          </a:xfrm>
-          <a:prstGeom prst="rect">
-            <a:avLst/>
-          </a:prstGeom>
-          <a:noFill/>
-          <a:ln/>
-        </p:spPr>
-        <p:txBody>
-          <a:bodyPr wrap="none" lIns="0" tIns="0" rIns="0" bIns="0" rtlCol="0" anchor="ctr"/>
-          <a:lstStyle/>
-          <a:p>
-            <a:pPr algn="l" indent="0" marL="0">
-              <a:buNone/>
-            </a:pPr>
-            <a:r>
-              <a:rPr lang="ko-KR" altLang="en-US" sz="900" spc="-9" kern="0" dirty="0">
-                <a:solidFill>
-                  <a:srgbClr val="8691A5"/>
-                </a:solidFill>
-                <a:latin typeface="Paperlogy 5 Medium" pitchFamily="34" charset="0"/>
-                <a:ea typeface="Paperlogy 5 Medium" pitchFamily="34" charset="-127"/>
-                <a:cs typeface="Paperlogy 5 Medium" pitchFamily="34" charset="-120"/>
-              </a:rPr>
-              <a:t>2026년 하반기 신입사원 공개채용</a:t>
-            </a:r>
-            <a:endParaRPr lang="en-US" sz="900" dirty="0"/>
-          </a:p>
-        </p:txBody>
-      </p:sp>
-      <p:sp>
-        <p:nvSpPr>
-          <p:cNvPr id="132" name="01 / 03"/>
+          <p:cNvPr id="81" name="01 / 03"/>
           <p:cNvSpPr txBox="1"/>
           <p:nvPr/>
         </p:nvSpPr>

--- a/hec-pt/pptx/landscape.pptx
+++ b/hec-pt/pptx/landscape.pptx
@@ -1210,7 +1210,7 @@
         <p:spPr>
           <a:xfrm>
             <a:off x="762000" y="2086124"/>
-            <a:ext cx="2466479" cy="243780"/>
+            <a:ext cx="2639120" cy="243780"/>
           </a:xfrm>
           <a:prstGeom prst="rect">
             <a:avLst/>
@@ -1299,8 +1299,8 @@
         </p:blipFill>
         <p:spPr>
           <a:xfrm>
-            <a:off x="897467" y="2906514"/>
-            <a:ext cx="2853267" cy="965200"/>
+            <a:off x="768350" y="2972131"/>
+            <a:ext cx="3111500" cy="861483"/>
           </a:xfrm>
           <a:prstGeom prst="rect">
             <a:avLst/>
@@ -1309,14 +1309,14 @@
       </p:pic>
       <p:sp>
         <p:nvSpPr>
-          <p:cNvPr id="14" name="p1-at p1-op"/>
-          <p:cNvSpPr/>
-          <p:nvPr/>
-        </p:nvSpPr>
-        <p:spPr>
-          <a:xfrm>
-            <a:off x="901948" y="2798564"/>
-            <a:ext cx="710704" cy="317500"/>
+          <p:cNvPr id="14" name="p1-at p1-tag"/>
+          <p:cNvSpPr/>
+          <p:nvPr/>
+        </p:nvSpPr>
+        <p:spPr>
+          <a:xfrm>
+            <a:off x="1453704" y="2576314"/>
+            <a:ext cx="1740793" cy="215900"/>
           </a:xfrm>
           <a:prstGeom prst="roundRect">
             <a:avLst>
@@ -1324,73 +1324,14 @@
             </a:avLst>
           </a:prstGeom>
           <a:solidFill>
-            <a:srgbClr val="FFFFFF"/>
-          </a:solidFill>
-          <a:ln w="12700">
-            <a:solidFill>
-              <a:srgbClr val="C3CEDD"/>
-            </a:solidFill>
-            <a:prstDash val="solid"/>
-          </a:ln>
-        </p:spPr>
-      </p:sp>
-      <p:sp>
-        <p:nvSpPr>
-          <p:cNvPr id="15" name="p1-at p1-op"/>
-          <p:cNvSpPr/>
-          <p:nvPr/>
-        </p:nvSpPr>
-        <p:spPr>
-          <a:xfrm>
-            <a:off x="2889250" y="2798564"/>
-            <a:ext cx="1003300" cy="317500"/>
-          </a:xfrm>
-          <a:prstGeom prst="roundRect">
-            <a:avLst>
-              <a:gd name="adj" fmla="val 50000"/>
-            </a:avLst>
-          </a:prstGeom>
-          <a:solidFill>
-            <a:srgbClr val="FFFFFF"/>
-          </a:solidFill>
-          <a:ln w="12700">
-            <a:solidFill>
-              <a:srgbClr val="C3CEDD"/>
-            </a:solidFill>
-            <a:prstDash val="solid"/>
-          </a:ln>
-        </p:spPr>
-      </p:sp>
-      <p:sp>
-        <p:nvSpPr>
-          <p:cNvPr id="16" name="p1-at p1-crit"/>
-          <p:cNvSpPr/>
-          <p:nvPr/>
-        </p:nvSpPr>
-        <p:spPr>
-          <a:xfrm>
-            <a:off x="1741636" y="3865364"/>
-            <a:ext cx="1164927" cy="304800"/>
-          </a:xfrm>
-          <a:prstGeom prst="roundRect">
-            <a:avLst>
-              <a:gd name="adj" fmla="val 50000"/>
-            </a:avLst>
-          </a:prstGeom>
-          <a:solidFill>
-            <a:srgbClr val="FFFFFF"/>
-          </a:solidFill>
-          <a:ln w="12700">
-            <a:solidFill>
-              <a:srgbClr val="004B8D"/>
-            </a:solidFill>
-            <a:prstDash val="solid"/>
-          </a:ln>
+            <a:srgbClr val="D8E0EB"/>
+          </a:solidFill>
+          <a:ln/>
         </p:spPr>
       </p:sp>
       <p:pic>
         <p:nvPicPr>
-          <p:cNvPr id="17" name="p1-down" descr="p1-down">    </p:cNvPr>
+          <p:cNvPr id="15" name="svg" descr="svg">    </p:cNvPr>
           <p:cNvPicPr>
             <a:picLocks noChangeAspect="1"/>
           </p:cNvPicPr>
@@ -1404,8 +1345,8 @@
         </p:blipFill>
         <p:spPr>
           <a:xfrm>
-            <a:off x="2260600" y="4183922"/>
-            <a:ext cx="127000" cy="190500"/>
+            <a:off x="1534137" y="2629231"/>
+            <a:ext cx="116417" cy="114300"/>
           </a:xfrm>
           <a:prstGeom prst="rect">
             <a:avLst/>
@@ -1414,93 +1355,153 @@
       </p:pic>
       <p:sp>
         <p:nvSpPr>
-          <p:cNvPr id="18" name="p1-topic"/>
-          <p:cNvSpPr/>
-          <p:nvPr/>
-        </p:nvSpPr>
-        <p:spPr>
-          <a:xfrm>
-            <a:off x="762000" y="4386064"/>
-            <a:ext cx="3124200" cy="1174750"/>
+          <p:cNvPr id="16" name="p1-op"/>
+          <p:cNvSpPr/>
+          <p:nvPr/>
+        </p:nvSpPr>
+        <p:spPr>
+          <a:xfrm>
+            <a:off x="971550" y="2868414"/>
+            <a:ext cx="1104900" cy="330200"/>
           </a:xfrm>
           <a:prstGeom prst="roundRect">
             <a:avLst>
-              <a:gd name="adj" fmla="val 9730"/>
+              <a:gd name="adj" fmla="val 50000"/>
             </a:avLst>
           </a:prstGeom>
           <a:solidFill>
-            <a:srgbClr val="0B2147"/>
-          </a:solidFill>
-          <a:ln/>
-        </p:spPr>
-      </p:sp>
-      <p:sp>
-        <p:nvSpPr>
-          <p:cNvPr id="19" name="p1-blk p1-b2"/>
-          <p:cNvSpPr/>
-          <p:nvPr/>
-        </p:nvSpPr>
-        <p:spPr>
-          <a:xfrm>
-            <a:off x="4254500" y="2436614"/>
-            <a:ext cx="4191000" cy="3263900"/>
+            <a:srgbClr val="FFFFFF"/>
+          </a:solidFill>
+          <a:ln w="12700">
+            <a:solidFill>
+              <a:srgbClr val="C3CEDD"/>
+            </a:solidFill>
+            <a:prstDash val="solid"/>
+          </a:ln>
+        </p:spPr>
+      </p:sp>
+      <p:sp>
+        <p:nvSpPr>
+          <p:cNvPr id="17" name="i"/>
+          <p:cNvSpPr/>
+          <p:nvPr/>
+        </p:nvSpPr>
+        <p:spPr>
+          <a:xfrm>
+            <a:off x="1241127" y="2989064"/>
+            <a:ext cx="88900" cy="88900"/>
+          </a:xfrm>
+          <a:prstGeom prst="ellipse">
+            <a:avLst/>
+          </a:prstGeom>
+          <a:solidFill>
+            <a:srgbClr val="00A94F"/>
+          </a:solidFill>
+          <a:ln/>
+        </p:spPr>
+      </p:sp>
+      <p:sp>
+        <p:nvSpPr>
+          <p:cNvPr id="18" name="p1-op"/>
+          <p:cNvSpPr/>
+          <p:nvPr/>
+        </p:nvSpPr>
+        <p:spPr>
+          <a:xfrm>
+            <a:off x="2571750" y="2868414"/>
+            <a:ext cx="1104900" cy="330200"/>
           </a:xfrm>
           <a:prstGeom prst="roundRect">
             <a:avLst>
-              <a:gd name="adj" fmla="val 4280"/>
+              <a:gd name="adj" fmla="val 50000"/>
             </a:avLst>
           </a:prstGeom>
           <a:solidFill>
-            <a:srgbClr val="EEF4FC"/>
-          </a:solidFill>
-          <a:ln/>
-        </p:spPr>
-      </p:sp>
-      <p:sp>
-        <p:nvSpPr>
-          <p:cNvPr id="20" name="p1-lead"/>
-          <p:cNvSpPr/>
-          <p:nvPr/>
-        </p:nvSpPr>
-        <p:spPr>
-          <a:xfrm>
-            <a:off x="5061148" y="2576314"/>
-            <a:ext cx="2577604" cy="863402"/>
+            <a:srgbClr val="FFFFFF"/>
+          </a:solidFill>
+          <a:ln w="12700">
+            <a:solidFill>
+              <a:srgbClr val="C3CEDD"/>
+            </a:solidFill>
+            <a:prstDash val="solid"/>
+          </a:ln>
+        </p:spPr>
+      </p:sp>
+      <p:sp>
+        <p:nvSpPr>
+          <p:cNvPr id="19" name="i"/>
+          <p:cNvSpPr/>
+          <p:nvPr/>
+        </p:nvSpPr>
+        <p:spPr>
+          <a:xfrm>
+            <a:off x="2682776" y="2989064"/>
+            <a:ext cx="88900" cy="88900"/>
+          </a:xfrm>
+          <a:prstGeom prst="ellipse">
+            <a:avLst/>
+          </a:prstGeom>
+          <a:solidFill>
+            <a:srgbClr val="00A94F"/>
+          </a:solidFill>
+          <a:ln/>
+        </p:spPr>
+      </p:sp>
+      <p:sp>
+        <p:nvSpPr>
+          <p:cNvPr id="20" name="p1-vs"/>
+          <p:cNvSpPr/>
+          <p:nvPr/>
+        </p:nvSpPr>
+        <p:spPr>
+          <a:xfrm>
+            <a:off x="2155825" y="2865239"/>
+            <a:ext cx="336550" cy="336550"/>
+          </a:xfrm>
+          <a:prstGeom prst="ellipse">
+            <a:avLst/>
+          </a:prstGeom>
+          <a:solidFill>
+            <a:srgbClr val="0B2147"/>
+          </a:solidFill>
+          <a:ln w="19050">
+            <a:solidFill>
+              <a:srgbClr val="FFFFFF"/>
+            </a:solidFill>
+            <a:prstDash val="solid"/>
+          </a:ln>
+        </p:spPr>
+      </p:sp>
+      <p:sp>
+        <p:nvSpPr>
+          <p:cNvPr id="21" name="p1-at p1-crit"/>
+          <p:cNvSpPr/>
+          <p:nvPr/>
+        </p:nvSpPr>
+        <p:spPr>
+          <a:xfrm>
+            <a:off x="1741636" y="3827264"/>
+            <a:ext cx="1164927" cy="304800"/>
           </a:xfrm>
           <a:prstGeom prst="roundRect">
             <a:avLst>
-              <a:gd name="adj" fmla="val 13238"/>
+              <a:gd name="adj" fmla="val 50000"/>
             </a:avLst>
           </a:prstGeom>
           <a:solidFill>
-            <a:srgbClr val="0B2147"/>
-          </a:solidFill>
-          <a:ln/>
-        </p:spPr>
-      </p:sp>
-      <p:sp>
-        <p:nvSpPr>
-          <p:cNvPr id="21" name="p1-av"/>
-          <p:cNvSpPr/>
-          <p:nvPr/>
-        </p:nvSpPr>
-        <p:spPr>
-          <a:xfrm>
-            <a:off x="6022578" y="2745184"/>
-            <a:ext cx="88900" cy="88900"/>
-          </a:xfrm>
-          <a:prstGeom prst="ellipse">
-            <a:avLst/>
-          </a:prstGeom>
-          <a:solidFill>
-            <a:srgbClr val="00A94F"/>
-          </a:solidFill>
-          <a:ln/>
+            <a:srgbClr val="FFFFFF"/>
+          </a:solidFill>
+          <a:ln w="12700">
+            <a:solidFill>
+              <a:srgbClr val="004B8D"/>
+            </a:solidFill>
+            <a:prstDash val="solid"/>
+          </a:ln>
         </p:spPr>
       </p:sp>
       <p:pic>
         <p:nvPicPr>
-          <p:cNvPr id="22" name="p1-tree" descr="p1-tree">    </p:cNvPr>
+          <p:cNvPr id="22" name="p1-down" descr="p1-down">    </p:cNvPr>
           <p:cNvPicPr>
             <a:picLocks noChangeAspect="1"/>
           </p:cNvPicPr>
@@ -1514,8 +1515,8 @@
         </p:blipFill>
         <p:spPr>
           <a:xfrm>
-            <a:off x="4997450" y="3431249"/>
-            <a:ext cx="2705100" cy="541867"/>
+            <a:off x="2260600" y="4164872"/>
+            <a:ext cx="127000" cy="190500"/>
           </a:xfrm>
           <a:prstGeom prst="rect">
             <a:avLst/>
@@ -1524,134 +1525,79 @@
       </p:pic>
       <p:sp>
         <p:nvSpPr>
-          <p:cNvPr id="23" name="p1-mem"/>
-          <p:cNvSpPr/>
-          <p:nvPr/>
-        </p:nvSpPr>
-        <p:spPr>
-          <a:xfrm>
-            <a:off x="4387850" y="3966766"/>
-            <a:ext cx="1240334" cy="1030982"/>
+          <p:cNvPr id="23" name="p1-topic"/>
+          <p:cNvSpPr/>
+          <p:nvPr/>
+        </p:nvSpPr>
+        <p:spPr>
+          <a:xfrm>
+            <a:off x="762000" y="4386064"/>
+            <a:ext cx="3124200" cy="1174750"/>
           </a:xfrm>
           <a:prstGeom prst="roundRect">
             <a:avLst>
-              <a:gd name="adj" fmla="val 10471"/>
+              <a:gd name="adj" fmla="val 9730"/>
             </a:avLst>
           </a:prstGeom>
           <a:solidFill>
-            <a:srgbClr val="FFFFFF"/>
-          </a:solidFill>
-          <a:ln w="12700">
-            <a:solidFill>
-              <a:srgbClr val="D8E0EB"/>
-            </a:solidFill>
-            <a:prstDash val="solid"/>
-          </a:ln>
-        </p:spPr>
-      </p:sp>
-      <p:sp>
-        <p:nvSpPr>
-          <p:cNvPr id="24" name="p1-av"/>
-          <p:cNvSpPr/>
-          <p:nvPr/>
-        </p:nvSpPr>
-        <p:spPr>
-          <a:xfrm>
-            <a:off x="4727873" y="4116586"/>
-            <a:ext cx="88900" cy="88900"/>
-          </a:xfrm>
-          <a:prstGeom prst="ellipse">
-            <a:avLst/>
-          </a:prstGeom>
-          <a:solidFill>
-            <a:srgbClr val="00A94F"/>
-          </a:solidFill>
-          <a:ln/>
-        </p:spPr>
-      </p:sp>
-      <p:sp>
-        <p:nvSpPr>
-          <p:cNvPr id="25" name="p1-mem"/>
-          <p:cNvSpPr/>
-          <p:nvPr/>
-        </p:nvSpPr>
-        <p:spPr>
-          <a:xfrm>
-            <a:off x="5729784" y="3966766"/>
-            <a:ext cx="1240334" cy="1030982"/>
+            <a:srgbClr val="0B2147"/>
+          </a:solidFill>
+          <a:ln/>
+        </p:spPr>
+      </p:sp>
+      <p:sp>
+        <p:nvSpPr>
+          <p:cNvPr id="24" name="p1-blk p1-b2"/>
+          <p:cNvSpPr/>
+          <p:nvPr/>
+        </p:nvSpPr>
+        <p:spPr>
+          <a:xfrm>
+            <a:off x="4254500" y="2436614"/>
+            <a:ext cx="4191000" cy="3263900"/>
           </a:xfrm>
           <a:prstGeom prst="roundRect">
             <a:avLst>
-              <a:gd name="adj" fmla="val 10471"/>
+              <a:gd name="adj" fmla="val 4280"/>
             </a:avLst>
           </a:prstGeom>
           <a:solidFill>
-            <a:srgbClr val="FFFFFF"/>
-          </a:solidFill>
-          <a:ln w="12700">
-            <a:solidFill>
-              <a:srgbClr val="D8E0EB"/>
-            </a:solidFill>
-            <a:prstDash val="solid"/>
-          </a:ln>
-        </p:spPr>
-      </p:sp>
-      <p:sp>
-        <p:nvSpPr>
-          <p:cNvPr id="26" name="p1-av"/>
-          <p:cNvSpPr/>
-          <p:nvPr/>
-        </p:nvSpPr>
-        <p:spPr>
-          <a:xfrm>
-            <a:off x="6069905" y="4116586"/>
-            <a:ext cx="88900" cy="88900"/>
-          </a:xfrm>
-          <a:prstGeom prst="ellipse">
-            <a:avLst/>
-          </a:prstGeom>
-          <a:solidFill>
-            <a:srgbClr val="00A94F"/>
-          </a:solidFill>
-          <a:ln/>
-        </p:spPr>
-      </p:sp>
-      <p:sp>
-        <p:nvSpPr>
-          <p:cNvPr id="27" name="p1-mem"/>
-          <p:cNvSpPr/>
-          <p:nvPr/>
-        </p:nvSpPr>
-        <p:spPr>
-          <a:xfrm>
-            <a:off x="7071717" y="3966766"/>
-            <a:ext cx="1240334" cy="1030982"/>
+            <a:srgbClr val="EEF4FC"/>
+          </a:solidFill>
+          <a:ln/>
+        </p:spPr>
+      </p:sp>
+      <p:sp>
+        <p:nvSpPr>
+          <p:cNvPr id="25" name="p1-lead"/>
+          <p:cNvSpPr/>
+          <p:nvPr/>
+        </p:nvSpPr>
+        <p:spPr>
+          <a:xfrm>
+            <a:off x="5061148" y="2576314"/>
+            <a:ext cx="2577604" cy="863402"/>
           </a:xfrm>
           <a:prstGeom prst="roundRect">
             <a:avLst>
-              <a:gd name="adj" fmla="val 10471"/>
+              <a:gd name="adj" fmla="val 13238"/>
             </a:avLst>
           </a:prstGeom>
           <a:solidFill>
-            <a:srgbClr val="FFFFFF"/>
-          </a:solidFill>
-          <a:ln w="12700">
-            <a:solidFill>
-              <a:srgbClr val="D8E0EB"/>
-            </a:solidFill>
-            <a:prstDash val="solid"/>
-          </a:ln>
-        </p:spPr>
-      </p:sp>
-      <p:sp>
-        <p:nvSpPr>
-          <p:cNvPr id="28" name="p1-av"/>
-          <p:cNvSpPr/>
-          <p:nvPr/>
-        </p:nvSpPr>
-        <p:spPr>
-          <a:xfrm>
-            <a:off x="7414419" y="4116586"/>
+            <a:srgbClr val="0B2147"/>
+          </a:solidFill>
+          <a:ln/>
+        </p:spPr>
+      </p:sp>
+      <p:sp>
+        <p:nvSpPr>
+          <p:cNvPr id="26" name="p1-av"/>
+          <p:cNvSpPr/>
+          <p:nvPr/>
+        </p:nvSpPr>
+        <p:spPr>
+          <a:xfrm>
+            <a:off x="6022578" y="2745184"/>
             <a:ext cx="88900" cy="88900"/>
           </a:xfrm>
           <a:prstGeom prst="ellipse">
@@ -1665,7 +1611,7 @@
       </p:sp>
       <p:pic>
         <p:nvPicPr>
-          <p:cNvPr id="29" name="svg" descr="svg">    </p:cNvPr>
+          <p:cNvPr id="27" name="p1-tree" descr="p1-tree">    </p:cNvPr>
           <p:cNvPicPr>
             <a:picLocks noChangeAspect="1"/>
           </p:cNvPicPr>
@@ -1679,8 +1625,8 @@
         </p:blipFill>
         <p:spPr>
           <a:xfrm>
-            <a:off x="4997450" y="5004098"/>
-            <a:ext cx="2705100" cy="226483"/>
+            <a:off x="4997450" y="3431249"/>
+            <a:ext cx="2705100" cy="541867"/>
           </a:xfrm>
           <a:prstGeom prst="rect">
             <a:avLst/>
@@ -1689,29 +1635,148 @@
       </p:pic>
       <p:sp>
         <p:nvSpPr>
-          <p:cNvPr id="30" name="p1-share"/>
-          <p:cNvSpPr/>
-          <p:nvPr/>
-        </p:nvSpPr>
-        <p:spPr>
-          <a:xfrm>
-            <a:off x="4381500" y="5230614"/>
-            <a:ext cx="3937000" cy="330200"/>
+          <p:cNvPr id="28" name="p1-mem"/>
+          <p:cNvSpPr/>
+          <p:nvPr/>
+        </p:nvSpPr>
+        <p:spPr>
+          <a:xfrm>
+            <a:off x="4387850" y="3966766"/>
+            <a:ext cx="1240334" cy="1030982"/>
           </a:xfrm>
           <a:prstGeom prst="roundRect">
             <a:avLst>
-              <a:gd name="adj" fmla="val 50000"/>
+              <a:gd name="adj" fmla="val 10471"/>
             </a:avLst>
           </a:prstGeom>
           <a:solidFill>
-            <a:srgbClr val="E5F6EC"/>
+            <a:srgbClr val="FFFFFF"/>
+          </a:solidFill>
+          <a:ln w="12700">
+            <a:solidFill>
+              <a:srgbClr val="D8E0EB"/>
+            </a:solidFill>
+            <a:prstDash val="solid"/>
+          </a:ln>
+        </p:spPr>
+      </p:sp>
+      <p:sp>
+        <p:nvSpPr>
+          <p:cNvPr id="29" name="p1-av"/>
+          <p:cNvSpPr/>
+          <p:nvPr/>
+        </p:nvSpPr>
+        <p:spPr>
+          <a:xfrm>
+            <a:off x="4727873" y="4116586"/>
+            <a:ext cx="88900" cy="88900"/>
+          </a:xfrm>
+          <a:prstGeom prst="ellipse">
+            <a:avLst/>
+          </a:prstGeom>
+          <a:solidFill>
+            <a:srgbClr val="00A94F"/>
+          </a:solidFill>
+          <a:ln/>
+        </p:spPr>
+      </p:sp>
+      <p:sp>
+        <p:nvSpPr>
+          <p:cNvPr id="30" name="p1-mem"/>
+          <p:cNvSpPr/>
+          <p:nvPr/>
+        </p:nvSpPr>
+        <p:spPr>
+          <a:xfrm>
+            <a:off x="5729784" y="3966766"/>
+            <a:ext cx="1240334" cy="1030982"/>
+          </a:xfrm>
+          <a:prstGeom prst="roundRect">
+            <a:avLst>
+              <a:gd name="adj" fmla="val 10471"/>
+            </a:avLst>
+          </a:prstGeom>
+          <a:solidFill>
+            <a:srgbClr val="FFFFFF"/>
+          </a:solidFill>
+          <a:ln w="12700">
+            <a:solidFill>
+              <a:srgbClr val="D8E0EB"/>
+            </a:solidFill>
+            <a:prstDash val="solid"/>
+          </a:ln>
+        </p:spPr>
+      </p:sp>
+      <p:sp>
+        <p:nvSpPr>
+          <p:cNvPr id="31" name="p1-av"/>
+          <p:cNvSpPr/>
+          <p:nvPr/>
+        </p:nvSpPr>
+        <p:spPr>
+          <a:xfrm>
+            <a:off x="6069905" y="4116586"/>
+            <a:ext cx="88900" cy="88900"/>
+          </a:xfrm>
+          <a:prstGeom prst="ellipse">
+            <a:avLst/>
+          </a:prstGeom>
+          <a:solidFill>
+            <a:srgbClr val="00A94F"/>
+          </a:solidFill>
+          <a:ln/>
+        </p:spPr>
+      </p:sp>
+      <p:sp>
+        <p:nvSpPr>
+          <p:cNvPr id="32" name="p1-mem"/>
+          <p:cNvSpPr/>
+          <p:nvPr/>
+        </p:nvSpPr>
+        <p:spPr>
+          <a:xfrm>
+            <a:off x="7071717" y="3966766"/>
+            <a:ext cx="1240334" cy="1030982"/>
+          </a:xfrm>
+          <a:prstGeom prst="roundRect">
+            <a:avLst>
+              <a:gd name="adj" fmla="val 10471"/>
+            </a:avLst>
+          </a:prstGeom>
+          <a:solidFill>
+            <a:srgbClr val="FFFFFF"/>
+          </a:solidFill>
+          <a:ln w="12700">
+            <a:solidFill>
+              <a:srgbClr val="D8E0EB"/>
+            </a:solidFill>
+            <a:prstDash val="solid"/>
+          </a:ln>
+        </p:spPr>
+      </p:sp>
+      <p:sp>
+        <p:nvSpPr>
+          <p:cNvPr id="33" name="p1-av"/>
+          <p:cNvSpPr/>
+          <p:nvPr/>
+        </p:nvSpPr>
+        <p:spPr>
+          <a:xfrm>
+            <a:off x="7414419" y="4116586"/>
+            <a:ext cx="88900" cy="88900"/>
+          </a:xfrm>
+          <a:prstGeom prst="ellipse">
+            <a:avLst/>
+          </a:prstGeom>
+          <a:solidFill>
+            <a:srgbClr val="00A94F"/>
           </a:solidFill>
           <a:ln/>
         </p:spPr>
       </p:sp>
       <p:pic>
         <p:nvPicPr>
-          <p:cNvPr id="31" name="svg" descr="svg">    </p:cNvPr>
+          <p:cNvPr id="34" name="svg" descr="svg">    </p:cNvPr>
           <p:cNvPicPr>
             <a:picLocks noChangeAspect="1"/>
           </p:cNvPicPr>
@@ -1725,8 +1790,8 @@
         </p:blipFill>
         <p:spPr>
           <a:xfrm>
-            <a:off x="5325170" y="5330097"/>
-            <a:ext cx="118533" cy="135467"/>
+            <a:off x="4997450" y="5004098"/>
+            <a:ext cx="2705100" cy="226483"/>
           </a:xfrm>
           <a:prstGeom prst="rect">
             <a:avLst/>
@@ -1735,29 +1800,29 @@
       </p:pic>
       <p:sp>
         <p:nvSpPr>
-          <p:cNvPr id="32" name="p1-blk p1-b3"/>
-          <p:cNvSpPr/>
-          <p:nvPr/>
-        </p:nvSpPr>
-        <p:spPr>
-          <a:xfrm>
-            <a:off x="8661400" y="2436614"/>
-            <a:ext cx="2921000" cy="3263900"/>
+          <p:cNvPr id="35" name="p1-share"/>
+          <p:cNvSpPr/>
+          <p:nvPr/>
+        </p:nvSpPr>
+        <p:spPr>
+          <a:xfrm>
+            <a:off x="4381500" y="5230614"/>
+            <a:ext cx="3937000" cy="330200"/>
           </a:xfrm>
           <a:prstGeom prst="roundRect">
             <a:avLst>
-              <a:gd name="adj" fmla="val 4783"/>
+              <a:gd name="adj" fmla="val 50000"/>
             </a:avLst>
           </a:prstGeom>
           <a:solidFill>
-            <a:srgbClr val="EEF4FC"/>
+            <a:srgbClr val="E5F6EC"/>
           </a:solidFill>
           <a:ln/>
         </p:spPr>
       </p:sp>
       <p:pic>
         <p:nvPicPr>
-          <p:cNvPr id="33" name="svg" descr="svg">    </p:cNvPr>
+          <p:cNvPr id="36" name="svg" descr="svg">    </p:cNvPr>
           <p:cNvPicPr>
             <a:picLocks noChangeAspect="1"/>
           </p:cNvPicPr>
@@ -1771,6 +1836,52 @@
         </p:blipFill>
         <p:spPr>
           <a:xfrm>
+            <a:off x="5325170" y="5330097"/>
+            <a:ext cx="118533" cy="135467"/>
+          </a:xfrm>
+          <a:prstGeom prst="rect">
+            <a:avLst/>
+          </a:prstGeom>
+        </p:spPr>
+      </p:pic>
+      <p:sp>
+        <p:nvSpPr>
+          <p:cNvPr id="37" name="p1-blk p1-b3"/>
+          <p:cNvSpPr/>
+          <p:nvPr/>
+        </p:nvSpPr>
+        <p:spPr>
+          <a:xfrm>
+            <a:off x="8661400" y="2436614"/>
+            <a:ext cx="2921000" cy="3263900"/>
+          </a:xfrm>
+          <a:prstGeom prst="roundRect">
+            <a:avLst>
+              <a:gd name="adj" fmla="val 4783"/>
+            </a:avLst>
+          </a:prstGeom>
+          <a:solidFill>
+            <a:srgbClr val="EEF4FC"/>
+          </a:solidFill>
+          <a:ln/>
+        </p:spPr>
+      </p:sp>
+      <p:pic>
+        <p:nvPicPr>
+          <p:cNvPr id="38" name="svg" descr="svg">    </p:cNvPr>
+          <p:cNvPicPr>
+            <a:picLocks noChangeAspect="1"/>
+          </p:cNvPicPr>
+          <p:nvPr/>
+        </p:nvPicPr>
+        <p:blipFill>
+          <a:blip r:embed="rId9"/>
+          <a:stretch>
+            <a:fillRect/>
+          </a:stretch>
+        </p:blipFill>
+        <p:spPr>
+          <a:xfrm>
             <a:off x="9359900" y="2591131"/>
             <a:ext cx="1524000" cy="2717800"/>
           </a:xfrm>
@@ -1781,7 +1892,7 @@
       </p:pic>
       <p:sp>
         <p:nvSpPr>
-          <p:cNvPr id="34" name="key"/>
+          <p:cNvPr id="39" name="key"/>
           <p:cNvSpPr/>
           <p:nvPr/>
         </p:nvSpPr>
@@ -1803,7 +1914,7 @@
       </p:sp>
       <p:sp>
         <p:nvSpPr>
-          <p:cNvPr id="35" name="i"/>
+          <p:cNvPr id="40" name="i"/>
           <p:cNvSpPr/>
           <p:nvPr/>
         </p:nvSpPr>
@@ -1823,7 +1934,7 @@
       </p:sp>
       <p:sp>
         <p:nvSpPr>
-          <p:cNvPr id="36" name="b"/>
+          <p:cNvPr id="41" name="b"/>
           <p:cNvSpPr/>
           <p:nvPr/>
         </p:nvSpPr>
@@ -1843,7 +1954,7 @@
       </p:sp>
       <p:sp>
         <p:nvSpPr>
-          <p:cNvPr id="37" name="i"/>
+          <p:cNvPr id="42" name="i"/>
           <p:cNvSpPr/>
           <p:nvPr/>
         </p:nvSpPr>
@@ -1863,7 +1974,7 @@
       </p:sp>
       <p:sp>
         <p:nvSpPr>
-          <p:cNvPr id="38" name="b"/>
+          <p:cNvPr id="43" name="b"/>
           <p:cNvSpPr/>
           <p:nvPr/>
         </p:nvSpPr>
@@ -1883,7 +1994,7 @@
       </p:sp>
       <p:sp>
         <p:nvSpPr>
-          <p:cNvPr id="39" name="i"/>
+          <p:cNvPr id="44" name="i"/>
           <p:cNvSpPr/>
           <p:nvPr/>
         </p:nvSpPr>
@@ -1903,7 +2014,7 @@
       </p:sp>
       <p:sp>
         <p:nvSpPr>
-          <p:cNvPr id="40" name="01"/>
+          <p:cNvPr id="45" name="01"/>
           <p:cNvSpPr txBox="1"/>
           <p:nvPr/>
         </p:nvSpPr>
@@ -1942,7 +2053,7 @@
       </p:sp>
       <p:sp>
         <p:nvSpPr>
-          <p:cNvPr id="41" name="PT 주제 1 · 가장 중요하게 생각하는 가치와 실천 경험"/>
+          <p:cNvPr id="46" name="PT 주제 1 · 가장 중요하게 생각하는 가치와 실천 경험"/>
           <p:cNvSpPr txBox="1"/>
           <p:nvPr/>
         </p:nvSpPr>
@@ -1981,7 +2092,7 @@
       </p:sp>
       <p:sp>
         <p:nvSpPr>
-          <p:cNvPr id="42" name="제가 가장 중요하게 생각하는 가치는"/>
+          <p:cNvPr id="47" name="제가 가장 중요하게 생각하는 가치는"/>
           <p:cNvSpPr txBox="1"/>
           <p:nvPr/>
         </p:nvSpPr>
@@ -2020,7 +2131,7 @@
       </p:sp>
       <p:sp>
         <p:nvSpPr>
-          <p:cNvPr id="43" name="공동의 목표를 공유하며 함께 성과를 만드는 협업입니다"/>
+          <p:cNvPr id="48" name="공동의 목표를 공유하며 함께 성과를 만드는 협업입니다"/>
           <p:cNvSpPr txBox="1"/>
           <p:nvPr/>
         </p:nvSpPr>
@@ -2101,7 +2212,7 @@
       </p:sp>
       <p:sp>
         <p:nvSpPr>
-          <p:cNvPr id="44" name="학생 BIM 경진대회 · 4인 팀 팀장"/>
+          <p:cNvPr id="49" name="학생 BIM 경진대회 · 4인 팀 팀장"/>
           <p:cNvSpPr txBox="1"/>
           <p:nvPr/>
         </p:nvSpPr>
@@ -2140,7 +2251,7 @@
       </p:sp>
       <p:sp>
         <p:nvSpPr>
-          <p:cNvPr id="45" name="01"/>
+          <p:cNvPr id="50" name="01"/>
           <p:cNvSpPr txBox="1"/>
           <p:nvPr/>
         </p:nvSpPr>
@@ -2179,14 +2290,14 @@
       </p:sp>
       <p:sp>
         <p:nvSpPr>
-          <p:cNvPr id="46" name="의견을 모아 주제를 정하다"/>
+          <p:cNvPr id="51" name="충돌을 조율해 주제를 정하다"/>
           <p:cNvSpPr txBox="1"/>
           <p:nvPr/>
         </p:nvSpPr>
         <p:spPr>
           <a:xfrm>
             <a:off x="1111052" y="2086124"/>
-            <a:ext cx="2136777" cy="234950"/>
+            <a:ext cx="2319776" cy="234950"/>
           </a:xfrm>
           <a:prstGeom prst="rect">
             <a:avLst/>
@@ -2210,7 +2321,7 @@
                 <a:ea typeface="Paperlogy 8 ExtraBold" pitchFamily="34" charset="-127"/>
                 <a:cs typeface="Paperlogy 8 ExtraBold" pitchFamily="34" charset="-120"/>
               </a:rPr>
-              <a:t>의견을 모아 주제를 정하다</a:t>
+              <a:t>충돌을 조율해 주제를 정하다</a:t>
             </a:r>
             <a:endParaRPr lang="en-US" sz="1600" dirty="0"/>
           </a:p>
@@ -2218,7 +2329,7 @@
       </p:sp>
       <p:sp>
         <p:nvSpPr>
-          <p:cNvPr id="47" name="02"/>
+          <p:cNvPr id="52" name="02"/>
           <p:cNvSpPr txBox="1"/>
           <p:nvPr/>
         </p:nvSpPr>
@@ -2257,7 +2368,7 @@
       </p:sp>
       <p:sp>
         <p:nvSpPr>
-          <p:cNvPr id="48" name="강점에 맞게 역할을 나누다"/>
+          <p:cNvPr id="53" name="강점에 맞게 역할을 나누다"/>
           <p:cNvSpPr txBox="1"/>
           <p:nvPr/>
         </p:nvSpPr>
@@ -2296,7 +2407,7 @@
       </p:sp>
       <p:sp>
         <p:nvSpPr>
-          <p:cNvPr id="49" name="03"/>
+          <p:cNvPr id="54" name="03"/>
           <p:cNvSpPr txBox="1"/>
           <p:nvPr/>
         </p:nvSpPr>
@@ -2335,7 +2446,7 @@
       </p:sp>
       <p:sp>
         <p:nvSpPr>
-          <p:cNvPr id="50" name="3주 만에 완성, 장려상"/>
+          <p:cNvPr id="55" name="3주 만에 완성, 장려상"/>
           <p:cNvSpPr txBox="1"/>
           <p:nvPr/>
         </p:nvSpPr>
@@ -2374,13 +2485,13 @@
       </p:sp>
       <p:sp>
         <p:nvSpPr>
-          <p:cNvPr id="51" name="마감 3주 전까지 주제 미확정"/>
-          <p:cNvSpPr txBox="1"/>
-          <p:nvPr/>
-        </p:nvSpPr>
-        <p:spPr>
-          <a:xfrm>
-            <a:off x="1631504" y="2582664"/>
+          <p:cNvPr id="56" name="마감 3주 전까지 주제 미확정"/>
+          <p:cNvSpPr txBox="1"/>
+          <p:nvPr/>
+        </p:nvSpPr>
+        <p:spPr>
+          <a:xfrm>
+            <a:off x="1707704" y="2604889"/>
             <a:ext cx="1468305" cy="152400"/>
           </a:xfrm>
           <a:prstGeom prst="rect">
@@ -2399,13 +2510,339 @@
             <a:r>
               <a:rPr lang="ko-KR" altLang="en-US" sz="1000" spc="-20" kern="0" dirty="0">
                 <a:solidFill>
-                  <a:srgbClr val="8691A5"/>
+                  <a:srgbClr val="1C2536"/>
+                </a:solidFill>
+                <a:latin typeface="Paperlogy 7 Bold" pitchFamily="34" charset="0"/>
+                <a:ea typeface="Paperlogy 7 Bold" pitchFamily="34" charset="-127"/>
+                <a:cs typeface="Paperlogy 7 Bold" pitchFamily="34" charset="-120"/>
+              </a:rPr>
+              <a:t>마감 3주 전까지 주제 미확정</a:t>
+            </a:r>
+            <a:endParaRPr lang="en-US" sz="1000" dirty="0"/>
+          </a:p>
+        </p:txBody>
+      </p:sp>
+      <p:sp>
+        <p:nvSpPr>
+          <p:cNvPr id="57" name="참신성"/>
+          <p:cNvSpPr txBox="1"/>
+          <p:nvPr/>
+        </p:nvSpPr>
+        <p:spPr>
+          <a:xfrm>
+            <a:off x="1380827" y="2932906"/>
+            <a:ext cx="476845" cy="190500"/>
+          </a:xfrm>
+          <a:prstGeom prst="rect">
+            <a:avLst/>
+          </a:prstGeom>
+          <a:noFill/>
+          <a:ln/>
+        </p:spPr>
+        <p:txBody>
+          <a:bodyPr wrap="none" lIns="0" tIns="0" rIns="0" bIns="0" rtlCol="0" anchor="ctr"/>
+          <a:lstStyle/>
+          <a:p>
+            <a:pPr algn="l" indent="0" marL="0">
+              <a:buNone/>
+            </a:pPr>
+            <a:r>
+              <a:rPr lang="ko-KR" altLang="en-US" sz="1300" spc="-26" kern="0" dirty="0">
+                <a:solidFill>
+                  <a:srgbClr val="0B2147"/>
+                </a:solidFill>
+                <a:latin typeface="Paperlogy 7 Bold" pitchFamily="34" charset="0"/>
+                <a:ea typeface="Paperlogy 7 Bold" pitchFamily="34" charset="-127"/>
+                <a:cs typeface="Paperlogy 7 Bold" pitchFamily="34" charset="-120"/>
+              </a:rPr>
+              <a:t>참신성</a:t>
+            </a:r>
+            <a:endParaRPr lang="en-US" sz="1300" dirty="0"/>
+          </a:p>
+        </p:txBody>
+      </p:sp>
+      <p:sp>
+        <p:nvSpPr>
+          <p:cNvPr id="58" name="구현 가능성"/>
+          <p:cNvSpPr txBox="1"/>
+          <p:nvPr/>
+        </p:nvSpPr>
+        <p:spPr>
+          <a:xfrm>
+            <a:off x="2822476" y="2932906"/>
+            <a:ext cx="793849" cy="190500"/>
+          </a:xfrm>
+          <a:prstGeom prst="rect">
+            <a:avLst/>
+          </a:prstGeom>
+          <a:noFill/>
+          <a:ln/>
+        </p:spPr>
+        <p:txBody>
+          <a:bodyPr wrap="none" lIns="0" tIns="0" rIns="0" bIns="0" rtlCol="0" anchor="ctr"/>
+          <a:lstStyle/>
+          <a:p>
+            <a:pPr algn="l" indent="0" marL="0">
+              <a:buNone/>
+            </a:pPr>
+            <a:r>
+              <a:rPr lang="ko-KR" altLang="en-US" sz="1300" spc="-26" kern="0" dirty="0">
+                <a:solidFill>
+                  <a:srgbClr val="0B2147"/>
+                </a:solidFill>
+                <a:latin typeface="Paperlogy 7 Bold" pitchFamily="34" charset="0"/>
+                <a:ea typeface="Paperlogy 7 Bold" pitchFamily="34" charset="-127"/>
+                <a:cs typeface="Paperlogy 7 Bold" pitchFamily="34" charset="-120"/>
+              </a:rPr>
+              <a:t>구현 가능성</a:t>
+            </a:r>
+            <a:endParaRPr lang="en-US" sz="1300" dirty="0"/>
+          </a:p>
+        </p:txBody>
+      </p:sp>
+      <p:sp>
+        <p:nvSpPr>
+          <p:cNvPr id="59" name="VS"/>
+          <p:cNvSpPr txBox="1"/>
+          <p:nvPr/>
+        </p:nvSpPr>
+        <p:spPr>
+          <a:xfrm>
+            <a:off x="2228751" y="2954139"/>
+            <a:ext cx="241498" cy="158750"/>
+          </a:xfrm>
+          <a:prstGeom prst="rect">
+            <a:avLst/>
+          </a:prstGeom>
+          <a:noFill/>
+          <a:ln/>
+        </p:spPr>
+        <p:txBody>
+          <a:bodyPr wrap="none" lIns="0" tIns="0" rIns="0" bIns="0" rtlCol="0" anchor="ctr"/>
+          <a:lstStyle/>
+          <a:p>
+            <a:pPr algn="l" indent="0" marL="0">
+              <a:buNone/>
+            </a:pPr>
+            <a:r>
+              <a:rPr lang="ko-KR" altLang="en-US" sz="1050" spc="21" kern="0" dirty="0">
+                <a:solidFill>
+                  <a:srgbClr val="FFFFFF"/>
+                </a:solidFill>
+                <a:latin typeface="Paperlogy 9 Black" pitchFamily="34" charset="0"/>
+                <a:ea typeface="Paperlogy 9 Black" pitchFamily="34" charset="-127"/>
+                <a:cs typeface="Paperlogy 9 Black" pitchFamily="34" charset="-120"/>
+              </a:rPr>
+              <a:t>VS</a:t>
+            </a:r>
+            <a:endParaRPr lang="en-US" sz="1050" dirty="0"/>
+          </a:p>
+        </p:txBody>
+      </p:sp>
+      <p:sp>
+        <p:nvSpPr>
+          <p:cNvPr id="60" name="경청 · 수상작 분석 · 교수님 조언"/>
+          <p:cNvSpPr txBox="1"/>
+          <p:nvPr/>
+        </p:nvSpPr>
+        <p:spPr>
+          <a:xfrm>
+            <a:off x="1402209" y="3306564"/>
+            <a:ext cx="1954409" cy="177800"/>
+          </a:xfrm>
+          <a:prstGeom prst="rect">
+            <a:avLst/>
+          </a:prstGeom>
+          <a:noFill/>
+          <a:ln/>
+        </p:spPr>
+        <p:txBody>
+          <a:bodyPr wrap="none" lIns="0" tIns="0" rIns="0" bIns="0" rtlCol="0" anchor="ctr"/>
+          <a:lstStyle/>
+          <a:p>
+            <a:pPr algn="l" indent="0" marL="0">
+              <a:buNone/>
+            </a:pPr>
+            <a:r>
+              <a:rPr lang="ko-KR" altLang="en-US" sz="1200" spc="-24" kern="0" dirty="0">
+                <a:solidFill>
+                  <a:srgbClr val="1C2536"/>
                 </a:solidFill>
                 <a:latin typeface="Paperlogy 6 SemiBold" pitchFamily="34" charset="0"/>
                 <a:ea typeface="Paperlogy 6 SemiBold" pitchFamily="34" charset="-127"/>
                 <a:cs typeface="Paperlogy 6 SemiBold" pitchFamily="34" charset="-120"/>
               </a:rPr>
-              <a:t>마감 3주 전까지 주제 미확정</a:t>
+              <a:t>경청 · 수상작 분석 · 교수님 조언</a:t>
+            </a:r>
+            <a:endParaRPr lang="en-US" sz="1200" dirty="0"/>
+          </a:p>
+        </p:txBody>
+      </p:sp>
+      <p:sp>
+        <p:nvSpPr>
+          <p:cNvPr id="61" name="판단 기준 마련"/>
+          <p:cNvSpPr txBox="1"/>
+          <p:nvPr/>
+        </p:nvSpPr>
+        <p:spPr>
+          <a:xfrm>
+            <a:off x="1900386" y="3888184"/>
+            <a:ext cx="898273" cy="177800"/>
+          </a:xfrm>
+          <a:prstGeom prst="rect">
+            <a:avLst/>
+          </a:prstGeom>
+          <a:noFill/>
+          <a:ln/>
+        </p:spPr>
+        <p:txBody>
+          <a:bodyPr wrap="none" lIns="0" tIns="0" rIns="0" bIns="0" rtlCol="0" anchor="ctr"/>
+          <a:lstStyle/>
+          <a:p>
+            <a:pPr algn="l" indent="0" marL="0">
+              <a:buNone/>
+            </a:pPr>
+            <a:r>
+              <a:rPr lang="ko-KR" altLang="en-US" sz="1200" spc="-24" kern="0" dirty="0">
+                <a:solidFill>
+                  <a:srgbClr val="004B8D"/>
+                </a:solidFill>
+                <a:latin typeface="Paperlogy 8 ExtraBold" pitchFamily="34" charset="0"/>
+                <a:ea typeface="Paperlogy 8 ExtraBold" pitchFamily="34" charset="-127"/>
+                <a:cs typeface="Paperlogy 8 ExtraBold" pitchFamily="34" charset="-120"/>
+              </a:rPr>
+              <a:t>판단 기준 마련</a:t>
+            </a:r>
+            <a:endParaRPr lang="en-US" sz="1200" dirty="0"/>
+          </a:p>
+        </p:txBody>
+      </p:sp>
+      <p:sp>
+        <p:nvSpPr>
+          <p:cNvPr id="62" name="‘유닛 모듈러 기반 사용자 맞춤형"/>
+          <p:cNvSpPr txBox="1"/>
+          <p:nvPr/>
+        </p:nvSpPr>
+        <p:spPr>
+          <a:xfrm>
+            <a:off x="914400" y="4506714"/>
+            <a:ext cx="2741936" cy="254000"/>
+          </a:xfrm>
+          <a:prstGeom prst="rect">
+            <a:avLst/>
+          </a:prstGeom>
+          <a:noFill/>
+          <a:ln/>
+        </p:spPr>
+        <p:txBody>
+          <a:bodyPr wrap="none" lIns="0" tIns="0" rIns="0" bIns="0" rtlCol="0" anchor="ctr"/>
+          <a:lstStyle/>
+          <a:p>
+            <a:pPr algn="l" indent="0" marL="0">
+              <a:buNone/>
+            </a:pPr>
+            <a:r>
+              <a:rPr lang="ko-KR" altLang="en-US" sz="1700" spc="-59" kern="0" dirty="0">
+                <a:solidFill>
+                  <a:srgbClr val="FFFFFF"/>
+                </a:solidFill>
+                <a:latin typeface="Paperlogy 8 ExtraBold" pitchFamily="34" charset="0"/>
+                <a:ea typeface="Paperlogy 8 ExtraBold" pitchFamily="34" charset="-127"/>
+                <a:cs typeface="Paperlogy 8 ExtraBold" pitchFamily="34" charset="-120"/>
+              </a:rPr>
+              <a:t>‘유닛 모듈러 기반 사용자 맞춤형</a:t>
+            </a:r>
+            <a:endParaRPr lang="en-US" sz="1700" dirty="0"/>
+          </a:p>
+        </p:txBody>
+      </p:sp>
+      <p:sp>
+        <p:nvSpPr>
+          <p:cNvPr id="63" name="리모델링 방법’ 선정"/>
+          <p:cNvSpPr txBox="1"/>
+          <p:nvPr/>
+        </p:nvSpPr>
+        <p:spPr>
+          <a:xfrm>
+            <a:off x="914400" y="4776589"/>
+            <a:ext cx="1690428" cy="254000"/>
+          </a:xfrm>
+          <a:prstGeom prst="rect">
+            <a:avLst/>
+          </a:prstGeom>
+          <a:noFill/>
+          <a:ln/>
+        </p:spPr>
+        <p:txBody>
+          <a:bodyPr wrap="none" lIns="0" tIns="0" rIns="0" bIns="0" rtlCol="0" anchor="ctr"/>
+          <a:lstStyle/>
+          <a:p>
+            <a:pPr algn="l" indent="0" marL="0">
+              <a:buNone/>
+            </a:pPr>
+            <a:r>
+              <a:rPr lang="ko-KR" altLang="en-US" sz="1700" spc="-59" kern="0" dirty="0">
+                <a:solidFill>
+                  <a:srgbClr val="FFFFFF"/>
+                </a:solidFill>
+                <a:latin typeface="Paperlogy 8 ExtraBold" pitchFamily="34" charset="0"/>
+                <a:ea typeface="Paperlogy 8 ExtraBold" pitchFamily="34" charset="-127"/>
+                <a:cs typeface="Paperlogy 8 ExtraBold" pitchFamily="34" charset="-120"/>
+              </a:rPr>
+              <a:t>리모델링 방법’ </a:t>
+            </a:r>
+            <a:pPr algn="l" indent="0" marL="0">
+              <a:buNone/>
+            </a:pPr>
+            <a:r>
+              <a:rPr lang="ko-KR" altLang="en-US" sz="1700" spc="-59" kern="0" dirty="0">
+                <a:solidFill>
+                  <a:srgbClr val="45B9EC"/>
+                </a:solidFill>
+                <a:latin typeface="Paperlogy 8 ExtraBold" pitchFamily="34" charset="0"/>
+                <a:ea typeface="Paperlogy 8 ExtraBold" pitchFamily="34" charset="-127"/>
+                <a:cs typeface="Paperlogy 8 ExtraBold" pitchFamily="34" charset="-120"/>
+              </a:rPr>
+              <a:t>선정</a:t>
+            </a:r>
+            <a:endParaRPr lang="en-US" sz="1700" dirty="0"/>
+          </a:p>
+        </p:txBody>
+      </p:sp>
+      <p:sp>
+        <p:nvSpPr>
+          <p:cNvPr id="64" name="리모델링 규모에 따라 유닛 모듈러를 배치하고,"/>
+          <p:cNvSpPr txBox="1"/>
+          <p:nvPr/>
+        </p:nvSpPr>
+        <p:spPr>
+          <a:xfrm>
+            <a:off x="914400" y="5103614"/>
+            <a:ext cx="2365526" cy="152400"/>
+          </a:xfrm>
+          <a:prstGeom prst="rect">
+            <a:avLst/>
+          </a:prstGeom>
+          <a:noFill/>
+          <a:ln/>
+        </p:spPr>
+        <p:txBody>
+          <a:bodyPr wrap="none" lIns="0" tIns="0" rIns="0" bIns="0" rtlCol="0" anchor="ctr"/>
+          <a:lstStyle/>
+          <a:p>
+            <a:pPr algn="l" indent="0" marL="0">
+              <a:buNone/>
+            </a:pPr>
+            <a:r>
+              <a:rPr lang="ko-KR" altLang="en-US" sz="1000" spc="-20" kern="0" dirty="0">
+                <a:solidFill>
+                  <a:srgbClr val="C9CED7"/>
+                </a:solidFill>
+                <a:latin typeface="Paperlogy 5 Medium" pitchFamily="34" charset="0"/>
+                <a:ea typeface="Paperlogy 5 Medium" pitchFamily="34" charset="-127"/>
+                <a:cs typeface="Paperlogy 5 Medium" pitchFamily="34" charset="-120"/>
+              </a:rPr>
+              <a:t>리모델링 규모에 따라 유닛 모듈러를 배치하고,</a:t>
             </a:r>
             <a:endParaRPr lang="en-US" sz="1000" dirty="0"/>
           </a:p>
@@ -2413,38 +2850,623 @@
       </p:sp>
       <p:sp>
         <p:nvSpPr>
-          <p:cNvPr id="52" name="참신성"/>
-          <p:cNvSpPr txBox="1"/>
-          <p:nvPr/>
-        </p:nvSpPr>
-        <p:spPr>
-          <a:xfrm>
-            <a:off x="1060698" y="2865834"/>
-            <a:ext cx="444004" cy="177800"/>
-          </a:xfrm>
-          <a:prstGeom prst="rect">
-            <a:avLst/>
-          </a:prstGeom>
-          <a:noFill/>
-          <a:ln/>
-        </p:spPr>
-        <p:txBody>
-          <a:bodyPr wrap="none" lIns="0" tIns="0" rIns="0" bIns="0" rtlCol="0" anchor="ctr"/>
-          <a:lstStyle/>
-          <a:p>
-            <a:pPr algn="l" indent="0" marL="0">
+          <p:cNvPr id="65" name="모듈 수 · 자재 물량을 자동 산출"/>
+          <p:cNvSpPr txBox="1"/>
+          <p:nvPr/>
+        </p:nvSpPr>
+        <p:spPr>
+          <a:xfrm>
+            <a:off x="914400" y="5281414"/>
+            <a:ext cx="1587990" cy="152400"/>
+          </a:xfrm>
+          <a:prstGeom prst="rect">
+            <a:avLst/>
+          </a:prstGeom>
+          <a:noFill/>
+          <a:ln/>
+        </p:spPr>
+        <p:txBody>
+          <a:bodyPr wrap="none" lIns="0" tIns="0" rIns="0" bIns="0" rtlCol="0" anchor="ctr"/>
+          <a:lstStyle/>
+          <a:p>
+            <a:pPr algn="l" indent="0" marL="0">
+              <a:buNone/>
+            </a:pPr>
+            <a:r>
+              <a:rPr lang="ko-KR" altLang="en-US" sz="1000" spc="-20" kern="0" dirty="0">
+                <a:solidFill>
+                  <a:srgbClr val="C9CED7"/>
+                </a:solidFill>
+                <a:latin typeface="Paperlogy 5 Medium" pitchFamily="34" charset="0"/>
+                <a:ea typeface="Paperlogy 5 Medium" pitchFamily="34" charset="-127"/>
+                <a:cs typeface="Paperlogy 5 Medium" pitchFamily="34" charset="-120"/>
+              </a:rPr>
+              <a:t>모듈 수 · 자재 물량을 자동 산출</a:t>
+            </a:r>
+            <a:endParaRPr lang="en-US" sz="1000" dirty="0"/>
+          </a:p>
+        </p:txBody>
+      </p:sp>
+      <p:sp>
+        <p:nvSpPr>
+          <p:cNvPr id="66" name="팀장 · 나"/>
+          <p:cNvSpPr txBox="1"/>
+          <p:nvPr/>
+        </p:nvSpPr>
+        <p:spPr>
+          <a:xfrm>
+            <a:off x="6149578" y="2696964"/>
+            <a:ext cx="553045" cy="177800"/>
+          </a:xfrm>
+          <a:prstGeom prst="rect">
+            <a:avLst/>
+          </a:prstGeom>
+          <a:noFill/>
+          <a:ln/>
+        </p:spPr>
+        <p:txBody>
+          <a:bodyPr wrap="none" lIns="0" tIns="0" rIns="0" bIns="0" rtlCol="0" anchor="ctr"/>
+          <a:lstStyle/>
+          <a:p>
+            <a:pPr algn="ctr" indent="0" marL="0">
               <a:buNone/>
             </a:pPr>
             <a:r>
               <a:rPr lang="ko-KR" altLang="en-US" sz="1200" spc="-24" kern="0" dirty="0">
                 <a:solidFill>
-                  <a:srgbClr val="1C2536"/>
+                  <a:srgbClr val="FFFFFF"/>
+                </a:solidFill>
+                <a:latin typeface="Paperlogy 8 ExtraBold" pitchFamily="34" charset="0"/>
+                <a:ea typeface="Paperlogy 8 ExtraBold" pitchFamily="34" charset="-127"/>
+                <a:cs typeface="Paperlogy 8 ExtraBold" pitchFamily="34" charset="-120"/>
+              </a:rPr>
+              <a:t>팀장 · 나</a:t>
+            </a:r>
+            <a:endParaRPr lang="en-US" sz="1200" dirty="0"/>
+          </a:p>
+        </p:txBody>
+      </p:sp>
+      <p:sp>
+        <p:nvSpPr>
+          <p:cNvPr id="67" name="프로젝트 총괄 ·"/>
+          <p:cNvSpPr txBox="1"/>
+          <p:nvPr/>
+        </p:nvSpPr>
+        <p:spPr>
+          <a:xfrm>
+            <a:off x="5882198" y="2926755"/>
+            <a:ext cx="935504" cy="177800"/>
+          </a:xfrm>
+          <a:prstGeom prst="rect">
+            <a:avLst/>
+          </a:prstGeom>
+          <a:noFill/>
+          <a:ln/>
+        </p:spPr>
+        <p:txBody>
+          <a:bodyPr wrap="none" lIns="0" tIns="0" rIns="0" bIns="0" rtlCol="0" anchor="ctr"/>
+          <a:lstStyle/>
+          <a:p>
+            <a:pPr algn="ctr" indent="0" marL="0">
+              <a:buNone/>
+            </a:pPr>
+            <a:r>
+              <a:rPr lang="ko-KR" altLang="en-US" sz="1200" spc="-30" kern="0" dirty="0">
+                <a:solidFill>
+                  <a:srgbClr val="DADEE3"/>
+                </a:solidFill>
+                <a:latin typeface="Paperlogy 5 Medium" pitchFamily="34" charset="0"/>
+                <a:ea typeface="Paperlogy 5 Medium" pitchFamily="34" charset="-127"/>
+                <a:cs typeface="Paperlogy 5 Medium" pitchFamily="34" charset="-120"/>
+              </a:rPr>
+              <a:t>프로젝트 총괄 ·</a:t>
+            </a:r>
+            <a:endParaRPr lang="en-US" sz="1200" dirty="0"/>
+          </a:p>
+        </p:txBody>
+      </p:sp>
+      <p:sp>
+        <p:nvSpPr>
+          <p:cNvPr id="68" name="Dynamo 기반 자동화 알고리즘 개발"/>
+          <p:cNvSpPr txBox="1"/>
+          <p:nvPr/>
+        </p:nvSpPr>
+        <p:spPr>
+          <a:xfrm>
+            <a:off x="5185750" y="3132435"/>
+            <a:ext cx="2328400" cy="177800"/>
+          </a:xfrm>
+          <a:prstGeom prst="rect">
+            <a:avLst/>
+          </a:prstGeom>
+          <a:noFill/>
+          <a:ln/>
+        </p:spPr>
+        <p:txBody>
+          <a:bodyPr wrap="none" lIns="0" tIns="0" rIns="0" bIns="0" rtlCol="0" anchor="ctr"/>
+          <a:lstStyle/>
+          <a:p>
+            <a:pPr algn="ctr" indent="0" marL="0">
+              <a:buNone/>
+            </a:pPr>
+            <a:r>
+              <a:rPr lang="ko-KR" altLang="en-US" sz="1200" spc="-30" kern="0" dirty="0">
+                <a:solidFill>
+                  <a:srgbClr val="DADEE3"/>
+                </a:solidFill>
+                <a:latin typeface="Paperlogy 5 Medium" pitchFamily="34" charset="0"/>
+                <a:ea typeface="Paperlogy 5 Medium" pitchFamily="34" charset="-127"/>
+                <a:cs typeface="Paperlogy 5 Medium" pitchFamily="34" charset="-120"/>
+              </a:rPr>
+              <a:t>Dynamo 기반 자동화 알고리즘 개발</a:t>
+            </a:r>
+            <a:endParaRPr lang="en-US" sz="1200" dirty="0"/>
+          </a:p>
+        </p:txBody>
+      </p:sp>
+      <p:sp>
+        <p:nvSpPr>
+          <p:cNvPr id="69" name="팀원 A"/>
+          <p:cNvSpPr txBox="1"/>
+          <p:nvPr/>
+        </p:nvSpPr>
+        <p:spPr>
+          <a:xfrm>
+            <a:off x="4854873" y="4068366"/>
+            <a:ext cx="458589" cy="177800"/>
+          </a:xfrm>
+          <a:prstGeom prst="rect">
+            <a:avLst/>
+          </a:prstGeom>
+          <a:noFill/>
+          <a:ln/>
+        </p:spPr>
+        <p:txBody>
+          <a:bodyPr wrap="none" lIns="0" tIns="0" rIns="0" bIns="0" rtlCol="0" anchor="ctr"/>
+          <a:lstStyle/>
+          <a:p>
+            <a:pPr algn="ctr" indent="0" marL="0">
+              <a:buNone/>
+            </a:pPr>
+            <a:r>
+              <a:rPr lang="ko-KR" altLang="en-US" sz="1200" spc="-24" kern="0" dirty="0">
+                <a:solidFill>
+                  <a:srgbClr val="0B2147"/>
+                </a:solidFill>
+                <a:latin typeface="Paperlogy 8 ExtraBold" pitchFamily="34" charset="0"/>
+                <a:ea typeface="Paperlogy 8 ExtraBold" pitchFamily="34" charset="-127"/>
+                <a:cs typeface="Paperlogy 8 ExtraBold" pitchFamily="34" charset="-120"/>
+              </a:rPr>
+              <a:t>팀원 A</a:t>
+            </a:r>
+            <a:endParaRPr lang="en-US" sz="1200" dirty="0"/>
+          </a:p>
+        </p:txBody>
+      </p:sp>
+      <p:sp>
+        <p:nvSpPr>
+          <p:cNvPr id="70" name="유닛 모듈러 설계 ·"/>
+          <p:cNvSpPr txBox="1"/>
+          <p:nvPr/>
+        </p:nvSpPr>
+        <p:spPr>
+          <a:xfrm>
+            <a:off x="4455394" y="4298156"/>
+            <a:ext cx="1105146" cy="177800"/>
+          </a:xfrm>
+          <a:prstGeom prst="rect">
+            <a:avLst/>
+          </a:prstGeom>
+          <a:noFill/>
+          <a:ln/>
+        </p:spPr>
+        <p:txBody>
+          <a:bodyPr wrap="none" lIns="0" tIns="0" rIns="0" bIns="0" rtlCol="0" anchor="ctr"/>
+          <a:lstStyle/>
+          <a:p>
+            <a:pPr algn="ctr" indent="0" marL="0">
+              <a:buNone/>
+            </a:pPr>
+            <a:r>
+              <a:rPr lang="ko-KR" altLang="en-US" sz="1200" spc="-30" kern="0" dirty="0">
+                <a:solidFill>
+                  <a:srgbClr val="4B5568"/>
+                </a:solidFill>
+                <a:latin typeface="Paperlogy 5 Medium" pitchFamily="34" charset="0"/>
+                <a:ea typeface="Paperlogy 5 Medium" pitchFamily="34" charset="-127"/>
+                <a:cs typeface="Paperlogy 5 Medium" pitchFamily="34" charset="-120"/>
+              </a:rPr>
+              <a:t>유닛 모듈러 설계 ·</a:t>
+            </a:r>
+            <a:endParaRPr lang="en-US" sz="1200" dirty="0"/>
+          </a:p>
+        </p:txBody>
+      </p:sp>
+      <p:sp>
+        <p:nvSpPr>
+          <p:cNvPr id="71" name="배치계획"/>
+          <p:cNvSpPr txBox="1"/>
+          <p:nvPr/>
+        </p:nvSpPr>
+        <p:spPr>
+          <a:xfrm>
+            <a:off x="4721920" y="4503837"/>
+            <a:ext cx="572095" cy="177800"/>
+          </a:xfrm>
+          <a:prstGeom prst="rect">
+            <a:avLst/>
+          </a:prstGeom>
+          <a:noFill/>
+          <a:ln/>
+        </p:spPr>
+        <p:txBody>
+          <a:bodyPr wrap="none" lIns="0" tIns="0" rIns="0" bIns="0" rtlCol="0" anchor="ctr"/>
+          <a:lstStyle/>
+          <a:p>
+            <a:pPr algn="ctr" indent="0" marL="0">
+              <a:buNone/>
+            </a:pPr>
+            <a:r>
+              <a:rPr lang="ko-KR" altLang="en-US" sz="1200" spc="-30" kern="0" dirty="0">
+                <a:solidFill>
+                  <a:srgbClr val="4B5568"/>
+                </a:solidFill>
+                <a:latin typeface="Paperlogy 5 Medium" pitchFamily="34" charset="0"/>
+                <a:ea typeface="Paperlogy 5 Medium" pitchFamily="34" charset="-127"/>
+                <a:cs typeface="Paperlogy 5 Medium" pitchFamily="34" charset="-120"/>
+              </a:rPr>
+              <a:t>배치계획</a:t>
+            </a:r>
+            <a:endParaRPr lang="en-US" sz="1200" dirty="0"/>
+          </a:p>
+        </p:txBody>
+      </p:sp>
+      <p:sp>
+        <p:nvSpPr>
+          <p:cNvPr id="72" name="팀원 B"/>
+          <p:cNvSpPr txBox="1"/>
+          <p:nvPr/>
+        </p:nvSpPr>
+        <p:spPr>
+          <a:xfrm>
+            <a:off x="6196905" y="4068366"/>
+            <a:ext cx="458391" cy="177800"/>
+          </a:xfrm>
+          <a:prstGeom prst="rect">
+            <a:avLst/>
+          </a:prstGeom>
+          <a:noFill/>
+          <a:ln/>
+        </p:spPr>
+        <p:txBody>
+          <a:bodyPr wrap="none" lIns="0" tIns="0" rIns="0" bIns="0" rtlCol="0" anchor="ctr"/>
+          <a:lstStyle/>
+          <a:p>
+            <a:pPr algn="ctr" indent="0" marL="0">
+              <a:buNone/>
+            </a:pPr>
+            <a:r>
+              <a:rPr lang="ko-KR" altLang="en-US" sz="1200" spc="-24" kern="0" dirty="0">
+                <a:solidFill>
+                  <a:srgbClr val="0B2147"/>
+                </a:solidFill>
+                <a:latin typeface="Paperlogy 8 ExtraBold" pitchFamily="34" charset="0"/>
+                <a:ea typeface="Paperlogy 8 ExtraBold" pitchFamily="34" charset="-127"/>
+                <a:cs typeface="Paperlogy 8 ExtraBold" pitchFamily="34" charset="-120"/>
+              </a:rPr>
+              <a:t>팀원 B</a:t>
+            </a:r>
+            <a:endParaRPr lang="en-US" sz="1200" dirty="0"/>
+          </a:p>
+        </p:txBody>
+      </p:sp>
+      <p:sp>
+        <p:nvSpPr>
+          <p:cNvPr id="73" name="Revit 기반"/>
+          <p:cNvSpPr txBox="1"/>
+          <p:nvPr/>
+        </p:nvSpPr>
+        <p:spPr>
+          <a:xfrm>
+            <a:off x="5992912" y="4298156"/>
+            <a:ext cx="713978" cy="177800"/>
+          </a:xfrm>
+          <a:prstGeom prst="rect">
+            <a:avLst/>
+          </a:prstGeom>
+          <a:noFill/>
+          <a:ln/>
+        </p:spPr>
+        <p:txBody>
+          <a:bodyPr wrap="none" lIns="0" tIns="0" rIns="0" bIns="0" rtlCol="0" anchor="ctr"/>
+          <a:lstStyle/>
+          <a:p>
+            <a:pPr algn="ctr" indent="0" marL="0">
+              <a:buNone/>
+            </a:pPr>
+            <a:r>
+              <a:rPr lang="ko-KR" altLang="en-US" sz="1200" spc="-30" kern="0" dirty="0">
+                <a:solidFill>
+                  <a:srgbClr val="4B5568"/>
+                </a:solidFill>
+                <a:latin typeface="Paperlogy 5 Medium" pitchFamily="34" charset="0"/>
+                <a:ea typeface="Paperlogy 5 Medium" pitchFamily="34" charset="-127"/>
+                <a:cs typeface="Paperlogy 5 Medium" pitchFamily="34" charset="-120"/>
+              </a:rPr>
+              <a:t>Revit 기반</a:t>
+            </a:r>
+            <a:endParaRPr lang="en-US" sz="1200" dirty="0"/>
+          </a:p>
+        </p:txBody>
+      </p:sp>
+      <p:sp>
+        <p:nvSpPr>
+          <p:cNvPr id="74" name="BIM 모델링 ·"/>
+          <p:cNvSpPr txBox="1"/>
+          <p:nvPr/>
+        </p:nvSpPr>
+        <p:spPr>
+          <a:xfrm>
+            <a:off x="5930404" y="4503837"/>
+            <a:ext cx="838994" cy="177800"/>
+          </a:xfrm>
+          <a:prstGeom prst="rect">
+            <a:avLst/>
+          </a:prstGeom>
+          <a:noFill/>
+          <a:ln/>
+        </p:spPr>
+        <p:txBody>
+          <a:bodyPr wrap="none" lIns="0" tIns="0" rIns="0" bIns="0" rtlCol="0" anchor="ctr"/>
+          <a:lstStyle/>
+          <a:p>
+            <a:pPr algn="ctr" indent="0" marL="0">
+              <a:buNone/>
+            </a:pPr>
+            <a:r>
+              <a:rPr lang="ko-KR" altLang="en-US" sz="1200" spc="-30" kern="0" dirty="0">
+                <a:solidFill>
+                  <a:srgbClr val="4B5568"/>
+                </a:solidFill>
+                <a:latin typeface="Paperlogy 5 Medium" pitchFamily="34" charset="0"/>
+                <a:ea typeface="Paperlogy 5 Medium" pitchFamily="34" charset="-127"/>
+                <a:cs typeface="Paperlogy 5 Medium" pitchFamily="34" charset="-120"/>
+              </a:rPr>
+              <a:t>BIM 모델링 ·</a:t>
+            </a:r>
+            <a:endParaRPr lang="en-US" sz="1200" dirty="0"/>
+          </a:p>
+        </p:txBody>
+      </p:sp>
+      <p:sp>
+        <p:nvSpPr>
+          <p:cNvPr id="75" name="데이터 구축"/>
+          <p:cNvSpPr txBox="1"/>
+          <p:nvPr/>
+        </p:nvSpPr>
+        <p:spPr>
+          <a:xfrm>
+            <a:off x="5983883" y="4709517"/>
+            <a:ext cx="732036" cy="177800"/>
+          </a:xfrm>
+          <a:prstGeom prst="rect">
+            <a:avLst/>
+          </a:prstGeom>
+          <a:noFill/>
+          <a:ln/>
+        </p:spPr>
+        <p:txBody>
+          <a:bodyPr wrap="none" lIns="0" tIns="0" rIns="0" bIns="0" rtlCol="0" anchor="ctr"/>
+          <a:lstStyle/>
+          <a:p>
+            <a:pPr algn="ctr" indent="0" marL="0">
+              <a:buNone/>
+            </a:pPr>
+            <a:r>
+              <a:rPr lang="ko-KR" altLang="en-US" sz="1200" spc="-30" kern="0" dirty="0">
+                <a:solidFill>
+                  <a:srgbClr val="4B5568"/>
+                </a:solidFill>
+                <a:latin typeface="Paperlogy 5 Medium" pitchFamily="34" charset="0"/>
+                <a:ea typeface="Paperlogy 5 Medium" pitchFamily="34" charset="-127"/>
+                <a:cs typeface="Paperlogy 5 Medium" pitchFamily="34" charset="-120"/>
+              </a:rPr>
+              <a:t>데이터 구축</a:t>
+            </a:r>
+            <a:endParaRPr lang="en-US" sz="1200" dirty="0"/>
+          </a:p>
+        </p:txBody>
+      </p:sp>
+      <p:sp>
+        <p:nvSpPr>
+          <p:cNvPr id="76" name="팀원 C"/>
+          <p:cNvSpPr txBox="1"/>
+          <p:nvPr/>
+        </p:nvSpPr>
+        <p:spPr>
+          <a:xfrm>
+            <a:off x="7541419" y="4068366"/>
+            <a:ext cx="453231" cy="177800"/>
+          </a:xfrm>
+          <a:prstGeom prst="rect">
+            <a:avLst/>
+          </a:prstGeom>
+          <a:noFill/>
+          <a:ln/>
+        </p:spPr>
+        <p:txBody>
+          <a:bodyPr wrap="none" lIns="0" tIns="0" rIns="0" bIns="0" rtlCol="0" anchor="ctr"/>
+          <a:lstStyle/>
+          <a:p>
+            <a:pPr algn="ctr" indent="0" marL="0">
+              <a:buNone/>
+            </a:pPr>
+            <a:r>
+              <a:rPr lang="ko-KR" altLang="en-US" sz="1200" spc="-24" kern="0" dirty="0">
+                <a:solidFill>
+                  <a:srgbClr val="0B2147"/>
+                </a:solidFill>
+                <a:latin typeface="Paperlogy 8 ExtraBold" pitchFamily="34" charset="0"/>
+                <a:ea typeface="Paperlogy 8 ExtraBold" pitchFamily="34" charset="-127"/>
+                <a:cs typeface="Paperlogy 8 ExtraBold" pitchFamily="34" charset="-120"/>
+              </a:rPr>
+              <a:t>팀원 C</a:t>
+            </a:r>
+            <a:endParaRPr lang="en-US" sz="1200" dirty="0"/>
+          </a:p>
+        </p:txBody>
+      </p:sp>
+      <p:sp>
+        <p:nvSpPr>
+          <p:cNvPr id="77" name="리모델링 적용"/>
+          <p:cNvSpPr txBox="1"/>
+          <p:nvPr/>
+        </p:nvSpPr>
+        <p:spPr>
+          <a:xfrm>
+            <a:off x="7260630" y="4298156"/>
+            <a:ext cx="862409" cy="177800"/>
+          </a:xfrm>
+          <a:prstGeom prst="rect">
+            <a:avLst/>
+          </a:prstGeom>
+          <a:noFill/>
+          <a:ln/>
+        </p:spPr>
+        <p:txBody>
+          <a:bodyPr wrap="none" lIns="0" tIns="0" rIns="0" bIns="0" rtlCol="0" anchor="ctr"/>
+          <a:lstStyle/>
+          <a:p>
+            <a:pPr algn="ctr" indent="0" marL="0">
+              <a:buNone/>
+            </a:pPr>
+            <a:r>
+              <a:rPr lang="ko-KR" altLang="en-US" sz="1200" spc="-30" kern="0" dirty="0">
+                <a:solidFill>
+                  <a:srgbClr val="4B5568"/>
+                </a:solidFill>
+                <a:latin typeface="Paperlogy 5 Medium" pitchFamily="34" charset="0"/>
+                <a:ea typeface="Paperlogy 5 Medium" pitchFamily="34" charset="-127"/>
+                <a:cs typeface="Paperlogy 5 Medium" pitchFamily="34" charset="-120"/>
+              </a:rPr>
+              <a:t>리모델링 적용</a:t>
+            </a:r>
+            <a:endParaRPr lang="en-US" sz="1200" dirty="0"/>
+          </a:p>
+        </p:txBody>
+      </p:sp>
+      <p:sp>
+        <p:nvSpPr>
+          <p:cNvPr id="78" name="시나리오 구성 ·"/>
+          <p:cNvSpPr txBox="1"/>
+          <p:nvPr/>
+        </p:nvSpPr>
+        <p:spPr>
+          <a:xfrm>
+            <a:off x="7224132" y="4503837"/>
+            <a:ext cx="935504" cy="177800"/>
+          </a:xfrm>
+          <a:prstGeom prst="rect">
+            <a:avLst/>
+          </a:prstGeom>
+          <a:noFill/>
+          <a:ln/>
+        </p:spPr>
+        <p:txBody>
+          <a:bodyPr wrap="none" lIns="0" tIns="0" rIns="0" bIns="0" rtlCol="0" anchor="ctr"/>
+          <a:lstStyle/>
+          <a:p>
+            <a:pPr algn="ctr" indent="0" marL="0">
+              <a:buNone/>
+            </a:pPr>
+            <a:r>
+              <a:rPr lang="ko-KR" altLang="en-US" sz="1200" spc="-30" kern="0" dirty="0">
+                <a:solidFill>
+                  <a:srgbClr val="4B5568"/>
+                </a:solidFill>
+                <a:latin typeface="Paperlogy 5 Medium" pitchFamily="34" charset="0"/>
+                <a:ea typeface="Paperlogy 5 Medium" pitchFamily="34" charset="-127"/>
+                <a:cs typeface="Paperlogy 5 Medium" pitchFamily="34" charset="-120"/>
+              </a:rPr>
+              <a:t>시나리오 구성 ·</a:t>
+            </a:r>
+            <a:endParaRPr lang="en-US" sz="1200" dirty="0"/>
+          </a:p>
+        </p:txBody>
+      </p:sp>
+      <p:sp>
+        <p:nvSpPr>
+          <p:cNvPr id="79" name="시연 영상 제작"/>
+          <p:cNvSpPr txBox="1"/>
+          <p:nvPr/>
+        </p:nvSpPr>
+        <p:spPr>
+          <a:xfrm>
+            <a:off x="7245846" y="4709517"/>
+            <a:ext cx="892076" cy="177800"/>
+          </a:xfrm>
+          <a:prstGeom prst="rect">
+            <a:avLst/>
+          </a:prstGeom>
+          <a:noFill/>
+          <a:ln/>
+        </p:spPr>
+        <p:txBody>
+          <a:bodyPr wrap="none" lIns="0" tIns="0" rIns="0" bIns="0" rtlCol="0" anchor="ctr"/>
+          <a:lstStyle/>
+          <a:p>
+            <a:pPr algn="ctr" indent="0" marL="0">
+              <a:buNone/>
+            </a:pPr>
+            <a:r>
+              <a:rPr lang="ko-KR" altLang="en-US" sz="1200" spc="-30" kern="0" dirty="0">
+                <a:solidFill>
+                  <a:srgbClr val="4B5568"/>
+                </a:solidFill>
+                <a:latin typeface="Paperlogy 5 Medium" pitchFamily="34" charset="0"/>
+                <a:ea typeface="Paperlogy 5 Medium" pitchFamily="34" charset="-127"/>
+                <a:cs typeface="Paperlogy 5 Medium" pitchFamily="34" charset="-120"/>
+              </a:rPr>
+              <a:t>시연 영상 제작</a:t>
+            </a:r>
+            <a:endParaRPr lang="en-US" sz="1200" dirty="0"/>
+          </a:p>
+        </p:txBody>
+      </p:sp>
+      <p:sp>
+        <p:nvSpPr>
+          <p:cNvPr id="80" name="이틀마다 진행상황 공유 · 피드백"/>
+          <p:cNvSpPr txBox="1"/>
+          <p:nvPr/>
+        </p:nvSpPr>
+        <p:spPr>
+          <a:xfrm>
+            <a:off x="5528370" y="5304234"/>
+            <a:ext cx="1984173" cy="177800"/>
+          </a:xfrm>
+          <a:prstGeom prst="rect">
+            <a:avLst/>
+          </a:prstGeom>
+          <a:noFill/>
+          <a:ln/>
+        </p:spPr>
+        <p:txBody>
+          <a:bodyPr wrap="none" lIns="0" tIns="0" rIns="0" bIns="0" rtlCol="0" anchor="ctr"/>
+          <a:lstStyle/>
+          <a:p>
+            <a:pPr algn="l" indent="0" marL="0">
+              <a:buNone/>
+            </a:pPr>
+            <a:r>
+              <a:rPr lang="ko-KR" altLang="en-US" sz="1200" spc="-24" kern="0" dirty="0">
+                <a:solidFill>
+                  <a:srgbClr val="0B2147"/>
                 </a:solidFill>
                 <a:latin typeface="Paperlogy 7 Bold" pitchFamily="34" charset="0"/>
                 <a:ea typeface="Paperlogy 7 Bold" pitchFamily="34" charset="-127"/>
                 <a:cs typeface="Paperlogy 7 Bold" pitchFamily="34" charset="-120"/>
               </a:rPr>
-              <a:t>참신성</a:t>
+              <a:t>이틀마다 진행상황 공유 · 피드백</a:t>
             </a:r>
             <a:endParaRPr lang="en-US" sz="1200" dirty="0"/>
           </a:p>
@@ -2452,155 +3474,222 @@
       </p:sp>
       <p:sp>
         <p:nvSpPr>
-          <p:cNvPr id="53" name="구현 가능성"/>
-          <p:cNvSpPr txBox="1"/>
-          <p:nvPr/>
-        </p:nvSpPr>
-        <p:spPr>
-          <a:xfrm>
-            <a:off x="3048000" y="2865834"/>
-            <a:ext cx="736600" cy="177800"/>
-          </a:xfrm>
-          <a:prstGeom prst="rect">
-            <a:avLst/>
-          </a:prstGeom>
-          <a:noFill/>
-          <a:ln/>
-        </p:spPr>
-        <p:txBody>
-          <a:bodyPr wrap="none" lIns="0" tIns="0" rIns="0" bIns="0" rtlCol="0" anchor="ctr"/>
-          <a:lstStyle/>
-          <a:p>
-            <a:pPr algn="l" indent="0" marL="0">
-              <a:buNone/>
-            </a:pPr>
-            <a:r>
-              <a:rPr lang="ko-KR" altLang="en-US" sz="1200" spc="-24" kern="0" dirty="0">
-                <a:solidFill>
-                  <a:srgbClr val="1C2536"/>
+          <p:cNvPr id="81" name="리모델링 앱 개발 아이디어 시연 영상"/>
+          <p:cNvSpPr txBox="1"/>
+          <p:nvPr/>
+        </p:nvSpPr>
+        <p:spPr>
+          <a:xfrm>
+            <a:off x="9239200" y="3497064"/>
+            <a:ext cx="1871323" cy="152400"/>
+          </a:xfrm>
+          <a:prstGeom prst="rect">
+            <a:avLst/>
+          </a:prstGeom>
+          <a:noFill/>
+          <a:ln/>
+        </p:spPr>
+        <p:txBody>
+          <a:bodyPr wrap="none" lIns="0" tIns="0" rIns="0" bIns="0" rtlCol="0" anchor="ctr"/>
+          <a:lstStyle/>
+          <a:p>
+            <a:pPr algn="l" indent="0" marL="0">
+              <a:buNone/>
+            </a:pPr>
+            <a:r>
+              <a:rPr lang="ko-KR" altLang="en-US" sz="1000" spc="-20" kern="0" dirty="0">
+                <a:solidFill>
+                  <a:srgbClr val="4B5568"/>
+                </a:solidFill>
+                <a:latin typeface="Paperlogy 6 SemiBold" pitchFamily="34" charset="0"/>
+                <a:ea typeface="Paperlogy 6 SemiBold" pitchFamily="34" charset="-127"/>
+                <a:cs typeface="Paperlogy 6 SemiBold" pitchFamily="34" charset="-120"/>
+              </a:rPr>
+              <a:t>리모델링 앱 개발 아이디어 시연 영상</a:t>
+            </a:r>
+            <a:endParaRPr lang="en-US" sz="1000" dirty="0"/>
+          </a:p>
+        </p:txBody>
+      </p:sp>
+      <p:sp>
+        <p:nvSpPr>
+          <p:cNvPr id="82" name="장려상"/>
+          <p:cNvSpPr txBox="1"/>
+          <p:nvPr/>
+        </p:nvSpPr>
+        <p:spPr>
+          <a:xfrm>
+            <a:off x="9749433" y="4500364"/>
+            <a:ext cx="795734" cy="342900"/>
+          </a:xfrm>
+          <a:prstGeom prst="rect">
+            <a:avLst/>
+          </a:prstGeom>
+          <a:noFill/>
+          <a:ln/>
+        </p:spPr>
+        <p:txBody>
+          <a:bodyPr wrap="none" lIns="0" tIns="0" rIns="0" bIns="0" rtlCol="0" anchor="ctr"/>
+          <a:lstStyle/>
+          <a:p>
+            <a:pPr algn="l" indent="0" marL="0">
+              <a:buNone/>
+            </a:pPr>
+            <a:r>
+              <a:rPr lang="ko-KR" altLang="en-US" sz="2300" spc="-69" kern="0" dirty="0">
+                <a:solidFill>
+                  <a:srgbClr val="0B2147"/>
+                </a:solidFill>
+                <a:latin typeface="Paperlogy 9 Black" pitchFamily="34" charset="0"/>
+                <a:ea typeface="Paperlogy 9 Black" pitchFamily="34" charset="-127"/>
+                <a:cs typeface="Paperlogy 9 Black" pitchFamily="34" charset="-120"/>
+              </a:rPr>
+              <a:t>장려상</a:t>
+            </a:r>
+            <a:endParaRPr lang="en-US" sz="2300" dirty="0"/>
+          </a:p>
+        </p:txBody>
+      </p:sp>
+      <p:sp>
+        <p:nvSpPr>
+          <p:cNvPr id="83" name="학생 BIM 경진대회 장려상 · 남은 3주 내 완성"/>
+          <p:cNvSpPr txBox="1"/>
+          <p:nvPr/>
+        </p:nvSpPr>
+        <p:spPr>
+          <a:xfrm>
+            <a:off x="9014619" y="5376664"/>
+            <a:ext cx="2347436" cy="152400"/>
+          </a:xfrm>
+          <a:prstGeom prst="rect">
+            <a:avLst/>
+          </a:prstGeom>
+          <a:noFill/>
+          <a:ln/>
+        </p:spPr>
+        <p:txBody>
+          <a:bodyPr wrap="none" lIns="0" tIns="0" rIns="0" bIns="0" rtlCol="0" anchor="ctr"/>
+          <a:lstStyle/>
+          <a:p>
+            <a:pPr algn="l" indent="0" marL="0">
+              <a:buNone/>
+            </a:pPr>
+            <a:r>
+              <a:rPr lang="ko-KR" altLang="en-US" sz="1000" spc="-20" kern="0" dirty="0">
+                <a:solidFill>
+                  <a:srgbClr val="0B2147"/>
                 </a:solidFill>
                 <a:latin typeface="Paperlogy 7 Bold" pitchFamily="34" charset="0"/>
                 <a:ea typeface="Paperlogy 7 Bold" pitchFamily="34" charset="-127"/>
                 <a:cs typeface="Paperlogy 7 Bold" pitchFamily="34" charset="-120"/>
               </a:rPr>
-              <a:t>구현 가능성</a:t>
-            </a:r>
-            <a:endParaRPr lang="en-US" sz="1200" dirty="0"/>
-          </a:p>
-        </p:txBody>
-      </p:sp>
-      <p:sp>
-        <p:nvSpPr>
-          <p:cNvPr id="54" name="경청 · 수상작 분석 · 교수님 조언"/>
-          <p:cNvSpPr txBox="1"/>
-          <p:nvPr/>
-        </p:nvSpPr>
-        <p:spPr>
-          <a:xfrm>
-            <a:off x="1402209" y="3293864"/>
-            <a:ext cx="1954409" cy="177800"/>
-          </a:xfrm>
-          <a:prstGeom prst="rect">
-            <a:avLst/>
-          </a:prstGeom>
-          <a:noFill/>
-          <a:ln/>
-        </p:spPr>
-        <p:txBody>
-          <a:bodyPr wrap="none" lIns="0" tIns="0" rIns="0" bIns="0" rtlCol="0" anchor="ctr"/>
-          <a:lstStyle/>
-          <a:p>
-            <a:pPr algn="l" indent="0" marL="0">
-              <a:buNone/>
-            </a:pPr>
-            <a:r>
-              <a:rPr lang="ko-KR" altLang="en-US" sz="1200" spc="-24" kern="0" dirty="0">
-                <a:solidFill>
-                  <a:srgbClr val="1C2536"/>
-                </a:solidFill>
-                <a:latin typeface="Paperlogy 6 SemiBold" pitchFamily="34" charset="0"/>
-                <a:ea typeface="Paperlogy 6 SemiBold" pitchFamily="34" charset="-127"/>
-                <a:cs typeface="Paperlogy 6 SemiBold" pitchFamily="34" charset="-120"/>
-              </a:rPr>
-              <a:t>경청 · 수상작 분석 · 교수님 조언</a:t>
-            </a:r>
-            <a:endParaRPr lang="en-US" sz="1200" dirty="0"/>
-          </a:p>
-        </p:txBody>
-      </p:sp>
-      <p:sp>
-        <p:nvSpPr>
-          <p:cNvPr id="55" name="판단 기준 마련"/>
-          <p:cNvSpPr txBox="1"/>
-          <p:nvPr/>
-        </p:nvSpPr>
-        <p:spPr>
-          <a:xfrm>
-            <a:off x="1900386" y="3926284"/>
-            <a:ext cx="898273" cy="177800"/>
-          </a:xfrm>
-          <a:prstGeom prst="rect">
-            <a:avLst/>
-          </a:prstGeom>
-          <a:noFill/>
-          <a:ln/>
-        </p:spPr>
-        <p:txBody>
-          <a:bodyPr wrap="none" lIns="0" tIns="0" rIns="0" bIns="0" rtlCol="0" anchor="ctr"/>
-          <a:lstStyle/>
-          <a:p>
-            <a:pPr algn="l" indent="0" marL="0">
-              <a:buNone/>
-            </a:pPr>
-            <a:r>
-              <a:rPr lang="ko-KR" altLang="en-US" sz="1200" spc="-24" kern="0" dirty="0">
-                <a:solidFill>
-                  <a:srgbClr val="004B8D"/>
-                </a:solidFill>
-                <a:latin typeface="Paperlogy 8 ExtraBold" pitchFamily="34" charset="0"/>
-                <a:ea typeface="Paperlogy 8 ExtraBold" pitchFamily="34" charset="-127"/>
-                <a:cs typeface="Paperlogy 8 ExtraBold" pitchFamily="34" charset="-120"/>
-              </a:rPr>
-              <a:t>판단 기준 마련</a:t>
-            </a:r>
-            <a:endParaRPr lang="en-US" sz="1200" dirty="0"/>
-          </a:p>
-        </p:txBody>
-      </p:sp>
-      <p:sp>
-        <p:nvSpPr>
-          <p:cNvPr id="56" name="‘유닛 모듈러 기반 사용자 맞춤형"/>
-          <p:cNvSpPr txBox="1"/>
-          <p:nvPr/>
-        </p:nvSpPr>
-        <p:spPr>
-          <a:xfrm>
-            <a:off x="914400" y="4506714"/>
-            <a:ext cx="2741936" cy="254000"/>
-          </a:xfrm>
-          <a:prstGeom prst="rect">
-            <a:avLst/>
-          </a:prstGeom>
-          <a:noFill/>
-          <a:ln/>
-        </p:spPr>
-        <p:txBody>
-          <a:bodyPr wrap="none" lIns="0" tIns="0" rIns="0" bIns="0" rtlCol="0" anchor="ctr"/>
-          <a:lstStyle/>
-          <a:p>
-            <a:pPr algn="l" indent="0" marL="0">
-              <a:buNone/>
-            </a:pPr>
-            <a:r>
-              <a:rPr lang="ko-KR" altLang="en-US" sz="1700" spc="-59" kern="0" dirty="0">
+              <a:t>학생 BIM 경진대회 장려상 · 남은 3주 내 완성</a:t>
+            </a:r>
+            <a:endParaRPr lang="en-US" sz="1000" dirty="0"/>
+          </a:p>
+        </p:txBody>
+      </p:sp>
+      <p:sp>
+        <p:nvSpPr>
+          <p:cNvPr id="84" name="KEY MESSAGE"/>
+          <p:cNvSpPr txBox="1"/>
+          <p:nvPr/>
+        </p:nvSpPr>
+        <p:spPr>
+          <a:xfrm>
+            <a:off x="1308100" y="6007298"/>
+            <a:ext cx="1171825" cy="146050"/>
+          </a:xfrm>
+          <a:prstGeom prst="rect">
+            <a:avLst/>
+          </a:prstGeom>
+          <a:noFill/>
+          <a:ln/>
+        </p:spPr>
+        <p:txBody>
+          <a:bodyPr wrap="none" lIns="0" tIns="0" rIns="0" bIns="0" rtlCol="0" anchor="ctr"/>
+          <a:lstStyle/>
+          <a:p>
+            <a:pPr algn="l" indent="0" marL="0">
+              <a:buNone/>
+            </a:pPr>
+            <a:r>
+              <a:rPr lang="ko-KR" altLang="en-US" sz="950" spc="152" kern="0" dirty="0">
+                <a:solidFill>
+                  <a:srgbClr val="8FD3F5"/>
+                </a:solidFill>
+                <a:latin typeface="Paperlogy 7 Bold" pitchFamily="34" charset="0"/>
+                <a:ea typeface="Paperlogy 7 Bold" pitchFamily="34" charset="-127"/>
+                <a:cs typeface="Paperlogy 7 Bold" pitchFamily="34" charset="-120"/>
+              </a:rPr>
+              <a:t>KEY MESSAGE</a:t>
+            </a:r>
+            <a:endParaRPr lang="en-US" sz="950" dirty="0"/>
+          </a:p>
+        </p:txBody>
+      </p:sp>
+      <p:sp>
+        <p:nvSpPr>
+          <p:cNvPr id="85" name="서로 다른 사람을 하나의 공동 목표로 연결합니다"/>
+          <p:cNvSpPr txBox="1"/>
+          <p:nvPr/>
+        </p:nvSpPr>
+        <p:spPr>
+          <a:xfrm>
+            <a:off x="2591395" y="5954514"/>
+            <a:ext cx="4151660" cy="254000"/>
+          </a:xfrm>
+          <a:prstGeom prst="rect">
+            <a:avLst/>
+          </a:prstGeom>
+          <a:noFill/>
+          <a:ln/>
+        </p:spPr>
+        <p:txBody>
+          <a:bodyPr wrap="none" lIns="0" tIns="0" rIns="0" bIns="0" rtlCol="0" anchor="ctr"/>
+          <a:lstStyle/>
+          <a:p>
+            <a:pPr algn="l" indent="0" marL="0">
+              <a:buNone/>
+            </a:pPr>
+            <a:r>
+              <a:rPr lang="ko-KR" altLang="en-US" sz="1700" spc="-51" kern="0" dirty="0">
                 <a:solidFill>
                   <a:srgbClr val="FFFFFF"/>
                 </a:solidFill>
-                <a:latin typeface="Paperlogy 8 ExtraBold" pitchFamily="34" charset="0"/>
-                <a:ea typeface="Paperlogy 8 ExtraBold" pitchFamily="34" charset="-127"/>
-                <a:cs typeface="Paperlogy 8 ExtraBold" pitchFamily="34" charset="-120"/>
-              </a:rPr>
-              <a:t>‘유닛 모듈러 기반 사용자 맞춤형</a:t>
+                <a:latin typeface="Paperlogy 7 Bold" pitchFamily="34" charset="0"/>
+                <a:ea typeface="Paperlogy 7 Bold" pitchFamily="34" charset="-127"/>
+                <a:cs typeface="Paperlogy 7 Bold" pitchFamily="34" charset="-120"/>
+              </a:rPr>
+              <a:t>서로 다른 사람을 </a:t>
+            </a:r>
+            <a:pPr algn="l" indent="0" marL="0">
+              <a:buNone/>
+            </a:pPr>
+            <a:r>
+              <a:rPr lang="ko-KR" altLang="en-US" sz="1700" spc="-51" kern="0" dirty="0">
+                <a:solidFill>
+                  <a:srgbClr val="FDBB30"/>
+                </a:solidFill>
+                <a:latin typeface="Paperlogy 7 Bold" pitchFamily="34" charset="0"/>
+                <a:ea typeface="Paperlogy 7 Bold" pitchFamily="34" charset="-127"/>
+                <a:cs typeface="Paperlogy 7 Bold" pitchFamily="34" charset="-120"/>
+              </a:rPr>
+              <a:t>하나의 공동 목표</a:t>
+            </a:r>
+            <a:pPr algn="l" indent="0" marL="0">
+              <a:buNone/>
+            </a:pPr>
+            <a:r>
+              <a:rPr lang="ko-KR" altLang="en-US" sz="1700" spc="-51" kern="0" dirty="0">
+                <a:solidFill>
+                  <a:srgbClr val="FFFFFF"/>
+                </a:solidFill>
+                <a:latin typeface="Paperlogy 7 Bold" pitchFamily="34" charset="0"/>
+                <a:ea typeface="Paperlogy 7 Bold" pitchFamily="34" charset="-127"/>
+                <a:cs typeface="Paperlogy 7 Bold" pitchFamily="34" charset="-120"/>
+              </a:rPr>
+              <a:t>로 연결합니다</a:t>
             </a:r>
             <a:endParaRPr lang="en-US" sz="1700" dirty="0"/>
           </a:p>
@@ -2608,976 +3697,37 @@
       </p:sp>
       <p:sp>
         <p:nvSpPr>
-          <p:cNvPr id="57" name="리모델링 방법’ 선정"/>
-          <p:cNvSpPr txBox="1"/>
-          <p:nvPr/>
-        </p:nvSpPr>
-        <p:spPr>
-          <a:xfrm>
-            <a:off x="914400" y="4776589"/>
-            <a:ext cx="1690428" cy="254000"/>
-          </a:xfrm>
-          <a:prstGeom prst="rect">
-            <a:avLst/>
-          </a:prstGeom>
-          <a:noFill/>
-          <a:ln/>
-        </p:spPr>
-        <p:txBody>
-          <a:bodyPr wrap="none" lIns="0" tIns="0" rIns="0" bIns="0" rtlCol="0" anchor="ctr"/>
-          <a:lstStyle/>
-          <a:p>
-            <a:pPr algn="l" indent="0" marL="0">
-              <a:buNone/>
-            </a:pPr>
-            <a:r>
-              <a:rPr lang="ko-KR" altLang="en-US" sz="1700" spc="-59" kern="0" dirty="0">
-                <a:solidFill>
-                  <a:srgbClr val="FFFFFF"/>
-                </a:solidFill>
-                <a:latin typeface="Paperlogy 8 ExtraBold" pitchFamily="34" charset="0"/>
-                <a:ea typeface="Paperlogy 8 ExtraBold" pitchFamily="34" charset="-127"/>
-                <a:cs typeface="Paperlogy 8 ExtraBold" pitchFamily="34" charset="-120"/>
-              </a:rPr>
-              <a:t>리모델링 방법’ </a:t>
-            </a:r>
-            <a:pPr algn="l" indent="0" marL="0">
-              <a:buNone/>
-            </a:pPr>
-            <a:r>
-              <a:rPr lang="ko-KR" altLang="en-US" sz="1700" spc="-59" kern="0" dirty="0">
-                <a:solidFill>
-                  <a:srgbClr val="45B9EC"/>
-                </a:solidFill>
-                <a:latin typeface="Paperlogy 8 ExtraBold" pitchFamily="34" charset="0"/>
-                <a:ea typeface="Paperlogy 8 ExtraBold" pitchFamily="34" charset="-127"/>
-                <a:cs typeface="Paperlogy 8 ExtraBold" pitchFamily="34" charset="-120"/>
-              </a:rPr>
-              <a:t>선정</a:t>
-            </a:r>
-            <a:endParaRPr lang="en-US" sz="1700" dirty="0"/>
-          </a:p>
-        </p:txBody>
-      </p:sp>
-      <p:sp>
-        <p:nvSpPr>
-          <p:cNvPr id="58" name="리모델링 규모에 따라 유닛 모듈러를 배치하고,"/>
-          <p:cNvSpPr txBox="1"/>
-          <p:nvPr/>
-        </p:nvSpPr>
-        <p:spPr>
-          <a:xfrm>
-            <a:off x="914400" y="5103614"/>
-            <a:ext cx="2365526" cy="152400"/>
-          </a:xfrm>
-          <a:prstGeom prst="rect">
-            <a:avLst/>
-          </a:prstGeom>
-          <a:noFill/>
-          <a:ln/>
-        </p:spPr>
-        <p:txBody>
-          <a:bodyPr wrap="none" lIns="0" tIns="0" rIns="0" bIns="0" rtlCol="0" anchor="ctr"/>
-          <a:lstStyle/>
-          <a:p>
-            <a:pPr algn="l" indent="0" marL="0">
-              <a:buNone/>
-            </a:pPr>
-            <a:r>
-              <a:rPr lang="ko-KR" altLang="en-US" sz="1000" spc="-20" kern="0" dirty="0">
-                <a:solidFill>
-                  <a:srgbClr val="C9CED7"/>
+          <p:cNvPr id="86" name="2026년 하반기 신입사원 공개채용"/>
+          <p:cNvSpPr txBox="1"/>
+          <p:nvPr/>
+        </p:nvSpPr>
+        <p:spPr>
+          <a:xfrm>
+            <a:off x="609600" y="6425605"/>
+            <a:ext cx="1659507" cy="139700"/>
+          </a:xfrm>
+          <a:prstGeom prst="rect">
+            <a:avLst/>
+          </a:prstGeom>
+          <a:noFill/>
+          <a:ln/>
+        </p:spPr>
+        <p:txBody>
+          <a:bodyPr wrap="none" lIns="0" tIns="0" rIns="0" bIns="0" rtlCol="0" anchor="ctr"/>
+          <a:lstStyle/>
+          <a:p>
+            <a:pPr algn="l" indent="0" marL="0">
+              <a:buNone/>
+            </a:pPr>
+            <a:r>
+              <a:rPr lang="ko-KR" altLang="en-US" sz="900" spc="-9" kern="0" dirty="0">
+                <a:solidFill>
+                  <a:srgbClr val="8691A5"/>
                 </a:solidFill>
                 <a:latin typeface="Paperlogy 5 Medium" pitchFamily="34" charset="0"/>
                 <a:ea typeface="Paperlogy 5 Medium" pitchFamily="34" charset="-127"/>
                 <a:cs typeface="Paperlogy 5 Medium" pitchFamily="34" charset="-120"/>
               </a:rPr>
-              <a:t>리모델링 규모에 따라 유닛 모듈러를 배치하고,</a:t>
-            </a:r>
-            <a:endParaRPr lang="en-US" sz="1000" dirty="0"/>
-          </a:p>
-        </p:txBody>
-      </p:sp>
-      <p:sp>
-        <p:nvSpPr>
-          <p:cNvPr id="59" name="모듈 수 · 자재 물량을 자동 산출"/>
-          <p:cNvSpPr txBox="1"/>
-          <p:nvPr/>
-        </p:nvSpPr>
-        <p:spPr>
-          <a:xfrm>
-            <a:off x="914400" y="5281414"/>
-            <a:ext cx="1587990" cy="152400"/>
-          </a:xfrm>
-          <a:prstGeom prst="rect">
-            <a:avLst/>
-          </a:prstGeom>
-          <a:noFill/>
-          <a:ln/>
-        </p:spPr>
-        <p:txBody>
-          <a:bodyPr wrap="none" lIns="0" tIns="0" rIns="0" bIns="0" rtlCol="0" anchor="ctr"/>
-          <a:lstStyle/>
-          <a:p>
-            <a:pPr algn="l" indent="0" marL="0">
-              <a:buNone/>
-            </a:pPr>
-            <a:r>
-              <a:rPr lang="ko-KR" altLang="en-US" sz="1000" spc="-20" kern="0" dirty="0">
-                <a:solidFill>
-                  <a:srgbClr val="C9CED7"/>
-                </a:solidFill>
-                <a:latin typeface="Paperlogy 5 Medium" pitchFamily="34" charset="0"/>
-                <a:ea typeface="Paperlogy 5 Medium" pitchFamily="34" charset="-127"/>
-                <a:cs typeface="Paperlogy 5 Medium" pitchFamily="34" charset="-120"/>
-              </a:rPr>
-              <a:t>모듈 수 · 자재 물량을 자동 산출</a:t>
-            </a:r>
-            <a:endParaRPr lang="en-US" sz="1000" dirty="0"/>
-          </a:p>
-        </p:txBody>
-      </p:sp>
-      <p:sp>
-        <p:nvSpPr>
-          <p:cNvPr id="60" name="팀장 · 나"/>
-          <p:cNvSpPr txBox="1"/>
-          <p:nvPr/>
-        </p:nvSpPr>
-        <p:spPr>
-          <a:xfrm>
-            <a:off x="6149578" y="2696964"/>
-            <a:ext cx="553045" cy="177800"/>
-          </a:xfrm>
-          <a:prstGeom prst="rect">
-            <a:avLst/>
-          </a:prstGeom>
-          <a:noFill/>
-          <a:ln/>
-        </p:spPr>
-        <p:txBody>
-          <a:bodyPr wrap="none" lIns="0" tIns="0" rIns="0" bIns="0" rtlCol="0" anchor="ctr"/>
-          <a:lstStyle/>
-          <a:p>
-            <a:pPr algn="ctr" indent="0" marL="0">
-              <a:buNone/>
-            </a:pPr>
-            <a:r>
-              <a:rPr lang="ko-KR" altLang="en-US" sz="1200" spc="-24" kern="0" dirty="0">
-                <a:solidFill>
-                  <a:srgbClr val="FFFFFF"/>
-                </a:solidFill>
-                <a:latin typeface="Paperlogy 8 ExtraBold" pitchFamily="34" charset="0"/>
-                <a:ea typeface="Paperlogy 8 ExtraBold" pitchFamily="34" charset="-127"/>
-                <a:cs typeface="Paperlogy 8 ExtraBold" pitchFamily="34" charset="-120"/>
-              </a:rPr>
-              <a:t>팀장 · 나</a:t>
-            </a:r>
-            <a:endParaRPr lang="en-US" sz="1200" dirty="0"/>
-          </a:p>
-        </p:txBody>
-      </p:sp>
-      <p:sp>
-        <p:nvSpPr>
-          <p:cNvPr id="61" name="프로젝트 총괄 ·"/>
-          <p:cNvSpPr txBox="1"/>
-          <p:nvPr/>
-        </p:nvSpPr>
-        <p:spPr>
-          <a:xfrm>
-            <a:off x="5882198" y="2926755"/>
-            <a:ext cx="935504" cy="177800"/>
-          </a:xfrm>
-          <a:prstGeom prst="rect">
-            <a:avLst/>
-          </a:prstGeom>
-          <a:noFill/>
-          <a:ln/>
-        </p:spPr>
-        <p:txBody>
-          <a:bodyPr wrap="none" lIns="0" tIns="0" rIns="0" bIns="0" rtlCol="0" anchor="ctr"/>
-          <a:lstStyle/>
-          <a:p>
-            <a:pPr algn="ctr" indent="0" marL="0">
-              <a:buNone/>
-            </a:pPr>
-            <a:r>
-              <a:rPr lang="ko-KR" altLang="en-US" sz="1200" spc="-30" kern="0" dirty="0">
-                <a:solidFill>
-                  <a:srgbClr val="DADEE3"/>
-                </a:solidFill>
-                <a:latin typeface="Paperlogy 5 Medium" pitchFamily="34" charset="0"/>
-                <a:ea typeface="Paperlogy 5 Medium" pitchFamily="34" charset="-127"/>
-                <a:cs typeface="Paperlogy 5 Medium" pitchFamily="34" charset="-120"/>
-              </a:rPr>
-              <a:t>프로젝트 총괄 ·</a:t>
-            </a:r>
-            <a:endParaRPr lang="en-US" sz="1200" dirty="0"/>
-          </a:p>
-        </p:txBody>
-      </p:sp>
-      <p:sp>
-        <p:nvSpPr>
-          <p:cNvPr id="62" name="Dynamo 기반 자동화 알고리즘 개발"/>
-          <p:cNvSpPr txBox="1"/>
-          <p:nvPr/>
-        </p:nvSpPr>
-        <p:spPr>
-          <a:xfrm>
-            <a:off x="5185750" y="3132435"/>
-            <a:ext cx="2328400" cy="177800"/>
-          </a:xfrm>
-          <a:prstGeom prst="rect">
-            <a:avLst/>
-          </a:prstGeom>
-          <a:noFill/>
-          <a:ln/>
-        </p:spPr>
-        <p:txBody>
-          <a:bodyPr wrap="none" lIns="0" tIns="0" rIns="0" bIns="0" rtlCol="0" anchor="ctr"/>
-          <a:lstStyle/>
-          <a:p>
-            <a:pPr algn="ctr" indent="0" marL="0">
-              <a:buNone/>
-            </a:pPr>
-            <a:r>
-              <a:rPr lang="ko-KR" altLang="en-US" sz="1200" spc="-30" kern="0" dirty="0">
-                <a:solidFill>
-                  <a:srgbClr val="DADEE3"/>
-                </a:solidFill>
-                <a:latin typeface="Paperlogy 5 Medium" pitchFamily="34" charset="0"/>
-                <a:ea typeface="Paperlogy 5 Medium" pitchFamily="34" charset="-127"/>
-                <a:cs typeface="Paperlogy 5 Medium" pitchFamily="34" charset="-120"/>
-              </a:rPr>
-              <a:t>Dynamo 기반 자동화 알고리즘 개발</a:t>
-            </a:r>
-            <a:endParaRPr lang="en-US" sz="1200" dirty="0"/>
-          </a:p>
-        </p:txBody>
-      </p:sp>
-      <p:sp>
-        <p:nvSpPr>
-          <p:cNvPr id="63" name="팀원 A"/>
-          <p:cNvSpPr txBox="1"/>
-          <p:nvPr/>
-        </p:nvSpPr>
-        <p:spPr>
-          <a:xfrm>
-            <a:off x="4854873" y="4068366"/>
-            <a:ext cx="458589" cy="177800"/>
-          </a:xfrm>
-          <a:prstGeom prst="rect">
-            <a:avLst/>
-          </a:prstGeom>
-          <a:noFill/>
-          <a:ln/>
-        </p:spPr>
-        <p:txBody>
-          <a:bodyPr wrap="none" lIns="0" tIns="0" rIns="0" bIns="0" rtlCol="0" anchor="ctr"/>
-          <a:lstStyle/>
-          <a:p>
-            <a:pPr algn="ctr" indent="0" marL="0">
-              <a:buNone/>
-            </a:pPr>
-            <a:r>
-              <a:rPr lang="ko-KR" altLang="en-US" sz="1200" spc="-24" kern="0" dirty="0">
-                <a:solidFill>
-                  <a:srgbClr val="0B2147"/>
-                </a:solidFill>
-                <a:latin typeface="Paperlogy 8 ExtraBold" pitchFamily="34" charset="0"/>
-                <a:ea typeface="Paperlogy 8 ExtraBold" pitchFamily="34" charset="-127"/>
-                <a:cs typeface="Paperlogy 8 ExtraBold" pitchFamily="34" charset="-120"/>
-              </a:rPr>
-              <a:t>팀원 A</a:t>
-            </a:r>
-            <a:endParaRPr lang="en-US" sz="1200" dirty="0"/>
-          </a:p>
-        </p:txBody>
-      </p:sp>
-      <p:sp>
-        <p:nvSpPr>
-          <p:cNvPr id="64" name="유닛 모듈러 설계 ·"/>
-          <p:cNvSpPr txBox="1"/>
-          <p:nvPr/>
-        </p:nvSpPr>
-        <p:spPr>
-          <a:xfrm>
-            <a:off x="4455394" y="4298156"/>
-            <a:ext cx="1105146" cy="177800"/>
-          </a:xfrm>
-          <a:prstGeom prst="rect">
-            <a:avLst/>
-          </a:prstGeom>
-          <a:noFill/>
-          <a:ln/>
-        </p:spPr>
-        <p:txBody>
-          <a:bodyPr wrap="none" lIns="0" tIns="0" rIns="0" bIns="0" rtlCol="0" anchor="ctr"/>
-          <a:lstStyle/>
-          <a:p>
-            <a:pPr algn="ctr" indent="0" marL="0">
-              <a:buNone/>
-            </a:pPr>
-            <a:r>
-              <a:rPr lang="ko-KR" altLang="en-US" sz="1200" spc="-30" kern="0" dirty="0">
-                <a:solidFill>
-                  <a:srgbClr val="4B5568"/>
-                </a:solidFill>
-                <a:latin typeface="Paperlogy 5 Medium" pitchFamily="34" charset="0"/>
-                <a:ea typeface="Paperlogy 5 Medium" pitchFamily="34" charset="-127"/>
-                <a:cs typeface="Paperlogy 5 Medium" pitchFamily="34" charset="-120"/>
-              </a:rPr>
-              <a:t>유닛 모듈러 설계 ·</a:t>
-            </a:r>
-            <a:endParaRPr lang="en-US" sz="1200" dirty="0"/>
-          </a:p>
-        </p:txBody>
-      </p:sp>
-      <p:sp>
-        <p:nvSpPr>
-          <p:cNvPr id="65" name="배치계획"/>
-          <p:cNvSpPr txBox="1"/>
-          <p:nvPr/>
-        </p:nvSpPr>
-        <p:spPr>
-          <a:xfrm>
-            <a:off x="4721920" y="4503837"/>
-            <a:ext cx="572095" cy="177800"/>
-          </a:xfrm>
-          <a:prstGeom prst="rect">
-            <a:avLst/>
-          </a:prstGeom>
-          <a:noFill/>
-          <a:ln/>
-        </p:spPr>
-        <p:txBody>
-          <a:bodyPr wrap="none" lIns="0" tIns="0" rIns="0" bIns="0" rtlCol="0" anchor="ctr"/>
-          <a:lstStyle/>
-          <a:p>
-            <a:pPr algn="ctr" indent="0" marL="0">
-              <a:buNone/>
-            </a:pPr>
-            <a:r>
-              <a:rPr lang="ko-KR" altLang="en-US" sz="1200" spc="-30" kern="0" dirty="0">
-                <a:solidFill>
-                  <a:srgbClr val="4B5568"/>
-                </a:solidFill>
-                <a:latin typeface="Paperlogy 5 Medium" pitchFamily="34" charset="0"/>
-                <a:ea typeface="Paperlogy 5 Medium" pitchFamily="34" charset="-127"/>
-                <a:cs typeface="Paperlogy 5 Medium" pitchFamily="34" charset="-120"/>
-              </a:rPr>
-              <a:t>배치계획</a:t>
-            </a:r>
-            <a:endParaRPr lang="en-US" sz="1200" dirty="0"/>
-          </a:p>
-        </p:txBody>
-      </p:sp>
-      <p:sp>
-        <p:nvSpPr>
-          <p:cNvPr id="66" name="팀원 B"/>
-          <p:cNvSpPr txBox="1"/>
-          <p:nvPr/>
-        </p:nvSpPr>
-        <p:spPr>
-          <a:xfrm>
-            <a:off x="6196905" y="4068366"/>
-            <a:ext cx="458391" cy="177800"/>
-          </a:xfrm>
-          <a:prstGeom prst="rect">
-            <a:avLst/>
-          </a:prstGeom>
-          <a:noFill/>
-          <a:ln/>
-        </p:spPr>
-        <p:txBody>
-          <a:bodyPr wrap="none" lIns="0" tIns="0" rIns="0" bIns="0" rtlCol="0" anchor="ctr"/>
-          <a:lstStyle/>
-          <a:p>
-            <a:pPr algn="ctr" indent="0" marL="0">
-              <a:buNone/>
-            </a:pPr>
-            <a:r>
-              <a:rPr lang="ko-KR" altLang="en-US" sz="1200" spc="-24" kern="0" dirty="0">
-                <a:solidFill>
-                  <a:srgbClr val="0B2147"/>
-                </a:solidFill>
-                <a:latin typeface="Paperlogy 8 ExtraBold" pitchFamily="34" charset="0"/>
-                <a:ea typeface="Paperlogy 8 ExtraBold" pitchFamily="34" charset="-127"/>
-                <a:cs typeface="Paperlogy 8 ExtraBold" pitchFamily="34" charset="-120"/>
-              </a:rPr>
-              <a:t>팀원 B</a:t>
-            </a:r>
-            <a:endParaRPr lang="en-US" sz="1200" dirty="0"/>
-          </a:p>
-        </p:txBody>
-      </p:sp>
-      <p:sp>
-        <p:nvSpPr>
-          <p:cNvPr id="67" name="Revit 기반"/>
-          <p:cNvSpPr txBox="1"/>
-          <p:nvPr/>
-        </p:nvSpPr>
-        <p:spPr>
-          <a:xfrm>
-            <a:off x="5992912" y="4298156"/>
-            <a:ext cx="713978" cy="177800"/>
-          </a:xfrm>
-          <a:prstGeom prst="rect">
-            <a:avLst/>
-          </a:prstGeom>
-          <a:noFill/>
-          <a:ln/>
-        </p:spPr>
-        <p:txBody>
-          <a:bodyPr wrap="none" lIns="0" tIns="0" rIns="0" bIns="0" rtlCol="0" anchor="ctr"/>
-          <a:lstStyle/>
-          <a:p>
-            <a:pPr algn="ctr" indent="0" marL="0">
-              <a:buNone/>
-            </a:pPr>
-            <a:r>
-              <a:rPr lang="ko-KR" altLang="en-US" sz="1200" spc="-30" kern="0" dirty="0">
-                <a:solidFill>
-                  <a:srgbClr val="4B5568"/>
-                </a:solidFill>
-                <a:latin typeface="Paperlogy 5 Medium" pitchFamily="34" charset="0"/>
-                <a:ea typeface="Paperlogy 5 Medium" pitchFamily="34" charset="-127"/>
-                <a:cs typeface="Paperlogy 5 Medium" pitchFamily="34" charset="-120"/>
-              </a:rPr>
-              <a:t>Revit 기반</a:t>
-            </a:r>
-            <a:endParaRPr lang="en-US" sz="1200" dirty="0"/>
-          </a:p>
-        </p:txBody>
-      </p:sp>
-      <p:sp>
-        <p:nvSpPr>
-          <p:cNvPr id="68" name="BIM 모델링 ·"/>
-          <p:cNvSpPr txBox="1"/>
-          <p:nvPr/>
-        </p:nvSpPr>
-        <p:spPr>
-          <a:xfrm>
-            <a:off x="5930404" y="4503837"/>
-            <a:ext cx="838994" cy="177800"/>
-          </a:xfrm>
-          <a:prstGeom prst="rect">
-            <a:avLst/>
-          </a:prstGeom>
-          <a:noFill/>
-          <a:ln/>
-        </p:spPr>
-        <p:txBody>
-          <a:bodyPr wrap="none" lIns="0" tIns="0" rIns="0" bIns="0" rtlCol="0" anchor="ctr"/>
-          <a:lstStyle/>
-          <a:p>
-            <a:pPr algn="ctr" indent="0" marL="0">
-              <a:buNone/>
-            </a:pPr>
-            <a:r>
-              <a:rPr lang="ko-KR" altLang="en-US" sz="1200" spc="-30" kern="0" dirty="0">
-                <a:solidFill>
-                  <a:srgbClr val="4B5568"/>
-                </a:solidFill>
-                <a:latin typeface="Paperlogy 5 Medium" pitchFamily="34" charset="0"/>
-                <a:ea typeface="Paperlogy 5 Medium" pitchFamily="34" charset="-127"/>
-                <a:cs typeface="Paperlogy 5 Medium" pitchFamily="34" charset="-120"/>
-              </a:rPr>
-              <a:t>BIM 모델링 ·</a:t>
-            </a:r>
-            <a:endParaRPr lang="en-US" sz="1200" dirty="0"/>
-          </a:p>
-        </p:txBody>
-      </p:sp>
-      <p:sp>
-        <p:nvSpPr>
-          <p:cNvPr id="69" name="데이터 구축"/>
-          <p:cNvSpPr txBox="1"/>
-          <p:nvPr/>
-        </p:nvSpPr>
-        <p:spPr>
-          <a:xfrm>
-            <a:off x="5983883" y="4709517"/>
-            <a:ext cx="732036" cy="177800"/>
-          </a:xfrm>
-          <a:prstGeom prst="rect">
-            <a:avLst/>
-          </a:prstGeom>
-          <a:noFill/>
-          <a:ln/>
-        </p:spPr>
-        <p:txBody>
-          <a:bodyPr wrap="none" lIns="0" tIns="0" rIns="0" bIns="0" rtlCol="0" anchor="ctr"/>
-          <a:lstStyle/>
-          <a:p>
-            <a:pPr algn="ctr" indent="0" marL="0">
-              <a:buNone/>
-            </a:pPr>
-            <a:r>
-              <a:rPr lang="ko-KR" altLang="en-US" sz="1200" spc="-30" kern="0" dirty="0">
-                <a:solidFill>
-                  <a:srgbClr val="4B5568"/>
-                </a:solidFill>
-                <a:latin typeface="Paperlogy 5 Medium" pitchFamily="34" charset="0"/>
-                <a:ea typeface="Paperlogy 5 Medium" pitchFamily="34" charset="-127"/>
-                <a:cs typeface="Paperlogy 5 Medium" pitchFamily="34" charset="-120"/>
-              </a:rPr>
-              <a:t>데이터 구축</a:t>
-            </a:r>
-            <a:endParaRPr lang="en-US" sz="1200" dirty="0"/>
-          </a:p>
-        </p:txBody>
-      </p:sp>
-      <p:sp>
-        <p:nvSpPr>
-          <p:cNvPr id="70" name="팀원 C"/>
-          <p:cNvSpPr txBox="1"/>
-          <p:nvPr/>
-        </p:nvSpPr>
-        <p:spPr>
-          <a:xfrm>
-            <a:off x="7541419" y="4068366"/>
-            <a:ext cx="453231" cy="177800"/>
-          </a:xfrm>
-          <a:prstGeom prst="rect">
-            <a:avLst/>
-          </a:prstGeom>
-          <a:noFill/>
-          <a:ln/>
-        </p:spPr>
-        <p:txBody>
-          <a:bodyPr wrap="none" lIns="0" tIns="0" rIns="0" bIns="0" rtlCol="0" anchor="ctr"/>
-          <a:lstStyle/>
-          <a:p>
-            <a:pPr algn="ctr" indent="0" marL="0">
-              <a:buNone/>
-            </a:pPr>
-            <a:r>
-              <a:rPr lang="ko-KR" altLang="en-US" sz="1200" spc="-24" kern="0" dirty="0">
-                <a:solidFill>
-                  <a:srgbClr val="0B2147"/>
-                </a:solidFill>
-                <a:latin typeface="Paperlogy 8 ExtraBold" pitchFamily="34" charset="0"/>
-                <a:ea typeface="Paperlogy 8 ExtraBold" pitchFamily="34" charset="-127"/>
-                <a:cs typeface="Paperlogy 8 ExtraBold" pitchFamily="34" charset="-120"/>
-              </a:rPr>
-              <a:t>팀원 C</a:t>
-            </a:r>
-            <a:endParaRPr lang="en-US" sz="1200" dirty="0"/>
-          </a:p>
-        </p:txBody>
-      </p:sp>
-      <p:sp>
-        <p:nvSpPr>
-          <p:cNvPr id="71" name="리모델링 적용"/>
-          <p:cNvSpPr txBox="1"/>
-          <p:nvPr/>
-        </p:nvSpPr>
-        <p:spPr>
-          <a:xfrm>
-            <a:off x="7260630" y="4298156"/>
-            <a:ext cx="862409" cy="177800"/>
-          </a:xfrm>
-          <a:prstGeom prst="rect">
-            <a:avLst/>
-          </a:prstGeom>
-          <a:noFill/>
-          <a:ln/>
-        </p:spPr>
-        <p:txBody>
-          <a:bodyPr wrap="none" lIns="0" tIns="0" rIns="0" bIns="0" rtlCol="0" anchor="ctr"/>
-          <a:lstStyle/>
-          <a:p>
-            <a:pPr algn="ctr" indent="0" marL="0">
-              <a:buNone/>
-            </a:pPr>
-            <a:r>
-              <a:rPr lang="ko-KR" altLang="en-US" sz="1200" spc="-30" kern="0" dirty="0">
-                <a:solidFill>
-                  <a:srgbClr val="4B5568"/>
-                </a:solidFill>
-                <a:latin typeface="Paperlogy 5 Medium" pitchFamily="34" charset="0"/>
-                <a:ea typeface="Paperlogy 5 Medium" pitchFamily="34" charset="-127"/>
-                <a:cs typeface="Paperlogy 5 Medium" pitchFamily="34" charset="-120"/>
-              </a:rPr>
-              <a:t>리모델링 적용</a:t>
-            </a:r>
-            <a:endParaRPr lang="en-US" sz="1200" dirty="0"/>
-          </a:p>
-        </p:txBody>
-      </p:sp>
-      <p:sp>
-        <p:nvSpPr>
-          <p:cNvPr id="72" name="시나리오 구성 ·"/>
-          <p:cNvSpPr txBox="1"/>
-          <p:nvPr/>
-        </p:nvSpPr>
-        <p:spPr>
-          <a:xfrm>
-            <a:off x="7224132" y="4503837"/>
-            <a:ext cx="935504" cy="177800"/>
-          </a:xfrm>
-          <a:prstGeom prst="rect">
-            <a:avLst/>
-          </a:prstGeom>
-          <a:noFill/>
-          <a:ln/>
-        </p:spPr>
-        <p:txBody>
-          <a:bodyPr wrap="none" lIns="0" tIns="0" rIns="0" bIns="0" rtlCol="0" anchor="ctr"/>
-          <a:lstStyle/>
-          <a:p>
-            <a:pPr algn="ctr" indent="0" marL="0">
-              <a:buNone/>
-            </a:pPr>
-            <a:r>
-              <a:rPr lang="ko-KR" altLang="en-US" sz="1200" spc="-30" kern="0" dirty="0">
-                <a:solidFill>
-                  <a:srgbClr val="4B5568"/>
-                </a:solidFill>
-                <a:latin typeface="Paperlogy 5 Medium" pitchFamily="34" charset="0"/>
-                <a:ea typeface="Paperlogy 5 Medium" pitchFamily="34" charset="-127"/>
-                <a:cs typeface="Paperlogy 5 Medium" pitchFamily="34" charset="-120"/>
-              </a:rPr>
-              <a:t>시나리오 구성 ·</a:t>
-            </a:r>
-            <a:endParaRPr lang="en-US" sz="1200" dirty="0"/>
-          </a:p>
-        </p:txBody>
-      </p:sp>
-      <p:sp>
-        <p:nvSpPr>
-          <p:cNvPr id="73" name="시연 영상 제작"/>
-          <p:cNvSpPr txBox="1"/>
-          <p:nvPr/>
-        </p:nvSpPr>
-        <p:spPr>
-          <a:xfrm>
-            <a:off x="7245846" y="4709517"/>
-            <a:ext cx="892076" cy="177800"/>
-          </a:xfrm>
-          <a:prstGeom prst="rect">
-            <a:avLst/>
-          </a:prstGeom>
-          <a:noFill/>
-          <a:ln/>
-        </p:spPr>
-        <p:txBody>
-          <a:bodyPr wrap="none" lIns="0" tIns="0" rIns="0" bIns="0" rtlCol="0" anchor="ctr"/>
-          <a:lstStyle/>
-          <a:p>
-            <a:pPr algn="ctr" indent="0" marL="0">
-              <a:buNone/>
-            </a:pPr>
-            <a:r>
-              <a:rPr lang="ko-KR" altLang="en-US" sz="1200" spc="-30" kern="0" dirty="0">
-                <a:solidFill>
-                  <a:srgbClr val="4B5568"/>
-                </a:solidFill>
-                <a:latin typeface="Paperlogy 5 Medium" pitchFamily="34" charset="0"/>
-                <a:ea typeface="Paperlogy 5 Medium" pitchFamily="34" charset="-127"/>
-                <a:cs typeface="Paperlogy 5 Medium" pitchFamily="34" charset="-120"/>
-              </a:rPr>
-              <a:t>시연 영상 제작</a:t>
-            </a:r>
-            <a:endParaRPr lang="en-US" sz="1200" dirty="0"/>
-          </a:p>
-        </p:txBody>
-      </p:sp>
-      <p:sp>
-        <p:nvSpPr>
-          <p:cNvPr id="74" name="이틀마다 진행상황 공유 · 피드백"/>
-          <p:cNvSpPr txBox="1"/>
-          <p:nvPr/>
-        </p:nvSpPr>
-        <p:spPr>
-          <a:xfrm>
-            <a:off x="5528370" y="5304234"/>
-            <a:ext cx="1984173" cy="177800"/>
-          </a:xfrm>
-          <a:prstGeom prst="rect">
-            <a:avLst/>
-          </a:prstGeom>
-          <a:noFill/>
-          <a:ln/>
-        </p:spPr>
-        <p:txBody>
-          <a:bodyPr wrap="none" lIns="0" tIns="0" rIns="0" bIns="0" rtlCol="0" anchor="ctr"/>
-          <a:lstStyle/>
-          <a:p>
-            <a:pPr algn="l" indent="0" marL="0">
-              <a:buNone/>
-            </a:pPr>
-            <a:r>
-              <a:rPr lang="ko-KR" altLang="en-US" sz="1200" spc="-24" kern="0" dirty="0">
-                <a:solidFill>
-                  <a:srgbClr val="0B2147"/>
-                </a:solidFill>
-                <a:latin typeface="Paperlogy 7 Bold" pitchFamily="34" charset="0"/>
-                <a:ea typeface="Paperlogy 7 Bold" pitchFamily="34" charset="-127"/>
-                <a:cs typeface="Paperlogy 7 Bold" pitchFamily="34" charset="-120"/>
-              </a:rPr>
-              <a:t>이틀마다 진행상황 공유 · 피드백</a:t>
-            </a:r>
-            <a:endParaRPr lang="en-US" sz="1200" dirty="0"/>
-          </a:p>
-        </p:txBody>
-      </p:sp>
-      <p:sp>
-        <p:nvSpPr>
-          <p:cNvPr id="75" name="리모델링 앱 개발 아이디어 시연 영상"/>
-          <p:cNvSpPr txBox="1"/>
-          <p:nvPr/>
-        </p:nvSpPr>
-        <p:spPr>
-          <a:xfrm>
-            <a:off x="9239200" y="3497064"/>
-            <a:ext cx="1871323" cy="152400"/>
-          </a:xfrm>
-          <a:prstGeom prst="rect">
-            <a:avLst/>
-          </a:prstGeom>
-          <a:noFill/>
-          <a:ln/>
-        </p:spPr>
-        <p:txBody>
-          <a:bodyPr wrap="none" lIns="0" tIns="0" rIns="0" bIns="0" rtlCol="0" anchor="ctr"/>
-          <a:lstStyle/>
-          <a:p>
-            <a:pPr algn="l" indent="0" marL="0">
-              <a:buNone/>
-            </a:pPr>
-            <a:r>
-              <a:rPr lang="ko-KR" altLang="en-US" sz="1000" spc="-20" kern="0" dirty="0">
-                <a:solidFill>
-                  <a:srgbClr val="4B5568"/>
-                </a:solidFill>
-                <a:latin typeface="Paperlogy 6 SemiBold" pitchFamily="34" charset="0"/>
-                <a:ea typeface="Paperlogy 6 SemiBold" pitchFamily="34" charset="-127"/>
-                <a:cs typeface="Paperlogy 6 SemiBold" pitchFamily="34" charset="-120"/>
-              </a:rPr>
-              <a:t>리모델링 앱 개발 아이디어 시연 영상</a:t>
-            </a:r>
-            <a:endParaRPr lang="en-US" sz="1000" dirty="0"/>
-          </a:p>
-        </p:txBody>
-      </p:sp>
-      <p:sp>
-        <p:nvSpPr>
-          <p:cNvPr id="76" name="장려상"/>
-          <p:cNvSpPr txBox="1"/>
-          <p:nvPr/>
-        </p:nvSpPr>
-        <p:spPr>
-          <a:xfrm>
-            <a:off x="9749433" y="4500364"/>
-            <a:ext cx="795734" cy="342900"/>
-          </a:xfrm>
-          <a:prstGeom prst="rect">
-            <a:avLst/>
-          </a:prstGeom>
-          <a:noFill/>
-          <a:ln/>
-        </p:spPr>
-        <p:txBody>
-          <a:bodyPr wrap="none" lIns="0" tIns="0" rIns="0" bIns="0" rtlCol="0" anchor="ctr"/>
-          <a:lstStyle/>
-          <a:p>
-            <a:pPr algn="l" indent="0" marL="0">
-              <a:buNone/>
-            </a:pPr>
-            <a:r>
-              <a:rPr lang="ko-KR" altLang="en-US" sz="2300" spc="-69" kern="0" dirty="0">
-                <a:solidFill>
-                  <a:srgbClr val="0B2147"/>
-                </a:solidFill>
-                <a:latin typeface="Paperlogy 9 Black" pitchFamily="34" charset="0"/>
-                <a:ea typeface="Paperlogy 9 Black" pitchFamily="34" charset="-127"/>
-                <a:cs typeface="Paperlogy 9 Black" pitchFamily="34" charset="-120"/>
-              </a:rPr>
-              <a:t>장려상</a:t>
-            </a:r>
-            <a:endParaRPr lang="en-US" sz="2300" dirty="0"/>
-          </a:p>
-        </p:txBody>
-      </p:sp>
-      <p:sp>
-        <p:nvSpPr>
-          <p:cNvPr id="77" name="학생 BIM 경진대회 장려상 · 남은 3주 내 완성"/>
-          <p:cNvSpPr txBox="1"/>
-          <p:nvPr/>
-        </p:nvSpPr>
-        <p:spPr>
-          <a:xfrm>
-            <a:off x="9014619" y="5376664"/>
-            <a:ext cx="2347436" cy="152400"/>
-          </a:xfrm>
-          <a:prstGeom prst="rect">
-            <a:avLst/>
-          </a:prstGeom>
-          <a:noFill/>
-          <a:ln/>
-        </p:spPr>
-        <p:txBody>
-          <a:bodyPr wrap="none" lIns="0" tIns="0" rIns="0" bIns="0" rtlCol="0" anchor="ctr"/>
-          <a:lstStyle/>
-          <a:p>
-            <a:pPr algn="l" indent="0" marL="0">
-              <a:buNone/>
-            </a:pPr>
-            <a:r>
-              <a:rPr lang="ko-KR" altLang="en-US" sz="1000" spc="-20" kern="0" dirty="0">
-                <a:solidFill>
-                  <a:srgbClr val="0B2147"/>
-                </a:solidFill>
-                <a:latin typeface="Paperlogy 7 Bold" pitchFamily="34" charset="0"/>
-                <a:ea typeface="Paperlogy 7 Bold" pitchFamily="34" charset="-127"/>
-                <a:cs typeface="Paperlogy 7 Bold" pitchFamily="34" charset="-120"/>
-              </a:rPr>
-              <a:t>학생 BIM 경진대회 장려상 · 남은 3주 내 완성</a:t>
-            </a:r>
-            <a:endParaRPr lang="en-US" sz="1000" dirty="0"/>
-          </a:p>
-        </p:txBody>
-      </p:sp>
-      <p:sp>
-        <p:nvSpPr>
-          <p:cNvPr id="78" name="KEY MESSAGE"/>
-          <p:cNvSpPr txBox="1"/>
-          <p:nvPr/>
-        </p:nvSpPr>
-        <p:spPr>
-          <a:xfrm>
-            <a:off x="1308100" y="6007298"/>
-            <a:ext cx="1171825" cy="146050"/>
-          </a:xfrm>
-          <a:prstGeom prst="rect">
-            <a:avLst/>
-          </a:prstGeom>
-          <a:noFill/>
-          <a:ln/>
-        </p:spPr>
-        <p:txBody>
-          <a:bodyPr wrap="none" lIns="0" tIns="0" rIns="0" bIns="0" rtlCol="0" anchor="ctr"/>
-          <a:lstStyle/>
-          <a:p>
-            <a:pPr algn="l" indent="0" marL="0">
-              <a:buNone/>
-            </a:pPr>
-            <a:r>
-              <a:rPr lang="ko-KR" altLang="en-US" sz="950" spc="152" kern="0" dirty="0">
-                <a:solidFill>
-                  <a:srgbClr val="8FD3F5"/>
-                </a:solidFill>
-                <a:latin typeface="Paperlogy 7 Bold" pitchFamily="34" charset="0"/>
-                <a:ea typeface="Paperlogy 7 Bold" pitchFamily="34" charset="-127"/>
-                <a:cs typeface="Paperlogy 7 Bold" pitchFamily="34" charset="-120"/>
-              </a:rPr>
-              <a:t>KEY MESSAGE</a:t>
-            </a:r>
-            <a:endParaRPr lang="en-US" sz="950" dirty="0"/>
-          </a:p>
-        </p:txBody>
-      </p:sp>
-      <p:sp>
-        <p:nvSpPr>
-          <p:cNvPr id="79" name="서로 다른 사람을 하나의 공동 목표로 연결합니다"/>
-          <p:cNvSpPr txBox="1"/>
-          <p:nvPr/>
-        </p:nvSpPr>
-        <p:spPr>
-          <a:xfrm>
-            <a:off x="2591395" y="5954514"/>
-            <a:ext cx="4151660" cy="254000"/>
-          </a:xfrm>
-          <a:prstGeom prst="rect">
-            <a:avLst/>
-          </a:prstGeom>
-          <a:noFill/>
-          <a:ln/>
-        </p:spPr>
-        <p:txBody>
-          <a:bodyPr wrap="none" lIns="0" tIns="0" rIns="0" bIns="0" rtlCol="0" anchor="ctr"/>
-          <a:lstStyle/>
-          <a:p>
-            <a:pPr algn="l" indent="0" marL="0">
-              <a:buNone/>
-            </a:pPr>
-            <a:r>
-              <a:rPr lang="ko-KR" altLang="en-US" sz="1700" spc="-51" kern="0" dirty="0">
-                <a:solidFill>
-                  <a:srgbClr val="FFFFFF"/>
-                </a:solidFill>
-                <a:latin typeface="Paperlogy 7 Bold" pitchFamily="34" charset="0"/>
-                <a:ea typeface="Paperlogy 7 Bold" pitchFamily="34" charset="-127"/>
-                <a:cs typeface="Paperlogy 7 Bold" pitchFamily="34" charset="-120"/>
-              </a:rPr>
-              <a:t>서로 다른 사람을 </a:t>
-            </a:r>
-            <a:pPr algn="l" indent="0" marL="0">
-              <a:buNone/>
-            </a:pPr>
-            <a:r>
-              <a:rPr lang="ko-KR" altLang="en-US" sz="1700" spc="-51" kern="0" dirty="0">
-                <a:solidFill>
-                  <a:srgbClr val="FDBB30"/>
-                </a:solidFill>
-                <a:latin typeface="Paperlogy 7 Bold" pitchFamily="34" charset="0"/>
-                <a:ea typeface="Paperlogy 7 Bold" pitchFamily="34" charset="-127"/>
-                <a:cs typeface="Paperlogy 7 Bold" pitchFamily="34" charset="-120"/>
-              </a:rPr>
-              <a:t>하나의 공동 목표</a:t>
-            </a:r>
-            <a:pPr algn="l" indent="0" marL="0">
-              <a:buNone/>
-            </a:pPr>
-            <a:r>
-              <a:rPr lang="ko-KR" altLang="en-US" sz="1700" spc="-51" kern="0" dirty="0">
-                <a:solidFill>
-                  <a:srgbClr val="FFFFFF"/>
-                </a:solidFill>
-                <a:latin typeface="Paperlogy 7 Bold" pitchFamily="34" charset="0"/>
-                <a:ea typeface="Paperlogy 7 Bold" pitchFamily="34" charset="-127"/>
-                <a:cs typeface="Paperlogy 7 Bold" pitchFamily="34" charset="-120"/>
-              </a:rPr>
-              <a:t>로 연결합니다</a:t>
-            </a:r>
-            <a:endParaRPr lang="en-US" sz="1700" dirty="0"/>
-          </a:p>
-        </p:txBody>
-      </p:sp>
-      <p:sp>
-        <p:nvSpPr>
-          <p:cNvPr id="80" name="2026년 하반기 신입사원 공개채용"/>
-          <p:cNvSpPr txBox="1"/>
-          <p:nvPr/>
-        </p:nvSpPr>
-        <p:spPr>
-          <a:xfrm>
-            <a:off x="609600" y="6425605"/>
-            <a:ext cx="1659507" cy="139700"/>
-          </a:xfrm>
-          <a:prstGeom prst="rect">
-            <a:avLst/>
-          </a:prstGeom>
-          <a:noFill/>
-          <a:ln/>
-        </p:spPr>
-        <p:txBody>
-          <a:bodyPr wrap="none" lIns="0" tIns="0" rIns="0" bIns="0" rtlCol="0" anchor="ctr"/>
-          <a:lstStyle/>
-          <a:p>
-            <a:pPr algn="l" indent="0" marL="0">
-              <a:buNone/>
-            </a:pPr>
-            <a:r>
-              <a:rPr lang="ko-KR" altLang="en-US" sz="900" spc="-9" kern="0" dirty="0">
-                <a:solidFill>
-                  <a:srgbClr val="8691A5"/>
-                </a:solidFill>
-                <a:latin typeface="Paperlogy 5 Medium" pitchFamily="34" charset="0"/>
-                <a:ea typeface="Paperlogy 5 Medium" pitchFamily="34" charset="-127"/>
-                <a:cs typeface="Paperlogy 5 Medium" pitchFamily="34" charset="-120"/>
-              </a:rPr>
               <a:t>2026년 하반기 신입사원 공개채용</a:t>
             </a:r>
             <a:endParaRPr lang="en-US" sz="900" dirty="0"/>
@@ -3586,7 +3736,7 @@
       </p:sp>
       <p:sp>
         <p:nvSpPr>
-          <p:cNvPr id="81" name="01 / 03"/>
+          <p:cNvPr id="87" name="01 / 03"/>
           <p:cNvSpPr txBox="1"/>
           <p:nvPr/>
         </p:nvSpPr>

--- a/hec-pt/pptx/landscape.pptx
+++ b/hec-pt/pptx/landscape.pptx
@@ -1567,51 +1567,9 @@
           <a:ln/>
         </p:spPr>
       </p:sp>
-      <p:sp>
-        <p:nvSpPr>
-          <p:cNvPr id="25" name="p1-lead"/>
-          <p:cNvSpPr/>
-          <p:nvPr/>
-        </p:nvSpPr>
-        <p:spPr>
-          <a:xfrm>
-            <a:off x="5061148" y="2576314"/>
-            <a:ext cx="2577604" cy="863402"/>
-          </a:xfrm>
-          <a:prstGeom prst="roundRect">
-            <a:avLst>
-              <a:gd name="adj" fmla="val 13238"/>
-            </a:avLst>
-          </a:prstGeom>
-          <a:solidFill>
-            <a:srgbClr val="0B2147"/>
-          </a:solidFill>
-          <a:ln/>
-        </p:spPr>
-      </p:sp>
-      <p:sp>
-        <p:nvSpPr>
-          <p:cNvPr id="26" name="p1-av"/>
-          <p:cNvSpPr/>
-          <p:nvPr/>
-        </p:nvSpPr>
-        <p:spPr>
-          <a:xfrm>
-            <a:off x="6022578" y="2745184"/>
-            <a:ext cx="88900" cy="88900"/>
-          </a:xfrm>
-          <a:prstGeom prst="ellipse">
-            <a:avLst/>
-          </a:prstGeom>
-          <a:solidFill>
-            <a:srgbClr val="00A94F"/>
-          </a:solidFill>
-          <a:ln/>
-        </p:spPr>
-      </p:sp>
       <p:pic>
         <p:nvPicPr>
-          <p:cNvPr id="27" name="p1-tree" descr="p1-tree">    </p:cNvPr>
+          <p:cNvPr id="25" name="svg" descr="svg">    </p:cNvPr>
           <p:cNvPicPr>
             <a:picLocks noChangeAspect="1"/>
           </p:cNvPicPr>
@@ -1625,8 +1583,8 @@
         </p:blipFill>
         <p:spPr>
           <a:xfrm>
-            <a:off x="4997450" y="3431249"/>
-            <a:ext cx="2705100" cy="541867"/>
+            <a:off x="5063067" y="2974247"/>
+            <a:ext cx="2573867" cy="2192867"/>
           </a:xfrm>
           <a:prstGeom prst="rect">
             <a:avLst/>
@@ -1635,18 +1593,85 @@
       </p:pic>
       <p:sp>
         <p:nvSpPr>
-          <p:cNvPr id="28" name="p1-mem"/>
-          <p:cNvSpPr/>
-          <p:nvPr/>
-        </p:nvSpPr>
-        <p:spPr>
-          <a:xfrm>
-            <a:off x="4387850" y="3966766"/>
-            <a:ext cx="1240334" cy="1030982"/>
+          <p:cNvPr id="26" name="p1-card me"/>
+          <p:cNvSpPr/>
+          <p:nvPr/>
+        </p:nvSpPr>
+        <p:spPr>
+          <a:xfrm>
+            <a:off x="5638800" y="2519164"/>
+            <a:ext cx="1422400" cy="927100"/>
           </a:xfrm>
           <a:prstGeom prst="roundRect">
             <a:avLst>
-              <a:gd name="adj" fmla="val 10471"/>
+              <a:gd name="adj" fmla="val 11644"/>
+            </a:avLst>
+          </a:prstGeom>
+          <a:solidFill>
+            <a:srgbClr val="0B2147"/>
+          </a:solidFill>
+          <a:ln w="12700">
+            <a:solidFill>
+              <a:srgbClr val="0B2147"/>
+            </a:solidFill>
+            <a:prstDash val="solid"/>
+          </a:ln>
+        </p:spPr>
+      </p:sp>
+      <p:sp>
+        <p:nvSpPr>
+          <p:cNvPr id="27" name="p1-av"/>
+          <p:cNvSpPr/>
+          <p:nvPr/>
+        </p:nvSpPr>
+        <p:spPr>
+          <a:xfrm>
+            <a:off x="6022082" y="2633365"/>
+            <a:ext cx="88900" cy="88900"/>
+          </a:xfrm>
+          <a:prstGeom prst="ellipse">
+            <a:avLst/>
+          </a:prstGeom>
+          <a:solidFill>
+            <a:srgbClr val="00A94F"/>
+          </a:solidFill>
+          <a:ln/>
+        </p:spPr>
+      </p:sp>
+      <p:sp>
+        <p:nvSpPr>
+          <p:cNvPr id="28" name="p1-me"/>
+          <p:cNvSpPr/>
+          <p:nvPr/>
+        </p:nvSpPr>
+        <p:spPr>
+          <a:xfrm>
+            <a:off x="6500118" y="2588915"/>
+            <a:ext cx="177800" cy="177800"/>
+          </a:xfrm>
+          <a:prstGeom prst="ellipse">
+            <a:avLst/>
+          </a:prstGeom>
+          <a:solidFill>
+            <a:srgbClr val="FFFFFF"/>
+          </a:solidFill>
+          <a:ln/>
+        </p:spPr>
+      </p:sp>
+      <p:sp>
+        <p:nvSpPr>
+          <p:cNvPr id="29" name="p1-card"/>
+          <p:cNvSpPr/>
+          <p:nvPr/>
+        </p:nvSpPr>
+        <p:spPr>
+          <a:xfrm>
+            <a:off x="6915150" y="3605014"/>
+            <a:ext cx="1422400" cy="927100"/>
+          </a:xfrm>
+          <a:prstGeom prst="roundRect">
+            <a:avLst>
+              <a:gd name="adj" fmla="val 11644"/>
             </a:avLst>
           </a:prstGeom>
           <a:solidFill>
@@ -1662,13 +1687,13 @@
       </p:sp>
       <p:sp>
         <p:nvSpPr>
-          <p:cNvPr id="29" name="p1-av"/>
-          <p:cNvSpPr/>
-          <p:nvPr/>
-        </p:nvSpPr>
-        <p:spPr>
-          <a:xfrm>
-            <a:off x="4727873" y="4116586"/>
+          <p:cNvPr id="30" name="p1-av"/>
+          <p:cNvSpPr/>
+          <p:nvPr/>
+        </p:nvSpPr>
+        <p:spPr>
+          <a:xfrm>
+            <a:off x="7346255" y="3814465"/>
             <a:ext cx="88900" cy="88900"/>
           </a:xfrm>
           <a:prstGeom prst="ellipse">
@@ -1682,18 +1707,18 @@
       </p:sp>
       <p:sp>
         <p:nvSpPr>
-          <p:cNvPr id="30" name="p1-mem"/>
-          <p:cNvSpPr/>
-          <p:nvPr/>
-        </p:nvSpPr>
-        <p:spPr>
-          <a:xfrm>
-            <a:off x="5729784" y="3966766"/>
-            <a:ext cx="1240334" cy="1030982"/>
+          <p:cNvPr id="31" name="p1-card"/>
+          <p:cNvSpPr/>
+          <p:nvPr/>
+        </p:nvSpPr>
+        <p:spPr>
+          <a:xfrm>
+            <a:off x="5638800" y="4690864"/>
+            <a:ext cx="1422400" cy="927100"/>
           </a:xfrm>
           <a:prstGeom prst="roundRect">
             <a:avLst>
-              <a:gd name="adj" fmla="val 10471"/>
+              <a:gd name="adj" fmla="val 11644"/>
             </a:avLst>
           </a:prstGeom>
           <a:solidFill>
@@ -1709,13 +1734,13 @@
       </p:sp>
       <p:sp>
         <p:nvSpPr>
-          <p:cNvPr id="31" name="p1-av"/>
-          <p:cNvSpPr/>
-          <p:nvPr/>
-        </p:nvSpPr>
-        <p:spPr>
-          <a:xfrm>
-            <a:off x="6069905" y="4116586"/>
+          <p:cNvPr id="32" name="p1-av"/>
+          <p:cNvSpPr/>
+          <p:nvPr/>
+        </p:nvSpPr>
+        <p:spPr>
+          <a:xfrm>
+            <a:off x="6070005" y="4805065"/>
             <a:ext cx="88900" cy="88900"/>
           </a:xfrm>
           <a:prstGeom prst="ellipse">
@@ -1729,18 +1754,18 @@
       </p:sp>
       <p:sp>
         <p:nvSpPr>
-          <p:cNvPr id="32" name="p1-mem"/>
-          <p:cNvSpPr/>
-          <p:nvPr/>
-        </p:nvSpPr>
-        <p:spPr>
-          <a:xfrm>
-            <a:off x="7071717" y="3966766"/>
-            <a:ext cx="1240334" cy="1030982"/>
+          <p:cNvPr id="33" name="p1-card"/>
+          <p:cNvSpPr/>
+          <p:nvPr/>
+        </p:nvSpPr>
+        <p:spPr>
+          <a:xfrm>
+            <a:off x="4362450" y="3605014"/>
+            <a:ext cx="1422400" cy="927100"/>
           </a:xfrm>
           <a:prstGeom prst="roundRect">
             <a:avLst>
-              <a:gd name="adj" fmla="val 10471"/>
+              <a:gd name="adj" fmla="val 11644"/>
             </a:avLst>
           </a:prstGeom>
           <a:solidFill>
@@ -1756,13 +1781,13 @@
       </p:sp>
       <p:sp>
         <p:nvSpPr>
-          <p:cNvPr id="33" name="p1-av"/>
-          <p:cNvSpPr/>
-          <p:nvPr/>
-        </p:nvSpPr>
-        <p:spPr>
-          <a:xfrm>
-            <a:off x="7414419" y="4116586"/>
+          <p:cNvPr id="34" name="p1-av"/>
+          <p:cNvSpPr/>
+          <p:nvPr/>
+        </p:nvSpPr>
+        <p:spPr>
+          <a:xfrm>
+            <a:off x="4796234" y="3719215"/>
             <a:ext cx="88900" cy="88900"/>
           </a:xfrm>
           <a:prstGeom prst="ellipse">
@@ -1770,13 +1795,62 @@
           </a:prstGeom>
           <a:solidFill>
             <a:srgbClr val="00A94F"/>
+          </a:solidFill>
+          <a:ln/>
+        </p:spPr>
+      </p:sp>
+      <p:sp>
+        <p:nvSpPr>
+          <p:cNvPr id="35" name="p1-share"/>
+          <p:cNvSpPr/>
+          <p:nvPr/>
+        </p:nvSpPr>
+        <p:spPr>
+          <a:xfrm>
+            <a:off x="7131050" y="4754364"/>
+            <a:ext cx="1115120" cy="444500"/>
+          </a:xfrm>
+          <a:prstGeom prst="roundRect">
+            <a:avLst>
+              <a:gd name="adj" fmla="val 21429"/>
+            </a:avLst>
+          </a:prstGeom>
+          <a:solidFill>
+            <a:srgbClr val="E5F6EC"/>
+          </a:solidFill>
+          <a:ln w="12700">
+            <a:solidFill>
+              <a:srgbClr val="FFFFFF"/>
+            </a:solidFill>
+            <a:prstDash val="solid"/>
+          </a:ln>
+        </p:spPr>
+      </p:sp>
+      <p:sp>
+        <p:nvSpPr>
+          <p:cNvPr id="36" name="p1-blk p1-b3"/>
+          <p:cNvSpPr/>
+          <p:nvPr/>
+        </p:nvSpPr>
+        <p:spPr>
+          <a:xfrm>
+            <a:off x="8661400" y="2436614"/>
+            <a:ext cx="2921000" cy="3263900"/>
+          </a:xfrm>
+          <a:prstGeom prst="roundRect">
+            <a:avLst>
+              <a:gd name="adj" fmla="val 4783"/>
+            </a:avLst>
+          </a:prstGeom>
+          <a:solidFill>
+            <a:srgbClr val="EEF4FC"/>
           </a:solidFill>
           <a:ln/>
         </p:spPr>
       </p:sp>
       <p:pic>
         <p:nvPicPr>
-          <p:cNvPr id="34" name="svg" descr="svg">    </p:cNvPr>
+          <p:cNvPr id="37" name="svg" descr="svg">    </p:cNvPr>
           <p:cNvPicPr>
             <a:picLocks noChangeAspect="1"/>
           </p:cNvPicPr>
@@ -1790,98 +1864,6 @@
         </p:blipFill>
         <p:spPr>
           <a:xfrm>
-            <a:off x="4997450" y="5004098"/>
-            <a:ext cx="2705100" cy="226483"/>
-          </a:xfrm>
-          <a:prstGeom prst="rect">
-            <a:avLst/>
-          </a:prstGeom>
-        </p:spPr>
-      </p:pic>
-      <p:sp>
-        <p:nvSpPr>
-          <p:cNvPr id="35" name="p1-share"/>
-          <p:cNvSpPr/>
-          <p:nvPr/>
-        </p:nvSpPr>
-        <p:spPr>
-          <a:xfrm>
-            <a:off x="4381500" y="5230614"/>
-            <a:ext cx="3937000" cy="330200"/>
-          </a:xfrm>
-          <a:prstGeom prst="roundRect">
-            <a:avLst>
-              <a:gd name="adj" fmla="val 50000"/>
-            </a:avLst>
-          </a:prstGeom>
-          <a:solidFill>
-            <a:srgbClr val="E5F6EC"/>
-          </a:solidFill>
-          <a:ln/>
-        </p:spPr>
-      </p:sp>
-      <p:pic>
-        <p:nvPicPr>
-          <p:cNvPr id="36" name="svg" descr="svg">    </p:cNvPr>
-          <p:cNvPicPr>
-            <a:picLocks noChangeAspect="1"/>
-          </p:cNvPicPr>
-          <p:nvPr/>
-        </p:nvPicPr>
-        <p:blipFill>
-          <a:blip r:embed="rId8"/>
-          <a:stretch>
-            <a:fillRect/>
-          </a:stretch>
-        </p:blipFill>
-        <p:spPr>
-          <a:xfrm>
-            <a:off x="5325170" y="5330097"/>
-            <a:ext cx="118533" cy="135467"/>
-          </a:xfrm>
-          <a:prstGeom prst="rect">
-            <a:avLst/>
-          </a:prstGeom>
-        </p:spPr>
-      </p:pic>
-      <p:sp>
-        <p:nvSpPr>
-          <p:cNvPr id="37" name="p1-blk p1-b3"/>
-          <p:cNvSpPr/>
-          <p:nvPr/>
-        </p:nvSpPr>
-        <p:spPr>
-          <a:xfrm>
-            <a:off x="8661400" y="2436614"/>
-            <a:ext cx="2921000" cy="3263900"/>
-          </a:xfrm>
-          <a:prstGeom prst="roundRect">
-            <a:avLst>
-              <a:gd name="adj" fmla="val 4783"/>
-            </a:avLst>
-          </a:prstGeom>
-          <a:solidFill>
-            <a:srgbClr val="EEF4FC"/>
-          </a:solidFill>
-          <a:ln/>
-        </p:spPr>
-      </p:sp>
-      <p:pic>
-        <p:nvPicPr>
-          <p:cNvPr id="38" name="svg" descr="svg">    </p:cNvPr>
-          <p:cNvPicPr>
-            <a:picLocks noChangeAspect="1"/>
-          </p:cNvPicPr>
-          <p:nvPr/>
-        </p:nvPicPr>
-        <p:blipFill>
-          <a:blip r:embed="rId9"/>
-          <a:stretch>
-            <a:fillRect/>
-          </a:stretch>
-        </p:blipFill>
-        <p:spPr>
-          <a:xfrm>
             <a:off x="9359900" y="2591131"/>
             <a:ext cx="1524000" cy="2717800"/>
           </a:xfrm>
@@ -1892,7 +1874,7 @@
       </p:pic>
       <p:sp>
         <p:nvSpPr>
-          <p:cNvPr id="39" name="key"/>
+          <p:cNvPr id="38" name="key"/>
           <p:cNvSpPr/>
           <p:nvPr/>
         </p:nvSpPr>
@@ -1914,7 +1896,7 @@
       </p:sp>
       <p:sp>
         <p:nvSpPr>
-          <p:cNvPr id="40" name="i"/>
+          <p:cNvPr id="39" name="i"/>
           <p:cNvSpPr/>
           <p:nvPr/>
         </p:nvSpPr>
@@ -1934,7 +1916,7 @@
       </p:sp>
       <p:sp>
         <p:nvSpPr>
-          <p:cNvPr id="41" name="b"/>
+          <p:cNvPr id="40" name="b"/>
           <p:cNvSpPr/>
           <p:nvPr/>
         </p:nvSpPr>
@@ -1954,7 +1936,7 @@
       </p:sp>
       <p:sp>
         <p:nvSpPr>
-          <p:cNvPr id="42" name="i"/>
+          <p:cNvPr id="41" name="i"/>
           <p:cNvSpPr/>
           <p:nvPr/>
         </p:nvSpPr>
@@ -1974,7 +1956,7 @@
       </p:sp>
       <p:sp>
         <p:nvSpPr>
-          <p:cNvPr id="43" name="b"/>
+          <p:cNvPr id="42" name="b"/>
           <p:cNvSpPr/>
           <p:nvPr/>
         </p:nvSpPr>
@@ -1994,7 +1976,7 @@
       </p:sp>
       <p:sp>
         <p:nvSpPr>
-          <p:cNvPr id="44" name="i"/>
+          <p:cNvPr id="43" name="i"/>
           <p:cNvSpPr/>
           <p:nvPr/>
         </p:nvSpPr>
@@ -2014,7 +1996,7 @@
       </p:sp>
       <p:sp>
         <p:nvSpPr>
-          <p:cNvPr id="45" name="01"/>
+          <p:cNvPr id="44" name="01"/>
           <p:cNvSpPr txBox="1"/>
           <p:nvPr/>
         </p:nvSpPr>
@@ -2053,7 +2035,7 @@
       </p:sp>
       <p:sp>
         <p:nvSpPr>
-          <p:cNvPr id="46" name="PT 주제 1 · 가장 중요하게 생각하는 가치와 실천 경험"/>
+          <p:cNvPr id="45" name="PT 주제 1 · 가장 중요하게 생각하는 가치와 실천 경험"/>
           <p:cNvSpPr txBox="1"/>
           <p:nvPr/>
         </p:nvSpPr>
@@ -2092,7 +2074,7 @@
       </p:sp>
       <p:sp>
         <p:nvSpPr>
-          <p:cNvPr id="47" name="제가 가장 중요하게 생각하는 가치는"/>
+          <p:cNvPr id="46" name="제가 가장 중요하게 생각하는 가치는"/>
           <p:cNvSpPr txBox="1"/>
           <p:nvPr/>
         </p:nvSpPr>
@@ -2131,7 +2113,7 @@
       </p:sp>
       <p:sp>
         <p:nvSpPr>
-          <p:cNvPr id="48" name="공동의 목표를 공유하며 함께 성과를 만드는 협업입니다"/>
+          <p:cNvPr id="47" name="공동의 목표를 공유하며 함께 성과를 만드는 협업입니다"/>
           <p:cNvSpPr txBox="1"/>
           <p:nvPr/>
         </p:nvSpPr>
@@ -2212,7 +2194,7 @@
       </p:sp>
       <p:sp>
         <p:nvSpPr>
-          <p:cNvPr id="49" name="학생 BIM 경진대회 · 4인 팀 팀장"/>
+          <p:cNvPr id="48" name="학생 BIM 경진대회 · 4인 팀 팀장"/>
           <p:cNvSpPr txBox="1"/>
           <p:nvPr/>
         </p:nvSpPr>
@@ -2251,7 +2233,7 @@
       </p:sp>
       <p:sp>
         <p:nvSpPr>
-          <p:cNvPr id="50" name="01"/>
+          <p:cNvPr id="49" name="01"/>
           <p:cNvSpPr txBox="1"/>
           <p:nvPr/>
         </p:nvSpPr>
@@ -2290,7 +2272,7 @@
       </p:sp>
       <p:sp>
         <p:nvSpPr>
-          <p:cNvPr id="51" name="충돌을 조율해 주제를 정하다"/>
+          <p:cNvPr id="50" name="충돌을 조율해 주제를 정하다"/>
           <p:cNvSpPr txBox="1"/>
           <p:nvPr/>
         </p:nvSpPr>
@@ -2329,7 +2311,7 @@
       </p:sp>
       <p:sp>
         <p:nvSpPr>
-          <p:cNvPr id="52" name="02"/>
+          <p:cNvPr id="51" name="02"/>
           <p:cNvSpPr txBox="1"/>
           <p:nvPr/>
         </p:nvSpPr>
@@ -2368,7 +2350,7 @@
       </p:sp>
       <p:sp>
         <p:nvSpPr>
-          <p:cNvPr id="53" name="강점에 맞게 역할을 나누다"/>
+          <p:cNvPr id="52" name="강점에 맞게 역할을 나누다"/>
           <p:cNvSpPr txBox="1"/>
           <p:nvPr/>
         </p:nvSpPr>
@@ -2407,7 +2389,7 @@
       </p:sp>
       <p:sp>
         <p:nvSpPr>
-          <p:cNvPr id="54" name="03"/>
+          <p:cNvPr id="53" name="03"/>
           <p:cNvSpPr txBox="1"/>
           <p:nvPr/>
         </p:nvSpPr>
@@ -2446,7 +2428,7 @@
       </p:sp>
       <p:sp>
         <p:nvSpPr>
-          <p:cNvPr id="55" name="3주 만에 완성, 장려상"/>
+          <p:cNvPr id="54" name="3주 만에 완성, 장려상"/>
           <p:cNvSpPr txBox="1"/>
           <p:nvPr/>
         </p:nvSpPr>
@@ -2485,7 +2467,7 @@
       </p:sp>
       <p:sp>
         <p:nvSpPr>
-          <p:cNvPr id="56" name="마감 3주 전까지 주제 미확정"/>
+          <p:cNvPr id="55" name="마감 3주 전까지 주제 미확정"/>
           <p:cNvSpPr txBox="1"/>
           <p:nvPr/>
         </p:nvSpPr>
@@ -2524,7 +2506,7 @@
       </p:sp>
       <p:sp>
         <p:nvSpPr>
-          <p:cNvPr id="57" name="참신성"/>
+          <p:cNvPr id="56" name="참신성"/>
           <p:cNvSpPr txBox="1"/>
           <p:nvPr/>
         </p:nvSpPr>
@@ -2563,7 +2545,7 @@
       </p:sp>
       <p:sp>
         <p:nvSpPr>
-          <p:cNvPr id="58" name="구현 가능성"/>
+          <p:cNvPr id="57" name="구현 가능성"/>
           <p:cNvSpPr txBox="1"/>
           <p:nvPr/>
         </p:nvSpPr>
@@ -2602,7 +2584,7 @@
       </p:sp>
       <p:sp>
         <p:nvSpPr>
-          <p:cNvPr id="59" name="VS"/>
+          <p:cNvPr id="58" name="VS"/>
           <p:cNvSpPr txBox="1"/>
           <p:nvPr/>
         </p:nvSpPr>
@@ -2641,7 +2623,7 @@
       </p:sp>
       <p:sp>
         <p:nvSpPr>
-          <p:cNvPr id="60" name="경청 · 수상작 분석 · 교수님 조언"/>
+          <p:cNvPr id="59" name="경청 · 수상작 분석 · 교수님 조언"/>
           <p:cNvSpPr txBox="1"/>
           <p:nvPr/>
         </p:nvSpPr>
@@ -2680,7 +2662,7 @@
       </p:sp>
       <p:sp>
         <p:nvSpPr>
-          <p:cNvPr id="61" name="판단 기준 마련"/>
+          <p:cNvPr id="60" name="판단 기준 마련"/>
           <p:cNvSpPr txBox="1"/>
           <p:nvPr/>
         </p:nvSpPr>
@@ -2719,7 +2701,7 @@
       </p:sp>
       <p:sp>
         <p:nvSpPr>
-          <p:cNvPr id="62" name="‘유닛 모듈러 기반 사용자 맞춤형"/>
+          <p:cNvPr id="61" name="‘유닛 모듈러 기반 사용자 맞춤형"/>
           <p:cNvSpPr txBox="1"/>
           <p:nvPr/>
         </p:nvSpPr>
@@ -2758,7 +2740,7 @@
       </p:sp>
       <p:sp>
         <p:nvSpPr>
-          <p:cNvPr id="63" name="리모델링 방법’ 선정"/>
+          <p:cNvPr id="62" name="리모델링 방법’ 선정"/>
           <p:cNvSpPr txBox="1"/>
           <p:nvPr/>
         </p:nvSpPr>
@@ -2811,7 +2793,7 @@
       </p:sp>
       <p:sp>
         <p:nvSpPr>
-          <p:cNvPr id="64" name="리모델링 규모에 따라 유닛 모듈러를 배치하고,"/>
+          <p:cNvPr id="63" name="리모델링 규모에 따라 유닛 모듈러를 배치하고,"/>
           <p:cNvSpPr txBox="1"/>
           <p:nvPr/>
         </p:nvSpPr>
@@ -2850,7 +2832,7 @@
       </p:sp>
       <p:sp>
         <p:nvSpPr>
-          <p:cNvPr id="65" name="모듈 수 · 자재 물량을 자동 산출"/>
+          <p:cNvPr id="64" name="모듈 수 · 자재 물량을 자동 산출"/>
           <p:cNvSpPr txBox="1"/>
           <p:nvPr/>
         </p:nvSpPr>
@@ -2889,14 +2871,14 @@
       </p:sp>
       <p:sp>
         <p:nvSpPr>
-          <p:cNvPr id="66" name="팀장 · 나"/>
-          <p:cNvSpPr txBox="1"/>
-          <p:nvPr/>
-        </p:nvSpPr>
-        <p:spPr>
-          <a:xfrm>
-            <a:off x="6149578" y="2696964"/>
-            <a:ext cx="553045" cy="177800"/>
+          <p:cNvPr id="65" name="공동 목표"/>
+          <p:cNvSpPr txBox="1"/>
+          <p:nvPr/>
+        </p:nvSpPr>
+        <p:spPr>
+          <a:xfrm>
+            <a:off x="6047184" y="3902224"/>
+            <a:ext cx="605631" cy="177800"/>
           </a:xfrm>
           <a:prstGeom prst="rect">
             <a:avLst/>
@@ -2914,13 +2896,13 @@
             <a:r>
               <a:rPr lang="ko-KR" altLang="en-US" sz="1200" spc="-24" kern="0" dirty="0">
                 <a:solidFill>
-                  <a:srgbClr val="FFFFFF"/>
+                  <a:srgbClr val="004B8D"/>
                 </a:solidFill>
                 <a:latin typeface="Paperlogy 8 ExtraBold" pitchFamily="34" charset="0"/>
                 <a:ea typeface="Paperlogy 8 ExtraBold" pitchFamily="34" charset="-127"/>
                 <a:cs typeface="Paperlogy 8 ExtraBold" pitchFamily="34" charset="-120"/>
               </a:rPr>
-              <a:t>팀장 · 나</a:t>
+              <a:t>공동 목표</a:t>
             </a:r>
             <a:endParaRPr lang="en-US" sz="1200" dirty="0"/>
           </a:p>
@@ -2928,14 +2910,14 @@
       </p:sp>
       <p:sp>
         <p:nvSpPr>
-          <p:cNvPr id="67" name="프로젝트 총괄 ·"/>
-          <p:cNvSpPr txBox="1"/>
-          <p:nvPr/>
-        </p:nvSpPr>
-        <p:spPr>
-          <a:xfrm>
-            <a:off x="5882198" y="2926755"/>
-            <a:ext cx="935504" cy="177800"/>
+          <p:cNvPr id="66" name="3주 내 완성"/>
+          <p:cNvSpPr txBox="1"/>
+          <p:nvPr/>
+        </p:nvSpPr>
+        <p:spPr>
+          <a:xfrm>
+            <a:off x="6068120" y="4091434"/>
+            <a:ext cx="563662" cy="139700"/>
           </a:xfrm>
           <a:prstGeom prst="rect">
             <a:avLst/>
@@ -2951,7 +2933,124 @@
               <a:buNone/>
             </a:pPr>
             <a:r>
-              <a:rPr lang="ko-KR" altLang="en-US" sz="1200" spc="-30" kern="0" dirty="0">
+              <a:rPr lang="ko-KR" altLang="en-US" sz="900" spc="-18" kern="0" dirty="0">
+                <a:solidFill>
+                  <a:srgbClr val="4B5568"/>
+                </a:solidFill>
+                <a:latin typeface="Paperlogy 7 Bold" pitchFamily="34" charset="0"/>
+                <a:ea typeface="Paperlogy 7 Bold" pitchFamily="34" charset="-127"/>
+                <a:cs typeface="Paperlogy 7 Bold" pitchFamily="34" charset="-120"/>
+              </a:rPr>
+              <a:t>3주 내 완성</a:t>
+            </a:r>
+            <a:endParaRPr lang="en-US" sz="900" dirty="0"/>
+          </a:p>
+        </p:txBody>
+      </p:sp>
+      <p:sp>
+        <p:nvSpPr>
+          <p:cNvPr id="67" name="팀장"/>
+          <p:cNvSpPr txBox="1"/>
+          <p:nvPr/>
+        </p:nvSpPr>
+        <p:spPr>
+          <a:xfrm>
+            <a:off x="6149082" y="2586434"/>
+            <a:ext cx="312936" cy="177800"/>
+          </a:xfrm>
+          <a:prstGeom prst="rect">
+            <a:avLst/>
+          </a:prstGeom>
+          <a:noFill/>
+          <a:ln/>
+        </p:spPr>
+        <p:txBody>
+          <a:bodyPr wrap="none" lIns="0" tIns="0" rIns="0" bIns="0" rtlCol="0" anchor="ctr"/>
+          <a:lstStyle/>
+          <a:p>
+            <a:pPr algn="ctr" indent="0" marL="0">
+              <a:buNone/>
+            </a:pPr>
+            <a:r>
+              <a:rPr lang="ko-KR" altLang="en-US" sz="1200" spc="-24" kern="0" dirty="0">
+                <a:solidFill>
+                  <a:srgbClr val="FFFFFF"/>
+                </a:solidFill>
+                <a:latin typeface="Paperlogy 8 ExtraBold" pitchFamily="34" charset="0"/>
+                <a:ea typeface="Paperlogy 8 ExtraBold" pitchFamily="34" charset="-127"/>
+                <a:cs typeface="Paperlogy 8 ExtraBold" pitchFamily="34" charset="-120"/>
+              </a:rPr>
+              <a:t>팀장</a:t>
+            </a:r>
+            <a:endParaRPr lang="en-US" sz="1200" dirty="0"/>
+          </a:p>
+        </p:txBody>
+      </p:sp>
+      <p:sp>
+        <p:nvSpPr>
+          <p:cNvPr id="68" name="나"/>
+          <p:cNvSpPr txBox="1"/>
+          <p:nvPr/>
+        </p:nvSpPr>
+        <p:spPr>
+          <a:xfrm>
+            <a:off x="6514802" y="2607965"/>
+            <a:ext cx="148431" cy="139700"/>
+          </a:xfrm>
+          <a:prstGeom prst="rect">
+            <a:avLst/>
+          </a:prstGeom>
+          <a:noFill/>
+          <a:ln/>
+        </p:spPr>
+        <p:txBody>
+          <a:bodyPr wrap="none" lIns="0" tIns="0" rIns="0" bIns="0" rtlCol="0" anchor="ctr"/>
+          <a:lstStyle/>
+          <a:p>
+            <a:pPr algn="ctr" indent="0" marL="0">
+              <a:buNone/>
+            </a:pPr>
+            <a:r>
+              <a:rPr lang="ko-KR" altLang="en-US" sz="900" spc="-24" kern="0" dirty="0">
+                <a:solidFill>
+                  <a:srgbClr val="0B2147"/>
+                </a:solidFill>
+                <a:latin typeface="Paperlogy 8 ExtraBold" pitchFamily="34" charset="0"/>
+                <a:ea typeface="Paperlogy 8 ExtraBold" pitchFamily="34" charset="-127"/>
+                <a:cs typeface="Paperlogy 8 ExtraBold" pitchFamily="34" charset="-120"/>
+              </a:rPr>
+              <a:t>나</a:t>
+            </a:r>
+            <a:endParaRPr lang="en-US" sz="900" dirty="0"/>
+          </a:p>
+        </p:txBody>
+      </p:sp>
+      <p:sp>
+        <p:nvSpPr>
+          <p:cNvPr id="69" name="프로젝트 총괄 ·"/>
+          <p:cNvSpPr txBox="1"/>
+          <p:nvPr/>
+        </p:nvSpPr>
+        <p:spPr>
+          <a:xfrm>
+            <a:off x="5885777" y="2813745"/>
+            <a:ext cx="928247" cy="177800"/>
+          </a:xfrm>
+          <a:prstGeom prst="rect">
+            <a:avLst/>
+          </a:prstGeom>
+          <a:noFill/>
+          <a:ln/>
+        </p:spPr>
+        <p:txBody>
+          <a:bodyPr wrap="none" lIns="0" tIns="0" rIns="0" bIns="0" rtlCol="0" anchor="ctr"/>
+          <a:lstStyle/>
+          <a:p>
+            <a:pPr algn="ctr" indent="0" marL="0">
+              <a:buNone/>
+            </a:pPr>
+            <a:r>
+              <a:rPr lang="ko-KR" altLang="en-US" sz="1200" spc="-36" kern="0" dirty="0">
                 <a:solidFill>
                   <a:srgbClr val="DADEE3"/>
                 </a:solidFill>
@@ -2967,14 +3066,14 @@
       </p:sp>
       <p:sp>
         <p:nvSpPr>
-          <p:cNvPr id="68" name="Dynamo 기반 자동화 알고리즘 개발"/>
-          <p:cNvSpPr txBox="1"/>
-          <p:nvPr/>
-        </p:nvSpPr>
-        <p:spPr>
-          <a:xfrm>
-            <a:off x="5185750" y="3132435"/>
-            <a:ext cx="2328400" cy="177800"/>
+          <p:cNvPr id="70" name="Dynamo 기반"/>
+          <p:cNvSpPr txBox="1"/>
+          <p:nvPr/>
+        </p:nvSpPr>
+        <p:spPr>
+          <a:xfrm>
+            <a:off x="5858219" y="3004245"/>
+            <a:ext cx="983462" cy="177800"/>
           </a:xfrm>
           <a:prstGeom prst="rect">
             <a:avLst/>
@@ -2990,7 +3089,7 @@
               <a:buNone/>
             </a:pPr>
             <a:r>
-              <a:rPr lang="ko-KR" altLang="en-US" sz="1200" spc="-30" kern="0" dirty="0">
+              <a:rPr lang="ko-KR" altLang="en-US" sz="1200" spc="-36" kern="0" dirty="0">
                 <a:solidFill>
                   <a:srgbClr val="DADEE3"/>
                 </a:solidFill>
@@ -2998,7 +3097,7 @@
                 <a:ea typeface="Paperlogy 5 Medium" pitchFamily="34" charset="-127"/>
                 <a:cs typeface="Paperlogy 5 Medium" pitchFamily="34" charset="-120"/>
               </a:rPr>
-              <a:t>Dynamo 기반 자동화 알고리즘 개발</a:t>
+              <a:t>Dynamo 기반</a:t>
             </a:r>
             <a:endParaRPr lang="en-US" sz="1200" dirty="0"/>
           </a:p>
@@ -3006,13 +3105,52 @@
       </p:sp>
       <p:sp>
         <p:nvSpPr>
-          <p:cNvPr id="69" name="팀원 A"/>
-          <p:cNvSpPr txBox="1"/>
-          <p:nvPr/>
-        </p:nvSpPr>
-        <p:spPr>
-          <a:xfrm>
-            <a:off x="4854873" y="4068366"/>
+          <p:cNvPr id="71" name="자동화 알고리즘 개발"/>
+          <p:cNvSpPr txBox="1"/>
+          <p:nvPr/>
+        </p:nvSpPr>
+        <p:spPr>
+          <a:xfrm>
+            <a:off x="5701303" y="3194745"/>
+            <a:ext cx="1297295" cy="177800"/>
+          </a:xfrm>
+          <a:prstGeom prst="rect">
+            <a:avLst/>
+          </a:prstGeom>
+          <a:noFill/>
+          <a:ln/>
+        </p:spPr>
+        <p:txBody>
+          <a:bodyPr wrap="none" lIns="0" tIns="0" rIns="0" bIns="0" rtlCol="0" anchor="ctr"/>
+          <a:lstStyle/>
+          <a:p>
+            <a:pPr algn="ctr" indent="0" marL="0">
+              <a:buNone/>
+            </a:pPr>
+            <a:r>
+              <a:rPr lang="ko-KR" altLang="en-US" sz="1200" spc="-36" kern="0" dirty="0">
+                <a:solidFill>
+                  <a:srgbClr val="DADEE3"/>
+                </a:solidFill>
+                <a:latin typeface="Paperlogy 5 Medium" pitchFamily="34" charset="0"/>
+                <a:ea typeface="Paperlogy 5 Medium" pitchFamily="34" charset="-127"/>
+                <a:cs typeface="Paperlogy 5 Medium" pitchFamily="34" charset="-120"/>
+              </a:rPr>
+              <a:t>자동화 알고리즘 개발</a:t>
+            </a:r>
+            <a:endParaRPr lang="en-US" sz="1200" dirty="0"/>
+          </a:p>
+        </p:txBody>
+      </p:sp>
+      <p:sp>
+        <p:nvSpPr>
+          <p:cNvPr id="72" name="팀원 A"/>
+          <p:cNvSpPr txBox="1"/>
+          <p:nvPr/>
+        </p:nvSpPr>
+        <p:spPr>
+          <a:xfrm>
+            <a:off x="7473255" y="3767534"/>
             <a:ext cx="458589" cy="177800"/>
           </a:xfrm>
           <a:prstGeom prst="rect">
@@ -3045,14 +3183,14 @@
       </p:sp>
       <p:sp>
         <p:nvSpPr>
-          <p:cNvPr id="70" name="유닛 모듈러 설계 ·"/>
-          <p:cNvSpPr txBox="1"/>
-          <p:nvPr/>
-        </p:nvSpPr>
-        <p:spPr>
-          <a:xfrm>
-            <a:off x="4455394" y="4298156"/>
-            <a:ext cx="1105146" cy="177800"/>
+          <p:cNvPr id="73" name="유닛 모듈러 설계 ·"/>
+          <p:cNvSpPr txBox="1"/>
+          <p:nvPr/>
+        </p:nvSpPr>
+        <p:spPr>
+          <a:xfrm>
+            <a:off x="7078197" y="3994845"/>
+            <a:ext cx="1096206" cy="177800"/>
           </a:xfrm>
           <a:prstGeom prst="rect">
             <a:avLst/>
@@ -3068,7 +3206,7 @@
               <a:buNone/>
             </a:pPr>
             <a:r>
-              <a:rPr lang="ko-KR" altLang="en-US" sz="1200" spc="-30" kern="0" dirty="0">
+              <a:rPr lang="ko-KR" altLang="en-US" sz="1200" spc="-36" kern="0" dirty="0">
                 <a:solidFill>
                   <a:srgbClr val="4B5568"/>
                 </a:solidFill>
@@ -3084,14 +3222,14 @@
       </p:sp>
       <p:sp>
         <p:nvSpPr>
-          <p:cNvPr id="71" name="배치계획"/>
-          <p:cNvSpPr txBox="1"/>
-          <p:nvPr/>
-        </p:nvSpPr>
-        <p:spPr>
-          <a:xfrm>
-            <a:off x="4721920" y="4503837"/>
-            <a:ext cx="572095" cy="177800"/>
+          <p:cNvPr id="74" name="배치계획"/>
+          <p:cNvSpPr txBox="1"/>
+          <p:nvPr/>
+        </p:nvSpPr>
+        <p:spPr>
+          <a:xfrm>
+            <a:off x="7341791" y="4185345"/>
+            <a:ext cx="569020" cy="177800"/>
           </a:xfrm>
           <a:prstGeom prst="rect">
             <a:avLst/>
@@ -3107,7 +3245,7 @@
               <a:buNone/>
             </a:pPr>
             <a:r>
-              <a:rPr lang="ko-KR" altLang="en-US" sz="1200" spc="-30" kern="0" dirty="0">
+              <a:rPr lang="ko-KR" altLang="en-US" sz="1200" spc="-36" kern="0" dirty="0">
                 <a:solidFill>
                   <a:srgbClr val="4B5568"/>
                 </a:solidFill>
@@ -3123,13 +3261,13 @@
       </p:sp>
       <p:sp>
         <p:nvSpPr>
-          <p:cNvPr id="72" name="팀원 B"/>
-          <p:cNvSpPr txBox="1"/>
-          <p:nvPr/>
-        </p:nvSpPr>
-        <p:spPr>
-          <a:xfrm>
-            <a:off x="6196905" y="4068366"/>
+          <p:cNvPr id="75" name="팀원 B"/>
+          <p:cNvSpPr txBox="1"/>
+          <p:nvPr/>
+        </p:nvSpPr>
+        <p:spPr>
+          <a:xfrm>
+            <a:off x="6197005" y="4758134"/>
             <a:ext cx="458391" cy="177800"/>
           </a:xfrm>
           <a:prstGeom prst="rect">
@@ -3162,14 +3300,14 @@
       </p:sp>
       <p:sp>
         <p:nvSpPr>
-          <p:cNvPr id="73" name="Revit 기반"/>
-          <p:cNvSpPr txBox="1"/>
-          <p:nvPr/>
-        </p:nvSpPr>
-        <p:spPr>
-          <a:xfrm>
-            <a:off x="5992912" y="4298156"/>
-            <a:ext cx="713978" cy="177800"/>
+          <p:cNvPr id="76" name="Revit 기반"/>
+          <p:cNvSpPr txBox="1"/>
+          <p:nvPr/>
+        </p:nvSpPr>
+        <p:spPr>
+          <a:xfrm>
+            <a:off x="5995987" y="4985445"/>
+            <a:ext cx="707827" cy="177800"/>
           </a:xfrm>
           <a:prstGeom prst="rect">
             <a:avLst/>
@@ -3185,7 +3323,7 @@
               <a:buNone/>
             </a:pPr>
             <a:r>
-              <a:rPr lang="ko-KR" altLang="en-US" sz="1200" spc="-30" kern="0" dirty="0">
+              <a:rPr lang="ko-KR" altLang="en-US" sz="1200" spc="-36" kern="0" dirty="0">
                 <a:solidFill>
                   <a:srgbClr val="4B5568"/>
                 </a:solidFill>
@@ -3201,14 +3339,14 @@
       </p:sp>
       <p:sp>
         <p:nvSpPr>
-          <p:cNvPr id="74" name="BIM 모델링 ·"/>
-          <p:cNvSpPr txBox="1"/>
-          <p:nvPr/>
-        </p:nvSpPr>
-        <p:spPr>
-          <a:xfrm>
-            <a:off x="5930404" y="4503837"/>
-            <a:ext cx="838994" cy="177800"/>
+          <p:cNvPr id="77" name="BIM 모델링 ·"/>
+          <p:cNvSpPr txBox="1"/>
+          <p:nvPr/>
+        </p:nvSpPr>
+        <p:spPr>
+          <a:xfrm>
+            <a:off x="5933877" y="5175945"/>
+            <a:ext cx="832148" cy="177800"/>
           </a:xfrm>
           <a:prstGeom prst="rect">
             <a:avLst/>
@@ -3224,7 +3362,7 @@
               <a:buNone/>
             </a:pPr>
             <a:r>
-              <a:rPr lang="ko-KR" altLang="en-US" sz="1200" spc="-30" kern="0" dirty="0">
+              <a:rPr lang="ko-KR" altLang="en-US" sz="1200" spc="-36" kern="0" dirty="0">
                 <a:solidFill>
                   <a:srgbClr val="4B5568"/>
                 </a:solidFill>
@@ -3240,14 +3378,14 @@
       </p:sp>
       <p:sp>
         <p:nvSpPr>
-          <p:cNvPr id="75" name="데이터 구축"/>
-          <p:cNvSpPr txBox="1"/>
-          <p:nvPr/>
-        </p:nvSpPr>
-        <p:spPr>
-          <a:xfrm>
-            <a:off x="5983883" y="4709517"/>
-            <a:ext cx="732036" cy="177800"/>
+          <p:cNvPr id="78" name="데이터 구축"/>
+          <p:cNvSpPr txBox="1"/>
+          <p:nvPr/>
+        </p:nvSpPr>
+        <p:spPr>
+          <a:xfrm>
+            <a:off x="5986165" y="5366445"/>
+            <a:ext cx="727472" cy="177800"/>
           </a:xfrm>
           <a:prstGeom prst="rect">
             <a:avLst/>
@@ -3263,7 +3401,7 @@
               <a:buNone/>
             </a:pPr>
             <a:r>
-              <a:rPr lang="ko-KR" altLang="en-US" sz="1200" spc="-30" kern="0" dirty="0">
+              <a:rPr lang="ko-KR" altLang="en-US" sz="1200" spc="-36" kern="0" dirty="0">
                 <a:solidFill>
                   <a:srgbClr val="4B5568"/>
                 </a:solidFill>
@@ -3279,13 +3417,13 @@
       </p:sp>
       <p:sp>
         <p:nvSpPr>
-          <p:cNvPr id="76" name="팀원 C"/>
-          <p:cNvSpPr txBox="1"/>
-          <p:nvPr/>
-        </p:nvSpPr>
-        <p:spPr>
-          <a:xfrm>
-            <a:off x="7541419" y="4068366"/>
+          <p:cNvPr id="79" name="팀원 C"/>
+          <p:cNvSpPr txBox="1"/>
+          <p:nvPr/>
+        </p:nvSpPr>
+        <p:spPr>
+          <a:xfrm>
+            <a:off x="4923234" y="3672284"/>
             <a:ext cx="453231" cy="177800"/>
           </a:xfrm>
           <a:prstGeom prst="rect">
@@ -3318,14 +3456,14 @@
       </p:sp>
       <p:sp>
         <p:nvSpPr>
-          <p:cNvPr id="77" name="리모델링 적용"/>
-          <p:cNvSpPr txBox="1"/>
-          <p:nvPr/>
-        </p:nvSpPr>
-        <p:spPr>
-          <a:xfrm>
-            <a:off x="7260630" y="4298156"/>
-            <a:ext cx="862409" cy="177800"/>
+          <p:cNvPr id="80" name="리모델링 적용"/>
+          <p:cNvSpPr txBox="1"/>
+          <p:nvPr/>
+        </p:nvSpPr>
+        <p:spPr>
+          <a:xfrm>
+            <a:off x="4645124" y="3899595"/>
+            <a:ext cx="857052" cy="177800"/>
           </a:xfrm>
           <a:prstGeom prst="rect">
             <a:avLst/>
@@ -3341,7 +3479,7 @@
               <a:buNone/>
             </a:pPr>
             <a:r>
-              <a:rPr lang="ko-KR" altLang="en-US" sz="1200" spc="-30" kern="0" dirty="0">
+              <a:rPr lang="ko-KR" altLang="en-US" sz="1200" spc="-36" kern="0" dirty="0">
                 <a:solidFill>
                   <a:srgbClr val="4B5568"/>
                 </a:solidFill>
@@ -3357,14 +3495,14 @@
       </p:sp>
       <p:sp>
         <p:nvSpPr>
-          <p:cNvPr id="78" name="시나리오 구성 ·"/>
-          <p:cNvSpPr txBox="1"/>
-          <p:nvPr/>
-        </p:nvSpPr>
-        <p:spPr>
-          <a:xfrm>
-            <a:off x="7224132" y="4503837"/>
-            <a:ext cx="935504" cy="177800"/>
+          <p:cNvPr id="81" name="시나리오 구성 ·"/>
+          <p:cNvSpPr txBox="1"/>
+          <p:nvPr/>
+        </p:nvSpPr>
+        <p:spPr>
+          <a:xfrm>
+            <a:off x="4609527" y="4090095"/>
+            <a:ext cx="928247" cy="177800"/>
           </a:xfrm>
           <a:prstGeom prst="rect">
             <a:avLst/>
@@ -3380,7 +3518,7 @@
               <a:buNone/>
             </a:pPr>
             <a:r>
-              <a:rPr lang="ko-KR" altLang="en-US" sz="1200" spc="-30" kern="0" dirty="0">
+              <a:rPr lang="ko-KR" altLang="en-US" sz="1200" spc="-36" kern="0" dirty="0">
                 <a:solidFill>
                   <a:srgbClr val="4B5568"/>
                 </a:solidFill>
@@ -3396,14 +3534,14 @@
       </p:sp>
       <p:sp>
         <p:nvSpPr>
-          <p:cNvPr id="79" name="시연 영상 제작"/>
-          <p:cNvSpPr txBox="1"/>
-          <p:nvPr/>
-        </p:nvSpPr>
-        <p:spPr>
-          <a:xfrm>
-            <a:off x="7245846" y="4709517"/>
-            <a:ext cx="892076" cy="177800"/>
+          <p:cNvPr id="82" name="시연 영상 제작"/>
+          <p:cNvSpPr txBox="1"/>
+          <p:nvPr/>
+        </p:nvSpPr>
+        <p:spPr>
+          <a:xfrm>
+            <a:off x="4630638" y="4280595"/>
+            <a:ext cx="886023" cy="177800"/>
           </a:xfrm>
           <a:prstGeom prst="rect">
             <a:avLst/>
@@ -3419,7 +3557,7 @@
               <a:buNone/>
             </a:pPr>
             <a:r>
-              <a:rPr lang="ko-KR" altLang="en-US" sz="1200" spc="-30" kern="0" dirty="0">
+              <a:rPr lang="ko-KR" altLang="en-US" sz="1200" spc="-36" kern="0" dirty="0">
                 <a:solidFill>
                   <a:srgbClr val="4B5568"/>
                 </a:solidFill>
@@ -3435,30 +3573,30 @@
       </p:sp>
       <p:sp>
         <p:nvSpPr>
-          <p:cNvPr id="80" name="이틀마다 진행상황 공유 · 피드백"/>
-          <p:cNvSpPr txBox="1"/>
-          <p:nvPr/>
-        </p:nvSpPr>
-        <p:spPr>
-          <a:xfrm>
-            <a:off x="5528370" y="5304234"/>
-            <a:ext cx="1984173" cy="177800"/>
-          </a:xfrm>
-          <a:prstGeom prst="rect">
-            <a:avLst/>
-          </a:prstGeom>
-          <a:noFill/>
-          <a:ln/>
-        </p:spPr>
-        <p:txBody>
-          <a:bodyPr wrap="none" lIns="0" tIns="0" rIns="0" bIns="0" rtlCol="0" anchor="ctr"/>
-          <a:lstStyle/>
-          <a:p>
-            <a:pPr algn="l" indent="0" marL="0">
-              <a:buNone/>
-            </a:pPr>
-            <a:r>
-              <a:rPr lang="ko-KR" altLang="en-US" sz="1200" spc="-24" kern="0" dirty="0">
+          <p:cNvPr id="83" name="이틀마다 진행상황"/>
+          <p:cNvSpPr txBox="1"/>
+          <p:nvPr/>
+        </p:nvSpPr>
+        <p:spPr>
+          <a:xfrm>
+            <a:off x="7212023" y="4817864"/>
+            <a:ext cx="953173" cy="152400"/>
+          </a:xfrm>
+          <a:prstGeom prst="rect">
+            <a:avLst/>
+          </a:prstGeom>
+          <a:noFill/>
+          <a:ln/>
+        </p:spPr>
+        <p:txBody>
+          <a:bodyPr wrap="none" lIns="0" tIns="0" rIns="0" bIns="0" rtlCol="0" anchor="ctr"/>
+          <a:lstStyle/>
+          <a:p>
+            <a:pPr algn="ctr" indent="0" marL="0">
+              <a:buNone/>
+            </a:pPr>
+            <a:r>
+              <a:rPr lang="ko-KR" altLang="en-US" sz="1000" spc="-20" kern="0" dirty="0">
                 <a:solidFill>
                   <a:srgbClr val="0B2147"/>
                 </a:solidFill>
@@ -3466,15 +3604,54 @@
                 <a:ea typeface="Paperlogy 7 Bold" pitchFamily="34" charset="-127"/>
                 <a:cs typeface="Paperlogy 7 Bold" pitchFamily="34" charset="-120"/>
               </a:rPr>
-              <a:t>이틀마다 진행상황 공유 · 피드백</a:t>
-            </a:r>
-            <a:endParaRPr lang="en-US" sz="1200" dirty="0"/>
-          </a:p>
-        </p:txBody>
-      </p:sp>
-      <p:sp>
-        <p:nvSpPr>
-          <p:cNvPr id="81" name="리모델링 앱 개발 아이디어 시연 영상"/>
+              <a:t>이틀마다 진행상황</a:t>
+            </a:r>
+            <a:endParaRPr lang="en-US" sz="1000" dirty="0"/>
+          </a:p>
+        </p:txBody>
+      </p:sp>
+      <p:sp>
+        <p:nvSpPr>
+          <p:cNvPr id="84" name="공유 · 피드백"/>
+          <p:cNvSpPr txBox="1"/>
+          <p:nvPr/>
+        </p:nvSpPr>
+        <p:spPr>
+          <a:xfrm>
+            <a:off x="7345561" y="4982964"/>
+            <a:ext cx="686098" cy="152400"/>
+          </a:xfrm>
+          <a:prstGeom prst="rect">
+            <a:avLst/>
+          </a:prstGeom>
+          <a:noFill/>
+          <a:ln/>
+        </p:spPr>
+        <p:txBody>
+          <a:bodyPr wrap="none" lIns="0" tIns="0" rIns="0" bIns="0" rtlCol="0" anchor="ctr"/>
+          <a:lstStyle/>
+          <a:p>
+            <a:pPr algn="ctr" indent="0" marL="0">
+              <a:buNone/>
+            </a:pPr>
+            <a:r>
+              <a:rPr lang="ko-KR" altLang="en-US" sz="1000" spc="-20" kern="0" dirty="0">
+                <a:solidFill>
+                  <a:srgbClr val="0B2147"/>
+                </a:solidFill>
+                <a:latin typeface="Paperlogy 7 Bold" pitchFamily="34" charset="0"/>
+                <a:ea typeface="Paperlogy 7 Bold" pitchFamily="34" charset="-127"/>
+                <a:cs typeface="Paperlogy 7 Bold" pitchFamily="34" charset="-120"/>
+              </a:rPr>
+              <a:t>공유 · 피드백</a:t>
+            </a:r>
+            <a:endParaRPr lang="en-US" sz="1000" dirty="0"/>
+          </a:p>
+        </p:txBody>
+      </p:sp>
+      <p:sp>
+        <p:nvSpPr>
+          <p:cNvPr id="85" name="리모델링 앱 개발 아이디어 시연 영상"/>
           <p:cNvSpPr txBox="1"/>
           <p:nvPr/>
         </p:nvSpPr>
@@ -3513,7 +3690,7 @@
       </p:sp>
       <p:sp>
         <p:nvSpPr>
-          <p:cNvPr id="82" name="장려상"/>
+          <p:cNvPr id="86" name="장려상"/>
           <p:cNvSpPr txBox="1"/>
           <p:nvPr/>
         </p:nvSpPr>
@@ -3552,7 +3729,7 @@
       </p:sp>
       <p:sp>
         <p:nvSpPr>
-          <p:cNvPr id="83" name="학생 BIM 경진대회 장려상 · 남은 3주 내 완성"/>
+          <p:cNvPr id="87" name="학생 BIM 경진대회 장려상 · 남은 3주 내 완성"/>
           <p:cNvSpPr txBox="1"/>
           <p:nvPr/>
         </p:nvSpPr>
@@ -3591,7 +3768,7 @@
       </p:sp>
       <p:sp>
         <p:nvSpPr>
-          <p:cNvPr id="84" name="KEY MESSAGE"/>
+          <p:cNvPr id="88" name="KEY MESSAGE"/>
           <p:cNvSpPr txBox="1"/>
           <p:nvPr/>
         </p:nvSpPr>
@@ -3630,7 +3807,7 @@
       </p:sp>
       <p:sp>
         <p:nvSpPr>
-          <p:cNvPr id="85" name="서로 다른 사람을 하나의 공동 목표로 연결합니다"/>
+          <p:cNvPr id="89" name="서로 다른 사람을 하나의 공동 목표로 연결합니다"/>
           <p:cNvSpPr txBox="1"/>
           <p:nvPr/>
         </p:nvSpPr>
@@ -3697,7 +3874,7 @@
       </p:sp>
       <p:sp>
         <p:nvSpPr>
-          <p:cNvPr id="86" name="2026년 하반기 신입사원 공개채용"/>
+          <p:cNvPr id="90" name="2026년 하반기 신입사원 공개채용"/>
           <p:cNvSpPr txBox="1"/>
           <p:nvPr/>
         </p:nvSpPr>
@@ -3736,7 +3913,7 @@
       </p:sp>
       <p:sp>
         <p:nvSpPr>
-          <p:cNvPr id="87" name="01 / 03"/>
+          <p:cNvPr id="91" name="01 / 03"/>
           <p:cNvSpPr txBox="1"/>
           <p:nvPr/>
         </p:nvSpPr>

--- a/hec-pt/pptx/landscape.pptx
+++ b/hec-pt/pptx/landscape.pptx
@@ -4939,7 +4939,7 @@
         </p:blipFill>
         <p:spPr>
           <a:xfrm>
-            <a:off x="1492250" y="1904603"/>
+            <a:off x="5288657" y="1904603"/>
             <a:ext cx="152400" cy="12700"/>
           </a:xfrm>
           <a:prstGeom prst="rect">
@@ -4947,9 +4947,29 @@
           </a:prstGeom>
         </p:spPr>
       </p:pic>
+      <p:sp>
+        <p:nvSpPr>
+          <p:cNvPr id="10" name="dot people"/>
+          <p:cNvSpPr/>
+          <p:nvPr/>
+        </p:nvSpPr>
+        <p:spPr>
+          <a:xfrm>
+            <a:off x="2025948" y="2252464"/>
+            <a:ext cx="88900" cy="88900"/>
+          </a:xfrm>
+          <a:prstGeom prst="ellipse">
+            <a:avLst/>
+          </a:prstGeom>
+          <a:solidFill>
+            <a:srgbClr val="00A94F"/>
+          </a:solidFill>
+          <a:ln/>
+        </p:spPr>
+      </p:sp>
       <p:pic>
         <p:nvPicPr>
-          <p:cNvPr id="10" name="p2-tag" descr="p2-tag">    </p:cNvPr>
+          <p:cNvPr id="11" name="p2-def" descr="p2-def">    </p:cNvPr>
           <p:cNvPicPr>
             <a:picLocks noChangeAspect="1"/>
           </p:cNvPicPr>
@@ -4963,151 +4983,17 @@
         </p:blipFill>
         <p:spPr>
           <a:xfrm>
-            <a:off x="5765800" y="1904603"/>
-            <a:ext cx="152400" cy="12700"/>
+            <a:off x="2737214" y="2115476"/>
+            <a:ext cx="12700" cy="368300"/>
           </a:xfrm>
           <a:prstGeom prst="rect">
             <a:avLst/>
           </a:prstGeom>
         </p:spPr>
       </p:pic>
-      <p:sp>
-        <p:nvSpPr>
-          <p:cNvPr id="11" name="dot people"/>
-          <p:cNvSpPr/>
-          <p:nvPr/>
-        </p:nvSpPr>
-        <p:spPr>
-          <a:xfrm>
-            <a:off x="609600" y="2492673"/>
-            <a:ext cx="76200" cy="76200"/>
-          </a:xfrm>
-          <a:prstGeom prst="ellipse">
-            <a:avLst/>
-          </a:prstGeom>
-          <a:solidFill>
-            <a:srgbClr val="00A94F"/>
-          </a:solidFill>
-          <a:ln/>
-        </p:spPr>
-      </p:sp>
-      <p:sp>
-        <p:nvSpPr>
-          <p:cNvPr id="12" name="p2-pill"/>
-          <p:cNvSpPr/>
-          <p:nvPr/>
-        </p:nvSpPr>
-        <p:spPr>
-          <a:xfrm>
-            <a:off x="612775" y="2787948"/>
-            <a:ext cx="677267" cy="247650"/>
-          </a:xfrm>
-          <a:prstGeom prst="roundRect">
-            <a:avLst>
-              <a:gd name="adj" fmla="val 50000"/>
-            </a:avLst>
-          </a:prstGeom>
-          <a:solidFill>
-            <a:srgbClr val="FFFFFF"/>
-          </a:solidFill>
-          <a:ln w="6350">
-            <a:solidFill>
-              <a:srgbClr val="C3CEDD"/>
-            </a:solidFill>
-            <a:prstDash val="solid"/>
-          </a:ln>
-        </p:spPr>
-      </p:sp>
-      <p:sp>
-        <p:nvSpPr>
-          <p:cNvPr id="13" name="dot people"/>
-          <p:cNvSpPr/>
-          <p:nvPr/>
-        </p:nvSpPr>
-        <p:spPr>
-          <a:xfrm>
-            <a:off x="730250" y="2883198"/>
-            <a:ext cx="57150" cy="57150"/>
-          </a:xfrm>
-          <a:prstGeom prst="ellipse">
-            <a:avLst/>
-          </a:prstGeom>
-          <a:solidFill>
-            <a:srgbClr val="00A94F"/>
-          </a:solidFill>
-          <a:ln/>
-        </p:spPr>
-      </p:sp>
-      <p:sp>
-        <p:nvSpPr>
-          <p:cNvPr id="14" name="p2-pill"/>
-          <p:cNvSpPr/>
-          <p:nvPr/>
-        </p:nvSpPr>
-        <p:spPr>
-          <a:xfrm>
-            <a:off x="1650405" y="2787948"/>
-            <a:ext cx="918468" cy="247650"/>
-          </a:xfrm>
-          <a:prstGeom prst="roundRect">
-            <a:avLst>
-              <a:gd name="adj" fmla="val 50000"/>
-            </a:avLst>
-          </a:prstGeom>
-          <a:solidFill>
-            <a:srgbClr val="FFFFFF"/>
-          </a:solidFill>
-          <a:ln w="6350">
-            <a:solidFill>
-              <a:srgbClr val="C3CEDD"/>
-            </a:solidFill>
-            <a:prstDash val="solid"/>
-          </a:ln>
-        </p:spPr>
-      </p:sp>
-      <p:sp>
-        <p:nvSpPr>
-          <p:cNvPr id="15" name="dot people"/>
-          <p:cNvSpPr/>
-          <p:nvPr/>
-        </p:nvSpPr>
-        <p:spPr>
-          <a:xfrm>
-            <a:off x="1767880" y="2883198"/>
-            <a:ext cx="57150" cy="57150"/>
-          </a:xfrm>
-          <a:prstGeom prst="ellipse">
-            <a:avLst/>
-          </a:prstGeom>
-          <a:solidFill>
-            <a:srgbClr val="00A94F"/>
-          </a:solidFill>
-          <a:ln/>
-        </p:spPr>
-      </p:sp>
-      <p:sp>
-        <p:nvSpPr>
-          <p:cNvPr id="16" name="p2-ic"/>
-          <p:cNvSpPr/>
-          <p:nvPr/>
-        </p:nvSpPr>
-        <p:spPr>
-          <a:xfrm>
-            <a:off x="609600" y="3417689"/>
-            <a:ext cx="190500" cy="190500"/>
-          </a:xfrm>
-          <a:prstGeom prst="ellipse">
-            <a:avLst/>
-          </a:prstGeom>
-          <a:solidFill>
-            <a:srgbClr val="00A94F"/>
-          </a:solidFill>
-          <a:ln/>
-        </p:spPr>
-      </p:sp>
       <p:pic>
         <p:nvPicPr>
-          <p:cNvPr id="17" name="p2-arr" descr="p2-arr">    </p:cNvPr>
+          <p:cNvPr id="12" name="p2-svg" descr="p2-svg">    </p:cNvPr>
           <p:cNvPicPr>
             <a:picLocks noChangeAspect="1"/>
           </p:cNvPicPr>
@@ -5121,17 +5007,252 @@
         </p:blipFill>
         <p:spPr>
           <a:xfrm>
-            <a:off x="664633" y="3474839"/>
-            <a:ext cx="80433" cy="71967"/>
+            <a:off x="1543050" y="2673681"/>
+            <a:ext cx="3213100" cy="1744133"/>
           </a:xfrm>
           <a:prstGeom prst="rect">
             <a:avLst/>
           </a:prstGeom>
         </p:spPr>
       </p:pic>
+      <p:sp>
+        <p:nvSpPr>
+          <p:cNvPr id="13" name="p2-n p2-chip g"/>
+          <p:cNvSpPr/>
+          <p:nvPr/>
+        </p:nvSpPr>
+        <p:spPr>
+          <a:xfrm>
+            <a:off x="2883595" y="2560439"/>
+            <a:ext cx="532011" cy="234950"/>
+          </a:xfrm>
+          <a:prstGeom prst="roundRect">
+            <a:avLst>
+              <a:gd name="adj" fmla="val 50000"/>
+            </a:avLst>
+          </a:prstGeom>
+          <a:solidFill>
+            <a:srgbClr val="FFFFFF"/>
+          </a:solidFill>
+          <a:ln w="6350">
+            <a:solidFill>
+              <a:srgbClr val="C3CEDD"/>
+            </a:solidFill>
+            <a:prstDash val="solid"/>
+          </a:ln>
+        </p:spPr>
+      </p:sp>
+      <p:sp>
+        <p:nvSpPr>
+          <p:cNvPr id="14" name="dot people"/>
+          <p:cNvSpPr/>
+          <p:nvPr/>
+        </p:nvSpPr>
+        <p:spPr>
+          <a:xfrm>
+            <a:off x="2988370" y="2649339"/>
+            <a:ext cx="57150" cy="57150"/>
+          </a:xfrm>
+          <a:prstGeom prst="ellipse">
+            <a:avLst/>
+          </a:prstGeom>
+          <a:solidFill>
+            <a:srgbClr val="00A94F"/>
+          </a:solidFill>
+          <a:ln/>
+        </p:spPr>
+      </p:sp>
+      <p:sp>
+        <p:nvSpPr>
+          <p:cNvPr id="15" name="p2-n p2-chip g"/>
+          <p:cNvSpPr/>
+          <p:nvPr/>
+        </p:nvSpPr>
+        <p:spPr>
+          <a:xfrm>
+            <a:off x="4405610" y="3008114"/>
+            <a:ext cx="532011" cy="234950"/>
+          </a:xfrm>
+          <a:prstGeom prst="roundRect">
+            <a:avLst>
+              <a:gd name="adj" fmla="val 50000"/>
+            </a:avLst>
+          </a:prstGeom>
+          <a:solidFill>
+            <a:srgbClr val="FFFFFF"/>
+          </a:solidFill>
+          <a:ln w="6350">
+            <a:solidFill>
+              <a:srgbClr val="C3CEDD"/>
+            </a:solidFill>
+            <a:prstDash val="solid"/>
+          </a:ln>
+        </p:spPr>
+      </p:sp>
+      <p:sp>
+        <p:nvSpPr>
+          <p:cNvPr id="16" name="dot people"/>
+          <p:cNvSpPr/>
+          <p:nvPr/>
+        </p:nvSpPr>
+        <p:spPr>
+          <a:xfrm>
+            <a:off x="4510385" y="3097014"/>
+            <a:ext cx="57150" cy="57150"/>
+          </a:xfrm>
+          <a:prstGeom prst="ellipse">
+            <a:avLst/>
+          </a:prstGeom>
+          <a:solidFill>
+            <a:srgbClr val="00A94F"/>
+          </a:solidFill>
+          <a:ln/>
+        </p:spPr>
+      </p:sp>
+      <p:sp>
+        <p:nvSpPr>
+          <p:cNvPr id="17" name="p2-n p2-chip g"/>
+          <p:cNvSpPr/>
+          <p:nvPr/>
+        </p:nvSpPr>
+        <p:spPr>
+          <a:xfrm>
+            <a:off x="3716784" y="3732014"/>
+            <a:ext cx="746423" cy="234950"/>
+          </a:xfrm>
+          <a:prstGeom prst="roundRect">
+            <a:avLst>
+              <a:gd name="adj" fmla="val 50000"/>
+            </a:avLst>
+          </a:prstGeom>
+          <a:solidFill>
+            <a:srgbClr val="FFFFFF"/>
+          </a:solidFill>
+          <a:ln w="6350">
+            <a:solidFill>
+              <a:srgbClr val="C3CEDD"/>
+            </a:solidFill>
+            <a:prstDash val="solid"/>
+          </a:ln>
+        </p:spPr>
+      </p:sp>
+      <p:sp>
+        <p:nvSpPr>
+          <p:cNvPr id="18" name="dot people"/>
+          <p:cNvSpPr/>
+          <p:nvPr/>
+        </p:nvSpPr>
+        <p:spPr>
+          <a:xfrm>
+            <a:off x="3821559" y="3820914"/>
+            <a:ext cx="57150" cy="57150"/>
+          </a:xfrm>
+          <a:prstGeom prst="ellipse">
+            <a:avLst/>
+          </a:prstGeom>
+          <a:solidFill>
+            <a:srgbClr val="00A94F"/>
+          </a:solidFill>
+          <a:ln/>
+        </p:spPr>
+      </p:sp>
+      <p:sp>
+        <p:nvSpPr>
+          <p:cNvPr id="19" name="p2-n p2-chip g"/>
+          <p:cNvSpPr/>
+          <p:nvPr/>
+        </p:nvSpPr>
+        <p:spPr>
+          <a:xfrm>
+            <a:off x="1889522" y="3732014"/>
+            <a:ext cx="639167" cy="234950"/>
+          </a:xfrm>
+          <a:prstGeom prst="roundRect">
+            <a:avLst>
+              <a:gd name="adj" fmla="val 50000"/>
+            </a:avLst>
+          </a:prstGeom>
+          <a:solidFill>
+            <a:srgbClr val="FFFFFF"/>
+          </a:solidFill>
+          <a:ln w="6350">
+            <a:solidFill>
+              <a:srgbClr val="C3CEDD"/>
+            </a:solidFill>
+            <a:prstDash val="solid"/>
+          </a:ln>
+        </p:spPr>
+      </p:sp>
+      <p:sp>
+        <p:nvSpPr>
+          <p:cNvPr id="20" name="dot people"/>
+          <p:cNvSpPr/>
+          <p:nvPr/>
+        </p:nvSpPr>
+        <p:spPr>
+          <a:xfrm>
+            <a:off x="1994297" y="3820914"/>
+            <a:ext cx="57150" cy="57150"/>
+          </a:xfrm>
+          <a:prstGeom prst="ellipse">
+            <a:avLst/>
+          </a:prstGeom>
+          <a:solidFill>
+            <a:srgbClr val="00A94F"/>
+          </a:solidFill>
+          <a:ln/>
+        </p:spPr>
+      </p:sp>
+      <p:sp>
+        <p:nvSpPr>
+          <p:cNvPr id="21" name="p2-n p2-chip g"/>
+          <p:cNvSpPr/>
+          <p:nvPr/>
+        </p:nvSpPr>
+        <p:spPr>
+          <a:xfrm>
+            <a:off x="1254274" y="3008114"/>
+            <a:ext cx="746423" cy="234950"/>
+          </a:xfrm>
+          <a:prstGeom prst="roundRect">
+            <a:avLst>
+              <a:gd name="adj" fmla="val 50000"/>
+            </a:avLst>
+          </a:prstGeom>
+          <a:solidFill>
+            <a:srgbClr val="FFFFFF"/>
+          </a:solidFill>
+          <a:ln w="6350">
+            <a:solidFill>
+              <a:srgbClr val="C3CEDD"/>
+            </a:solidFill>
+            <a:prstDash val="solid"/>
+          </a:ln>
+        </p:spPr>
+      </p:sp>
+      <p:sp>
+        <p:nvSpPr>
+          <p:cNvPr id="22" name="dot people"/>
+          <p:cNvSpPr/>
+          <p:nvPr/>
+        </p:nvSpPr>
+        <p:spPr>
+          <a:xfrm>
+            <a:off x="1359049" y="3097014"/>
+            <a:ext cx="57150" cy="57150"/>
+          </a:xfrm>
+          <a:prstGeom prst="ellipse">
+            <a:avLst/>
+          </a:prstGeom>
+          <a:solidFill>
+            <a:srgbClr val="00A94F"/>
+          </a:solidFill>
+          <a:ln/>
+        </p:spPr>
+      </p:sp>
       <p:pic>
         <p:nvPicPr>
-          <p:cNvPr id="18" name="p2-bridge" descr="p2-bridge">    </p:cNvPr>
+          <p:cNvPr id="23" name="p2-n ring p2-core g" descr="p2-n ring p2-core g">    </p:cNvPr>
           <p:cNvPicPr>
             <a:picLocks noChangeAspect="1"/>
           </p:cNvPicPr>
@@ -5145,8 +5266,8 @@
         </p:blipFill>
         <p:spPr>
           <a:xfrm>
-            <a:off x="3744383" y="2966839"/>
-            <a:ext cx="1168400" cy="97367"/>
+            <a:off x="2743200" y="2921331"/>
+            <a:ext cx="812800" cy="812800"/>
           </a:xfrm>
           <a:prstGeom prst="rect">
             <a:avLst/>
@@ -5155,14 +5276,115 @@
       </p:pic>
       <p:sp>
         <p:nvSpPr>
-          <p:cNvPr id="19" name="p2-kw g"/>
+          <p:cNvPr id="24" name="p2-card"/>
           <p:cNvSpPr/>
           <p:nvPr/>
         </p:nvSpPr>
         <p:spPr>
           <a:xfrm>
-            <a:off x="4940300" y="2776339"/>
-            <a:ext cx="482600" cy="482600"/>
+            <a:off x="612775" y="4420989"/>
+            <a:ext cx="5073650" cy="1022350"/>
+          </a:xfrm>
+          <a:prstGeom prst="roundRect">
+            <a:avLst>
+              <a:gd name="adj" fmla="val 13354"/>
+            </a:avLst>
+          </a:prstGeom>
+          <a:solidFill>
+            <a:srgbClr val="FFFFFF"/>
+          </a:solidFill>
+          <a:ln w="6350">
+            <a:solidFill>
+              <a:srgbClr val="8CD8B0"/>
+            </a:solidFill>
+            <a:prstDash val="solid"/>
+          </a:ln>
+        </p:spPr>
+      </p:sp>
+      <p:sp>
+        <p:nvSpPr>
+          <p:cNvPr id="25" name="p2-pill"/>
+          <p:cNvSpPr/>
+          <p:nvPr/>
+        </p:nvSpPr>
+        <p:spPr>
+          <a:xfrm>
+            <a:off x="796925" y="4825802"/>
+            <a:ext cx="645517" cy="234950"/>
+          </a:xfrm>
+          <a:prstGeom prst="roundRect">
+            <a:avLst>
+              <a:gd name="adj" fmla="val 50000"/>
+            </a:avLst>
+          </a:prstGeom>
+          <a:solidFill>
+            <a:srgbClr val="FFFFFF"/>
+          </a:solidFill>
+          <a:ln w="6350">
+            <a:solidFill>
+              <a:srgbClr val="C3CEDD"/>
+            </a:solidFill>
+            <a:prstDash val="solid"/>
+          </a:ln>
+        </p:spPr>
+      </p:sp>
+      <p:sp>
+        <p:nvSpPr>
+          <p:cNvPr id="26" name="dot people"/>
+          <p:cNvSpPr/>
+          <p:nvPr/>
+        </p:nvSpPr>
+        <p:spPr>
+          <a:xfrm>
+            <a:off x="901700" y="4914702"/>
+            <a:ext cx="57150" cy="57150"/>
+          </a:xfrm>
+          <a:prstGeom prst="ellipse">
+            <a:avLst/>
+          </a:prstGeom>
+          <a:solidFill>
+            <a:srgbClr val="00A94F"/>
+          </a:solidFill>
+          <a:ln/>
+        </p:spPr>
+      </p:sp>
+      <p:sp>
+        <p:nvSpPr>
+          <p:cNvPr id="27" name="p2-pill"/>
+          <p:cNvSpPr/>
+          <p:nvPr/>
+        </p:nvSpPr>
+        <p:spPr>
+          <a:xfrm>
+            <a:off x="1802805" y="4825802"/>
+            <a:ext cx="886718" cy="234950"/>
+          </a:xfrm>
+          <a:prstGeom prst="roundRect">
+            <a:avLst>
+              <a:gd name="adj" fmla="val 50000"/>
+            </a:avLst>
+          </a:prstGeom>
+          <a:solidFill>
+            <a:srgbClr val="FFFFFF"/>
+          </a:solidFill>
+          <a:ln w="6350">
+            <a:solidFill>
+              <a:srgbClr val="C3CEDD"/>
+            </a:solidFill>
+            <a:prstDash val="solid"/>
+          </a:ln>
+        </p:spPr>
+      </p:sp>
+      <p:sp>
+        <p:nvSpPr>
+          <p:cNvPr id="28" name="dot people"/>
+          <p:cNvSpPr/>
+          <p:nvPr/>
+        </p:nvSpPr>
+        <p:spPr>
+          <a:xfrm>
+            <a:off x="1907580" y="4914702"/>
+            <a:ext cx="57150" cy="57150"/>
           </a:xfrm>
           <a:prstGeom prst="ellipse">
             <a:avLst/>
@@ -5175,7 +5397,7 @@
       </p:sp>
       <p:pic>
         <p:nvPicPr>
-          <p:cNvPr id="20" name="p2-svg" descr="p2-svg">    </p:cNvPr>
+          <p:cNvPr id="29" name="p2-to" descr="p2-to">    </p:cNvPr>
           <p:cNvPicPr>
             <a:picLocks noChangeAspect="1"/>
           </p:cNvPicPr>
@@ -5189,8 +5411,8 @@
         </p:blipFill>
         <p:spPr>
           <a:xfrm>
-            <a:off x="7816850" y="2466247"/>
-            <a:ext cx="2705100" cy="1234017"/>
+            <a:off x="2870498" y="4515181"/>
+            <a:ext cx="6350" cy="838200"/>
           </a:xfrm>
           <a:prstGeom prst="rect">
             <a:avLst/>
@@ -5199,229 +5421,14 @@
       </p:pic>
       <p:sp>
         <p:nvSpPr>
-          <p:cNvPr id="21" name="p2-n p2-chip g"/>
+          <p:cNvPr id="30" name="p2-ic"/>
           <p:cNvSpPr/>
           <p:nvPr/>
         </p:nvSpPr>
         <p:spPr>
           <a:xfrm>
-            <a:off x="8903395" y="2354064"/>
-            <a:ext cx="532011" cy="234950"/>
-          </a:xfrm>
-          <a:prstGeom prst="roundRect">
-            <a:avLst>
-              <a:gd name="adj" fmla="val 50000"/>
-            </a:avLst>
-          </a:prstGeom>
-          <a:solidFill>
-            <a:srgbClr val="FFFFFF"/>
-          </a:solidFill>
-          <a:ln w="6350">
-            <a:solidFill>
-              <a:srgbClr val="C3CEDD"/>
-            </a:solidFill>
-            <a:prstDash val="solid"/>
-          </a:ln>
-        </p:spPr>
-      </p:sp>
-      <p:sp>
-        <p:nvSpPr>
-          <p:cNvPr id="22" name="dot people"/>
-          <p:cNvSpPr/>
-          <p:nvPr/>
-        </p:nvSpPr>
-        <p:spPr>
-          <a:xfrm>
-            <a:off x="9008170" y="2442964"/>
-            <a:ext cx="57150" cy="57150"/>
-          </a:xfrm>
-          <a:prstGeom prst="ellipse">
-            <a:avLst/>
-          </a:prstGeom>
-          <a:solidFill>
-            <a:srgbClr val="00A94F"/>
-          </a:solidFill>
-          <a:ln/>
-        </p:spPr>
-      </p:sp>
-      <p:sp>
-        <p:nvSpPr>
-          <p:cNvPr id="23" name="p2-n p2-chip g"/>
-          <p:cNvSpPr/>
-          <p:nvPr/>
-        </p:nvSpPr>
-        <p:spPr>
-          <a:xfrm>
-            <a:off x="10183515" y="2775049"/>
-            <a:ext cx="532011" cy="234950"/>
-          </a:xfrm>
-          <a:prstGeom prst="roundRect">
-            <a:avLst>
-              <a:gd name="adj" fmla="val 50000"/>
-            </a:avLst>
-          </a:prstGeom>
-          <a:solidFill>
-            <a:srgbClr val="FFFFFF"/>
-          </a:solidFill>
-          <a:ln w="6350">
-            <a:solidFill>
-              <a:srgbClr val="C3CEDD"/>
-            </a:solidFill>
-            <a:prstDash val="solid"/>
-          </a:ln>
-        </p:spPr>
-      </p:sp>
-      <p:sp>
-        <p:nvSpPr>
-          <p:cNvPr id="24" name="dot people"/>
-          <p:cNvSpPr/>
-          <p:nvPr/>
-        </p:nvSpPr>
-        <p:spPr>
-          <a:xfrm>
-            <a:off x="10288290" y="2863949"/>
-            <a:ext cx="57150" cy="57150"/>
-          </a:xfrm>
-          <a:prstGeom prst="ellipse">
-            <a:avLst/>
-          </a:prstGeom>
-          <a:solidFill>
-            <a:srgbClr val="00A94F"/>
-          </a:solidFill>
-          <a:ln/>
-        </p:spPr>
-      </p:sp>
-      <p:sp>
-        <p:nvSpPr>
-          <p:cNvPr id="25" name="p2-n p2-chip g"/>
-          <p:cNvSpPr/>
-          <p:nvPr/>
-        </p:nvSpPr>
-        <p:spPr>
-          <a:xfrm>
-            <a:off x="9587359" y="3456980"/>
-            <a:ext cx="746423" cy="234950"/>
-          </a:xfrm>
-          <a:prstGeom prst="roundRect">
-            <a:avLst>
-              <a:gd name="adj" fmla="val 50000"/>
-            </a:avLst>
-          </a:prstGeom>
-          <a:solidFill>
-            <a:srgbClr val="FFFFFF"/>
-          </a:solidFill>
-          <a:ln w="6350">
-            <a:solidFill>
-              <a:srgbClr val="C3CEDD"/>
-            </a:solidFill>
-            <a:prstDash val="solid"/>
-          </a:ln>
-        </p:spPr>
-      </p:sp>
-      <p:sp>
-        <p:nvSpPr>
-          <p:cNvPr id="26" name="dot people"/>
-          <p:cNvSpPr/>
-          <p:nvPr/>
-        </p:nvSpPr>
-        <p:spPr>
-          <a:xfrm>
-            <a:off x="9692134" y="3545880"/>
-            <a:ext cx="57150" cy="57150"/>
-          </a:xfrm>
-          <a:prstGeom prst="ellipse">
-            <a:avLst/>
-          </a:prstGeom>
-          <a:solidFill>
-            <a:srgbClr val="00A94F"/>
-          </a:solidFill>
-          <a:ln/>
-        </p:spPr>
-      </p:sp>
-      <p:sp>
-        <p:nvSpPr>
-          <p:cNvPr id="27" name="p2-n p2-chip g"/>
-          <p:cNvSpPr/>
-          <p:nvPr/>
-        </p:nvSpPr>
-        <p:spPr>
-          <a:xfrm>
-            <a:off x="8058547" y="3456980"/>
-            <a:ext cx="639167" cy="234950"/>
-          </a:xfrm>
-          <a:prstGeom prst="roundRect">
-            <a:avLst>
-              <a:gd name="adj" fmla="val 50000"/>
-            </a:avLst>
-          </a:prstGeom>
-          <a:solidFill>
-            <a:srgbClr val="FFFFFF"/>
-          </a:solidFill>
-          <a:ln w="6350">
-            <a:solidFill>
-              <a:srgbClr val="C3CEDD"/>
-            </a:solidFill>
-            <a:prstDash val="solid"/>
-          </a:ln>
-        </p:spPr>
-      </p:sp>
-      <p:sp>
-        <p:nvSpPr>
-          <p:cNvPr id="28" name="dot people"/>
-          <p:cNvSpPr/>
-          <p:nvPr/>
-        </p:nvSpPr>
-        <p:spPr>
-          <a:xfrm>
-            <a:off x="8163322" y="3545880"/>
-            <a:ext cx="57150" cy="57150"/>
-          </a:xfrm>
-          <a:prstGeom prst="ellipse">
-            <a:avLst/>
-          </a:prstGeom>
-          <a:solidFill>
-            <a:srgbClr val="00A94F"/>
-          </a:solidFill>
-          <a:ln/>
-        </p:spPr>
-      </p:sp>
-      <p:sp>
-        <p:nvSpPr>
-          <p:cNvPr id="29" name="p2-n p2-chip g"/>
-          <p:cNvSpPr/>
-          <p:nvPr/>
-        </p:nvSpPr>
-        <p:spPr>
-          <a:xfrm>
-            <a:off x="7515969" y="2775049"/>
-            <a:ext cx="746423" cy="234950"/>
-          </a:xfrm>
-          <a:prstGeom prst="roundRect">
-            <a:avLst>
-              <a:gd name="adj" fmla="val 50000"/>
-            </a:avLst>
-          </a:prstGeom>
-          <a:solidFill>
-            <a:srgbClr val="FFFFFF"/>
-          </a:solidFill>
-          <a:ln w="6350">
-            <a:solidFill>
-              <a:srgbClr val="C3CEDD"/>
-            </a:solidFill>
-            <a:prstDash val="solid"/>
-          </a:ln>
-        </p:spPr>
-      </p:sp>
-      <p:sp>
-        <p:nvSpPr>
-          <p:cNvPr id="30" name="dot people"/>
-          <p:cNvSpPr/>
-          <p:nvPr/>
-        </p:nvSpPr>
-        <p:spPr>
-          <a:xfrm>
-            <a:off x="7620744" y="2863949"/>
-            <a:ext cx="57150" cy="57150"/>
+            <a:off x="3054648" y="4843264"/>
+            <a:ext cx="177800" cy="177800"/>
           </a:xfrm>
           <a:prstGeom prst="ellipse">
             <a:avLst/>
@@ -5434,7 +5441,7 @@
       </p:sp>
       <p:pic>
         <p:nvPicPr>
-          <p:cNvPr id="31" name="p2-n ring p2-core g" descr="p2-n ring p2-core g">    </p:cNvPr>
+          <p:cNvPr id="31" name="p2-arr" descr="p2-arr">    </p:cNvPr>
           <p:cNvPicPr>
             <a:picLocks noChangeAspect="1"/>
           </p:cNvPicPr>
@@ -5448,8 +5455,8 @@
         </p:blipFill>
         <p:spPr>
           <a:xfrm>
-            <a:off x="8788400" y="2698022"/>
-            <a:ext cx="762000" cy="762000"/>
+            <a:off x="3108623" y="4897239"/>
+            <a:ext cx="76200" cy="65617"/>
           </a:xfrm>
           <a:prstGeom prst="rect">
             <a:avLst/>
@@ -5458,64 +5465,22 @@
       </p:pic>
       <p:sp>
         <p:nvSpPr>
-          <p:cNvPr id="32" name="p2-rule"/>
+          <p:cNvPr id="32" name="p2-op p2-plus"/>
           <p:cNvSpPr/>
           <p:nvPr/>
         </p:nvSpPr>
         <p:spPr>
           <a:xfrm>
-            <a:off x="609600" y="3928864"/>
-            <a:ext cx="10972800" cy="6350"/>
-          </a:xfrm>
-          <a:prstGeom prst="roundRect">
-            <a:avLst/>
-          </a:prstGeom>
-          <a:solidFill>
-            <a:srgbClr val="D8E0EB"/>
-          </a:solidFill>
-          <a:ln/>
-        </p:spPr>
-      </p:sp>
-      <p:sp>
-        <p:nvSpPr>
-          <p:cNvPr id="33" name="dot tech"/>
-          <p:cNvSpPr/>
-          <p:nvPr/>
-        </p:nvSpPr>
-        <p:spPr>
-          <a:xfrm>
-            <a:off x="609600" y="4277023"/>
-            <a:ext cx="76200" cy="76200"/>
+            <a:off x="5937250" y="3154164"/>
+            <a:ext cx="317500" cy="317500"/>
           </a:xfrm>
           <a:prstGeom prst="ellipse">
             <a:avLst/>
           </a:prstGeom>
           <a:solidFill>
-            <a:srgbClr val="004B8D"/>
-          </a:solidFill>
-          <a:ln/>
-        </p:spPr>
-      </p:sp>
-      <p:sp>
-        <p:nvSpPr>
-          <p:cNvPr id="34" name="p2-pill"/>
-          <p:cNvSpPr/>
-          <p:nvPr/>
-        </p:nvSpPr>
-        <p:spPr>
-          <a:xfrm>
-            <a:off x="612775" y="4572298"/>
-            <a:ext cx="1182588" cy="247650"/>
-          </a:xfrm>
-          <a:prstGeom prst="roundRect">
-            <a:avLst>
-              <a:gd name="adj" fmla="val 50000"/>
-            </a:avLst>
-          </a:prstGeom>
-          <a:solidFill>
             <a:srgbClr val="FFFFFF"/>
           </a:solidFill>
-          <a:ln w="6350">
+          <a:ln w="12700">
             <a:solidFill>
               <a:srgbClr val="C3CEDD"/>
             </a:solidFill>
@@ -5523,190 +5488,9 @@
           </a:ln>
         </p:spPr>
       </p:sp>
-      <p:sp>
-        <p:nvSpPr>
-          <p:cNvPr id="35" name="dot tech"/>
-          <p:cNvSpPr/>
-          <p:nvPr/>
-        </p:nvSpPr>
-        <p:spPr>
-          <a:xfrm>
-            <a:off x="730250" y="4667548"/>
-            <a:ext cx="57150" cy="57150"/>
-          </a:xfrm>
-          <a:prstGeom prst="ellipse">
-            <a:avLst/>
-          </a:prstGeom>
-          <a:solidFill>
-            <a:srgbClr val="004B8D"/>
-          </a:solidFill>
-          <a:ln/>
-        </p:spPr>
-      </p:sp>
-      <p:sp>
-        <p:nvSpPr>
-          <p:cNvPr id="36" name="p2-pill"/>
-          <p:cNvSpPr/>
-          <p:nvPr/>
-        </p:nvSpPr>
-        <p:spPr>
-          <a:xfrm>
-            <a:off x="1865213" y="4572298"/>
-            <a:ext cx="1025723" cy="247650"/>
-          </a:xfrm>
-          <a:prstGeom prst="roundRect">
-            <a:avLst>
-              <a:gd name="adj" fmla="val 50000"/>
-            </a:avLst>
-          </a:prstGeom>
-          <a:solidFill>
-            <a:srgbClr val="FFFFFF"/>
-          </a:solidFill>
-          <a:ln w="6350">
-            <a:solidFill>
-              <a:srgbClr val="C3CEDD"/>
-            </a:solidFill>
-            <a:prstDash val="solid"/>
-          </a:ln>
-        </p:spPr>
-      </p:sp>
-      <p:sp>
-        <p:nvSpPr>
-          <p:cNvPr id="37" name="dot tech"/>
-          <p:cNvSpPr/>
-          <p:nvPr/>
-        </p:nvSpPr>
-        <p:spPr>
-          <a:xfrm>
-            <a:off x="1982688" y="4667548"/>
-            <a:ext cx="57150" cy="57150"/>
-          </a:xfrm>
-          <a:prstGeom prst="ellipse">
-            <a:avLst/>
-          </a:prstGeom>
-          <a:solidFill>
-            <a:srgbClr val="004B8D"/>
-          </a:solidFill>
-          <a:ln/>
-        </p:spPr>
-      </p:sp>
-      <p:sp>
-        <p:nvSpPr>
-          <p:cNvPr id="38" name="p2-pill"/>
-          <p:cNvSpPr/>
-          <p:nvPr/>
-        </p:nvSpPr>
-        <p:spPr>
-          <a:xfrm>
-            <a:off x="612775" y="4889798"/>
-            <a:ext cx="1182588" cy="247650"/>
-          </a:xfrm>
-          <a:prstGeom prst="roundRect">
-            <a:avLst>
-              <a:gd name="adj" fmla="val 50000"/>
-            </a:avLst>
-          </a:prstGeom>
-          <a:solidFill>
-            <a:srgbClr val="FFFFFF"/>
-          </a:solidFill>
-          <a:ln w="6350">
-            <a:solidFill>
-              <a:srgbClr val="C3CEDD"/>
-            </a:solidFill>
-            <a:prstDash val="solid"/>
-          </a:ln>
-        </p:spPr>
-      </p:sp>
-      <p:sp>
-        <p:nvSpPr>
-          <p:cNvPr id="39" name="dot tech"/>
-          <p:cNvSpPr/>
-          <p:nvPr/>
-        </p:nvSpPr>
-        <p:spPr>
-          <a:xfrm>
-            <a:off x="730250" y="4985048"/>
-            <a:ext cx="57150" cy="57150"/>
-          </a:xfrm>
-          <a:prstGeom prst="ellipse">
-            <a:avLst/>
-          </a:prstGeom>
-          <a:solidFill>
-            <a:srgbClr val="004B8D"/>
-          </a:solidFill>
-          <a:ln/>
-        </p:spPr>
-      </p:sp>
-      <p:sp>
-        <p:nvSpPr>
-          <p:cNvPr id="40" name="p2-pill"/>
-          <p:cNvSpPr/>
-          <p:nvPr/>
-        </p:nvSpPr>
-        <p:spPr>
-          <a:xfrm>
-            <a:off x="1865213" y="4889798"/>
-            <a:ext cx="1025723" cy="247650"/>
-          </a:xfrm>
-          <a:prstGeom prst="roundRect">
-            <a:avLst>
-              <a:gd name="adj" fmla="val 50000"/>
-            </a:avLst>
-          </a:prstGeom>
-          <a:solidFill>
-            <a:srgbClr val="FFFFFF"/>
-          </a:solidFill>
-          <a:ln w="6350">
-            <a:solidFill>
-              <a:srgbClr val="C3CEDD"/>
-            </a:solidFill>
-            <a:prstDash val="solid"/>
-          </a:ln>
-        </p:spPr>
-      </p:sp>
-      <p:sp>
-        <p:nvSpPr>
-          <p:cNvPr id="41" name="dot tech"/>
-          <p:cNvSpPr/>
-          <p:nvPr/>
-        </p:nvSpPr>
-        <p:spPr>
-          <a:xfrm>
-            <a:off x="1982688" y="4985048"/>
-            <a:ext cx="57150" cy="57150"/>
-          </a:xfrm>
-          <a:prstGeom prst="ellipse">
-            <a:avLst/>
-          </a:prstGeom>
-          <a:solidFill>
-            <a:srgbClr val="004B8D"/>
-          </a:solidFill>
-          <a:ln/>
-        </p:spPr>
-      </p:sp>
-      <p:sp>
-        <p:nvSpPr>
-          <p:cNvPr id="42" name="p2-ic"/>
-          <p:cNvSpPr/>
-          <p:nvPr/>
-        </p:nvSpPr>
-        <p:spPr>
-          <a:xfrm>
-            <a:off x="609600" y="5290939"/>
-            <a:ext cx="190500" cy="190500"/>
-          </a:xfrm>
-          <a:prstGeom prst="ellipse">
-            <a:avLst/>
-          </a:prstGeom>
-          <a:solidFill>
-            <a:srgbClr val="004B8D"/>
-          </a:solidFill>
-          <a:ln/>
-        </p:spPr>
-      </p:sp>
       <p:pic>
         <p:nvPicPr>
-          <p:cNvPr id="43" name="p2-arr" descr="p2-arr">    </p:cNvPr>
+          <p:cNvPr id="33" name="svg" descr="svg">    </p:cNvPr>
           <p:cNvPicPr>
             <a:picLocks noChangeAspect="1"/>
           </p:cNvPicPr>
@@ -5720,17 +5504,37 @@
         </p:blipFill>
         <p:spPr>
           <a:xfrm>
-            <a:off x="664633" y="5348089"/>
-            <a:ext cx="80433" cy="71967"/>
+            <a:off x="6030383" y="3249414"/>
+            <a:ext cx="131233" cy="131233"/>
           </a:xfrm>
           <a:prstGeom prst="rect">
             <a:avLst/>
           </a:prstGeom>
         </p:spPr>
       </p:pic>
+      <p:sp>
+        <p:nvSpPr>
+          <p:cNvPr id="34" name="dot tech"/>
+          <p:cNvSpPr/>
+          <p:nvPr/>
+        </p:nvSpPr>
+        <p:spPr>
+          <a:xfrm>
+            <a:off x="7754541" y="2252464"/>
+            <a:ext cx="88900" cy="88900"/>
+          </a:xfrm>
+          <a:prstGeom prst="ellipse">
+            <a:avLst/>
+          </a:prstGeom>
+          <a:solidFill>
+            <a:srgbClr val="004B8D"/>
+          </a:solidFill>
+          <a:ln/>
+        </p:spPr>
+      </p:sp>
       <p:pic>
         <p:nvPicPr>
-          <p:cNvPr id="44" name="p2-bridge" descr="p2-bridge">    </p:cNvPr>
+          <p:cNvPr id="35" name="p2-def" descr="p2-def">    </p:cNvPr>
           <p:cNvPicPr>
             <a:picLocks noChangeAspect="1"/>
           </p:cNvPicPr>
@@ -5744,37 +5548,17 @@
         </p:blipFill>
         <p:spPr>
           <a:xfrm>
-            <a:off x="3744383" y="4795639"/>
-            <a:ext cx="1168400" cy="97367"/>
+            <a:off x="8470040" y="2115476"/>
+            <a:ext cx="12700" cy="368300"/>
           </a:xfrm>
           <a:prstGeom prst="rect">
             <a:avLst/>
           </a:prstGeom>
         </p:spPr>
       </p:pic>
-      <p:sp>
-        <p:nvSpPr>
-          <p:cNvPr id="45" name="p2-kw b"/>
-          <p:cNvSpPr/>
-          <p:nvPr/>
-        </p:nvSpPr>
-        <p:spPr>
-          <a:xfrm>
-            <a:off x="4940300" y="4605139"/>
-            <a:ext cx="482600" cy="482600"/>
-          </a:xfrm>
-          <a:prstGeom prst="ellipse">
-            <a:avLst/>
-          </a:prstGeom>
-          <a:solidFill>
-            <a:srgbClr val="004B8D"/>
-          </a:solidFill>
-          <a:ln/>
-        </p:spPr>
-      </p:sp>
       <p:pic>
         <p:nvPicPr>
-          <p:cNvPr id="46" name="p2-svg" descr="p2-svg">    </p:cNvPr>
+          <p:cNvPr id="36" name="p2-svg" descr="p2-svg">    </p:cNvPr>
           <p:cNvPicPr>
             <a:picLocks noChangeAspect="1"/>
           </p:cNvPicPr>
@@ -5788,8 +5572,8 @@
         </p:blipFill>
         <p:spPr>
           <a:xfrm>
-            <a:off x="7313083" y="4284464"/>
-            <a:ext cx="3712633" cy="1128183"/>
+            <a:off x="7186083" y="2703314"/>
+            <a:ext cx="3712633" cy="1714500"/>
           </a:xfrm>
           <a:prstGeom prst="rect">
             <a:avLst/>
@@ -5798,13 +5582,13 @@
       </p:pic>
       <p:sp>
         <p:nvSpPr>
-          <p:cNvPr id="47" name="p2-n p2-chip b"/>
+          <p:cNvPr id="37" name="p2-n p2-chip b"/>
           <p:cNvSpPr/>
           <p:nvPr/>
         </p:nvSpPr>
         <p:spPr>
           <a:xfrm>
-            <a:off x="7153275" y="4335264"/>
+            <a:off x="7026275" y="2763639"/>
             <a:ext cx="1416050" cy="234950"/>
           </a:xfrm>
           <a:prstGeom prst="roundRect">
@@ -5825,13 +5609,13 @@
       </p:sp>
       <p:sp>
         <p:nvSpPr>
-          <p:cNvPr id="48" name="dot tech"/>
+          <p:cNvPr id="38" name="dot tech"/>
           <p:cNvSpPr/>
           <p:nvPr/>
         </p:nvSpPr>
         <p:spPr>
           <a:xfrm>
-            <a:off x="7418685" y="4424164"/>
+            <a:off x="7291685" y="2852539"/>
             <a:ext cx="57150" cy="57150"/>
           </a:xfrm>
           <a:prstGeom prst="ellipse">
@@ -5845,13 +5629,13 @@
       </p:sp>
       <p:sp>
         <p:nvSpPr>
-          <p:cNvPr id="49" name="p2-n p2-chip b"/>
+          <p:cNvPr id="39" name="p2-n p2-chip b"/>
           <p:cNvSpPr/>
           <p:nvPr/>
         </p:nvSpPr>
         <p:spPr>
           <a:xfrm>
-            <a:off x="9769475" y="4335264"/>
+            <a:off x="9642475" y="2763639"/>
             <a:ext cx="1416050" cy="234950"/>
           </a:xfrm>
           <a:prstGeom prst="roundRect">
@@ -5872,13 +5656,13 @@
       </p:sp>
       <p:sp>
         <p:nvSpPr>
-          <p:cNvPr id="50" name="dot tech"/>
+          <p:cNvPr id="40" name="dot tech"/>
           <p:cNvSpPr/>
           <p:nvPr/>
         </p:nvSpPr>
         <p:spPr>
           <a:xfrm>
-            <a:off x="10009584" y="4424164"/>
+            <a:off x="9882584" y="2852539"/>
             <a:ext cx="57150" cy="57150"/>
           </a:xfrm>
           <a:prstGeom prst="ellipse">
@@ -5892,13 +5676,13 @@
       </p:sp>
       <p:sp>
         <p:nvSpPr>
-          <p:cNvPr id="51" name="p2-n p2-chip b"/>
+          <p:cNvPr id="41" name="p2-n p2-chip b"/>
           <p:cNvSpPr/>
           <p:nvPr/>
         </p:nvSpPr>
         <p:spPr>
           <a:xfrm>
-            <a:off x="7153275" y="5122664"/>
+            <a:off x="7026275" y="3601839"/>
             <a:ext cx="1416050" cy="234950"/>
           </a:xfrm>
           <a:prstGeom prst="roundRect">
@@ -5919,13 +5703,13 @@
       </p:sp>
       <p:sp>
         <p:nvSpPr>
-          <p:cNvPr id="52" name="dot tech"/>
+          <p:cNvPr id="42" name="dot tech"/>
           <p:cNvSpPr/>
           <p:nvPr/>
         </p:nvSpPr>
         <p:spPr>
           <a:xfrm>
-            <a:off x="7351613" y="5211564"/>
+            <a:off x="7224613" y="3690739"/>
             <a:ext cx="57150" cy="57150"/>
           </a:xfrm>
           <a:prstGeom prst="ellipse">
@@ -5939,13 +5723,13 @@
       </p:sp>
       <p:sp>
         <p:nvSpPr>
-          <p:cNvPr id="53" name="p2-n p2-chip b"/>
+          <p:cNvPr id="43" name="p2-n p2-chip b"/>
           <p:cNvSpPr/>
           <p:nvPr/>
         </p:nvSpPr>
         <p:spPr>
           <a:xfrm>
-            <a:off x="9769475" y="5122664"/>
+            <a:off x="9642475" y="3601839"/>
             <a:ext cx="1416050" cy="234950"/>
           </a:xfrm>
           <a:prstGeom prst="roundRect">
@@ -5966,13 +5750,13 @@
       </p:sp>
       <p:sp>
         <p:nvSpPr>
-          <p:cNvPr id="54" name="dot tech"/>
+          <p:cNvPr id="44" name="dot tech"/>
           <p:cNvSpPr/>
           <p:nvPr/>
         </p:nvSpPr>
         <p:spPr>
           <a:xfrm>
-            <a:off x="10034885" y="5211564"/>
+            <a:off x="9907885" y="3690739"/>
             <a:ext cx="57150" cy="57150"/>
           </a:xfrm>
           <a:prstGeom prst="ellipse">
@@ -5986,7 +5770,7 @@
       </p:sp>
       <p:pic>
         <p:nvPicPr>
-          <p:cNvPr id="55" name="p2-n ring p2-core b" descr="p2-n ring p2-core b">    </p:cNvPr>
+          <p:cNvPr id="45" name="p2-n ring p2-core b" descr="p2-n ring p2-core b">    </p:cNvPr>
           <p:cNvPicPr>
             <a:picLocks noChangeAspect="1"/>
           </p:cNvPicPr>
@@ -6000,8 +5784,8 @@
         </p:blipFill>
         <p:spPr>
           <a:xfrm>
-            <a:off x="8788400" y="4463322"/>
-            <a:ext cx="762000" cy="762000"/>
+            <a:off x="8636000" y="2895931"/>
+            <a:ext cx="812800" cy="812800"/>
           </a:xfrm>
           <a:prstGeom prst="rect">
             <a:avLst/>
@@ -6010,21 +5794,401 @@
       </p:pic>
       <p:sp>
         <p:nvSpPr>
-          <p:cNvPr id="56" name="key"/>
+          <p:cNvPr id="46" name="p2-card"/>
           <p:cNvSpPr/>
           <p:nvPr/>
         </p:nvSpPr>
         <p:spPr>
           <a:xfrm>
-            <a:off x="609600" y="5892205"/>
-            <a:ext cx="10972800" cy="457200"/>
+            <a:off x="6505575" y="4420989"/>
+            <a:ext cx="5073650" cy="1022350"/>
           </a:xfrm>
           <a:prstGeom prst="roundRect">
             <a:avLst>
-              <a:gd name="adj" fmla="val 30556"/>
+              <a:gd name="adj" fmla="val 13354"/>
             </a:avLst>
           </a:prstGeom>
           <a:solidFill>
+            <a:srgbClr val="FFFFFF"/>
+          </a:solidFill>
+          <a:ln w="6350">
+            <a:solidFill>
+              <a:srgbClr val="99B7D1"/>
+            </a:solidFill>
+            <a:prstDash val="solid"/>
+          </a:ln>
+        </p:spPr>
+      </p:sp>
+      <p:sp>
+        <p:nvSpPr>
+          <p:cNvPr id="47" name="p2-pill"/>
+          <p:cNvSpPr/>
+          <p:nvPr/>
+        </p:nvSpPr>
+        <p:spPr>
+          <a:xfrm>
+            <a:off x="6689725" y="4803577"/>
+            <a:ext cx="1150838" cy="234950"/>
+          </a:xfrm>
+          <a:prstGeom prst="roundRect">
+            <a:avLst>
+              <a:gd name="adj" fmla="val 50000"/>
+            </a:avLst>
+          </a:prstGeom>
+          <a:solidFill>
+            <a:srgbClr val="FFFFFF"/>
+          </a:solidFill>
+          <a:ln w="6350">
+            <a:solidFill>
+              <a:srgbClr val="C3CEDD"/>
+            </a:solidFill>
+            <a:prstDash val="solid"/>
+          </a:ln>
+        </p:spPr>
+      </p:sp>
+      <p:sp>
+        <p:nvSpPr>
+          <p:cNvPr id="48" name="dot tech"/>
+          <p:cNvSpPr/>
+          <p:nvPr/>
+        </p:nvSpPr>
+        <p:spPr>
+          <a:xfrm>
+            <a:off x="6794500" y="4892477"/>
+            <a:ext cx="57150" cy="57150"/>
+          </a:xfrm>
+          <a:prstGeom prst="ellipse">
+            <a:avLst/>
+          </a:prstGeom>
+          <a:solidFill>
+            <a:srgbClr val="004B8D"/>
+          </a:solidFill>
+          <a:ln/>
+        </p:spPr>
+      </p:sp>
+      <p:sp>
+        <p:nvSpPr>
+          <p:cNvPr id="49" name="p2-pill"/>
+          <p:cNvSpPr/>
+          <p:nvPr/>
+        </p:nvSpPr>
+        <p:spPr>
+          <a:xfrm>
+            <a:off x="7897713" y="4803577"/>
+            <a:ext cx="993973" cy="234950"/>
+          </a:xfrm>
+          <a:prstGeom prst="roundRect">
+            <a:avLst>
+              <a:gd name="adj" fmla="val 50000"/>
+            </a:avLst>
+          </a:prstGeom>
+          <a:solidFill>
+            <a:srgbClr val="FFFFFF"/>
+          </a:solidFill>
+          <a:ln w="6350">
+            <a:solidFill>
+              <a:srgbClr val="C3CEDD"/>
+            </a:solidFill>
+            <a:prstDash val="solid"/>
+          </a:ln>
+        </p:spPr>
+      </p:sp>
+      <p:sp>
+        <p:nvSpPr>
+          <p:cNvPr id="50" name="dot tech"/>
+          <p:cNvSpPr/>
+          <p:nvPr/>
+        </p:nvSpPr>
+        <p:spPr>
+          <a:xfrm>
+            <a:off x="8002488" y="4892477"/>
+            <a:ext cx="57150" cy="57150"/>
+          </a:xfrm>
+          <a:prstGeom prst="ellipse">
+            <a:avLst/>
+          </a:prstGeom>
+          <a:solidFill>
+            <a:srgbClr val="004B8D"/>
+          </a:solidFill>
+          <a:ln/>
+        </p:spPr>
+      </p:sp>
+      <p:sp>
+        <p:nvSpPr>
+          <p:cNvPr id="51" name="p2-pill"/>
+          <p:cNvSpPr/>
+          <p:nvPr/>
+        </p:nvSpPr>
+        <p:spPr>
+          <a:xfrm>
+            <a:off x="6689725" y="5095677"/>
+            <a:ext cx="1150838" cy="234950"/>
+          </a:xfrm>
+          <a:prstGeom prst="roundRect">
+            <a:avLst>
+              <a:gd name="adj" fmla="val 50000"/>
+            </a:avLst>
+          </a:prstGeom>
+          <a:solidFill>
+            <a:srgbClr val="FFFFFF"/>
+          </a:solidFill>
+          <a:ln w="6350">
+            <a:solidFill>
+              <a:srgbClr val="C3CEDD"/>
+            </a:solidFill>
+            <a:prstDash val="solid"/>
+          </a:ln>
+        </p:spPr>
+      </p:sp>
+      <p:sp>
+        <p:nvSpPr>
+          <p:cNvPr id="52" name="dot tech"/>
+          <p:cNvSpPr/>
+          <p:nvPr/>
+        </p:nvSpPr>
+        <p:spPr>
+          <a:xfrm>
+            <a:off x="6794500" y="5184577"/>
+            <a:ext cx="57150" cy="57150"/>
+          </a:xfrm>
+          <a:prstGeom prst="ellipse">
+            <a:avLst/>
+          </a:prstGeom>
+          <a:solidFill>
+            <a:srgbClr val="004B8D"/>
+          </a:solidFill>
+          <a:ln/>
+        </p:spPr>
+      </p:sp>
+      <p:sp>
+        <p:nvSpPr>
+          <p:cNvPr id="53" name="p2-pill"/>
+          <p:cNvSpPr/>
+          <p:nvPr/>
+        </p:nvSpPr>
+        <p:spPr>
+          <a:xfrm>
+            <a:off x="7897713" y="5095677"/>
+            <a:ext cx="993973" cy="234950"/>
+          </a:xfrm>
+          <a:prstGeom prst="roundRect">
+            <a:avLst>
+              <a:gd name="adj" fmla="val 50000"/>
+            </a:avLst>
+          </a:prstGeom>
+          <a:solidFill>
+            <a:srgbClr val="FFFFFF"/>
+          </a:solidFill>
+          <a:ln w="6350">
+            <a:solidFill>
+              <a:srgbClr val="C3CEDD"/>
+            </a:solidFill>
+            <a:prstDash val="solid"/>
+          </a:ln>
+        </p:spPr>
+      </p:sp>
+      <p:sp>
+        <p:nvSpPr>
+          <p:cNvPr id="54" name="dot tech"/>
+          <p:cNvSpPr/>
+          <p:nvPr/>
+        </p:nvSpPr>
+        <p:spPr>
+          <a:xfrm>
+            <a:off x="8002488" y="5184577"/>
+            <a:ext cx="57150" cy="57150"/>
+          </a:xfrm>
+          <a:prstGeom prst="ellipse">
+            <a:avLst/>
+          </a:prstGeom>
+          <a:solidFill>
+            <a:srgbClr val="004B8D"/>
+          </a:solidFill>
+          <a:ln/>
+        </p:spPr>
+      </p:sp>
+      <p:pic>
+        <p:nvPicPr>
+          <p:cNvPr id="55" name="p2-to" descr="p2-to">    </p:cNvPr>
+          <p:cNvPicPr>
+            <a:picLocks noChangeAspect="1"/>
+          </p:cNvPicPr>
+          <p:nvPr/>
+        </p:nvPicPr>
+        <p:blipFill>
+          <a:blip r:embed="rId12"/>
+          <a:stretch>
+            <a:fillRect/>
+          </a:stretch>
+        </p:blipFill>
+        <p:spPr>
+          <a:xfrm>
+            <a:off x="9074778" y="4515181"/>
+            <a:ext cx="6350" cy="838200"/>
+          </a:xfrm>
+          <a:prstGeom prst="rect">
+            <a:avLst/>
+          </a:prstGeom>
+        </p:spPr>
+      </p:pic>
+      <p:sp>
+        <p:nvSpPr>
+          <p:cNvPr id="56" name="p2-ic"/>
+          <p:cNvSpPr/>
+          <p:nvPr/>
+        </p:nvSpPr>
+        <p:spPr>
+          <a:xfrm>
+            <a:off x="9256812" y="4843264"/>
+            <a:ext cx="177800" cy="177800"/>
+          </a:xfrm>
+          <a:prstGeom prst="ellipse">
+            <a:avLst/>
+          </a:prstGeom>
+          <a:solidFill>
+            <a:srgbClr val="004B8D"/>
+          </a:solidFill>
+          <a:ln/>
+        </p:spPr>
+      </p:sp>
+      <p:pic>
+        <p:nvPicPr>
+          <p:cNvPr id="57" name="p2-arr" descr="p2-arr">    </p:cNvPr>
+          <p:cNvPicPr>
+            <a:picLocks noChangeAspect="1"/>
+          </p:cNvPicPr>
+          <p:nvPr/>
+        </p:nvPicPr>
+        <p:blipFill>
+          <a:blip r:embed="rId13"/>
+          <a:stretch>
+            <a:fillRect/>
+          </a:stretch>
+        </p:blipFill>
+        <p:spPr>
+          <a:xfrm>
+            <a:off x="9306553" y="4897239"/>
+            <a:ext cx="76200" cy="65617"/>
+          </a:xfrm>
+          <a:prstGeom prst="rect">
+            <a:avLst/>
+          </a:prstGeom>
+        </p:spPr>
+      </p:pic>
+      <p:pic>
+        <p:nvPicPr>
+          <p:cNvPr id="58" name="p2-tag en" descr="p2-tag en">    </p:cNvPr>
+          <p:cNvPicPr>
+            <a:picLocks noChangeAspect="1"/>
+          </p:cNvPicPr>
+          <p:nvPr/>
+        </p:nvPicPr>
+        <p:blipFill>
+          <a:blip r:embed="rId14"/>
+          <a:stretch>
+            <a:fillRect/>
+          </a:stretch>
+        </p:blipFill>
+        <p:spPr>
+          <a:xfrm>
+            <a:off x="5309559" y="4235053"/>
+            <a:ext cx="152400" cy="12700"/>
+          </a:xfrm>
+          <a:prstGeom prst="rect">
+            <a:avLst/>
+          </a:prstGeom>
+        </p:spPr>
+      </p:pic>
+      <p:pic>
+        <p:nvPicPr>
+          <p:cNvPr id="59" name="p2-conv" descr="p2-conv">    </p:cNvPr>
+          <p:cNvPicPr>
+            <a:picLocks noChangeAspect="1"/>
+          </p:cNvPicPr>
+          <p:nvPr/>
+        </p:nvPicPr>
+        <p:blipFill>
+          <a:blip r:embed="rId15"/>
+          <a:stretch>
+            <a:fillRect/>
+          </a:stretch>
+        </p:blipFill>
+        <p:spPr>
+          <a:xfrm>
+            <a:off x="3143250" y="5442281"/>
+            <a:ext cx="5905500" cy="381000"/>
+          </a:xfrm>
+          <a:prstGeom prst="rect">
+            <a:avLst/>
+          </a:prstGeom>
+        </p:spPr>
+      </p:pic>
+      <p:sp>
+        <p:nvSpPr>
+          <p:cNvPr id="60" name="p2-op p2-eq"/>
+          <p:cNvSpPr/>
+          <p:nvPr/>
+        </p:nvSpPr>
+        <p:spPr>
+          <a:xfrm>
+            <a:off x="5988050" y="5529064"/>
+            <a:ext cx="215900" cy="215900"/>
+          </a:xfrm>
+          <a:prstGeom prst="ellipse">
+            <a:avLst/>
+          </a:prstGeom>
+          <a:solidFill>
+            <a:srgbClr val="FFFFFF"/>
+          </a:solidFill>
+          <a:ln w="12700">
+            <a:solidFill>
+              <a:srgbClr val="2A78DD"/>
+            </a:solidFill>
+            <a:prstDash val="solid"/>
+          </a:ln>
+        </p:spPr>
+      </p:sp>
+      <p:pic>
+        <p:nvPicPr>
+          <p:cNvPr id="61" name="svg" descr="svg">    </p:cNvPr>
+          <p:cNvPicPr>
+            <a:picLocks noChangeAspect="1"/>
+          </p:cNvPicPr>
+          <p:nvPr/>
+        </p:nvPicPr>
+        <p:blipFill>
+          <a:blip r:embed="rId16"/>
+          <a:stretch>
+            <a:fillRect/>
+          </a:stretch>
+        </p:blipFill>
+        <p:spPr>
+          <a:xfrm>
+            <a:off x="6043083" y="5611614"/>
+            <a:ext cx="105833" cy="55033"/>
+          </a:xfrm>
+          <a:prstGeom prst="rect">
+            <a:avLst/>
+          </a:prstGeom>
+        </p:spPr>
+      </p:pic>
+      <p:sp>
+        <p:nvSpPr>
+          <p:cNvPr id="62" name="key"/>
+          <p:cNvSpPr/>
+          <p:nvPr/>
+        </p:nvSpPr>
+        <p:spPr>
+          <a:xfrm>
+            <a:off x="609600" y="5814814"/>
+            <a:ext cx="10972800" cy="482600"/>
+          </a:xfrm>
+          <a:prstGeom prst="roundRect">
+            <a:avLst>
+              <a:gd name="adj" fmla="val 28947"/>
+            </a:avLst>
+          </a:prstGeom>
+          <a:solidFill>
             <a:srgbClr val="0B2147"/>
           </a:solidFill>
           <a:ln/>
@@ -6032,13 +6196,13 @@
       </p:sp>
       <p:sp>
         <p:nvSpPr>
-          <p:cNvPr id="57" name="i"/>
+          <p:cNvPr id="63" name="i"/>
           <p:cNvSpPr/>
           <p:nvPr/>
         </p:nvSpPr>
         <p:spPr>
           <a:xfrm>
-            <a:off x="863600" y="6089055"/>
+            <a:off x="863600" y="6024364"/>
             <a:ext cx="63500" cy="63500"/>
           </a:xfrm>
           <a:prstGeom prst="ellipse">
@@ -6052,13 +6216,13 @@
       </p:sp>
       <p:sp>
         <p:nvSpPr>
-          <p:cNvPr id="58" name="b"/>
+          <p:cNvPr id="64" name="b"/>
           <p:cNvSpPr/>
           <p:nvPr/>
         </p:nvSpPr>
         <p:spPr>
           <a:xfrm>
-            <a:off x="927100" y="6114455"/>
+            <a:off x="927100" y="6049764"/>
             <a:ext cx="88900" cy="12700"/>
           </a:xfrm>
           <a:prstGeom prst="rect">
@@ -6072,13 +6236,13 @@
       </p:sp>
       <p:sp>
         <p:nvSpPr>
-          <p:cNvPr id="59" name="i"/>
+          <p:cNvPr id="65" name="i"/>
           <p:cNvSpPr/>
           <p:nvPr/>
         </p:nvSpPr>
         <p:spPr>
           <a:xfrm>
-            <a:off x="1016000" y="6089055"/>
+            <a:off x="1016000" y="6024364"/>
             <a:ext cx="63500" cy="63500"/>
           </a:xfrm>
           <a:prstGeom prst="ellipse">
@@ -6092,13 +6256,13 @@
       </p:sp>
       <p:sp>
         <p:nvSpPr>
-          <p:cNvPr id="60" name="b"/>
+          <p:cNvPr id="66" name="b"/>
           <p:cNvSpPr/>
           <p:nvPr/>
         </p:nvSpPr>
         <p:spPr>
           <a:xfrm>
-            <a:off x="1079500" y="6114455"/>
+            <a:off x="1079500" y="6049764"/>
             <a:ext cx="88900" cy="12700"/>
           </a:xfrm>
           <a:prstGeom prst="rect">
@@ -6112,13 +6276,13 @@
       </p:sp>
       <p:sp>
         <p:nvSpPr>
-          <p:cNvPr id="61" name="i"/>
+          <p:cNvPr id="67" name="i"/>
           <p:cNvSpPr/>
           <p:nvPr/>
         </p:nvSpPr>
         <p:spPr>
           <a:xfrm>
-            <a:off x="1168400" y="6089055"/>
+            <a:off x="1168400" y="6024364"/>
             <a:ext cx="63500" cy="63500"/>
           </a:xfrm>
           <a:prstGeom prst="ellipse">
@@ -6132,7 +6296,7 @@
       </p:sp>
       <p:sp>
         <p:nvSpPr>
-          <p:cNvPr id="62" name="02"/>
+          <p:cNvPr id="68" name="02"/>
           <p:cNvSpPr txBox="1"/>
           <p:nvPr/>
         </p:nvSpPr>
@@ -6171,7 +6335,7 @@
       </p:sp>
       <p:sp>
         <p:nvSpPr>
-          <p:cNvPr id="63" name="PT 주제 2. 가치관과 핵심키워드의 연결점 &amp; 입사 후 실천"/>
+          <p:cNvPr id="69" name="PT 주제 2. 가치관과 핵심키워드의 연결점 &amp; 입사 후 실천"/>
           <p:cNvSpPr txBox="1"/>
           <p:nvPr/>
         </p:nvSpPr>
@@ -6210,7 +6374,7 @@
       </p:sp>
       <p:sp>
         <p:nvSpPr>
-          <p:cNvPr id="64" name="제가 중요하게 생각하는 ‘협업’의 가치는"/>
+          <p:cNvPr id="70" name="제가 중요하게 생각하는 ‘협업’의 가치는"/>
           <p:cNvSpPr txBox="1"/>
           <p:nvPr/>
         </p:nvSpPr>
@@ -6249,7 +6413,7 @@
       </p:sp>
       <p:sp>
         <p:nvSpPr>
-          <p:cNvPr id="65" name="현대엔지니어링의 ‘우리의 기술’과 맞닿아 있습니다."/>
+          <p:cNvPr id="71" name="현대엔지니어링의 ‘우리의 기술’과 맞닿아 있습니다."/>
           <p:cNvSpPr txBox="1"/>
           <p:nvPr/>
         </p:nvSpPr>
@@ -6316,30 +6480,30 @@
       </p:sp>
       <p:sp>
         <p:nvSpPr>
-          <p:cNvPr id="66" name="MY VALUES"/>
-          <p:cNvSpPr txBox="1"/>
-          <p:nvPr/>
-        </p:nvSpPr>
-        <p:spPr>
-          <a:xfrm>
-            <a:off x="609600" y="1834753"/>
-            <a:ext cx="859234" cy="146050"/>
-          </a:xfrm>
-          <a:prstGeom prst="rect">
-            <a:avLst/>
-          </a:prstGeom>
-          <a:noFill/>
-          <a:ln/>
-        </p:spPr>
-        <p:txBody>
-          <a:bodyPr wrap="none" lIns="0" tIns="0" rIns="0" bIns="0" rtlCol="0" anchor="ctr"/>
-          <a:lstStyle/>
-          <a:p>
-            <a:pPr algn="l" indent="0" marL="0">
-              <a:buNone/>
-            </a:pPr>
-            <a:r>
-              <a:rPr lang="ko-KR" altLang="en-US" sz="950" b="1" spc="114" kern="0" dirty="0">
+          <p:cNvPr id="72" name="현대엔지니어링"/>
+          <p:cNvSpPr txBox="1"/>
+          <p:nvPr/>
+        </p:nvSpPr>
+        <p:spPr>
+          <a:xfrm>
+            <a:off x="4469507" y="1834753"/>
+            <a:ext cx="797620" cy="146050"/>
+          </a:xfrm>
+          <a:prstGeom prst="rect">
+            <a:avLst/>
+          </a:prstGeom>
+          <a:noFill/>
+          <a:ln/>
+        </p:spPr>
+        <p:txBody>
+          <a:bodyPr wrap="none" lIns="0" tIns="0" rIns="0" bIns="0" rtlCol="0" anchor="ctr"/>
+          <a:lstStyle/>
+          <a:p>
+            <a:pPr algn="l" indent="0" marL="0">
+              <a:buNone/>
+            </a:pPr>
+            <a:r>
+              <a:rPr lang="ko-KR" altLang="en-US" sz="950" b="1" spc="19" kern="0" dirty="0">
                 <a:solidFill>
                   <a:srgbClr val="2A78DD"/>
                 </a:solidFill>
@@ -6347,7 +6511,7 @@
                 <a:ea typeface="Pretendard" pitchFamily="34" charset="-127"/>
                 <a:cs typeface="Pretendard" pitchFamily="34" charset="-120"/>
               </a:rPr>
-              <a:t>MY VALUES</a:t>
+              <a:t>현대엔지니어링</a:t>
             </a:r>
             <a:endParaRPr lang="en-US" sz="950" dirty="0"/>
           </a:p>
@@ -6355,14 +6519,14 @@
       </p:sp>
       <p:sp>
         <p:nvSpPr>
-          <p:cNvPr id="67" name="나의 가치관 · 공동의 목표를 공유하는 협업"/>
-          <p:cNvSpPr txBox="1"/>
-          <p:nvPr/>
-        </p:nvSpPr>
-        <p:spPr>
-          <a:xfrm>
-            <a:off x="1735534" y="1821061"/>
-            <a:ext cx="2353852" cy="165100"/>
+          <p:cNvPr id="73" name="저는 ‘우리의 기술’을 이렇게 이해했습니다"/>
+          <p:cNvSpPr txBox="1"/>
+          <p:nvPr/>
+        </p:nvSpPr>
+        <p:spPr>
+          <a:xfrm>
+            <a:off x="5533827" y="1821061"/>
+            <a:ext cx="2319986" cy="165100"/>
           </a:xfrm>
           <a:prstGeom prst="rect">
             <a:avLst/>
@@ -6380,13 +6544,27 @@
             <a:r>
               <a:rPr lang="ko-KR" altLang="en-US" sz="1100" spc="-22" kern="0" dirty="0">
                 <a:solidFill>
-                  <a:srgbClr val="0B2147"/>
+                  <a:srgbClr val="3D4757"/>
+                </a:solidFill>
+                <a:latin typeface="Pretendard SemiBold" pitchFamily="34" charset="0"/>
+                <a:ea typeface="Pretendard SemiBold" pitchFamily="34" charset="-127"/>
+                <a:cs typeface="Pretendard SemiBold" pitchFamily="34" charset="-120"/>
+              </a:rPr>
+              <a:t>저는 ‘</a:t>
+            </a:r>
+            <a:pPr algn="l" indent="0" marL="0">
+              <a:buNone/>
+            </a:pPr>
+            <a:r>
+              <a:rPr lang="ko-KR" altLang="en-US" sz="1100" spc="-22" kern="0" dirty="0">
+                <a:solidFill>
+                  <a:srgbClr val="004B8D"/>
                 </a:solidFill>
                 <a:latin typeface="Pretendard ExtraBold" pitchFamily="34" charset="0"/>
                 <a:ea typeface="Pretendard ExtraBold" pitchFamily="34" charset="-127"/>
                 <a:cs typeface="Pretendard ExtraBold" pitchFamily="34" charset="-120"/>
               </a:rPr>
-              <a:t>나의 가치관</a:t>
+              <a:t>우리의 기술</a:t>
             </a:r>
             <a:pPr algn="l" indent="0" marL="0">
               <a:buNone/>
@@ -6400,7 +6578,7 @@
                 <a:ea typeface="Pretendard SemiBold" pitchFamily="34" charset="-127"/>
                 <a:cs typeface="Pretendard SemiBold" pitchFamily="34" charset="-120"/>
               </a:rPr>
-              <a:t> · 공동의 목표를 공유하는 협업</a:t>
+              <a:t>’을 이렇게 이해했습니다</a:t>
             </a:r>
             <a:endParaRPr lang="en-US" sz="1100" dirty="0"/>
           </a:p>
@@ -6408,38 +6586,77 @@
       </p:sp>
       <p:sp>
         <p:nvSpPr>
-          <p:cNvPr id="68" name="현대엔지니어링"/>
-          <p:cNvSpPr txBox="1"/>
-          <p:nvPr/>
-        </p:nvSpPr>
-        <p:spPr>
-          <a:xfrm>
-            <a:off x="4940300" y="1834753"/>
-            <a:ext cx="797620" cy="146050"/>
-          </a:xfrm>
-          <a:prstGeom prst="rect">
-            <a:avLst/>
-          </a:prstGeom>
-          <a:noFill/>
-          <a:ln/>
-        </p:spPr>
-        <p:txBody>
-          <a:bodyPr wrap="none" lIns="0" tIns="0" rIns="0" bIns="0" rtlCol="0" anchor="ctr"/>
-          <a:lstStyle/>
-          <a:p>
-            <a:pPr algn="l" indent="0" marL="0">
-              <a:buNone/>
-            </a:pPr>
-            <a:r>
-              <a:rPr lang="ko-KR" altLang="en-US" sz="950" b="1" spc="19" kern="0" dirty="0">
-                <a:solidFill>
-                  <a:srgbClr val="2A78DD"/>
+          <p:cNvPr id="74" name="우리"/>
+          <p:cNvSpPr txBox="1"/>
+          <p:nvPr/>
+        </p:nvSpPr>
+        <p:spPr>
+          <a:xfrm>
+            <a:off x="2191048" y="2144514"/>
+            <a:ext cx="472083" cy="304800"/>
+          </a:xfrm>
+          <a:prstGeom prst="rect">
+            <a:avLst/>
+          </a:prstGeom>
+          <a:noFill/>
+          <a:ln/>
+        </p:spPr>
+        <p:txBody>
+          <a:bodyPr wrap="none" lIns="0" tIns="0" rIns="0" bIns="0" rtlCol="0" anchor="ctr"/>
+          <a:lstStyle/>
+          <a:p>
+            <a:pPr algn="l" indent="0" marL="0">
+              <a:buNone/>
+            </a:pPr>
+            <a:r>
+              <a:rPr lang="ko-KR" altLang="en-US" sz="2000" spc="-70" kern="0" dirty="0">
+                <a:solidFill>
+                  <a:srgbClr val="00A94F"/>
+                </a:solidFill>
+                <a:latin typeface="Pretendard ExtraBold" pitchFamily="34" charset="0"/>
+                <a:ea typeface="Pretendard ExtraBold" pitchFamily="34" charset="-127"/>
+                <a:cs typeface="Pretendard ExtraBold" pitchFamily="34" charset="-120"/>
+              </a:rPr>
+              <a:t>우리</a:t>
+            </a:r>
+            <a:endParaRPr lang="en-US" sz="2000" dirty="0"/>
+          </a:p>
+        </p:txBody>
+      </p:sp>
+      <p:sp>
+        <p:nvSpPr>
+          <p:cNvPr id="75" name="OUR"/>
+          <p:cNvSpPr txBox="1"/>
+          <p:nvPr/>
+        </p:nvSpPr>
+        <p:spPr>
+          <a:xfrm>
+            <a:off x="2879030" y="2107009"/>
+            <a:ext cx="353516" cy="146050"/>
+          </a:xfrm>
+          <a:prstGeom prst="rect">
+            <a:avLst/>
+          </a:prstGeom>
+          <a:noFill/>
+          <a:ln/>
+        </p:spPr>
+        <p:txBody>
+          <a:bodyPr wrap="none" lIns="0" tIns="0" rIns="0" bIns="0" rtlCol="0" anchor="ctr"/>
+          <a:lstStyle/>
+          <a:p>
+            <a:pPr algn="l" indent="0" marL="0">
+              <a:buNone/>
+            </a:pPr>
+            <a:r>
+              <a:rPr lang="ko-KR" altLang="en-US" sz="950" b="1" spc="133" kern="0" dirty="0">
+                <a:solidFill>
+                  <a:srgbClr val="00A94F"/>
                 </a:solidFill>
                 <a:latin typeface="Pretendard" pitchFamily="34" charset="0"/>
                 <a:ea typeface="Pretendard" pitchFamily="34" charset="-127"/>
                 <a:cs typeface="Pretendard" pitchFamily="34" charset="-120"/>
               </a:rPr>
-              <a:t>현대엔지니어링</a:t>
+              <a:t>OUR</a:t>
             </a:r>
             <a:endParaRPr lang="en-US" sz="950" dirty="0"/>
           </a:p>
@@ -6447,30 +6664,537 @@
       </p:sp>
       <p:sp>
         <p:nvSpPr>
-          <p:cNvPr id="69" name="저는 ‘우리의 기술’을 이렇게 이해했습니다"/>
-          <p:cNvSpPr txBox="1"/>
-          <p:nvPr/>
-        </p:nvSpPr>
-        <p:spPr>
-          <a:xfrm>
-            <a:off x="6004620" y="1821061"/>
-            <a:ext cx="2319986" cy="165100"/>
-          </a:xfrm>
-          <a:prstGeom prst="rect">
-            <a:avLst/>
-          </a:prstGeom>
-          <a:noFill/>
-          <a:ln/>
-        </p:spPr>
-        <p:txBody>
-          <a:bodyPr wrap="none" lIns="0" tIns="0" rIns="0" bIns="0" rtlCol="0" anchor="ctr"/>
-          <a:lstStyle/>
-          <a:p>
-            <a:pPr algn="l" indent="0" marL="0">
-              <a:buNone/>
-            </a:pPr>
-            <a:r>
-              <a:rPr lang="ko-KR" altLang="en-US" sz="1100" spc="-22" kern="0" dirty="0">
+          <p:cNvPr id="76" name="사람과 전문성의 연결"/>
+          <p:cNvSpPr txBox="1"/>
+          <p:nvPr/>
+        </p:nvSpPr>
+        <p:spPr>
+          <a:xfrm>
+            <a:off x="2879030" y="2258120"/>
+            <a:ext cx="1477770" cy="215900"/>
+          </a:xfrm>
+          <a:prstGeom prst="rect">
+            <a:avLst/>
+          </a:prstGeom>
+          <a:noFill/>
+          <a:ln/>
+        </p:spPr>
+        <p:txBody>
+          <a:bodyPr wrap="none" lIns="0" tIns="0" rIns="0" bIns="0" rtlCol="0" anchor="ctr"/>
+          <a:lstStyle/>
+          <a:p>
+            <a:pPr algn="l" indent="0" marL="0">
+              <a:buNone/>
+            </a:pPr>
+            <a:r>
+              <a:rPr lang="ko-KR" altLang="en-US" sz="1400" spc="-49" kern="0" dirty="0">
+                <a:solidFill>
+                  <a:srgbClr val="0B2147"/>
+                </a:solidFill>
+                <a:latin typeface="Pretendard ExtraBold" pitchFamily="34" charset="0"/>
+                <a:ea typeface="Pretendard ExtraBold" pitchFamily="34" charset="-127"/>
+                <a:cs typeface="Pretendard ExtraBold" pitchFamily="34" charset="-120"/>
+              </a:rPr>
+              <a:t>사람과 전문성의 연결</a:t>
+            </a:r>
+            <a:endParaRPr lang="en-US" sz="1400" dirty="0"/>
+          </a:p>
+        </p:txBody>
+      </p:sp>
+      <p:sp>
+        <p:nvSpPr>
+          <p:cNvPr id="77" name="설계"/>
+          <p:cNvSpPr txBox="1"/>
+          <p:nvPr/>
+        </p:nvSpPr>
+        <p:spPr>
+          <a:xfrm>
+            <a:off x="3096320" y="2598539"/>
+            <a:ext cx="265311" cy="152400"/>
+          </a:xfrm>
+          <a:prstGeom prst="rect">
+            <a:avLst/>
+          </a:prstGeom>
+          <a:noFill/>
+          <a:ln/>
+        </p:spPr>
+        <p:txBody>
+          <a:bodyPr wrap="none" lIns="0" tIns="0" rIns="0" bIns="0" rtlCol="0" anchor="ctr"/>
+          <a:lstStyle/>
+          <a:p>
+            <a:pPr algn="l" indent="0" marL="0">
+              <a:buNone/>
+            </a:pPr>
+            <a:r>
+              <a:rPr lang="ko-KR" altLang="en-US" sz="1000" b="1" spc="-20" kern="0" dirty="0">
+                <a:solidFill>
+                  <a:srgbClr val="0B2147"/>
+                </a:solidFill>
+                <a:latin typeface="Pretendard" pitchFamily="34" charset="0"/>
+                <a:ea typeface="Pretendard" pitchFamily="34" charset="-127"/>
+                <a:cs typeface="Pretendard" pitchFamily="34" charset="-120"/>
+              </a:rPr>
+              <a:t>설계</a:t>
+            </a:r>
+            <a:endParaRPr lang="en-US" sz="1000" dirty="0"/>
+          </a:p>
+        </p:txBody>
+      </p:sp>
+      <p:sp>
+        <p:nvSpPr>
+          <p:cNvPr id="78" name="시공"/>
+          <p:cNvSpPr txBox="1"/>
+          <p:nvPr/>
+        </p:nvSpPr>
+        <p:spPr>
+          <a:xfrm>
+            <a:off x="4618335" y="3046214"/>
+            <a:ext cx="265311" cy="152400"/>
+          </a:xfrm>
+          <a:prstGeom prst="rect">
+            <a:avLst/>
+          </a:prstGeom>
+          <a:noFill/>
+          <a:ln/>
+        </p:spPr>
+        <p:txBody>
+          <a:bodyPr wrap="none" lIns="0" tIns="0" rIns="0" bIns="0" rtlCol="0" anchor="ctr"/>
+          <a:lstStyle/>
+          <a:p>
+            <a:pPr algn="l" indent="0" marL="0">
+              <a:buNone/>
+            </a:pPr>
+            <a:r>
+              <a:rPr lang="ko-KR" altLang="en-US" sz="1000" b="1" spc="-20" kern="0" dirty="0">
+                <a:solidFill>
+                  <a:srgbClr val="0B2147"/>
+                </a:solidFill>
+                <a:latin typeface="Pretendard" pitchFamily="34" charset="0"/>
+                <a:ea typeface="Pretendard" pitchFamily="34" charset="-127"/>
+                <a:cs typeface="Pretendard" pitchFamily="34" charset="-120"/>
+              </a:rPr>
+              <a:t>시공</a:t>
+            </a:r>
+            <a:endParaRPr lang="en-US" sz="1000" dirty="0"/>
+          </a:p>
+        </p:txBody>
+      </p:sp>
+      <p:sp>
+        <p:nvSpPr>
+          <p:cNvPr id="79" name="유관부서"/>
+          <p:cNvSpPr txBox="1"/>
+          <p:nvPr/>
+        </p:nvSpPr>
+        <p:spPr>
+          <a:xfrm>
+            <a:off x="3929509" y="3770114"/>
+            <a:ext cx="479723" cy="152400"/>
+          </a:xfrm>
+          <a:prstGeom prst="rect">
+            <a:avLst/>
+          </a:prstGeom>
+          <a:noFill/>
+          <a:ln/>
+        </p:spPr>
+        <p:txBody>
+          <a:bodyPr wrap="none" lIns="0" tIns="0" rIns="0" bIns="0" rtlCol="0" anchor="ctr"/>
+          <a:lstStyle/>
+          <a:p>
+            <a:pPr algn="l" indent="0" marL="0">
+              <a:buNone/>
+            </a:pPr>
+            <a:r>
+              <a:rPr lang="ko-KR" altLang="en-US" sz="1000" b="1" spc="-20" kern="0" dirty="0">
+                <a:solidFill>
+                  <a:srgbClr val="0B2147"/>
+                </a:solidFill>
+                <a:latin typeface="Pretendard" pitchFamily="34" charset="0"/>
+                <a:ea typeface="Pretendard" pitchFamily="34" charset="-127"/>
+                <a:cs typeface="Pretendard" pitchFamily="34" charset="-120"/>
+              </a:rPr>
+              <a:t>유관부서</a:t>
+            </a:r>
+            <a:endParaRPr lang="en-US" sz="1000" dirty="0"/>
+          </a:p>
+        </p:txBody>
+      </p:sp>
+      <p:sp>
+        <p:nvSpPr>
+          <p:cNvPr id="80" name="발주처"/>
+          <p:cNvSpPr txBox="1"/>
+          <p:nvPr/>
+        </p:nvSpPr>
+        <p:spPr>
+          <a:xfrm>
+            <a:off x="2102247" y="3770114"/>
+            <a:ext cx="372467" cy="152400"/>
+          </a:xfrm>
+          <a:prstGeom prst="rect">
+            <a:avLst/>
+          </a:prstGeom>
+          <a:noFill/>
+          <a:ln/>
+        </p:spPr>
+        <p:txBody>
+          <a:bodyPr wrap="none" lIns="0" tIns="0" rIns="0" bIns="0" rtlCol="0" anchor="ctr"/>
+          <a:lstStyle/>
+          <a:p>
+            <a:pPr algn="l" indent="0" marL="0">
+              <a:buNone/>
+            </a:pPr>
+            <a:r>
+              <a:rPr lang="ko-KR" altLang="en-US" sz="1000" b="1" spc="-20" kern="0" dirty="0">
+                <a:solidFill>
+                  <a:srgbClr val="0B2147"/>
+                </a:solidFill>
+                <a:latin typeface="Pretendard" pitchFamily="34" charset="0"/>
+                <a:ea typeface="Pretendard" pitchFamily="34" charset="-127"/>
+                <a:cs typeface="Pretendard" pitchFamily="34" charset="-120"/>
+              </a:rPr>
+              <a:t>발주처</a:t>
+            </a:r>
+            <a:endParaRPr lang="en-US" sz="1000" dirty="0"/>
+          </a:p>
+        </p:txBody>
+      </p:sp>
+      <p:sp>
+        <p:nvSpPr>
+          <p:cNvPr id="81" name="협력업체"/>
+          <p:cNvSpPr txBox="1"/>
+          <p:nvPr/>
+        </p:nvSpPr>
+        <p:spPr>
+          <a:xfrm>
+            <a:off x="1466999" y="3046214"/>
+            <a:ext cx="479723" cy="152400"/>
+          </a:xfrm>
+          <a:prstGeom prst="rect">
+            <a:avLst/>
+          </a:prstGeom>
+          <a:noFill/>
+          <a:ln/>
+        </p:spPr>
+        <p:txBody>
+          <a:bodyPr wrap="none" lIns="0" tIns="0" rIns="0" bIns="0" rtlCol="0" anchor="ctr"/>
+          <a:lstStyle/>
+          <a:p>
+            <a:pPr algn="l" indent="0" marL="0">
+              <a:buNone/>
+            </a:pPr>
+            <a:r>
+              <a:rPr lang="ko-KR" altLang="en-US" sz="1000" b="1" spc="-20" kern="0" dirty="0">
+                <a:solidFill>
+                  <a:srgbClr val="0B2147"/>
+                </a:solidFill>
+                <a:latin typeface="Pretendard" pitchFamily="34" charset="0"/>
+                <a:ea typeface="Pretendard" pitchFamily="34" charset="-127"/>
+                <a:cs typeface="Pretendard" pitchFamily="34" charset="-120"/>
+              </a:rPr>
+              <a:t>협력업체</a:t>
+            </a:r>
+            <a:endParaRPr lang="en-US" sz="1000" dirty="0"/>
+          </a:p>
+        </p:txBody>
+      </p:sp>
+      <p:sp>
+        <p:nvSpPr>
+          <p:cNvPr id="82" name="하나의 목표"/>
+          <p:cNvSpPr txBox="1"/>
+          <p:nvPr/>
+        </p:nvSpPr>
+        <p:spPr>
+          <a:xfrm>
+            <a:off x="2856805" y="3062089"/>
+            <a:ext cx="585589" cy="146050"/>
+          </a:xfrm>
+          <a:prstGeom prst="rect">
+            <a:avLst/>
+          </a:prstGeom>
+          <a:noFill/>
+          <a:ln/>
+        </p:spPr>
+        <p:txBody>
+          <a:bodyPr wrap="none" lIns="0" tIns="0" rIns="0" bIns="0" rtlCol="0" anchor="ctr"/>
+          <a:lstStyle/>
+          <a:p>
+            <a:pPr algn="ctr" indent="0" marL="0">
+              <a:buNone/>
+            </a:pPr>
+            <a:r>
+              <a:rPr lang="ko-KR" altLang="en-US" sz="950" b="1" spc="-19" kern="0" dirty="0">
+                <a:solidFill>
+                  <a:srgbClr val="00A94F"/>
+                </a:solidFill>
+                <a:latin typeface="Pretendard" pitchFamily="34" charset="0"/>
+                <a:ea typeface="Pretendard" pitchFamily="34" charset="-127"/>
+                <a:cs typeface="Pretendard" pitchFamily="34" charset="-120"/>
+              </a:rPr>
+              <a:t>하나의 목표</a:t>
+            </a:r>
+            <a:endParaRPr lang="en-US" sz="950" dirty="0"/>
+          </a:p>
+        </p:txBody>
+      </p:sp>
+      <p:sp>
+        <p:nvSpPr>
+          <p:cNvPr id="83" name="프로젝트"/>
+          <p:cNvSpPr txBox="1"/>
+          <p:nvPr/>
+        </p:nvSpPr>
+        <p:spPr>
+          <a:xfrm>
+            <a:off x="2872879" y="3225899"/>
+            <a:ext cx="553343" cy="184150"/>
+          </a:xfrm>
+          <a:prstGeom prst="rect">
+            <a:avLst/>
+          </a:prstGeom>
+          <a:noFill/>
+          <a:ln/>
+        </p:spPr>
+        <p:txBody>
+          <a:bodyPr wrap="none" lIns="0" tIns="0" rIns="0" bIns="0" rtlCol="0" anchor="ctr"/>
+          <a:lstStyle/>
+          <a:p>
+            <a:pPr algn="ctr" indent="0" marL="0">
+              <a:buNone/>
+            </a:pPr>
+            <a:r>
+              <a:rPr lang="ko-KR" altLang="en-US" sz="1200" spc="-48" kern="0" dirty="0">
+                <a:solidFill>
+                  <a:srgbClr val="0B2147"/>
+                </a:solidFill>
+                <a:latin typeface="Pretendard ExtraBold" pitchFamily="34" charset="0"/>
+                <a:ea typeface="Pretendard ExtraBold" pitchFamily="34" charset="-127"/>
+                <a:cs typeface="Pretendard ExtraBold" pitchFamily="34" charset="-120"/>
+              </a:rPr>
+              <a:t>프로젝트</a:t>
+            </a:r>
+            <a:endParaRPr lang="en-US" sz="1200" dirty="0"/>
+          </a:p>
+        </p:txBody>
+      </p:sp>
+      <p:sp>
+        <p:nvSpPr>
+          <p:cNvPr id="84" name="완수"/>
+          <p:cNvSpPr txBox="1"/>
+          <p:nvPr/>
+        </p:nvSpPr>
+        <p:spPr>
+          <a:xfrm>
+            <a:off x="2998490" y="3401120"/>
+            <a:ext cx="302121" cy="184150"/>
+          </a:xfrm>
+          <a:prstGeom prst="rect">
+            <a:avLst/>
+          </a:prstGeom>
+          <a:noFill/>
+          <a:ln/>
+        </p:spPr>
+        <p:txBody>
+          <a:bodyPr wrap="none" lIns="0" tIns="0" rIns="0" bIns="0" rtlCol="0" anchor="ctr"/>
+          <a:lstStyle/>
+          <a:p>
+            <a:pPr algn="ctr" indent="0" marL="0">
+              <a:buNone/>
+            </a:pPr>
+            <a:r>
+              <a:rPr lang="ko-KR" altLang="en-US" sz="1200" spc="-48" kern="0" dirty="0">
+                <a:solidFill>
+                  <a:srgbClr val="0B2147"/>
+                </a:solidFill>
+                <a:latin typeface="Pretendard ExtraBold" pitchFamily="34" charset="0"/>
+                <a:ea typeface="Pretendard ExtraBold" pitchFamily="34" charset="-127"/>
+                <a:cs typeface="Pretendard ExtraBold" pitchFamily="34" charset="-120"/>
+              </a:rPr>
+              <a:t>완수</a:t>
+            </a:r>
+            <a:endParaRPr lang="en-US" sz="1200" dirty="0"/>
+          </a:p>
+        </p:txBody>
+      </p:sp>
+      <p:sp>
+        <p:nvSpPr>
+          <p:cNvPr id="85" name="사람의 연결"/>
+          <p:cNvSpPr txBox="1"/>
+          <p:nvPr/>
+        </p:nvSpPr>
+        <p:spPr>
+          <a:xfrm>
+            <a:off x="793750" y="4552752"/>
+            <a:ext cx="766564" cy="196850"/>
+          </a:xfrm>
+          <a:prstGeom prst="rect">
+            <a:avLst/>
+          </a:prstGeom>
+          <a:noFill/>
+          <a:ln/>
+        </p:spPr>
+        <p:txBody>
+          <a:bodyPr wrap="none" lIns="0" tIns="0" rIns="0" bIns="0" rtlCol="0" anchor="ctr"/>
+          <a:lstStyle/>
+          <a:p>
+            <a:pPr algn="l" indent="0" marL="0">
+              <a:buNone/>
+            </a:pPr>
+            <a:r>
+              <a:rPr lang="ko-KR" altLang="en-US" sz="1300" spc="-46" kern="0" dirty="0">
+                <a:solidFill>
+                  <a:srgbClr val="0B2147"/>
+                </a:solidFill>
+                <a:latin typeface="Pretendard ExtraBold" pitchFamily="34" charset="0"/>
+                <a:ea typeface="Pretendard ExtraBold" pitchFamily="34" charset="-127"/>
+                <a:cs typeface="Pretendard ExtraBold" pitchFamily="34" charset="-120"/>
+              </a:rPr>
+              <a:t>사람의 연결</a:t>
+            </a:r>
+            <a:endParaRPr lang="en-US" sz="1300" dirty="0"/>
+          </a:p>
+        </p:txBody>
+      </p:sp>
+      <p:sp>
+        <p:nvSpPr>
+          <p:cNvPr id="86" name="참신성"/>
+          <p:cNvSpPr txBox="1"/>
+          <p:nvPr/>
+        </p:nvSpPr>
+        <p:spPr>
+          <a:xfrm>
+            <a:off x="1016000" y="4863902"/>
+            <a:ext cx="372467" cy="152400"/>
+          </a:xfrm>
+          <a:prstGeom prst="rect">
+            <a:avLst/>
+          </a:prstGeom>
+          <a:noFill/>
+          <a:ln/>
+        </p:spPr>
+        <p:txBody>
+          <a:bodyPr wrap="none" lIns="0" tIns="0" rIns="0" bIns="0" rtlCol="0" anchor="ctr"/>
+          <a:lstStyle/>
+          <a:p>
+            <a:pPr algn="l" indent="0" marL="0">
+              <a:buNone/>
+            </a:pPr>
+            <a:r>
+              <a:rPr lang="ko-KR" altLang="en-US" sz="1000" b="1" spc="-20" kern="0" dirty="0">
+                <a:solidFill>
+                  <a:srgbClr val="0B2147"/>
+                </a:solidFill>
+                <a:latin typeface="Pretendard" pitchFamily="34" charset="0"/>
+                <a:ea typeface="Pretendard" pitchFamily="34" charset="-127"/>
+                <a:cs typeface="Pretendard" pitchFamily="34" charset="-120"/>
+              </a:rPr>
+              <a:t>참신성</a:t>
+            </a:r>
+            <a:endParaRPr lang="en-US" sz="1000" dirty="0"/>
+          </a:p>
+        </p:txBody>
+      </p:sp>
+      <p:sp>
+        <p:nvSpPr>
+          <p:cNvPr id="87" name="VS"/>
+          <p:cNvSpPr txBox="1"/>
+          <p:nvPr/>
+        </p:nvSpPr>
+        <p:spPr>
+          <a:xfrm>
+            <a:off x="1534517" y="4868466"/>
+            <a:ext cx="227012" cy="146050"/>
+          </a:xfrm>
+          <a:prstGeom prst="rect">
+            <a:avLst/>
+          </a:prstGeom>
+          <a:noFill/>
+          <a:ln/>
+        </p:spPr>
+        <p:txBody>
+          <a:bodyPr wrap="none" lIns="0" tIns="0" rIns="0" bIns="0" rtlCol="0" anchor="ctr"/>
+          <a:lstStyle/>
+          <a:p>
+            <a:pPr algn="l" indent="0" marL="0">
+              <a:buNone/>
+            </a:pPr>
+            <a:r>
+              <a:rPr lang="ko-KR" altLang="en-US" sz="950" spc="38" kern="0" dirty="0">
+                <a:solidFill>
+                  <a:srgbClr val="6A7487"/>
+                </a:solidFill>
+                <a:latin typeface="Pretendard ExtraBold" pitchFamily="34" charset="0"/>
+                <a:ea typeface="Pretendard ExtraBold" pitchFamily="34" charset="-127"/>
+                <a:cs typeface="Pretendard ExtraBold" pitchFamily="34" charset="-120"/>
+              </a:rPr>
+              <a:t>VS</a:t>
+            </a:r>
+            <a:endParaRPr lang="en-US" sz="950" dirty="0"/>
+          </a:p>
+        </p:txBody>
+      </p:sp>
+      <p:sp>
+        <p:nvSpPr>
+          <p:cNvPr id="88" name="구현 가능성"/>
+          <p:cNvSpPr txBox="1"/>
+          <p:nvPr/>
+        </p:nvSpPr>
+        <p:spPr>
+          <a:xfrm>
+            <a:off x="2021880" y="4863902"/>
+            <a:ext cx="613668" cy="152400"/>
+          </a:xfrm>
+          <a:prstGeom prst="rect">
+            <a:avLst/>
+          </a:prstGeom>
+          <a:noFill/>
+          <a:ln/>
+        </p:spPr>
+        <p:txBody>
+          <a:bodyPr wrap="none" lIns="0" tIns="0" rIns="0" bIns="0" rtlCol="0" anchor="ctr"/>
+          <a:lstStyle/>
+          <a:p>
+            <a:pPr algn="l" indent="0" marL="0">
+              <a:buNone/>
+            </a:pPr>
+            <a:r>
+              <a:rPr lang="ko-KR" altLang="en-US" sz="1000" b="1" spc="-20" kern="0" dirty="0">
+                <a:solidFill>
+                  <a:srgbClr val="0B2147"/>
+                </a:solidFill>
+                <a:latin typeface="Pretendard" pitchFamily="34" charset="0"/>
+                <a:ea typeface="Pretendard" pitchFamily="34" charset="-127"/>
+                <a:cs typeface="Pretendard" pitchFamily="34" charset="-120"/>
+              </a:rPr>
+              <a:t>구현 가능성</a:t>
+            </a:r>
+            <a:endParaRPr lang="en-US" sz="1000" dirty="0"/>
+          </a:p>
+        </p:txBody>
+      </p:sp>
+      <p:sp>
+        <p:nvSpPr>
+          <p:cNvPr id="89" name="서로 다른 의견"/>
+          <p:cNvSpPr txBox="1"/>
+          <p:nvPr/>
+        </p:nvSpPr>
+        <p:spPr>
+          <a:xfrm>
+            <a:off x="793750" y="5140127"/>
+            <a:ext cx="749399" cy="152400"/>
+          </a:xfrm>
+          <a:prstGeom prst="rect">
+            <a:avLst/>
+          </a:prstGeom>
+          <a:noFill/>
+          <a:ln/>
+        </p:spPr>
+        <p:txBody>
+          <a:bodyPr wrap="none" lIns="0" tIns="0" rIns="0" bIns="0" rtlCol="0" anchor="ctr"/>
+          <a:lstStyle/>
+          <a:p>
+            <a:pPr algn="l" indent="0" marL="0">
+              <a:buNone/>
+            </a:pPr>
+            <a:r>
+              <a:rPr lang="ko-KR" altLang="en-US" sz="1000" spc="-20" kern="0" dirty="0">
                 <a:solidFill>
                   <a:srgbClr val="3D4757"/>
                 </a:solidFill>
@@ -6478,21 +7202,854 @@
                 <a:ea typeface="Pretendard SemiBold" pitchFamily="34" charset="-127"/>
                 <a:cs typeface="Pretendard SemiBold" pitchFamily="34" charset="-120"/>
               </a:rPr>
-              <a:t>저는 ‘</a:t>
-            </a:r>
-            <a:pPr algn="l" indent="0" marL="0">
-              <a:buNone/>
-            </a:pPr>
-            <a:r>
-              <a:rPr lang="ko-KR" altLang="en-US" sz="1100" spc="-22" kern="0" dirty="0">
-                <a:solidFill>
-                  <a:srgbClr val="004B8D"/>
+              <a:t>서로 다른 의견</a:t>
+            </a:r>
+            <a:endParaRPr lang="en-US" sz="1000" dirty="0"/>
+          </a:p>
+        </p:txBody>
+      </p:sp>
+      <p:sp>
+        <p:nvSpPr>
+          <p:cNvPr id="90" name="공동의 기준으로 조율해"/>
+          <p:cNvSpPr txBox="1"/>
+          <p:nvPr/>
+        </p:nvSpPr>
+        <p:spPr>
+          <a:xfrm>
+            <a:off x="3321348" y="4740473"/>
+            <a:ext cx="1353667" cy="177800"/>
+          </a:xfrm>
+          <a:prstGeom prst="rect">
+            <a:avLst/>
+          </a:prstGeom>
+          <a:noFill/>
+          <a:ln/>
+        </p:spPr>
+        <p:txBody>
+          <a:bodyPr wrap="none" lIns="0" tIns="0" rIns="0" bIns="0" rtlCol="0" anchor="ctr"/>
+          <a:lstStyle/>
+          <a:p>
+            <a:pPr algn="l" indent="0" marL="0">
+              <a:buNone/>
+            </a:pPr>
+            <a:r>
+              <a:rPr lang="ko-KR" altLang="en-US" sz="1150" b="1" spc="-34" kern="0" dirty="0">
+                <a:solidFill>
+                  <a:srgbClr val="0B2147"/>
+                </a:solidFill>
+                <a:latin typeface="Pretendard" pitchFamily="34" charset="0"/>
+                <a:ea typeface="Pretendard" pitchFamily="34" charset="-127"/>
+                <a:cs typeface="Pretendard" pitchFamily="34" charset="-120"/>
+              </a:rPr>
+              <a:t>공동의 기준으로 조율해</a:t>
+            </a:r>
+            <a:endParaRPr lang="en-US" sz="1150" dirty="0"/>
+          </a:p>
+        </p:txBody>
+      </p:sp>
+      <p:sp>
+        <p:nvSpPr>
+          <p:cNvPr id="91" name="하나의 목표로"/>
+          <p:cNvSpPr txBox="1"/>
+          <p:nvPr/>
+        </p:nvSpPr>
+        <p:spPr>
+          <a:xfrm>
+            <a:off x="3321348" y="4944864"/>
+            <a:ext cx="810320" cy="177800"/>
+          </a:xfrm>
+          <a:prstGeom prst="rect">
+            <a:avLst/>
+          </a:prstGeom>
+          <a:noFill/>
+          <a:ln/>
+        </p:spPr>
+        <p:txBody>
+          <a:bodyPr wrap="none" lIns="0" tIns="0" rIns="0" bIns="0" rtlCol="0" anchor="ctr"/>
+          <a:lstStyle/>
+          <a:p>
+            <a:pPr algn="l" indent="0" marL="0">
+              <a:buNone/>
+            </a:pPr>
+            <a:r>
+              <a:rPr lang="ko-KR" altLang="en-US" sz="1150" spc="-34" kern="0" dirty="0">
+                <a:solidFill>
+                  <a:srgbClr val="00A94F"/>
                 </a:solidFill>
                 <a:latin typeface="Pretendard ExtraBold" pitchFamily="34" charset="0"/>
                 <a:ea typeface="Pretendard ExtraBold" pitchFamily="34" charset="-127"/>
                 <a:cs typeface="Pretendard ExtraBold" pitchFamily="34" charset="-120"/>
               </a:rPr>
-              <a:t>우리의 기술</a:t>
+              <a:t>하나의 목표</a:t>
+            </a:r>
+            <a:pPr algn="l" indent="0" marL="0">
+              <a:buNone/>
+            </a:pPr>
+            <a:r>
+              <a:rPr lang="ko-KR" altLang="en-US" sz="1150" b="1" spc="-34" kern="0" dirty="0">
+                <a:solidFill>
+                  <a:srgbClr val="0B2147"/>
+                </a:solidFill>
+                <a:latin typeface="Pretendard" pitchFamily="34" charset="0"/>
+                <a:ea typeface="Pretendard" pitchFamily="34" charset="-127"/>
+                <a:cs typeface="Pretendard" pitchFamily="34" charset="-120"/>
+              </a:rPr>
+              <a:t>로</a:t>
+            </a:r>
+            <a:endParaRPr lang="en-US" sz="1150" dirty="0"/>
+          </a:p>
+        </p:txBody>
+      </p:sp>
+      <p:sp>
+        <p:nvSpPr>
+          <p:cNvPr id="92" name="기술"/>
+          <p:cNvSpPr txBox="1"/>
+          <p:nvPr/>
+        </p:nvSpPr>
+        <p:spPr>
+          <a:xfrm>
+            <a:off x="7919641" y="2144514"/>
+            <a:ext cx="472083" cy="304800"/>
+          </a:xfrm>
+          <a:prstGeom prst="rect">
+            <a:avLst/>
+          </a:prstGeom>
+          <a:noFill/>
+          <a:ln/>
+        </p:spPr>
+        <p:txBody>
+          <a:bodyPr wrap="none" lIns="0" tIns="0" rIns="0" bIns="0" rtlCol="0" anchor="ctr"/>
+          <a:lstStyle/>
+          <a:p>
+            <a:pPr algn="l" indent="0" marL="0">
+              <a:buNone/>
+            </a:pPr>
+            <a:r>
+              <a:rPr lang="ko-KR" altLang="en-US" sz="2000" spc="-70" kern="0" dirty="0">
+                <a:solidFill>
+                  <a:srgbClr val="004B8D"/>
+                </a:solidFill>
+                <a:latin typeface="Pretendard ExtraBold" pitchFamily="34" charset="0"/>
+                <a:ea typeface="Pretendard ExtraBold" pitchFamily="34" charset="-127"/>
+                <a:cs typeface="Pretendard ExtraBold" pitchFamily="34" charset="-120"/>
+              </a:rPr>
+              <a:t>기술</a:t>
+            </a:r>
+            <a:endParaRPr lang="en-US" sz="2000" dirty="0"/>
+          </a:p>
+        </p:txBody>
+      </p:sp>
+      <p:sp>
+        <p:nvSpPr>
+          <p:cNvPr id="93" name="TECHNOLOGY"/>
+          <p:cNvSpPr txBox="1"/>
+          <p:nvPr/>
+        </p:nvSpPr>
+        <p:spPr>
+          <a:xfrm>
+            <a:off x="8607623" y="2107009"/>
+            <a:ext cx="1049615" cy="146050"/>
+          </a:xfrm>
+          <a:prstGeom prst="rect">
+            <a:avLst/>
+          </a:prstGeom>
+          <a:noFill/>
+          <a:ln/>
+        </p:spPr>
+        <p:txBody>
+          <a:bodyPr wrap="none" lIns="0" tIns="0" rIns="0" bIns="0" rtlCol="0" anchor="ctr"/>
+          <a:lstStyle/>
+          <a:p>
+            <a:pPr algn="l" indent="0" marL="0">
+              <a:buNone/>
+            </a:pPr>
+            <a:r>
+              <a:rPr lang="ko-KR" altLang="en-US" sz="950" b="1" spc="133" kern="0" dirty="0">
+                <a:solidFill>
+                  <a:srgbClr val="004B8D"/>
+                </a:solidFill>
+                <a:latin typeface="Pretendard" pitchFamily="34" charset="0"/>
+                <a:ea typeface="Pretendard" pitchFamily="34" charset="-127"/>
+                <a:cs typeface="Pretendard" pitchFamily="34" charset="-120"/>
+              </a:rPr>
+              <a:t>TECHNOLOGY</a:t>
+            </a:r>
+            <a:endParaRPr lang="en-US" sz="950" dirty="0"/>
+          </a:p>
+        </p:txBody>
+      </p:sp>
+      <p:sp>
+        <p:nvSpPr>
+          <p:cNvPr id="94" name="미래 가치를 만드는 원동력"/>
+          <p:cNvSpPr txBox="1"/>
+          <p:nvPr/>
+        </p:nvSpPr>
+        <p:spPr>
+          <a:xfrm>
+            <a:off x="8607623" y="2258120"/>
+            <a:ext cx="1825889" cy="215900"/>
+          </a:xfrm>
+          <a:prstGeom prst="rect">
+            <a:avLst/>
+          </a:prstGeom>
+          <a:noFill/>
+          <a:ln/>
+        </p:spPr>
+        <p:txBody>
+          <a:bodyPr wrap="none" lIns="0" tIns="0" rIns="0" bIns="0" rtlCol="0" anchor="ctr"/>
+          <a:lstStyle/>
+          <a:p>
+            <a:pPr algn="l" indent="0" marL="0">
+              <a:buNone/>
+            </a:pPr>
+            <a:r>
+              <a:rPr lang="ko-KR" altLang="en-US" sz="1400" spc="-49" kern="0" dirty="0">
+                <a:solidFill>
+                  <a:srgbClr val="0B2147"/>
+                </a:solidFill>
+                <a:latin typeface="Pretendard ExtraBold" pitchFamily="34" charset="0"/>
+                <a:ea typeface="Pretendard ExtraBold" pitchFamily="34" charset="-127"/>
+                <a:cs typeface="Pretendard ExtraBold" pitchFamily="34" charset="-120"/>
+              </a:rPr>
+              <a:t>미래 가치를 만드는 원동력</a:t>
+            </a:r>
+            <a:endParaRPr lang="en-US" sz="1400" dirty="0"/>
+          </a:p>
+        </p:txBody>
+      </p:sp>
+      <p:sp>
+        <p:nvSpPr>
+          <p:cNvPr id="95" name="에너지 원천기술"/>
+          <p:cNvSpPr txBox="1"/>
+          <p:nvPr/>
+        </p:nvSpPr>
+        <p:spPr>
+          <a:xfrm>
+            <a:off x="7399635" y="2801739"/>
+            <a:ext cx="828080" cy="152400"/>
+          </a:xfrm>
+          <a:prstGeom prst="rect">
+            <a:avLst/>
+          </a:prstGeom>
+          <a:noFill/>
+          <a:ln/>
+        </p:spPr>
+        <p:txBody>
+          <a:bodyPr wrap="none" lIns="0" tIns="0" rIns="0" bIns="0" rtlCol="0" anchor="ctr"/>
+          <a:lstStyle/>
+          <a:p>
+            <a:pPr algn="l" indent="0" marL="0">
+              <a:buNone/>
+            </a:pPr>
+            <a:r>
+              <a:rPr lang="ko-KR" altLang="en-US" sz="1000" b="1" spc="-20" kern="0" dirty="0">
+                <a:solidFill>
+                  <a:srgbClr val="004B8D"/>
+                </a:solidFill>
+                <a:latin typeface="Pretendard" pitchFamily="34" charset="0"/>
+                <a:ea typeface="Pretendard" pitchFamily="34" charset="-127"/>
+                <a:cs typeface="Pretendard" pitchFamily="34" charset="-120"/>
+              </a:rPr>
+              <a:t>에너지 원천기술</a:t>
+            </a:r>
+            <a:endParaRPr lang="en-US" sz="1000" dirty="0"/>
+          </a:p>
+        </p:txBody>
+      </p:sp>
+      <p:sp>
+        <p:nvSpPr>
+          <p:cNvPr id="96" name="글로벌 EPC 역량"/>
+          <p:cNvSpPr txBox="1"/>
+          <p:nvPr/>
+        </p:nvSpPr>
+        <p:spPr>
+          <a:xfrm>
+            <a:off x="9990534" y="2801739"/>
+            <a:ext cx="878582" cy="152400"/>
+          </a:xfrm>
+          <a:prstGeom prst="rect">
+            <a:avLst/>
+          </a:prstGeom>
+          <a:noFill/>
+          <a:ln/>
+        </p:spPr>
+        <p:txBody>
+          <a:bodyPr wrap="none" lIns="0" tIns="0" rIns="0" bIns="0" rtlCol="0" anchor="ctr"/>
+          <a:lstStyle/>
+          <a:p>
+            <a:pPr algn="l" indent="0" marL="0">
+              <a:buNone/>
+            </a:pPr>
+            <a:r>
+              <a:rPr lang="ko-KR" altLang="en-US" sz="1000" b="1" spc="-20" kern="0" dirty="0">
+                <a:solidFill>
+                  <a:srgbClr val="004B8D"/>
+                </a:solidFill>
+                <a:latin typeface="Pretendard" pitchFamily="34" charset="0"/>
+                <a:ea typeface="Pretendard" pitchFamily="34" charset="-127"/>
+                <a:cs typeface="Pretendard" pitchFamily="34" charset="-120"/>
+              </a:rPr>
+              <a:t>글로벌 EPC 역량</a:t>
+            </a:r>
+            <a:endParaRPr lang="en-US" sz="1000" dirty="0"/>
+          </a:p>
+        </p:txBody>
+      </p:sp>
+      <p:sp>
+        <p:nvSpPr>
+          <p:cNvPr id="97" name="첨단 산업건축 기술"/>
+          <p:cNvSpPr txBox="1"/>
+          <p:nvPr/>
+        </p:nvSpPr>
+        <p:spPr>
+          <a:xfrm>
+            <a:off x="7332563" y="3639939"/>
+            <a:ext cx="966004" cy="152400"/>
+          </a:xfrm>
+          <a:prstGeom prst="rect">
+            <a:avLst/>
+          </a:prstGeom>
+          <a:noFill/>
+          <a:ln/>
+        </p:spPr>
+        <p:txBody>
+          <a:bodyPr wrap="none" lIns="0" tIns="0" rIns="0" bIns="0" rtlCol="0" anchor="ctr"/>
+          <a:lstStyle/>
+          <a:p>
+            <a:pPr algn="l" indent="0" marL="0">
+              <a:buNone/>
+            </a:pPr>
+            <a:r>
+              <a:rPr lang="ko-KR" altLang="en-US" sz="1000" b="1" spc="-20" kern="0" dirty="0">
+                <a:solidFill>
+                  <a:srgbClr val="004B8D"/>
+                </a:solidFill>
+                <a:latin typeface="Pretendard" pitchFamily="34" charset="0"/>
+                <a:ea typeface="Pretendard" pitchFamily="34" charset="-127"/>
+                <a:cs typeface="Pretendard" pitchFamily="34" charset="-120"/>
+              </a:rPr>
+              <a:t>첨단 산업건축 기술</a:t>
+            </a:r>
+            <a:endParaRPr lang="en-US" sz="1000" dirty="0"/>
+          </a:p>
+        </p:txBody>
+      </p:sp>
+      <p:sp>
+        <p:nvSpPr>
+          <p:cNvPr id="98" name="스마트건설 기술"/>
+          <p:cNvSpPr txBox="1"/>
+          <p:nvPr/>
+        </p:nvSpPr>
+        <p:spPr>
+          <a:xfrm>
+            <a:off x="10015835" y="3639939"/>
+            <a:ext cx="828080" cy="152400"/>
+          </a:xfrm>
+          <a:prstGeom prst="rect">
+            <a:avLst/>
+          </a:prstGeom>
+          <a:noFill/>
+          <a:ln/>
+        </p:spPr>
+        <p:txBody>
+          <a:bodyPr wrap="none" lIns="0" tIns="0" rIns="0" bIns="0" rtlCol="0" anchor="ctr"/>
+          <a:lstStyle/>
+          <a:p>
+            <a:pPr algn="l" indent="0" marL="0">
+              <a:buNone/>
+            </a:pPr>
+            <a:r>
+              <a:rPr lang="ko-KR" altLang="en-US" sz="1000" b="1" spc="-20" kern="0" dirty="0">
+                <a:solidFill>
+                  <a:srgbClr val="004B8D"/>
+                </a:solidFill>
+                <a:latin typeface="Pretendard" pitchFamily="34" charset="0"/>
+                <a:ea typeface="Pretendard" pitchFamily="34" charset="-127"/>
+                <a:cs typeface="Pretendard" pitchFamily="34" charset="-120"/>
+              </a:rPr>
+              <a:t>스마트건설 기술</a:t>
+            </a:r>
+            <a:endParaRPr lang="en-US" sz="1000" dirty="0"/>
+          </a:p>
+        </p:txBody>
+      </p:sp>
+      <p:sp>
+        <p:nvSpPr>
+          <p:cNvPr id="99" name="기술의 연결"/>
+          <p:cNvSpPr txBox="1"/>
+          <p:nvPr/>
+        </p:nvSpPr>
+        <p:spPr>
+          <a:xfrm>
+            <a:off x="8749605" y="3036689"/>
+            <a:ext cx="585589" cy="146050"/>
+          </a:xfrm>
+          <a:prstGeom prst="rect">
+            <a:avLst/>
+          </a:prstGeom>
+          <a:noFill/>
+          <a:ln/>
+        </p:spPr>
+        <p:txBody>
+          <a:bodyPr wrap="none" lIns="0" tIns="0" rIns="0" bIns="0" rtlCol="0" anchor="ctr"/>
+          <a:lstStyle/>
+          <a:p>
+            <a:pPr algn="ctr" indent="0" marL="0">
+              <a:buNone/>
+            </a:pPr>
+            <a:r>
+              <a:rPr lang="ko-KR" altLang="en-US" sz="950" b="1" spc="-19" kern="0" dirty="0">
+                <a:solidFill>
+                  <a:srgbClr val="004B8D"/>
+                </a:solidFill>
+                <a:latin typeface="Pretendard" pitchFamily="34" charset="0"/>
+                <a:ea typeface="Pretendard" pitchFamily="34" charset="-127"/>
+                <a:cs typeface="Pretendard" pitchFamily="34" charset="-120"/>
+              </a:rPr>
+              <a:t>기술의 연결</a:t>
+            </a:r>
+            <a:endParaRPr lang="en-US" sz="950" dirty="0"/>
+          </a:p>
+        </p:txBody>
+      </p:sp>
+      <p:sp>
+        <p:nvSpPr>
+          <p:cNvPr id="100" name="미래 가치"/>
+          <p:cNvSpPr txBox="1"/>
+          <p:nvPr/>
+        </p:nvSpPr>
+        <p:spPr>
+          <a:xfrm>
+            <a:off x="8751689" y="3200499"/>
+            <a:ext cx="581323" cy="184150"/>
+          </a:xfrm>
+          <a:prstGeom prst="rect">
+            <a:avLst/>
+          </a:prstGeom>
+          <a:noFill/>
+          <a:ln/>
+        </p:spPr>
+        <p:txBody>
+          <a:bodyPr wrap="none" lIns="0" tIns="0" rIns="0" bIns="0" rtlCol="0" anchor="ctr"/>
+          <a:lstStyle/>
+          <a:p>
+            <a:pPr algn="ctr" indent="0" marL="0">
+              <a:buNone/>
+            </a:pPr>
+            <a:r>
+              <a:rPr lang="ko-KR" altLang="en-US" sz="1200" spc="-48" kern="0" dirty="0">
+                <a:solidFill>
+                  <a:srgbClr val="0B2147"/>
+                </a:solidFill>
+                <a:latin typeface="Pretendard ExtraBold" pitchFamily="34" charset="0"/>
+                <a:ea typeface="Pretendard ExtraBold" pitchFamily="34" charset="-127"/>
+                <a:cs typeface="Pretendard ExtraBold" pitchFamily="34" charset="-120"/>
+              </a:rPr>
+              <a:t>미래 가치</a:t>
+            </a:r>
+            <a:endParaRPr lang="en-US" sz="1200" dirty="0"/>
+          </a:p>
+        </p:txBody>
+      </p:sp>
+      <p:sp>
+        <p:nvSpPr>
+          <p:cNvPr id="101" name="창출"/>
+          <p:cNvSpPr txBox="1"/>
+          <p:nvPr/>
+        </p:nvSpPr>
+        <p:spPr>
+          <a:xfrm>
+            <a:off x="8891290" y="3375720"/>
+            <a:ext cx="302121" cy="184150"/>
+          </a:xfrm>
+          <a:prstGeom prst="rect">
+            <a:avLst/>
+          </a:prstGeom>
+          <a:noFill/>
+          <a:ln/>
+        </p:spPr>
+        <p:txBody>
+          <a:bodyPr wrap="none" lIns="0" tIns="0" rIns="0" bIns="0" rtlCol="0" anchor="ctr"/>
+          <a:lstStyle/>
+          <a:p>
+            <a:pPr algn="ctr" indent="0" marL="0">
+              <a:buNone/>
+            </a:pPr>
+            <a:r>
+              <a:rPr lang="ko-KR" altLang="en-US" sz="1200" spc="-48" kern="0" dirty="0">
+                <a:solidFill>
+                  <a:srgbClr val="0B2147"/>
+                </a:solidFill>
+                <a:latin typeface="Pretendard ExtraBold" pitchFamily="34" charset="0"/>
+                <a:ea typeface="Pretendard ExtraBold" pitchFamily="34" charset="-127"/>
+                <a:cs typeface="Pretendard ExtraBold" pitchFamily="34" charset="-120"/>
+              </a:rPr>
+              <a:t>창출</a:t>
+            </a:r>
+            <a:endParaRPr lang="en-US" sz="1200" dirty="0"/>
+          </a:p>
+        </p:txBody>
+      </p:sp>
+      <p:sp>
+        <p:nvSpPr>
+          <p:cNvPr id="102" name="강점의 연결"/>
+          <p:cNvSpPr txBox="1"/>
+          <p:nvPr/>
+        </p:nvSpPr>
+        <p:spPr>
+          <a:xfrm>
+            <a:off x="6686550" y="4530527"/>
+            <a:ext cx="766564" cy="196850"/>
+          </a:xfrm>
+          <a:prstGeom prst="rect">
+            <a:avLst/>
+          </a:prstGeom>
+          <a:noFill/>
+          <a:ln/>
+        </p:spPr>
+        <p:txBody>
+          <a:bodyPr wrap="none" lIns="0" tIns="0" rIns="0" bIns="0" rtlCol="0" anchor="ctr"/>
+          <a:lstStyle/>
+          <a:p>
+            <a:pPr algn="l" indent="0" marL="0">
+              <a:buNone/>
+            </a:pPr>
+            <a:r>
+              <a:rPr lang="ko-KR" altLang="en-US" sz="1300" spc="-46" kern="0" dirty="0">
+                <a:solidFill>
+                  <a:srgbClr val="0B2147"/>
+                </a:solidFill>
+                <a:latin typeface="Pretendard ExtraBold" pitchFamily="34" charset="0"/>
+                <a:ea typeface="Pretendard ExtraBold" pitchFamily="34" charset="-127"/>
+                <a:cs typeface="Pretendard ExtraBold" pitchFamily="34" charset="-120"/>
+              </a:rPr>
+              <a:t>강점의 연결</a:t>
+            </a:r>
+            <a:endParaRPr lang="en-US" sz="1300" dirty="0"/>
+          </a:p>
+        </p:txBody>
+      </p:sp>
+      <p:sp>
+        <p:nvSpPr>
+          <p:cNvPr id="103" name="Dynamo 자동화"/>
+          <p:cNvSpPr txBox="1"/>
+          <p:nvPr/>
+        </p:nvSpPr>
+        <p:spPr>
+          <a:xfrm>
+            <a:off x="6908800" y="4841677"/>
+            <a:ext cx="877788" cy="152400"/>
+          </a:xfrm>
+          <a:prstGeom prst="rect">
+            <a:avLst/>
+          </a:prstGeom>
+          <a:noFill/>
+          <a:ln/>
+        </p:spPr>
+        <p:txBody>
+          <a:bodyPr wrap="none" lIns="0" tIns="0" rIns="0" bIns="0" rtlCol="0" anchor="ctr"/>
+          <a:lstStyle/>
+          <a:p>
+            <a:pPr algn="l" indent="0" marL="0">
+              <a:buNone/>
+            </a:pPr>
+            <a:r>
+              <a:rPr lang="ko-KR" altLang="en-US" sz="1000" b="1" spc="-20" kern="0" dirty="0">
+                <a:solidFill>
+                  <a:srgbClr val="0B2147"/>
+                </a:solidFill>
+                <a:latin typeface="Pretendard" pitchFamily="34" charset="0"/>
+                <a:ea typeface="Pretendard" pitchFamily="34" charset="-127"/>
+                <a:cs typeface="Pretendard" pitchFamily="34" charset="-120"/>
+              </a:rPr>
+              <a:t>Dynamo 자동화</a:t>
+            </a:r>
+            <a:endParaRPr lang="en-US" sz="1000" dirty="0"/>
+          </a:p>
+        </p:txBody>
+      </p:sp>
+      <p:sp>
+        <p:nvSpPr>
+          <p:cNvPr id="104" name="모듈러 설계"/>
+          <p:cNvSpPr txBox="1"/>
+          <p:nvPr/>
+        </p:nvSpPr>
+        <p:spPr>
+          <a:xfrm>
+            <a:off x="8116788" y="4841677"/>
+            <a:ext cx="613668" cy="152400"/>
+          </a:xfrm>
+          <a:prstGeom prst="rect">
+            <a:avLst/>
+          </a:prstGeom>
+          <a:noFill/>
+          <a:ln/>
+        </p:spPr>
+        <p:txBody>
+          <a:bodyPr wrap="none" lIns="0" tIns="0" rIns="0" bIns="0" rtlCol="0" anchor="ctr"/>
+          <a:lstStyle/>
+          <a:p>
+            <a:pPr algn="l" indent="0" marL="0">
+              <a:buNone/>
+            </a:pPr>
+            <a:r>
+              <a:rPr lang="ko-KR" altLang="en-US" sz="1000" b="1" spc="-20" kern="0" dirty="0">
+                <a:solidFill>
+                  <a:srgbClr val="0B2147"/>
+                </a:solidFill>
+                <a:latin typeface="Pretendard" pitchFamily="34" charset="0"/>
+                <a:ea typeface="Pretendard" pitchFamily="34" charset="-127"/>
+                <a:cs typeface="Pretendard" pitchFamily="34" charset="-120"/>
+              </a:rPr>
+              <a:t>모듈러 설계</a:t>
+            </a:r>
+            <a:endParaRPr lang="en-US" sz="1000" dirty="0"/>
+          </a:p>
+        </p:txBody>
+      </p:sp>
+      <p:sp>
+        <p:nvSpPr>
+          <p:cNvPr id="105" name="BIM 모델링"/>
+          <p:cNvSpPr txBox="1"/>
+          <p:nvPr/>
+        </p:nvSpPr>
+        <p:spPr>
+          <a:xfrm>
+            <a:off x="6908800" y="5133777"/>
+            <a:ext cx="618331" cy="152400"/>
+          </a:xfrm>
+          <a:prstGeom prst="rect">
+            <a:avLst/>
+          </a:prstGeom>
+          <a:noFill/>
+          <a:ln/>
+        </p:spPr>
+        <p:txBody>
+          <a:bodyPr wrap="none" lIns="0" tIns="0" rIns="0" bIns="0" rtlCol="0" anchor="ctr"/>
+          <a:lstStyle/>
+          <a:p>
+            <a:pPr algn="l" indent="0" marL="0">
+              <a:buNone/>
+            </a:pPr>
+            <a:r>
+              <a:rPr lang="ko-KR" altLang="en-US" sz="1000" b="1" spc="-20" kern="0" dirty="0">
+                <a:solidFill>
+                  <a:srgbClr val="0B2147"/>
+                </a:solidFill>
+                <a:latin typeface="Pretendard" pitchFamily="34" charset="0"/>
+                <a:ea typeface="Pretendard" pitchFamily="34" charset="-127"/>
+                <a:cs typeface="Pretendard" pitchFamily="34" charset="-120"/>
+              </a:rPr>
+              <a:t>BIM 모델링</a:t>
+            </a:r>
+            <a:endParaRPr lang="en-US" sz="1000" dirty="0"/>
+          </a:p>
+        </p:txBody>
+      </p:sp>
+      <p:sp>
+        <p:nvSpPr>
+          <p:cNvPr id="106" name="시나리오 구성"/>
+          <p:cNvSpPr txBox="1"/>
+          <p:nvPr/>
+        </p:nvSpPr>
+        <p:spPr>
+          <a:xfrm>
+            <a:off x="8116788" y="5133777"/>
+            <a:ext cx="720923" cy="152400"/>
+          </a:xfrm>
+          <a:prstGeom prst="rect">
+            <a:avLst/>
+          </a:prstGeom>
+          <a:noFill/>
+          <a:ln/>
+        </p:spPr>
+        <p:txBody>
+          <a:bodyPr wrap="none" lIns="0" tIns="0" rIns="0" bIns="0" rtlCol="0" anchor="ctr"/>
+          <a:lstStyle/>
+          <a:p>
+            <a:pPr algn="l" indent="0" marL="0">
+              <a:buNone/>
+            </a:pPr>
+            <a:r>
+              <a:rPr lang="ko-KR" altLang="en-US" sz="1000" b="1" spc="-20" kern="0" dirty="0">
+                <a:solidFill>
+                  <a:srgbClr val="0B2147"/>
+                </a:solidFill>
+                <a:latin typeface="Pretendard" pitchFamily="34" charset="0"/>
+                <a:ea typeface="Pretendard" pitchFamily="34" charset="-127"/>
+                <a:cs typeface="Pretendard" pitchFamily="34" charset="-120"/>
+              </a:rPr>
+              <a:t>시나리오 구성</a:t>
+            </a:r>
+            <a:endParaRPr lang="en-US" sz="1000" dirty="0"/>
+          </a:p>
+        </p:txBody>
+      </p:sp>
+      <p:sp>
+        <p:nvSpPr>
+          <p:cNvPr id="107" name="각자의 강점을 모아"/>
+          <p:cNvSpPr txBox="1"/>
+          <p:nvPr/>
+        </p:nvSpPr>
+        <p:spPr>
+          <a:xfrm>
+            <a:off x="9523512" y="4740473"/>
+            <a:ext cx="1095365" cy="177800"/>
+          </a:xfrm>
+          <a:prstGeom prst="rect">
+            <a:avLst/>
+          </a:prstGeom>
+          <a:noFill/>
+          <a:ln/>
+        </p:spPr>
+        <p:txBody>
+          <a:bodyPr wrap="none" lIns="0" tIns="0" rIns="0" bIns="0" rtlCol="0" anchor="ctr"/>
+          <a:lstStyle/>
+          <a:p>
+            <a:pPr algn="l" indent="0" marL="0">
+              <a:buNone/>
+            </a:pPr>
+            <a:r>
+              <a:rPr lang="ko-KR" altLang="en-US" sz="1150" b="1" spc="-34" kern="0" dirty="0">
+                <a:solidFill>
+                  <a:srgbClr val="0B2147"/>
+                </a:solidFill>
+                <a:latin typeface="Pretendard" pitchFamily="34" charset="0"/>
+                <a:ea typeface="Pretendard" pitchFamily="34" charset="-127"/>
+                <a:cs typeface="Pretendard" pitchFamily="34" charset="-120"/>
+              </a:rPr>
+              <a:t>각자의 강점을 모아</a:t>
+            </a:r>
+            <a:endParaRPr lang="en-US" sz="1150" dirty="0"/>
+          </a:p>
+        </p:txBody>
+      </p:sp>
+      <p:sp>
+        <p:nvSpPr>
+          <p:cNvPr id="108" name="하나의 성과로"/>
+          <p:cNvSpPr txBox="1"/>
+          <p:nvPr/>
+        </p:nvSpPr>
+        <p:spPr>
+          <a:xfrm>
+            <a:off x="9523512" y="4944864"/>
+            <a:ext cx="810320" cy="177800"/>
+          </a:xfrm>
+          <a:prstGeom prst="rect">
+            <a:avLst/>
+          </a:prstGeom>
+          <a:noFill/>
+          <a:ln/>
+        </p:spPr>
+        <p:txBody>
+          <a:bodyPr wrap="none" lIns="0" tIns="0" rIns="0" bIns="0" rtlCol="0" anchor="ctr"/>
+          <a:lstStyle/>
+          <a:p>
+            <a:pPr algn="l" indent="0" marL="0">
+              <a:buNone/>
+            </a:pPr>
+            <a:r>
+              <a:rPr lang="ko-KR" altLang="en-US" sz="1150" spc="-34" kern="0" dirty="0">
+                <a:solidFill>
+                  <a:srgbClr val="004B8D"/>
+                </a:solidFill>
+                <a:latin typeface="Pretendard ExtraBold" pitchFamily="34" charset="0"/>
+                <a:ea typeface="Pretendard ExtraBold" pitchFamily="34" charset="-127"/>
+                <a:cs typeface="Pretendard ExtraBold" pitchFamily="34" charset="-120"/>
+              </a:rPr>
+              <a:t>하나의 성과</a:t>
+            </a:r>
+            <a:pPr algn="l" indent="0" marL="0">
+              <a:buNone/>
+            </a:pPr>
+            <a:r>
+              <a:rPr lang="ko-KR" altLang="en-US" sz="1150" b="1" spc="-34" kern="0" dirty="0">
+                <a:solidFill>
+                  <a:srgbClr val="0B2147"/>
+                </a:solidFill>
+                <a:latin typeface="Pretendard" pitchFamily="34" charset="0"/>
+                <a:ea typeface="Pretendard" pitchFamily="34" charset="-127"/>
+                <a:cs typeface="Pretendard" pitchFamily="34" charset="-120"/>
+              </a:rPr>
+              <a:t>로</a:t>
+            </a:r>
+            <a:endParaRPr lang="en-US" sz="1150" dirty="0"/>
+          </a:p>
+        </p:txBody>
+      </p:sp>
+      <p:sp>
+        <p:nvSpPr>
+          <p:cNvPr id="109" name="MY VALUES"/>
+          <p:cNvSpPr txBox="1"/>
+          <p:nvPr/>
+        </p:nvSpPr>
+        <p:spPr>
+          <a:xfrm>
+            <a:off x="4422676" y="4165203"/>
+            <a:ext cx="859234" cy="146050"/>
+          </a:xfrm>
+          <a:prstGeom prst="rect">
+            <a:avLst/>
+          </a:prstGeom>
+          <a:noFill/>
+          <a:ln/>
+        </p:spPr>
+        <p:txBody>
+          <a:bodyPr wrap="none" lIns="0" tIns="0" rIns="0" bIns="0" rtlCol="0" anchor="ctr"/>
+          <a:lstStyle/>
+          <a:p>
+            <a:pPr algn="l" indent="0" marL="0">
+              <a:buNone/>
+            </a:pPr>
+            <a:r>
+              <a:rPr lang="ko-KR" altLang="en-US" sz="950" b="1" spc="114" kern="0" dirty="0">
+                <a:solidFill>
+                  <a:srgbClr val="2A78DD"/>
+                </a:solidFill>
+                <a:latin typeface="Pretendard" pitchFamily="34" charset="0"/>
+                <a:ea typeface="Pretendard" pitchFamily="34" charset="-127"/>
+                <a:cs typeface="Pretendard" pitchFamily="34" charset="-120"/>
+              </a:rPr>
+              <a:t>MY VALUES</a:t>
+            </a:r>
+            <a:endParaRPr lang="en-US" sz="950" dirty="0"/>
+          </a:p>
+        </p:txBody>
+      </p:sp>
+      <p:sp>
+        <p:nvSpPr>
+          <p:cNvPr id="110" name="나의 가치관 · 공동의 목표를 공유하는 협업"/>
+          <p:cNvSpPr txBox="1"/>
+          <p:nvPr/>
+        </p:nvSpPr>
+        <p:spPr>
+          <a:xfrm>
+            <a:off x="5548610" y="4151511"/>
+            <a:ext cx="2353852" cy="165100"/>
+          </a:xfrm>
+          <a:prstGeom prst="rect">
+            <a:avLst/>
+          </a:prstGeom>
+          <a:noFill/>
+          <a:ln/>
+        </p:spPr>
+        <p:txBody>
+          <a:bodyPr wrap="none" lIns="0" tIns="0" rIns="0" bIns="0" rtlCol="0" anchor="ctr"/>
+          <a:lstStyle/>
+          <a:p>
+            <a:pPr algn="l" indent="0" marL="0">
+              <a:buNone/>
+            </a:pPr>
+            <a:r>
+              <a:rPr lang="ko-KR" altLang="en-US" sz="1100" spc="-22" kern="0" dirty="0">
+                <a:solidFill>
+                  <a:srgbClr val="0B2147"/>
+                </a:solidFill>
+                <a:latin typeface="Pretendard ExtraBold" pitchFamily="34" charset="0"/>
+                <a:ea typeface="Pretendard ExtraBold" pitchFamily="34" charset="-127"/>
+                <a:cs typeface="Pretendard ExtraBold" pitchFamily="34" charset="-120"/>
+              </a:rPr>
+              <a:t>나의 가치관</a:t>
             </a:r>
             <a:pPr algn="l" indent="0" marL="0">
               <a:buNone/>
@@ -6506,7 +8063,7 @@
                 <a:ea typeface="Pretendard SemiBold" pitchFamily="34" charset="-127"/>
                 <a:cs typeface="Pretendard SemiBold" pitchFamily="34" charset="-120"/>
               </a:rPr>
-              <a:t>’을 이렇게 이해했습니다</a:t>
+              <a:t> · 공동의 목표를 공유하는 협업</a:t>
             </a:r>
             <a:endParaRPr lang="en-US" sz="1100" dirty="0"/>
           </a:p>
@@ -6514,77 +8071,38 @@
       </p:sp>
       <p:sp>
         <p:nvSpPr>
-          <p:cNvPr id="70" name="사람의 연결"/>
-          <p:cNvSpPr txBox="1"/>
-          <p:nvPr/>
-        </p:nvSpPr>
-        <p:spPr>
-          <a:xfrm>
-            <a:off x="762000" y="2416473"/>
-            <a:ext cx="876697" cy="228600"/>
-          </a:xfrm>
-          <a:prstGeom prst="rect">
-            <a:avLst/>
-          </a:prstGeom>
-          <a:noFill/>
-          <a:ln/>
-        </p:spPr>
-        <p:txBody>
-          <a:bodyPr wrap="none" lIns="0" tIns="0" rIns="0" bIns="0" rtlCol="0" anchor="ctr"/>
-          <a:lstStyle/>
-          <a:p>
-            <a:pPr algn="l" indent="0" marL="0">
-              <a:buNone/>
-            </a:pPr>
-            <a:r>
-              <a:rPr lang="ko-KR" altLang="en-US" sz="1500" spc="-53" kern="0" dirty="0">
-                <a:solidFill>
-                  <a:srgbClr val="0B2147"/>
-                </a:solidFill>
-                <a:latin typeface="Pretendard ExtraBold" pitchFamily="34" charset="0"/>
-                <a:ea typeface="Pretendard ExtraBold" pitchFamily="34" charset="-127"/>
-                <a:cs typeface="Pretendard ExtraBold" pitchFamily="34" charset="-120"/>
-              </a:rPr>
-              <a:t>사람의 연결</a:t>
-            </a:r>
-            <a:endParaRPr lang="en-US" sz="1500" dirty="0"/>
-          </a:p>
-        </p:txBody>
-      </p:sp>
-      <p:sp>
-        <p:nvSpPr>
-          <p:cNvPr id="71" name="참신성"/>
-          <p:cNvSpPr txBox="1"/>
-          <p:nvPr/>
-        </p:nvSpPr>
-        <p:spPr>
-          <a:xfrm>
-            <a:off x="850900" y="2832398"/>
-            <a:ext cx="372467" cy="152400"/>
-          </a:xfrm>
-          <a:prstGeom prst="rect">
-            <a:avLst/>
-          </a:prstGeom>
-          <a:noFill/>
-          <a:ln/>
-        </p:spPr>
-        <p:txBody>
-          <a:bodyPr wrap="none" lIns="0" tIns="0" rIns="0" bIns="0" rtlCol="0" anchor="ctr"/>
-          <a:lstStyle/>
-          <a:p>
-            <a:pPr algn="l" indent="0" marL="0">
-              <a:buNone/>
-            </a:pPr>
-            <a:r>
-              <a:rPr lang="ko-KR" altLang="en-US" sz="1000" b="1" spc="-20" kern="0" dirty="0">
-                <a:solidFill>
-                  <a:srgbClr val="0B2147"/>
+          <p:cNvPr id="111" name="선정 이유"/>
+          <p:cNvSpPr txBox="1"/>
+          <p:nvPr/>
+        </p:nvSpPr>
+        <p:spPr>
+          <a:xfrm>
+            <a:off x="1308100" y="5976739"/>
+            <a:ext cx="544513" cy="152400"/>
+          </a:xfrm>
+          <a:prstGeom prst="rect">
+            <a:avLst/>
+          </a:prstGeom>
+          <a:noFill/>
+          <a:ln/>
+        </p:spPr>
+        <p:txBody>
+          <a:bodyPr wrap="none" lIns="0" tIns="0" rIns="0" bIns="0" rtlCol="0" anchor="ctr"/>
+          <a:lstStyle/>
+          <a:p>
+            <a:pPr algn="l" indent="0" marL="0">
+              <a:buNone/>
+            </a:pPr>
+            <a:r>
+              <a:rPr lang="ko-KR" altLang="en-US" sz="1000" b="1" spc="40" kern="0" dirty="0">
+                <a:solidFill>
+                  <a:srgbClr val="8FD3F5"/>
                 </a:solidFill>
                 <a:latin typeface="Pretendard" pitchFamily="34" charset="0"/>
                 <a:ea typeface="Pretendard" pitchFamily="34" charset="-127"/>
                 <a:cs typeface="Pretendard" pitchFamily="34" charset="-120"/>
               </a:rPr>
-              <a:t>참신성</a:t>
+              <a:t>선정 이유</a:t>
             </a:r>
             <a:endParaRPr lang="en-US" sz="1000" dirty="0"/>
           </a:p>
@@ -6592,1475 +8110,93 @@
       </p:sp>
       <p:sp>
         <p:nvSpPr>
-          <p:cNvPr id="72" name="VS"/>
-          <p:cNvSpPr txBox="1"/>
-          <p:nvPr/>
-        </p:nvSpPr>
-        <p:spPr>
-          <a:xfrm>
-            <a:off x="1382117" y="2836962"/>
-            <a:ext cx="227012" cy="146050"/>
-          </a:xfrm>
-          <a:prstGeom prst="rect">
-            <a:avLst/>
-          </a:prstGeom>
-          <a:noFill/>
-          <a:ln/>
-        </p:spPr>
-        <p:txBody>
-          <a:bodyPr wrap="none" lIns="0" tIns="0" rIns="0" bIns="0" rtlCol="0" anchor="ctr"/>
-          <a:lstStyle/>
-          <a:p>
-            <a:pPr algn="l" indent="0" marL="0">
-              <a:buNone/>
-            </a:pPr>
-            <a:r>
-              <a:rPr lang="ko-KR" altLang="en-US" sz="950" spc="38" kern="0" dirty="0">
-                <a:solidFill>
-                  <a:srgbClr val="6A7487"/>
-                </a:solidFill>
-                <a:latin typeface="Pretendard ExtraBold" pitchFamily="34" charset="0"/>
-                <a:ea typeface="Pretendard ExtraBold" pitchFamily="34" charset="-127"/>
-                <a:cs typeface="Pretendard ExtraBold" pitchFamily="34" charset="-120"/>
-              </a:rPr>
-              <a:t>VS</a:t>
-            </a:r>
-            <a:endParaRPr lang="en-US" sz="950" dirty="0"/>
-          </a:p>
-        </p:txBody>
-      </p:sp>
-      <p:sp>
-        <p:nvSpPr>
-          <p:cNvPr id="73" name="구현 가능성"/>
-          <p:cNvSpPr txBox="1"/>
-          <p:nvPr/>
-        </p:nvSpPr>
-        <p:spPr>
-          <a:xfrm>
-            <a:off x="1888530" y="2832398"/>
-            <a:ext cx="613668" cy="152400"/>
-          </a:xfrm>
-          <a:prstGeom prst="rect">
-            <a:avLst/>
-          </a:prstGeom>
-          <a:noFill/>
-          <a:ln/>
-        </p:spPr>
-        <p:txBody>
-          <a:bodyPr wrap="none" lIns="0" tIns="0" rIns="0" bIns="0" rtlCol="0" anchor="ctr"/>
-          <a:lstStyle/>
-          <a:p>
-            <a:pPr algn="l" indent="0" marL="0">
-              <a:buNone/>
-            </a:pPr>
-            <a:r>
-              <a:rPr lang="ko-KR" altLang="en-US" sz="1000" b="1" spc="-20" kern="0" dirty="0">
-                <a:solidFill>
-                  <a:srgbClr val="0B2147"/>
+          <p:cNvPr id="112" name="서로 다른 사람과 전문성이 하나의 목표로 연결될 때, 기술은 더 큰 가능"/>
+          <p:cNvSpPr txBox="1"/>
+          <p:nvPr/>
+        </p:nvSpPr>
+        <p:spPr>
+          <a:xfrm>
+            <a:off x="1979612" y="5946874"/>
+            <a:ext cx="8908584" cy="215900"/>
+          </a:xfrm>
+          <a:prstGeom prst="rect">
+            <a:avLst/>
+          </a:prstGeom>
+          <a:noFill/>
+          <a:ln/>
+        </p:spPr>
+        <p:txBody>
+          <a:bodyPr wrap="none" lIns="0" tIns="0" rIns="0" bIns="0" rtlCol="0" anchor="ctr"/>
+          <a:lstStyle/>
+          <a:p>
+            <a:pPr algn="l" indent="0" marL="0">
+              <a:buNone/>
+            </a:pPr>
+            <a:r>
+              <a:rPr lang="ko-KR" altLang="en-US" sz="1400" b="1" spc="-42" kern="0" dirty="0">
+                <a:solidFill>
+                  <a:srgbClr val="FFFFFF"/>
                 </a:solidFill>
                 <a:latin typeface="Pretendard" pitchFamily="34" charset="0"/>
                 <a:ea typeface="Pretendard" pitchFamily="34" charset="-127"/>
                 <a:cs typeface="Pretendard" pitchFamily="34" charset="-120"/>
               </a:rPr>
-              <a:t>구현 가능성</a:t>
-            </a:r>
-            <a:endParaRPr lang="en-US" sz="1000" dirty="0"/>
-          </a:p>
-        </p:txBody>
-      </p:sp>
-      <p:sp>
-        <p:nvSpPr>
-          <p:cNvPr id="74" name="서로 다른 의견"/>
-          <p:cNvSpPr txBox="1"/>
-          <p:nvPr/>
-        </p:nvSpPr>
-        <p:spPr>
-          <a:xfrm>
-            <a:off x="609600" y="3108623"/>
-            <a:ext cx="749399" cy="152400"/>
-          </a:xfrm>
-          <a:prstGeom prst="rect">
-            <a:avLst/>
-          </a:prstGeom>
-          <a:noFill/>
-          <a:ln/>
-        </p:spPr>
-        <p:txBody>
-          <a:bodyPr wrap="none" lIns="0" tIns="0" rIns="0" bIns="0" rtlCol="0" anchor="ctr"/>
-          <a:lstStyle/>
-          <a:p>
-            <a:pPr algn="l" indent="0" marL="0">
-              <a:buNone/>
-            </a:pPr>
-            <a:r>
-              <a:rPr lang="ko-KR" altLang="en-US" sz="1000" spc="-20" kern="0" dirty="0">
-                <a:solidFill>
-                  <a:srgbClr val="3D4757"/>
-                </a:solidFill>
-                <a:latin typeface="Pretendard SemiBold" pitchFamily="34" charset="0"/>
-                <a:ea typeface="Pretendard SemiBold" pitchFamily="34" charset="-127"/>
-                <a:cs typeface="Pretendard SemiBold" pitchFamily="34" charset="-120"/>
-              </a:rPr>
-              <a:t>서로 다른 의견</a:t>
-            </a:r>
-            <a:endParaRPr lang="en-US" sz="1000" dirty="0"/>
-          </a:p>
-        </p:txBody>
-      </p:sp>
-      <p:sp>
-        <p:nvSpPr>
-          <p:cNvPr id="75" name="공동의 기준으로 조율해 하나의 목표로"/>
-          <p:cNvSpPr txBox="1"/>
-          <p:nvPr/>
-        </p:nvSpPr>
-        <p:spPr>
-          <a:xfrm>
-            <a:off x="876300" y="3419773"/>
-            <a:ext cx="2189784" cy="177800"/>
-          </a:xfrm>
-          <a:prstGeom prst="rect">
-            <a:avLst/>
-          </a:prstGeom>
-          <a:noFill/>
-          <a:ln/>
-        </p:spPr>
-        <p:txBody>
-          <a:bodyPr wrap="none" lIns="0" tIns="0" rIns="0" bIns="0" rtlCol="0" anchor="ctr"/>
-          <a:lstStyle/>
-          <a:p>
-            <a:pPr algn="l" indent="0" marL="0">
-              <a:buNone/>
-            </a:pPr>
-            <a:r>
-              <a:rPr lang="ko-KR" altLang="en-US" sz="1150" b="1" spc="-34" kern="0" dirty="0">
-                <a:solidFill>
-                  <a:srgbClr val="0B2147"/>
+              <a:t>서로 다른 사람과 전문성이 </a:t>
+            </a:r>
+            <a:pPr algn="l" indent="0" marL="0">
+              <a:buNone/>
+            </a:pPr>
+            <a:r>
+              <a:rPr lang="ko-KR" altLang="en-US" sz="1400" b="1" spc="-42" kern="0" dirty="0">
+                <a:solidFill>
+                  <a:srgbClr val="FDBB30"/>
                 </a:solidFill>
                 <a:latin typeface="Pretendard" pitchFamily="34" charset="0"/>
                 <a:ea typeface="Pretendard" pitchFamily="34" charset="-127"/>
                 <a:cs typeface="Pretendard" pitchFamily="34" charset="-120"/>
               </a:rPr>
-              <a:t>공동의 기준으로 조율해 </a:t>
-            </a:r>
-            <a:pPr algn="l" indent="0" marL="0">
-              <a:buNone/>
-            </a:pPr>
-            <a:r>
-              <a:rPr lang="ko-KR" altLang="en-US" sz="1150" spc="-34" kern="0" dirty="0">
-                <a:solidFill>
-                  <a:srgbClr val="00A94F"/>
-                </a:solidFill>
-                <a:latin typeface="Pretendard ExtraBold" pitchFamily="34" charset="0"/>
-                <a:ea typeface="Pretendard ExtraBold" pitchFamily="34" charset="-127"/>
-                <a:cs typeface="Pretendard ExtraBold" pitchFamily="34" charset="-120"/>
-              </a:rPr>
               <a:t>하나의 목표</a:t>
             </a:r>
             <a:pPr algn="l" indent="0" marL="0">
               <a:buNone/>
             </a:pPr>
             <a:r>
-              <a:rPr lang="ko-KR" altLang="en-US" sz="1150" b="1" spc="-34" kern="0" dirty="0">
-                <a:solidFill>
-                  <a:srgbClr val="0B2147"/>
+              <a:rPr lang="ko-KR" altLang="en-US" sz="1400" b="1" spc="-42" kern="0" dirty="0">
+                <a:solidFill>
+                  <a:srgbClr val="FFFFFF"/>
                 </a:solidFill>
                 <a:latin typeface="Pretendard" pitchFamily="34" charset="0"/>
                 <a:ea typeface="Pretendard" pitchFamily="34" charset="-127"/>
                 <a:cs typeface="Pretendard" pitchFamily="34" charset="-120"/>
               </a:rPr>
-              <a:t>로</a:t>
-            </a:r>
-            <a:endParaRPr lang="en-US" sz="1150" dirty="0"/>
-          </a:p>
-        </p:txBody>
-      </p:sp>
-      <p:sp>
-        <p:nvSpPr>
-          <p:cNvPr id="76" name="우리"/>
-          <p:cNvSpPr txBox="1"/>
-          <p:nvPr/>
-        </p:nvSpPr>
-        <p:spPr>
-          <a:xfrm>
-            <a:off x="5043785" y="2917031"/>
-            <a:ext cx="326330" cy="196850"/>
-          </a:xfrm>
-          <a:prstGeom prst="rect">
-            <a:avLst/>
-          </a:prstGeom>
-          <a:noFill/>
-          <a:ln/>
-        </p:spPr>
-        <p:txBody>
-          <a:bodyPr wrap="none" lIns="0" tIns="0" rIns="0" bIns="0" rtlCol="0" anchor="ctr"/>
-          <a:lstStyle/>
-          <a:p>
-            <a:pPr algn="l" indent="0" marL="0">
-              <a:buNone/>
-            </a:pPr>
-            <a:r>
-              <a:rPr lang="ko-KR" altLang="en-US" sz="1300" spc="-39" kern="0" dirty="0">
-                <a:solidFill>
-                  <a:srgbClr val="FFFFFF"/>
-                </a:solidFill>
-                <a:latin typeface="Pretendard ExtraBold" pitchFamily="34" charset="0"/>
-                <a:ea typeface="Pretendard ExtraBold" pitchFamily="34" charset="-127"/>
-                <a:cs typeface="Pretendard ExtraBold" pitchFamily="34" charset="-120"/>
-              </a:rPr>
-              <a:t>우리</a:t>
-            </a:r>
-            <a:endParaRPr lang="en-US" sz="1300" dirty="0"/>
-          </a:p>
-        </p:txBody>
-      </p:sp>
-      <p:sp>
-        <p:nvSpPr>
-          <p:cNvPr id="77" name="OUR"/>
-          <p:cNvSpPr txBox="1"/>
-          <p:nvPr/>
-        </p:nvSpPr>
-        <p:spPr>
-          <a:xfrm>
-            <a:off x="5676900" y="2679303"/>
-            <a:ext cx="360759" cy="146050"/>
-          </a:xfrm>
-          <a:prstGeom prst="rect">
-            <a:avLst/>
-          </a:prstGeom>
-          <a:noFill/>
-          <a:ln/>
-        </p:spPr>
-        <p:txBody>
-          <a:bodyPr wrap="none" lIns="0" tIns="0" rIns="0" bIns="0" rtlCol="0" anchor="ctr"/>
-          <a:lstStyle/>
-          <a:p>
-            <a:pPr algn="l" indent="0" marL="0">
-              <a:buNone/>
-            </a:pPr>
-            <a:r>
-              <a:rPr lang="ko-KR" altLang="en-US" sz="950" b="1" spc="152" kern="0" dirty="0">
-                <a:solidFill>
-                  <a:srgbClr val="00A94F"/>
+              <a:t>로 연결될 때, 기술은 더 큰 가능성을 발휘하고 </a:t>
+            </a:r>
+            <a:pPr algn="l" indent="0" marL="0">
+              <a:buNone/>
+            </a:pPr>
+            <a:r>
+              <a:rPr lang="ko-KR" altLang="en-US" sz="1400" b="1" spc="-42" kern="0" dirty="0">
+                <a:solidFill>
+                  <a:srgbClr val="FDBB30"/>
                 </a:solidFill>
                 <a:latin typeface="Pretendard" pitchFamily="34" charset="0"/>
                 <a:ea typeface="Pretendard" pitchFamily="34" charset="-127"/>
                 <a:cs typeface="Pretendard" pitchFamily="34" charset="-120"/>
               </a:rPr>
-              <a:t>OUR</a:t>
-            </a:r>
-            <a:endParaRPr lang="en-US" sz="950" dirty="0"/>
-          </a:p>
-        </p:txBody>
-      </p:sp>
-      <p:sp>
-        <p:nvSpPr>
-          <p:cNvPr id="78" name="사람과"/>
-          <p:cNvSpPr txBox="1"/>
-          <p:nvPr/>
-        </p:nvSpPr>
-        <p:spPr>
-          <a:xfrm>
-            <a:off x="5676900" y="2892326"/>
-            <a:ext cx="524768" cy="228600"/>
-          </a:xfrm>
-          <a:prstGeom prst="rect">
-            <a:avLst/>
-          </a:prstGeom>
-          <a:noFill/>
-          <a:ln/>
-        </p:spPr>
-        <p:txBody>
-          <a:bodyPr wrap="none" lIns="0" tIns="0" rIns="0" bIns="0" rtlCol="0" anchor="ctr"/>
-          <a:lstStyle/>
-          <a:p>
-            <a:pPr algn="l" indent="0" marL="0">
-              <a:buNone/>
-            </a:pPr>
-            <a:r>
-              <a:rPr lang="ko-KR" altLang="en-US" sz="1500" spc="-53" kern="0" dirty="0">
-                <a:solidFill>
-                  <a:srgbClr val="0B2147"/>
-                </a:solidFill>
-                <a:latin typeface="Pretendard ExtraBold" pitchFamily="34" charset="0"/>
-                <a:ea typeface="Pretendard ExtraBold" pitchFamily="34" charset="-127"/>
-                <a:cs typeface="Pretendard ExtraBold" pitchFamily="34" charset="-120"/>
-              </a:rPr>
-              <a:t>사람과</a:t>
-            </a:r>
-            <a:endParaRPr lang="en-US" sz="1500" dirty="0"/>
-          </a:p>
-        </p:txBody>
-      </p:sp>
-      <p:sp>
-        <p:nvSpPr>
-          <p:cNvPr id="79" name="전문성의 연결"/>
-          <p:cNvSpPr txBox="1"/>
-          <p:nvPr/>
-        </p:nvSpPr>
-        <p:spPr>
-          <a:xfrm>
-            <a:off x="5676900" y="3130451"/>
-            <a:ext cx="1042884" cy="228600"/>
-          </a:xfrm>
-          <a:prstGeom prst="rect">
-            <a:avLst/>
-          </a:prstGeom>
-          <a:noFill/>
-          <a:ln/>
-        </p:spPr>
-        <p:txBody>
-          <a:bodyPr wrap="none" lIns="0" tIns="0" rIns="0" bIns="0" rtlCol="0" anchor="ctr"/>
-          <a:lstStyle/>
-          <a:p>
-            <a:pPr algn="l" indent="0" marL="0">
-              <a:buNone/>
-            </a:pPr>
-            <a:r>
-              <a:rPr lang="ko-KR" altLang="en-US" sz="1500" spc="-53" kern="0" dirty="0">
-                <a:solidFill>
-                  <a:srgbClr val="0B2147"/>
-                </a:solidFill>
-                <a:latin typeface="Pretendard ExtraBold" pitchFamily="34" charset="0"/>
-                <a:ea typeface="Pretendard ExtraBold" pitchFamily="34" charset="-127"/>
-                <a:cs typeface="Pretendard ExtraBold" pitchFamily="34" charset="-120"/>
-              </a:rPr>
-              <a:t>전문성의 연결</a:t>
-            </a:r>
-            <a:endParaRPr lang="en-US" sz="1500" dirty="0"/>
-          </a:p>
-        </p:txBody>
-      </p:sp>
-      <p:sp>
-        <p:nvSpPr>
-          <p:cNvPr id="80" name="설계"/>
-          <p:cNvSpPr txBox="1"/>
-          <p:nvPr/>
-        </p:nvSpPr>
-        <p:spPr>
-          <a:xfrm>
-            <a:off x="9116120" y="2392164"/>
-            <a:ext cx="265311" cy="152400"/>
-          </a:xfrm>
-          <a:prstGeom prst="rect">
-            <a:avLst/>
-          </a:prstGeom>
-          <a:noFill/>
-          <a:ln/>
-        </p:spPr>
-        <p:txBody>
-          <a:bodyPr wrap="none" lIns="0" tIns="0" rIns="0" bIns="0" rtlCol="0" anchor="ctr"/>
-          <a:lstStyle/>
-          <a:p>
-            <a:pPr algn="l" indent="0" marL="0">
-              <a:buNone/>
-            </a:pPr>
-            <a:r>
-              <a:rPr lang="ko-KR" altLang="en-US" sz="1000" b="1" spc="-20" kern="0" dirty="0">
-                <a:solidFill>
-                  <a:srgbClr val="0B2147"/>
+              <a:t>새로운 미래 가치</a:t>
+            </a:r>
+            <a:pPr algn="l" indent="0" marL="0">
+              <a:buNone/>
+            </a:pPr>
+            <a:r>
+              <a:rPr lang="ko-KR" altLang="en-US" sz="1400" b="1" spc="-42" kern="0" dirty="0">
+                <a:solidFill>
+                  <a:srgbClr val="FFFFFF"/>
                 </a:solidFill>
                 <a:latin typeface="Pretendard" pitchFamily="34" charset="0"/>
                 <a:ea typeface="Pretendard" pitchFamily="34" charset="-127"/>
                 <a:cs typeface="Pretendard" pitchFamily="34" charset="-120"/>
               </a:rPr>
-              <a:t>설계</a:t>
-            </a:r>
-            <a:endParaRPr lang="en-US" sz="1000" dirty="0"/>
-          </a:p>
-        </p:txBody>
-      </p:sp>
-      <p:sp>
-        <p:nvSpPr>
-          <p:cNvPr id="81" name="시공"/>
-          <p:cNvSpPr txBox="1"/>
-          <p:nvPr/>
-        </p:nvSpPr>
-        <p:spPr>
-          <a:xfrm>
-            <a:off x="10396240" y="2813149"/>
-            <a:ext cx="265311" cy="152400"/>
-          </a:xfrm>
-          <a:prstGeom prst="rect">
-            <a:avLst/>
-          </a:prstGeom>
-          <a:noFill/>
-          <a:ln/>
-        </p:spPr>
-        <p:txBody>
-          <a:bodyPr wrap="none" lIns="0" tIns="0" rIns="0" bIns="0" rtlCol="0" anchor="ctr"/>
-          <a:lstStyle/>
-          <a:p>
-            <a:pPr algn="l" indent="0" marL="0">
-              <a:buNone/>
-            </a:pPr>
-            <a:r>
-              <a:rPr lang="ko-KR" altLang="en-US" sz="1000" b="1" spc="-20" kern="0" dirty="0">
-                <a:solidFill>
-                  <a:srgbClr val="0B2147"/>
-                </a:solidFill>
-                <a:latin typeface="Pretendard" pitchFamily="34" charset="0"/>
-                <a:ea typeface="Pretendard" pitchFamily="34" charset="-127"/>
-                <a:cs typeface="Pretendard" pitchFamily="34" charset="-120"/>
-              </a:rPr>
-              <a:t>시공</a:t>
-            </a:r>
-            <a:endParaRPr lang="en-US" sz="1000" dirty="0"/>
-          </a:p>
-        </p:txBody>
-      </p:sp>
-      <p:sp>
-        <p:nvSpPr>
-          <p:cNvPr id="82" name="유관부서"/>
-          <p:cNvSpPr txBox="1"/>
-          <p:nvPr/>
-        </p:nvSpPr>
-        <p:spPr>
-          <a:xfrm>
-            <a:off x="9800084" y="3495080"/>
-            <a:ext cx="479723" cy="152400"/>
-          </a:xfrm>
-          <a:prstGeom prst="rect">
-            <a:avLst/>
-          </a:prstGeom>
-          <a:noFill/>
-          <a:ln/>
-        </p:spPr>
-        <p:txBody>
-          <a:bodyPr wrap="none" lIns="0" tIns="0" rIns="0" bIns="0" rtlCol="0" anchor="ctr"/>
-          <a:lstStyle/>
-          <a:p>
-            <a:pPr algn="l" indent="0" marL="0">
-              <a:buNone/>
-            </a:pPr>
-            <a:r>
-              <a:rPr lang="ko-KR" altLang="en-US" sz="1000" b="1" spc="-20" kern="0" dirty="0">
-                <a:solidFill>
-                  <a:srgbClr val="0B2147"/>
-                </a:solidFill>
-                <a:latin typeface="Pretendard" pitchFamily="34" charset="0"/>
-                <a:ea typeface="Pretendard" pitchFamily="34" charset="-127"/>
-                <a:cs typeface="Pretendard" pitchFamily="34" charset="-120"/>
-              </a:rPr>
-              <a:t>유관부서</a:t>
-            </a:r>
-            <a:endParaRPr lang="en-US" sz="1000" dirty="0"/>
-          </a:p>
-        </p:txBody>
-      </p:sp>
-      <p:sp>
-        <p:nvSpPr>
-          <p:cNvPr id="83" name="발주처"/>
-          <p:cNvSpPr txBox="1"/>
-          <p:nvPr/>
-        </p:nvSpPr>
-        <p:spPr>
-          <a:xfrm>
-            <a:off x="8271272" y="3495080"/>
-            <a:ext cx="372467" cy="152400"/>
-          </a:xfrm>
-          <a:prstGeom prst="rect">
-            <a:avLst/>
-          </a:prstGeom>
-          <a:noFill/>
-          <a:ln/>
-        </p:spPr>
-        <p:txBody>
-          <a:bodyPr wrap="none" lIns="0" tIns="0" rIns="0" bIns="0" rtlCol="0" anchor="ctr"/>
-          <a:lstStyle/>
-          <a:p>
-            <a:pPr algn="l" indent="0" marL="0">
-              <a:buNone/>
-            </a:pPr>
-            <a:r>
-              <a:rPr lang="ko-KR" altLang="en-US" sz="1000" b="1" spc="-20" kern="0" dirty="0">
-                <a:solidFill>
-                  <a:srgbClr val="0B2147"/>
-                </a:solidFill>
-                <a:latin typeface="Pretendard" pitchFamily="34" charset="0"/>
-                <a:ea typeface="Pretendard" pitchFamily="34" charset="-127"/>
-                <a:cs typeface="Pretendard" pitchFamily="34" charset="-120"/>
-              </a:rPr>
-              <a:t>발주처</a:t>
-            </a:r>
-            <a:endParaRPr lang="en-US" sz="1000" dirty="0"/>
-          </a:p>
-        </p:txBody>
-      </p:sp>
-      <p:sp>
-        <p:nvSpPr>
-          <p:cNvPr id="84" name="협력업체"/>
-          <p:cNvSpPr txBox="1"/>
-          <p:nvPr/>
-        </p:nvSpPr>
-        <p:spPr>
-          <a:xfrm>
-            <a:off x="7728694" y="2813149"/>
-            <a:ext cx="479723" cy="152400"/>
-          </a:xfrm>
-          <a:prstGeom prst="rect">
-            <a:avLst/>
-          </a:prstGeom>
-          <a:noFill/>
-          <a:ln/>
-        </p:spPr>
-        <p:txBody>
-          <a:bodyPr wrap="none" lIns="0" tIns="0" rIns="0" bIns="0" rtlCol="0" anchor="ctr"/>
-          <a:lstStyle/>
-          <a:p>
-            <a:pPr algn="l" indent="0" marL="0">
-              <a:buNone/>
-            </a:pPr>
-            <a:r>
-              <a:rPr lang="ko-KR" altLang="en-US" sz="1000" b="1" spc="-20" kern="0" dirty="0">
-                <a:solidFill>
-                  <a:srgbClr val="0B2147"/>
-                </a:solidFill>
-                <a:latin typeface="Pretendard" pitchFamily="34" charset="0"/>
-                <a:ea typeface="Pretendard" pitchFamily="34" charset="-127"/>
-                <a:cs typeface="Pretendard" pitchFamily="34" charset="-120"/>
-              </a:rPr>
-              <a:t>협력업체</a:t>
-            </a:r>
-            <a:endParaRPr lang="en-US" sz="1000" dirty="0"/>
-          </a:p>
-        </p:txBody>
-      </p:sp>
-      <p:sp>
-        <p:nvSpPr>
-          <p:cNvPr id="85" name="하나의 목표"/>
-          <p:cNvSpPr txBox="1"/>
-          <p:nvPr/>
-        </p:nvSpPr>
-        <p:spPr>
-          <a:xfrm>
-            <a:off x="8890695" y="2827834"/>
-            <a:ext cx="557411" cy="133350"/>
-          </a:xfrm>
-          <a:prstGeom prst="rect">
-            <a:avLst/>
-          </a:prstGeom>
-          <a:noFill/>
-          <a:ln/>
-        </p:spPr>
-        <p:txBody>
-          <a:bodyPr wrap="none" lIns="0" tIns="0" rIns="0" bIns="0" rtlCol="0" anchor="ctr"/>
-          <a:lstStyle/>
-          <a:p>
-            <a:pPr algn="ctr" indent="0" marL="0">
-              <a:buNone/>
-            </a:pPr>
-            <a:r>
-              <a:rPr lang="ko-KR" altLang="en-US" sz="900" b="1" spc="-18" kern="0" dirty="0">
-                <a:solidFill>
-                  <a:srgbClr val="00A94F"/>
-                </a:solidFill>
-                <a:latin typeface="Pretendard" pitchFamily="34" charset="0"/>
-                <a:ea typeface="Pretendard" pitchFamily="34" charset="-127"/>
-                <a:cs typeface="Pretendard" pitchFamily="34" charset="-120"/>
-              </a:rPr>
-              <a:t>하나의 목표</a:t>
-            </a:r>
-            <a:endParaRPr lang="en-US" sz="900" dirty="0"/>
-          </a:p>
-        </p:txBody>
-      </p:sp>
-      <p:sp>
-        <p:nvSpPr>
-          <p:cNvPr id="86" name="프로젝트"/>
-          <p:cNvSpPr txBox="1"/>
-          <p:nvPr/>
-        </p:nvSpPr>
-        <p:spPr>
-          <a:xfrm>
-            <a:off x="8892679" y="2977654"/>
-            <a:ext cx="553343" cy="184150"/>
-          </a:xfrm>
-          <a:prstGeom prst="rect">
-            <a:avLst/>
-          </a:prstGeom>
-          <a:noFill/>
-          <a:ln/>
-        </p:spPr>
-        <p:txBody>
-          <a:bodyPr wrap="none" lIns="0" tIns="0" rIns="0" bIns="0" rtlCol="0" anchor="ctr"/>
-          <a:lstStyle/>
-          <a:p>
-            <a:pPr algn="ctr" indent="0" marL="0">
-              <a:buNone/>
-            </a:pPr>
-            <a:r>
-              <a:rPr lang="ko-KR" altLang="en-US" sz="1200" spc="-48" kern="0" dirty="0">
-                <a:solidFill>
-                  <a:srgbClr val="0B2147"/>
-                </a:solidFill>
-                <a:latin typeface="Pretendard ExtraBold" pitchFamily="34" charset="0"/>
-                <a:ea typeface="Pretendard ExtraBold" pitchFamily="34" charset="-127"/>
-                <a:cs typeface="Pretendard ExtraBold" pitchFamily="34" charset="-120"/>
-              </a:rPr>
-              <a:t>프로젝트</a:t>
-            </a:r>
-            <a:endParaRPr lang="en-US" sz="1200" dirty="0"/>
-          </a:p>
-        </p:txBody>
-      </p:sp>
-      <p:sp>
-        <p:nvSpPr>
-          <p:cNvPr id="87" name="완수"/>
-          <p:cNvSpPr txBox="1"/>
-          <p:nvPr/>
-        </p:nvSpPr>
-        <p:spPr>
-          <a:xfrm>
-            <a:off x="9018290" y="3152874"/>
-            <a:ext cx="302121" cy="184150"/>
-          </a:xfrm>
-          <a:prstGeom prst="rect">
-            <a:avLst/>
-          </a:prstGeom>
-          <a:noFill/>
-          <a:ln/>
-        </p:spPr>
-        <p:txBody>
-          <a:bodyPr wrap="none" lIns="0" tIns="0" rIns="0" bIns="0" rtlCol="0" anchor="ctr"/>
-          <a:lstStyle/>
-          <a:p>
-            <a:pPr algn="ctr" indent="0" marL="0">
-              <a:buNone/>
-            </a:pPr>
-            <a:r>
-              <a:rPr lang="ko-KR" altLang="en-US" sz="1200" spc="-48" kern="0" dirty="0">
-                <a:solidFill>
-                  <a:srgbClr val="0B2147"/>
-                </a:solidFill>
-                <a:latin typeface="Pretendard ExtraBold" pitchFamily="34" charset="0"/>
-                <a:ea typeface="Pretendard ExtraBold" pitchFamily="34" charset="-127"/>
-                <a:cs typeface="Pretendard ExtraBold" pitchFamily="34" charset="-120"/>
-              </a:rPr>
-              <a:t>완수</a:t>
-            </a:r>
-            <a:endParaRPr lang="en-US" sz="1200" dirty="0"/>
-          </a:p>
-        </p:txBody>
-      </p:sp>
-      <p:sp>
-        <p:nvSpPr>
-          <p:cNvPr id="88" name="강점의 연결"/>
-          <p:cNvSpPr txBox="1"/>
-          <p:nvPr/>
-        </p:nvSpPr>
-        <p:spPr>
-          <a:xfrm>
-            <a:off x="762000" y="4200823"/>
-            <a:ext cx="876697" cy="228600"/>
-          </a:xfrm>
-          <a:prstGeom prst="rect">
-            <a:avLst/>
-          </a:prstGeom>
-          <a:noFill/>
-          <a:ln/>
-        </p:spPr>
-        <p:txBody>
-          <a:bodyPr wrap="none" lIns="0" tIns="0" rIns="0" bIns="0" rtlCol="0" anchor="ctr"/>
-          <a:lstStyle/>
-          <a:p>
-            <a:pPr algn="l" indent="0" marL="0">
-              <a:buNone/>
-            </a:pPr>
-            <a:r>
-              <a:rPr lang="ko-KR" altLang="en-US" sz="1500" spc="-53" kern="0" dirty="0">
-                <a:solidFill>
-                  <a:srgbClr val="0B2147"/>
-                </a:solidFill>
-                <a:latin typeface="Pretendard ExtraBold" pitchFamily="34" charset="0"/>
-                <a:ea typeface="Pretendard ExtraBold" pitchFamily="34" charset="-127"/>
-                <a:cs typeface="Pretendard ExtraBold" pitchFamily="34" charset="-120"/>
-              </a:rPr>
-              <a:t>강점의 연결</a:t>
-            </a:r>
-            <a:endParaRPr lang="en-US" sz="1500" dirty="0"/>
-          </a:p>
-        </p:txBody>
-      </p:sp>
-      <p:sp>
-        <p:nvSpPr>
-          <p:cNvPr id="89" name="Dynamo 자동화"/>
-          <p:cNvSpPr txBox="1"/>
-          <p:nvPr/>
-        </p:nvSpPr>
-        <p:spPr>
-          <a:xfrm>
-            <a:off x="850900" y="4616748"/>
-            <a:ext cx="877788" cy="152400"/>
-          </a:xfrm>
-          <a:prstGeom prst="rect">
-            <a:avLst/>
-          </a:prstGeom>
-          <a:noFill/>
-          <a:ln/>
-        </p:spPr>
-        <p:txBody>
-          <a:bodyPr wrap="none" lIns="0" tIns="0" rIns="0" bIns="0" rtlCol="0" anchor="ctr"/>
-          <a:lstStyle/>
-          <a:p>
-            <a:pPr algn="l" indent="0" marL="0">
-              <a:buNone/>
-            </a:pPr>
-            <a:r>
-              <a:rPr lang="ko-KR" altLang="en-US" sz="1000" b="1" spc="-20" kern="0" dirty="0">
-                <a:solidFill>
-                  <a:srgbClr val="0B2147"/>
-                </a:solidFill>
-                <a:latin typeface="Pretendard" pitchFamily="34" charset="0"/>
-                <a:ea typeface="Pretendard" pitchFamily="34" charset="-127"/>
-                <a:cs typeface="Pretendard" pitchFamily="34" charset="-120"/>
-              </a:rPr>
-              <a:t>Dynamo 자동화</a:t>
-            </a:r>
-            <a:endParaRPr lang="en-US" sz="1000" dirty="0"/>
-          </a:p>
-        </p:txBody>
-      </p:sp>
-      <p:sp>
-        <p:nvSpPr>
-          <p:cNvPr id="90" name="모듈러 설계"/>
-          <p:cNvSpPr txBox="1"/>
-          <p:nvPr/>
-        </p:nvSpPr>
-        <p:spPr>
-          <a:xfrm>
-            <a:off x="2103338" y="4616748"/>
-            <a:ext cx="613668" cy="152400"/>
-          </a:xfrm>
-          <a:prstGeom prst="rect">
-            <a:avLst/>
-          </a:prstGeom>
-          <a:noFill/>
-          <a:ln/>
-        </p:spPr>
-        <p:txBody>
-          <a:bodyPr wrap="none" lIns="0" tIns="0" rIns="0" bIns="0" rtlCol="0" anchor="ctr"/>
-          <a:lstStyle/>
-          <a:p>
-            <a:pPr algn="l" indent="0" marL="0">
-              <a:buNone/>
-            </a:pPr>
-            <a:r>
-              <a:rPr lang="ko-KR" altLang="en-US" sz="1000" b="1" spc="-20" kern="0" dirty="0">
-                <a:solidFill>
-                  <a:srgbClr val="0B2147"/>
-                </a:solidFill>
-                <a:latin typeface="Pretendard" pitchFamily="34" charset="0"/>
-                <a:ea typeface="Pretendard" pitchFamily="34" charset="-127"/>
-                <a:cs typeface="Pretendard" pitchFamily="34" charset="-120"/>
-              </a:rPr>
-              <a:t>모듈러 설계</a:t>
-            </a:r>
-            <a:endParaRPr lang="en-US" sz="1000" dirty="0"/>
-          </a:p>
-        </p:txBody>
-      </p:sp>
-      <p:sp>
-        <p:nvSpPr>
-          <p:cNvPr id="91" name="BIM 모델링"/>
-          <p:cNvSpPr txBox="1"/>
-          <p:nvPr/>
-        </p:nvSpPr>
-        <p:spPr>
-          <a:xfrm>
-            <a:off x="850900" y="4934248"/>
-            <a:ext cx="618331" cy="152400"/>
-          </a:xfrm>
-          <a:prstGeom prst="rect">
-            <a:avLst/>
-          </a:prstGeom>
-          <a:noFill/>
-          <a:ln/>
-        </p:spPr>
-        <p:txBody>
-          <a:bodyPr wrap="none" lIns="0" tIns="0" rIns="0" bIns="0" rtlCol="0" anchor="ctr"/>
-          <a:lstStyle/>
-          <a:p>
-            <a:pPr algn="l" indent="0" marL="0">
-              <a:buNone/>
-            </a:pPr>
-            <a:r>
-              <a:rPr lang="ko-KR" altLang="en-US" sz="1000" b="1" spc="-20" kern="0" dirty="0">
-                <a:solidFill>
-                  <a:srgbClr val="0B2147"/>
-                </a:solidFill>
-                <a:latin typeface="Pretendard" pitchFamily="34" charset="0"/>
-                <a:ea typeface="Pretendard" pitchFamily="34" charset="-127"/>
-                <a:cs typeface="Pretendard" pitchFamily="34" charset="-120"/>
-              </a:rPr>
-              <a:t>BIM 모델링</a:t>
-            </a:r>
-            <a:endParaRPr lang="en-US" sz="1000" dirty="0"/>
-          </a:p>
-        </p:txBody>
-      </p:sp>
-      <p:sp>
-        <p:nvSpPr>
-          <p:cNvPr id="92" name="시나리오 구성"/>
-          <p:cNvSpPr txBox="1"/>
-          <p:nvPr/>
-        </p:nvSpPr>
-        <p:spPr>
-          <a:xfrm>
-            <a:off x="2103338" y="4934248"/>
-            <a:ext cx="720923" cy="152400"/>
-          </a:xfrm>
-          <a:prstGeom prst="rect">
-            <a:avLst/>
-          </a:prstGeom>
-          <a:noFill/>
-          <a:ln/>
-        </p:spPr>
-        <p:txBody>
-          <a:bodyPr wrap="none" lIns="0" tIns="0" rIns="0" bIns="0" rtlCol="0" anchor="ctr"/>
-          <a:lstStyle/>
-          <a:p>
-            <a:pPr algn="l" indent="0" marL="0">
-              <a:buNone/>
-            </a:pPr>
-            <a:r>
-              <a:rPr lang="ko-KR" altLang="en-US" sz="1000" b="1" spc="-20" kern="0" dirty="0">
-                <a:solidFill>
-                  <a:srgbClr val="0B2147"/>
-                </a:solidFill>
-                <a:latin typeface="Pretendard" pitchFamily="34" charset="0"/>
-                <a:ea typeface="Pretendard" pitchFamily="34" charset="-127"/>
-                <a:cs typeface="Pretendard" pitchFamily="34" charset="-120"/>
-              </a:rPr>
-              <a:t>시나리오 구성</a:t>
-            </a:r>
-            <a:endParaRPr lang="en-US" sz="1000" dirty="0"/>
-          </a:p>
-        </p:txBody>
-      </p:sp>
-      <p:sp>
-        <p:nvSpPr>
-          <p:cNvPr id="93" name="각자의 강점을 모아 하나의 성과로"/>
-          <p:cNvSpPr txBox="1"/>
-          <p:nvPr/>
-        </p:nvSpPr>
-        <p:spPr>
-          <a:xfrm>
-            <a:off x="876300" y="5293023"/>
-            <a:ext cx="1931481" cy="177800"/>
-          </a:xfrm>
-          <a:prstGeom prst="rect">
-            <a:avLst/>
-          </a:prstGeom>
-          <a:noFill/>
-          <a:ln/>
-        </p:spPr>
-        <p:txBody>
-          <a:bodyPr wrap="none" lIns="0" tIns="0" rIns="0" bIns="0" rtlCol="0" anchor="ctr"/>
-          <a:lstStyle/>
-          <a:p>
-            <a:pPr algn="l" indent="0" marL="0">
-              <a:buNone/>
-            </a:pPr>
-            <a:r>
-              <a:rPr lang="ko-KR" altLang="en-US" sz="1150" b="1" spc="-34" kern="0" dirty="0">
-                <a:solidFill>
-                  <a:srgbClr val="0B2147"/>
-                </a:solidFill>
-                <a:latin typeface="Pretendard" pitchFamily="34" charset="0"/>
-                <a:ea typeface="Pretendard" pitchFamily="34" charset="-127"/>
-                <a:cs typeface="Pretendard" pitchFamily="34" charset="-120"/>
-              </a:rPr>
-              <a:t>각자의 강점을 모아 </a:t>
-            </a:r>
-            <a:pPr algn="l" indent="0" marL="0">
-              <a:buNone/>
-            </a:pPr>
-            <a:r>
-              <a:rPr lang="ko-KR" altLang="en-US" sz="1150" spc="-34" kern="0" dirty="0">
-                <a:solidFill>
-                  <a:srgbClr val="004B8D"/>
-                </a:solidFill>
-                <a:latin typeface="Pretendard ExtraBold" pitchFamily="34" charset="0"/>
-                <a:ea typeface="Pretendard ExtraBold" pitchFamily="34" charset="-127"/>
-                <a:cs typeface="Pretendard ExtraBold" pitchFamily="34" charset="-120"/>
-              </a:rPr>
-              <a:t>하나의 성과</a:t>
-            </a:r>
-            <a:pPr algn="l" indent="0" marL="0">
-              <a:buNone/>
-            </a:pPr>
-            <a:r>
-              <a:rPr lang="ko-KR" altLang="en-US" sz="1150" b="1" spc="-34" kern="0" dirty="0">
-                <a:solidFill>
-                  <a:srgbClr val="0B2147"/>
-                </a:solidFill>
-                <a:latin typeface="Pretendard" pitchFamily="34" charset="0"/>
-                <a:ea typeface="Pretendard" pitchFamily="34" charset="-127"/>
-                <a:cs typeface="Pretendard" pitchFamily="34" charset="-120"/>
-              </a:rPr>
-              <a:t>로</a:t>
-            </a:r>
-            <a:endParaRPr lang="en-US" sz="1150" dirty="0"/>
-          </a:p>
-        </p:txBody>
-      </p:sp>
-      <p:sp>
-        <p:nvSpPr>
-          <p:cNvPr id="94" name="기술"/>
-          <p:cNvSpPr txBox="1"/>
-          <p:nvPr/>
-        </p:nvSpPr>
-        <p:spPr>
-          <a:xfrm>
-            <a:off x="5043785" y="4745831"/>
-            <a:ext cx="326330" cy="196850"/>
-          </a:xfrm>
-          <a:prstGeom prst="rect">
-            <a:avLst/>
-          </a:prstGeom>
-          <a:noFill/>
-          <a:ln/>
-        </p:spPr>
-        <p:txBody>
-          <a:bodyPr wrap="none" lIns="0" tIns="0" rIns="0" bIns="0" rtlCol="0" anchor="ctr"/>
-          <a:lstStyle/>
-          <a:p>
-            <a:pPr algn="l" indent="0" marL="0">
-              <a:buNone/>
-            </a:pPr>
-            <a:r>
-              <a:rPr lang="ko-KR" altLang="en-US" sz="1300" spc="-39" kern="0" dirty="0">
-                <a:solidFill>
-                  <a:srgbClr val="FFFFFF"/>
-                </a:solidFill>
-                <a:latin typeface="Pretendard ExtraBold" pitchFamily="34" charset="0"/>
-                <a:ea typeface="Pretendard ExtraBold" pitchFamily="34" charset="-127"/>
-                <a:cs typeface="Pretendard ExtraBold" pitchFamily="34" charset="-120"/>
-              </a:rPr>
-              <a:t>기술</a:t>
-            </a:r>
-            <a:endParaRPr lang="en-US" sz="1300" dirty="0"/>
-          </a:p>
-        </p:txBody>
-      </p:sp>
-      <p:sp>
-        <p:nvSpPr>
-          <p:cNvPr id="95" name="TECHNOLOGY"/>
-          <p:cNvSpPr txBox="1"/>
-          <p:nvPr/>
-        </p:nvSpPr>
-        <p:spPr>
-          <a:xfrm>
-            <a:off x="5676900" y="4508103"/>
-            <a:ext cx="1075172" cy="146050"/>
-          </a:xfrm>
-          <a:prstGeom prst="rect">
-            <a:avLst/>
-          </a:prstGeom>
-          <a:noFill/>
-          <a:ln/>
-        </p:spPr>
-        <p:txBody>
-          <a:bodyPr wrap="none" lIns="0" tIns="0" rIns="0" bIns="0" rtlCol="0" anchor="ctr"/>
-          <a:lstStyle/>
-          <a:p>
-            <a:pPr algn="l" indent="0" marL="0">
-              <a:buNone/>
-            </a:pPr>
-            <a:r>
-              <a:rPr lang="ko-KR" altLang="en-US" sz="950" b="1" spc="152" kern="0" dirty="0">
-                <a:solidFill>
-                  <a:srgbClr val="004B8D"/>
-                </a:solidFill>
-                <a:latin typeface="Pretendard" pitchFamily="34" charset="0"/>
-                <a:ea typeface="Pretendard" pitchFamily="34" charset="-127"/>
-                <a:cs typeface="Pretendard" pitchFamily="34" charset="-120"/>
-              </a:rPr>
-              <a:t>TECHNOLOGY</a:t>
-            </a:r>
-            <a:endParaRPr lang="en-US" sz="950" dirty="0"/>
-          </a:p>
-        </p:txBody>
-      </p:sp>
-      <p:sp>
-        <p:nvSpPr>
-          <p:cNvPr id="96" name="미래 가치를"/>
-          <p:cNvSpPr txBox="1"/>
-          <p:nvPr/>
-        </p:nvSpPr>
-        <p:spPr>
-          <a:xfrm>
-            <a:off x="5676900" y="4721126"/>
-            <a:ext cx="876697" cy="228600"/>
-          </a:xfrm>
-          <a:prstGeom prst="rect">
-            <a:avLst/>
-          </a:prstGeom>
-          <a:noFill/>
-          <a:ln/>
-        </p:spPr>
-        <p:txBody>
-          <a:bodyPr wrap="none" lIns="0" tIns="0" rIns="0" bIns="0" rtlCol="0" anchor="ctr"/>
-          <a:lstStyle/>
-          <a:p>
-            <a:pPr algn="l" indent="0" marL="0">
-              <a:buNone/>
-            </a:pPr>
-            <a:r>
-              <a:rPr lang="ko-KR" altLang="en-US" sz="1500" spc="-53" kern="0" dirty="0">
-                <a:solidFill>
-                  <a:srgbClr val="0B2147"/>
-                </a:solidFill>
-                <a:latin typeface="Pretendard ExtraBold" pitchFamily="34" charset="0"/>
-                <a:ea typeface="Pretendard ExtraBold" pitchFamily="34" charset="-127"/>
-                <a:cs typeface="Pretendard ExtraBold" pitchFamily="34" charset="-120"/>
-              </a:rPr>
-              <a:t>미래 가치를</a:t>
-            </a:r>
-            <a:endParaRPr lang="en-US" sz="1500" dirty="0"/>
-          </a:p>
-        </p:txBody>
-      </p:sp>
-      <p:sp>
-        <p:nvSpPr>
-          <p:cNvPr id="97" name="만드는 원동력"/>
-          <p:cNvSpPr txBox="1"/>
-          <p:nvPr/>
-        </p:nvSpPr>
-        <p:spPr>
-          <a:xfrm>
-            <a:off x="5676900" y="4959251"/>
-            <a:ext cx="1042884" cy="228600"/>
-          </a:xfrm>
-          <a:prstGeom prst="rect">
-            <a:avLst/>
-          </a:prstGeom>
-          <a:noFill/>
-          <a:ln/>
-        </p:spPr>
-        <p:txBody>
-          <a:bodyPr wrap="none" lIns="0" tIns="0" rIns="0" bIns="0" rtlCol="0" anchor="ctr"/>
-          <a:lstStyle/>
-          <a:p>
-            <a:pPr algn="l" indent="0" marL="0">
-              <a:buNone/>
-            </a:pPr>
-            <a:r>
-              <a:rPr lang="ko-KR" altLang="en-US" sz="1500" spc="-53" kern="0" dirty="0">
-                <a:solidFill>
-                  <a:srgbClr val="0B2147"/>
-                </a:solidFill>
-                <a:latin typeface="Pretendard ExtraBold" pitchFamily="34" charset="0"/>
-                <a:ea typeface="Pretendard ExtraBold" pitchFamily="34" charset="-127"/>
-                <a:cs typeface="Pretendard ExtraBold" pitchFamily="34" charset="-120"/>
-              </a:rPr>
-              <a:t>만드는 원동력</a:t>
-            </a:r>
-            <a:endParaRPr lang="en-US" sz="1500" dirty="0"/>
-          </a:p>
-        </p:txBody>
-      </p:sp>
-      <p:sp>
-        <p:nvSpPr>
-          <p:cNvPr id="98" name="에너지 원천기술"/>
-          <p:cNvSpPr txBox="1"/>
-          <p:nvPr/>
-        </p:nvSpPr>
-        <p:spPr>
-          <a:xfrm>
-            <a:off x="7526635" y="4373364"/>
-            <a:ext cx="828080" cy="152400"/>
-          </a:xfrm>
-          <a:prstGeom prst="rect">
-            <a:avLst/>
-          </a:prstGeom>
-          <a:noFill/>
-          <a:ln/>
-        </p:spPr>
-        <p:txBody>
-          <a:bodyPr wrap="none" lIns="0" tIns="0" rIns="0" bIns="0" rtlCol="0" anchor="ctr"/>
-          <a:lstStyle/>
-          <a:p>
-            <a:pPr algn="l" indent="0" marL="0">
-              <a:buNone/>
-            </a:pPr>
-            <a:r>
-              <a:rPr lang="ko-KR" altLang="en-US" sz="1000" b="1" spc="-20" kern="0" dirty="0">
-                <a:solidFill>
-                  <a:srgbClr val="004B8D"/>
-                </a:solidFill>
-                <a:latin typeface="Pretendard" pitchFamily="34" charset="0"/>
-                <a:ea typeface="Pretendard" pitchFamily="34" charset="-127"/>
-                <a:cs typeface="Pretendard" pitchFamily="34" charset="-120"/>
-              </a:rPr>
-              <a:t>에너지 원천기술</a:t>
-            </a:r>
-            <a:endParaRPr lang="en-US" sz="1000" dirty="0"/>
-          </a:p>
-        </p:txBody>
-      </p:sp>
-      <p:sp>
-        <p:nvSpPr>
-          <p:cNvPr id="99" name="글로벌 EPC 역량"/>
-          <p:cNvSpPr txBox="1"/>
-          <p:nvPr/>
-        </p:nvSpPr>
-        <p:spPr>
-          <a:xfrm>
-            <a:off x="10117534" y="4373364"/>
-            <a:ext cx="878582" cy="152400"/>
-          </a:xfrm>
-          <a:prstGeom prst="rect">
-            <a:avLst/>
-          </a:prstGeom>
-          <a:noFill/>
-          <a:ln/>
-        </p:spPr>
-        <p:txBody>
-          <a:bodyPr wrap="none" lIns="0" tIns="0" rIns="0" bIns="0" rtlCol="0" anchor="ctr"/>
-          <a:lstStyle/>
-          <a:p>
-            <a:pPr algn="l" indent="0" marL="0">
-              <a:buNone/>
-            </a:pPr>
-            <a:r>
-              <a:rPr lang="ko-KR" altLang="en-US" sz="1000" b="1" spc="-20" kern="0" dirty="0">
-                <a:solidFill>
-                  <a:srgbClr val="004B8D"/>
-                </a:solidFill>
-                <a:latin typeface="Pretendard" pitchFamily="34" charset="0"/>
-                <a:ea typeface="Pretendard" pitchFamily="34" charset="-127"/>
-                <a:cs typeface="Pretendard" pitchFamily="34" charset="-120"/>
-              </a:rPr>
-              <a:t>글로벌 EPC 역량</a:t>
-            </a:r>
-            <a:endParaRPr lang="en-US" sz="1000" dirty="0"/>
-          </a:p>
-        </p:txBody>
-      </p:sp>
-      <p:sp>
-        <p:nvSpPr>
-          <p:cNvPr id="100" name="첨단 산업건축 기술"/>
-          <p:cNvSpPr txBox="1"/>
-          <p:nvPr/>
-        </p:nvSpPr>
-        <p:spPr>
-          <a:xfrm>
-            <a:off x="7459563" y="5160764"/>
-            <a:ext cx="966004" cy="152400"/>
-          </a:xfrm>
-          <a:prstGeom prst="rect">
-            <a:avLst/>
-          </a:prstGeom>
-          <a:noFill/>
-          <a:ln/>
-        </p:spPr>
-        <p:txBody>
-          <a:bodyPr wrap="none" lIns="0" tIns="0" rIns="0" bIns="0" rtlCol="0" anchor="ctr"/>
-          <a:lstStyle/>
-          <a:p>
-            <a:pPr algn="l" indent="0" marL="0">
-              <a:buNone/>
-            </a:pPr>
-            <a:r>
-              <a:rPr lang="ko-KR" altLang="en-US" sz="1000" b="1" spc="-20" kern="0" dirty="0">
-                <a:solidFill>
-                  <a:srgbClr val="004B8D"/>
-                </a:solidFill>
-                <a:latin typeface="Pretendard" pitchFamily="34" charset="0"/>
-                <a:ea typeface="Pretendard" pitchFamily="34" charset="-127"/>
-                <a:cs typeface="Pretendard" pitchFamily="34" charset="-120"/>
-              </a:rPr>
-              <a:t>첨단 산업건축 기술</a:t>
-            </a:r>
-            <a:endParaRPr lang="en-US" sz="1000" dirty="0"/>
-          </a:p>
-        </p:txBody>
-      </p:sp>
-      <p:sp>
-        <p:nvSpPr>
-          <p:cNvPr id="101" name="스마트건설 기술"/>
-          <p:cNvSpPr txBox="1"/>
-          <p:nvPr/>
-        </p:nvSpPr>
-        <p:spPr>
-          <a:xfrm>
-            <a:off x="10142835" y="5160764"/>
-            <a:ext cx="828080" cy="152400"/>
-          </a:xfrm>
-          <a:prstGeom prst="rect">
-            <a:avLst/>
-          </a:prstGeom>
-          <a:noFill/>
-          <a:ln/>
-        </p:spPr>
-        <p:txBody>
-          <a:bodyPr wrap="none" lIns="0" tIns="0" rIns="0" bIns="0" rtlCol="0" anchor="ctr"/>
-          <a:lstStyle/>
-          <a:p>
-            <a:pPr algn="l" indent="0" marL="0">
-              <a:buNone/>
-            </a:pPr>
-            <a:r>
-              <a:rPr lang="ko-KR" altLang="en-US" sz="1000" b="1" spc="-20" kern="0" dirty="0">
-                <a:solidFill>
-                  <a:srgbClr val="004B8D"/>
-                </a:solidFill>
-                <a:latin typeface="Pretendard" pitchFamily="34" charset="0"/>
-                <a:ea typeface="Pretendard" pitchFamily="34" charset="-127"/>
-                <a:cs typeface="Pretendard" pitchFamily="34" charset="-120"/>
-              </a:rPr>
-              <a:t>스마트건설 기술</a:t>
-            </a:r>
-            <a:endParaRPr lang="en-US" sz="1000" dirty="0"/>
-          </a:p>
-        </p:txBody>
-      </p:sp>
-      <p:sp>
-        <p:nvSpPr>
-          <p:cNvPr id="102" name="기술의 연결"/>
-          <p:cNvSpPr txBox="1"/>
-          <p:nvPr/>
-        </p:nvSpPr>
-        <p:spPr>
-          <a:xfrm>
-            <a:off x="8890695" y="4593134"/>
-            <a:ext cx="557411" cy="133350"/>
-          </a:xfrm>
-          <a:prstGeom prst="rect">
-            <a:avLst/>
-          </a:prstGeom>
-          <a:noFill/>
-          <a:ln/>
-        </p:spPr>
-        <p:txBody>
-          <a:bodyPr wrap="none" lIns="0" tIns="0" rIns="0" bIns="0" rtlCol="0" anchor="ctr"/>
-          <a:lstStyle/>
-          <a:p>
-            <a:pPr algn="ctr" indent="0" marL="0">
-              <a:buNone/>
-            </a:pPr>
-            <a:r>
-              <a:rPr lang="ko-KR" altLang="en-US" sz="900" b="1" spc="-18" kern="0" dirty="0">
-                <a:solidFill>
-                  <a:srgbClr val="004B8D"/>
-                </a:solidFill>
-                <a:latin typeface="Pretendard" pitchFamily="34" charset="0"/>
-                <a:ea typeface="Pretendard" pitchFamily="34" charset="-127"/>
-                <a:cs typeface="Pretendard" pitchFamily="34" charset="-120"/>
-              </a:rPr>
-              <a:t>기술의 연결</a:t>
-            </a:r>
-            <a:endParaRPr lang="en-US" sz="900" dirty="0"/>
-          </a:p>
-        </p:txBody>
-      </p:sp>
-      <p:sp>
-        <p:nvSpPr>
-          <p:cNvPr id="103" name="미래 가치"/>
-          <p:cNvSpPr txBox="1"/>
-          <p:nvPr/>
-        </p:nvSpPr>
-        <p:spPr>
-          <a:xfrm>
-            <a:off x="8878689" y="4742954"/>
-            <a:ext cx="581323" cy="184150"/>
-          </a:xfrm>
-          <a:prstGeom prst="rect">
-            <a:avLst/>
-          </a:prstGeom>
-          <a:noFill/>
-          <a:ln/>
-        </p:spPr>
-        <p:txBody>
-          <a:bodyPr wrap="none" lIns="0" tIns="0" rIns="0" bIns="0" rtlCol="0" anchor="ctr"/>
-          <a:lstStyle/>
-          <a:p>
-            <a:pPr algn="ctr" indent="0" marL="0">
-              <a:buNone/>
-            </a:pPr>
-            <a:r>
-              <a:rPr lang="ko-KR" altLang="en-US" sz="1200" spc="-48" kern="0" dirty="0">
-                <a:solidFill>
-                  <a:srgbClr val="0B2147"/>
-                </a:solidFill>
-                <a:latin typeface="Pretendard ExtraBold" pitchFamily="34" charset="0"/>
-                <a:ea typeface="Pretendard ExtraBold" pitchFamily="34" charset="-127"/>
-                <a:cs typeface="Pretendard ExtraBold" pitchFamily="34" charset="-120"/>
-              </a:rPr>
-              <a:t>미래 가치</a:t>
-            </a:r>
-            <a:endParaRPr lang="en-US" sz="1200" dirty="0"/>
-          </a:p>
-        </p:txBody>
-      </p:sp>
-      <p:sp>
-        <p:nvSpPr>
-          <p:cNvPr id="104" name="창출"/>
-          <p:cNvSpPr txBox="1"/>
-          <p:nvPr/>
-        </p:nvSpPr>
-        <p:spPr>
-          <a:xfrm>
-            <a:off x="9018290" y="4918174"/>
-            <a:ext cx="302121" cy="184150"/>
-          </a:xfrm>
-          <a:prstGeom prst="rect">
-            <a:avLst/>
-          </a:prstGeom>
-          <a:noFill/>
-          <a:ln/>
-        </p:spPr>
-        <p:txBody>
-          <a:bodyPr wrap="none" lIns="0" tIns="0" rIns="0" bIns="0" rtlCol="0" anchor="ctr"/>
-          <a:lstStyle/>
-          <a:p>
-            <a:pPr algn="ctr" indent="0" marL="0">
-              <a:buNone/>
-            </a:pPr>
-            <a:r>
-              <a:rPr lang="ko-KR" altLang="en-US" sz="1200" spc="-48" kern="0" dirty="0">
-                <a:solidFill>
-                  <a:srgbClr val="0B2147"/>
-                </a:solidFill>
-                <a:latin typeface="Pretendard ExtraBold" pitchFamily="34" charset="0"/>
-                <a:ea typeface="Pretendard ExtraBold" pitchFamily="34" charset="-127"/>
-                <a:cs typeface="Pretendard ExtraBold" pitchFamily="34" charset="-120"/>
-              </a:rPr>
-              <a:t>창출</a:t>
-            </a:r>
-            <a:endParaRPr lang="en-US" sz="1200" dirty="0"/>
-          </a:p>
-        </p:txBody>
-      </p:sp>
-      <p:sp>
-        <p:nvSpPr>
-          <p:cNvPr id="105" name="선정 이유"/>
-          <p:cNvSpPr txBox="1"/>
-          <p:nvPr/>
-        </p:nvSpPr>
-        <p:spPr>
-          <a:xfrm>
-            <a:off x="1308100" y="6041430"/>
-            <a:ext cx="544513" cy="152400"/>
-          </a:xfrm>
-          <a:prstGeom prst="rect">
-            <a:avLst/>
-          </a:prstGeom>
-          <a:noFill/>
-          <a:ln/>
-        </p:spPr>
-        <p:txBody>
-          <a:bodyPr wrap="none" lIns="0" tIns="0" rIns="0" bIns="0" rtlCol="0" anchor="ctr"/>
-          <a:lstStyle/>
-          <a:p>
-            <a:pPr algn="l" indent="0" marL="0">
-              <a:buNone/>
-            </a:pPr>
-            <a:r>
-              <a:rPr lang="ko-KR" altLang="en-US" sz="1000" b="1" spc="40" kern="0" dirty="0">
-                <a:solidFill>
-                  <a:srgbClr val="8FD3F5"/>
-                </a:solidFill>
-                <a:latin typeface="Pretendard" pitchFamily="34" charset="0"/>
-                <a:ea typeface="Pretendard" pitchFamily="34" charset="-127"/>
-                <a:cs typeface="Pretendard" pitchFamily="34" charset="-120"/>
-              </a:rPr>
-              <a:t>선정 이유</a:t>
-            </a:r>
-            <a:endParaRPr lang="en-US" sz="1000" dirty="0"/>
-          </a:p>
-        </p:txBody>
-      </p:sp>
-      <p:sp>
-        <p:nvSpPr>
-          <p:cNvPr id="106" name="서로 다른 사람과 전문성이 하나의 목표로 연결될 때, 기술은 더 큰 가능"/>
-          <p:cNvSpPr txBox="1"/>
-          <p:nvPr/>
-        </p:nvSpPr>
-        <p:spPr>
-          <a:xfrm>
-            <a:off x="1979612" y="6011565"/>
-            <a:ext cx="8908584" cy="215900"/>
-          </a:xfrm>
-          <a:prstGeom prst="rect">
-            <a:avLst/>
-          </a:prstGeom>
-          <a:noFill/>
-          <a:ln/>
-        </p:spPr>
-        <p:txBody>
-          <a:bodyPr wrap="none" lIns="0" tIns="0" rIns="0" bIns="0" rtlCol="0" anchor="ctr"/>
-          <a:lstStyle/>
-          <a:p>
-            <a:pPr algn="l" indent="0" marL="0">
-              <a:buNone/>
-            </a:pPr>
-            <a:r>
-              <a:rPr lang="ko-KR" altLang="en-US" sz="1400" b="1" spc="-42" kern="0" dirty="0">
-                <a:solidFill>
-                  <a:srgbClr val="FFFFFF"/>
-                </a:solidFill>
-                <a:latin typeface="Pretendard" pitchFamily="34" charset="0"/>
-                <a:ea typeface="Pretendard" pitchFamily="34" charset="-127"/>
-                <a:cs typeface="Pretendard" pitchFamily="34" charset="-120"/>
-              </a:rPr>
-              <a:t>서로 다른 사람과 전문성이 </a:t>
-            </a:r>
-            <a:pPr algn="l" indent="0" marL="0">
-              <a:buNone/>
-            </a:pPr>
-            <a:r>
-              <a:rPr lang="ko-KR" altLang="en-US" sz="1400" b="1" spc="-42" kern="0" dirty="0">
-                <a:solidFill>
-                  <a:srgbClr val="FDBB30"/>
-                </a:solidFill>
-                <a:latin typeface="Pretendard" pitchFamily="34" charset="0"/>
-                <a:ea typeface="Pretendard" pitchFamily="34" charset="-127"/>
-                <a:cs typeface="Pretendard" pitchFamily="34" charset="-120"/>
-              </a:rPr>
-              <a:t>하나의 목표</a:t>
-            </a:r>
-            <a:pPr algn="l" indent="0" marL="0">
-              <a:buNone/>
-            </a:pPr>
-            <a:r>
-              <a:rPr lang="ko-KR" altLang="en-US" sz="1400" b="1" spc="-42" kern="0" dirty="0">
-                <a:solidFill>
-                  <a:srgbClr val="FFFFFF"/>
-                </a:solidFill>
-                <a:latin typeface="Pretendard" pitchFamily="34" charset="0"/>
-                <a:ea typeface="Pretendard" pitchFamily="34" charset="-127"/>
-                <a:cs typeface="Pretendard" pitchFamily="34" charset="-120"/>
-              </a:rPr>
-              <a:t>로 연결될 때, 기술은 더 큰 가능성을 발휘하고 </a:t>
-            </a:r>
-            <a:pPr algn="l" indent="0" marL="0">
-              <a:buNone/>
-            </a:pPr>
-            <a:r>
-              <a:rPr lang="ko-KR" altLang="en-US" sz="1400" b="1" spc="-42" kern="0" dirty="0">
-                <a:solidFill>
-                  <a:srgbClr val="FDBB30"/>
-                </a:solidFill>
-                <a:latin typeface="Pretendard" pitchFamily="34" charset="0"/>
-                <a:ea typeface="Pretendard" pitchFamily="34" charset="-127"/>
-                <a:cs typeface="Pretendard" pitchFamily="34" charset="-120"/>
-              </a:rPr>
-              <a:t>새로운 미래 가치</a:t>
-            </a:r>
-            <a:pPr algn="l" indent="0" marL="0">
-              <a:buNone/>
-            </a:pPr>
-            <a:r>
-              <a:rPr lang="ko-KR" altLang="en-US" sz="1400" b="1" spc="-42" kern="0" dirty="0">
-                <a:solidFill>
-                  <a:srgbClr val="FFFFFF"/>
-                </a:solidFill>
-                <a:latin typeface="Pretendard" pitchFamily="34" charset="0"/>
-                <a:ea typeface="Pretendard" pitchFamily="34" charset="-127"/>
-                <a:cs typeface="Pretendard" pitchFamily="34" charset="-120"/>
-              </a:rPr>
               <a:t>를 만들어간다고 믿습니다.</a:t>
             </a:r>
             <a:endParaRPr lang="en-US" sz="1400" dirty="0"/>
@@ -8069,7 +8205,7 @@
       </p:sp>
       <p:sp>
         <p:nvSpPr>
-          <p:cNvPr id="107" name="2026년 하반기 신입사원 공개채용 | 공사관리 건축 직무 지원자 이현준"/>
+          <p:cNvPr id="113" name="2026년 하반기 신입사원 공개채용 | 공사관리 건축 직무 지원자 이현준"/>
           <p:cNvSpPr txBox="1"/>
           <p:nvPr/>
         </p:nvSpPr>
@@ -8108,7 +8244,7 @@
       </p:sp>
       <p:sp>
         <p:nvSpPr>
-          <p:cNvPr id="108" name="02 / 03"/>
+          <p:cNvPr id="114" name="02 / 03"/>
           <p:cNvSpPr txBox="1"/>
           <p:nvPr/>
         </p:nvSpPr>
